--- a/Arquitectura de Sistemas Computacionales/Clases/Clase 3 - Virtualizacion y contenedores/Presentacion.pptx
+++ b/Arquitectura de Sistemas Computacionales/Clases/Clase 3 - Virtualizacion y contenedores/Presentacion.pptx
@@ -38,6 +38,7 @@
     <p:sldId id="286" r:id="rId37"/>
     <p:sldId id="287" r:id="rId38"/>
     <p:sldId id="288" r:id="rId39"/>
+    <p:sldId id="289" r:id="rId40"/>
   </p:sldIdLst>
   <p:sldSz cx="12191695" cy="6858000" type="screen4x3"/>
   <p:notesSz cx="6858000" cy="9144000"/>
@@ -3596,7 +3597,7 @@
                 </a:solidFill>
                 <a:latin typeface="Calibri"/>
               </a:rPr>
-              <a:t>Recorrer el diagrama de las dos pilas, de abajo hacia arriba</a:t>
+              <a:t>Recorrer el diagrama de las dos pilas, de abajo hacia arriba (1/2)</a:t>
             </a:r>
           </a:p>
         </p:txBody>
@@ -3668,38 +3669,6 @@
                 <a:latin typeface="Calibri"/>
               </a:rPr>
               <a:t>–   Luego por la derecha: el mismo hardware, un solo sistema operativo anfitrion con el motor de contenedores, y encima los contenedores, que ya no traen sistema operativo propio.</a:t>
-            </a:r>
-          </a:p>
-          <a:p>
-            <a:pPr>
-              <a:spcAft>
-                <a:spcPts val="800"/>
-              </a:spcAft>
-            </a:pPr>
-            <a:r>
-              <a:rPr sz="2000" b="0" i="0">
-                <a:solidFill>
-                  <a:srgbClr val="333333"/>
-                </a:solidFill>
-                <a:latin typeface="Calibri"/>
-              </a:rPr>
-              <a:t>–   La pregunta que hay que hacer en voz alta, senalando el hueco, es cual es la caja que desaparecio, y la respuesta es el segundo sistema operativo.</a:t>
-            </a:r>
-          </a:p>
-          <a:p>
-            <a:pPr>
-              <a:spcAft>
-                <a:spcPts val="800"/>
-              </a:spcAft>
-            </a:pPr>
-            <a:r>
-              <a:rPr sz="2000" b="0" i="0">
-                <a:solidFill>
-                  <a:srgbClr val="333333"/>
-                </a:solidFill>
-                <a:latin typeface="Calibri"/>
-              </a:rPr>
-              <a:t>–   Todo lo demas —arranque en segundos y no en minutos, megabytes y no gigabytes— es consecuencia de esa caja que ya no esta, y decirlo en ese orden evita que el estudiante memorice cuatro cifras sueltas sin saber de donde salen.</a:t>
             </a:r>
           </a:p>
         </p:txBody>
@@ -3880,7 +3849,7 @@
                 </a:solidFill>
                 <a:latin typeface="Calibri"/>
               </a:rPr>
-              <a:t>El contenedor: aislamiento sin otro sistema operativo (1/2)</a:t>
+              <a:t>Recorrer el diagrama de las dos pilas, de abajo hacia arriba (2/2)</a:t>
             </a:r>
           </a:p>
         </p:txBody>
@@ -3919,7 +3888,7 @@
                 </a:solidFill>
                 <a:latin typeface="Calibri"/>
               </a:rPr>
-              <a:t>–   Un contenedor parte de una observacion distinta: casi nunca se necesita otro sistema operativo, solo un espacio aislado dentro del que ya existe.</a:t>
+              <a:t>–   La pregunta que hay que hacer en voz alta, senalando el hueco, es cual es la caja que desaparecio, y la respuesta es el segundo sistema operativo.</a:t>
             </a:r>
           </a:p>
           <a:p>
@@ -3935,55 +3904,7 @@
                 </a:solidFill>
                 <a:latin typeface="Calibri"/>
               </a:rPr>
-              <a:t>–   Todos los contenedores de una maquina comparten el kernel del anfitrion, y el aislamiento se consigue con dos mecanismos del propio Linux.</a:t>
-            </a:r>
-          </a:p>
-          <a:p>
-            <a:pPr>
-              <a:spcAft>
-                <a:spcPts val="800"/>
-              </a:spcAft>
-            </a:pPr>
-            <a:r>
-              <a:rPr sz="2000" b="0" i="0">
-                <a:solidFill>
-                  <a:srgbClr val="333333"/>
-                </a:solidFill>
-                <a:latin typeface="Calibri"/>
-              </a:rPr>
-              <a:t>–   Los namespaces le dan a cada contenedor su propia vista de procesos, red, usuarios y sistema de archivos, de modo que dentro del contenedor su proceso principal se ve con el numero 1 y no ve los procesos vecinos.</a:t>
-            </a:r>
-          </a:p>
-          <a:p>
-            <a:pPr>
-              <a:spcAft>
-                <a:spcPts val="800"/>
-              </a:spcAft>
-            </a:pPr>
-            <a:r>
-              <a:rPr sz="2000" b="0" i="0">
-                <a:solidFill>
-                  <a:srgbClr val="333333"/>
-                </a:solidFill>
-                <a:latin typeface="Calibri"/>
-              </a:rPr>
-              <a:t>–   Los cgroups, o grupos de control, limitan cuanta CPU y cuanta memoria puede consumir.</a:t>
-            </a:r>
-          </a:p>
-          <a:p>
-            <a:pPr>
-              <a:spcAft>
-                <a:spcPts val="800"/>
-              </a:spcAft>
-            </a:pPr>
-            <a:r>
-              <a:rPr sz="2000" b="0" i="0">
-                <a:solidFill>
-                  <a:srgbClr val="333333"/>
-                </a:solidFill>
-                <a:latin typeface="Calibri"/>
-              </a:rPr>
-              <a:t>–   Sin sistema operativo propio, los numeros cambian de escala: una imagen basada en Alpine Linux pesa del orden de 5 a 10 MB</a:t>
+              <a:t>–   Todo lo demas —arranque en segundos y no en minutos, megabytes y no gigabytes— es consecuencia de esa caja que ya no esta, y decirlo en ese orden evita que el estudiante memorice cuatro cifras sueltas sin saber de donde salen.</a:t>
             </a:r>
           </a:p>
         </p:txBody>
@@ -4164,7 +4085,7 @@
                 </a:solidFill>
                 <a:latin typeface="Calibri"/>
               </a:rPr>
-              <a:t>El contenedor: aislamiento sin otro sistema operativo (2/2)</a:t>
+              <a:t>El contenedor: aislamiento sin otro sistema operativo (1/2)</a:t>
             </a:r>
           </a:p>
         </p:txBody>
@@ -4203,7 +4124,7 @@
                 </a:solidFill>
                 <a:latin typeface="Calibri"/>
               </a:rPr>
-              <a:t>–   Una imagen slim de un runtime como Node ronda los 150 a 250 MB frente a cerca de 1 GB de la version completa, y el arranque es de decimas de segundo.</a:t>
+              <a:t>–   Un contenedor parte de una observacion distinta: casi nunca se necesita otro sistema operativo, solo un espacio aislado dentro del que ya existe.</a:t>
             </a:r>
           </a:p>
           <a:p>
@@ -4219,7 +4140,7 @@
                 </a:solidFill>
                 <a:latin typeface="Calibri"/>
               </a:rPr>
-              <a:t>–   Aqui esta la respuesta a la frase que hay que evitar: un contenedor no es «una maquina virtual ligera».</a:t>
+              <a:t>–   Los namespaces le dan a cada contenedor su propia vista de procesos, red, usuarios y sistema de archivos, de modo que dentro del contenedor su proceso principal se ve con el numero 1 y no ve los procesos vecinos.</a:t>
             </a:r>
           </a:p>
           <a:p>
@@ -4235,7 +4156,7 @@
                 </a:solidFill>
                 <a:latin typeface="Calibri"/>
               </a:rPr>
-              <a:t>–   La diferencia no es el peso sino el aislamiento; como el kernel es compartido, una vulnerabilidad del kernel puede afectar a todos los contenedores de esa maquina</a:t>
+              <a:t>–   Sin sistema operativo propio, los numeros cambian de escala: una imagen basada en Alpine Linux pesa del orden de 5 a 10 MB</a:t>
             </a:r>
           </a:p>
           <a:p>
@@ -4251,23 +4172,7 @@
                 </a:solidFill>
                 <a:latin typeface="Calibri"/>
               </a:rPr>
-              <a:t>–   Y por eso los proveedores de nube siguen usando maquinas virtuales para separar clientes distintos y ejecutan los contenedores DENTRO de ellas.</a:t>
-            </a:r>
-          </a:p>
-          <a:p>
-            <a:pPr>
-              <a:spcAft>
-                <a:spcPts val="800"/>
-              </a:spcAft>
-            </a:pPr>
-            <a:r>
-              <a:rPr sz="2000" b="0" i="0">
-                <a:solidFill>
-                  <a:srgbClr val="333333"/>
-                </a:solidFill>
-                <a:latin typeface="Calibri"/>
-              </a:rPr>
-              <a:t>–   Contenedores y maquinas virtuales no compiten: se apilan.</a:t>
+              <a:t>–   Una imagen slim de un runtime como Node ronda los 150 a 250 MB frente a cerca de 1 GB de la version completa, y el arranque es de decimas de segundo.</a:t>
             </a:r>
           </a:p>
         </p:txBody>
@@ -4448,7 +4353,7 @@
                 </a:solidFill>
                 <a:latin typeface="Calibri"/>
               </a:rPr>
-              <a:t>Dockerfile, imagen, contenedor y registro: los cuatro terminos (1/2)</a:t>
+              <a:t>El contenedor: aislamiento sin otro sistema operativo (2/2)</a:t>
             </a:r>
           </a:p>
         </p:txBody>
@@ -4487,7 +4392,7 @@
                 </a:solidFill>
                 <a:latin typeface="Calibri"/>
               </a:rPr>
-              <a:t>–   Cuatro terminos se confunden de forma sistematica y conviene fijarlos con una sola analogia.</a:t>
+              <a:t>–   Aqui esta la respuesta a la frase que hay que evitar: un contenedor no es «una maquina virtual ligera».</a:t>
             </a:r>
           </a:p>
           <a:p>
@@ -4503,7 +4408,7 @@
                 </a:solidFill>
                 <a:latin typeface="Calibri"/>
               </a:rPr>
-              <a:t>–   El Dockerfile es la receta: un archivo de texto con instrucciones.</a:t>
+              <a:t>–   La diferencia no es el peso sino el aislamiento; como el kernel es compartido, una vulnerabilidad del kernel puede afectar a todos los contenedores de esa maquina</a:t>
             </a:r>
           </a:p>
           <a:p>
@@ -4519,7 +4424,7 @@
                 </a:solidFill>
                 <a:latin typeface="Calibri"/>
               </a:rPr>
-              <a:t>–   La imagen es el resultado de ejecutar esa receta, un paquete inmutable y de solo lectura con el codigo, las dependencias y la configuracion.</a:t>
+              <a:t>–   Y por eso los proveedores de nube siguen usando maquinas virtuales para separar clientes distintos y ejecutan los contenedores DENTRO de ellas.</a:t>
             </a:r>
           </a:p>
           <a:p>
@@ -4535,39 +4440,7 @@
                 </a:solidFill>
                 <a:latin typeface="Calibri"/>
               </a:rPr>
-              <a:t>–   El contenedor es una instancia en ejecucion de esa imagen, y de una misma imagen se pueden lanzar diez contenedores identicos, igual que de una clase se instancian muchos objetos</a:t>
-            </a:r>
-          </a:p>
-          <a:p>
-            <a:pPr>
-              <a:spcAft>
-                <a:spcPts val="800"/>
-              </a:spcAft>
-            </a:pPr>
-            <a:r>
-              <a:rPr sz="2000" b="0" i="0">
-                <a:solidFill>
-                  <a:srgbClr val="333333"/>
-                </a:solidFill>
-                <a:latin typeface="Calibri"/>
-              </a:rPr>
-              <a:t>–   Esa comparacion funciona bien con estudiantes que ya vieron programacion orientada a objetos.</a:t>
-            </a:r>
-          </a:p>
-          <a:p>
-            <a:pPr>
-              <a:spcAft>
-                <a:spcPts val="800"/>
-              </a:spcAft>
-            </a:pPr>
-            <a:r>
-              <a:rPr sz="2000" b="0" i="0">
-                <a:solidFill>
-                  <a:srgbClr val="333333"/>
-                </a:solidFill>
-                <a:latin typeface="Calibri"/>
-              </a:rPr>
-              <a:t>–   Y el registro, o registry, es el repositorio donde las imagenes se publican y se descargan.</a:t>
+              <a:t>–   Contenedores y maquinas virtuales no compiten: se apilan.</a:t>
             </a:r>
           </a:p>
         </p:txBody>
@@ -4748,7 +4621,7 @@
                 </a:solidFill>
                 <a:latin typeface="Calibri"/>
               </a:rPr>
-              <a:t>Dockerfile, imagen, contenedor y registro: los cuatro terminos (2/2)</a:t>
+              <a:t>Dockerfile, imagen, contenedor y registro: los cuatro terminos (1/2)</a:t>
             </a:r>
           </a:p>
         </p:txBody>
@@ -4787,7 +4660,7 @@
                 </a:solidFill>
                 <a:latin typeface="Calibri"/>
               </a:rPr>
-              <a:t>–   Un detalle que explica el comportamiento diario: la imagen se construye por capas, una por instruccion, y esas capas quedan en cache; si una instruccion no cambio, la reconstruccion la reutiliza en lugar de volver a ejecutarla.</a:t>
+              <a:t>–   El Dockerfile es la receta: un archivo de texto con instrucciones.</a:t>
             </a:r>
           </a:p>
           <a:p>
@@ -4803,7 +4676,7 @@
                 </a:solidFill>
                 <a:latin typeface="Calibri"/>
               </a:rPr>
-              <a:t>–   De ahi la unica optimizacion que hay que ensenar hoy: copiar primero el archivo de dependencias e instalarlas, y solo despues copiar el codigo fuente, porque el codigo cambia en cada commit y las dependencias casi nunca.</a:t>
+              <a:t>–   La imagen es el resultado de ejecutar esa receta, un paquete inmutable y de solo lectura con el codigo, las dependencias y la configuracion.</a:t>
             </a:r>
           </a:p>
           <a:p>
@@ -4819,7 +4692,23 @@
                 </a:solidFill>
                 <a:latin typeface="Calibri"/>
               </a:rPr>
-              <a:t>–   Hacerlo al reves obliga a reinstalar todo en cada construccion y convierte una build de 10 segundos en una de varios minutos.</a:t>
+              <a:t>–   El contenedor es una instancia en ejecucion de esa imagen, y de una misma imagen se pueden lanzar diez contenedores identicos, igual que de una clase se instancian muchos objetos</a:t>
+            </a:r>
+          </a:p>
+          <a:p>
+            <a:pPr>
+              <a:spcAft>
+                <a:spcPts val="800"/>
+              </a:spcAft>
+            </a:pPr>
+            <a:r>
+              <a:rPr sz="2000" b="0" i="0">
+                <a:solidFill>
+                  <a:srgbClr val="333333"/>
+                </a:solidFill>
+                <a:latin typeface="Calibri"/>
+              </a:rPr>
+              <a:t>–   Esa comparacion funciona bien con estudiantes que ya vieron programacion orientada a objetos.</a:t>
             </a:r>
           </a:p>
         </p:txBody>
@@ -5000,7 +4889,7 @@
                 </a:solidFill>
                 <a:latin typeface="Calibri"/>
               </a:rPr>
-              <a:t>Primer ejemplo: el stub de la API de CloudLite (1/3)</a:t>
+              <a:t>Dockerfile, imagen, contenedor y registro: los cuatro terminos (2/2)</a:t>
             </a:r>
           </a:p>
         </p:txBody>
@@ -5039,7 +4928,7 @@
                 </a:solidFill>
                 <a:latin typeface="Calibri"/>
               </a:rPr>
-              <a:t>–   Primer ejemplo concreto en CloudLite.</a:t>
+              <a:t>–   Y el registro, o registry, es el repositorio donde las imagenes se publican y se descargan.</a:t>
             </a:r>
           </a:p>
           <a:p>
@@ -5055,7 +4944,7 @@
                 </a:solidFill>
                 <a:latin typeface="Calibri"/>
               </a:rPr>
-              <a:t>–   En CloudLite Turnos el estudiante contenerizara un stub de su API, es decir una version minima que responde algo verificable: el endpoint GET /health, que devuelve un cuerpo en formato JSON con al menos un campo que se pueda comprobar.</a:t>
+              <a:t>–   Un detalle que explica el comportamiento diario: la imagen se construye por capas, una por instruccion, y esas capas quedan en cache; si una instruccion no cambio, la reconstruccion la reutiliza en lugar de volver a ejecutarla.</a:t>
             </a:r>
           </a:p>
           <a:p>
@@ -5071,71 +4960,7 @@
                 </a:solidFill>
                 <a:latin typeface="Calibri"/>
               </a:rPr>
-              <a:t>–   FROM node:20-alpine elige la imagen base, o sea el punto de partida ya construido por otros, en este caso un Linux minimo con Node instalado; la etiqueta 20-alpine es FIJA y eso importa</a:t>
-            </a:r>
-          </a:p>
-          <a:p>
-            <a:pPr>
-              <a:spcAft>
-                <a:spcPts val="800"/>
-              </a:spcAft>
-            </a:pPr>
-            <a:r>
-              <a:rPr sz="2000" b="0" i="0">
-                <a:solidFill>
-                  <a:srgbClr val="333333"/>
-                </a:solidFill>
-                <a:latin typeface="Calibri"/>
-              </a:rPr>
-              <a:t>–   Porque con latest la imagen de hoy no es la de manana y la reconstruccion deja de ser reproducible.</a:t>
-            </a:r>
-          </a:p>
-          <a:p>
-            <a:pPr>
-              <a:spcAft>
-                <a:spcPts val="800"/>
-              </a:spcAft>
-            </a:pPr>
-            <a:r>
-              <a:rPr sz="2000" b="0" i="0">
-                <a:solidFill>
-                  <a:srgbClr val="333333"/>
-                </a:solidFill>
-                <a:latin typeface="Calibri"/>
-              </a:rPr>
-              <a:t>–   WORKDIR /app fija el directorio dentro del contenedor donde ocurrira todo lo demas.</a:t>
-            </a:r>
-          </a:p>
-          <a:p>
-            <a:pPr>
-              <a:spcAft>
-                <a:spcPts val="800"/>
-              </a:spcAft>
-            </a:pPr>
-            <a:r>
-              <a:rPr sz="2000" b="0" i="0">
-                <a:solidFill>
-                  <a:srgbClr val="333333"/>
-                </a:solidFill>
-                <a:latin typeface="Calibri"/>
-              </a:rPr>
-              <a:t>–   COPY package*.json./ trae solo la lista de dependencias.</a:t>
-            </a:r>
-          </a:p>
-          <a:p>
-            <a:pPr>
-              <a:spcAft>
-                <a:spcPts val="800"/>
-              </a:spcAft>
-            </a:pPr>
-            <a:r>
-              <a:rPr sz="2000" b="0" i="0">
-                <a:solidFill>
-                  <a:srgbClr val="333333"/>
-                </a:solidFill>
-                <a:latin typeface="Calibri"/>
-              </a:rPr>
-              <a:t>–   RUN npm ci --omit=dev las instala dentro de la imagen y no en la maquina del estudiante, lo cual es el punto entero del ejercicio</a:t>
+              <a:t>–   Hacerlo al reves obliga a reinstalar todo en cada construccion y convierte una build de 10 segundos en una de varios minutos.</a:t>
             </a:r>
           </a:p>
         </p:txBody>
@@ -5316,7 +5141,7 @@
                 </a:solidFill>
                 <a:latin typeface="Calibri"/>
               </a:rPr>
-              <a:t>Primer ejemplo: el stub de la API de CloudLite (2/3)</a:t>
+              <a:t>Primer ejemplo: el stub de la API de CloudLite (1/2)</a:t>
             </a:r>
           </a:p>
         </p:txBody>
@@ -5355,7 +5180,7 @@
                 </a:solidFill>
                 <a:latin typeface="Calibri"/>
               </a:rPr>
-              <a:t>–   Porque la dependencia viaja con el artefacto; se usa npm ci y no npm install porque respeta el archivo de bloqueo y por tanto instala exactamente las mismas versiones en cada construccion.</a:t>
+              <a:t>–   En CloudLite Turnos el estudiante contenerizara un stub de su API, es decir una version minima que responde algo verificable: el endpoint GET /health, que devuelve un cuerpo en formato JSON con al menos un campo que se pueda comprobar.</a:t>
             </a:r>
           </a:p>
           <a:p>
@@ -5371,7 +5196,7 @@
                 </a:solidFill>
                 <a:latin typeface="Calibri"/>
               </a:rPr>
-              <a:t>–   COPY.. trae el resto del codigo, y va DESPUES por la razon de cache de la seccion anterior.</a:t>
+              <a:t>–   FROM node:20-alpine elige la imagen base, o sea el punto de partida ya construido por otros, en este caso un Linux minimo con Node instalado; la etiqueta 20-alpine es FIJA y eso importa</a:t>
             </a:r>
           </a:p>
           <a:p>
@@ -5387,7 +5212,7 @@
                 </a:solidFill>
                 <a:latin typeface="Calibri"/>
               </a:rPr>
-              <a:t>–   EXPOSE 8080 documenta en que puerto escucha el proceso.</a:t>
+              <a:t>–   Porque con latest la imagen de hoy no es la de manana y la reconstruccion deja de ser reproducible.</a:t>
             </a:r>
           </a:p>
           <a:p>
@@ -5403,7 +5228,7 @@
                 </a:solidFill>
                 <a:latin typeface="Calibri"/>
               </a:rPr>
-              <a:t>–   Y CMD indica que comando ejecutar cuando el contenedor arranque, uno solo y en primer plano.</a:t>
+              <a:t>–   RUN npm ci --omit=dev las instala dentro de la imagen y no en la maquina del estudiante, lo cual es el punto entero del ejercicio</a:t>
             </a:r>
           </a:p>
           <a:p>
@@ -5419,39 +5244,7 @@
                 </a:solidFill>
                 <a:latin typeface="Calibri"/>
               </a:rPr>
-              <a:t>–   Ese COPY.. tiene una consecuencia que hay que decir mientras esta proyectado, porque vale cinco puntos de la actividad: copia TODO lo que haya en la carpeta, incluido el archivo.env con las credenciales</a:t>
-            </a:r>
-          </a:p>
-          <a:p>
-            <a:pPr>
-              <a:spcAft>
-                <a:spcPts val="800"/>
-              </a:spcAft>
-            </a:pPr>
-            <a:r>
-              <a:rPr sz="2000" b="0" i="0">
-                <a:solidFill>
-                  <a:srgbClr val="333333"/>
-                </a:solidFill>
-                <a:latin typeface="Calibri"/>
-              </a:rPr>
-              <a:t>–   Y una vez dentro de una capa ya no sale, ni siquiera borrandolo en una instruccion posterior.</a:t>
-            </a:r>
-          </a:p>
-          <a:p>
-            <a:pPr>
-              <a:spcAft>
-                <a:spcPts val="800"/>
-              </a:spcAft>
-            </a:pPr>
-            <a:r>
-              <a:rPr sz="2000" b="0" i="0">
-                <a:solidFill>
-                  <a:srgbClr val="333333"/>
-                </a:solidFill>
-                <a:latin typeface="Calibri"/>
-              </a:rPr>
-              <a:t>–   Por eso al lado del Dockerfile va un segundo archivo, el.dockerignore, con al menos.env, node_modules y.git.</a:t>
+              <a:t>–   Porque la dependencia viaja con el artefacto; se usa npm ci y no npm install porque respeta el archivo de bloqueo y por tanto instala exactamente las mismas versiones en cada construccion.</a:t>
             </a:r>
           </a:p>
         </p:txBody>
@@ -5632,7 +5425,7 @@
                 </a:solidFill>
                 <a:latin typeface="Calibri"/>
               </a:rPr>
-              <a:t>Primer ejemplo: el stub de la API de CloudLite (3/3)</a:t>
+              <a:t>Primer ejemplo: el stub de la API de CloudLite (2/2)</a:t>
             </a:r>
           </a:p>
         </p:txBody>
@@ -5671,7 +5464,7 @@
                 </a:solidFill>
                 <a:latin typeface="Calibri"/>
               </a:rPr>
-              <a:t>–   La diapositiva lo proyecta junto al Dockerfile y no como nota al pie a proposito: son dos archivos hermanos en la misma carpeta, y el estudiante que entrega el primero sin el segundo entrega un artefacto que filtra secretos.</a:t>
+              <a:t>–   EXPOSE 8080 documenta en que puerto escucha el proceso.</a:t>
             </a:r>
           </a:p>
           <a:p>
@@ -5687,7 +5480,7 @@
                 </a:solidFill>
                 <a:latin typeface="Calibri"/>
               </a:rPr>
-              <a:t>–   La regla se enuncia en una linea: si haces COPY.., el.dockerignore va al lado y se menciona en la entrega.</a:t>
+              <a:t>–   Ese COPY.. tiene una consecuencia que hay que decir mientras esta proyectado, porque vale cinco puntos de la actividad: copia TODO lo que haya en la carpeta, incluido el archivo.env con las credenciales</a:t>
             </a:r>
           </a:p>
           <a:p>
@@ -5703,7 +5496,7 @@
                 </a:solidFill>
                 <a:latin typeface="Calibri"/>
               </a:rPr>
-              <a:t>–   Un ultimo detalle del que depende media clase: EXPOSE no abre nada, solo documenta.</a:t>
+              <a:t>–   Y una vez dentro de una capa ya no sale, ni siquiera borrandolo en una instruccion posterior.</a:t>
             </a:r>
           </a:p>
           <a:p>
@@ -5719,7 +5512,39 @@
                 </a:solidFill>
                 <a:latin typeface="Calibri"/>
               </a:rPr>
-              <a:t>–   Lo que realmente publica el puerto es la opcion -p al ejecutar, y ese es el tema de la diapositiva siguiente.</a:t>
+              <a:t>–   La diapositiva lo proyecta junto al Dockerfile y no como nota al pie a proposito: son dos archivos hermanos en la misma carpeta, y el estudiante que entrega el primero sin el segundo entrega un artefacto que filtra secretos.</a:t>
+            </a:r>
+          </a:p>
+          <a:p>
+            <a:pPr>
+              <a:spcAft>
+                <a:spcPts val="800"/>
+              </a:spcAft>
+            </a:pPr>
+            <a:r>
+              <a:rPr sz="2000" b="0" i="0">
+                <a:solidFill>
+                  <a:srgbClr val="333333"/>
+                </a:solidFill>
+                <a:latin typeface="Calibri"/>
+              </a:rPr>
+              <a:t>–   La regla se enuncia en una linea: si haces COPY.., el.dockerignore va al lado y se menciona en la entrega.</a:t>
+            </a:r>
+          </a:p>
+          <a:p>
+            <a:pPr>
+              <a:spcAft>
+                <a:spcPts val="800"/>
+              </a:spcAft>
+            </a:pPr>
+            <a:r>
+              <a:rPr sz="2000" b="0" i="0">
+                <a:solidFill>
+                  <a:srgbClr val="333333"/>
+                </a:solidFill>
+                <a:latin typeface="Calibri"/>
+              </a:rPr>
+              <a:t>–   Un ultimo detalle del que depende media clase: EXPOSE no abre nada, solo documenta.</a:t>
             </a:r>
           </a:p>
         </p:txBody>
@@ -6022,38 +5847,6 @@
               <a:t>–   El segundo es la ejecucion: docker run -d -p 8081:8080 --name api cloudlite-api:0.1.0.</a:t>
             </a:r>
           </a:p>
-          <a:p>
-            <a:pPr>
-              <a:spcAft>
-                <a:spcPts val="800"/>
-              </a:spcAft>
-            </a:pPr>
-            <a:r>
-              <a:rPr sz="2000" b="0" i="0">
-                <a:solidFill>
-                  <a:srgbClr val="333333"/>
-                </a:solidFill>
-                <a:latin typeface="Calibri"/>
-              </a:rPr>
-              <a:t>–   El -d lo manda a segundo plano y el --name le da un nombre estable para no andar copiando identificadores.</a:t>
-            </a:r>
-          </a:p>
-          <a:p>
-            <a:pPr>
-              <a:spcAft>
-                <a:spcPts val="800"/>
-              </a:spcAft>
-            </a:pPr>
-            <a:r>
-              <a:rPr sz="2000" b="0" i="0">
-                <a:solidFill>
-                  <a:srgbClr val="333333"/>
-                </a:solidFill>
-                <a:latin typeface="Calibri"/>
-              </a:rPr>
-              <a:t>–   El corazon de la instruccion es el -p, y conviene escribirlo en el tablero con las dos etiquetas encima: el numero de la IZQUIERDA es el del anfitrion, la maquina desde la que uno abre el navegador, y el de la DERECHA es el del contenedor, el mismo del EXPOSE.</a:t>
-            </a:r>
-          </a:p>
         </p:txBody>
       </p:sp>
       <p:sp>
@@ -6265,13 +6058,13 @@
               </a:spcAft>
             </a:pPr>
             <a:r>
-              <a:rPr sz="1900" b="0" i="0">
-                <a:solidFill>
-                  <a:srgbClr val="333333"/>
-                </a:solidFill>
-                <a:latin typeface="Calibri"/>
-              </a:rPr>
-              <a:t>–   Se lee de derecha a izquierda: el puerto 8080 de dentro queda accesible como 8081 desde fuera.</a:t>
+              <a:rPr sz="2000" b="0" i="0">
+                <a:solidFill>
+                  <a:srgbClr val="333333"/>
+                </a:solidFill>
+                <a:latin typeface="Calibri"/>
+              </a:rPr>
+              <a:t>–   El corazon de la instruccion es el -p, y conviene escribirlo en el tablero con las dos etiquetas encima: el numero de la IZQUIERDA es el del anfitrion, la maquina desde la que uno abre el navegador, y el de la DERECHA es el del contenedor, el mismo del EXPOSE.</a:t>
             </a:r>
           </a:p>
           <a:p>
@@ -6281,13 +6074,13 @@
               </a:spcAft>
             </a:pPr>
             <a:r>
-              <a:rPr sz="1900" b="0" i="0">
-                <a:solidFill>
-                  <a:srgbClr val="333333"/>
-                </a:solidFill>
-                <a:latin typeface="Calibri"/>
-              </a:rPr>
-              <a:t>–   En el ejemplo estan a proposito DISTINTOS, porque cuando se escribe -p 8080:8080 los dos lados se confunden y el estudiante no puede decir cual es cual; en la actividad se le pide justamente explicar la diferencia.</a:t>
+              <a:rPr sz="2000" b="0" i="0">
+                <a:solidFill>
+                  <a:srgbClr val="333333"/>
+                </a:solidFill>
+                <a:latin typeface="Calibri"/>
+              </a:rPr>
+              <a:t>–   Se lee de derecha a izquierda: el puerto 8080 de dentro queda accesible como 8081 desde fuera.</a:t>
             </a:r>
           </a:p>
           <a:p>
@@ -6297,13 +6090,13 @@
               </a:spcAft>
             </a:pPr>
             <a:r>
-              <a:rPr sz="1900" b="0" i="0">
-                <a:solidFill>
-                  <a:srgbClr val="333333"/>
-                </a:solidFill>
-                <a:latin typeface="Calibri"/>
-              </a:rPr>
-              <a:t>–   Y hay que anunciar el sintoma de invertirlos, que es lo que hace perder la tarde: docker ps sigue reportando el contenedor como Up y la peticion simplemente no obtiene respuesta o muere con una conexion reiniciada.</a:t>
+              <a:rPr sz="2000" b="0" i="0">
+                <a:solidFill>
+                  <a:srgbClr val="333333"/>
+                </a:solidFill>
+                <a:latin typeface="Calibri"/>
+              </a:rPr>
+              <a:t>–   En el ejemplo estan a proposito DISTINTOS, porque cuando se escribe -p 8080:8080 los dos lados se confunden y el estudiante no puede decir cual es cual; en la actividad se le pide justamente explicar la diferencia.</a:t>
             </a:r>
           </a:p>
           <a:p>
@@ -6313,13 +6106,13 @@
               </a:spcAft>
             </a:pPr>
             <a:r>
-              <a:rPr sz="1900" b="0" i="0">
-                <a:solidFill>
-                  <a:srgbClr val="333333"/>
-                </a:solidFill>
-                <a:latin typeface="Calibri"/>
-              </a:rPr>
-              <a:t>–   El sintoma no senala la causa, y el estudiante busca el error en el codigo cuando esta en una linea del comando.</a:t>
+              <a:rPr sz="2000" b="0" i="0">
+                <a:solidFill>
+                  <a:srgbClr val="333333"/>
+                </a:solidFill>
+                <a:latin typeface="Calibri"/>
+              </a:rPr>
+              <a:t>–   El tercero es la verificacion, y aqui hay un concepto y no solo un comando.</a:t>
             </a:r>
           </a:p>
           <a:p>
@@ -6329,13 +6122,13 @@
               </a:spcAft>
             </a:pPr>
             <a:r>
-              <a:rPr sz="1900" b="0" i="0">
-                <a:solidFill>
-                  <a:srgbClr val="333333"/>
-                </a:solidFill>
-                <a:latin typeface="Calibri"/>
-              </a:rPr>
-              <a:t>–   El tercero es la verificacion, y aqui hay un concepto y no solo un comando.</a:t>
+              <a:rPr sz="2000" b="0" i="0">
+                <a:solidFill>
+                  <a:srgbClr val="333333"/>
+                </a:solidFill>
+                <a:latin typeface="Calibri"/>
+              </a:rPr>
+              <a:t>–   Un endpoint de salud es una ruta cuyo unico proposito es que alguien de afuera pueda preguntar si el servicio esta en condiciones de atender</a:t>
             </a:r>
           </a:p>
           <a:p>
@@ -6345,23 +6138,7 @@
               </a:spcAft>
             </a:pPr>
             <a:r>
-              <a:rPr sz="1900" b="0" i="0">
-                <a:solidFill>
-                  <a:srgbClr val="333333"/>
-                </a:solidFill>
-                <a:latin typeface="Calibri"/>
-              </a:rPr>
-              <a:t>–   Un endpoint de salud es una ruta cuyo unico proposito es que alguien de afuera pueda preguntar si el servicio esta en condiciones de atender</a:t>
-            </a:r>
-          </a:p>
-          <a:p>
-            <a:pPr>
-              <a:spcAft>
-                <a:spcPts val="800"/>
-              </a:spcAft>
-            </a:pPr>
-            <a:r>
-              <a:rPr sz="1900" b="0" i="0">
+              <a:rPr sz="2000" b="0" i="0">
                 <a:solidFill>
                   <a:srgbClr val="333333"/>
                 </a:solidFill>
@@ -6950,22 +6727,6 @@
                 </a:solidFill>
                 <a:latin typeface="Calibri"/>
               </a:rPr>
-              <a:t>–   Por eso el cuerpo lleva al menos un campo verificable, por ejemplo un estado y el nombre del servicio en JSON.</a:t>
-            </a:r>
-          </a:p>
-          <a:p>
-            <a:pPr>
-              <a:spcAft>
-                <a:spcPts val="800"/>
-              </a:spcAft>
-            </a:pPr>
-            <a:r>
-              <a:rPr sz="2000" b="0" i="0">
-                <a:solidFill>
-                  <a:srgbClr val="333333"/>
-                </a:solidFill>
-                <a:latin typeface="Calibri"/>
-              </a:rPr>
               <a:t>–   Se comprueba con curl -i http://localhost:8081/health, y el -i importa: sin el, curl imprime el cuerpo pero esconde el codigo de estado, que es un tercio del contrato.</a:t>
             </a:r>
           </a:p>
@@ -7202,7 +6963,7 @@
                 </a:solidFill>
                 <a:latin typeface="Calibri"/>
               </a:rPr>
-              <a:t>–   Segundo ejemplo concreto.</a:t>
+              <a:t>–   Tras ejecutar el contenedor, el comando docker ps lista lo que esta corriendo con siete columnas</a:t>
             </a:r>
           </a:p>
           <a:p>
@@ -7218,39 +6979,7 @@
                 </a:solidFill>
                 <a:latin typeface="Calibri"/>
               </a:rPr>
-              <a:t>–   Tras ejecutar el contenedor, el comando docker ps lista lo que esta corriendo con siete columnas</a:t>
-            </a:r>
-          </a:p>
-          <a:p>
-            <a:pPr>
-              <a:spcAft>
-                <a:spcPts val="800"/>
-              </a:spcAft>
-            </a:pPr>
-            <a:r>
-              <a:rPr sz="2000" b="0" i="0">
-                <a:solidFill>
-                  <a:srgbClr val="333333"/>
-                </a:solidFill>
-                <a:latin typeface="Calibri"/>
-              </a:rPr>
               <a:t>–   Y leerlas es parte del entregable: identificador del contenedor, imagen de la que proviene, comando en ejecucion, tiempo desde su creacion, estado, puertos publicados y nombre asignado.</a:t>
-            </a:r>
-          </a:p>
-          <a:p>
-            <a:pPr>
-              <a:spcAft>
-                <a:spcPts val="800"/>
-              </a:spcAft>
-            </a:pPr>
-            <a:r>
-              <a:rPr sz="2000" b="0" i="0">
-                <a:solidFill>
-                  <a:srgbClr val="333333"/>
-                </a:solidFill>
-                <a:latin typeface="Calibri"/>
-              </a:rPr>
-              <a:t>–   La columna de estado es la que hay que mirar: si dice Up seguido de un tiempo, el contenedor vive; si dice Exited con un codigo entre parentesis, murio, y ese codigo es la primera pista del problema.</a:t>
             </a:r>
           </a:p>
           <a:p>
@@ -7550,7 +7279,7 @@
                 </a:solidFill>
                 <a:latin typeface="Calibri"/>
               </a:rPr>
-              <a:t>–   Hay dos limites que conviene anunciar ANTES de empezar y no despues, porque cambian como se planifica la hora de taller.</a:t>
+              <a:t>–   El primero: la sesion caduca a una hora y al cerrarse se pierde lo que exista solo alli.</a:t>
             </a:r>
           </a:p>
           <a:p>
@@ -7566,7 +7295,7 @@
                 </a:solidFill>
                 <a:latin typeface="Calibri"/>
               </a:rPr>
-              <a:t>–   El primero: la sesion caduca a una hora y al cerrarse se pierde lo que exista solo alli.</a:t>
+              <a:t>–   El segundo: en el plan gratuito solo se trabaja un escenario a la vez, asi que no sirve dejar dos labs abiertos.</a:t>
             </a:r>
           </a:p>
           <a:p>
@@ -7582,7 +7311,7 @@
                 </a:solidFill>
                 <a:latin typeface="Calibri"/>
               </a:rPr>
-              <a:t>–   El segundo: en el plan gratuito solo se trabaja un escenario a la vez, asi que no sirve dejar dos labs abiertos.</a:t>
+              <a:t>–   La alterna, si Killercoda no carga, es LabEx Docker Playground, que cumple la misma funcion tambien gratis y en el navegador</a:t>
             </a:r>
           </a:p>
           <a:p>
@@ -7598,39 +7327,7 @@
                 </a:solidFill>
                 <a:latin typeface="Calibri"/>
               </a:rPr>
-              <a:t>–   La alterna, si Killercoda no carga, es LabEx Docker Playground, que cumple la misma funcion tambien gratis y en el navegador</a:t>
-            </a:r>
-          </a:p>
-          <a:p>
-            <a:pPr>
-              <a:spcAft>
-                <a:spcPts val="800"/>
-              </a:spcAft>
-            </a:pPr>
-            <a:r>
-              <a:rPr sz="2000" b="0" i="0">
-                <a:solidFill>
-                  <a:srgbClr val="333333"/>
-                </a:solidFill>
-                <a:latin typeface="Calibri"/>
-              </a:rPr>
               <a:t>–   Pero con una restriccion mas dura que conviene mencionar: su plan gratuito da solo tres sesiones al dia, de modo que quien la use para depurar puede quedarse sin intentos justo el dia de la entrega.</a:t>
-            </a:r>
-          </a:p>
-          <a:p>
-            <a:pPr>
-              <a:spcAft>
-                <a:spcPts val="800"/>
-              </a:spcAft>
-            </a:pPr>
-            <a:r>
-              <a:rPr sz="2000" b="0" i="0">
-                <a:solidFill>
-                  <a:srgbClr val="333333"/>
-                </a:solidFill>
-                <a:latin typeface="Calibri"/>
-              </a:rPr>
-              <a:t>–   Por eso la alterna es alterna y no la primera opcion.</a:t>
             </a:r>
           </a:p>
         </p:txBody>
@@ -7811,7 +7508,7 @@
                 </a:solidFill>
                 <a:latin typeface="Calibri"/>
               </a:rPr>
-              <a:t>Preguntas frecuentes y cierre conceptual () (1/3)</a:t>
+              <a:t>Preguntas frecuentes y cierre conceptual () (1/4)</a:t>
             </a:r>
           </a:p>
         </p:txBody>
@@ -7915,38 +7612,6 @@
                 <a:latin typeface="Calibri"/>
               </a:rPr>
               <a:t>–   Y esa es la razon por la cual una base de datos no se trata igual que una API, tema que reaparece en la Clase 7 con almacenamiento y en la Clase 13 al discutir que piezas se pueden replicar.</a:t>
-            </a:r>
-          </a:p>
-          <a:p>
-            <a:pPr>
-              <a:spcAft>
-                <a:spcPts val="800"/>
-              </a:spcAft>
-            </a:pPr>
-            <a:r>
-              <a:rPr sz="2000" b="0" i="0">
-                <a:solidFill>
-                  <a:srgbClr val="333333"/>
-                </a:solidFill>
-                <a:latin typeface="Calibri"/>
-              </a:rPr>
-              <a:t>–   Tercera: entonces la base de datos tambien va en un contenedor.</a:t>
-            </a:r>
-          </a:p>
-          <a:p>
-            <a:pPr>
-              <a:spcAft>
-                <a:spcPts val="800"/>
-              </a:spcAft>
-            </a:pPr>
-            <a:r>
-              <a:rPr sz="2000" b="0" i="0">
-                <a:solidFill>
-                  <a:srgbClr val="333333"/>
-                </a:solidFill>
-                <a:latin typeface="Calibri"/>
-              </a:rPr>
-              <a:t>–   Para desarrollo y para este curso si, y es la practica normal; en produccion la respuesta honesta es que muchas organizaciones prefieren un servicio de datos gestionado, que es precisamente la decision registrada en el ADR de la Clase 2.</a:t>
             </a:r>
           </a:p>
         </p:txBody>
@@ -8127,7 +7792,7 @@
                 </a:solidFill>
                 <a:latin typeface="Calibri"/>
               </a:rPr>
-              <a:t>Preguntas frecuentes y cierre conceptual () (2/3)</a:t>
+              <a:t>Preguntas frecuentes y cierre conceptual () (2/4)</a:t>
             </a:r>
           </a:p>
         </p:txBody>
@@ -8166,7 +7831,7 @@
                 </a:solidFill>
                 <a:latin typeface="Calibri"/>
               </a:rPr>
-              <a:t>–   Antes de cerrar hay que desactivar una colision de vocabulario que arruina la Clase 4 si no se advierte hoy.</a:t>
+              <a:t>–   Tercera: entonces la base de datos tambien va en un contenedor.</a:t>
             </a:r>
           </a:p>
           <a:p>
@@ -8182,7 +7847,7 @@
                 </a:solidFill>
                 <a:latin typeface="Calibri"/>
               </a:rPr>
-              <a:t>–   En el modelo C4, la palabra contenedor significa cualquier cosa que se ejecuta o almacena de forma independiente, como una aplicacion web, una API o una base de datos, y es un concepto de diagrama anterior a Docker.</a:t>
+              <a:t>–   Para desarrollo y para este curso si, y es la practica normal; en produccion la respuesta honesta es que muchas organizaciones prefieren un servicio de datos gestionado, que es precisamente la decision registrada en el ADR de la Clase 2.</a:t>
             </a:r>
           </a:p>
           <a:p>
@@ -8198,7 +7863,7 @@
                 </a:solidFill>
                 <a:latin typeface="Calibri"/>
               </a:rPr>
-              <a:t>–   El contenedor de Docker, en cambio, es un mecanismo concreto de empaquetado y ejecucion.</a:t>
+              <a:t>–   Antes de cerrar hay que desactivar una colision de vocabulario que arruina la Clase 4 si no se advierte hoy.</a:t>
             </a:r>
           </a:p>
           <a:p>
@@ -8214,7 +7879,7 @@
                 </a:solidFill>
                 <a:latin typeface="Calibri"/>
               </a:rPr>
-              <a:t>–   Se parecen y a menudo coinciden uno a uno, pero no son sinonimos: una base de datos gestionada que nadie contenerizo sigue siendo un contenedor en el sentido de C4.</a:t>
+              <a:t>–   En el modelo C4, la palabra contenedor significa cualquier cosa que se ejecuta o almacena de forma independiente, como una aplicacion web, una API o una base de datos, y es un concepto de diagrama anterior a Docker.</a:t>
             </a:r>
           </a:p>
           <a:p>
@@ -8230,7 +7895,7 @@
                 </a:solidFill>
                 <a:latin typeface="Calibri"/>
               </a:rPr>
-              <a:t>–   Decirlo hoy, mientras el estudiante tiene un docker ps en la pantalla, cuesta dos minutos</a:t>
+              <a:t>–   El contenedor de Docker, en cambio, es un mecanismo concreto de empaquetado y ejecucion.</a:t>
             </a:r>
           </a:p>
           <a:p>
@@ -8246,39 +7911,7 @@
                 </a:solidFill>
                 <a:latin typeface="Calibri"/>
               </a:rPr>
-              <a:t>–   No decirlo cuesta media clase de confusion la semana siguiente, cuando se dibuje el C4 Containers de CloudLite y alguien pregunte si debe dockerizar cada caja del diagrama.</a:t>
-            </a:r>
-          </a:p>
-          <a:p>
-            <a:pPr>
-              <a:spcAft>
-                <a:spcPts val="800"/>
-              </a:spcAft>
-            </a:pPr>
-            <a:r>
-              <a:rPr sz="2000" b="0" i="0">
-                <a:solidFill>
-                  <a:srgbClr val="333333"/>
-                </a:solidFill>
-                <a:latin typeface="Calibri"/>
-              </a:rPr>
-              <a:t>–   La respuesta, dicha desde ya, es no.</a:t>
-            </a:r>
-          </a:p>
-          <a:p>
-            <a:pPr>
-              <a:spcAft>
-                <a:spcPts val="800"/>
-              </a:spcAft>
-            </a:pPr>
-            <a:r>
-              <a:rPr sz="2000" b="0" i="0">
-                <a:solidFill>
-                  <a:srgbClr val="333333"/>
-                </a:solidFill>
-                <a:latin typeface="Calibri"/>
-              </a:rPr>
-              <a:t>–   Error tipico del docente que no domina el tema: repetir que un contenedor es una maquina virtual liviana y dejarlo ahi.</a:t>
+              <a:t>–   Se parecen y a menudo coinciden uno a uno, pero no son sinonimos: una base de datos gestionada que nadie contenerizo sigue siendo un contenedor en el sentido de C4.</a:t>
             </a:r>
           </a:p>
         </p:txBody>
@@ -8459,7 +8092,7 @@
                 </a:solidFill>
                 <a:latin typeface="Calibri"/>
               </a:rPr>
-              <a:t>Preguntas frecuentes y cierre conceptual () (3/3)</a:t>
+              <a:t>Preguntas frecuentes y cierre conceptual () (3/4)</a:t>
             </a:r>
           </a:p>
         </p:txBody>
@@ -8498,7 +8131,7 @@
                 </a:solidFill>
                 <a:latin typeface="Calibri"/>
               </a:rPr>
-              <a:t>–   El estudiante que aprende eso concluye que puede correr cualquier cosa en cualquier parte con aislamiento total</a:t>
+              <a:t>–   Decirlo hoy, mientras el estudiante tiene un docker ps en la pantalla, cuesta dos minutos</a:t>
             </a:r>
           </a:p>
           <a:p>
@@ -8514,7 +8147,7 @@
                 </a:solidFill>
                 <a:latin typeface="Calibri"/>
               </a:rPr>
-              <a:t>–   Y en la Clase 6 no entendera por que el kernel compartido es un asunto de seguridad, ni por que existe la recomendacion de no ejecutar el proceso como usuario root dentro del contenedor.</a:t>
+              <a:t>–   No decirlo cuesta media clase de confusion la semana siguiente, cuando se dibuje el C4 Containers de CloudLite y alguien pregunte si debe dockerizar cada caja del diagrama.</a:t>
             </a:r>
           </a:p>
           <a:p>
@@ -8530,7 +8163,7 @@
                 </a:solidFill>
                 <a:latin typeface="Calibri"/>
               </a:rPr>
-              <a:t>–   El segundo error es convertir la clase en un recetario de comandos: dictar docker build, docker run y docker ps al tablero para que todos copien, sin explicar la distincion entre imagen y contenedor ni el modelo de capas.</a:t>
+              <a:t>–   Error tipico del docente que no domina el tema: repetir que un contenedor es una maquina virtual liviana y dejarlo ahi.</a:t>
             </a:r>
           </a:p>
           <a:p>
@@ -8546,7 +8179,7 @@
                 </a:solidFill>
                 <a:latin typeface="Calibri"/>
               </a:rPr>
-              <a:t>–   Un grupo que solo copio comandos consigue la captura del entregable, pero en la Clase 8, cuando el pipeline de integracion continua deba construir una imagen automaticamente, no sabra que esta construyendo ni por que su build tarda cinco minutos</a:t>
+              <a:t>–   El estudiante que aprende eso concluye que puede correr cualquier cosa en cualquier parte con aislamiento total</a:t>
             </a:r>
           </a:p>
           <a:p>
@@ -8562,7 +8195,23 @@
                 </a:solidFill>
                 <a:latin typeface="Calibri"/>
               </a:rPr>
-              <a:t>–   Y en la sustentacion de la Clase 15 describira su arquitectura diciendo que lo metieron en Docker, que no es una decision arquitectonica sino una herramienta sin justificar.</a:t>
+              <a:t>–   Y en la Clase 6 no entendera por que el kernel compartido es un asunto de seguridad, ni por que existe la recomendacion de no ejecutar el proceso como usuario root dentro del contenedor.</a:t>
+            </a:r>
+          </a:p>
+          <a:p>
+            <a:pPr>
+              <a:spcAft>
+                <a:spcPts val="800"/>
+              </a:spcAft>
+            </a:pPr>
+            <a:r>
+              <a:rPr sz="2000" b="0" i="0">
+                <a:solidFill>
+                  <a:srgbClr val="333333"/>
+                </a:solidFill>
+                <a:latin typeface="Calibri"/>
+              </a:rPr>
+              <a:t>–   El segundo error es convertir la clase en un recetario de comandos: dictar docker build, docker run y docker ps al tablero para que todos copien, sin explicar la distincion entre imagen y contenedor ni el modelo de capas.</a:t>
             </a:r>
           </a:p>
         </p:txBody>
@@ -8637,7 +8286,7 @@
         <p:spPr>
           <a:xfrm>
             <a:off x="0" y="0"/>
-            <a:ext cx="12191695" cy="1170432"/>
+            <a:ext cx="12191695" cy="960120"/>
           </a:xfrm>
           <a:prstGeom prst="rect">
             <a:avLst/>
@@ -8679,7 +8328,7 @@
         </p:nvSpPr>
         <p:spPr>
           <a:xfrm>
-            <a:off x="0" y="1170432"/>
+            <a:off x="0" y="960120"/>
             <a:ext cx="12191695" cy="41148"/>
           </a:xfrm>
           <a:prstGeom prst="rect">
@@ -8723,7 +8372,7 @@
         <p:spPr>
           <a:xfrm>
             <a:off x="457200" y="164592"/>
-            <a:ext cx="11277295" cy="384048"/>
+            <a:ext cx="11277295" cy="502920"/>
           </a:xfrm>
           <a:prstGeom prst="rect">
             <a:avLst/>
@@ -8743,7 +8392,7 @@
                 </a:solidFill>
                 <a:latin typeface="Calibri"/>
               </a:rPr>
-              <a:t>Máquinas virtuales vs. contenedores</a:t>
+              <a:t>Preguntas frecuentes y cierre conceptual () (4/4)</a:t>
             </a:r>
           </a:p>
         </p:txBody>
@@ -8756,8 +8405,8 @@
         </p:nvSpPr>
         <p:spPr>
           <a:xfrm>
-            <a:off x="457200" y="566928"/>
-            <a:ext cx="11277295" cy="411480"/>
+            <a:off x="457200" y="1170432"/>
+            <a:ext cx="11277295" cy="5230368"/>
           </a:xfrm>
           <a:prstGeom prst="rect">
             <a:avLst/>
@@ -8770,707 +8419,42 @@
           </a:bodyPr>
           <a:lstStyle/>
           <a:p>
-            <a:r>
-              <a:rPr sz="1400" b="0" i="0">
-                <a:solidFill>
-                  <a:srgbClr val="B8D8EE"/>
-                </a:solidFill>
-                <a:latin typeface="Calibri"/>
-              </a:rPr>
-              <a:t>Misma capacidad de cómputo, distinto nivel de aislamiento</a:t>
-            </a:r>
-          </a:p>
-        </p:txBody>
-      </p:sp>
-      <p:sp>
-        <p:nvSpPr>
-          <p:cNvPr id="6" name="Rounded Rectangle 5"/>
-          <p:cNvSpPr/>
-          <p:nvPr/>
-        </p:nvSpPr>
-        <p:spPr>
-          <a:xfrm>
-            <a:off x="822960" y="1417320"/>
-            <a:ext cx="3931920" cy="457200"/>
-          </a:xfrm>
-          <a:prstGeom prst="roundRect">
-            <a:avLst>
-              <a:gd name="adj" fmla="val 12000"/>
-            </a:avLst>
-          </a:prstGeom>
-          <a:solidFill>
-            <a:srgbClr val="095292"/>
-          </a:solidFill>
-          <a:ln>
-            <a:noFill/>
-          </a:ln>
-        </p:spPr>
-        <p:style>
-          <a:lnRef idx="1">
-            <a:schemeClr val="accent1"/>
-          </a:lnRef>
-          <a:fillRef idx="3">
-            <a:schemeClr val="accent1"/>
-          </a:fillRef>
-          <a:effectRef idx="2">
-            <a:schemeClr val="accent1"/>
-          </a:effectRef>
-          <a:fontRef idx="minor">
-            <a:schemeClr val="lt1"/>
-          </a:fontRef>
-        </p:style>
-        <p:txBody>
-          <a:bodyPr rtlCol="0" anchor="ctr" wrap="square"/>
-          <a:lstStyle/>
-          <a:p>
-            <a:pPr algn="ctr"/>
-            <a:r>
-              <a:rPr sz="1200" b="1" i="0">
-                <a:solidFill>
-                  <a:srgbClr val="FFFFFF"/>
-                </a:solidFill>
-                <a:latin typeface="Calibri"/>
-              </a:rPr>
-              <a:t>Máquinas virtuales</a:t>
-            </a:r>
-          </a:p>
-        </p:txBody>
-      </p:sp>
-      <p:sp>
-        <p:nvSpPr>
-          <p:cNvPr id="7" name="Rounded Rectangle 6"/>
-          <p:cNvSpPr/>
-          <p:nvPr/>
-        </p:nvSpPr>
-        <p:spPr>
-          <a:xfrm>
-            <a:off x="822960" y="2057400"/>
-            <a:ext cx="3931920" cy="594360"/>
-          </a:xfrm>
-          <a:prstGeom prst="roundRect">
-            <a:avLst>
-              <a:gd name="adj" fmla="val 12000"/>
-            </a:avLst>
-          </a:prstGeom>
-          <a:solidFill>
-            <a:srgbClr val="333333"/>
-          </a:solidFill>
-          <a:ln>
-            <a:noFill/>
-          </a:ln>
-        </p:spPr>
-        <p:style>
-          <a:lnRef idx="1">
-            <a:schemeClr val="accent1"/>
-          </a:lnRef>
-          <a:fillRef idx="3">
-            <a:schemeClr val="accent1"/>
-          </a:fillRef>
-          <a:effectRef idx="2">
-            <a:schemeClr val="accent1"/>
-          </a:effectRef>
-          <a:fontRef idx="minor">
-            <a:schemeClr val="lt1"/>
-          </a:fontRef>
-        </p:style>
-        <p:txBody>
-          <a:bodyPr rtlCol="0" anchor="ctr" wrap="square"/>
-          <a:lstStyle/>
-          <a:p>
-            <a:pPr algn="ctr"/>
-            <a:r>
-              <a:rPr sz="1300" b="1" i="0">
-                <a:solidFill>
-                  <a:srgbClr val="FFFFFF"/>
-                </a:solidFill>
-                <a:latin typeface="Calibri"/>
-              </a:rPr>
-              <a:t>Hardware físico</a:t>
-            </a:r>
-          </a:p>
-        </p:txBody>
-      </p:sp>
-      <p:sp>
-        <p:nvSpPr>
-          <p:cNvPr id="8" name="Rounded Rectangle 7"/>
-          <p:cNvSpPr/>
-          <p:nvPr/>
-        </p:nvSpPr>
-        <p:spPr>
-          <a:xfrm>
-            <a:off x="822960" y="2697480"/>
-            <a:ext cx="3931920" cy="594360"/>
-          </a:xfrm>
-          <a:prstGeom prst="roundRect">
-            <a:avLst>
-              <a:gd name="adj" fmla="val 12000"/>
-            </a:avLst>
-          </a:prstGeom>
-          <a:solidFill>
-            <a:srgbClr val="269CCB"/>
-          </a:solidFill>
-          <a:ln>
-            <a:noFill/>
-          </a:ln>
-        </p:spPr>
-        <p:style>
-          <a:lnRef idx="1">
-            <a:schemeClr val="accent1"/>
-          </a:lnRef>
-          <a:fillRef idx="3">
-            <a:schemeClr val="accent1"/>
-          </a:fillRef>
-          <a:effectRef idx="2">
-            <a:schemeClr val="accent1"/>
-          </a:effectRef>
-          <a:fontRef idx="minor">
-            <a:schemeClr val="lt1"/>
-          </a:fontRef>
-        </p:style>
-        <p:txBody>
-          <a:bodyPr rtlCol="0" anchor="ctr" wrap="square"/>
-          <a:lstStyle/>
-          <a:p>
-            <a:pPr algn="ctr"/>
-            <a:r>
-              <a:rPr sz="1300" b="1" i="0">
-                <a:solidFill>
-                  <a:srgbClr val="FFFFFF"/>
-                </a:solidFill>
-                <a:latin typeface="Calibri"/>
-              </a:rPr>
-              <a:t>Hipervisor</a:t>
-            </a:r>
-          </a:p>
-        </p:txBody>
-      </p:sp>
-      <p:sp>
-        <p:nvSpPr>
-          <p:cNvPr id="9" name="Rounded Rectangle 8"/>
-          <p:cNvSpPr/>
-          <p:nvPr/>
-        </p:nvSpPr>
-        <p:spPr>
-          <a:xfrm>
-            <a:off x="822960" y="3337560"/>
-            <a:ext cx="1874519" cy="640080"/>
-          </a:xfrm>
-          <a:prstGeom prst="roundRect">
-            <a:avLst>
-              <a:gd name="adj" fmla="val 12000"/>
-            </a:avLst>
-          </a:prstGeom>
-          <a:solidFill>
-            <a:srgbClr val="269CCB"/>
-          </a:solidFill>
-          <a:ln>
-            <a:noFill/>
-          </a:ln>
-        </p:spPr>
-        <p:style>
-          <a:lnRef idx="1">
-            <a:schemeClr val="accent1"/>
-          </a:lnRef>
-          <a:fillRef idx="3">
-            <a:schemeClr val="accent1"/>
-          </a:fillRef>
-          <a:effectRef idx="2">
-            <a:schemeClr val="accent1"/>
-          </a:effectRef>
-          <a:fontRef idx="minor">
-            <a:schemeClr val="lt1"/>
-          </a:fontRef>
-        </p:style>
-        <p:txBody>
-          <a:bodyPr rtlCol="0" anchor="ctr" wrap="square"/>
-          <a:lstStyle/>
-          <a:p>
-            <a:pPr algn="ctr"/>
-            <a:r>
-              <a:rPr sz="1100" b="1" i="0">
-                <a:solidFill>
-                  <a:srgbClr val="FFFFFF"/>
-                </a:solidFill>
-                <a:latin typeface="Calibri"/>
-              </a:rPr>
-              <a:t>SO invitado A
-(completo)</a:t>
-            </a:r>
-          </a:p>
-        </p:txBody>
-      </p:sp>
-      <p:sp>
-        <p:nvSpPr>
-          <p:cNvPr id="10" name="Rounded Rectangle 9"/>
-          <p:cNvSpPr/>
-          <p:nvPr/>
-        </p:nvSpPr>
-        <p:spPr>
-          <a:xfrm>
-            <a:off x="2880360" y="3337560"/>
-            <a:ext cx="1874519" cy="640080"/>
-          </a:xfrm>
-          <a:prstGeom prst="roundRect">
-            <a:avLst>
-              <a:gd name="adj" fmla="val 12000"/>
-            </a:avLst>
-          </a:prstGeom>
-          <a:solidFill>
-            <a:srgbClr val="269CCB"/>
-          </a:solidFill>
-          <a:ln>
-            <a:noFill/>
-          </a:ln>
-        </p:spPr>
-        <p:style>
-          <a:lnRef idx="1">
-            <a:schemeClr val="accent1"/>
-          </a:lnRef>
-          <a:fillRef idx="3">
-            <a:schemeClr val="accent1"/>
-          </a:fillRef>
-          <a:effectRef idx="2">
-            <a:schemeClr val="accent1"/>
-          </a:effectRef>
-          <a:fontRef idx="minor">
-            <a:schemeClr val="lt1"/>
-          </a:fontRef>
-        </p:style>
-        <p:txBody>
-          <a:bodyPr rtlCol="0" anchor="ctr" wrap="square"/>
-          <a:lstStyle/>
-          <a:p>
-            <a:pPr algn="ctr"/>
-            <a:r>
-              <a:rPr sz="1100" b="1" i="0">
-                <a:solidFill>
-                  <a:srgbClr val="FFFFFF"/>
-                </a:solidFill>
-                <a:latin typeface="Calibri"/>
-              </a:rPr>
-              <a:t>SO invitado B
-(completo)</a:t>
-            </a:r>
-          </a:p>
-        </p:txBody>
-      </p:sp>
-      <p:sp>
-        <p:nvSpPr>
-          <p:cNvPr id="11" name="Rounded Rectangle 10"/>
-          <p:cNvSpPr/>
-          <p:nvPr/>
-        </p:nvSpPr>
-        <p:spPr>
-          <a:xfrm>
-            <a:off x="822960" y="4023360"/>
-            <a:ext cx="1874519" cy="548640"/>
-          </a:xfrm>
-          <a:prstGeom prst="roundRect">
-            <a:avLst>
-              <a:gd name="adj" fmla="val 12000"/>
-            </a:avLst>
-          </a:prstGeom>
-          <a:solidFill>
-            <a:srgbClr val="FFD000"/>
-          </a:solidFill>
-          <a:ln>
-            <a:noFill/>
-          </a:ln>
-        </p:spPr>
-        <p:style>
-          <a:lnRef idx="1">
-            <a:schemeClr val="accent1"/>
-          </a:lnRef>
-          <a:fillRef idx="3">
-            <a:schemeClr val="accent1"/>
-          </a:fillRef>
-          <a:effectRef idx="2">
-            <a:schemeClr val="accent1"/>
-          </a:effectRef>
-          <a:fontRef idx="minor">
-            <a:schemeClr val="lt1"/>
-          </a:fontRef>
-        </p:style>
-        <p:txBody>
-          <a:bodyPr rtlCol="0" anchor="ctr" wrap="square"/>
-          <a:lstStyle/>
-          <a:p>
-            <a:pPr algn="ctr"/>
-            <a:r>
-              <a:rPr sz="1300" b="1" i="0">
-                <a:solidFill>
-                  <a:srgbClr val="095292"/>
-                </a:solidFill>
-                <a:latin typeface="Calibri"/>
-              </a:rPr>
-              <a:t>App A</a:t>
-            </a:r>
-          </a:p>
-        </p:txBody>
-      </p:sp>
-      <p:sp>
-        <p:nvSpPr>
-          <p:cNvPr id="12" name="Rounded Rectangle 11"/>
-          <p:cNvSpPr/>
-          <p:nvPr/>
-        </p:nvSpPr>
-        <p:spPr>
-          <a:xfrm>
-            <a:off x="2880360" y="4023360"/>
-            <a:ext cx="1874519" cy="548640"/>
-          </a:xfrm>
-          <a:prstGeom prst="roundRect">
-            <a:avLst>
-              <a:gd name="adj" fmla="val 12000"/>
-            </a:avLst>
-          </a:prstGeom>
-          <a:solidFill>
-            <a:srgbClr val="FFD000"/>
-          </a:solidFill>
-          <a:ln>
-            <a:noFill/>
-          </a:ln>
-        </p:spPr>
-        <p:style>
-          <a:lnRef idx="1">
-            <a:schemeClr val="accent1"/>
-          </a:lnRef>
-          <a:fillRef idx="3">
-            <a:schemeClr val="accent1"/>
-          </a:fillRef>
-          <a:effectRef idx="2">
-            <a:schemeClr val="accent1"/>
-          </a:effectRef>
-          <a:fontRef idx="minor">
-            <a:schemeClr val="lt1"/>
-          </a:fontRef>
-        </p:style>
-        <p:txBody>
-          <a:bodyPr rtlCol="0" anchor="ctr" wrap="square"/>
-          <a:lstStyle/>
-          <a:p>
-            <a:pPr algn="ctr"/>
-            <a:r>
-              <a:rPr sz="1300" b="1" i="0">
-                <a:solidFill>
-                  <a:srgbClr val="095292"/>
-                </a:solidFill>
-                <a:latin typeface="Calibri"/>
-              </a:rPr>
-              <a:t>App B</a:t>
-            </a:r>
-          </a:p>
-        </p:txBody>
-      </p:sp>
-      <p:sp>
-        <p:nvSpPr>
-          <p:cNvPr id="13" name="Rounded Rectangle 12"/>
-          <p:cNvSpPr/>
-          <p:nvPr/>
-        </p:nvSpPr>
-        <p:spPr>
-          <a:xfrm>
-            <a:off x="7315200" y="1417320"/>
-            <a:ext cx="3931920" cy="457200"/>
-          </a:xfrm>
-          <a:prstGeom prst="roundRect">
-            <a:avLst>
-              <a:gd name="adj" fmla="val 12000"/>
-            </a:avLst>
-          </a:prstGeom>
-          <a:solidFill>
-            <a:srgbClr val="095292"/>
-          </a:solidFill>
-          <a:ln>
-            <a:noFill/>
-          </a:ln>
-        </p:spPr>
-        <p:style>
-          <a:lnRef idx="1">
-            <a:schemeClr val="accent1"/>
-          </a:lnRef>
-          <a:fillRef idx="3">
-            <a:schemeClr val="accent1"/>
-          </a:fillRef>
-          <a:effectRef idx="2">
-            <a:schemeClr val="accent1"/>
-          </a:effectRef>
-          <a:fontRef idx="minor">
-            <a:schemeClr val="lt1"/>
-          </a:fontRef>
-        </p:style>
-        <p:txBody>
-          <a:bodyPr rtlCol="0" anchor="ctr" wrap="square"/>
-          <a:lstStyle/>
-          <a:p>
-            <a:pPr algn="ctr"/>
-            <a:r>
-              <a:rPr sz="1200" b="1" i="0">
-                <a:solidFill>
-                  <a:srgbClr val="FFFFFF"/>
-                </a:solidFill>
-                <a:latin typeface="Calibri"/>
-              </a:rPr>
-              <a:t>Contenedores</a:t>
-            </a:r>
-          </a:p>
-        </p:txBody>
-      </p:sp>
-      <p:sp>
-        <p:nvSpPr>
-          <p:cNvPr id="14" name="Rounded Rectangle 13"/>
-          <p:cNvSpPr/>
-          <p:nvPr/>
-        </p:nvSpPr>
-        <p:spPr>
-          <a:xfrm>
-            <a:off x="7315200" y="2057400"/>
-            <a:ext cx="3931920" cy="594360"/>
-          </a:xfrm>
-          <a:prstGeom prst="roundRect">
-            <a:avLst>
-              <a:gd name="adj" fmla="val 12000"/>
-            </a:avLst>
-          </a:prstGeom>
-          <a:solidFill>
-            <a:srgbClr val="333333"/>
-          </a:solidFill>
-          <a:ln>
-            <a:noFill/>
-          </a:ln>
-        </p:spPr>
-        <p:style>
-          <a:lnRef idx="1">
-            <a:schemeClr val="accent1"/>
-          </a:lnRef>
-          <a:fillRef idx="3">
-            <a:schemeClr val="accent1"/>
-          </a:fillRef>
-          <a:effectRef idx="2">
-            <a:schemeClr val="accent1"/>
-          </a:effectRef>
-          <a:fontRef idx="minor">
-            <a:schemeClr val="lt1"/>
-          </a:fontRef>
-        </p:style>
-        <p:txBody>
-          <a:bodyPr rtlCol="0" anchor="ctr" wrap="square"/>
-          <a:lstStyle/>
-          <a:p>
-            <a:pPr algn="ctr"/>
-            <a:r>
-              <a:rPr sz="1300" b="1" i="0">
-                <a:solidFill>
-                  <a:srgbClr val="FFFFFF"/>
-                </a:solidFill>
-                <a:latin typeface="Calibri"/>
-              </a:rPr>
-              <a:t>Hardware físico</a:t>
-            </a:r>
-          </a:p>
-        </p:txBody>
-      </p:sp>
-      <p:sp>
-        <p:nvSpPr>
-          <p:cNvPr id="15" name="Rounded Rectangle 14"/>
-          <p:cNvSpPr/>
-          <p:nvPr/>
-        </p:nvSpPr>
-        <p:spPr>
-          <a:xfrm>
-            <a:off x="7315200" y="2697480"/>
-            <a:ext cx="3931920" cy="594360"/>
-          </a:xfrm>
-          <a:prstGeom prst="roundRect">
-            <a:avLst>
-              <a:gd name="adj" fmla="val 12000"/>
-            </a:avLst>
-          </a:prstGeom>
-          <a:solidFill>
-            <a:srgbClr val="269CCB"/>
-          </a:solidFill>
-          <a:ln>
-            <a:noFill/>
-          </a:ln>
-        </p:spPr>
-        <p:style>
-          <a:lnRef idx="1">
-            <a:schemeClr val="accent1"/>
-          </a:lnRef>
-          <a:fillRef idx="3">
-            <a:schemeClr val="accent1"/>
-          </a:fillRef>
-          <a:effectRef idx="2">
-            <a:schemeClr val="accent1"/>
-          </a:effectRef>
-          <a:fontRef idx="minor">
-            <a:schemeClr val="lt1"/>
-          </a:fontRef>
-        </p:style>
-        <p:txBody>
-          <a:bodyPr rtlCol="0" anchor="ctr" wrap="square"/>
-          <a:lstStyle/>
-          <a:p>
-            <a:pPr algn="ctr"/>
-            <a:r>
-              <a:rPr sz="1050" b="1" i="0">
-                <a:solidFill>
-                  <a:srgbClr val="FFFFFF"/>
-                </a:solidFill>
-                <a:latin typeface="Calibri"/>
-              </a:rPr>
-              <a:t>SO anfitrión + motor de contenedores (kernel compartido)</a:t>
-            </a:r>
-          </a:p>
-        </p:txBody>
-      </p:sp>
-      <p:sp>
-        <p:nvSpPr>
-          <p:cNvPr id="16" name="Rounded Rectangle 15"/>
-          <p:cNvSpPr/>
-          <p:nvPr/>
-        </p:nvSpPr>
-        <p:spPr>
-          <a:xfrm>
-            <a:off x="7315200" y="3337560"/>
-            <a:ext cx="1874519" cy="640080"/>
-          </a:xfrm>
-          <a:prstGeom prst="roundRect">
-            <a:avLst>
-              <a:gd name="adj" fmla="val 12000"/>
-            </a:avLst>
-          </a:prstGeom>
-          <a:solidFill>
-            <a:srgbClr val="FFD000"/>
-          </a:solidFill>
-          <a:ln>
-            <a:noFill/>
-          </a:ln>
-        </p:spPr>
-        <p:style>
-          <a:lnRef idx="1">
-            <a:schemeClr val="accent1"/>
-          </a:lnRef>
-          <a:fillRef idx="3">
-            <a:schemeClr val="accent1"/>
-          </a:fillRef>
-          <a:effectRef idx="2">
-            <a:schemeClr val="accent1"/>
-          </a:effectRef>
-          <a:fontRef idx="minor">
-            <a:schemeClr val="lt1"/>
-          </a:fontRef>
-        </p:style>
-        <p:txBody>
-          <a:bodyPr rtlCol="0" anchor="ctr" wrap="square"/>
-          <a:lstStyle/>
-          <a:p>
-            <a:pPr algn="ctr"/>
-            <a:r>
-              <a:rPr sz="1100" b="1" i="0">
-                <a:solidFill>
-                  <a:srgbClr val="095292"/>
-                </a:solidFill>
-                <a:latin typeface="Calibri"/>
-              </a:rPr>
-              <a:t>Contenedor A
-(App A)</a:t>
-            </a:r>
-          </a:p>
-        </p:txBody>
-      </p:sp>
-      <p:sp>
-        <p:nvSpPr>
-          <p:cNvPr id="17" name="Rounded Rectangle 16"/>
-          <p:cNvSpPr/>
-          <p:nvPr/>
-        </p:nvSpPr>
-        <p:spPr>
-          <a:xfrm>
-            <a:off x="9372600" y="3337560"/>
-            <a:ext cx="1874519" cy="640080"/>
-          </a:xfrm>
-          <a:prstGeom prst="roundRect">
-            <a:avLst>
-              <a:gd name="adj" fmla="val 12000"/>
-            </a:avLst>
-          </a:prstGeom>
-          <a:solidFill>
-            <a:srgbClr val="FFD000"/>
-          </a:solidFill>
-          <a:ln>
-            <a:noFill/>
-          </a:ln>
-        </p:spPr>
-        <p:style>
-          <a:lnRef idx="1">
-            <a:schemeClr val="accent1"/>
-          </a:lnRef>
-          <a:fillRef idx="3">
-            <a:schemeClr val="accent1"/>
-          </a:fillRef>
-          <a:effectRef idx="2">
-            <a:schemeClr val="accent1"/>
-          </a:effectRef>
-          <a:fontRef idx="minor">
-            <a:schemeClr val="lt1"/>
-          </a:fontRef>
-        </p:style>
-        <p:txBody>
-          <a:bodyPr rtlCol="0" anchor="ctr" wrap="square"/>
-          <a:lstStyle/>
-          <a:p>
-            <a:pPr algn="ctr"/>
-            <a:r>
-              <a:rPr sz="1100" b="1" i="0">
-                <a:solidFill>
-                  <a:srgbClr val="095292"/>
-                </a:solidFill>
-                <a:latin typeface="Calibri"/>
-              </a:rPr>
-              <a:t>Contenedor B
-(App B)</a:t>
-            </a:r>
-          </a:p>
-        </p:txBody>
-      </p:sp>
-      <p:sp>
-        <p:nvSpPr>
-          <p:cNvPr id="18" name="TextBox 17"/>
-          <p:cNvSpPr txBox="1"/>
-          <p:nvPr/>
-        </p:nvSpPr>
-        <p:spPr>
-          <a:xfrm>
-            <a:off x="457200" y="6263640"/>
-            <a:ext cx="11277295" cy="411480"/>
-          </a:xfrm>
-          <a:prstGeom prst="rect">
-            <a:avLst/>
-          </a:prstGeom>
-          <a:noFill/>
-        </p:spPr>
-        <p:txBody>
-          <a:bodyPr wrap="square">
-            <a:spAutoFit/>
-          </a:bodyPr>
-          <a:lstStyle/>
-          <a:p>
-            <a:r>
-              <a:rPr sz="1100" b="0" i="1">
-                <a:solidFill>
-                  <a:srgbClr val="666666"/>
-                </a:solidFill>
-                <a:latin typeface="Calibri"/>
-              </a:rPr>
-              <a:t>VM: cada instancia carga un SO completo (aislamiento fuerte, más pesado). Contenedor: comparte el kernel del anfitrión y solo empaqueta app + dependencias (arranca en segundos, pesa MB no GB).</a:t>
-            </a:r>
-          </a:p>
-        </p:txBody>
-      </p:sp>
-      <p:sp>
-        <p:nvSpPr>
-          <p:cNvPr id="19" name="TextBox 18"/>
+            <a:pPr>
+              <a:spcAft>
+                <a:spcPts val="800"/>
+              </a:spcAft>
+            </a:pPr>
+            <a:r>
+              <a:rPr sz="2000" b="0" i="0">
+                <a:solidFill>
+                  <a:srgbClr val="333333"/>
+                </a:solidFill>
+                <a:latin typeface="Calibri"/>
+              </a:rPr>
+              <a:t>–   Un grupo que solo copio comandos consigue la captura del entregable, pero en la Clase 8, cuando el pipeline de integracion continua deba construir una imagen automaticamente, no sabra que esta construyendo ni por que su build tarda cinco minutos</a:t>
+            </a:r>
+          </a:p>
+          <a:p>
+            <a:pPr>
+              <a:spcAft>
+                <a:spcPts val="800"/>
+              </a:spcAft>
+            </a:pPr>
+            <a:r>
+              <a:rPr sz="2000" b="0" i="0">
+                <a:solidFill>
+                  <a:srgbClr val="333333"/>
+                </a:solidFill>
+                <a:latin typeface="Calibri"/>
+              </a:rPr>
+              <a:t>–   Y en la sustentacion de la Clase 15 describira su arquitectura diciendo que lo metieron en Docker, que no es una decision arquitectonica sino una herramienta sin justificar.</a:t>
+            </a:r>
+          </a:p>
+        </p:txBody>
+      </p:sp>
+      <p:sp>
+        <p:nvSpPr>
+          <p:cNvPr id="6" name="TextBox 5"/>
           <p:cNvSpPr txBox="1"/>
           <p:nvPr/>
         </p:nvSpPr>
@@ -9538,7 +8522,7 @@
         <p:spPr>
           <a:xfrm>
             <a:off x="0" y="0"/>
-            <a:ext cx="12191695" cy="960120"/>
+            <a:ext cx="12191695" cy="1170432"/>
           </a:xfrm>
           <a:prstGeom prst="rect">
             <a:avLst/>
@@ -9580,7 +8564,7 @@
         </p:nvSpPr>
         <p:spPr>
           <a:xfrm>
-            <a:off x="0" y="960120"/>
+            <a:off x="0" y="1170432"/>
             <a:ext cx="12191695" cy="41148"/>
           </a:xfrm>
           <a:prstGeom prst="rect">
@@ -9624,7 +8608,7 @@
         <p:spPr>
           <a:xfrm>
             <a:off x="457200" y="164592"/>
-            <a:ext cx="11277295" cy="502920"/>
+            <a:ext cx="11277295" cy="384048"/>
           </a:xfrm>
           <a:prstGeom prst="rect">
             <a:avLst/>
@@ -9644,322 +8628,60 @@
                 </a:solidFill>
                 <a:latin typeface="Calibri"/>
               </a:rPr>
-              <a:t>Maquina virtual vs contenedor — que cambia de verdad</a:t>
-            </a:r>
-          </a:p>
-        </p:txBody>
-      </p:sp>
-      <p:sp>
-        <p:nvSpPr>
-          <p:cNvPr id="5" name="Rounded Rectangle 4"/>
+              <a:t>Máquinas virtuales vs. contenedores</a:t>
+            </a:r>
+          </a:p>
+        </p:txBody>
+      </p:sp>
+      <p:sp>
+        <p:nvSpPr>
+          <p:cNvPr id="5" name="TextBox 4"/>
+          <p:cNvSpPr txBox="1"/>
+          <p:nvPr/>
+        </p:nvSpPr>
+        <p:spPr>
+          <a:xfrm>
+            <a:off x="457200" y="566928"/>
+            <a:ext cx="11277295" cy="411480"/>
+          </a:xfrm>
+          <a:prstGeom prst="rect">
+            <a:avLst/>
+          </a:prstGeom>
+          <a:noFill/>
+        </p:spPr>
+        <p:txBody>
+          <a:bodyPr wrap="square">
+            <a:spAutoFit/>
+          </a:bodyPr>
+          <a:lstStyle/>
+          <a:p>
+            <a:r>
+              <a:rPr sz="1400" b="0" i="0">
+                <a:solidFill>
+                  <a:srgbClr val="B8D8EE"/>
+                </a:solidFill>
+                <a:latin typeface="Calibri"/>
+              </a:rPr>
+              <a:t>Misma capacidad de cómputo, distinto nivel de aislamiento</a:t>
+            </a:r>
+          </a:p>
+        </p:txBody>
+      </p:sp>
+      <p:sp>
+        <p:nvSpPr>
+          <p:cNvPr id="6" name="Rounded Rectangle 5"/>
           <p:cNvSpPr/>
           <p:nvPr/>
         </p:nvSpPr>
         <p:spPr>
           <a:xfrm>
-            <a:off x="457200" y="1261872"/>
-            <a:ext cx="5478627" cy="5093208"/>
+            <a:off x="822960" y="1417320"/>
+            <a:ext cx="3931920" cy="457200"/>
           </a:xfrm>
           <a:prstGeom prst="roundRect">
             <a:avLst>
               <a:gd name="adj" fmla="val 12000"/>
             </a:avLst>
-          </a:prstGeom>
-          <a:solidFill>
-            <a:srgbClr val="FBE4E4"/>
-          </a:solidFill>
-          <a:ln>
-            <a:noFill/>
-          </a:ln>
-        </p:spPr>
-        <p:style>
-          <a:lnRef idx="1">
-            <a:schemeClr val="accent1"/>
-          </a:lnRef>
-          <a:fillRef idx="3">
-            <a:schemeClr val="accent1"/>
-          </a:fillRef>
-          <a:effectRef idx="2">
-            <a:schemeClr val="accent1"/>
-          </a:effectRef>
-          <a:fontRef idx="minor">
-            <a:schemeClr val="lt1"/>
-          </a:fontRef>
-        </p:style>
-        <p:txBody>
-          <a:bodyPr rtlCol="0" anchor="ctr"/>
-          <a:lstStyle/>
-          <a:p>
-            <a:pPr algn="ctr"/>
-          </a:p>
-        </p:txBody>
-      </p:sp>
-      <p:sp>
-        <p:nvSpPr>
-          <p:cNvPr id="6" name="Rectangle 5"/>
-          <p:cNvSpPr/>
-          <p:nvPr/>
-        </p:nvSpPr>
-        <p:spPr>
-          <a:xfrm>
-            <a:off x="457200" y="1261872"/>
-            <a:ext cx="5478627" cy="502920"/>
-          </a:xfrm>
-          <a:prstGeom prst="rect">
-            <a:avLst/>
-          </a:prstGeom>
-          <a:solidFill>
-            <a:srgbClr val="A02030"/>
-          </a:solidFill>
-          <a:ln>
-            <a:noFill/>
-          </a:ln>
-        </p:spPr>
-        <p:style>
-          <a:lnRef idx="1">
-            <a:schemeClr val="accent1"/>
-          </a:lnRef>
-          <a:fillRef idx="3">
-            <a:schemeClr val="accent1"/>
-          </a:fillRef>
-          <a:effectRef idx="2">
-            <a:schemeClr val="accent1"/>
-          </a:effectRef>
-          <a:fontRef idx="minor">
-            <a:schemeClr val="lt1"/>
-          </a:fontRef>
-        </p:style>
-        <p:txBody>
-          <a:bodyPr rtlCol="0" anchor="ctr"/>
-          <a:lstStyle/>
-          <a:p>
-            <a:pPr algn="ctr"/>
-          </a:p>
-        </p:txBody>
-      </p:sp>
-      <p:sp>
-        <p:nvSpPr>
-          <p:cNvPr id="7" name="TextBox 6"/>
-          <p:cNvSpPr txBox="1"/>
-          <p:nvPr/>
-        </p:nvSpPr>
-        <p:spPr>
-          <a:xfrm>
-            <a:off x="594360" y="1353312"/>
-            <a:ext cx="5204307" cy="365760"/>
-          </a:xfrm>
-          <a:prstGeom prst="rect">
-            <a:avLst/>
-          </a:prstGeom>
-          <a:noFill/>
-        </p:spPr>
-        <p:txBody>
-          <a:bodyPr wrap="square" anchor="ctr"/>
-          <a:lstStyle/>
-          <a:p>
-            <a:pPr algn="ctr"/>
-            <a:r>
-              <a:rPr sz="1600" b="1" i="0">
-                <a:solidFill>
-                  <a:srgbClr val="FFFFFF"/>
-                </a:solidFill>
-                <a:latin typeface="Calibri"/>
-              </a:rPr>
-              <a:t>Maquina virtual</a:t>
-            </a:r>
-          </a:p>
-        </p:txBody>
-      </p:sp>
-      <p:sp>
-        <p:nvSpPr>
-          <p:cNvPr id="8" name="TextBox 7"/>
-          <p:cNvSpPr txBox="1"/>
-          <p:nvPr/>
-        </p:nvSpPr>
-        <p:spPr>
-          <a:xfrm>
-            <a:off x="621792" y="1901952"/>
-            <a:ext cx="5158587" cy="4498848"/>
-          </a:xfrm>
-          <a:prstGeom prst="rect">
-            <a:avLst/>
-          </a:prstGeom>
-          <a:noFill/>
-        </p:spPr>
-        <p:txBody>
-          <a:bodyPr wrap="square">
-            <a:spAutoFit/>
-          </a:bodyPr>
-          <a:lstStyle/>
-          <a:p>
-            <a:pPr>
-              <a:spcAft>
-                <a:spcPts val="800"/>
-              </a:spcAft>
-            </a:pPr>
-            <a:r>
-              <a:rPr sz="1500" b="0" i="0">
-                <a:solidFill>
-                  <a:srgbClr val="333333"/>
-                </a:solidFill>
-                <a:latin typeface="Calibri"/>
-              </a:rPr>
-              <a:t>–   Cada instancia trae un </a:t>
-            </a:r>
-            <a:r>
-              <a:rPr sz="1500" b="1" i="0">
-                <a:solidFill>
-                  <a:srgbClr val="333333"/>
-                </a:solidFill>
-                <a:latin typeface="Calibri"/>
-              </a:rPr>
-              <a:t>SO completo</a:t>
-            </a:r>
-            <a:r>
-              <a:rPr sz="1500" b="0" i="0">
-                <a:solidFill>
-                  <a:srgbClr val="333333"/>
-                </a:solidFill>
-                <a:latin typeface="Calibri"/>
-              </a:rPr>
-              <a:t> (kernel propio)</a:t>
-            </a:r>
-          </a:p>
-          <a:p>
-            <a:pPr>
-              <a:spcAft>
-                <a:spcPts val="800"/>
-              </a:spcAft>
-            </a:pPr>
-            <a:r>
-              <a:rPr sz="1500" b="0" i="0">
-                <a:solidFill>
-                  <a:srgbClr val="333333"/>
-                </a:solidFill>
-                <a:latin typeface="Calibri"/>
-              </a:rPr>
-              <a:t>–   Aislamiento fuerte a nivel de hardware virtual</a:t>
-            </a:r>
-          </a:p>
-          <a:p>
-            <a:pPr>
-              <a:spcAft>
-                <a:spcPts val="800"/>
-              </a:spcAft>
-            </a:pPr>
-            <a:r>
-              <a:rPr sz="1500" b="0" i="0">
-                <a:solidFill>
-                  <a:srgbClr val="333333"/>
-                </a:solidFill>
-                <a:latin typeface="Calibri"/>
-              </a:rPr>
-              <a:t>–   Arranque en </a:t>
-            </a:r>
-            <a:r>
-              <a:rPr sz="1500" b="1" i="0">
-                <a:solidFill>
-                  <a:srgbClr val="333333"/>
-                </a:solidFill>
-                <a:latin typeface="Calibri"/>
-              </a:rPr>
-              <a:t>minutos</a:t>
-            </a:r>
-            <a:r>
-              <a:rPr sz="1500" b="0" i="0">
-                <a:solidFill>
-                  <a:srgbClr val="333333"/>
-                </a:solidFill>
-                <a:latin typeface="Calibri"/>
-              </a:rPr>
-              <a:t>, tamaño en </a:t>
-            </a:r>
-            <a:r>
-              <a:rPr sz="1500" b="1" i="0">
-                <a:solidFill>
-                  <a:srgbClr val="333333"/>
-                </a:solidFill>
-                <a:latin typeface="Calibri"/>
-              </a:rPr>
-              <a:t>GB</a:t>
-            </a:r>
-          </a:p>
-          <a:p>
-            <a:pPr>
-              <a:spcAft>
-                <a:spcPts val="800"/>
-              </a:spcAft>
-            </a:pPr>
-            <a:r>
-              <a:rPr sz="1500" b="0" i="0">
-                <a:solidFill>
-                  <a:srgbClr val="333333"/>
-                </a:solidFill>
-                <a:latin typeface="Calibri"/>
-              </a:rPr>
-              <a:t>–   Util cuando se necesitan SO distintos</a:t>
-            </a:r>
-          </a:p>
-        </p:txBody>
-      </p:sp>
-      <p:sp>
-        <p:nvSpPr>
-          <p:cNvPr id="9" name="Rounded Rectangle 8"/>
-          <p:cNvSpPr/>
-          <p:nvPr/>
-        </p:nvSpPr>
-        <p:spPr>
-          <a:xfrm>
-            <a:off x="6255867" y="1261872"/>
-            <a:ext cx="5478627" cy="5093208"/>
-          </a:xfrm>
-          <a:prstGeom prst="roundRect">
-            <a:avLst>
-              <a:gd name="adj" fmla="val 12000"/>
-            </a:avLst>
-          </a:prstGeom>
-          <a:solidFill>
-            <a:srgbClr val="E8F4FA"/>
-          </a:solidFill>
-          <a:ln>
-            <a:noFill/>
-          </a:ln>
-        </p:spPr>
-        <p:style>
-          <a:lnRef idx="1">
-            <a:schemeClr val="accent1"/>
-          </a:lnRef>
-          <a:fillRef idx="3">
-            <a:schemeClr val="accent1"/>
-          </a:fillRef>
-          <a:effectRef idx="2">
-            <a:schemeClr val="accent1"/>
-          </a:effectRef>
-          <a:fontRef idx="minor">
-            <a:schemeClr val="lt1"/>
-          </a:fontRef>
-        </p:style>
-        <p:txBody>
-          <a:bodyPr rtlCol="0" anchor="ctr"/>
-          <a:lstStyle/>
-          <a:p>
-            <a:pPr algn="ctr"/>
-          </a:p>
-        </p:txBody>
-      </p:sp>
-      <p:sp>
-        <p:nvSpPr>
-          <p:cNvPr id="10" name="Rectangle 9"/>
-          <p:cNvSpPr/>
-          <p:nvPr/>
-        </p:nvSpPr>
-        <p:spPr>
-          <a:xfrm>
-            <a:off x="6255867" y="1261872"/>
-            <a:ext cx="5478627" cy="502920"/>
-          </a:xfrm>
-          <a:prstGeom prst="rect">
-            <a:avLst/>
           </a:prstGeom>
           <a:solidFill>
             <a:srgbClr val="095292"/>
@@ -9983,56 +8705,630 @@
           </a:fontRef>
         </p:style>
         <p:txBody>
-          <a:bodyPr rtlCol="0" anchor="ctr"/>
+          <a:bodyPr rtlCol="0" anchor="ctr" wrap="square"/>
           <a:lstStyle/>
           <a:p>
             <a:pPr algn="ctr"/>
-          </a:p>
-        </p:txBody>
-      </p:sp>
-      <p:sp>
-        <p:nvSpPr>
-          <p:cNvPr id="11" name="TextBox 10"/>
+            <a:r>
+              <a:rPr sz="1200" b="1" i="0">
+                <a:solidFill>
+                  <a:srgbClr val="FFFFFF"/>
+                </a:solidFill>
+                <a:latin typeface="Calibri"/>
+              </a:rPr>
+              <a:t>Máquinas virtuales</a:t>
+            </a:r>
+          </a:p>
+        </p:txBody>
+      </p:sp>
+      <p:sp>
+        <p:nvSpPr>
+          <p:cNvPr id="7" name="Rounded Rectangle 6"/>
+          <p:cNvSpPr/>
+          <p:nvPr/>
+        </p:nvSpPr>
+        <p:spPr>
+          <a:xfrm>
+            <a:off x="822960" y="2057400"/>
+            <a:ext cx="3931920" cy="594360"/>
+          </a:xfrm>
+          <a:prstGeom prst="roundRect">
+            <a:avLst>
+              <a:gd name="adj" fmla="val 12000"/>
+            </a:avLst>
+          </a:prstGeom>
+          <a:solidFill>
+            <a:srgbClr val="333333"/>
+          </a:solidFill>
+          <a:ln>
+            <a:noFill/>
+          </a:ln>
+        </p:spPr>
+        <p:style>
+          <a:lnRef idx="1">
+            <a:schemeClr val="accent1"/>
+          </a:lnRef>
+          <a:fillRef idx="3">
+            <a:schemeClr val="accent1"/>
+          </a:fillRef>
+          <a:effectRef idx="2">
+            <a:schemeClr val="accent1"/>
+          </a:effectRef>
+          <a:fontRef idx="minor">
+            <a:schemeClr val="lt1"/>
+          </a:fontRef>
+        </p:style>
+        <p:txBody>
+          <a:bodyPr rtlCol="0" anchor="ctr" wrap="square"/>
+          <a:lstStyle/>
+          <a:p>
+            <a:pPr algn="ctr"/>
+            <a:r>
+              <a:rPr sz="1300" b="1" i="0">
+                <a:solidFill>
+                  <a:srgbClr val="FFFFFF"/>
+                </a:solidFill>
+                <a:latin typeface="Calibri"/>
+              </a:rPr>
+              <a:t>Hardware físico</a:t>
+            </a:r>
+          </a:p>
+        </p:txBody>
+      </p:sp>
+      <p:sp>
+        <p:nvSpPr>
+          <p:cNvPr id="8" name="Rounded Rectangle 7"/>
+          <p:cNvSpPr/>
+          <p:nvPr/>
+        </p:nvSpPr>
+        <p:spPr>
+          <a:xfrm>
+            <a:off x="822960" y="2697480"/>
+            <a:ext cx="3931920" cy="594360"/>
+          </a:xfrm>
+          <a:prstGeom prst="roundRect">
+            <a:avLst>
+              <a:gd name="adj" fmla="val 12000"/>
+            </a:avLst>
+          </a:prstGeom>
+          <a:solidFill>
+            <a:srgbClr val="269CCB"/>
+          </a:solidFill>
+          <a:ln>
+            <a:noFill/>
+          </a:ln>
+        </p:spPr>
+        <p:style>
+          <a:lnRef idx="1">
+            <a:schemeClr val="accent1"/>
+          </a:lnRef>
+          <a:fillRef idx="3">
+            <a:schemeClr val="accent1"/>
+          </a:fillRef>
+          <a:effectRef idx="2">
+            <a:schemeClr val="accent1"/>
+          </a:effectRef>
+          <a:fontRef idx="minor">
+            <a:schemeClr val="lt1"/>
+          </a:fontRef>
+        </p:style>
+        <p:txBody>
+          <a:bodyPr rtlCol="0" anchor="ctr" wrap="square"/>
+          <a:lstStyle/>
+          <a:p>
+            <a:pPr algn="ctr"/>
+            <a:r>
+              <a:rPr sz="1300" b="1" i="0">
+                <a:solidFill>
+                  <a:srgbClr val="FFFFFF"/>
+                </a:solidFill>
+                <a:latin typeface="Calibri"/>
+              </a:rPr>
+              <a:t>Hipervisor</a:t>
+            </a:r>
+          </a:p>
+        </p:txBody>
+      </p:sp>
+      <p:sp>
+        <p:nvSpPr>
+          <p:cNvPr id="9" name="Rounded Rectangle 8"/>
+          <p:cNvSpPr/>
+          <p:nvPr/>
+        </p:nvSpPr>
+        <p:spPr>
+          <a:xfrm>
+            <a:off x="822960" y="3337560"/>
+            <a:ext cx="1874519" cy="640080"/>
+          </a:xfrm>
+          <a:prstGeom prst="roundRect">
+            <a:avLst>
+              <a:gd name="adj" fmla="val 12000"/>
+            </a:avLst>
+          </a:prstGeom>
+          <a:solidFill>
+            <a:srgbClr val="269CCB"/>
+          </a:solidFill>
+          <a:ln>
+            <a:noFill/>
+          </a:ln>
+        </p:spPr>
+        <p:style>
+          <a:lnRef idx="1">
+            <a:schemeClr val="accent1"/>
+          </a:lnRef>
+          <a:fillRef idx="3">
+            <a:schemeClr val="accent1"/>
+          </a:fillRef>
+          <a:effectRef idx="2">
+            <a:schemeClr val="accent1"/>
+          </a:effectRef>
+          <a:fontRef idx="minor">
+            <a:schemeClr val="lt1"/>
+          </a:fontRef>
+        </p:style>
+        <p:txBody>
+          <a:bodyPr rtlCol="0" anchor="ctr" wrap="square"/>
+          <a:lstStyle/>
+          <a:p>
+            <a:pPr algn="ctr"/>
+            <a:r>
+              <a:rPr sz="1100" b="1" i="0">
+                <a:solidFill>
+                  <a:srgbClr val="FFFFFF"/>
+                </a:solidFill>
+                <a:latin typeface="Calibri"/>
+              </a:rPr>
+              <a:t>SO invitado A
+(completo)</a:t>
+            </a:r>
+          </a:p>
+        </p:txBody>
+      </p:sp>
+      <p:sp>
+        <p:nvSpPr>
+          <p:cNvPr id="10" name="Rounded Rectangle 9"/>
+          <p:cNvSpPr/>
+          <p:nvPr/>
+        </p:nvSpPr>
+        <p:spPr>
+          <a:xfrm>
+            <a:off x="2880360" y="3337560"/>
+            <a:ext cx="1874519" cy="640080"/>
+          </a:xfrm>
+          <a:prstGeom prst="roundRect">
+            <a:avLst>
+              <a:gd name="adj" fmla="val 12000"/>
+            </a:avLst>
+          </a:prstGeom>
+          <a:solidFill>
+            <a:srgbClr val="269CCB"/>
+          </a:solidFill>
+          <a:ln>
+            <a:noFill/>
+          </a:ln>
+        </p:spPr>
+        <p:style>
+          <a:lnRef idx="1">
+            <a:schemeClr val="accent1"/>
+          </a:lnRef>
+          <a:fillRef idx="3">
+            <a:schemeClr val="accent1"/>
+          </a:fillRef>
+          <a:effectRef idx="2">
+            <a:schemeClr val="accent1"/>
+          </a:effectRef>
+          <a:fontRef idx="minor">
+            <a:schemeClr val="lt1"/>
+          </a:fontRef>
+        </p:style>
+        <p:txBody>
+          <a:bodyPr rtlCol="0" anchor="ctr" wrap="square"/>
+          <a:lstStyle/>
+          <a:p>
+            <a:pPr algn="ctr"/>
+            <a:r>
+              <a:rPr sz="1100" b="1" i="0">
+                <a:solidFill>
+                  <a:srgbClr val="FFFFFF"/>
+                </a:solidFill>
+                <a:latin typeface="Calibri"/>
+              </a:rPr>
+              <a:t>SO invitado B
+(completo)</a:t>
+            </a:r>
+          </a:p>
+        </p:txBody>
+      </p:sp>
+      <p:sp>
+        <p:nvSpPr>
+          <p:cNvPr id="11" name="Rounded Rectangle 10"/>
+          <p:cNvSpPr/>
+          <p:nvPr/>
+        </p:nvSpPr>
+        <p:spPr>
+          <a:xfrm>
+            <a:off x="822960" y="4023360"/>
+            <a:ext cx="1874519" cy="548640"/>
+          </a:xfrm>
+          <a:prstGeom prst="roundRect">
+            <a:avLst>
+              <a:gd name="adj" fmla="val 12000"/>
+            </a:avLst>
+          </a:prstGeom>
+          <a:solidFill>
+            <a:srgbClr val="FFD000"/>
+          </a:solidFill>
+          <a:ln>
+            <a:noFill/>
+          </a:ln>
+        </p:spPr>
+        <p:style>
+          <a:lnRef idx="1">
+            <a:schemeClr val="accent1"/>
+          </a:lnRef>
+          <a:fillRef idx="3">
+            <a:schemeClr val="accent1"/>
+          </a:fillRef>
+          <a:effectRef idx="2">
+            <a:schemeClr val="accent1"/>
+          </a:effectRef>
+          <a:fontRef idx="minor">
+            <a:schemeClr val="lt1"/>
+          </a:fontRef>
+        </p:style>
+        <p:txBody>
+          <a:bodyPr rtlCol="0" anchor="ctr" wrap="square"/>
+          <a:lstStyle/>
+          <a:p>
+            <a:pPr algn="ctr"/>
+            <a:r>
+              <a:rPr sz="1300" b="1" i="0">
+                <a:solidFill>
+                  <a:srgbClr val="095292"/>
+                </a:solidFill>
+                <a:latin typeface="Calibri"/>
+              </a:rPr>
+              <a:t>App A</a:t>
+            </a:r>
+          </a:p>
+        </p:txBody>
+      </p:sp>
+      <p:sp>
+        <p:nvSpPr>
+          <p:cNvPr id="12" name="Rounded Rectangle 11"/>
+          <p:cNvSpPr/>
+          <p:nvPr/>
+        </p:nvSpPr>
+        <p:spPr>
+          <a:xfrm>
+            <a:off x="2880360" y="4023360"/>
+            <a:ext cx="1874519" cy="548640"/>
+          </a:xfrm>
+          <a:prstGeom prst="roundRect">
+            <a:avLst>
+              <a:gd name="adj" fmla="val 12000"/>
+            </a:avLst>
+          </a:prstGeom>
+          <a:solidFill>
+            <a:srgbClr val="FFD000"/>
+          </a:solidFill>
+          <a:ln>
+            <a:noFill/>
+          </a:ln>
+        </p:spPr>
+        <p:style>
+          <a:lnRef idx="1">
+            <a:schemeClr val="accent1"/>
+          </a:lnRef>
+          <a:fillRef idx="3">
+            <a:schemeClr val="accent1"/>
+          </a:fillRef>
+          <a:effectRef idx="2">
+            <a:schemeClr val="accent1"/>
+          </a:effectRef>
+          <a:fontRef idx="minor">
+            <a:schemeClr val="lt1"/>
+          </a:fontRef>
+        </p:style>
+        <p:txBody>
+          <a:bodyPr rtlCol="0" anchor="ctr" wrap="square"/>
+          <a:lstStyle/>
+          <a:p>
+            <a:pPr algn="ctr"/>
+            <a:r>
+              <a:rPr sz="1300" b="1" i="0">
+                <a:solidFill>
+                  <a:srgbClr val="095292"/>
+                </a:solidFill>
+                <a:latin typeface="Calibri"/>
+              </a:rPr>
+              <a:t>App B</a:t>
+            </a:r>
+          </a:p>
+        </p:txBody>
+      </p:sp>
+      <p:sp>
+        <p:nvSpPr>
+          <p:cNvPr id="13" name="Rounded Rectangle 12"/>
+          <p:cNvSpPr/>
+          <p:nvPr/>
+        </p:nvSpPr>
+        <p:spPr>
+          <a:xfrm>
+            <a:off x="7315200" y="1417320"/>
+            <a:ext cx="3931920" cy="457200"/>
+          </a:xfrm>
+          <a:prstGeom prst="roundRect">
+            <a:avLst>
+              <a:gd name="adj" fmla="val 12000"/>
+            </a:avLst>
+          </a:prstGeom>
+          <a:solidFill>
+            <a:srgbClr val="095292"/>
+          </a:solidFill>
+          <a:ln>
+            <a:noFill/>
+          </a:ln>
+        </p:spPr>
+        <p:style>
+          <a:lnRef idx="1">
+            <a:schemeClr val="accent1"/>
+          </a:lnRef>
+          <a:fillRef idx="3">
+            <a:schemeClr val="accent1"/>
+          </a:fillRef>
+          <a:effectRef idx="2">
+            <a:schemeClr val="accent1"/>
+          </a:effectRef>
+          <a:fontRef idx="minor">
+            <a:schemeClr val="lt1"/>
+          </a:fontRef>
+        </p:style>
+        <p:txBody>
+          <a:bodyPr rtlCol="0" anchor="ctr" wrap="square"/>
+          <a:lstStyle/>
+          <a:p>
+            <a:pPr algn="ctr"/>
+            <a:r>
+              <a:rPr sz="1200" b="1" i="0">
+                <a:solidFill>
+                  <a:srgbClr val="FFFFFF"/>
+                </a:solidFill>
+                <a:latin typeface="Calibri"/>
+              </a:rPr>
+              <a:t>Contenedores</a:t>
+            </a:r>
+          </a:p>
+        </p:txBody>
+      </p:sp>
+      <p:sp>
+        <p:nvSpPr>
+          <p:cNvPr id="14" name="Rounded Rectangle 13"/>
+          <p:cNvSpPr/>
+          <p:nvPr/>
+        </p:nvSpPr>
+        <p:spPr>
+          <a:xfrm>
+            <a:off x="7315200" y="2057400"/>
+            <a:ext cx="3931920" cy="594360"/>
+          </a:xfrm>
+          <a:prstGeom prst="roundRect">
+            <a:avLst>
+              <a:gd name="adj" fmla="val 12000"/>
+            </a:avLst>
+          </a:prstGeom>
+          <a:solidFill>
+            <a:srgbClr val="333333"/>
+          </a:solidFill>
+          <a:ln>
+            <a:noFill/>
+          </a:ln>
+        </p:spPr>
+        <p:style>
+          <a:lnRef idx="1">
+            <a:schemeClr val="accent1"/>
+          </a:lnRef>
+          <a:fillRef idx="3">
+            <a:schemeClr val="accent1"/>
+          </a:fillRef>
+          <a:effectRef idx="2">
+            <a:schemeClr val="accent1"/>
+          </a:effectRef>
+          <a:fontRef idx="minor">
+            <a:schemeClr val="lt1"/>
+          </a:fontRef>
+        </p:style>
+        <p:txBody>
+          <a:bodyPr rtlCol="0" anchor="ctr" wrap="square"/>
+          <a:lstStyle/>
+          <a:p>
+            <a:pPr algn="ctr"/>
+            <a:r>
+              <a:rPr sz="1300" b="1" i="0">
+                <a:solidFill>
+                  <a:srgbClr val="FFFFFF"/>
+                </a:solidFill>
+                <a:latin typeface="Calibri"/>
+              </a:rPr>
+              <a:t>Hardware físico</a:t>
+            </a:r>
+          </a:p>
+        </p:txBody>
+      </p:sp>
+      <p:sp>
+        <p:nvSpPr>
+          <p:cNvPr id="15" name="Rounded Rectangle 14"/>
+          <p:cNvSpPr/>
+          <p:nvPr/>
+        </p:nvSpPr>
+        <p:spPr>
+          <a:xfrm>
+            <a:off x="7315200" y="2697480"/>
+            <a:ext cx="3931920" cy="594360"/>
+          </a:xfrm>
+          <a:prstGeom prst="roundRect">
+            <a:avLst>
+              <a:gd name="adj" fmla="val 12000"/>
+            </a:avLst>
+          </a:prstGeom>
+          <a:solidFill>
+            <a:srgbClr val="269CCB"/>
+          </a:solidFill>
+          <a:ln>
+            <a:noFill/>
+          </a:ln>
+        </p:spPr>
+        <p:style>
+          <a:lnRef idx="1">
+            <a:schemeClr val="accent1"/>
+          </a:lnRef>
+          <a:fillRef idx="3">
+            <a:schemeClr val="accent1"/>
+          </a:fillRef>
+          <a:effectRef idx="2">
+            <a:schemeClr val="accent1"/>
+          </a:effectRef>
+          <a:fontRef idx="minor">
+            <a:schemeClr val="lt1"/>
+          </a:fontRef>
+        </p:style>
+        <p:txBody>
+          <a:bodyPr rtlCol="0" anchor="ctr" wrap="square"/>
+          <a:lstStyle/>
+          <a:p>
+            <a:pPr algn="ctr"/>
+            <a:r>
+              <a:rPr sz="1050" b="1" i="0">
+                <a:solidFill>
+                  <a:srgbClr val="FFFFFF"/>
+                </a:solidFill>
+                <a:latin typeface="Calibri"/>
+              </a:rPr>
+              <a:t>SO anfitrión + motor de contenedores (kernel compartido)</a:t>
+            </a:r>
+          </a:p>
+        </p:txBody>
+      </p:sp>
+      <p:sp>
+        <p:nvSpPr>
+          <p:cNvPr id="16" name="Rounded Rectangle 15"/>
+          <p:cNvSpPr/>
+          <p:nvPr/>
+        </p:nvSpPr>
+        <p:spPr>
+          <a:xfrm>
+            <a:off x="7315200" y="3337560"/>
+            <a:ext cx="1874519" cy="640080"/>
+          </a:xfrm>
+          <a:prstGeom prst="roundRect">
+            <a:avLst>
+              <a:gd name="adj" fmla="val 12000"/>
+            </a:avLst>
+          </a:prstGeom>
+          <a:solidFill>
+            <a:srgbClr val="FFD000"/>
+          </a:solidFill>
+          <a:ln>
+            <a:noFill/>
+          </a:ln>
+        </p:spPr>
+        <p:style>
+          <a:lnRef idx="1">
+            <a:schemeClr val="accent1"/>
+          </a:lnRef>
+          <a:fillRef idx="3">
+            <a:schemeClr val="accent1"/>
+          </a:fillRef>
+          <a:effectRef idx="2">
+            <a:schemeClr val="accent1"/>
+          </a:effectRef>
+          <a:fontRef idx="minor">
+            <a:schemeClr val="lt1"/>
+          </a:fontRef>
+        </p:style>
+        <p:txBody>
+          <a:bodyPr rtlCol="0" anchor="ctr" wrap="square"/>
+          <a:lstStyle/>
+          <a:p>
+            <a:pPr algn="ctr"/>
+            <a:r>
+              <a:rPr sz="1100" b="1" i="0">
+                <a:solidFill>
+                  <a:srgbClr val="095292"/>
+                </a:solidFill>
+                <a:latin typeface="Calibri"/>
+              </a:rPr>
+              <a:t>Contenedor A
+(App A)</a:t>
+            </a:r>
+          </a:p>
+        </p:txBody>
+      </p:sp>
+      <p:sp>
+        <p:nvSpPr>
+          <p:cNvPr id="17" name="Rounded Rectangle 16"/>
+          <p:cNvSpPr/>
+          <p:nvPr/>
+        </p:nvSpPr>
+        <p:spPr>
+          <a:xfrm>
+            <a:off x="9372600" y="3337560"/>
+            <a:ext cx="1874519" cy="640080"/>
+          </a:xfrm>
+          <a:prstGeom prst="roundRect">
+            <a:avLst>
+              <a:gd name="adj" fmla="val 12000"/>
+            </a:avLst>
+          </a:prstGeom>
+          <a:solidFill>
+            <a:srgbClr val="FFD000"/>
+          </a:solidFill>
+          <a:ln>
+            <a:noFill/>
+          </a:ln>
+        </p:spPr>
+        <p:style>
+          <a:lnRef idx="1">
+            <a:schemeClr val="accent1"/>
+          </a:lnRef>
+          <a:fillRef idx="3">
+            <a:schemeClr val="accent1"/>
+          </a:fillRef>
+          <a:effectRef idx="2">
+            <a:schemeClr val="accent1"/>
+          </a:effectRef>
+          <a:fontRef idx="minor">
+            <a:schemeClr val="lt1"/>
+          </a:fontRef>
+        </p:style>
+        <p:txBody>
+          <a:bodyPr rtlCol="0" anchor="ctr" wrap="square"/>
+          <a:lstStyle/>
+          <a:p>
+            <a:pPr algn="ctr"/>
+            <a:r>
+              <a:rPr sz="1100" b="1" i="0">
+                <a:solidFill>
+                  <a:srgbClr val="095292"/>
+                </a:solidFill>
+                <a:latin typeface="Calibri"/>
+              </a:rPr>
+              <a:t>Contenedor B
+(App B)</a:t>
+            </a:r>
+          </a:p>
+        </p:txBody>
+      </p:sp>
+      <p:sp>
+        <p:nvSpPr>
+          <p:cNvPr id="18" name="TextBox 17"/>
           <p:cNvSpPr txBox="1"/>
           <p:nvPr/>
         </p:nvSpPr>
         <p:spPr>
           <a:xfrm>
-            <a:off x="6393027" y="1353312"/>
-            <a:ext cx="5204307" cy="365760"/>
-          </a:xfrm>
-          <a:prstGeom prst="rect">
-            <a:avLst/>
-          </a:prstGeom>
-          <a:noFill/>
-        </p:spPr>
-        <p:txBody>
-          <a:bodyPr wrap="square" anchor="ctr"/>
-          <a:lstStyle/>
-          <a:p>
-            <a:pPr algn="ctr"/>
-            <a:r>
-              <a:rPr sz="1600" b="1" i="0">
-                <a:solidFill>
-                  <a:srgbClr val="FFFFFF"/>
-                </a:solidFill>
-                <a:latin typeface="Calibri"/>
-              </a:rPr>
-              <a:t>Contenedor</a:t>
-            </a:r>
-          </a:p>
-        </p:txBody>
-      </p:sp>
-      <p:sp>
-        <p:nvSpPr>
-          <p:cNvPr id="12" name="TextBox 11"/>
-          <p:cNvSpPr txBox="1"/>
-          <p:nvPr/>
-        </p:nvSpPr>
-        <p:spPr>
-          <a:xfrm>
-            <a:off x="6420459" y="1901952"/>
-            <a:ext cx="5158587" cy="4498848"/>
+            <a:off x="457200" y="6263640"/>
+            <a:ext cx="11277295" cy="411480"/>
           </a:xfrm>
           <a:prstGeom prst="rect">
             <a:avLst/>
@@ -10045,119 +9341,21 @@
           </a:bodyPr>
           <a:lstStyle/>
           <a:p>
-            <a:pPr>
-              <a:spcAft>
-                <a:spcPts val="800"/>
-              </a:spcAft>
-            </a:pPr>
-            <a:r>
-              <a:rPr sz="1500" b="0" i="0">
-                <a:solidFill>
-                  <a:srgbClr val="333333"/>
-                </a:solidFill>
-                <a:latin typeface="Calibri"/>
-              </a:rPr>
-              <a:t>–   </a:t>
-            </a:r>
-            <a:r>
-              <a:rPr sz="1500" b="1" i="0">
-                <a:solidFill>
-                  <a:srgbClr val="333333"/>
-                </a:solidFill>
-                <a:latin typeface="Calibri"/>
-              </a:rPr>
-              <a:t>Comparte el kernel</a:t>
-            </a:r>
-            <a:r>
-              <a:rPr sz="1500" b="0" i="0">
-                <a:solidFill>
-                  <a:srgbClr val="333333"/>
-                </a:solidFill>
-                <a:latin typeface="Calibri"/>
-              </a:rPr>
-              <a:t> del anfitrion</a:t>
-            </a:r>
-          </a:p>
-          <a:p>
-            <a:pPr>
-              <a:spcAft>
-                <a:spcPts val="800"/>
-              </a:spcAft>
-            </a:pPr>
-            <a:r>
-              <a:rPr sz="1500" b="0" i="0">
-                <a:solidFill>
-                  <a:srgbClr val="333333"/>
-                </a:solidFill>
-                <a:latin typeface="Calibri"/>
-              </a:rPr>
-              <a:t>–   Empaqueta solo app + dependencias</a:t>
-            </a:r>
-          </a:p>
-          <a:p>
-            <a:pPr>
-              <a:spcAft>
-                <a:spcPts val="800"/>
-              </a:spcAft>
-            </a:pPr>
-            <a:r>
-              <a:rPr sz="1500" b="0" i="0">
-                <a:solidFill>
-                  <a:srgbClr val="333333"/>
-                </a:solidFill>
-                <a:latin typeface="Calibri"/>
-              </a:rPr>
-              <a:t>–   Arranque en </a:t>
-            </a:r>
-            <a:r>
-              <a:rPr sz="1500" b="1" i="0">
-                <a:solidFill>
-                  <a:srgbClr val="333333"/>
-                </a:solidFill>
-                <a:latin typeface="Calibri"/>
-              </a:rPr>
-              <a:t>segundos</a:t>
-            </a:r>
-            <a:r>
-              <a:rPr sz="1500" b="0" i="0">
-                <a:solidFill>
-                  <a:srgbClr val="333333"/>
-                </a:solidFill>
-                <a:latin typeface="Calibri"/>
-              </a:rPr>
-              <a:t>, tamaño en </a:t>
-            </a:r>
-            <a:r>
-              <a:rPr sz="1500" b="1" i="0">
-                <a:solidFill>
-                  <a:srgbClr val="333333"/>
-                </a:solidFill>
-                <a:latin typeface="Calibri"/>
-              </a:rPr>
-              <a:t>MB</a:t>
-            </a:r>
-          </a:p>
-          <a:p>
-            <a:pPr>
-              <a:spcAft>
-                <a:spcPts val="800"/>
-              </a:spcAft>
-            </a:pPr>
-            <a:r>
-              <a:rPr sz="1500" b="0" i="0">
-                <a:solidFill>
-                  <a:srgbClr val="333333"/>
-                </a:solidFill>
-                <a:latin typeface="Calibri"/>
-              </a:rPr>
-              <a:t>–   Util para desplegar el mismo servicio muchas veces</a:t>
-            </a:r>
-          </a:p>
-        </p:txBody>
-      </p:sp>
-      <p:sp>
-        <p:nvSpPr>
-          <p:cNvPr id="13" name="TextBox 12"/>
+            <a:r>
+              <a:rPr sz="1100" b="0" i="1">
+                <a:solidFill>
+                  <a:srgbClr val="666666"/>
+                </a:solidFill>
+                <a:latin typeface="Calibri"/>
+              </a:rPr>
+              <a:t>VM: cada instancia carga un SO completo (aislamiento fuerte, más pesado). Contenedor: comparte el kernel del anfitrión y solo empaqueta app + dependencias (arranca en segundos, pesa MB no GB).</a:t>
+            </a:r>
+          </a:p>
+        </p:txBody>
+      </p:sp>
+      <p:sp>
+        <p:nvSpPr>
+          <p:cNvPr id="19" name="TextBox 18"/>
           <p:cNvSpPr txBox="1"/>
           <p:nvPr/>
         </p:nvSpPr>
@@ -10331,7 +9529,7 @@
                 </a:solidFill>
                 <a:latin typeface="Calibri"/>
               </a:rPr>
-              <a:t>Dockerfile minimo del stub CloudLite</a:t>
+              <a:t>Maquina virtual vs contenedor — que cambia de verdad</a:t>
             </a:r>
           </a:p>
         </p:txBody>
@@ -10345,7 +9543,7 @@
         <p:spPr>
           <a:xfrm>
             <a:off x="457200" y="1261872"/>
-            <a:ext cx="11277295" cy="4773168"/>
+            <a:ext cx="5478627" cy="5093208"/>
           </a:xfrm>
           <a:prstGeom prst="roundRect">
             <a:avLst>
@@ -10353,7 +9551,7 @@
             </a:avLst>
           </a:prstGeom>
           <a:solidFill>
-            <a:srgbClr val="1E2A38"/>
+            <a:srgbClr val="FBE4E4"/>
           </a:solidFill>
           <a:ln>
             <a:noFill/>
@@ -10390,7 +9588,260 @@
         <p:spPr>
           <a:xfrm>
             <a:off x="457200" y="1261872"/>
-            <a:ext cx="11277295" cy="320040"/>
+            <a:ext cx="5478627" cy="502920"/>
+          </a:xfrm>
+          <a:prstGeom prst="rect">
+            <a:avLst/>
+          </a:prstGeom>
+          <a:solidFill>
+            <a:srgbClr val="A02030"/>
+          </a:solidFill>
+          <a:ln>
+            <a:noFill/>
+          </a:ln>
+        </p:spPr>
+        <p:style>
+          <a:lnRef idx="1">
+            <a:schemeClr val="accent1"/>
+          </a:lnRef>
+          <a:fillRef idx="3">
+            <a:schemeClr val="accent1"/>
+          </a:fillRef>
+          <a:effectRef idx="2">
+            <a:schemeClr val="accent1"/>
+          </a:effectRef>
+          <a:fontRef idx="minor">
+            <a:schemeClr val="lt1"/>
+          </a:fontRef>
+        </p:style>
+        <p:txBody>
+          <a:bodyPr rtlCol="0" anchor="ctr"/>
+          <a:lstStyle/>
+          <a:p>
+            <a:pPr algn="ctr"/>
+          </a:p>
+        </p:txBody>
+      </p:sp>
+      <p:sp>
+        <p:nvSpPr>
+          <p:cNvPr id="7" name="TextBox 6"/>
+          <p:cNvSpPr txBox="1"/>
+          <p:nvPr/>
+        </p:nvSpPr>
+        <p:spPr>
+          <a:xfrm>
+            <a:off x="594360" y="1353312"/>
+            <a:ext cx="5204307" cy="365760"/>
+          </a:xfrm>
+          <a:prstGeom prst="rect">
+            <a:avLst/>
+          </a:prstGeom>
+          <a:noFill/>
+        </p:spPr>
+        <p:txBody>
+          <a:bodyPr wrap="square" anchor="ctr"/>
+          <a:lstStyle/>
+          <a:p>
+            <a:pPr algn="ctr"/>
+            <a:r>
+              <a:rPr sz="1600" b="1" i="0">
+                <a:solidFill>
+                  <a:srgbClr val="FFFFFF"/>
+                </a:solidFill>
+                <a:latin typeface="Calibri"/>
+              </a:rPr>
+              <a:t>Maquina virtual</a:t>
+            </a:r>
+          </a:p>
+        </p:txBody>
+      </p:sp>
+      <p:sp>
+        <p:nvSpPr>
+          <p:cNvPr id="8" name="TextBox 7"/>
+          <p:cNvSpPr txBox="1"/>
+          <p:nvPr/>
+        </p:nvSpPr>
+        <p:spPr>
+          <a:xfrm>
+            <a:off x="621792" y="1901952"/>
+            <a:ext cx="5158587" cy="4498848"/>
+          </a:xfrm>
+          <a:prstGeom prst="rect">
+            <a:avLst/>
+          </a:prstGeom>
+          <a:noFill/>
+        </p:spPr>
+        <p:txBody>
+          <a:bodyPr wrap="square">
+            <a:spAutoFit/>
+          </a:bodyPr>
+          <a:lstStyle/>
+          <a:p>
+            <a:pPr>
+              <a:spcAft>
+                <a:spcPts val="800"/>
+              </a:spcAft>
+            </a:pPr>
+            <a:r>
+              <a:rPr sz="1500" b="0" i="0">
+                <a:solidFill>
+                  <a:srgbClr val="333333"/>
+                </a:solidFill>
+                <a:latin typeface="Calibri"/>
+              </a:rPr>
+              <a:t>–   Cada instancia trae un </a:t>
+            </a:r>
+            <a:r>
+              <a:rPr sz="1500" b="1" i="0">
+                <a:solidFill>
+                  <a:srgbClr val="333333"/>
+                </a:solidFill>
+                <a:latin typeface="Calibri"/>
+              </a:rPr>
+              <a:t>SO completo</a:t>
+            </a:r>
+            <a:r>
+              <a:rPr sz="1500" b="0" i="0">
+                <a:solidFill>
+                  <a:srgbClr val="333333"/>
+                </a:solidFill>
+                <a:latin typeface="Calibri"/>
+              </a:rPr>
+              <a:t> (kernel propio)</a:t>
+            </a:r>
+          </a:p>
+          <a:p>
+            <a:pPr>
+              <a:spcAft>
+                <a:spcPts val="800"/>
+              </a:spcAft>
+            </a:pPr>
+            <a:r>
+              <a:rPr sz="1500" b="0" i="0">
+                <a:solidFill>
+                  <a:srgbClr val="333333"/>
+                </a:solidFill>
+                <a:latin typeface="Calibri"/>
+              </a:rPr>
+              <a:t>–   Aislamiento fuerte a nivel de hardware virtual</a:t>
+            </a:r>
+          </a:p>
+          <a:p>
+            <a:pPr>
+              <a:spcAft>
+                <a:spcPts val="800"/>
+              </a:spcAft>
+            </a:pPr>
+            <a:r>
+              <a:rPr sz="1500" b="0" i="0">
+                <a:solidFill>
+                  <a:srgbClr val="333333"/>
+                </a:solidFill>
+                <a:latin typeface="Calibri"/>
+              </a:rPr>
+              <a:t>–   Arranque en </a:t>
+            </a:r>
+            <a:r>
+              <a:rPr sz="1500" b="1" i="0">
+                <a:solidFill>
+                  <a:srgbClr val="333333"/>
+                </a:solidFill>
+                <a:latin typeface="Calibri"/>
+              </a:rPr>
+              <a:t>minutos</a:t>
+            </a:r>
+            <a:r>
+              <a:rPr sz="1500" b="0" i="0">
+                <a:solidFill>
+                  <a:srgbClr val="333333"/>
+                </a:solidFill>
+                <a:latin typeface="Calibri"/>
+              </a:rPr>
+              <a:t>, tamaño en </a:t>
+            </a:r>
+            <a:r>
+              <a:rPr sz="1500" b="1" i="0">
+                <a:solidFill>
+                  <a:srgbClr val="333333"/>
+                </a:solidFill>
+                <a:latin typeface="Calibri"/>
+              </a:rPr>
+              <a:t>GB</a:t>
+            </a:r>
+          </a:p>
+          <a:p>
+            <a:pPr>
+              <a:spcAft>
+                <a:spcPts val="800"/>
+              </a:spcAft>
+            </a:pPr>
+            <a:r>
+              <a:rPr sz="1500" b="0" i="0">
+                <a:solidFill>
+                  <a:srgbClr val="333333"/>
+                </a:solidFill>
+                <a:latin typeface="Calibri"/>
+              </a:rPr>
+              <a:t>–   Util cuando se necesitan SO distintos</a:t>
+            </a:r>
+          </a:p>
+        </p:txBody>
+      </p:sp>
+      <p:sp>
+        <p:nvSpPr>
+          <p:cNvPr id="9" name="Rounded Rectangle 8"/>
+          <p:cNvSpPr/>
+          <p:nvPr/>
+        </p:nvSpPr>
+        <p:spPr>
+          <a:xfrm>
+            <a:off x="6255867" y="1261872"/>
+            <a:ext cx="5478627" cy="5093208"/>
+          </a:xfrm>
+          <a:prstGeom prst="roundRect">
+            <a:avLst>
+              <a:gd name="adj" fmla="val 12000"/>
+            </a:avLst>
+          </a:prstGeom>
+          <a:solidFill>
+            <a:srgbClr val="E8F4FA"/>
+          </a:solidFill>
+          <a:ln>
+            <a:noFill/>
+          </a:ln>
+        </p:spPr>
+        <p:style>
+          <a:lnRef idx="1">
+            <a:schemeClr val="accent1"/>
+          </a:lnRef>
+          <a:fillRef idx="3">
+            <a:schemeClr val="accent1"/>
+          </a:fillRef>
+          <a:effectRef idx="2">
+            <a:schemeClr val="accent1"/>
+          </a:effectRef>
+          <a:fontRef idx="minor">
+            <a:schemeClr val="lt1"/>
+          </a:fontRef>
+        </p:style>
+        <p:txBody>
+          <a:bodyPr rtlCol="0" anchor="ctr"/>
+          <a:lstStyle/>
+          <a:p>
+            <a:pPr algn="ctr"/>
+          </a:p>
+        </p:txBody>
+      </p:sp>
+      <p:sp>
+        <p:nvSpPr>
+          <p:cNvPr id="10" name="Rectangle 9"/>
+          <p:cNvSpPr/>
+          <p:nvPr/>
+        </p:nvSpPr>
+        <p:spPr>
+          <a:xfrm>
+            <a:off x="6255867" y="1261872"/>
+            <a:ext cx="5478627" cy="502920"/>
           </a:xfrm>
           <a:prstGeom prst="rect">
             <a:avLst/>
@@ -10426,14 +9877,14 @@
       </p:sp>
       <p:sp>
         <p:nvSpPr>
-          <p:cNvPr id="7" name="TextBox 6"/>
+          <p:cNvPr id="11" name="TextBox 10"/>
           <p:cNvSpPr txBox="1"/>
           <p:nvPr/>
         </p:nvSpPr>
         <p:spPr>
           <a:xfrm>
-            <a:off x="685800" y="1307592"/>
-            <a:ext cx="10820095" cy="256032"/>
+            <a:off x="6393027" y="1353312"/>
+            <a:ext cx="5204307" cy="365760"/>
           </a:xfrm>
           <a:prstGeom prst="rect">
             <a:avLst/>
@@ -10444,28 +9895,29 @@
           <a:bodyPr wrap="square" anchor="ctr"/>
           <a:lstStyle/>
           <a:p>
-            <a:r>
-              <a:rPr sz="1000" b="1" i="0">
-                <a:solidFill>
-                  <a:srgbClr val="269CCB"/>
-                </a:solidFill>
-                <a:latin typeface="Calibri"/>
-              </a:rPr>
-              <a:t>● ● ●</a:t>
-            </a:r>
-          </a:p>
-        </p:txBody>
-      </p:sp>
-      <p:sp>
-        <p:nvSpPr>
-          <p:cNvPr id="8" name="TextBox 7"/>
+            <a:pPr algn="ctr"/>
+            <a:r>
+              <a:rPr sz="1600" b="1" i="0">
+                <a:solidFill>
+                  <a:srgbClr val="FFFFFF"/>
+                </a:solidFill>
+                <a:latin typeface="Calibri"/>
+              </a:rPr>
+              <a:t>Contenedor</a:t>
+            </a:r>
+          </a:p>
+        </p:txBody>
+      </p:sp>
+      <p:sp>
+        <p:nvSpPr>
+          <p:cNvPr id="12" name="TextBox 11"/>
           <p:cNvSpPr txBox="1"/>
           <p:nvPr/>
         </p:nvSpPr>
         <p:spPr>
           <a:xfrm>
-            <a:off x="777240" y="1719072"/>
-            <a:ext cx="10637215" cy="4133087"/>
+            <a:off x="6420459" y="1901952"/>
+            <a:ext cx="5158587" cy="4498848"/>
           </a:xfrm>
           <a:prstGeom prst="rect">
             <a:avLst/>
@@ -10480,267 +9932,117 @@
           <a:p>
             <a:pPr>
               <a:spcAft>
-                <a:spcPts val="400"/>
+                <a:spcPts val="800"/>
               </a:spcAft>
             </a:pPr>
             <a:r>
-              <a:rPr sz="1400" b="0" i="0">
-                <a:solidFill>
-                  <a:srgbClr val="FFFFFF"/>
-                </a:solidFill>
-                <a:latin typeface="Calibri"/>
-              </a:rPr>
-              <a:t>FROM node:20-alpine          # base ligera y etiqueta FIJA: nunca latest</a:t>
+              <a:rPr sz="1500" b="0" i="0">
+                <a:solidFill>
+                  <a:srgbClr val="333333"/>
+                </a:solidFill>
+                <a:latin typeface="Calibri"/>
+              </a:rPr>
+              <a:t>–   </a:t>
+            </a:r>
+            <a:r>
+              <a:rPr sz="1500" b="1" i="0">
+                <a:solidFill>
+                  <a:srgbClr val="333333"/>
+                </a:solidFill>
+                <a:latin typeface="Calibri"/>
+              </a:rPr>
+              <a:t>Comparte el kernel</a:t>
+            </a:r>
+            <a:r>
+              <a:rPr sz="1500" b="0" i="0">
+                <a:solidFill>
+                  <a:srgbClr val="333333"/>
+                </a:solidFill>
+                <a:latin typeface="Calibri"/>
+              </a:rPr>
+              <a:t> del anfitrion</a:t>
             </a:r>
           </a:p>
           <a:p>
             <a:pPr>
               <a:spcAft>
-                <a:spcPts val="400"/>
+                <a:spcPts val="800"/>
               </a:spcAft>
             </a:pPr>
             <a:r>
-              <a:rPr sz="1400" b="0" i="0">
-                <a:solidFill>
-                  <a:srgbClr val="FFFFFF"/>
-                </a:solidFill>
-                <a:latin typeface="Calibri"/>
-              </a:rPr>
-              <a:t>WORKDIR /app</a:t>
+              <a:rPr sz="1500" b="0" i="0">
+                <a:solidFill>
+                  <a:srgbClr val="333333"/>
+                </a:solidFill>
+                <a:latin typeface="Calibri"/>
+              </a:rPr>
+              <a:t>–   Empaqueta solo app + dependencias</a:t>
             </a:r>
           </a:p>
           <a:p>
             <a:pPr>
               <a:spcAft>
-                <a:spcPts val="400"/>
+                <a:spcPts val="800"/>
               </a:spcAft>
             </a:pPr>
             <a:r>
-              <a:rPr sz="1400" b="0" i="0">
-                <a:solidFill>
-                  <a:srgbClr val="FFFFFF"/>
-                </a:solidFill>
-                <a:latin typeface="Calibri"/>
-              </a:rPr>
-              <a:t>COPY package*.json ./        # dependencias PRIMERO: cambian poco</a:t>
+              <a:rPr sz="1500" b="0" i="0">
+                <a:solidFill>
+                  <a:srgbClr val="333333"/>
+                </a:solidFill>
+                <a:latin typeface="Calibri"/>
+              </a:rPr>
+              <a:t>–   Arranque en </a:t>
+            </a:r>
+            <a:r>
+              <a:rPr sz="1500" b="1" i="0">
+                <a:solidFill>
+                  <a:srgbClr val="333333"/>
+                </a:solidFill>
+                <a:latin typeface="Calibri"/>
+              </a:rPr>
+              <a:t>segundos</a:t>
+            </a:r>
+            <a:r>
+              <a:rPr sz="1500" b="0" i="0">
+                <a:solidFill>
+                  <a:srgbClr val="333333"/>
+                </a:solidFill>
+                <a:latin typeface="Calibri"/>
+              </a:rPr>
+              <a:t>, tamaño en </a:t>
+            </a:r>
+            <a:r>
+              <a:rPr sz="1500" b="1" i="0">
+                <a:solidFill>
+                  <a:srgbClr val="333333"/>
+                </a:solidFill>
+                <a:latin typeface="Calibri"/>
+              </a:rPr>
+              <a:t>MB</a:t>
             </a:r>
           </a:p>
           <a:p>
             <a:pPr>
               <a:spcAft>
-                <a:spcPts val="400"/>
+                <a:spcPts val="800"/>
               </a:spcAft>
             </a:pPr>
             <a:r>
-              <a:rPr sz="1400" b="0" i="0">
-                <a:solidFill>
-                  <a:srgbClr val="FFFFFF"/>
-                </a:solidFill>
-                <a:latin typeface="Calibri"/>
-              </a:rPr>
-              <a:t>RUN npm ci --omit=dev        # se instalan DENTRO de la imagen</a:t>
-            </a:r>
-          </a:p>
-          <a:p>
-            <a:pPr>
-              <a:spcAft>
-                <a:spcPts val="400"/>
-              </a:spcAft>
-            </a:pPr>
-            <a:r>
-              <a:rPr sz="1400" b="0" i="0">
-                <a:solidFill>
-                  <a:srgbClr val="FFFFFF"/>
-                </a:solidFill>
-                <a:latin typeface="Calibri"/>
-              </a:rPr>
-              <a:t>COPY..                     # el codigo despues: cambia en cada commit</a:t>
-            </a:r>
-          </a:p>
-          <a:p>
-            <a:pPr>
-              <a:spcAft>
-                <a:spcPts val="400"/>
-              </a:spcAft>
-            </a:pPr>
-            <a:r>
-              <a:rPr sz="1400" b="0" i="0">
-                <a:solidFill>
-                  <a:srgbClr val="FFFFFF"/>
-                </a:solidFill>
-                <a:latin typeface="Calibri"/>
-              </a:rPr>
-              <a:t>EXPOSE 8080                  # documenta el puerto; NO lo publica</a:t>
-            </a:r>
-          </a:p>
-          <a:p>
-            <a:pPr>
-              <a:spcAft>
-                <a:spcPts val="400"/>
-              </a:spcAft>
-            </a:pPr>
-            <a:r>
-              <a:rPr sz="1400" b="0" i="0">
-                <a:solidFill>
-                  <a:srgbClr val="FFFFFF"/>
-                </a:solidFill>
-                <a:latin typeface="Calibri"/>
-              </a:rPr>
-              <a:t>CMD ["node", "server.js"]    # UN proceso principal por contenedor</a:t>
-            </a:r>
-          </a:p>
-          <a:p>
-            <a:pPr>
-              <a:spcAft>
-                <a:spcPts val="400"/>
-              </a:spcAft>
-            </a:pPr>
-            <a:r>
-              <a:rPr sz="1400" b="0" i="0">
-                <a:solidFill>
-                  <a:srgbClr val="FFFFFF"/>
-                </a:solidFill>
-                <a:latin typeface="Calibri"/>
-              </a:rPr>
-              <a:t/>
-            </a:r>
-          </a:p>
-          <a:p>
-            <a:pPr>
-              <a:spcAft>
-                <a:spcPts val="400"/>
-              </a:spcAft>
-            </a:pPr>
-            <a:r>
-              <a:rPr sz="1400" b="0" i="0">
-                <a:solidFill>
-                  <a:srgbClr val="FFFFFF"/>
-                </a:solidFill>
-                <a:latin typeface="Calibri"/>
-              </a:rPr>
-              <a:t># .dockerignore  &lt;- archivo aparte, en la misma carpeta que el Dockerfile.</a:t>
-            </a:r>
-          </a:p>
-          <a:p>
-            <a:pPr>
-              <a:spcAft>
-                <a:spcPts val="400"/>
-              </a:spcAft>
-            </a:pPr>
-            <a:r>
-              <a:rPr sz="1400" b="0" i="0">
-                <a:solidFill>
-                  <a:srgbClr val="FFFFFF"/>
-                </a:solidFill>
-                <a:latin typeface="Calibri"/>
-              </a:rPr>
-              <a:t># Sin el, el COPY.. de arriba se lleva el .env a las capas de la imagen.</a:t>
-            </a:r>
-          </a:p>
-          <a:p>
-            <a:pPr>
-              <a:spcAft>
-                <a:spcPts val="400"/>
-              </a:spcAft>
-            </a:pPr>
-            <a:r>
-              <a:rPr sz="1400" b="0" i="0">
-                <a:solidFill>
-                  <a:srgbClr val="FFFFFF"/>
-                </a:solidFill>
-                <a:latin typeface="Calibri"/>
-              </a:rPr>
-              <a:t>node_modules</a:t>
-            </a:r>
-          </a:p>
-          <a:p>
-            <a:pPr>
-              <a:spcAft>
-                <a:spcPts val="400"/>
-              </a:spcAft>
-            </a:pPr>
-            <a:r>
-              <a:rPr sz="1400" b="0" i="0">
-                <a:solidFill>
-                  <a:srgbClr val="FFFFFF"/>
-                </a:solidFill>
-                <a:latin typeface="Calibri"/>
-              </a:rPr>
-              <a:t>.env</a:t>
-            </a:r>
-          </a:p>
-          <a:p>
-            <a:pPr>
-              <a:spcAft>
-                <a:spcPts val="400"/>
-              </a:spcAft>
-            </a:pPr>
-            <a:r>
-              <a:rPr sz="1400" b="0" i="0">
-                <a:solidFill>
-                  <a:srgbClr val="FFFFFF"/>
-                </a:solidFill>
-                <a:latin typeface="Calibri"/>
-              </a:rPr>
-              <a:t>.env.*</a:t>
-            </a:r>
-          </a:p>
-          <a:p>
-            <a:pPr>
-              <a:spcAft>
-                <a:spcPts val="400"/>
-              </a:spcAft>
-            </a:pPr>
-            <a:r>
-              <a:rPr sz="1400" b="0" i="0">
-                <a:solidFill>
-                  <a:srgbClr val="FFFFFF"/>
-                </a:solidFill>
-                <a:latin typeface="Calibri"/>
-              </a:rPr>
-              <a:t>.git</a:t>
-            </a:r>
-          </a:p>
-        </p:txBody>
-      </p:sp>
-      <p:sp>
-        <p:nvSpPr>
-          <p:cNvPr id="9" name="TextBox 8"/>
-          <p:cNvSpPr txBox="1"/>
-          <p:nvPr/>
-        </p:nvSpPr>
-        <p:spPr>
-          <a:xfrm>
-            <a:off x="457200" y="6080760"/>
-            <a:ext cx="11277295" cy="320040"/>
-          </a:xfrm>
-          <a:prstGeom prst="rect">
-            <a:avLst/>
-          </a:prstGeom>
-          <a:noFill/>
-        </p:spPr>
-        <p:txBody>
-          <a:bodyPr wrap="square">
-            <a:spAutoFit/>
-          </a:bodyPr>
-          <a:lstStyle/>
-          <a:p>
-            <a:pPr algn="ctr"/>
-            <a:r>
-              <a:rPr sz="1200" b="0" i="1">
-                <a:solidFill>
-                  <a:srgbClr val="666666"/>
-                </a:solidFill>
-                <a:latin typeface="Calibri"/>
-              </a:rPr>
-              <a:t>EXPOSE, CMD y el «-p» del run llevan el MISMO puerto. Y el «COPY. .» solo es seguro con «.dockerignore» al lado.</a:t>
-            </a:r>
-          </a:p>
-        </p:txBody>
-      </p:sp>
-      <p:sp>
-        <p:nvSpPr>
-          <p:cNvPr id="10" name="TextBox 9"/>
+              <a:rPr sz="1500" b="0" i="0">
+                <a:solidFill>
+                  <a:srgbClr val="333333"/>
+                </a:solidFill>
+                <a:latin typeface="Calibri"/>
+              </a:rPr>
+              <a:t>–   Util para desplegar el mismo servicio muchas veces</a:t>
+            </a:r>
+          </a:p>
+        </p:txBody>
+      </p:sp>
+      <p:sp>
+        <p:nvSpPr>
+          <p:cNvPr id="13" name="TextBox 12"/>
           <p:cNvSpPr txBox="1"/>
           <p:nvPr/>
         </p:nvSpPr>
@@ -10808,7 +10110,7 @@
         <p:spPr>
           <a:xfrm>
             <a:off x="0" y="0"/>
-            <a:ext cx="12191695" cy="1170432"/>
+            <a:ext cx="12191695" cy="960120"/>
           </a:xfrm>
           <a:prstGeom prst="rect">
             <a:avLst/>
@@ -10850,7 +10152,7 @@
         </p:nvSpPr>
         <p:spPr>
           <a:xfrm>
-            <a:off x="0" y="1170432"/>
+            <a:off x="0" y="960120"/>
             <a:ext cx="12191695" cy="41148"/>
           </a:xfrm>
           <a:prstGeom prst="rect">
@@ -10894,7 +10196,7 @@
         <p:spPr>
           <a:xfrm>
             <a:off x="457200" y="164592"/>
-            <a:ext cx="11277295" cy="384048"/>
+            <a:ext cx="11277295" cy="502920"/>
           </a:xfrm>
           <a:prstGeom prst="rect">
             <a:avLst/>
@@ -10914,55 +10216,21 @@
                 </a:solidFill>
                 <a:latin typeface="Calibri"/>
               </a:rPr>
-              <a:t>Herramientas de hoy</a:t>
-            </a:r>
-          </a:p>
-        </p:txBody>
-      </p:sp>
-      <p:sp>
-        <p:nvSpPr>
-          <p:cNvPr id="5" name="TextBox 4"/>
-          <p:cNvSpPr txBox="1"/>
-          <p:nvPr/>
-        </p:nvSpPr>
-        <p:spPr>
-          <a:xfrm>
-            <a:off x="457200" y="566928"/>
-            <a:ext cx="11277295" cy="411480"/>
-          </a:xfrm>
-          <a:prstGeom prst="rect">
-            <a:avLst/>
-          </a:prstGeom>
-          <a:noFill/>
-        </p:spPr>
-        <p:txBody>
-          <a:bodyPr wrap="square">
-            <a:spAutoFit/>
-          </a:bodyPr>
-          <a:lstStyle/>
-          <a:p>
-            <a:r>
-              <a:rPr sz="1400" b="0" i="0">
-                <a:solidFill>
-                  <a:srgbClr val="B8D8EE"/>
-                </a:solidFill>
-                <a:latin typeface="Calibri"/>
-              </a:rPr>
-              <a:t>Gratis · navegador o free tier · sin cuenta de pago</a:t>
-            </a:r>
-          </a:p>
-        </p:txBody>
-      </p:sp>
-      <p:sp>
-        <p:nvSpPr>
-          <p:cNvPr id="6" name="Rounded Rectangle 5"/>
+              <a:t>Dockerfile minimo del stub CloudLite</a:t>
+            </a:r>
+          </a:p>
+        </p:txBody>
+      </p:sp>
+      <p:sp>
+        <p:nvSpPr>
+          <p:cNvPr id="5" name="Rounded Rectangle 4"/>
           <p:cNvSpPr/>
           <p:nvPr/>
         </p:nvSpPr>
         <p:spPr>
           <a:xfrm>
-            <a:off x="457200" y="1591056"/>
-            <a:ext cx="3624986" cy="2299716"/>
+            <a:off x="457200" y="1261872"/>
+            <a:ext cx="11277295" cy="4773168"/>
           </a:xfrm>
           <a:prstGeom prst="roundRect">
             <a:avLst>
@@ -10970,7 +10238,7 @@
             </a:avLst>
           </a:prstGeom>
           <a:solidFill>
-            <a:srgbClr val="F2F2F2"/>
+            <a:srgbClr val="1E2A38"/>
           </a:solidFill>
           <a:ln>
             <a:noFill/>
@@ -11000,14 +10268,14 @@
       </p:sp>
       <p:sp>
         <p:nvSpPr>
-          <p:cNvPr id="7" name="Rectangle 6"/>
+          <p:cNvPr id="6" name="Rectangle 5"/>
           <p:cNvSpPr/>
           <p:nvPr/>
         </p:nvSpPr>
         <p:spPr>
           <a:xfrm>
-            <a:off x="457200" y="1591056"/>
-            <a:ext cx="3624986" cy="64008"/>
+            <a:off x="457200" y="1261872"/>
+            <a:ext cx="11277295" cy="320040"/>
           </a:xfrm>
           <a:prstGeom prst="rect">
             <a:avLst/>
@@ -11043,735 +10311,321 @@
       </p:sp>
       <p:sp>
         <p:nvSpPr>
-          <p:cNvPr id="8" name="Rectangle 7"/>
-          <p:cNvSpPr/>
-          <p:nvPr/>
-        </p:nvSpPr>
-        <p:spPr>
-          <a:xfrm>
-            <a:off x="457200" y="1655064"/>
-            <a:ext cx="3624986" cy="27432"/>
-          </a:xfrm>
-          <a:prstGeom prst="rect">
-            <a:avLst/>
-          </a:prstGeom>
-          <a:solidFill>
-            <a:srgbClr val="FFD000"/>
-          </a:solidFill>
-          <a:ln>
-            <a:noFill/>
-          </a:ln>
-        </p:spPr>
-        <p:style>
-          <a:lnRef idx="1">
-            <a:schemeClr val="accent1"/>
-          </a:lnRef>
-          <a:fillRef idx="3">
-            <a:schemeClr val="accent1"/>
-          </a:fillRef>
-          <a:effectRef idx="2">
-            <a:schemeClr val="accent1"/>
-          </a:effectRef>
-          <a:fontRef idx="minor">
-            <a:schemeClr val="lt1"/>
-          </a:fontRef>
-        </p:style>
-        <p:txBody>
-          <a:bodyPr rtlCol="0" anchor="ctr"/>
+          <p:cNvPr id="7" name="TextBox 6"/>
+          <p:cNvSpPr txBox="1"/>
+          <p:nvPr/>
+        </p:nvSpPr>
+        <p:spPr>
+          <a:xfrm>
+            <a:off x="685800" y="1307592"/>
+            <a:ext cx="10820095" cy="256032"/>
+          </a:xfrm>
+          <a:prstGeom prst="rect">
+            <a:avLst/>
+          </a:prstGeom>
+          <a:noFill/>
+        </p:spPr>
+        <p:txBody>
+          <a:bodyPr wrap="square" anchor="ctr"/>
+          <a:lstStyle/>
+          <a:p>
+            <a:r>
+              <a:rPr sz="1000" b="1" i="0">
+                <a:solidFill>
+                  <a:srgbClr val="269CCB"/>
+                </a:solidFill>
+                <a:latin typeface="Calibri"/>
+              </a:rPr>
+              <a:t>● ● ●</a:t>
+            </a:r>
+          </a:p>
+        </p:txBody>
+      </p:sp>
+      <p:sp>
+        <p:nvSpPr>
+          <p:cNvPr id="8" name="TextBox 7"/>
+          <p:cNvSpPr txBox="1"/>
+          <p:nvPr/>
+        </p:nvSpPr>
+        <p:spPr>
+          <a:xfrm>
+            <a:off x="777240" y="1719072"/>
+            <a:ext cx="10637215" cy="4133087"/>
+          </a:xfrm>
+          <a:prstGeom prst="rect">
+            <a:avLst/>
+          </a:prstGeom>
+          <a:noFill/>
+        </p:spPr>
+        <p:txBody>
+          <a:bodyPr wrap="square">
+            <a:spAutoFit/>
+          </a:bodyPr>
+          <a:lstStyle/>
+          <a:p>
+            <a:pPr>
+              <a:spcAft>
+                <a:spcPts val="400"/>
+              </a:spcAft>
+            </a:pPr>
+            <a:r>
+              <a:rPr sz="1400" b="0" i="0">
+                <a:solidFill>
+                  <a:srgbClr val="FFFFFF"/>
+                </a:solidFill>
+                <a:latin typeface="Calibri"/>
+              </a:rPr>
+              <a:t>FROM node:20-alpine          # base ligera y etiqueta FIJA: nunca latest</a:t>
+            </a:r>
+          </a:p>
+          <a:p>
+            <a:pPr>
+              <a:spcAft>
+                <a:spcPts val="400"/>
+              </a:spcAft>
+            </a:pPr>
+            <a:r>
+              <a:rPr sz="1400" b="0" i="0">
+                <a:solidFill>
+                  <a:srgbClr val="FFFFFF"/>
+                </a:solidFill>
+                <a:latin typeface="Calibri"/>
+              </a:rPr>
+              <a:t>WORKDIR /app</a:t>
+            </a:r>
+          </a:p>
+          <a:p>
+            <a:pPr>
+              <a:spcAft>
+                <a:spcPts val="400"/>
+              </a:spcAft>
+            </a:pPr>
+            <a:r>
+              <a:rPr sz="1400" b="0" i="0">
+                <a:solidFill>
+                  <a:srgbClr val="FFFFFF"/>
+                </a:solidFill>
+                <a:latin typeface="Calibri"/>
+              </a:rPr>
+              <a:t>COPY package*.json ./        # dependencias PRIMERO: cambian poco</a:t>
+            </a:r>
+          </a:p>
+          <a:p>
+            <a:pPr>
+              <a:spcAft>
+                <a:spcPts val="400"/>
+              </a:spcAft>
+            </a:pPr>
+            <a:r>
+              <a:rPr sz="1400" b="0" i="0">
+                <a:solidFill>
+                  <a:srgbClr val="FFFFFF"/>
+                </a:solidFill>
+                <a:latin typeface="Calibri"/>
+              </a:rPr>
+              <a:t>RUN npm ci --omit=dev        # se instalan DENTRO de la imagen</a:t>
+            </a:r>
+          </a:p>
+          <a:p>
+            <a:pPr>
+              <a:spcAft>
+                <a:spcPts val="400"/>
+              </a:spcAft>
+            </a:pPr>
+            <a:r>
+              <a:rPr sz="1400" b="0" i="0">
+                <a:solidFill>
+                  <a:srgbClr val="FFFFFF"/>
+                </a:solidFill>
+                <a:latin typeface="Calibri"/>
+              </a:rPr>
+              <a:t>COPY..                     # el codigo despues: cambia en cada commit</a:t>
+            </a:r>
+          </a:p>
+          <a:p>
+            <a:pPr>
+              <a:spcAft>
+                <a:spcPts val="400"/>
+              </a:spcAft>
+            </a:pPr>
+            <a:r>
+              <a:rPr sz="1400" b="0" i="0">
+                <a:solidFill>
+                  <a:srgbClr val="FFFFFF"/>
+                </a:solidFill>
+                <a:latin typeface="Calibri"/>
+              </a:rPr>
+              <a:t>EXPOSE 8080                  # documenta el puerto; NO lo publica</a:t>
+            </a:r>
+          </a:p>
+          <a:p>
+            <a:pPr>
+              <a:spcAft>
+                <a:spcPts val="400"/>
+              </a:spcAft>
+            </a:pPr>
+            <a:r>
+              <a:rPr sz="1400" b="0" i="0">
+                <a:solidFill>
+                  <a:srgbClr val="FFFFFF"/>
+                </a:solidFill>
+                <a:latin typeface="Calibri"/>
+              </a:rPr>
+              <a:t>CMD ["node", "server.js"]    # UN proceso principal por contenedor</a:t>
+            </a:r>
+          </a:p>
+          <a:p>
+            <a:pPr>
+              <a:spcAft>
+                <a:spcPts val="400"/>
+              </a:spcAft>
+            </a:pPr>
+            <a:r>
+              <a:rPr sz="1400" b="0" i="0">
+                <a:solidFill>
+                  <a:srgbClr val="FFFFFF"/>
+                </a:solidFill>
+                <a:latin typeface="Calibri"/>
+              </a:rPr>
+              <a:t/>
+            </a:r>
+          </a:p>
+          <a:p>
+            <a:pPr>
+              <a:spcAft>
+                <a:spcPts val="400"/>
+              </a:spcAft>
+            </a:pPr>
+            <a:r>
+              <a:rPr sz="1400" b="0" i="0">
+                <a:solidFill>
+                  <a:srgbClr val="FFFFFF"/>
+                </a:solidFill>
+                <a:latin typeface="Calibri"/>
+              </a:rPr>
+              <a:t># .dockerignore  &lt;- archivo aparte, en la misma carpeta que el Dockerfile.</a:t>
+            </a:r>
+          </a:p>
+          <a:p>
+            <a:pPr>
+              <a:spcAft>
+                <a:spcPts val="400"/>
+              </a:spcAft>
+            </a:pPr>
+            <a:r>
+              <a:rPr sz="1400" b="0" i="0">
+                <a:solidFill>
+                  <a:srgbClr val="FFFFFF"/>
+                </a:solidFill>
+                <a:latin typeface="Calibri"/>
+              </a:rPr>
+              <a:t># Sin el, el COPY.. de arriba se lleva el .env a las capas de la imagen.</a:t>
+            </a:r>
+          </a:p>
+          <a:p>
+            <a:pPr>
+              <a:spcAft>
+                <a:spcPts val="400"/>
+              </a:spcAft>
+            </a:pPr>
+            <a:r>
+              <a:rPr sz="1400" b="0" i="0">
+                <a:solidFill>
+                  <a:srgbClr val="FFFFFF"/>
+                </a:solidFill>
+                <a:latin typeface="Calibri"/>
+              </a:rPr>
+              <a:t>node_modules</a:t>
+            </a:r>
+          </a:p>
+          <a:p>
+            <a:pPr>
+              <a:spcAft>
+                <a:spcPts val="400"/>
+              </a:spcAft>
+            </a:pPr>
+            <a:r>
+              <a:rPr sz="1400" b="0" i="0">
+                <a:solidFill>
+                  <a:srgbClr val="FFFFFF"/>
+                </a:solidFill>
+                <a:latin typeface="Calibri"/>
+              </a:rPr>
+              <a:t>.env</a:t>
+            </a:r>
+          </a:p>
+          <a:p>
+            <a:pPr>
+              <a:spcAft>
+                <a:spcPts val="400"/>
+              </a:spcAft>
+            </a:pPr>
+            <a:r>
+              <a:rPr sz="1400" b="0" i="0">
+                <a:solidFill>
+                  <a:srgbClr val="FFFFFF"/>
+                </a:solidFill>
+                <a:latin typeface="Calibri"/>
+              </a:rPr>
+              <a:t>.env.*</a:t>
+            </a:r>
+          </a:p>
+          <a:p>
+            <a:pPr>
+              <a:spcAft>
+                <a:spcPts val="400"/>
+              </a:spcAft>
+            </a:pPr>
+            <a:r>
+              <a:rPr sz="1400" b="0" i="0">
+                <a:solidFill>
+                  <a:srgbClr val="FFFFFF"/>
+                </a:solidFill>
+                <a:latin typeface="Calibri"/>
+              </a:rPr>
+              <a:t>.git</a:t>
+            </a:r>
+          </a:p>
+        </p:txBody>
+      </p:sp>
+      <p:sp>
+        <p:nvSpPr>
+          <p:cNvPr id="9" name="TextBox 8"/>
+          <p:cNvSpPr txBox="1"/>
+          <p:nvPr/>
+        </p:nvSpPr>
+        <p:spPr>
+          <a:xfrm>
+            <a:off x="457200" y="6080760"/>
+            <a:ext cx="11277295" cy="320040"/>
+          </a:xfrm>
+          <a:prstGeom prst="rect">
+            <a:avLst/>
+          </a:prstGeom>
+          <a:noFill/>
+        </p:spPr>
+        <p:txBody>
+          <a:bodyPr wrap="square">
+            <a:spAutoFit/>
+          </a:bodyPr>
           <a:lstStyle/>
           <a:p>
             <a:pPr algn="ctr"/>
-          </a:p>
-        </p:txBody>
-      </p:sp>
-      <p:pic>
-        <p:nvPicPr>
-          <p:cNvPr id="9" name="Picture 8" descr="killercoda.png"/>
-          <p:cNvPicPr>
-            <a:picLocks noChangeAspect="1"/>
-          </p:cNvPicPr>
-          <p:nvPr/>
-        </p:nvPicPr>
-        <p:blipFill>
-          <a:blip r:embed="rId2"/>
-          <a:stretch>
-            <a:fillRect/>
-          </a:stretch>
-        </p:blipFill>
-        <p:spPr>
-          <a:xfrm>
-            <a:off x="1659331" y="1847087"/>
-            <a:ext cx="1220724" cy="1220724"/>
-          </a:xfrm>
-          <a:prstGeom prst="rect">
-            <a:avLst/>
-          </a:prstGeom>
-        </p:spPr>
-      </p:pic>
+            <a:r>
+              <a:rPr sz="1200" b="0" i="1">
+                <a:solidFill>
+                  <a:srgbClr val="666666"/>
+                </a:solidFill>
+                <a:latin typeface="Calibri"/>
+              </a:rPr>
+              <a:t>EXPOSE, CMD y el «-p» del run llevan el MISMO puerto. Y el «COPY. .» solo es seguro con «.dockerignore» al lado.</a:t>
+            </a:r>
+          </a:p>
+        </p:txBody>
+      </p:sp>
       <p:sp>
         <p:nvSpPr>
           <p:cNvPr id="10" name="TextBox 9"/>
-          <p:cNvSpPr txBox="1"/>
-          <p:nvPr/>
-        </p:nvSpPr>
-        <p:spPr>
-          <a:xfrm>
-            <a:off x="530352" y="3159251"/>
-            <a:ext cx="3478682" cy="621792"/>
-          </a:xfrm>
-          <a:prstGeom prst="rect">
-            <a:avLst/>
-          </a:prstGeom>
-          <a:noFill/>
-        </p:spPr>
-        <p:txBody>
-          <a:bodyPr wrap="square" anchor="t"/>
-          <a:lstStyle/>
-          <a:p>
-            <a:pPr algn="ctr"/>
-            <a:r>
-              <a:rPr sz="1300" b="1" i="0">
-                <a:solidFill>
-                  <a:srgbClr val="095292"/>
-                </a:solidFill>
-                <a:latin typeface="Calibri"/>
-              </a:rPr>
-              <a:t>Killercoda</a:t>
-            </a:r>
-          </a:p>
-          <a:p>
-            <a:pPr algn="ctr">
-              <a:spcBef>
-                <a:spcPts val="200"/>
-              </a:spcBef>
-            </a:pPr>
-            <a:r>
-              <a:rPr sz="1000" b="0" i="0">
-                <a:solidFill>
-                  <a:srgbClr val="666666"/>
-                </a:solidFill>
-                <a:latin typeface="Calibri"/>
-              </a:rPr>
-              <a:t>Lab del dia · sesion 1 h</a:t>
-            </a:r>
-          </a:p>
-        </p:txBody>
-      </p:sp>
-      <p:sp>
-        <p:nvSpPr>
-          <p:cNvPr id="11" name="Rounded Rectangle 10"/>
-          <p:cNvSpPr/>
-          <p:nvPr/>
-        </p:nvSpPr>
-        <p:spPr>
-          <a:xfrm>
-            <a:off x="4283354" y="1591056"/>
-            <a:ext cx="3624986" cy="2299716"/>
-          </a:xfrm>
-          <a:prstGeom prst="roundRect">
-            <a:avLst>
-              <a:gd name="adj" fmla="val 12000"/>
-            </a:avLst>
-          </a:prstGeom>
-          <a:solidFill>
-            <a:srgbClr val="F2F2F2"/>
-          </a:solidFill>
-          <a:ln>
-            <a:noFill/>
-          </a:ln>
-        </p:spPr>
-        <p:style>
-          <a:lnRef idx="1">
-            <a:schemeClr val="accent1"/>
-          </a:lnRef>
-          <a:fillRef idx="3">
-            <a:schemeClr val="accent1"/>
-          </a:fillRef>
-          <a:effectRef idx="2">
-            <a:schemeClr val="accent1"/>
-          </a:effectRef>
-          <a:fontRef idx="minor">
-            <a:schemeClr val="lt1"/>
-          </a:fontRef>
-        </p:style>
-        <p:txBody>
-          <a:bodyPr rtlCol="0" anchor="ctr"/>
-          <a:lstStyle/>
-          <a:p>
-            <a:pPr algn="ctr"/>
-          </a:p>
-        </p:txBody>
-      </p:sp>
-      <p:sp>
-        <p:nvSpPr>
-          <p:cNvPr id="12" name="Rectangle 11"/>
-          <p:cNvSpPr/>
-          <p:nvPr/>
-        </p:nvSpPr>
-        <p:spPr>
-          <a:xfrm>
-            <a:off x="4283354" y="1591056"/>
-            <a:ext cx="3624986" cy="64008"/>
-          </a:xfrm>
-          <a:prstGeom prst="rect">
-            <a:avLst/>
-          </a:prstGeom>
-          <a:solidFill>
-            <a:srgbClr val="095292"/>
-          </a:solidFill>
-          <a:ln>
-            <a:noFill/>
-          </a:ln>
-        </p:spPr>
-        <p:style>
-          <a:lnRef idx="1">
-            <a:schemeClr val="accent1"/>
-          </a:lnRef>
-          <a:fillRef idx="3">
-            <a:schemeClr val="accent1"/>
-          </a:fillRef>
-          <a:effectRef idx="2">
-            <a:schemeClr val="accent1"/>
-          </a:effectRef>
-          <a:fontRef idx="minor">
-            <a:schemeClr val="lt1"/>
-          </a:fontRef>
-        </p:style>
-        <p:txBody>
-          <a:bodyPr rtlCol="0" anchor="ctr"/>
-          <a:lstStyle/>
-          <a:p>
-            <a:pPr algn="ctr"/>
-          </a:p>
-        </p:txBody>
-      </p:sp>
-      <p:sp>
-        <p:nvSpPr>
-          <p:cNvPr id="13" name="Rectangle 12"/>
-          <p:cNvSpPr/>
-          <p:nvPr/>
-        </p:nvSpPr>
-        <p:spPr>
-          <a:xfrm>
-            <a:off x="4283354" y="1655064"/>
-            <a:ext cx="3624986" cy="27432"/>
-          </a:xfrm>
-          <a:prstGeom prst="rect">
-            <a:avLst/>
-          </a:prstGeom>
-          <a:solidFill>
-            <a:srgbClr val="FFD000"/>
-          </a:solidFill>
-          <a:ln>
-            <a:noFill/>
-          </a:ln>
-        </p:spPr>
-        <p:style>
-          <a:lnRef idx="1">
-            <a:schemeClr val="accent1"/>
-          </a:lnRef>
-          <a:fillRef idx="3">
-            <a:schemeClr val="accent1"/>
-          </a:fillRef>
-          <a:effectRef idx="2">
-            <a:schemeClr val="accent1"/>
-          </a:effectRef>
-          <a:fontRef idx="minor">
-            <a:schemeClr val="lt1"/>
-          </a:fontRef>
-        </p:style>
-        <p:txBody>
-          <a:bodyPr rtlCol="0" anchor="ctr"/>
-          <a:lstStyle/>
-          <a:p>
-            <a:pPr algn="ctr"/>
-          </a:p>
-        </p:txBody>
-      </p:sp>
-      <p:pic>
-        <p:nvPicPr>
-          <p:cNvPr id="14" name="Picture 13" descr="labex.png"/>
-          <p:cNvPicPr>
-            <a:picLocks noChangeAspect="1"/>
-          </p:cNvPicPr>
-          <p:nvPr/>
-        </p:nvPicPr>
-        <p:blipFill>
-          <a:blip r:embed="rId3"/>
-          <a:stretch>
-            <a:fillRect/>
-          </a:stretch>
-        </p:blipFill>
-        <p:spPr>
-          <a:xfrm>
-            <a:off x="5485485" y="1847087"/>
-            <a:ext cx="1220724" cy="1220724"/>
-          </a:xfrm>
-          <a:prstGeom prst="rect">
-            <a:avLst/>
-          </a:prstGeom>
-        </p:spPr>
-      </p:pic>
-      <p:sp>
-        <p:nvSpPr>
-          <p:cNvPr id="15" name="TextBox 14"/>
-          <p:cNvSpPr txBox="1"/>
-          <p:nvPr/>
-        </p:nvSpPr>
-        <p:spPr>
-          <a:xfrm>
-            <a:off x="4356506" y="3159251"/>
-            <a:ext cx="3478682" cy="621792"/>
-          </a:xfrm>
-          <a:prstGeom prst="rect">
-            <a:avLst/>
-          </a:prstGeom>
-          <a:noFill/>
-        </p:spPr>
-        <p:txBody>
-          <a:bodyPr wrap="square" anchor="t"/>
-          <a:lstStyle/>
-          <a:p>
-            <a:pPr algn="ctr"/>
-            <a:r>
-              <a:rPr sz="1300" b="1" i="0">
-                <a:solidFill>
-                  <a:srgbClr val="095292"/>
-                </a:solidFill>
-                <a:latin typeface="Calibri"/>
-              </a:rPr>
-              <a:t>LabEx Docker Playground</a:t>
-            </a:r>
-          </a:p>
-          <a:p>
-            <a:pPr algn="ctr">
-              <a:spcBef>
-                <a:spcPts val="200"/>
-              </a:spcBef>
-            </a:pPr>
-            <a:r>
-              <a:rPr sz="1000" b="0" i="0">
-                <a:solidFill>
-                  <a:srgbClr val="666666"/>
-                </a:solidFill>
-                <a:latin typeface="Calibri"/>
-              </a:rPr>
-              <a:t>Alterna · 3 al dia</a:t>
-            </a:r>
-          </a:p>
-        </p:txBody>
-      </p:sp>
-      <p:sp>
-        <p:nvSpPr>
-          <p:cNvPr id="16" name="Rounded Rectangle 15"/>
-          <p:cNvSpPr/>
-          <p:nvPr/>
-        </p:nvSpPr>
-        <p:spPr>
-          <a:xfrm>
-            <a:off x="8109508" y="1591056"/>
-            <a:ext cx="3624986" cy="2299716"/>
-          </a:xfrm>
-          <a:prstGeom prst="roundRect">
-            <a:avLst>
-              <a:gd name="adj" fmla="val 12000"/>
-            </a:avLst>
-          </a:prstGeom>
-          <a:solidFill>
-            <a:srgbClr val="F2F2F2"/>
-          </a:solidFill>
-          <a:ln>
-            <a:noFill/>
-          </a:ln>
-        </p:spPr>
-        <p:style>
-          <a:lnRef idx="1">
-            <a:schemeClr val="accent1"/>
-          </a:lnRef>
-          <a:fillRef idx="3">
-            <a:schemeClr val="accent1"/>
-          </a:fillRef>
-          <a:effectRef idx="2">
-            <a:schemeClr val="accent1"/>
-          </a:effectRef>
-          <a:fontRef idx="minor">
-            <a:schemeClr val="lt1"/>
-          </a:fontRef>
-        </p:style>
-        <p:txBody>
-          <a:bodyPr rtlCol="0" anchor="ctr"/>
-          <a:lstStyle/>
-          <a:p>
-            <a:pPr algn="ctr"/>
-          </a:p>
-        </p:txBody>
-      </p:sp>
-      <p:sp>
-        <p:nvSpPr>
-          <p:cNvPr id="17" name="Rectangle 16"/>
-          <p:cNvSpPr/>
-          <p:nvPr/>
-        </p:nvSpPr>
-        <p:spPr>
-          <a:xfrm>
-            <a:off x="8109508" y="1591056"/>
-            <a:ext cx="3624986" cy="64008"/>
-          </a:xfrm>
-          <a:prstGeom prst="rect">
-            <a:avLst/>
-          </a:prstGeom>
-          <a:solidFill>
-            <a:srgbClr val="095292"/>
-          </a:solidFill>
-          <a:ln>
-            <a:noFill/>
-          </a:ln>
-        </p:spPr>
-        <p:style>
-          <a:lnRef idx="1">
-            <a:schemeClr val="accent1"/>
-          </a:lnRef>
-          <a:fillRef idx="3">
-            <a:schemeClr val="accent1"/>
-          </a:fillRef>
-          <a:effectRef idx="2">
-            <a:schemeClr val="accent1"/>
-          </a:effectRef>
-          <a:fontRef idx="minor">
-            <a:schemeClr val="lt1"/>
-          </a:fontRef>
-        </p:style>
-        <p:txBody>
-          <a:bodyPr rtlCol="0" anchor="ctr"/>
-          <a:lstStyle/>
-          <a:p>
-            <a:pPr algn="ctr"/>
-          </a:p>
-        </p:txBody>
-      </p:sp>
-      <p:sp>
-        <p:nvSpPr>
-          <p:cNvPr id="18" name="Rectangle 17"/>
-          <p:cNvSpPr/>
-          <p:nvPr/>
-        </p:nvSpPr>
-        <p:spPr>
-          <a:xfrm>
-            <a:off x="8109508" y="1655064"/>
-            <a:ext cx="3624986" cy="27432"/>
-          </a:xfrm>
-          <a:prstGeom prst="rect">
-            <a:avLst/>
-          </a:prstGeom>
-          <a:solidFill>
-            <a:srgbClr val="FFD000"/>
-          </a:solidFill>
-          <a:ln>
-            <a:noFill/>
-          </a:ln>
-        </p:spPr>
-        <p:style>
-          <a:lnRef idx="1">
-            <a:schemeClr val="accent1"/>
-          </a:lnRef>
-          <a:fillRef idx="3">
-            <a:schemeClr val="accent1"/>
-          </a:fillRef>
-          <a:effectRef idx="2">
-            <a:schemeClr val="accent1"/>
-          </a:effectRef>
-          <a:fontRef idx="minor">
-            <a:schemeClr val="lt1"/>
-          </a:fontRef>
-        </p:style>
-        <p:txBody>
-          <a:bodyPr rtlCol="0" anchor="ctr"/>
-          <a:lstStyle/>
-          <a:p>
-            <a:pPr algn="ctr"/>
-          </a:p>
-        </p:txBody>
-      </p:sp>
-      <p:pic>
-        <p:nvPicPr>
-          <p:cNvPr id="19" name="Picture 18" descr="google_docs.png"/>
-          <p:cNvPicPr>
-            <a:picLocks noChangeAspect="1"/>
-          </p:cNvPicPr>
-          <p:nvPr/>
-        </p:nvPicPr>
-        <p:blipFill>
-          <a:blip r:embed="rId4"/>
-          <a:stretch>
-            <a:fillRect/>
-          </a:stretch>
-        </p:blipFill>
-        <p:spPr>
-          <a:xfrm>
-            <a:off x="9311640" y="1847087"/>
-            <a:ext cx="1220724" cy="1220724"/>
-          </a:xfrm>
-          <a:prstGeom prst="rect">
-            <a:avLst/>
-          </a:prstGeom>
-        </p:spPr>
-      </p:pic>
-      <p:sp>
-        <p:nvSpPr>
-          <p:cNvPr id="20" name="TextBox 19"/>
-          <p:cNvSpPr txBox="1"/>
-          <p:nvPr/>
-        </p:nvSpPr>
-        <p:spPr>
-          <a:xfrm>
-            <a:off x="8182660" y="3159251"/>
-            <a:ext cx="3478682" cy="621792"/>
-          </a:xfrm>
-          <a:prstGeom prst="rect">
-            <a:avLst/>
-          </a:prstGeom>
-          <a:noFill/>
-        </p:spPr>
-        <p:txBody>
-          <a:bodyPr wrap="square" anchor="t"/>
-          <a:lstStyle/>
-          <a:p>
-            <a:pPr algn="ctr"/>
-            <a:r>
-              <a:rPr sz="1300" b="1" i="0">
-                <a:solidFill>
-                  <a:srgbClr val="095292"/>
-                </a:solidFill>
-                <a:latin typeface="Calibri"/>
-              </a:rPr>
-              <a:t>Google Docs</a:t>
-            </a:r>
-          </a:p>
-          <a:p>
-            <a:pPr algn="ctr">
-              <a:spcBef>
-                <a:spcPts val="200"/>
-              </a:spcBef>
-            </a:pPr>
-            <a:r>
-              <a:rPr sz="1000" b="0" i="0">
-                <a:solidFill>
-                  <a:srgbClr val="666666"/>
-                </a:solidFill>
-                <a:latin typeface="Calibri"/>
-              </a:rPr>
-              <a:t>Informe PI</a:t>
-            </a:r>
-          </a:p>
-        </p:txBody>
-      </p:sp>
-      <p:sp>
-        <p:nvSpPr>
-          <p:cNvPr id="21" name="Rounded Rectangle 20"/>
-          <p:cNvSpPr/>
-          <p:nvPr/>
-        </p:nvSpPr>
-        <p:spPr>
-          <a:xfrm>
-            <a:off x="4283354" y="4055364"/>
-            <a:ext cx="3624986" cy="2299716"/>
-          </a:xfrm>
-          <a:prstGeom prst="roundRect">
-            <a:avLst>
-              <a:gd name="adj" fmla="val 12000"/>
-            </a:avLst>
-          </a:prstGeom>
-          <a:solidFill>
-            <a:srgbClr val="F2F2F2"/>
-          </a:solidFill>
-          <a:ln>
-            <a:noFill/>
-          </a:ln>
-        </p:spPr>
-        <p:style>
-          <a:lnRef idx="1">
-            <a:schemeClr val="accent1"/>
-          </a:lnRef>
-          <a:fillRef idx="3">
-            <a:schemeClr val="accent1"/>
-          </a:fillRef>
-          <a:effectRef idx="2">
-            <a:schemeClr val="accent1"/>
-          </a:effectRef>
-          <a:fontRef idx="minor">
-            <a:schemeClr val="lt1"/>
-          </a:fontRef>
-        </p:style>
-        <p:txBody>
-          <a:bodyPr rtlCol="0" anchor="ctr"/>
-          <a:lstStyle/>
-          <a:p>
-            <a:pPr algn="ctr"/>
-          </a:p>
-        </p:txBody>
-      </p:sp>
-      <p:sp>
-        <p:nvSpPr>
-          <p:cNvPr id="22" name="Rectangle 21"/>
-          <p:cNvSpPr/>
-          <p:nvPr/>
-        </p:nvSpPr>
-        <p:spPr>
-          <a:xfrm>
-            <a:off x="4283354" y="4055364"/>
-            <a:ext cx="3624986" cy="64008"/>
-          </a:xfrm>
-          <a:prstGeom prst="rect">
-            <a:avLst/>
-          </a:prstGeom>
-          <a:solidFill>
-            <a:srgbClr val="095292"/>
-          </a:solidFill>
-          <a:ln>
-            <a:noFill/>
-          </a:ln>
-        </p:spPr>
-        <p:style>
-          <a:lnRef idx="1">
-            <a:schemeClr val="accent1"/>
-          </a:lnRef>
-          <a:fillRef idx="3">
-            <a:schemeClr val="accent1"/>
-          </a:fillRef>
-          <a:effectRef idx="2">
-            <a:schemeClr val="accent1"/>
-          </a:effectRef>
-          <a:fontRef idx="minor">
-            <a:schemeClr val="lt1"/>
-          </a:fontRef>
-        </p:style>
-        <p:txBody>
-          <a:bodyPr rtlCol="0" anchor="ctr"/>
-          <a:lstStyle/>
-          <a:p>
-            <a:pPr algn="ctr"/>
-          </a:p>
-        </p:txBody>
-      </p:sp>
-      <p:sp>
-        <p:nvSpPr>
-          <p:cNvPr id="23" name="Rectangle 22"/>
-          <p:cNvSpPr/>
-          <p:nvPr/>
-        </p:nvSpPr>
-        <p:spPr>
-          <a:xfrm>
-            <a:off x="4283354" y="4119372"/>
-            <a:ext cx="3624986" cy="27432"/>
-          </a:xfrm>
-          <a:prstGeom prst="rect">
-            <a:avLst/>
-          </a:prstGeom>
-          <a:solidFill>
-            <a:srgbClr val="FFD000"/>
-          </a:solidFill>
-          <a:ln>
-            <a:noFill/>
-          </a:ln>
-        </p:spPr>
-        <p:style>
-          <a:lnRef idx="1">
-            <a:schemeClr val="accent1"/>
-          </a:lnRef>
-          <a:fillRef idx="3">
-            <a:schemeClr val="accent1"/>
-          </a:fillRef>
-          <a:effectRef idx="2">
-            <a:schemeClr val="accent1"/>
-          </a:effectRef>
-          <a:fontRef idx="minor">
-            <a:schemeClr val="lt1"/>
-          </a:fontRef>
-        </p:style>
-        <p:txBody>
-          <a:bodyPr rtlCol="0" anchor="ctr"/>
-          <a:lstStyle/>
-          <a:p>
-            <a:pPr algn="ctr"/>
-          </a:p>
-        </p:txBody>
-      </p:sp>
-      <p:pic>
-        <p:nvPicPr>
-          <p:cNvPr id="24" name="Picture 23" descr="examlab.png"/>
-          <p:cNvPicPr>
-            <a:picLocks noChangeAspect="1"/>
-          </p:cNvPicPr>
-          <p:nvPr/>
-        </p:nvPicPr>
-        <p:blipFill>
-          <a:blip r:embed="rId5"/>
-          <a:stretch>
-            <a:fillRect/>
-          </a:stretch>
-        </p:blipFill>
-        <p:spPr>
-          <a:xfrm>
-            <a:off x="5485485" y="4311396"/>
-            <a:ext cx="1220724" cy="1220724"/>
-          </a:xfrm>
-          <a:prstGeom prst="rect">
-            <a:avLst/>
-          </a:prstGeom>
-        </p:spPr>
-      </p:pic>
-      <p:sp>
-        <p:nvSpPr>
-          <p:cNvPr id="25" name="TextBox 24"/>
-          <p:cNvSpPr txBox="1"/>
-          <p:nvPr/>
-        </p:nvSpPr>
-        <p:spPr>
-          <a:xfrm>
-            <a:off x="4356506" y="5623560"/>
-            <a:ext cx="3478682" cy="621792"/>
-          </a:xfrm>
-          <a:prstGeom prst="rect">
-            <a:avLst/>
-          </a:prstGeom>
-          <a:noFill/>
-        </p:spPr>
-        <p:txBody>
-          <a:bodyPr wrap="square" anchor="t"/>
-          <a:lstStyle/>
-          <a:p>
-            <a:pPr algn="ctr"/>
-            <a:r>
-              <a:rPr sz="1300" b="1" i="0">
-                <a:solidFill>
-                  <a:srgbClr val="095292"/>
-                </a:solidFill>
-                <a:latin typeface="Calibri"/>
-              </a:rPr>
-              <a:t>la plataforma del curso</a:t>
-            </a:r>
-          </a:p>
-          <a:p>
-            <a:pPr algn="ctr">
-              <a:spcBef>
-                <a:spcPts val="200"/>
-              </a:spcBef>
-            </a:pPr>
-            <a:r>
-              <a:rPr sz="1000" b="0" i="0">
-                <a:solidFill>
-                  <a:srgbClr val="666666"/>
-                </a:solidFill>
-                <a:latin typeface="Calibri"/>
-              </a:rPr>
-              <a:t>Donde se entrega</a:t>
-            </a:r>
-          </a:p>
-        </p:txBody>
-      </p:sp>
-      <p:sp>
-        <p:nvSpPr>
-          <p:cNvPr id="26" name="TextBox 25"/>
           <p:cNvSpPr txBox="1"/>
           <p:nvPr/>
         </p:nvSpPr>
@@ -12143,7 +10997,7 @@
         <p:spPr>
           <a:xfrm>
             <a:off x="0" y="0"/>
-            <a:ext cx="12191695" cy="960120"/>
+            <a:ext cx="12191695" cy="1170432"/>
           </a:xfrm>
           <a:prstGeom prst="rect">
             <a:avLst/>
@@ -12185,7 +11039,7 @@
         </p:nvSpPr>
         <p:spPr>
           <a:xfrm>
-            <a:off x="0" y="960120"/>
+            <a:off x="0" y="1170432"/>
             <a:ext cx="12191695" cy="41148"/>
           </a:xfrm>
           <a:prstGeom prst="rect">
@@ -12229,7 +11083,7 @@
         <p:spPr>
           <a:xfrm>
             <a:off x="457200" y="164592"/>
-            <a:ext cx="11277295" cy="502920"/>
+            <a:ext cx="11277295" cy="384048"/>
           </a:xfrm>
           <a:prstGeom prst="rect">
             <a:avLst/>
@@ -12249,7 +11103,7 @@
                 </a:solidFill>
                 <a:latin typeface="Calibri"/>
               </a:rPr>
-              <a:t>PI CloudLite — entregable de hoy</a:t>
+              <a:t>Herramientas de hoy</a:t>
             </a:r>
           </a:p>
         </p:txBody>
@@ -12262,8 +11116,8 @@
         </p:nvSpPr>
         <p:spPr>
           <a:xfrm>
-            <a:off x="457200" y="1170432"/>
-            <a:ext cx="11277295" cy="5230368"/>
+            <a:off x="457200" y="566928"/>
+            <a:ext cx="11277295" cy="411480"/>
           </a:xfrm>
           <a:prstGeom prst="rect">
             <a:avLst/>
@@ -12276,119 +11130,837 @@
           </a:bodyPr>
           <a:lstStyle/>
           <a:p>
-            <a:pPr>
-              <a:spcAft>
-                <a:spcPts val="800"/>
-              </a:spcAft>
+            <a:r>
+              <a:rPr sz="1400" b="0" i="0">
+                <a:solidFill>
+                  <a:srgbClr val="B8D8EE"/>
+                </a:solidFill>
+                <a:latin typeface="Calibri"/>
+              </a:rPr>
+              <a:t>Gratis · navegador o free tier · sin cuenta de pago</a:t>
+            </a:r>
+          </a:p>
+        </p:txBody>
+      </p:sp>
+      <p:sp>
+        <p:nvSpPr>
+          <p:cNvPr id="6" name="Rounded Rectangle 5"/>
+          <p:cNvSpPr/>
+          <p:nvPr/>
+        </p:nvSpPr>
+        <p:spPr>
+          <a:xfrm>
+            <a:off x="457200" y="1591056"/>
+            <a:ext cx="3624986" cy="2299716"/>
+          </a:xfrm>
+          <a:prstGeom prst="roundRect">
+            <a:avLst>
+              <a:gd name="adj" fmla="val 12000"/>
+            </a:avLst>
+          </a:prstGeom>
+          <a:solidFill>
+            <a:srgbClr val="F2F2F2"/>
+          </a:solidFill>
+          <a:ln>
+            <a:noFill/>
+          </a:ln>
+        </p:spPr>
+        <p:style>
+          <a:lnRef idx="1">
+            <a:schemeClr val="accent1"/>
+          </a:lnRef>
+          <a:fillRef idx="3">
+            <a:schemeClr val="accent1"/>
+          </a:fillRef>
+          <a:effectRef idx="2">
+            <a:schemeClr val="accent1"/>
+          </a:effectRef>
+          <a:fontRef idx="minor">
+            <a:schemeClr val="lt1"/>
+          </a:fontRef>
+        </p:style>
+        <p:txBody>
+          <a:bodyPr rtlCol="0" anchor="ctr"/>
+          <a:lstStyle/>
+          <a:p>
+            <a:pPr algn="ctr"/>
+          </a:p>
+        </p:txBody>
+      </p:sp>
+      <p:sp>
+        <p:nvSpPr>
+          <p:cNvPr id="7" name="Rectangle 6"/>
+          <p:cNvSpPr/>
+          <p:nvPr/>
+        </p:nvSpPr>
+        <p:spPr>
+          <a:xfrm>
+            <a:off x="457200" y="1591056"/>
+            <a:ext cx="3624986" cy="64008"/>
+          </a:xfrm>
+          <a:prstGeom prst="rect">
+            <a:avLst/>
+          </a:prstGeom>
+          <a:solidFill>
+            <a:srgbClr val="095292"/>
+          </a:solidFill>
+          <a:ln>
+            <a:noFill/>
+          </a:ln>
+        </p:spPr>
+        <p:style>
+          <a:lnRef idx="1">
+            <a:schemeClr val="accent1"/>
+          </a:lnRef>
+          <a:fillRef idx="3">
+            <a:schemeClr val="accent1"/>
+          </a:fillRef>
+          <a:effectRef idx="2">
+            <a:schemeClr val="accent1"/>
+          </a:effectRef>
+          <a:fontRef idx="minor">
+            <a:schemeClr val="lt1"/>
+          </a:fontRef>
+        </p:style>
+        <p:txBody>
+          <a:bodyPr rtlCol="0" anchor="ctr"/>
+          <a:lstStyle/>
+          <a:p>
+            <a:pPr algn="ctr"/>
+          </a:p>
+        </p:txBody>
+      </p:sp>
+      <p:sp>
+        <p:nvSpPr>
+          <p:cNvPr id="8" name="Rectangle 7"/>
+          <p:cNvSpPr/>
+          <p:nvPr/>
+        </p:nvSpPr>
+        <p:spPr>
+          <a:xfrm>
+            <a:off x="457200" y="1655064"/>
+            <a:ext cx="3624986" cy="27432"/>
+          </a:xfrm>
+          <a:prstGeom prst="rect">
+            <a:avLst/>
+          </a:prstGeom>
+          <a:solidFill>
+            <a:srgbClr val="FFD000"/>
+          </a:solidFill>
+          <a:ln>
+            <a:noFill/>
+          </a:ln>
+        </p:spPr>
+        <p:style>
+          <a:lnRef idx="1">
+            <a:schemeClr val="accent1"/>
+          </a:lnRef>
+          <a:fillRef idx="3">
+            <a:schemeClr val="accent1"/>
+          </a:fillRef>
+          <a:effectRef idx="2">
+            <a:schemeClr val="accent1"/>
+          </a:effectRef>
+          <a:fontRef idx="minor">
+            <a:schemeClr val="lt1"/>
+          </a:fontRef>
+        </p:style>
+        <p:txBody>
+          <a:bodyPr rtlCol="0" anchor="ctr"/>
+          <a:lstStyle/>
+          <a:p>
+            <a:pPr algn="ctr"/>
+          </a:p>
+        </p:txBody>
+      </p:sp>
+      <p:pic>
+        <p:nvPicPr>
+          <p:cNvPr id="9" name="Picture 8" descr="killercoda.png"/>
+          <p:cNvPicPr>
+            <a:picLocks noChangeAspect="1"/>
+          </p:cNvPicPr>
+          <p:nvPr/>
+        </p:nvPicPr>
+        <p:blipFill>
+          <a:blip r:embed="rId2"/>
+          <a:stretch>
+            <a:fillRect/>
+          </a:stretch>
+        </p:blipFill>
+        <p:spPr>
+          <a:xfrm>
+            <a:off x="1659331" y="1847087"/>
+            <a:ext cx="1220724" cy="1220724"/>
+          </a:xfrm>
+          <a:prstGeom prst="rect">
+            <a:avLst/>
+          </a:prstGeom>
+        </p:spPr>
+      </p:pic>
+      <p:sp>
+        <p:nvSpPr>
+          <p:cNvPr id="10" name="TextBox 9"/>
+          <p:cNvSpPr txBox="1"/>
+          <p:nvPr/>
+        </p:nvSpPr>
+        <p:spPr>
+          <a:xfrm>
+            <a:off x="530352" y="3159251"/>
+            <a:ext cx="3478682" cy="621792"/>
+          </a:xfrm>
+          <a:prstGeom prst="rect">
+            <a:avLst/>
+          </a:prstGeom>
+          <a:noFill/>
+        </p:spPr>
+        <p:txBody>
+          <a:bodyPr wrap="square" anchor="t"/>
+          <a:lstStyle/>
+          <a:p>
+            <a:pPr algn="ctr"/>
+            <a:r>
+              <a:rPr sz="1300" b="1" i="0">
+                <a:solidFill>
+                  <a:srgbClr val="095292"/>
+                </a:solidFill>
+                <a:latin typeface="Calibri"/>
+              </a:rPr>
+              <a:t>Killercoda</a:t>
+            </a:r>
+          </a:p>
+          <a:p>
+            <a:pPr algn="ctr">
+              <a:spcBef>
+                <a:spcPts val="200"/>
+              </a:spcBef>
             </a:pPr>
             <a:r>
-              <a:rPr sz="2000" b="0" i="0">
-                <a:solidFill>
-                  <a:srgbClr val="333333"/>
-                </a:solidFill>
-                <a:latin typeface="Calibri"/>
-              </a:rPr>
-              <a:t>–   </a:t>
-            </a:r>
-            <a:r>
-              <a:rPr sz="2000" b="1" i="0">
-                <a:solidFill>
-                  <a:srgbClr val="333333"/>
-                </a:solidFill>
-                <a:latin typeface="Calibri"/>
-              </a:rPr>
-              <a:t>Entregable:</a:t>
-            </a:r>
-            <a:r>
-              <a:rPr sz="2000" b="0" i="0">
-                <a:solidFill>
-                  <a:srgbClr val="333333"/>
-                </a:solidFill>
-                <a:latin typeface="Calibri"/>
-              </a:rPr>
-              <a:t> Dockerfile del stub + bitácora de 5 comandos con la salida real + captura del lab</a:t>
-            </a:r>
-          </a:p>
-          <a:p>
-            <a:pPr>
-              <a:spcAft>
-                <a:spcPts val="800"/>
-              </a:spcAft>
+              <a:rPr sz="1000" b="0" i="0">
+                <a:solidFill>
+                  <a:srgbClr val="666666"/>
+                </a:solidFill>
+                <a:latin typeface="Calibri"/>
+              </a:rPr>
+              <a:t>Lab del dia · sesion 1 h</a:t>
+            </a:r>
+          </a:p>
+        </p:txBody>
+      </p:sp>
+      <p:sp>
+        <p:nvSpPr>
+          <p:cNvPr id="11" name="Rounded Rectangle 10"/>
+          <p:cNvSpPr/>
+          <p:nvPr/>
+        </p:nvSpPr>
+        <p:spPr>
+          <a:xfrm>
+            <a:off x="4283354" y="1591056"/>
+            <a:ext cx="3624986" cy="2299716"/>
+          </a:xfrm>
+          <a:prstGeom prst="roundRect">
+            <a:avLst>
+              <a:gd name="adj" fmla="val 12000"/>
+            </a:avLst>
+          </a:prstGeom>
+          <a:solidFill>
+            <a:srgbClr val="F2F2F2"/>
+          </a:solidFill>
+          <a:ln>
+            <a:noFill/>
+          </a:ln>
+        </p:spPr>
+        <p:style>
+          <a:lnRef idx="1">
+            <a:schemeClr val="accent1"/>
+          </a:lnRef>
+          <a:fillRef idx="3">
+            <a:schemeClr val="accent1"/>
+          </a:fillRef>
+          <a:effectRef idx="2">
+            <a:schemeClr val="accent1"/>
+          </a:effectRef>
+          <a:fontRef idx="minor">
+            <a:schemeClr val="lt1"/>
+          </a:fontRef>
+        </p:style>
+        <p:txBody>
+          <a:bodyPr rtlCol="0" anchor="ctr"/>
+          <a:lstStyle/>
+          <a:p>
+            <a:pPr algn="ctr"/>
+          </a:p>
+        </p:txBody>
+      </p:sp>
+      <p:sp>
+        <p:nvSpPr>
+          <p:cNvPr id="12" name="Rectangle 11"/>
+          <p:cNvSpPr/>
+          <p:nvPr/>
+        </p:nvSpPr>
+        <p:spPr>
+          <a:xfrm>
+            <a:off x="4283354" y="1591056"/>
+            <a:ext cx="3624986" cy="64008"/>
+          </a:xfrm>
+          <a:prstGeom prst="rect">
+            <a:avLst/>
+          </a:prstGeom>
+          <a:solidFill>
+            <a:srgbClr val="095292"/>
+          </a:solidFill>
+          <a:ln>
+            <a:noFill/>
+          </a:ln>
+        </p:spPr>
+        <p:style>
+          <a:lnRef idx="1">
+            <a:schemeClr val="accent1"/>
+          </a:lnRef>
+          <a:fillRef idx="3">
+            <a:schemeClr val="accent1"/>
+          </a:fillRef>
+          <a:effectRef idx="2">
+            <a:schemeClr val="accent1"/>
+          </a:effectRef>
+          <a:fontRef idx="minor">
+            <a:schemeClr val="lt1"/>
+          </a:fontRef>
+        </p:style>
+        <p:txBody>
+          <a:bodyPr rtlCol="0" anchor="ctr"/>
+          <a:lstStyle/>
+          <a:p>
+            <a:pPr algn="ctr"/>
+          </a:p>
+        </p:txBody>
+      </p:sp>
+      <p:sp>
+        <p:nvSpPr>
+          <p:cNvPr id="13" name="Rectangle 12"/>
+          <p:cNvSpPr/>
+          <p:nvPr/>
+        </p:nvSpPr>
+        <p:spPr>
+          <a:xfrm>
+            <a:off x="4283354" y="1655064"/>
+            <a:ext cx="3624986" cy="27432"/>
+          </a:xfrm>
+          <a:prstGeom prst="rect">
+            <a:avLst/>
+          </a:prstGeom>
+          <a:solidFill>
+            <a:srgbClr val="FFD000"/>
+          </a:solidFill>
+          <a:ln>
+            <a:noFill/>
+          </a:ln>
+        </p:spPr>
+        <p:style>
+          <a:lnRef idx="1">
+            <a:schemeClr val="accent1"/>
+          </a:lnRef>
+          <a:fillRef idx="3">
+            <a:schemeClr val="accent1"/>
+          </a:fillRef>
+          <a:effectRef idx="2">
+            <a:schemeClr val="accent1"/>
+          </a:effectRef>
+          <a:fontRef idx="minor">
+            <a:schemeClr val="lt1"/>
+          </a:fontRef>
+        </p:style>
+        <p:txBody>
+          <a:bodyPr rtlCol="0" anchor="ctr"/>
+          <a:lstStyle/>
+          <a:p>
+            <a:pPr algn="ctr"/>
+          </a:p>
+        </p:txBody>
+      </p:sp>
+      <p:pic>
+        <p:nvPicPr>
+          <p:cNvPr id="14" name="Picture 13" descr="labex.png"/>
+          <p:cNvPicPr>
+            <a:picLocks noChangeAspect="1"/>
+          </p:cNvPicPr>
+          <p:nvPr/>
+        </p:nvPicPr>
+        <p:blipFill>
+          <a:blip r:embed="rId3"/>
+          <a:stretch>
+            <a:fillRect/>
+          </a:stretch>
+        </p:blipFill>
+        <p:spPr>
+          <a:xfrm>
+            <a:off x="5485485" y="1847087"/>
+            <a:ext cx="1220724" cy="1220724"/>
+          </a:xfrm>
+          <a:prstGeom prst="rect">
+            <a:avLst/>
+          </a:prstGeom>
+        </p:spPr>
+      </p:pic>
+      <p:sp>
+        <p:nvSpPr>
+          <p:cNvPr id="15" name="TextBox 14"/>
+          <p:cNvSpPr txBox="1"/>
+          <p:nvPr/>
+        </p:nvSpPr>
+        <p:spPr>
+          <a:xfrm>
+            <a:off x="4356506" y="3159251"/>
+            <a:ext cx="3478682" cy="621792"/>
+          </a:xfrm>
+          <a:prstGeom prst="rect">
+            <a:avLst/>
+          </a:prstGeom>
+          <a:noFill/>
+        </p:spPr>
+        <p:txBody>
+          <a:bodyPr wrap="square" anchor="t"/>
+          <a:lstStyle/>
+          <a:p>
+            <a:pPr algn="ctr"/>
+            <a:r>
+              <a:rPr sz="1300" b="1" i="0">
+                <a:solidFill>
+                  <a:srgbClr val="095292"/>
+                </a:solidFill>
+                <a:latin typeface="Calibri"/>
+              </a:rPr>
+              <a:t>LabEx Docker Playground</a:t>
+            </a:r>
+          </a:p>
+          <a:p>
+            <a:pPr algn="ctr">
+              <a:spcBef>
+                <a:spcPts val="200"/>
+              </a:spcBef>
             </a:pPr>
             <a:r>
-              <a:rPr sz="2000" b="0" i="0">
-                <a:solidFill>
-                  <a:srgbClr val="333333"/>
-                </a:solidFill>
-                <a:latin typeface="Calibri"/>
-              </a:rPr>
-              <a:t>–   Herramienta: </a:t>
-            </a:r>
-            <a:r>
-              <a:rPr sz="2000" b="1" i="0">
-                <a:solidFill>
-                  <a:srgbClr val="333333"/>
-                </a:solidFill>
-                <a:latin typeface="Calibri"/>
-              </a:rPr>
-              <a:t>Killercoda · alterna si no carga: LabEx Docker Playground</a:t>
-            </a:r>
-          </a:p>
-          <a:p>
-            <a:pPr>
-              <a:spcAft>
-                <a:spcPts val="800"/>
-              </a:spcAft>
+              <a:rPr sz="1000" b="0" i="0">
+                <a:solidFill>
+                  <a:srgbClr val="666666"/>
+                </a:solidFill>
+                <a:latin typeface="Calibri"/>
+              </a:rPr>
+              <a:t>Alterna · 3 al dia</a:t>
+            </a:r>
+          </a:p>
+        </p:txBody>
+      </p:sp>
+      <p:sp>
+        <p:nvSpPr>
+          <p:cNvPr id="16" name="Rounded Rectangle 15"/>
+          <p:cNvSpPr/>
+          <p:nvPr/>
+        </p:nvSpPr>
+        <p:spPr>
+          <a:xfrm>
+            <a:off x="8109508" y="1591056"/>
+            <a:ext cx="3624986" cy="2299716"/>
+          </a:xfrm>
+          <a:prstGeom prst="roundRect">
+            <a:avLst>
+              <a:gd name="adj" fmla="val 12000"/>
+            </a:avLst>
+          </a:prstGeom>
+          <a:solidFill>
+            <a:srgbClr val="F2F2F2"/>
+          </a:solidFill>
+          <a:ln>
+            <a:noFill/>
+          </a:ln>
+        </p:spPr>
+        <p:style>
+          <a:lnRef idx="1">
+            <a:schemeClr val="accent1"/>
+          </a:lnRef>
+          <a:fillRef idx="3">
+            <a:schemeClr val="accent1"/>
+          </a:fillRef>
+          <a:effectRef idx="2">
+            <a:schemeClr val="accent1"/>
+          </a:effectRef>
+          <a:fontRef idx="minor">
+            <a:schemeClr val="lt1"/>
+          </a:fontRef>
+        </p:style>
+        <p:txBody>
+          <a:bodyPr rtlCol="0" anchor="ctr"/>
+          <a:lstStyle/>
+          <a:p>
+            <a:pPr algn="ctr"/>
+          </a:p>
+        </p:txBody>
+      </p:sp>
+      <p:sp>
+        <p:nvSpPr>
+          <p:cNvPr id="17" name="Rectangle 16"/>
+          <p:cNvSpPr/>
+          <p:nvPr/>
+        </p:nvSpPr>
+        <p:spPr>
+          <a:xfrm>
+            <a:off x="8109508" y="1591056"/>
+            <a:ext cx="3624986" cy="64008"/>
+          </a:xfrm>
+          <a:prstGeom prst="rect">
+            <a:avLst/>
+          </a:prstGeom>
+          <a:solidFill>
+            <a:srgbClr val="095292"/>
+          </a:solidFill>
+          <a:ln>
+            <a:noFill/>
+          </a:ln>
+        </p:spPr>
+        <p:style>
+          <a:lnRef idx="1">
+            <a:schemeClr val="accent1"/>
+          </a:lnRef>
+          <a:fillRef idx="3">
+            <a:schemeClr val="accent1"/>
+          </a:fillRef>
+          <a:effectRef idx="2">
+            <a:schemeClr val="accent1"/>
+          </a:effectRef>
+          <a:fontRef idx="minor">
+            <a:schemeClr val="lt1"/>
+          </a:fontRef>
+        </p:style>
+        <p:txBody>
+          <a:bodyPr rtlCol="0" anchor="ctr"/>
+          <a:lstStyle/>
+          <a:p>
+            <a:pPr algn="ctr"/>
+          </a:p>
+        </p:txBody>
+      </p:sp>
+      <p:sp>
+        <p:nvSpPr>
+          <p:cNvPr id="18" name="Rectangle 17"/>
+          <p:cNvSpPr/>
+          <p:nvPr/>
+        </p:nvSpPr>
+        <p:spPr>
+          <a:xfrm>
+            <a:off x="8109508" y="1655064"/>
+            <a:ext cx="3624986" cy="27432"/>
+          </a:xfrm>
+          <a:prstGeom prst="rect">
+            <a:avLst/>
+          </a:prstGeom>
+          <a:solidFill>
+            <a:srgbClr val="FFD000"/>
+          </a:solidFill>
+          <a:ln>
+            <a:noFill/>
+          </a:ln>
+        </p:spPr>
+        <p:style>
+          <a:lnRef idx="1">
+            <a:schemeClr val="accent1"/>
+          </a:lnRef>
+          <a:fillRef idx="3">
+            <a:schemeClr val="accent1"/>
+          </a:fillRef>
+          <a:effectRef idx="2">
+            <a:schemeClr val="accent1"/>
+          </a:effectRef>
+          <a:fontRef idx="minor">
+            <a:schemeClr val="lt1"/>
+          </a:fontRef>
+        </p:style>
+        <p:txBody>
+          <a:bodyPr rtlCol="0" anchor="ctr"/>
+          <a:lstStyle/>
+          <a:p>
+            <a:pPr algn="ctr"/>
+          </a:p>
+        </p:txBody>
+      </p:sp>
+      <p:pic>
+        <p:nvPicPr>
+          <p:cNvPr id="19" name="Picture 18" descr="google_docs.png"/>
+          <p:cNvPicPr>
+            <a:picLocks noChangeAspect="1"/>
+          </p:cNvPicPr>
+          <p:nvPr/>
+        </p:nvPicPr>
+        <p:blipFill>
+          <a:blip r:embed="rId4"/>
+          <a:stretch>
+            <a:fillRect/>
+          </a:stretch>
+        </p:blipFill>
+        <p:spPr>
+          <a:xfrm>
+            <a:off x="9311640" y="1847087"/>
+            <a:ext cx="1220724" cy="1220724"/>
+          </a:xfrm>
+          <a:prstGeom prst="rect">
+            <a:avLst/>
+          </a:prstGeom>
+        </p:spPr>
+      </p:pic>
+      <p:sp>
+        <p:nvSpPr>
+          <p:cNvPr id="20" name="TextBox 19"/>
+          <p:cNvSpPr txBox="1"/>
+          <p:nvPr/>
+        </p:nvSpPr>
+        <p:spPr>
+          <a:xfrm>
+            <a:off x="8182660" y="3159251"/>
+            <a:ext cx="3478682" cy="621792"/>
+          </a:xfrm>
+          <a:prstGeom prst="rect">
+            <a:avLst/>
+          </a:prstGeom>
+          <a:noFill/>
+        </p:spPr>
+        <p:txBody>
+          <a:bodyPr wrap="square" anchor="t"/>
+          <a:lstStyle/>
+          <a:p>
+            <a:pPr algn="ctr"/>
+            <a:r>
+              <a:rPr sz="1300" b="1" i="0">
+                <a:solidFill>
+                  <a:srgbClr val="095292"/>
+                </a:solidFill>
+                <a:latin typeface="Calibri"/>
+              </a:rPr>
+              <a:t>Google Docs</a:t>
+            </a:r>
+          </a:p>
+          <a:p>
+            <a:pPr algn="ctr">
+              <a:spcBef>
+                <a:spcPts val="200"/>
+              </a:spcBef>
             </a:pPr>
             <a:r>
-              <a:rPr sz="2000" b="0" i="0">
-                <a:solidFill>
-                  <a:srgbClr val="333333"/>
-                </a:solidFill>
-                <a:latin typeface="Calibri"/>
-              </a:rPr>
-              <a:t>–   Todo lo que construyan hoy entra al </a:t>
-            </a:r>
-            <a:r>
-              <a:rPr sz="2000" b="1" i="0">
-                <a:solidFill>
-                  <a:srgbClr val="333333"/>
-                </a:solidFill>
-                <a:latin typeface="Calibri"/>
-              </a:rPr>
-              <a:t>informe/repo del PI</a:t>
-            </a:r>
-            <a:r>
-              <a:rPr sz="2000" b="0" i="0">
-                <a:solidFill>
-                  <a:srgbClr val="333333"/>
-                </a:solidFill>
-                <a:latin typeface="Calibri"/>
-              </a:rPr>
-              <a:t> (no es lab suelto).</a:t>
-            </a:r>
-          </a:p>
-          <a:p>
-            <a:pPr>
-              <a:spcAft>
-                <a:spcPts val="800"/>
-              </a:spcAft>
+              <a:rPr sz="1000" b="0" i="0">
+                <a:solidFill>
+                  <a:srgbClr val="666666"/>
+                </a:solidFill>
+                <a:latin typeface="Calibri"/>
+              </a:rPr>
+              <a:t>Informe PI</a:t>
+            </a:r>
+          </a:p>
+        </p:txBody>
+      </p:sp>
+      <p:sp>
+        <p:nvSpPr>
+          <p:cNvPr id="21" name="Rounded Rectangle 20"/>
+          <p:cNvSpPr/>
+          <p:nvPr/>
+        </p:nvSpPr>
+        <p:spPr>
+          <a:xfrm>
+            <a:off x="4283354" y="4055364"/>
+            <a:ext cx="3624986" cy="2299716"/>
+          </a:xfrm>
+          <a:prstGeom prst="roundRect">
+            <a:avLst>
+              <a:gd name="adj" fmla="val 12000"/>
+            </a:avLst>
+          </a:prstGeom>
+          <a:solidFill>
+            <a:srgbClr val="F2F2F2"/>
+          </a:solidFill>
+          <a:ln>
+            <a:noFill/>
+          </a:ln>
+        </p:spPr>
+        <p:style>
+          <a:lnRef idx="1">
+            <a:schemeClr val="accent1"/>
+          </a:lnRef>
+          <a:fillRef idx="3">
+            <a:schemeClr val="accent1"/>
+          </a:fillRef>
+          <a:effectRef idx="2">
+            <a:schemeClr val="accent1"/>
+          </a:effectRef>
+          <a:fontRef idx="minor">
+            <a:schemeClr val="lt1"/>
+          </a:fontRef>
+        </p:style>
+        <p:txBody>
+          <a:bodyPr rtlCol="0" anchor="ctr"/>
+          <a:lstStyle/>
+          <a:p>
+            <a:pPr algn="ctr"/>
+          </a:p>
+        </p:txBody>
+      </p:sp>
+      <p:sp>
+        <p:nvSpPr>
+          <p:cNvPr id="22" name="Rectangle 21"/>
+          <p:cNvSpPr/>
+          <p:nvPr/>
+        </p:nvSpPr>
+        <p:spPr>
+          <a:xfrm>
+            <a:off x="4283354" y="4055364"/>
+            <a:ext cx="3624986" cy="64008"/>
+          </a:xfrm>
+          <a:prstGeom prst="rect">
+            <a:avLst/>
+          </a:prstGeom>
+          <a:solidFill>
+            <a:srgbClr val="095292"/>
+          </a:solidFill>
+          <a:ln>
+            <a:noFill/>
+          </a:ln>
+        </p:spPr>
+        <p:style>
+          <a:lnRef idx="1">
+            <a:schemeClr val="accent1"/>
+          </a:lnRef>
+          <a:fillRef idx="3">
+            <a:schemeClr val="accent1"/>
+          </a:fillRef>
+          <a:effectRef idx="2">
+            <a:schemeClr val="accent1"/>
+          </a:effectRef>
+          <a:fontRef idx="minor">
+            <a:schemeClr val="lt1"/>
+          </a:fontRef>
+        </p:style>
+        <p:txBody>
+          <a:bodyPr rtlCol="0" anchor="ctr"/>
+          <a:lstStyle/>
+          <a:p>
+            <a:pPr algn="ctr"/>
+          </a:p>
+        </p:txBody>
+      </p:sp>
+      <p:sp>
+        <p:nvSpPr>
+          <p:cNvPr id="23" name="Rectangle 22"/>
+          <p:cNvSpPr/>
+          <p:nvPr/>
+        </p:nvSpPr>
+        <p:spPr>
+          <a:xfrm>
+            <a:off x="4283354" y="4119372"/>
+            <a:ext cx="3624986" cy="27432"/>
+          </a:xfrm>
+          <a:prstGeom prst="rect">
+            <a:avLst/>
+          </a:prstGeom>
+          <a:solidFill>
+            <a:srgbClr val="FFD000"/>
+          </a:solidFill>
+          <a:ln>
+            <a:noFill/>
+          </a:ln>
+        </p:spPr>
+        <p:style>
+          <a:lnRef idx="1">
+            <a:schemeClr val="accent1"/>
+          </a:lnRef>
+          <a:fillRef idx="3">
+            <a:schemeClr val="accent1"/>
+          </a:fillRef>
+          <a:effectRef idx="2">
+            <a:schemeClr val="accent1"/>
+          </a:effectRef>
+          <a:fontRef idx="minor">
+            <a:schemeClr val="lt1"/>
+          </a:fontRef>
+        </p:style>
+        <p:txBody>
+          <a:bodyPr rtlCol="0" anchor="ctr"/>
+          <a:lstStyle/>
+          <a:p>
+            <a:pPr algn="ctr"/>
+          </a:p>
+        </p:txBody>
+      </p:sp>
+      <p:pic>
+        <p:nvPicPr>
+          <p:cNvPr id="24" name="Picture 23" descr="examlab.png"/>
+          <p:cNvPicPr>
+            <a:picLocks noChangeAspect="1"/>
+          </p:cNvPicPr>
+          <p:nvPr/>
+        </p:nvPicPr>
+        <p:blipFill>
+          <a:blip r:embed="rId5"/>
+          <a:stretch>
+            <a:fillRect/>
+          </a:stretch>
+        </p:blipFill>
+        <p:spPr>
+          <a:xfrm>
+            <a:off x="5485485" y="4311396"/>
+            <a:ext cx="1220724" cy="1220724"/>
+          </a:xfrm>
+          <a:prstGeom prst="rect">
+            <a:avLst/>
+          </a:prstGeom>
+        </p:spPr>
+      </p:pic>
+      <p:sp>
+        <p:nvSpPr>
+          <p:cNvPr id="25" name="TextBox 24"/>
+          <p:cNvSpPr txBox="1"/>
+          <p:nvPr/>
+        </p:nvSpPr>
+        <p:spPr>
+          <a:xfrm>
+            <a:off x="4356506" y="5623560"/>
+            <a:ext cx="3478682" cy="621792"/>
+          </a:xfrm>
+          <a:prstGeom prst="rect">
+            <a:avLst/>
+          </a:prstGeom>
+          <a:noFill/>
+        </p:spPr>
+        <p:txBody>
+          <a:bodyPr wrap="square" anchor="t"/>
+          <a:lstStyle/>
+          <a:p>
+            <a:pPr algn="ctr"/>
+            <a:r>
+              <a:rPr sz="1300" b="1" i="0">
+                <a:solidFill>
+                  <a:srgbClr val="095292"/>
+                </a:solidFill>
+                <a:latin typeface="Calibri"/>
+              </a:rPr>
+              <a:t>la plataforma del curso</a:t>
+            </a:r>
+          </a:p>
+          <a:p>
+            <a:pPr algn="ctr">
+              <a:spcBef>
+                <a:spcPts val="200"/>
+              </a:spcBef>
             </a:pPr>
             <a:r>
-              <a:rPr sz="2000" b="0" i="0">
-                <a:solidFill>
-                  <a:srgbClr val="333333"/>
-                </a:solidFill>
-                <a:latin typeface="Calibri"/>
-              </a:rPr>
-              <a:t>–   Individual por defecto · el docente puede autorizar equipos de 2–3; la entrega en la plataforma del curso siempre es individual.</a:t>
-            </a:r>
-          </a:p>
-        </p:txBody>
-      </p:sp>
-      <p:sp>
-        <p:nvSpPr>
-          <p:cNvPr id="6" name="TextBox 5"/>
+              <a:rPr sz="1000" b="0" i="0">
+                <a:solidFill>
+                  <a:srgbClr val="666666"/>
+                </a:solidFill>
+                <a:latin typeface="Calibri"/>
+              </a:rPr>
+              <a:t>Donde se entrega</a:t>
+            </a:r>
+          </a:p>
+        </p:txBody>
+      </p:sp>
+      <p:sp>
+        <p:nvSpPr>
+          <p:cNvPr id="26" name="TextBox 25"/>
           <p:cNvSpPr txBox="1"/>
           <p:nvPr/>
         </p:nvSpPr>
@@ -12562,7 +12134,7 @@
                 </a:solidFill>
                 <a:latin typeface="Calibri"/>
               </a:rPr>
-              <a:t>Manos a la obra (paso a paso)</a:t>
+              <a:t>PI CloudLite — entregable de hoy</a:t>
             </a:r>
           </a:p>
         </p:txBody>
@@ -12595,13 +12167,22 @@
               </a:spcAft>
             </a:pPr>
             <a:r>
+              <a:rPr sz="2000" b="0" i="0">
+                <a:solidFill>
+                  <a:srgbClr val="333333"/>
+                </a:solidFill>
+                <a:latin typeface="Calibri"/>
+              </a:rPr>
+              <a:t>–   </a:t>
+            </a:r>
+            <a:r>
               <a:rPr sz="2000" b="1" i="0">
                 <a:solidFill>
                   <a:srgbClr val="333333"/>
                 </a:solidFill>
                 <a:latin typeface="Calibri"/>
               </a:rPr>
-              <a:t>1.</a:t>
+              <a:t>Entregable:</a:t>
             </a:r>
             <a:r>
               <a:rPr sz="2000" b="0" i="0">
@@ -12610,7 +12191,7 @@
                 </a:solidFill>
                 <a:latin typeface="Calibri"/>
               </a:rPr>
-              <a:t> Paso 1: elija en la pregunta 8 cual servicio de su C4 Context va a contenedorizar y justifiquelo en 2 o 3 frases; escriba a continuacion el Dockerfile completo con la imagen base ligera y con etiqueta fija, el COPY de dependencias antes del COPY del codigo, el EXPOSE y el CMD, verificando que no copie el .env ni ninguna clave.</a:t>
+              <a:t> Dockerfile del stub + bitácora de 5 comandos con la salida real + captura del lab</a:t>
             </a:r>
           </a:p>
           <a:p>
@@ -12626,7 +12207,7 @@
                 </a:solidFill>
                 <a:latin typeface="Calibri"/>
               </a:rPr>
-              <a:t>–   </a:t>
+              <a:t>–   Herramienta: </a:t>
             </a:r>
             <a:r>
               <a:rPr sz="2000" b="1" i="0">
@@ -12635,16 +12216,7 @@
                 </a:solidFill>
                 <a:latin typeface="Calibri"/>
               </a:rPr>
-              <a:t>2.</a:t>
-            </a:r>
-            <a:r>
-              <a:rPr sz="2000" b="0" i="0">
-                <a:solidFill>
-                  <a:srgbClr val="333333"/>
-                </a:solidFill>
-                <a:latin typeface="Calibri"/>
-              </a:rPr>
-              <a:t> Paso 2: explique en la pregunta 9, sobre su propio Dockerfile, la diferencia entre imagen y contenedor, que instrucciones de SU archivo crean capa, por que el orden aprovecha el cache y en que se diferencia su contenedor de una maquina virtual; verifique que no escribio que un contenedor es una VM ligera.</a:t>
+              <a:t>Killercoda · alterna si no carga: LabEx Docker Playground</a:t>
             </a:r>
           </a:p>
           <a:p>
@@ -12660,7 +12232,7 @@
                 </a:solidFill>
                 <a:latin typeface="Calibri"/>
               </a:rPr>
-              <a:t>–   </a:t>
+              <a:t>–   Todo lo que construyan hoy entra al </a:t>
             </a:r>
             <a:r>
               <a:rPr sz="2000" b="1" i="0">
@@ -12669,7 +12241,7 @@
                 </a:solidFill>
                 <a:latin typeface="Calibri"/>
               </a:rPr>
-              <a:t>3.</a:t>
+              <a:t>informe/repo del PI</a:t>
             </a:r>
             <a:r>
               <a:rPr sz="2000" b="0" i="0">
@@ -12678,7 +12250,7 @@
                 </a:solidFill>
                 <a:latin typeface="Calibri"/>
               </a:rPr>
-              <a:t> Paso 3: describa en la pregunta 10 el ciclo completo con los comandos exactos de build y de run, explicando que lado del mapeo de puertos es el anfitrion y que lado el contenedor, y cierre con el contrato del endpoint de salud (ruta, codigo de estado y cuerpo); verifique que el puerto sea el mismo que puso en el EXPOSE.</a:t>
+              <a:t> (no es lab suelto).</a:t>
             </a:r>
           </a:p>
           <a:p>
@@ -12694,25 +12266,7 @@
                 </a:solidFill>
                 <a:latin typeface="Calibri"/>
               </a:rPr>
-              <a:t>–   </a:t>
-            </a:r>
-            <a:r>
-              <a:rPr sz="2000" b="1" i="0">
-                <a:solidFill>
-                  <a:srgbClr val="333333"/>
-                </a:solidFill>
-                <a:latin typeface="Calibri"/>
-              </a:rPr>
-              <a:t>4.</a:t>
-            </a:r>
-            <a:r>
-              <a:rPr sz="2000" b="0" i="0">
-                <a:solidFill>
-                  <a:srgbClr val="333333"/>
-                </a:solidFill>
-                <a:latin typeface="Calibri"/>
-              </a:rPr>
-              <a:t> Paso 4: ejecute de verdad el ciclo en Killercoda y reporte en la pregunta 11 la tabla de 5 filas con la salida real pegada textualmente, la descripcion de la captura con prompt, docker ps y hora del sistema, y una fila de incidente; recuerde que la sesion caduca a 1 hora, asi que capture la evidencia ANTES de cerrarla.</a:t>
+              <a:t>–   Individual por defecto · el docente puede autorizar equipos de 2–3; la entrega en la plataforma del curso siempre es individual.</a:t>
             </a:r>
           </a:p>
         </p:txBody>
@@ -12893,109 +12447,21 @@
                 </a:solidFill>
                 <a:latin typeface="Calibri"/>
               </a:rPr>
-              <a:t>Para continuar (PI)</a:t>
-            </a:r>
-          </a:p>
-        </p:txBody>
-      </p:sp>
-      <p:sp>
-        <p:nvSpPr>
-          <p:cNvPr id="5" name="Rounded Rectangle 4"/>
-          <p:cNvSpPr/>
-          <p:nvPr/>
-        </p:nvSpPr>
-        <p:spPr>
-          <a:xfrm>
-            <a:off x="457200" y="1261872"/>
-            <a:ext cx="11277295" cy="1051560"/>
-          </a:xfrm>
-          <a:prstGeom prst="roundRect">
-            <a:avLst>
-              <a:gd name="adj" fmla="val 12000"/>
-            </a:avLst>
-          </a:prstGeom>
-          <a:solidFill>
-            <a:srgbClr val="E8F4FA"/>
-          </a:solidFill>
-          <a:ln>
-            <a:noFill/>
-          </a:ln>
-        </p:spPr>
-        <p:style>
-          <a:lnRef idx="1">
-            <a:schemeClr val="accent1"/>
-          </a:lnRef>
-          <a:fillRef idx="3">
-            <a:schemeClr val="accent1"/>
-          </a:fillRef>
-          <a:effectRef idx="2">
-            <a:schemeClr val="accent1"/>
-          </a:effectRef>
-          <a:fontRef idx="minor">
-            <a:schemeClr val="lt1"/>
-          </a:fontRef>
-        </p:style>
-        <p:txBody>
-          <a:bodyPr rtlCol="0" anchor="ctr"/>
-          <a:lstStyle/>
-          <a:p>
-            <a:pPr algn="ctr"/>
-          </a:p>
-        </p:txBody>
-      </p:sp>
-      <p:sp>
-        <p:nvSpPr>
-          <p:cNvPr id="6" name="Rectangle 5"/>
-          <p:cNvSpPr/>
-          <p:nvPr/>
-        </p:nvSpPr>
-        <p:spPr>
-          <a:xfrm>
-            <a:off x="457200" y="1261872"/>
-            <a:ext cx="128016" cy="1051560"/>
-          </a:xfrm>
-          <a:prstGeom prst="rect">
-            <a:avLst/>
-          </a:prstGeom>
-          <a:solidFill>
-            <a:srgbClr val="269CCB"/>
-          </a:solidFill>
-          <a:ln>
-            <a:noFill/>
-          </a:ln>
-        </p:spPr>
-        <p:style>
-          <a:lnRef idx="1">
-            <a:schemeClr val="accent1"/>
-          </a:lnRef>
-          <a:fillRef idx="3">
-            <a:schemeClr val="accent1"/>
-          </a:fillRef>
-          <a:effectRef idx="2">
-            <a:schemeClr val="accent1"/>
-          </a:effectRef>
-          <a:fontRef idx="minor">
-            <a:schemeClr val="lt1"/>
-          </a:fontRef>
-        </p:style>
-        <p:txBody>
-          <a:bodyPr rtlCol="0" anchor="ctr"/>
-          <a:lstStyle/>
-          <a:p>
-            <a:pPr algn="ctr"/>
-          </a:p>
-        </p:txBody>
-      </p:sp>
-      <p:sp>
-        <p:nvSpPr>
-          <p:cNvPr id="7" name="TextBox 6"/>
+              <a:t>Manos a la obra (paso a paso)</a:t>
+            </a:r>
+          </a:p>
+        </p:txBody>
+      </p:sp>
+      <p:sp>
+        <p:nvSpPr>
+          <p:cNvPr id="5" name="TextBox 4"/>
           <p:cNvSpPr txBox="1"/>
           <p:nvPr/>
         </p:nvSpPr>
         <p:spPr>
           <a:xfrm>
-            <a:off x="777240" y="1399031"/>
-            <a:ext cx="10774375" cy="822959"/>
+            <a:off x="457200" y="1170432"/>
+            <a:ext cx="11277295" cy="5230368"/>
           </a:xfrm>
           <a:prstGeom prst="rect">
             <a:avLst/>
@@ -13008,313 +12474,137 @@
           </a:bodyPr>
           <a:lstStyle/>
           <a:p>
-            <a:r>
-              <a:rPr sz="1200" b="1" i="0">
-                <a:solidFill>
-                  <a:srgbClr val="269CCB"/>
-                </a:solidFill>
-                <a:latin typeface="Calibri"/>
-              </a:rPr>
-              <a:t>Info</a:t>
-            </a:r>
-          </a:p>
-          <a:p>
             <a:pPr>
-              <a:spcBef>
-                <a:spcPts val="400"/>
-              </a:spcBef>
+              <a:spcAft>
+                <a:spcPts val="800"/>
+              </a:spcAft>
             </a:pPr>
             <a:r>
-              <a:rPr sz="1400" b="0" i="0">
-                <a:solidFill>
-                  <a:srgbClr val="333333"/>
-                </a:solidFill>
-                <a:latin typeface="Calibri"/>
-              </a:rPr>
-              <a:t>Entregable: Dockerfile del stub + bitácora de 5 comandos con la salida real + captura del lab</a:t>
-            </a:r>
-          </a:p>
-        </p:txBody>
-      </p:sp>
-      <p:sp>
-        <p:nvSpPr>
-          <p:cNvPr id="8" name="Rounded Rectangle 7"/>
-          <p:cNvSpPr/>
-          <p:nvPr/>
-        </p:nvSpPr>
-        <p:spPr>
-          <a:xfrm>
-            <a:off x="457200" y="2478024"/>
-            <a:ext cx="11277295" cy="1051560"/>
-          </a:xfrm>
-          <a:prstGeom prst="roundRect">
-            <a:avLst>
-              <a:gd name="adj" fmla="val 12000"/>
-            </a:avLst>
-          </a:prstGeom>
-          <a:solidFill>
-            <a:srgbClr val="FFF8E1"/>
-          </a:solidFill>
-          <a:ln>
-            <a:noFill/>
-          </a:ln>
-        </p:spPr>
-        <p:style>
-          <a:lnRef idx="1">
-            <a:schemeClr val="accent1"/>
-          </a:lnRef>
-          <a:fillRef idx="3">
-            <a:schemeClr val="accent1"/>
-          </a:fillRef>
-          <a:effectRef idx="2">
-            <a:schemeClr val="accent1"/>
-          </a:effectRef>
-          <a:fontRef idx="minor">
-            <a:schemeClr val="lt1"/>
-          </a:fontRef>
-        </p:style>
-        <p:txBody>
-          <a:bodyPr rtlCol="0" anchor="ctr"/>
-          <a:lstStyle/>
-          <a:p>
-            <a:pPr algn="ctr"/>
-          </a:p>
-        </p:txBody>
-      </p:sp>
-      <p:sp>
-        <p:nvSpPr>
-          <p:cNvPr id="9" name="Rectangle 8"/>
-          <p:cNvSpPr/>
-          <p:nvPr/>
-        </p:nvSpPr>
-        <p:spPr>
-          <a:xfrm>
-            <a:off x="457200" y="2478024"/>
-            <a:ext cx="128016" cy="1051560"/>
-          </a:xfrm>
-          <a:prstGeom prst="rect">
-            <a:avLst/>
-          </a:prstGeom>
-          <a:solidFill>
-            <a:srgbClr val="FFD000"/>
-          </a:solidFill>
-          <a:ln>
-            <a:noFill/>
-          </a:ln>
-        </p:spPr>
-        <p:style>
-          <a:lnRef idx="1">
-            <a:schemeClr val="accent1"/>
-          </a:lnRef>
-          <a:fillRef idx="3">
-            <a:schemeClr val="accent1"/>
-          </a:fillRef>
-          <a:effectRef idx="2">
-            <a:schemeClr val="accent1"/>
-          </a:effectRef>
-          <a:fontRef idx="minor">
-            <a:schemeClr val="lt1"/>
-          </a:fontRef>
-        </p:style>
-        <p:txBody>
-          <a:bodyPr rtlCol="0" anchor="ctr"/>
-          <a:lstStyle/>
-          <a:p>
-            <a:pPr algn="ctr"/>
-          </a:p>
-        </p:txBody>
-      </p:sp>
-      <p:sp>
-        <p:nvSpPr>
-          <p:cNvPr id="10" name="TextBox 9"/>
-          <p:cNvSpPr txBox="1"/>
-          <p:nvPr/>
-        </p:nvSpPr>
-        <p:spPr>
-          <a:xfrm>
-            <a:off x="777240" y="2615184"/>
-            <a:ext cx="10774375" cy="822959"/>
-          </a:xfrm>
-          <a:prstGeom prst="rect">
-            <a:avLst/>
-          </a:prstGeom>
-          <a:noFill/>
-        </p:spPr>
-        <p:txBody>
-          <a:bodyPr wrap="square">
-            <a:spAutoFit/>
-          </a:bodyPr>
-          <a:lstStyle/>
-          <a:p>
-            <a:r>
-              <a:rPr sz="1200" b="1" i="0">
-                <a:solidFill>
-                  <a:srgbClr val="FFD000"/>
-                </a:solidFill>
-                <a:latin typeface="Calibri"/>
-              </a:rPr>
-              <a:t>Aclaración</a:t>
+              <a:rPr sz="2000" b="1" i="0">
+                <a:solidFill>
+                  <a:srgbClr val="333333"/>
+                </a:solidFill>
+                <a:latin typeface="Calibri"/>
+              </a:rPr>
+              <a:t>1.</a:t>
+            </a:r>
+            <a:r>
+              <a:rPr sz="2000" b="0" i="0">
+                <a:solidFill>
+                  <a:srgbClr val="333333"/>
+                </a:solidFill>
+                <a:latin typeface="Calibri"/>
+              </a:rPr>
+              <a:t> Paso 1: elija en la pregunta 8 cual servicio de su C4 Context va a contenedorizar y justifiquelo en 2 o 3 frases; escriba a continuacion el Dockerfile completo con la imagen base ligera y con etiqueta fija, el COPY de dependencias antes del COPY del codigo, el EXPOSE y el CMD, verificando que no copie el .env ni ninguna clave.</a:t>
             </a:r>
           </a:p>
           <a:p>
             <a:pPr>
-              <a:spcBef>
-                <a:spcPts val="400"/>
-              </a:spcBef>
+              <a:spcAft>
+                <a:spcPts val="800"/>
+              </a:spcAft>
             </a:pPr>
             <a:r>
-              <a:rPr sz="1400" b="0" i="0">
-                <a:solidFill>
-                  <a:srgbClr val="333333"/>
-                </a:solidFill>
-                <a:latin typeface="Calibri"/>
-              </a:rPr>
-              <a:t>Subir evidencias al paquete CloudLite (Drive/repo) y a la plataforma del curso en la fecha que indique el docente.</a:t>
-            </a:r>
-          </a:p>
-        </p:txBody>
-      </p:sp>
-      <p:sp>
-        <p:nvSpPr>
-          <p:cNvPr id="11" name="Rounded Rectangle 10"/>
-          <p:cNvSpPr/>
-          <p:nvPr/>
-        </p:nvSpPr>
-        <p:spPr>
-          <a:xfrm>
-            <a:off x="457200" y="3694176"/>
-            <a:ext cx="11277295" cy="1051560"/>
-          </a:xfrm>
-          <a:prstGeom prst="roundRect">
-            <a:avLst>
-              <a:gd name="adj" fmla="val 12000"/>
-            </a:avLst>
-          </a:prstGeom>
-          <a:solidFill>
-            <a:srgbClr val="FBE4E4"/>
-          </a:solidFill>
-          <a:ln>
-            <a:noFill/>
-          </a:ln>
-        </p:spPr>
-        <p:style>
-          <a:lnRef idx="1">
-            <a:schemeClr val="accent1"/>
-          </a:lnRef>
-          <a:fillRef idx="3">
-            <a:schemeClr val="accent1"/>
-          </a:fillRef>
-          <a:effectRef idx="2">
-            <a:schemeClr val="accent1"/>
-          </a:effectRef>
-          <a:fontRef idx="minor">
-            <a:schemeClr val="lt1"/>
-          </a:fontRef>
-        </p:style>
-        <p:txBody>
-          <a:bodyPr rtlCol="0" anchor="ctr"/>
-          <a:lstStyle/>
-          <a:p>
-            <a:pPr algn="ctr"/>
-          </a:p>
-        </p:txBody>
-      </p:sp>
-      <p:sp>
-        <p:nvSpPr>
-          <p:cNvPr id="12" name="Rectangle 11"/>
-          <p:cNvSpPr/>
-          <p:nvPr/>
-        </p:nvSpPr>
-        <p:spPr>
-          <a:xfrm>
-            <a:off x="457200" y="3694176"/>
-            <a:ext cx="128016" cy="1051560"/>
-          </a:xfrm>
-          <a:prstGeom prst="rect">
-            <a:avLst/>
-          </a:prstGeom>
-          <a:solidFill>
-            <a:srgbClr val="A02030"/>
-          </a:solidFill>
-          <a:ln>
-            <a:noFill/>
-          </a:ln>
-        </p:spPr>
-        <p:style>
-          <a:lnRef idx="1">
-            <a:schemeClr val="accent1"/>
-          </a:lnRef>
-          <a:fillRef idx="3">
-            <a:schemeClr val="accent1"/>
-          </a:fillRef>
-          <a:effectRef idx="2">
-            <a:schemeClr val="accent1"/>
-          </a:effectRef>
-          <a:fontRef idx="minor">
-            <a:schemeClr val="lt1"/>
-          </a:fontRef>
-        </p:style>
-        <p:txBody>
-          <a:bodyPr rtlCol="0" anchor="ctr"/>
-          <a:lstStyle/>
-          <a:p>
-            <a:pPr algn="ctr"/>
-          </a:p>
-        </p:txBody>
-      </p:sp>
-      <p:sp>
-        <p:nvSpPr>
-          <p:cNvPr id="13" name="TextBox 12"/>
-          <p:cNvSpPr txBox="1"/>
-          <p:nvPr/>
-        </p:nvSpPr>
-        <p:spPr>
-          <a:xfrm>
-            <a:off x="777240" y="3831336"/>
-            <a:ext cx="10774375" cy="822959"/>
-          </a:xfrm>
-          <a:prstGeom prst="rect">
-            <a:avLst/>
-          </a:prstGeom>
-          <a:noFill/>
-        </p:spPr>
-        <p:txBody>
-          <a:bodyPr wrap="square">
-            <a:spAutoFit/>
-          </a:bodyPr>
-          <a:lstStyle/>
-          <a:p>
-            <a:r>
-              <a:rPr sz="1200" b="1" i="0">
-                <a:solidFill>
-                  <a:srgbClr val="A02030"/>
-                </a:solidFill>
-                <a:latin typeface="Calibri"/>
-              </a:rPr>
-              <a:t>Atención</a:t>
+              <a:rPr sz="2000" b="0" i="0">
+                <a:solidFill>
+                  <a:srgbClr val="333333"/>
+                </a:solidFill>
+                <a:latin typeface="Calibri"/>
+              </a:rPr>
+              <a:t>–   </a:t>
+            </a:r>
+            <a:r>
+              <a:rPr sz="2000" b="1" i="0">
+                <a:solidFill>
+                  <a:srgbClr val="333333"/>
+                </a:solidFill>
+                <a:latin typeface="Calibri"/>
+              </a:rPr>
+              <a:t>2.</a:t>
+            </a:r>
+            <a:r>
+              <a:rPr sz="2000" b="0" i="0">
+                <a:solidFill>
+                  <a:srgbClr val="333333"/>
+                </a:solidFill>
+                <a:latin typeface="Calibri"/>
+              </a:rPr>
+              <a:t> Paso 2: explique en la pregunta 9, sobre su propio Dockerfile, la diferencia entre imagen y contenedor, que instrucciones de SU archivo crean capa, por que el orden aprovecha el cache y en que se diferencia su contenedor de una maquina virtual; verifique que no escribio que un contenedor es una VM ligera.</a:t>
             </a:r>
           </a:p>
           <a:p>
             <a:pPr>
-              <a:spcBef>
-                <a:spcPts val="400"/>
-              </a:spcBef>
+              <a:spcAft>
+                <a:spcPts val="800"/>
+              </a:spcAft>
             </a:pPr>
             <a:r>
-              <a:rPr sz="1400" b="0" i="0">
-                <a:solidFill>
-                  <a:srgbClr val="333333"/>
-                </a:solidFill>
-                <a:latin typeface="Calibri"/>
-              </a:rPr>
-              <a:t>Sin cloud de pago ni instalaciones obligatorias de hipervisores/Docker Desktop.</a:t>
-            </a:r>
-          </a:p>
-        </p:txBody>
-      </p:sp>
-      <p:sp>
-        <p:nvSpPr>
-          <p:cNvPr id="14" name="TextBox 13"/>
+              <a:rPr sz="2000" b="0" i="0">
+                <a:solidFill>
+                  <a:srgbClr val="333333"/>
+                </a:solidFill>
+                <a:latin typeface="Calibri"/>
+              </a:rPr>
+              <a:t>–   </a:t>
+            </a:r>
+            <a:r>
+              <a:rPr sz="2000" b="1" i="0">
+                <a:solidFill>
+                  <a:srgbClr val="333333"/>
+                </a:solidFill>
+                <a:latin typeface="Calibri"/>
+              </a:rPr>
+              <a:t>3.</a:t>
+            </a:r>
+            <a:r>
+              <a:rPr sz="2000" b="0" i="0">
+                <a:solidFill>
+                  <a:srgbClr val="333333"/>
+                </a:solidFill>
+                <a:latin typeface="Calibri"/>
+              </a:rPr>
+              <a:t> Paso 3: describa en la pregunta 10 el ciclo completo con los comandos exactos de build y de run, explicando que lado del mapeo de puertos es el anfitrion y que lado el contenedor, y cierre con el contrato del endpoint de salud (ruta, codigo de estado y cuerpo); verifique que el puerto sea el mismo que puso en el EXPOSE.</a:t>
+            </a:r>
+          </a:p>
+          <a:p>
+            <a:pPr>
+              <a:spcAft>
+                <a:spcPts val="800"/>
+              </a:spcAft>
+            </a:pPr>
+            <a:r>
+              <a:rPr sz="2000" b="0" i="0">
+                <a:solidFill>
+                  <a:srgbClr val="333333"/>
+                </a:solidFill>
+                <a:latin typeface="Calibri"/>
+              </a:rPr>
+              <a:t>–   </a:t>
+            </a:r>
+            <a:r>
+              <a:rPr sz="2000" b="1" i="0">
+                <a:solidFill>
+                  <a:srgbClr val="333333"/>
+                </a:solidFill>
+                <a:latin typeface="Calibri"/>
+              </a:rPr>
+              <a:t>4.</a:t>
+            </a:r>
+            <a:r>
+              <a:rPr sz="2000" b="0" i="0">
+                <a:solidFill>
+                  <a:srgbClr val="333333"/>
+                </a:solidFill>
+                <a:latin typeface="Calibri"/>
+              </a:rPr>
+              <a:t> Paso 4: ejecute de verdad el ciclo en Killercoda y reporte en la pregunta 11 la tabla de 5 filas con la salida real pegada textualmente, la descripcion de la captura con prompt, docker ps y hora del sistema, y una fila de incidente; recuerde que la sesion caduca a 1 hora, asi que capture la evidencia ANTES de cerrarla.</a:t>
+            </a:r>
+          </a:p>
+        </p:txBody>
+      </p:sp>
+      <p:sp>
+        <p:nvSpPr>
+          <p:cNvPr id="6" name="TextBox 5"/>
           <p:cNvSpPr txBox="1"/>
           <p:nvPr/>
         </p:nvSpPr>
@@ -13356,6 +12646,601 @@
 </file>
 
 <file path=ppt/slides/slide33.xml><?xml version="1.0" encoding="utf-8"?>
+<p:sld xmlns:a="http://schemas.openxmlformats.org/drawingml/2006/main" xmlns:p="http://schemas.openxmlformats.org/presentationml/2006/main" xmlns:r="http://schemas.openxmlformats.org/officeDocument/2006/relationships">
+  <p:cSld>
+    <p:bg>
+      <p:bgPr>
+        <a:solidFill>
+          <a:srgbClr val="FFFFFF"/>
+        </a:solidFill>
+        <a:effectLst/>
+      </p:bgPr>
+    </p:bg>
+    <p:spTree>
+      <p:nvGrpSpPr>
+        <p:cNvPr id="1" name=""/>
+        <p:cNvGrpSpPr/>
+        <p:nvPr/>
+      </p:nvGrpSpPr>
+      <p:grpSpPr/>
+      <p:sp>
+        <p:nvSpPr>
+          <p:cNvPr id="2" name="Rectangle 1"/>
+          <p:cNvSpPr/>
+          <p:nvPr/>
+        </p:nvSpPr>
+        <p:spPr>
+          <a:xfrm>
+            <a:off x="0" y="0"/>
+            <a:ext cx="12191695" cy="960120"/>
+          </a:xfrm>
+          <a:prstGeom prst="rect">
+            <a:avLst/>
+          </a:prstGeom>
+          <a:solidFill>
+            <a:srgbClr val="095292"/>
+          </a:solidFill>
+          <a:ln>
+            <a:noFill/>
+          </a:ln>
+        </p:spPr>
+        <p:style>
+          <a:lnRef idx="1">
+            <a:schemeClr val="accent1"/>
+          </a:lnRef>
+          <a:fillRef idx="3">
+            <a:schemeClr val="accent1"/>
+          </a:fillRef>
+          <a:effectRef idx="2">
+            <a:schemeClr val="accent1"/>
+          </a:effectRef>
+          <a:fontRef idx="minor">
+            <a:schemeClr val="lt1"/>
+          </a:fontRef>
+        </p:style>
+        <p:txBody>
+          <a:bodyPr rtlCol="0" anchor="ctr"/>
+          <a:lstStyle/>
+          <a:p>
+            <a:pPr algn="ctr"/>
+          </a:p>
+        </p:txBody>
+      </p:sp>
+      <p:sp>
+        <p:nvSpPr>
+          <p:cNvPr id="3" name="Rectangle 2"/>
+          <p:cNvSpPr/>
+          <p:nvPr/>
+        </p:nvSpPr>
+        <p:spPr>
+          <a:xfrm>
+            <a:off x="0" y="960120"/>
+            <a:ext cx="12191695" cy="41148"/>
+          </a:xfrm>
+          <a:prstGeom prst="rect">
+            <a:avLst/>
+          </a:prstGeom>
+          <a:solidFill>
+            <a:srgbClr val="FFD000"/>
+          </a:solidFill>
+          <a:ln>
+            <a:noFill/>
+          </a:ln>
+        </p:spPr>
+        <p:style>
+          <a:lnRef idx="1">
+            <a:schemeClr val="accent1"/>
+          </a:lnRef>
+          <a:fillRef idx="3">
+            <a:schemeClr val="accent1"/>
+          </a:fillRef>
+          <a:effectRef idx="2">
+            <a:schemeClr val="accent1"/>
+          </a:effectRef>
+          <a:fontRef idx="minor">
+            <a:schemeClr val="lt1"/>
+          </a:fontRef>
+        </p:style>
+        <p:txBody>
+          <a:bodyPr rtlCol="0" anchor="ctr"/>
+          <a:lstStyle/>
+          <a:p>
+            <a:pPr algn="ctr"/>
+          </a:p>
+        </p:txBody>
+      </p:sp>
+      <p:sp>
+        <p:nvSpPr>
+          <p:cNvPr id="4" name="TextBox 3"/>
+          <p:cNvSpPr txBox="1"/>
+          <p:nvPr/>
+        </p:nvSpPr>
+        <p:spPr>
+          <a:xfrm>
+            <a:off x="457200" y="164592"/>
+            <a:ext cx="11277295" cy="502920"/>
+          </a:xfrm>
+          <a:prstGeom prst="rect">
+            <a:avLst/>
+          </a:prstGeom>
+          <a:noFill/>
+        </p:spPr>
+        <p:txBody>
+          <a:bodyPr wrap="square">
+            <a:spAutoFit/>
+          </a:bodyPr>
+          <a:lstStyle/>
+          <a:p>
+            <a:r>
+              <a:rPr sz="2600" b="1" i="0">
+                <a:solidFill>
+                  <a:srgbClr val="FFFFFF"/>
+                </a:solidFill>
+                <a:latin typeface="Calibri"/>
+              </a:rPr>
+              <a:t>Para continuar (PI)</a:t>
+            </a:r>
+          </a:p>
+        </p:txBody>
+      </p:sp>
+      <p:sp>
+        <p:nvSpPr>
+          <p:cNvPr id="5" name="Rounded Rectangle 4"/>
+          <p:cNvSpPr/>
+          <p:nvPr/>
+        </p:nvSpPr>
+        <p:spPr>
+          <a:xfrm>
+            <a:off x="457200" y="1261872"/>
+            <a:ext cx="11277295" cy="1051560"/>
+          </a:xfrm>
+          <a:prstGeom prst="roundRect">
+            <a:avLst>
+              <a:gd name="adj" fmla="val 12000"/>
+            </a:avLst>
+          </a:prstGeom>
+          <a:solidFill>
+            <a:srgbClr val="E8F4FA"/>
+          </a:solidFill>
+          <a:ln>
+            <a:noFill/>
+          </a:ln>
+        </p:spPr>
+        <p:style>
+          <a:lnRef idx="1">
+            <a:schemeClr val="accent1"/>
+          </a:lnRef>
+          <a:fillRef idx="3">
+            <a:schemeClr val="accent1"/>
+          </a:fillRef>
+          <a:effectRef idx="2">
+            <a:schemeClr val="accent1"/>
+          </a:effectRef>
+          <a:fontRef idx="minor">
+            <a:schemeClr val="lt1"/>
+          </a:fontRef>
+        </p:style>
+        <p:txBody>
+          <a:bodyPr rtlCol="0" anchor="ctr"/>
+          <a:lstStyle/>
+          <a:p>
+            <a:pPr algn="ctr"/>
+          </a:p>
+        </p:txBody>
+      </p:sp>
+      <p:sp>
+        <p:nvSpPr>
+          <p:cNvPr id="6" name="Rectangle 5"/>
+          <p:cNvSpPr/>
+          <p:nvPr/>
+        </p:nvSpPr>
+        <p:spPr>
+          <a:xfrm>
+            <a:off x="457200" y="1261872"/>
+            <a:ext cx="128016" cy="1051560"/>
+          </a:xfrm>
+          <a:prstGeom prst="rect">
+            <a:avLst/>
+          </a:prstGeom>
+          <a:solidFill>
+            <a:srgbClr val="269CCB"/>
+          </a:solidFill>
+          <a:ln>
+            <a:noFill/>
+          </a:ln>
+        </p:spPr>
+        <p:style>
+          <a:lnRef idx="1">
+            <a:schemeClr val="accent1"/>
+          </a:lnRef>
+          <a:fillRef idx="3">
+            <a:schemeClr val="accent1"/>
+          </a:fillRef>
+          <a:effectRef idx="2">
+            <a:schemeClr val="accent1"/>
+          </a:effectRef>
+          <a:fontRef idx="minor">
+            <a:schemeClr val="lt1"/>
+          </a:fontRef>
+        </p:style>
+        <p:txBody>
+          <a:bodyPr rtlCol="0" anchor="ctr"/>
+          <a:lstStyle/>
+          <a:p>
+            <a:pPr algn="ctr"/>
+          </a:p>
+        </p:txBody>
+      </p:sp>
+      <p:sp>
+        <p:nvSpPr>
+          <p:cNvPr id="7" name="TextBox 6"/>
+          <p:cNvSpPr txBox="1"/>
+          <p:nvPr/>
+        </p:nvSpPr>
+        <p:spPr>
+          <a:xfrm>
+            <a:off x="777240" y="1399031"/>
+            <a:ext cx="10774375" cy="822959"/>
+          </a:xfrm>
+          <a:prstGeom prst="rect">
+            <a:avLst/>
+          </a:prstGeom>
+          <a:noFill/>
+        </p:spPr>
+        <p:txBody>
+          <a:bodyPr wrap="square">
+            <a:spAutoFit/>
+          </a:bodyPr>
+          <a:lstStyle/>
+          <a:p>
+            <a:r>
+              <a:rPr sz="1200" b="1" i="0">
+                <a:solidFill>
+                  <a:srgbClr val="269CCB"/>
+                </a:solidFill>
+                <a:latin typeface="Calibri"/>
+              </a:rPr>
+              <a:t>Info</a:t>
+            </a:r>
+          </a:p>
+          <a:p>
+            <a:pPr>
+              <a:spcBef>
+                <a:spcPts val="400"/>
+              </a:spcBef>
+            </a:pPr>
+            <a:r>
+              <a:rPr sz="1400" b="0" i="0">
+                <a:solidFill>
+                  <a:srgbClr val="333333"/>
+                </a:solidFill>
+                <a:latin typeface="Calibri"/>
+              </a:rPr>
+              <a:t>Entregable: Dockerfile del stub + bitácora de 5 comandos con la salida real + captura del lab</a:t>
+            </a:r>
+          </a:p>
+        </p:txBody>
+      </p:sp>
+      <p:sp>
+        <p:nvSpPr>
+          <p:cNvPr id="8" name="Rounded Rectangle 7"/>
+          <p:cNvSpPr/>
+          <p:nvPr/>
+        </p:nvSpPr>
+        <p:spPr>
+          <a:xfrm>
+            <a:off x="457200" y="2478024"/>
+            <a:ext cx="11277295" cy="1051560"/>
+          </a:xfrm>
+          <a:prstGeom prst="roundRect">
+            <a:avLst>
+              <a:gd name="adj" fmla="val 12000"/>
+            </a:avLst>
+          </a:prstGeom>
+          <a:solidFill>
+            <a:srgbClr val="FFF8E1"/>
+          </a:solidFill>
+          <a:ln>
+            <a:noFill/>
+          </a:ln>
+        </p:spPr>
+        <p:style>
+          <a:lnRef idx="1">
+            <a:schemeClr val="accent1"/>
+          </a:lnRef>
+          <a:fillRef idx="3">
+            <a:schemeClr val="accent1"/>
+          </a:fillRef>
+          <a:effectRef idx="2">
+            <a:schemeClr val="accent1"/>
+          </a:effectRef>
+          <a:fontRef idx="minor">
+            <a:schemeClr val="lt1"/>
+          </a:fontRef>
+        </p:style>
+        <p:txBody>
+          <a:bodyPr rtlCol="0" anchor="ctr"/>
+          <a:lstStyle/>
+          <a:p>
+            <a:pPr algn="ctr"/>
+          </a:p>
+        </p:txBody>
+      </p:sp>
+      <p:sp>
+        <p:nvSpPr>
+          <p:cNvPr id="9" name="Rectangle 8"/>
+          <p:cNvSpPr/>
+          <p:nvPr/>
+        </p:nvSpPr>
+        <p:spPr>
+          <a:xfrm>
+            <a:off x="457200" y="2478024"/>
+            <a:ext cx="128016" cy="1051560"/>
+          </a:xfrm>
+          <a:prstGeom prst="rect">
+            <a:avLst/>
+          </a:prstGeom>
+          <a:solidFill>
+            <a:srgbClr val="FFD000"/>
+          </a:solidFill>
+          <a:ln>
+            <a:noFill/>
+          </a:ln>
+        </p:spPr>
+        <p:style>
+          <a:lnRef idx="1">
+            <a:schemeClr val="accent1"/>
+          </a:lnRef>
+          <a:fillRef idx="3">
+            <a:schemeClr val="accent1"/>
+          </a:fillRef>
+          <a:effectRef idx="2">
+            <a:schemeClr val="accent1"/>
+          </a:effectRef>
+          <a:fontRef idx="minor">
+            <a:schemeClr val="lt1"/>
+          </a:fontRef>
+        </p:style>
+        <p:txBody>
+          <a:bodyPr rtlCol="0" anchor="ctr"/>
+          <a:lstStyle/>
+          <a:p>
+            <a:pPr algn="ctr"/>
+          </a:p>
+        </p:txBody>
+      </p:sp>
+      <p:sp>
+        <p:nvSpPr>
+          <p:cNvPr id="10" name="TextBox 9"/>
+          <p:cNvSpPr txBox="1"/>
+          <p:nvPr/>
+        </p:nvSpPr>
+        <p:spPr>
+          <a:xfrm>
+            <a:off x="777240" y="2615184"/>
+            <a:ext cx="10774375" cy="822959"/>
+          </a:xfrm>
+          <a:prstGeom prst="rect">
+            <a:avLst/>
+          </a:prstGeom>
+          <a:noFill/>
+        </p:spPr>
+        <p:txBody>
+          <a:bodyPr wrap="square">
+            <a:spAutoFit/>
+          </a:bodyPr>
+          <a:lstStyle/>
+          <a:p>
+            <a:r>
+              <a:rPr sz="1200" b="1" i="0">
+                <a:solidFill>
+                  <a:srgbClr val="FFD000"/>
+                </a:solidFill>
+                <a:latin typeface="Calibri"/>
+              </a:rPr>
+              <a:t>Aclaración</a:t>
+            </a:r>
+          </a:p>
+          <a:p>
+            <a:pPr>
+              <a:spcBef>
+                <a:spcPts val="400"/>
+              </a:spcBef>
+            </a:pPr>
+            <a:r>
+              <a:rPr sz="1400" b="0" i="0">
+                <a:solidFill>
+                  <a:srgbClr val="333333"/>
+                </a:solidFill>
+                <a:latin typeface="Calibri"/>
+              </a:rPr>
+              <a:t>Subir evidencias al paquete CloudLite (Drive/repo) y a la plataforma del curso en la fecha que indique el docente.</a:t>
+            </a:r>
+          </a:p>
+        </p:txBody>
+      </p:sp>
+      <p:sp>
+        <p:nvSpPr>
+          <p:cNvPr id="11" name="Rounded Rectangle 10"/>
+          <p:cNvSpPr/>
+          <p:nvPr/>
+        </p:nvSpPr>
+        <p:spPr>
+          <a:xfrm>
+            <a:off x="457200" y="3694176"/>
+            <a:ext cx="11277295" cy="1051560"/>
+          </a:xfrm>
+          <a:prstGeom prst="roundRect">
+            <a:avLst>
+              <a:gd name="adj" fmla="val 12000"/>
+            </a:avLst>
+          </a:prstGeom>
+          <a:solidFill>
+            <a:srgbClr val="FBE4E4"/>
+          </a:solidFill>
+          <a:ln>
+            <a:noFill/>
+          </a:ln>
+        </p:spPr>
+        <p:style>
+          <a:lnRef idx="1">
+            <a:schemeClr val="accent1"/>
+          </a:lnRef>
+          <a:fillRef idx="3">
+            <a:schemeClr val="accent1"/>
+          </a:fillRef>
+          <a:effectRef idx="2">
+            <a:schemeClr val="accent1"/>
+          </a:effectRef>
+          <a:fontRef idx="minor">
+            <a:schemeClr val="lt1"/>
+          </a:fontRef>
+        </p:style>
+        <p:txBody>
+          <a:bodyPr rtlCol="0" anchor="ctr"/>
+          <a:lstStyle/>
+          <a:p>
+            <a:pPr algn="ctr"/>
+          </a:p>
+        </p:txBody>
+      </p:sp>
+      <p:sp>
+        <p:nvSpPr>
+          <p:cNvPr id="12" name="Rectangle 11"/>
+          <p:cNvSpPr/>
+          <p:nvPr/>
+        </p:nvSpPr>
+        <p:spPr>
+          <a:xfrm>
+            <a:off x="457200" y="3694176"/>
+            <a:ext cx="128016" cy="1051560"/>
+          </a:xfrm>
+          <a:prstGeom prst="rect">
+            <a:avLst/>
+          </a:prstGeom>
+          <a:solidFill>
+            <a:srgbClr val="A02030"/>
+          </a:solidFill>
+          <a:ln>
+            <a:noFill/>
+          </a:ln>
+        </p:spPr>
+        <p:style>
+          <a:lnRef idx="1">
+            <a:schemeClr val="accent1"/>
+          </a:lnRef>
+          <a:fillRef idx="3">
+            <a:schemeClr val="accent1"/>
+          </a:fillRef>
+          <a:effectRef idx="2">
+            <a:schemeClr val="accent1"/>
+          </a:effectRef>
+          <a:fontRef idx="minor">
+            <a:schemeClr val="lt1"/>
+          </a:fontRef>
+        </p:style>
+        <p:txBody>
+          <a:bodyPr rtlCol="0" anchor="ctr"/>
+          <a:lstStyle/>
+          <a:p>
+            <a:pPr algn="ctr"/>
+          </a:p>
+        </p:txBody>
+      </p:sp>
+      <p:sp>
+        <p:nvSpPr>
+          <p:cNvPr id="13" name="TextBox 12"/>
+          <p:cNvSpPr txBox="1"/>
+          <p:nvPr/>
+        </p:nvSpPr>
+        <p:spPr>
+          <a:xfrm>
+            <a:off x="777240" y="3831336"/>
+            <a:ext cx="10774375" cy="822959"/>
+          </a:xfrm>
+          <a:prstGeom prst="rect">
+            <a:avLst/>
+          </a:prstGeom>
+          <a:noFill/>
+        </p:spPr>
+        <p:txBody>
+          <a:bodyPr wrap="square">
+            <a:spAutoFit/>
+          </a:bodyPr>
+          <a:lstStyle/>
+          <a:p>
+            <a:r>
+              <a:rPr sz="1200" b="1" i="0">
+                <a:solidFill>
+                  <a:srgbClr val="A02030"/>
+                </a:solidFill>
+                <a:latin typeface="Calibri"/>
+              </a:rPr>
+              <a:t>Atención</a:t>
+            </a:r>
+          </a:p>
+          <a:p>
+            <a:pPr>
+              <a:spcBef>
+                <a:spcPts val="400"/>
+              </a:spcBef>
+            </a:pPr>
+            <a:r>
+              <a:rPr sz="1400" b="0" i="0">
+                <a:solidFill>
+                  <a:srgbClr val="333333"/>
+                </a:solidFill>
+                <a:latin typeface="Calibri"/>
+              </a:rPr>
+              <a:t>Sin cloud de pago ni instalaciones obligatorias de hipervisores/Docker Desktop.</a:t>
+            </a:r>
+          </a:p>
+        </p:txBody>
+      </p:sp>
+      <p:sp>
+        <p:nvSpPr>
+          <p:cNvPr id="14" name="TextBox 13"/>
+          <p:cNvSpPr txBox="1"/>
+          <p:nvPr/>
+        </p:nvSpPr>
+        <p:spPr>
+          <a:xfrm>
+            <a:off x="11185855" y="6473952"/>
+            <a:ext cx="640080" cy="274320"/>
+          </a:xfrm>
+          <a:prstGeom prst="rect">
+            <a:avLst/>
+          </a:prstGeom>
+          <a:noFill/>
+        </p:spPr>
+        <p:txBody>
+          <a:bodyPr wrap="square">
+            <a:spAutoFit/>
+          </a:bodyPr>
+          <a:lstStyle/>
+          <a:p>
+            <a:pPr algn="r"/>
+            <a:r>
+              <a:rPr sz="1100" b="0" i="0">
+                <a:solidFill>
+                  <a:srgbClr val="666666"/>
+                </a:solidFill>
+                <a:latin typeface="Calibri"/>
+              </a:rPr>
+              <a:t>33</a:t>
+            </a:r>
+          </a:p>
+        </p:txBody>
+      </p:sp>
+    </p:spTree>
+  </p:cSld>
+  <p:clrMapOvr>
+    <a:masterClrMapping/>
+  </p:clrMapOvr>
+</p:sld>
+</file>
+
+<file path=ppt/slides/slide34.xml><?xml version="1.0" encoding="utf-8"?>
 <p:sld xmlns:a="http://schemas.openxmlformats.org/drawingml/2006/main" xmlns:p="http://schemas.openxmlformats.org/presentationml/2006/main" xmlns:r="http://schemas.openxmlformats.org/officeDocument/2006/relationships">
   <p:cSld>
     <p:bg>
@@ -15421,22 +15306,6 @@
                 </a:solidFill>
                 <a:latin typeface="Calibri"/>
               </a:rPr>
-              <a:t>–   Las dos clases anteriores decidieron QUE se va a construir (dominio, capacidades, actores, diagrama de contexto) y BAJO QUE modelo de servicio se va a operar, con su registro de decision.</a:t>
-            </a:r>
-          </a:p>
-          <a:p>
-            <a:pPr>
-              <a:spcAft>
-                <a:spcPts val="800"/>
-              </a:spcAft>
-            </a:pPr>
-            <a:r>
-              <a:rPr sz="2000" b="0" i="0">
-                <a:solidFill>
-                  <a:srgbClr val="333333"/>
-                </a:solidFill>
-                <a:latin typeface="Calibri"/>
-              </a:rPr>
               <a:t>–   Hoy se abre la caja de la maquinaria que hace posible todo eso: la virtualizacion y su descendiente directo, los contenedores.</a:t>
             </a:r>
           </a:p>
@@ -15706,22 +15575,6 @@
                 <a:latin typeface="Calibri"/>
               </a:rPr>
               <a:t>–   El resultado era un desperdicio enorme, con servidores trabajando tipicamente entre el 5 % y el 15 % de su capacidad la mayor parte del tiempo.</a:t>
-            </a:r>
-          </a:p>
-          <a:p>
-            <a:pPr>
-              <a:spcAft>
-                <a:spcPts val="800"/>
-              </a:spcAft>
-            </a:pPr>
-            <a:r>
-              <a:rPr sz="2000" b="0" i="0">
-                <a:solidFill>
-                  <a:srgbClr val="333333"/>
-                </a:solidFill>
-                <a:latin typeface="Calibri"/>
-              </a:rPr>
-              <a:t>–   La virtualizacion resolvio eso con una pieza de software llamada hipervisor, que se interpone entre el hardware y los sistemas operativos y presenta a cada uno la ilusion de tener una maquina completa para si.</a:t>
             </a:r>
           </a:p>
           <a:p>

--- a/Arquitectura de Sistemas Computacionales/Clases/Clase 3 - Virtualizacion y contenedores/Presentacion.pptx
+++ b/Arquitectura de Sistemas Computacionales/Clases/Clase 3 - Virtualizacion y contenedores/Presentacion.pptx
@@ -39,6 +39,10 @@
     <p:sldId id="287" r:id="rId38"/>
     <p:sldId id="288" r:id="rId39"/>
     <p:sldId id="289" r:id="rId40"/>
+    <p:sldId id="290" r:id="rId41"/>
+    <p:sldId id="291" r:id="rId42"/>
+    <p:sldId id="292" r:id="rId43"/>
+    <p:sldId id="293" r:id="rId44"/>
   </p:sldIdLst>
   <p:sldSz cx="12191695" cy="6858000" type="screen4x3"/>
   <p:notesSz cx="6858000" cy="9144000"/>
@@ -8522,7 +8526,7 @@
         <p:spPr>
           <a:xfrm>
             <a:off x="0" y="0"/>
-            <a:ext cx="12191695" cy="1170432"/>
+            <a:ext cx="12191695" cy="960120"/>
           </a:xfrm>
           <a:prstGeom prst="rect">
             <a:avLst/>
@@ -8564,7 +8568,7 @@
         </p:nvSpPr>
         <p:spPr>
           <a:xfrm>
-            <a:off x="0" y="1170432"/>
+            <a:off x="0" y="960120"/>
             <a:ext cx="12191695" cy="41148"/>
           </a:xfrm>
           <a:prstGeom prst="rect">
@@ -8608,7 +8612,7 @@
         <p:spPr>
           <a:xfrm>
             <a:off x="457200" y="164592"/>
-            <a:ext cx="11277295" cy="384048"/>
+            <a:ext cx="11277295" cy="502920"/>
           </a:xfrm>
           <a:prstGeom prst="rect">
             <a:avLst/>
@@ -8628,60 +8632,69 @@
                 </a:solidFill>
                 <a:latin typeface="Calibri"/>
               </a:rPr>
-              <a:t>Máquinas virtuales vs. contenedores</a:t>
-            </a:r>
-          </a:p>
-        </p:txBody>
-      </p:sp>
-      <p:sp>
-        <p:nvSpPr>
-          <p:cNvPr id="5" name="TextBox 4"/>
-          <p:cNvSpPr txBox="1"/>
-          <p:nvPr/>
-        </p:nvSpPr>
-        <p:spPr>
-          <a:xfrm>
-            <a:off x="457200" y="566928"/>
-            <a:ext cx="11277295" cy="411480"/>
-          </a:xfrm>
-          <a:prstGeom prst="rect">
-            <a:avLst/>
-          </a:prstGeom>
-          <a:noFill/>
-        </p:spPr>
-        <p:txBody>
-          <a:bodyPr wrap="square">
-            <a:spAutoFit/>
-          </a:bodyPr>
-          <a:lstStyle/>
-          <a:p>
-            <a:r>
-              <a:rPr sz="1400" b="0" i="0">
-                <a:solidFill>
-                  <a:srgbClr val="B8D8EE"/>
-                </a:solidFill>
-                <a:latin typeface="Calibri"/>
-              </a:rPr>
-              <a:t>Misma capacidad de cómputo, distinto nivel de aislamiento</a:t>
-            </a:r>
-          </a:p>
-        </p:txBody>
-      </p:sp>
-      <p:sp>
-        <p:nvSpPr>
-          <p:cNvPr id="6" name="Rounded Rectangle 5"/>
+              <a:t>El Dockerfile minimo, capa por capa</a:t>
+            </a:r>
+          </a:p>
+        </p:txBody>
+      </p:sp>
+      <p:sp>
+        <p:nvSpPr>
+          <p:cNvPr id="5" name="Rounded Rectangle 4"/>
           <p:cNvSpPr/>
           <p:nvPr/>
         </p:nvSpPr>
         <p:spPr>
           <a:xfrm>
-            <a:off x="822960" y="1417320"/>
-            <a:ext cx="3931920" cy="457200"/>
+            <a:off x="457200" y="1261872"/>
+            <a:ext cx="11277295" cy="5093208"/>
           </a:xfrm>
           <a:prstGeom prst="roundRect">
             <a:avLst>
               <a:gd name="adj" fmla="val 12000"/>
             </a:avLst>
+          </a:prstGeom>
+          <a:solidFill>
+            <a:srgbClr val="1E2A38"/>
+          </a:solidFill>
+          <a:ln>
+            <a:noFill/>
+          </a:ln>
+        </p:spPr>
+        <p:style>
+          <a:lnRef idx="1">
+            <a:schemeClr val="accent1"/>
+          </a:lnRef>
+          <a:fillRef idx="3">
+            <a:schemeClr val="accent1"/>
+          </a:fillRef>
+          <a:effectRef idx="2">
+            <a:schemeClr val="accent1"/>
+          </a:effectRef>
+          <a:fontRef idx="minor">
+            <a:schemeClr val="lt1"/>
+          </a:fontRef>
+        </p:style>
+        <p:txBody>
+          <a:bodyPr rtlCol="0" anchor="ctr"/>
+          <a:lstStyle/>
+          <a:p>
+            <a:pPr algn="ctr"/>
+          </a:p>
+        </p:txBody>
+      </p:sp>
+      <p:sp>
+        <p:nvSpPr>
+          <p:cNvPr id="6" name="Rectangle 5"/>
+          <p:cNvSpPr/>
+          <p:nvPr/>
+        </p:nvSpPr>
+        <p:spPr>
+          <a:xfrm>
+            <a:off x="457200" y="1261872"/>
+            <a:ext cx="11277295" cy="320040"/>
+          </a:xfrm>
+          <a:prstGeom prst="rect">
+            <a:avLst/>
           </a:prstGeom>
           <a:solidFill>
             <a:srgbClr val="095292"/>
@@ -8705,630 +8718,55 @@
           </a:fontRef>
         </p:style>
         <p:txBody>
-          <a:bodyPr rtlCol="0" anchor="ctr" wrap="square"/>
+          <a:bodyPr rtlCol="0" anchor="ctr"/>
           <a:lstStyle/>
           <a:p>
             <a:pPr algn="ctr"/>
-            <a:r>
-              <a:rPr sz="1200" b="1" i="0">
-                <a:solidFill>
-                  <a:srgbClr val="FFFFFF"/>
-                </a:solidFill>
-                <a:latin typeface="Calibri"/>
-              </a:rPr>
-              <a:t>Máquinas virtuales</a:t>
-            </a:r>
-          </a:p>
-        </p:txBody>
-      </p:sp>
-      <p:sp>
-        <p:nvSpPr>
-          <p:cNvPr id="7" name="Rounded Rectangle 6"/>
-          <p:cNvSpPr/>
-          <p:nvPr/>
-        </p:nvSpPr>
-        <p:spPr>
-          <a:xfrm>
-            <a:off x="822960" y="2057400"/>
-            <a:ext cx="3931920" cy="594360"/>
-          </a:xfrm>
-          <a:prstGeom prst="roundRect">
-            <a:avLst>
-              <a:gd name="adj" fmla="val 12000"/>
-            </a:avLst>
-          </a:prstGeom>
-          <a:solidFill>
-            <a:srgbClr val="333333"/>
-          </a:solidFill>
-          <a:ln>
-            <a:noFill/>
-          </a:ln>
-        </p:spPr>
-        <p:style>
-          <a:lnRef idx="1">
-            <a:schemeClr val="accent1"/>
-          </a:lnRef>
-          <a:fillRef idx="3">
-            <a:schemeClr val="accent1"/>
-          </a:fillRef>
-          <a:effectRef idx="2">
-            <a:schemeClr val="accent1"/>
-          </a:effectRef>
-          <a:fontRef idx="minor">
-            <a:schemeClr val="lt1"/>
-          </a:fontRef>
-        </p:style>
-        <p:txBody>
-          <a:bodyPr rtlCol="0" anchor="ctr" wrap="square"/>
-          <a:lstStyle/>
-          <a:p>
-            <a:pPr algn="ctr"/>
-            <a:r>
-              <a:rPr sz="1300" b="1" i="0">
-                <a:solidFill>
-                  <a:srgbClr val="FFFFFF"/>
-                </a:solidFill>
-                <a:latin typeface="Calibri"/>
-              </a:rPr>
-              <a:t>Hardware físico</a:t>
-            </a:r>
-          </a:p>
-        </p:txBody>
-      </p:sp>
-      <p:sp>
-        <p:nvSpPr>
-          <p:cNvPr id="8" name="Rounded Rectangle 7"/>
-          <p:cNvSpPr/>
-          <p:nvPr/>
-        </p:nvSpPr>
-        <p:spPr>
-          <a:xfrm>
-            <a:off x="822960" y="2697480"/>
-            <a:ext cx="3931920" cy="594360"/>
-          </a:xfrm>
-          <a:prstGeom prst="roundRect">
-            <a:avLst>
-              <a:gd name="adj" fmla="val 12000"/>
-            </a:avLst>
-          </a:prstGeom>
-          <a:solidFill>
-            <a:srgbClr val="269CCB"/>
-          </a:solidFill>
-          <a:ln>
-            <a:noFill/>
-          </a:ln>
-        </p:spPr>
-        <p:style>
-          <a:lnRef idx="1">
-            <a:schemeClr val="accent1"/>
-          </a:lnRef>
-          <a:fillRef idx="3">
-            <a:schemeClr val="accent1"/>
-          </a:fillRef>
-          <a:effectRef idx="2">
-            <a:schemeClr val="accent1"/>
-          </a:effectRef>
-          <a:fontRef idx="minor">
-            <a:schemeClr val="lt1"/>
-          </a:fontRef>
-        </p:style>
-        <p:txBody>
-          <a:bodyPr rtlCol="0" anchor="ctr" wrap="square"/>
-          <a:lstStyle/>
-          <a:p>
-            <a:pPr algn="ctr"/>
-            <a:r>
-              <a:rPr sz="1300" b="1" i="0">
-                <a:solidFill>
-                  <a:srgbClr val="FFFFFF"/>
-                </a:solidFill>
-                <a:latin typeface="Calibri"/>
-              </a:rPr>
-              <a:t>Hipervisor</a:t>
-            </a:r>
-          </a:p>
-        </p:txBody>
-      </p:sp>
-      <p:sp>
-        <p:nvSpPr>
-          <p:cNvPr id="9" name="Rounded Rectangle 8"/>
-          <p:cNvSpPr/>
-          <p:nvPr/>
-        </p:nvSpPr>
-        <p:spPr>
-          <a:xfrm>
-            <a:off x="822960" y="3337560"/>
-            <a:ext cx="1874519" cy="640080"/>
-          </a:xfrm>
-          <a:prstGeom prst="roundRect">
-            <a:avLst>
-              <a:gd name="adj" fmla="val 12000"/>
-            </a:avLst>
-          </a:prstGeom>
-          <a:solidFill>
-            <a:srgbClr val="269CCB"/>
-          </a:solidFill>
-          <a:ln>
-            <a:noFill/>
-          </a:ln>
-        </p:spPr>
-        <p:style>
-          <a:lnRef idx="1">
-            <a:schemeClr val="accent1"/>
-          </a:lnRef>
-          <a:fillRef idx="3">
-            <a:schemeClr val="accent1"/>
-          </a:fillRef>
-          <a:effectRef idx="2">
-            <a:schemeClr val="accent1"/>
-          </a:effectRef>
-          <a:fontRef idx="minor">
-            <a:schemeClr val="lt1"/>
-          </a:fontRef>
-        </p:style>
-        <p:txBody>
-          <a:bodyPr rtlCol="0" anchor="ctr" wrap="square"/>
-          <a:lstStyle/>
-          <a:p>
-            <a:pPr algn="ctr"/>
-            <a:r>
-              <a:rPr sz="1100" b="1" i="0">
-                <a:solidFill>
-                  <a:srgbClr val="FFFFFF"/>
-                </a:solidFill>
-                <a:latin typeface="Calibri"/>
-              </a:rPr>
-              <a:t>SO invitado A
-(completo)</a:t>
-            </a:r>
-          </a:p>
-        </p:txBody>
-      </p:sp>
-      <p:sp>
-        <p:nvSpPr>
-          <p:cNvPr id="10" name="Rounded Rectangle 9"/>
-          <p:cNvSpPr/>
-          <p:nvPr/>
-        </p:nvSpPr>
-        <p:spPr>
-          <a:xfrm>
-            <a:off x="2880360" y="3337560"/>
-            <a:ext cx="1874519" cy="640080"/>
-          </a:xfrm>
-          <a:prstGeom prst="roundRect">
-            <a:avLst>
-              <a:gd name="adj" fmla="val 12000"/>
-            </a:avLst>
-          </a:prstGeom>
-          <a:solidFill>
-            <a:srgbClr val="269CCB"/>
-          </a:solidFill>
-          <a:ln>
-            <a:noFill/>
-          </a:ln>
-        </p:spPr>
-        <p:style>
-          <a:lnRef idx="1">
-            <a:schemeClr val="accent1"/>
-          </a:lnRef>
-          <a:fillRef idx="3">
-            <a:schemeClr val="accent1"/>
-          </a:fillRef>
-          <a:effectRef idx="2">
-            <a:schemeClr val="accent1"/>
-          </a:effectRef>
-          <a:fontRef idx="minor">
-            <a:schemeClr val="lt1"/>
-          </a:fontRef>
-        </p:style>
-        <p:txBody>
-          <a:bodyPr rtlCol="0" anchor="ctr" wrap="square"/>
-          <a:lstStyle/>
-          <a:p>
-            <a:pPr algn="ctr"/>
-            <a:r>
-              <a:rPr sz="1100" b="1" i="0">
-                <a:solidFill>
-                  <a:srgbClr val="FFFFFF"/>
-                </a:solidFill>
-                <a:latin typeface="Calibri"/>
-              </a:rPr>
-              <a:t>SO invitado B
-(completo)</a:t>
-            </a:r>
-          </a:p>
-        </p:txBody>
-      </p:sp>
-      <p:sp>
-        <p:nvSpPr>
-          <p:cNvPr id="11" name="Rounded Rectangle 10"/>
-          <p:cNvSpPr/>
-          <p:nvPr/>
-        </p:nvSpPr>
-        <p:spPr>
-          <a:xfrm>
-            <a:off x="822960" y="4023360"/>
-            <a:ext cx="1874519" cy="548640"/>
-          </a:xfrm>
-          <a:prstGeom prst="roundRect">
-            <a:avLst>
-              <a:gd name="adj" fmla="val 12000"/>
-            </a:avLst>
-          </a:prstGeom>
-          <a:solidFill>
-            <a:srgbClr val="FFD000"/>
-          </a:solidFill>
-          <a:ln>
-            <a:noFill/>
-          </a:ln>
-        </p:spPr>
-        <p:style>
-          <a:lnRef idx="1">
-            <a:schemeClr val="accent1"/>
-          </a:lnRef>
-          <a:fillRef idx="3">
-            <a:schemeClr val="accent1"/>
-          </a:fillRef>
-          <a:effectRef idx="2">
-            <a:schemeClr val="accent1"/>
-          </a:effectRef>
-          <a:fontRef idx="minor">
-            <a:schemeClr val="lt1"/>
-          </a:fontRef>
-        </p:style>
-        <p:txBody>
-          <a:bodyPr rtlCol="0" anchor="ctr" wrap="square"/>
-          <a:lstStyle/>
-          <a:p>
-            <a:pPr algn="ctr"/>
-            <a:r>
-              <a:rPr sz="1300" b="1" i="0">
-                <a:solidFill>
-                  <a:srgbClr val="095292"/>
-                </a:solidFill>
-                <a:latin typeface="Calibri"/>
-              </a:rPr>
-              <a:t>App A</a:t>
-            </a:r>
-          </a:p>
-        </p:txBody>
-      </p:sp>
-      <p:sp>
-        <p:nvSpPr>
-          <p:cNvPr id="12" name="Rounded Rectangle 11"/>
-          <p:cNvSpPr/>
-          <p:nvPr/>
-        </p:nvSpPr>
-        <p:spPr>
-          <a:xfrm>
-            <a:off x="2880360" y="4023360"/>
-            <a:ext cx="1874519" cy="548640"/>
-          </a:xfrm>
-          <a:prstGeom prst="roundRect">
-            <a:avLst>
-              <a:gd name="adj" fmla="val 12000"/>
-            </a:avLst>
-          </a:prstGeom>
-          <a:solidFill>
-            <a:srgbClr val="FFD000"/>
-          </a:solidFill>
-          <a:ln>
-            <a:noFill/>
-          </a:ln>
-        </p:spPr>
-        <p:style>
-          <a:lnRef idx="1">
-            <a:schemeClr val="accent1"/>
-          </a:lnRef>
-          <a:fillRef idx="3">
-            <a:schemeClr val="accent1"/>
-          </a:fillRef>
-          <a:effectRef idx="2">
-            <a:schemeClr val="accent1"/>
-          </a:effectRef>
-          <a:fontRef idx="minor">
-            <a:schemeClr val="lt1"/>
-          </a:fontRef>
-        </p:style>
-        <p:txBody>
-          <a:bodyPr rtlCol="0" anchor="ctr" wrap="square"/>
-          <a:lstStyle/>
-          <a:p>
-            <a:pPr algn="ctr"/>
-            <a:r>
-              <a:rPr sz="1300" b="1" i="0">
-                <a:solidFill>
-                  <a:srgbClr val="095292"/>
-                </a:solidFill>
-                <a:latin typeface="Calibri"/>
-              </a:rPr>
-              <a:t>App B</a:t>
-            </a:r>
-          </a:p>
-        </p:txBody>
-      </p:sp>
-      <p:sp>
-        <p:nvSpPr>
-          <p:cNvPr id="13" name="Rounded Rectangle 12"/>
-          <p:cNvSpPr/>
-          <p:nvPr/>
-        </p:nvSpPr>
-        <p:spPr>
-          <a:xfrm>
-            <a:off x="7315200" y="1417320"/>
-            <a:ext cx="3931920" cy="457200"/>
-          </a:xfrm>
-          <a:prstGeom prst="roundRect">
-            <a:avLst>
-              <a:gd name="adj" fmla="val 12000"/>
-            </a:avLst>
-          </a:prstGeom>
-          <a:solidFill>
-            <a:srgbClr val="095292"/>
-          </a:solidFill>
-          <a:ln>
-            <a:noFill/>
-          </a:ln>
-        </p:spPr>
-        <p:style>
-          <a:lnRef idx="1">
-            <a:schemeClr val="accent1"/>
-          </a:lnRef>
-          <a:fillRef idx="3">
-            <a:schemeClr val="accent1"/>
-          </a:fillRef>
-          <a:effectRef idx="2">
-            <a:schemeClr val="accent1"/>
-          </a:effectRef>
-          <a:fontRef idx="minor">
-            <a:schemeClr val="lt1"/>
-          </a:fontRef>
-        </p:style>
-        <p:txBody>
-          <a:bodyPr rtlCol="0" anchor="ctr" wrap="square"/>
-          <a:lstStyle/>
-          <a:p>
-            <a:pPr algn="ctr"/>
-            <a:r>
-              <a:rPr sz="1200" b="1" i="0">
-                <a:solidFill>
-                  <a:srgbClr val="FFFFFF"/>
-                </a:solidFill>
-                <a:latin typeface="Calibri"/>
-              </a:rPr>
-              <a:t>Contenedores</a:t>
-            </a:r>
-          </a:p>
-        </p:txBody>
-      </p:sp>
-      <p:sp>
-        <p:nvSpPr>
-          <p:cNvPr id="14" name="Rounded Rectangle 13"/>
-          <p:cNvSpPr/>
-          <p:nvPr/>
-        </p:nvSpPr>
-        <p:spPr>
-          <a:xfrm>
-            <a:off x="7315200" y="2057400"/>
-            <a:ext cx="3931920" cy="594360"/>
-          </a:xfrm>
-          <a:prstGeom prst="roundRect">
-            <a:avLst>
-              <a:gd name="adj" fmla="val 12000"/>
-            </a:avLst>
-          </a:prstGeom>
-          <a:solidFill>
-            <a:srgbClr val="333333"/>
-          </a:solidFill>
-          <a:ln>
-            <a:noFill/>
-          </a:ln>
-        </p:spPr>
-        <p:style>
-          <a:lnRef idx="1">
-            <a:schemeClr val="accent1"/>
-          </a:lnRef>
-          <a:fillRef idx="3">
-            <a:schemeClr val="accent1"/>
-          </a:fillRef>
-          <a:effectRef idx="2">
-            <a:schemeClr val="accent1"/>
-          </a:effectRef>
-          <a:fontRef idx="minor">
-            <a:schemeClr val="lt1"/>
-          </a:fontRef>
-        </p:style>
-        <p:txBody>
-          <a:bodyPr rtlCol="0" anchor="ctr" wrap="square"/>
-          <a:lstStyle/>
-          <a:p>
-            <a:pPr algn="ctr"/>
-            <a:r>
-              <a:rPr sz="1300" b="1" i="0">
-                <a:solidFill>
-                  <a:srgbClr val="FFFFFF"/>
-                </a:solidFill>
-                <a:latin typeface="Calibri"/>
-              </a:rPr>
-              <a:t>Hardware físico</a:t>
-            </a:r>
-          </a:p>
-        </p:txBody>
-      </p:sp>
-      <p:sp>
-        <p:nvSpPr>
-          <p:cNvPr id="15" name="Rounded Rectangle 14"/>
-          <p:cNvSpPr/>
-          <p:nvPr/>
-        </p:nvSpPr>
-        <p:spPr>
-          <a:xfrm>
-            <a:off x="7315200" y="2697480"/>
-            <a:ext cx="3931920" cy="594360"/>
-          </a:xfrm>
-          <a:prstGeom prst="roundRect">
-            <a:avLst>
-              <a:gd name="adj" fmla="val 12000"/>
-            </a:avLst>
-          </a:prstGeom>
-          <a:solidFill>
-            <a:srgbClr val="269CCB"/>
-          </a:solidFill>
-          <a:ln>
-            <a:noFill/>
-          </a:ln>
-        </p:spPr>
-        <p:style>
-          <a:lnRef idx="1">
-            <a:schemeClr val="accent1"/>
-          </a:lnRef>
-          <a:fillRef idx="3">
-            <a:schemeClr val="accent1"/>
-          </a:fillRef>
-          <a:effectRef idx="2">
-            <a:schemeClr val="accent1"/>
-          </a:effectRef>
-          <a:fontRef idx="minor">
-            <a:schemeClr val="lt1"/>
-          </a:fontRef>
-        </p:style>
-        <p:txBody>
-          <a:bodyPr rtlCol="0" anchor="ctr" wrap="square"/>
-          <a:lstStyle/>
-          <a:p>
-            <a:pPr algn="ctr"/>
-            <a:r>
-              <a:rPr sz="1050" b="1" i="0">
-                <a:solidFill>
-                  <a:srgbClr val="FFFFFF"/>
-                </a:solidFill>
-                <a:latin typeface="Calibri"/>
-              </a:rPr>
-              <a:t>SO anfitrión + motor de contenedores (kernel compartido)</a:t>
-            </a:r>
-          </a:p>
-        </p:txBody>
-      </p:sp>
-      <p:sp>
-        <p:nvSpPr>
-          <p:cNvPr id="16" name="Rounded Rectangle 15"/>
-          <p:cNvSpPr/>
-          <p:nvPr/>
-        </p:nvSpPr>
-        <p:spPr>
-          <a:xfrm>
-            <a:off x="7315200" y="3337560"/>
-            <a:ext cx="1874519" cy="640080"/>
-          </a:xfrm>
-          <a:prstGeom prst="roundRect">
-            <a:avLst>
-              <a:gd name="adj" fmla="val 12000"/>
-            </a:avLst>
-          </a:prstGeom>
-          <a:solidFill>
-            <a:srgbClr val="FFD000"/>
-          </a:solidFill>
-          <a:ln>
-            <a:noFill/>
-          </a:ln>
-        </p:spPr>
-        <p:style>
-          <a:lnRef idx="1">
-            <a:schemeClr val="accent1"/>
-          </a:lnRef>
-          <a:fillRef idx="3">
-            <a:schemeClr val="accent1"/>
-          </a:fillRef>
-          <a:effectRef idx="2">
-            <a:schemeClr val="accent1"/>
-          </a:effectRef>
-          <a:fontRef idx="minor">
-            <a:schemeClr val="lt1"/>
-          </a:fontRef>
-        </p:style>
-        <p:txBody>
-          <a:bodyPr rtlCol="0" anchor="ctr" wrap="square"/>
-          <a:lstStyle/>
-          <a:p>
-            <a:pPr algn="ctr"/>
-            <a:r>
-              <a:rPr sz="1100" b="1" i="0">
-                <a:solidFill>
-                  <a:srgbClr val="095292"/>
-                </a:solidFill>
-                <a:latin typeface="Calibri"/>
-              </a:rPr>
-              <a:t>Contenedor A
-(App A)</a:t>
-            </a:r>
-          </a:p>
-        </p:txBody>
-      </p:sp>
-      <p:sp>
-        <p:nvSpPr>
-          <p:cNvPr id="17" name="Rounded Rectangle 16"/>
-          <p:cNvSpPr/>
-          <p:nvPr/>
-        </p:nvSpPr>
-        <p:spPr>
-          <a:xfrm>
-            <a:off x="9372600" y="3337560"/>
-            <a:ext cx="1874519" cy="640080"/>
-          </a:xfrm>
-          <a:prstGeom prst="roundRect">
-            <a:avLst>
-              <a:gd name="adj" fmla="val 12000"/>
-            </a:avLst>
-          </a:prstGeom>
-          <a:solidFill>
-            <a:srgbClr val="FFD000"/>
-          </a:solidFill>
-          <a:ln>
-            <a:noFill/>
-          </a:ln>
-        </p:spPr>
-        <p:style>
-          <a:lnRef idx="1">
-            <a:schemeClr val="accent1"/>
-          </a:lnRef>
-          <a:fillRef idx="3">
-            <a:schemeClr val="accent1"/>
-          </a:fillRef>
-          <a:effectRef idx="2">
-            <a:schemeClr val="accent1"/>
-          </a:effectRef>
-          <a:fontRef idx="minor">
-            <a:schemeClr val="lt1"/>
-          </a:fontRef>
-        </p:style>
-        <p:txBody>
-          <a:bodyPr rtlCol="0" anchor="ctr" wrap="square"/>
-          <a:lstStyle/>
-          <a:p>
-            <a:pPr algn="ctr"/>
-            <a:r>
-              <a:rPr sz="1100" b="1" i="0">
-                <a:solidFill>
-                  <a:srgbClr val="095292"/>
-                </a:solidFill>
-                <a:latin typeface="Calibri"/>
-              </a:rPr>
-              <a:t>Contenedor B
-(App B)</a:t>
-            </a:r>
-          </a:p>
-        </p:txBody>
-      </p:sp>
-      <p:sp>
-        <p:nvSpPr>
-          <p:cNvPr id="18" name="TextBox 17"/>
+          </a:p>
+        </p:txBody>
+      </p:sp>
+      <p:sp>
+        <p:nvSpPr>
+          <p:cNvPr id="7" name="TextBox 6"/>
           <p:cNvSpPr txBox="1"/>
           <p:nvPr/>
         </p:nvSpPr>
         <p:spPr>
           <a:xfrm>
-            <a:off x="457200" y="6263640"/>
-            <a:ext cx="11277295" cy="411480"/>
+            <a:off x="685800" y="1307592"/>
+            <a:ext cx="10820095" cy="256032"/>
+          </a:xfrm>
+          <a:prstGeom prst="rect">
+            <a:avLst/>
+          </a:prstGeom>
+          <a:noFill/>
+        </p:spPr>
+        <p:txBody>
+          <a:bodyPr wrap="square" anchor="ctr"/>
+          <a:lstStyle/>
+          <a:p>
+            <a:r>
+              <a:rPr sz="1000" b="1" i="0">
+                <a:solidFill>
+                  <a:srgbClr val="269CCB"/>
+                </a:solidFill>
+                <a:latin typeface="Calibri"/>
+              </a:rPr>
+              <a:t>● ● ●</a:t>
+            </a:r>
+          </a:p>
+        </p:txBody>
+      </p:sp>
+      <p:sp>
+        <p:nvSpPr>
+          <p:cNvPr id="8" name="TextBox 7"/>
+          <p:cNvSpPr txBox="1"/>
+          <p:nvPr/>
+        </p:nvSpPr>
+        <p:spPr>
+          <a:xfrm>
+            <a:off x="777240" y="1719072"/>
+            <a:ext cx="10637215" cy="4453128"/>
           </a:xfrm>
           <a:prstGeom prst="rect">
             <a:avLst/>
@@ -9341,21 +8779,250 @@
           </a:bodyPr>
           <a:lstStyle/>
           <a:p>
-            <a:r>
-              <a:rPr sz="1100" b="0" i="1">
-                <a:solidFill>
-                  <a:srgbClr val="666666"/>
-                </a:solidFill>
-                <a:latin typeface="Calibri"/>
-              </a:rPr>
-              <a:t>VM: cada instancia carga un SO completo (aislamiento fuerte, más pesado). Contenedor: comparte el kernel del anfitrión y solo empaqueta app + dependencias (arranca en segundos, pesa MB no GB).</a:t>
-            </a:r>
-          </a:p>
-        </p:txBody>
-      </p:sp>
-      <p:sp>
-        <p:nvSpPr>
-          <p:cNvPr id="19" name="TextBox 18"/>
+            <a:pPr>
+              <a:spcAft>
+                <a:spcPts val="400"/>
+              </a:spcAft>
+            </a:pPr>
+            <a:r>
+              <a:rPr sz="1400" b="0" i="0">
+                <a:solidFill>
+                  <a:srgbClr val="FFFFFF"/>
+                </a:solidFill>
+                <a:latin typeface="Calibri"/>
+              </a:rPr>
+              <a:t># Cada instruccion es UNA CAPA. El orden decide que se reconstruye.</a:t>
+            </a:r>
+          </a:p>
+          <a:p>
+            <a:pPr>
+              <a:spcAft>
+                <a:spcPts val="400"/>
+              </a:spcAft>
+            </a:pPr>
+            <a:r>
+              <a:rPr sz="1400" b="0" i="0">
+                <a:solidFill>
+                  <a:srgbClr val="FFFFFF"/>
+                </a:solidFill>
+                <a:latin typeface="Calibri"/>
+              </a:rPr>
+              <a:t>FROM node:20-alpine</a:t>
+            </a:r>
+          </a:p>
+          <a:p>
+            <a:pPr>
+              <a:spcAft>
+                <a:spcPts val="400"/>
+              </a:spcAft>
+            </a:pPr>
+            <a:r>
+              <a:rPr sz="1400" b="0" i="0">
+                <a:solidFill>
+                  <a:srgbClr val="FFFFFF"/>
+                </a:solidFill>
+                <a:latin typeface="Calibri"/>
+              </a:rPr>
+              <a:t/>
+            </a:r>
+          </a:p>
+          <a:p>
+            <a:pPr>
+              <a:spcAft>
+                <a:spcPts val="400"/>
+              </a:spcAft>
+            </a:pPr>
+            <a:r>
+              <a:rPr sz="1400" b="0" i="0">
+                <a:solidFill>
+                  <a:srgbClr val="FFFFFF"/>
+                </a:solidFill>
+                <a:latin typeface="Calibri"/>
+              </a:rPr>
+              <a:t>WORKDIR /app</a:t>
+            </a:r>
+          </a:p>
+          <a:p>
+            <a:pPr>
+              <a:spcAft>
+                <a:spcPts val="400"/>
+              </a:spcAft>
+            </a:pPr>
+            <a:r>
+              <a:rPr sz="1400" b="0" i="0">
+                <a:solidFill>
+                  <a:srgbClr val="FFFFFF"/>
+                </a:solidFill>
+                <a:latin typeface="Calibri"/>
+              </a:rPr>
+              <a:t/>
+            </a:r>
+          </a:p>
+          <a:p>
+            <a:pPr>
+              <a:spcAft>
+                <a:spcPts val="400"/>
+              </a:spcAft>
+            </a:pPr>
+            <a:r>
+              <a:rPr sz="1400" b="0" i="0">
+                <a:solidFill>
+                  <a:srgbClr val="FFFFFF"/>
+                </a:solidFill>
+                <a:latin typeface="Calibri"/>
+              </a:rPr>
+              <a:t># Primero las dependencias: si el codigo cambia y package.json no,</a:t>
+            </a:r>
+          </a:p>
+          <a:p>
+            <a:pPr>
+              <a:spcAft>
+                <a:spcPts val="400"/>
+              </a:spcAft>
+            </a:pPr>
+            <a:r>
+              <a:rPr sz="1400" b="0" i="0">
+                <a:solidFill>
+                  <a:srgbClr val="FFFFFF"/>
+                </a:solidFill>
+                <a:latin typeface="Calibri"/>
+              </a:rPr>
+              <a:t># esta capa se reutiliza de la cache y el build tarda segundos.</a:t>
+            </a:r>
+          </a:p>
+          <a:p>
+            <a:pPr>
+              <a:spcAft>
+                <a:spcPts val="400"/>
+              </a:spcAft>
+            </a:pPr>
+            <a:r>
+              <a:rPr sz="1400" b="0" i="0">
+                <a:solidFill>
+                  <a:srgbClr val="FFFFFF"/>
+                </a:solidFill>
+                <a:latin typeface="Calibri"/>
+              </a:rPr>
+              <a:t>COPY package*.json ./</a:t>
+            </a:r>
+          </a:p>
+          <a:p>
+            <a:pPr>
+              <a:spcAft>
+                <a:spcPts val="400"/>
+              </a:spcAft>
+            </a:pPr>
+            <a:r>
+              <a:rPr sz="1400" b="0" i="0">
+                <a:solidFill>
+                  <a:srgbClr val="FFFFFF"/>
+                </a:solidFill>
+                <a:latin typeface="Calibri"/>
+              </a:rPr>
+              <a:t>RUN npm ci --omit=dev</a:t>
+            </a:r>
+          </a:p>
+          <a:p>
+            <a:pPr>
+              <a:spcAft>
+                <a:spcPts val="400"/>
+              </a:spcAft>
+            </a:pPr>
+            <a:r>
+              <a:rPr sz="1400" b="0" i="0">
+                <a:solidFill>
+                  <a:srgbClr val="FFFFFF"/>
+                </a:solidFill>
+                <a:latin typeface="Calibri"/>
+              </a:rPr>
+              <a:t/>
+            </a:r>
+          </a:p>
+          <a:p>
+            <a:pPr>
+              <a:spcAft>
+                <a:spcPts val="400"/>
+              </a:spcAft>
+            </a:pPr>
+            <a:r>
+              <a:rPr sz="1400" b="0" i="0">
+                <a:solidFill>
+                  <a:srgbClr val="FFFFFF"/>
+                </a:solidFill>
+                <a:latin typeface="Calibri"/>
+              </a:rPr>
+              <a:t># Despues el codigo, que es lo que cambia en cada commit.</a:t>
+            </a:r>
+          </a:p>
+          <a:p>
+            <a:pPr>
+              <a:spcAft>
+                <a:spcPts val="400"/>
+              </a:spcAft>
+            </a:pPr>
+            <a:r>
+              <a:rPr sz="1400" b="0" i="0">
+                <a:solidFill>
+                  <a:srgbClr val="FFFFFF"/>
+                </a:solidFill>
+                <a:latin typeface="Calibri"/>
+              </a:rPr>
+              <a:t>COPY..</a:t>
+            </a:r>
+          </a:p>
+          <a:p>
+            <a:pPr>
+              <a:spcAft>
+                <a:spcPts val="400"/>
+              </a:spcAft>
+            </a:pPr>
+            <a:r>
+              <a:rPr sz="1400" b="0" i="0">
+                <a:solidFill>
+                  <a:srgbClr val="FFFFFF"/>
+                </a:solidFill>
+                <a:latin typeface="Calibri"/>
+              </a:rPr>
+              <a:t/>
+            </a:r>
+          </a:p>
+          <a:p>
+            <a:pPr>
+              <a:spcAft>
+                <a:spcPts val="400"/>
+              </a:spcAft>
+            </a:pPr>
+            <a:r>
+              <a:rPr sz="1400" b="0" i="0">
+                <a:solidFill>
+                  <a:srgbClr val="FFFFFF"/>
+                </a:solidFill>
+                <a:latin typeface="Calibri"/>
+              </a:rPr>
+              <a:t>EXPOSE 3000</a:t>
+            </a:r>
+          </a:p>
+          <a:p>
+            <a:pPr>
+              <a:spcAft>
+                <a:spcPts val="400"/>
+              </a:spcAft>
+            </a:pPr>
+            <a:r>
+              <a:rPr sz="1400" b="0" i="0">
+                <a:solidFill>
+                  <a:srgbClr val="FFFFFF"/>
+                </a:solidFill>
+                <a:latin typeface="Calibri"/>
+              </a:rPr>
+              <a:t>CMD ["node", "server.js"]</a:t>
+            </a:r>
+          </a:p>
+        </p:txBody>
+      </p:sp>
+      <p:sp>
+        <p:nvSpPr>
+          <p:cNvPr id="9" name="TextBox 8"/>
           <p:cNvSpPr txBox="1"/>
           <p:nvPr/>
         </p:nvSpPr>
@@ -9529,7 +9196,7 @@
                 </a:solidFill>
                 <a:latin typeface="Calibri"/>
               </a:rPr>
-              <a:t>Maquina virtual vs contenedor — que cambia de verdad</a:t>
+              <a:t>El ciclo completo: construir, ejecutar, verificar</a:t>
             </a:r>
           </a:p>
         </p:txBody>
@@ -9543,7 +9210,7 @@
         <p:spPr>
           <a:xfrm>
             <a:off x="457200" y="1261872"/>
-            <a:ext cx="5478627" cy="5093208"/>
+            <a:ext cx="11277295" cy="5093208"/>
           </a:xfrm>
           <a:prstGeom prst="roundRect">
             <a:avLst>
@@ -9551,7 +9218,7 @@
             </a:avLst>
           </a:prstGeom>
           <a:solidFill>
-            <a:srgbClr val="FBE4E4"/>
+            <a:srgbClr val="1E2A38"/>
           </a:solidFill>
           <a:ln>
             <a:noFill/>
@@ -9588,260 +9255,7 @@
         <p:spPr>
           <a:xfrm>
             <a:off x="457200" y="1261872"/>
-            <a:ext cx="5478627" cy="502920"/>
-          </a:xfrm>
-          <a:prstGeom prst="rect">
-            <a:avLst/>
-          </a:prstGeom>
-          <a:solidFill>
-            <a:srgbClr val="A02030"/>
-          </a:solidFill>
-          <a:ln>
-            <a:noFill/>
-          </a:ln>
-        </p:spPr>
-        <p:style>
-          <a:lnRef idx="1">
-            <a:schemeClr val="accent1"/>
-          </a:lnRef>
-          <a:fillRef idx="3">
-            <a:schemeClr val="accent1"/>
-          </a:fillRef>
-          <a:effectRef idx="2">
-            <a:schemeClr val="accent1"/>
-          </a:effectRef>
-          <a:fontRef idx="minor">
-            <a:schemeClr val="lt1"/>
-          </a:fontRef>
-        </p:style>
-        <p:txBody>
-          <a:bodyPr rtlCol="0" anchor="ctr"/>
-          <a:lstStyle/>
-          <a:p>
-            <a:pPr algn="ctr"/>
-          </a:p>
-        </p:txBody>
-      </p:sp>
-      <p:sp>
-        <p:nvSpPr>
-          <p:cNvPr id="7" name="TextBox 6"/>
-          <p:cNvSpPr txBox="1"/>
-          <p:nvPr/>
-        </p:nvSpPr>
-        <p:spPr>
-          <a:xfrm>
-            <a:off x="594360" y="1353312"/>
-            <a:ext cx="5204307" cy="365760"/>
-          </a:xfrm>
-          <a:prstGeom prst="rect">
-            <a:avLst/>
-          </a:prstGeom>
-          <a:noFill/>
-        </p:spPr>
-        <p:txBody>
-          <a:bodyPr wrap="square" anchor="ctr"/>
-          <a:lstStyle/>
-          <a:p>
-            <a:pPr algn="ctr"/>
-            <a:r>
-              <a:rPr sz="1600" b="1" i="0">
-                <a:solidFill>
-                  <a:srgbClr val="FFFFFF"/>
-                </a:solidFill>
-                <a:latin typeface="Calibri"/>
-              </a:rPr>
-              <a:t>Maquina virtual</a:t>
-            </a:r>
-          </a:p>
-        </p:txBody>
-      </p:sp>
-      <p:sp>
-        <p:nvSpPr>
-          <p:cNvPr id="8" name="TextBox 7"/>
-          <p:cNvSpPr txBox="1"/>
-          <p:nvPr/>
-        </p:nvSpPr>
-        <p:spPr>
-          <a:xfrm>
-            <a:off x="621792" y="1901952"/>
-            <a:ext cx="5158587" cy="4498848"/>
-          </a:xfrm>
-          <a:prstGeom prst="rect">
-            <a:avLst/>
-          </a:prstGeom>
-          <a:noFill/>
-        </p:spPr>
-        <p:txBody>
-          <a:bodyPr wrap="square">
-            <a:spAutoFit/>
-          </a:bodyPr>
-          <a:lstStyle/>
-          <a:p>
-            <a:pPr>
-              <a:spcAft>
-                <a:spcPts val="800"/>
-              </a:spcAft>
-            </a:pPr>
-            <a:r>
-              <a:rPr sz="1500" b="0" i="0">
-                <a:solidFill>
-                  <a:srgbClr val="333333"/>
-                </a:solidFill>
-                <a:latin typeface="Calibri"/>
-              </a:rPr>
-              <a:t>–   Cada instancia trae un </a:t>
-            </a:r>
-            <a:r>
-              <a:rPr sz="1500" b="1" i="0">
-                <a:solidFill>
-                  <a:srgbClr val="333333"/>
-                </a:solidFill>
-                <a:latin typeface="Calibri"/>
-              </a:rPr>
-              <a:t>SO completo</a:t>
-            </a:r>
-            <a:r>
-              <a:rPr sz="1500" b="0" i="0">
-                <a:solidFill>
-                  <a:srgbClr val="333333"/>
-                </a:solidFill>
-                <a:latin typeface="Calibri"/>
-              </a:rPr>
-              <a:t> (kernel propio)</a:t>
-            </a:r>
-          </a:p>
-          <a:p>
-            <a:pPr>
-              <a:spcAft>
-                <a:spcPts val="800"/>
-              </a:spcAft>
-            </a:pPr>
-            <a:r>
-              <a:rPr sz="1500" b="0" i="0">
-                <a:solidFill>
-                  <a:srgbClr val="333333"/>
-                </a:solidFill>
-                <a:latin typeface="Calibri"/>
-              </a:rPr>
-              <a:t>–   Aislamiento fuerte a nivel de hardware virtual</a:t>
-            </a:r>
-          </a:p>
-          <a:p>
-            <a:pPr>
-              <a:spcAft>
-                <a:spcPts val="800"/>
-              </a:spcAft>
-            </a:pPr>
-            <a:r>
-              <a:rPr sz="1500" b="0" i="0">
-                <a:solidFill>
-                  <a:srgbClr val="333333"/>
-                </a:solidFill>
-                <a:latin typeface="Calibri"/>
-              </a:rPr>
-              <a:t>–   Arranque en </a:t>
-            </a:r>
-            <a:r>
-              <a:rPr sz="1500" b="1" i="0">
-                <a:solidFill>
-                  <a:srgbClr val="333333"/>
-                </a:solidFill>
-                <a:latin typeface="Calibri"/>
-              </a:rPr>
-              <a:t>minutos</a:t>
-            </a:r>
-            <a:r>
-              <a:rPr sz="1500" b="0" i="0">
-                <a:solidFill>
-                  <a:srgbClr val="333333"/>
-                </a:solidFill>
-                <a:latin typeface="Calibri"/>
-              </a:rPr>
-              <a:t>, tamaño en </a:t>
-            </a:r>
-            <a:r>
-              <a:rPr sz="1500" b="1" i="0">
-                <a:solidFill>
-                  <a:srgbClr val="333333"/>
-                </a:solidFill>
-                <a:latin typeface="Calibri"/>
-              </a:rPr>
-              <a:t>GB</a:t>
-            </a:r>
-          </a:p>
-          <a:p>
-            <a:pPr>
-              <a:spcAft>
-                <a:spcPts val="800"/>
-              </a:spcAft>
-            </a:pPr>
-            <a:r>
-              <a:rPr sz="1500" b="0" i="0">
-                <a:solidFill>
-                  <a:srgbClr val="333333"/>
-                </a:solidFill>
-                <a:latin typeface="Calibri"/>
-              </a:rPr>
-              <a:t>–   Util cuando se necesitan SO distintos</a:t>
-            </a:r>
-          </a:p>
-        </p:txBody>
-      </p:sp>
-      <p:sp>
-        <p:nvSpPr>
-          <p:cNvPr id="9" name="Rounded Rectangle 8"/>
-          <p:cNvSpPr/>
-          <p:nvPr/>
-        </p:nvSpPr>
-        <p:spPr>
-          <a:xfrm>
-            <a:off x="6255867" y="1261872"/>
-            <a:ext cx="5478627" cy="5093208"/>
-          </a:xfrm>
-          <a:prstGeom prst="roundRect">
-            <a:avLst>
-              <a:gd name="adj" fmla="val 12000"/>
-            </a:avLst>
-          </a:prstGeom>
-          <a:solidFill>
-            <a:srgbClr val="E8F4FA"/>
-          </a:solidFill>
-          <a:ln>
-            <a:noFill/>
-          </a:ln>
-        </p:spPr>
-        <p:style>
-          <a:lnRef idx="1">
-            <a:schemeClr val="accent1"/>
-          </a:lnRef>
-          <a:fillRef idx="3">
-            <a:schemeClr val="accent1"/>
-          </a:fillRef>
-          <a:effectRef idx="2">
-            <a:schemeClr val="accent1"/>
-          </a:effectRef>
-          <a:fontRef idx="minor">
-            <a:schemeClr val="lt1"/>
-          </a:fontRef>
-        </p:style>
-        <p:txBody>
-          <a:bodyPr rtlCol="0" anchor="ctr"/>
-          <a:lstStyle/>
-          <a:p>
-            <a:pPr algn="ctr"/>
-          </a:p>
-        </p:txBody>
-      </p:sp>
-      <p:sp>
-        <p:nvSpPr>
-          <p:cNvPr id="10" name="Rectangle 9"/>
-          <p:cNvSpPr/>
-          <p:nvPr/>
-        </p:nvSpPr>
-        <p:spPr>
-          <a:xfrm>
-            <a:off x="6255867" y="1261872"/>
-            <a:ext cx="5478627" cy="502920"/>
+            <a:ext cx="11277295" cy="320040"/>
           </a:xfrm>
           <a:prstGeom prst="rect">
             <a:avLst/>
@@ -9877,14 +9291,14 @@
       </p:sp>
       <p:sp>
         <p:nvSpPr>
-          <p:cNvPr id="11" name="TextBox 10"/>
+          <p:cNvPr id="7" name="TextBox 6"/>
           <p:cNvSpPr txBox="1"/>
           <p:nvPr/>
         </p:nvSpPr>
         <p:spPr>
           <a:xfrm>
-            <a:off x="6393027" y="1353312"/>
-            <a:ext cx="5204307" cy="365760"/>
+            <a:off x="685800" y="1307592"/>
+            <a:ext cx="10820095" cy="256032"/>
           </a:xfrm>
           <a:prstGeom prst="rect">
             <a:avLst/>
@@ -9895,29 +9309,28 @@
           <a:bodyPr wrap="square" anchor="ctr"/>
           <a:lstStyle/>
           <a:p>
-            <a:pPr algn="ctr"/>
-            <a:r>
-              <a:rPr sz="1600" b="1" i="0">
-                <a:solidFill>
-                  <a:srgbClr val="FFFFFF"/>
-                </a:solidFill>
-                <a:latin typeface="Calibri"/>
-              </a:rPr>
-              <a:t>Contenedor</a:t>
-            </a:r>
-          </a:p>
-        </p:txBody>
-      </p:sp>
-      <p:sp>
-        <p:nvSpPr>
-          <p:cNvPr id="12" name="TextBox 11"/>
+            <a:r>
+              <a:rPr sz="1000" b="1" i="0">
+                <a:solidFill>
+                  <a:srgbClr val="269CCB"/>
+                </a:solidFill>
+                <a:latin typeface="Calibri"/>
+              </a:rPr>
+              <a:t>● ● ●</a:t>
+            </a:r>
+          </a:p>
+        </p:txBody>
+      </p:sp>
+      <p:sp>
+        <p:nvSpPr>
+          <p:cNvPr id="8" name="TextBox 7"/>
           <p:cNvSpPr txBox="1"/>
           <p:nvPr/>
         </p:nvSpPr>
         <p:spPr>
           <a:xfrm>
-            <a:off x="6420459" y="1901952"/>
-            <a:ext cx="5158587" cy="4498848"/>
+            <a:off x="777240" y="1719072"/>
+            <a:ext cx="10637215" cy="4453128"/>
           </a:xfrm>
           <a:prstGeom prst="rect">
             <a:avLst/>
@@ -9932,117 +9345,200 @@
           <a:p>
             <a:pPr>
               <a:spcAft>
-                <a:spcPts val="800"/>
-              </a:spcAft>
-            </a:pPr>
-            <a:r>
-              <a:rPr sz="1500" b="0" i="0">
-                <a:solidFill>
-                  <a:srgbClr val="333333"/>
-                </a:solidFill>
-                <a:latin typeface="Calibri"/>
-              </a:rPr>
-              <a:t>–   </a:t>
-            </a:r>
-            <a:r>
-              <a:rPr sz="1500" b="1" i="0">
-                <a:solidFill>
-                  <a:srgbClr val="333333"/>
-                </a:solidFill>
-                <a:latin typeface="Calibri"/>
-              </a:rPr>
-              <a:t>Comparte el kernel</a:t>
-            </a:r>
-            <a:r>
-              <a:rPr sz="1500" b="0" i="0">
-                <a:solidFill>
-                  <a:srgbClr val="333333"/>
-                </a:solidFill>
-                <a:latin typeface="Calibri"/>
-              </a:rPr>
-              <a:t> del anfitrion</a:t>
-            </a:r>
-          </a:p>
-          <a:p>
-            <a:pPr>
-              <a:spcAft>
-                <a:spcPts val="800"/>
-              </a:spcAft>
-            </a:pPr>
-            <a:r>
-              <a:rPr sz="1500" b="0" i="0">
-                <a:solidFill>
-                  <a:srgbClr val="333333"/>
-                </a:solidFill>
-                <a:latin typeface="Calibri"/>
-              </a:rPr>
-              <a:t>–   Empaqueta solo app + dependencias</a:t>
-            </a:r>
-          </a:p>
-          <a:p>
-            <a:pPr>
-              <a:spcAft>
-                <a:spcPts val="800"/>
-              </a:spcAft>
-            </a:pPr>
-            <a:r>
-              <a:rPr sz="1500" b="0" i="0">
-                <a:solidFill>
-                  <a:srgbClr val="333333"/>
-                </a:solidFill>
-                <a:latin typeface="Calibri"/>
-              </a:rPr>
-              <a:t>–   Arranque en </a:t>
-            </a:r>
-            <a:r>
-              <a:rPr sz="1500" b="1" i="0">
-                <a:solidFill>
-                  <a:srgbClr val="333333"/>
-                </a:solidFill>
-                <a:latin typeface="Calibri"/>
-              </a:rPr>
-              <a:t>segundos</a:t>
-            </a:r>
-            <a:r>
-              <a:rPr sz="1500" b="0" i="0">
-                <a:solidFill>
-                  <a:srgbClr val="333333"/>
-                </a:solidFill>
-                <a:latin typeface="Calibri"/>
-              </a:rPr>
-              <a:t>, tamaño en </a:t>
-            </a:r>
-            <a:r>
-              <a:rPr sz="1500" b="1" i="0">
-                <a:solidFill>
-                  <a:srgbClr val="333333"/>
-                </a:solidFill>
-                <a:latin typeface="Calibri"/>
-              </a:rPr>
-              <a:t>MB</a:t>
-            </a:r>
-          </a:p>
-          <a:p>
-            <a:pPr>
-              <a:spcAft>
-                <a:spcPts val="800"/>
-              </a:spcAft>
-            </a:pPr>
-            <a:r>
-              <a:rPr sz="1500" b="0" i="0">
-                <a:solidFill>
-                  <a:srgbClr val="333333"/>
-                </a:solidFill>
-                <a:latin typeface="Calibri"/>
-              </a:rPr>
-              <a:t>–   Util para desplegar el mismo servicio muchas veces</a:t>
-            </a:r>
-          </a:p>
-        </p:txBody>
-      </p:sp>
-      <p:sp>
-        <p:nvSpPr>
-          <p:cNvPr id="13" name="TextBox 12"/>
+                <a:spcPts val="400"/>
+              </a:spcAft>
+            </a:pPr>
+            <a:r>
+              <a:rPr sz="1400" b="0" i="0">
+                <a:solidFill>
+                  <a:srgbClr val="FFFFFF"/>
+                </a:solidFill>
+                <a:latin typeface="Calibri"/>
+              </a:rPr>
+              <a:t># 1. construir la imagen y etiquetarla con version</a:t>
+            </a:r>
+          </a:p>
+          <a:p>
+            <a:pPr>
+              <a:spcAft>
+                <a:spcPts val="400"/>
+              </a:spcAft>
+            </a:pPr>
+            <a:r>
+              <a:rPr sz="1400" b="0" i="0">
+                <a:solidFill>
+                  <a:srgbClr val="FFFFFF"/>
+                </a:solidFill>
+                <a:latin typeface="Calibri"/>
+              </a:rPr>
+              <a:t>$ docker build -t cloudlite-api:0.1.0.</a:t>
+            </a:r>
+          </a:p>
+          <a:p>
+            <a:pPr>
+              <a:spcAft>
+                <a:spcPts val="400"/>
+              </a:spcAft>
+            </a:pPr>
+            <a:r>
+              <a:rPr sz="1400" b="0" i="0">
+                <a:solidFill>
+                  <a:srgbClr val="FFFFFF"/>
+                </a:solidFill>
+                <a:latin typeface="Calibri"/>
+              </a:rPr>
+              <a:t/>
+            </a:r>
+          </a:p>
+          <a:p>
+            <a:pPr>
+              <a:spcAft>
+                <a:spcPts val="400"/>
+              </a:spcAft>
+            </a:pPr>
+            <a:r>
+              <a:rPr sz="1400" b="0" i="0">
+                <a:solidFill>
+                  <a:srgbClr val="FFFFFF"/>
+                </a:solidFill>
+                <a:latin typeface="Calibri"/>
+              </a:rPr>
+              <a:t># 2. ejecutarla publicando el puerto (host:contenedor)</a:t>
+            </a:r>
+          </a:p>
+          <a:p>
+            <a:pPr>
+              <a:spcAft>
+                <a:spcPts val="400"/>
+              </a:spcAft>
+            </a:pPr>
+            <a:r>
+              <a:rPr sz="1400" b="0" i="0">
+                <a:solidFill>
+                  <a:srgbClr val="FFFFFF"/>
+                </a:solidFill>
+                <a:latin typeface="Calibri"/>
+              </a:rPr>
+              <a:t>$ docker run -d --name cloudlite -p 8080:3000 cloudlite-api:0.1.0</a:t>
+            </a:r>
+          </a:p>
+          <a:p>
+            <a:pPr>
+              <a:spcAft>
+                <a:spcPts val="400"/>
+              </a:spcAft>
+            </a:pPr>
+            <a:r>
+              <a:rPr sz="1400" b="0" i="0">
+                <a:solidFill>
+                  <a:srgbClr val="FFFFFF"/>
+                </a:solidFill>
+                <a:latin typeface="Calibri"/>
+              </a:rPr>
+              <a:t/>
+            </a:r>
+          </a:p>
+          <a:p>
+            <a:pPr>
+              <a:spcAft>
+                <a:spcPts val="400"/>
+              </a:spcAft>
+            </a:pPr>
+            <a:r>
+              <a:rPr sz="1400" b="0" i="0">
+                <a:solidFill>
+                  <a:srgbClr val="FFFFFF"/>
+                </a:solidFill>
+                <a:latin typeface="Calibri"/>
+              </a:rPr>
+              <a:t># 3. verificar que responde DE VERDAD, no que el contenedor existe</a:t>
+            </a:r>
+          </a:p>
+          <a:p>
+            <a:pPr>
+              <a:spcAft>
+                <a:spcPts val="400"/>
+              </a:spcAft>
+            </a:pPr>
+            <a:r>
+              <a:rPr sz="1400" b="0" i="0">
+                <a:solidFill>
+                  <a:srgbClr val="FFFFFF"/>
+                </a:solidFill>
+                <a:latin typeface="Calibri"/>
+              </a:rPr>
+              <a:t>$ curl -i http://localhost:8080/health</a:t>
+            </a:r>
+          </a:p>
+          <a:p>
+            <a:pPr>
+              <a:spcAft>
+                <a:spcPts val="400"/>
+              </a:spcAft>
+            </a:pPr>
+            <a:r>
+              <a:rPr sz="1400" b="0" i="0">
+                <a:solidFill>
+                  <a:srgbClr val="FFFFFF"/>
+                </a:solidFill>
+                <a:latin typeface="Calibri"/>
+              </a:rPr>
+              <a:t>HTTP/1.1 200 OK</a:t>
+            </a:r>
+          </a:p>
+          <a:p>
+            <a:pPr>
+              <a:spcAft>
+                <a:spcPts val="400"/>
+              </a:spcAft>
+            </a:pPr>
+            <a:r>
+              <a:rPr sz="1400" b="0" i="0">
+                <a:solidFill>
+                  <a:srgbClr val="FFFFFF"/>
+                </a:solidFill>
+                <a:latin typeface="Calibri"/>
+              </a:rPr>
+              <a:t/>
+            </a:r>
+          </a:p>
+          <a:p>
+            <a:pPr>
+              <a:spcAft>
+                <a:spcPts val="400"/>
+              </a:spcAft>
+            </a:pPr>
+            <a:r>
+              <a:rPr sz="1400" b="0" i="0">
+                <a:solidFill>
+                  <a:srgbClr val="FFFFFF"/>
+                </a:solidFill>
+                <a:latin typeface="Calibri"/>
+              </a:rPr>
+              <a:t># 4. si no responde, el log es el primer sitio, no el ultimo</a:t>
+            </a:r>
+          </a:p>
+          <a:p>
+            <a:pPr>
+              <a:spcAft>
+                <a:spcPts val="400"/>
+              </a:spcAft>
+            </a:pPr>
+            <a:r>
+              <a:rPr sz="1400" b="0" i="0">
+                <a:solidFill>
+                  <a:srgbClr val="FFFFFF"/>
+                </a:solidFill>
+                <a:latin typeface="Calibri"/>
+              </a:rPr>
+              <a:t>$ docker logs cloudlite --tail 20</a:t>
+            </a:r>
+          </a:p>
+        </p:txBody>
+      </p:sp>
+      <p:sp>
+        <p:nvSpPr>
+          <p:cNvPr id="9" name="TextBox 8"/>
           <p:cNvSpPr txBox="1"/>
           <p:nvPr/>
         </p:nvSpPr>
@@ -10216,7 +9712,7 @@
                 </a:solidFill>
                 <a:latin typeface="Calibri"/>
               </a:rPr>
-              <a:t>Dockerfile minimo del stub CloudLite</a:t>
+              <a:t>Imagen, contenedor y capas: los comandos que lo demuestran</a:t>
             </a:r>
           </a:p>
         </p:txBody>
@@ -10230,7 +9726,7 @@
         <p:spPr>
           <a:xfrm>
             <a:off x="457200" y="1261872"/>
-            <a:ext cx="11277295" cy="4773168"/>
+            <a:ext cx="11277295" cy="5093208"/>
           </a:xfrm>
           <a:prstGeom prst="roundRect">
             <a:avLst>
@@ -10350,7 +9846,7 @@
         <p:spPr>
           <a:xfrm>
             <a:off x="777240" y="1719072"/>
-            <a:ext cx="10637215" cy="4133087"/>
+            <a:ext cx="10637215" cy="4453128"/>
           </a:xfrm>
           <a:prstGeom prst="rect">
             <a:avLst/>
@@ -10375,7 +9871,7 @@
                 </a:solidFill>
                 <a:latin typeface="Calibri"/>
               </a:rPr>
-              <a:t>FROM node:20-alpine          # base ligera y etiqueta FIJA: nunca latest</a:t>
+              <a:t># La IMAGEN es la plantilla; el CONTENEDOR es una instancia en ejecucion.</a:t>
             </a:r>
           </a:p>
           <a:p>
@@ -10391,7 +9887,7 @@
                 </a:solidFill>
                 <a:latin typeface="Calibri"/>
               </a:rPr>
-              <a:t>WORKDIR /app</a:t>
+              <a:t>$ docker images cloudlite-api</a:t>
             </a:r>
           </a:p>
           <a:p>
@@ -10407,7 +9903,7 @@
                 </a:solidFill>
                 <a:latin typeface="Calibri"/>
               </a:rPr>
-              <a:t>COPY package*.json ./        # dependencias PRIMERO: cambian poco</a:t>
+              <a:t>REPOSITORY      TAG     IMAGE ID       SIZE</a:t>
             </a:r>
           </a:p>
           <a:p>
@@ -10423,7 +9919,7 @@
                 </a:solidFill>
                 <a:latin typeface="Calibri"/>
               </a:rPr>
-              <a:t>RUN npm ci --omit=dev        # se instalan DENTRO de la imagen</a:t>
+              <a:t>cloudlite-api   0.1.0   a1b2c3d4e5f6   142MB</a:t>
             </a:r>
           </a:p>
           <a:p>
@@ -10439,7 +9935,7 @@
                 </a:solidFill>
                 <a:latin typeface="Calibri"/>
               </a:rPr>
-              <a:t>COPY..                     # el codigo despues: cambia en cada commit</a:t>
+              <a:t/>
             </a:r>
           </a:p>
           <a:p>
@@ -10455,7 +9951,7 @@
                 </a:solidFill>
                 <a:latin typeface="Calibri"/>
               </a:rPr>
-              <a:t>EXPOSE 8080                  # documenta el puerto; NO lo publica</a:t>
+              <a:t>$ docker ps</a:t>
             </a:r>
           </a:p>
           <a:p>
@@ -10471,7 +9967,7 @@
                 </a:solidFill>
                 <a:latin typeface="Calibri"/>
               </a:rPr>
-              <a:t>CMD ["node", "server.js"]    # UN proceso principal por contenedor</a:t>
+              <a:t>CONTAINER ID   IMAGE                 STATUS         PORTS</a:t>
             </a:r>
           </a:p>
           <a:p>
@@ -10487,6 +9983,22 @@
                 </a:solidFill>
                 <a:latin typeface="Calibri"/>
               </a:rPr>
+              <a:t>9f8e7d6c5b4a   cloudlite-api:0.1.0   Up 2 minutes   0.0.0.0:8080-&gt;3000/tcp</a:t>
+            </a:r>
+          </a:p>
+          <a:p>
+            <a:pPr>
+              <a:spcAft>
+                <a:spcPts val="400"/>
+              </a:spcAft>
+            </a:pPr>
+            <a:r>
+              <a:rPr sz="1400" b="0" i="0">
+                <a:solidFill>
+                  <a:srgbClr val="FFFFFF"/>
+                </a:solidFill>
+                <a:latin typeface="Calibri"/>
+              </a:rPr>
               <a:t/>
             </a:r>
           </a:p>
@@ -10503,7 +10015,7 @@
                 </a:solidFill>
                 <a:latin typeface="Calibri"/>
               </a:rPr>
-              <a:t># .dockerignore  &lt;- archivo aparte, en la misma carpeta que el Dockerfile.</a:t>
+              <a:t># De una imagen salen N contenedores: eso es lo que hace escalar barato.</a:t>
             </a:r>
           </a:p>
           <a:p>
@@ -10519,7 +10031,7 @@
                 </a:solidFill>
                 <a:latin typeface="Calibri"/>
               </a:rPr>
-              <a:t># Sin el, el COPY.. de arriba se lleva el .env a las capas de la imagen.</a:t>
+              <a:t>$ docker run -d -p 8081:3000 cloudlite-api:0.1.0</a:t>
             </a:r>
           </a:p>
           <a:p>
@@ -10535,55 +10047,7 @@
                 </a:solidFill>
                 <a:latin typeface="Calibri"/>
               </a:rPr>
-              <a:t>node_modules</a:t>
-            </a:r>
-          </a:p>
-          <a:p>
-            <a:pPr>
-              <a:spcAft>
-                <a:spcPts val="400"/>
-              </a:spcAft>
-            </a:pPr>
-            <a:r>
-              <a:rPr sz="1400" b="0" i="0">
-                <a:solidFill>
-                  <a:srgbClr val="FFFFFF"/>
-                </a:solidFill>
-                <a:latin typeface="Calibri"/>
-              </a:rPr>
-              <a:t>.env</a:t>
-            </a:r>
-          </a:p>
-          <a:p>
-            <a:pPr>
-              <a:spcAft>
-                <a:spcPts val="400"/>
-              </a:spcAft>
-            </a:pPr>
-            <a:r>
-              <a:rPr sz="1400" b="0" i="0">
-                <a:solidFill>
-                  <a:srgbClr val="FFFFFF"/>
-                </a:solidFill>
-                <a:latin typeface="Calibri"/>
-              </a:rPr>
-              <a:t>.env.*</a:t>
-            </a:r>
-          </a:p>
-          <a:p>
-            <a:pPr>
-              <a:spcAft>
-                <a:spcPts val="400"/>
-              </a:spcAft>
-            </a:pPr>
-            <a:r>
-              <a:rPr sz="1400" b="0" i="0">
-                <a:solidFill>
-                  <a:srgbClr val="FFFFFF"/>
-                </a:solidFill>
-                <a:latin typeface="Calibri"/>
-              </a:rPr>
-              <a:t>.git</a:t>
+              <a:t>$ docker run -d -p 8082:3000 cloudlite-api:0.1.0</a:t>
             </a:r>
           </a:p>
         </p:txBody>
@@ -10591,41 +10055,6 @@
       <p:sp>
         <p:nvSpPr>
           <p:cNvPr id="9" name="TextBox 8"/>
-          <p:cNvSpPr txBox="1"/>
-          <p:nvPr/>
-        </p:nvSpPr>
-        <p:spPr>
-          <a:xfrm>
-            <a:off x="457200" y="6080760"/>
-            <a:ext cx="11277295" cy="320040"/>
-          </a:xfrm>
-          <a:prstGeom prst="rect">
-            <a:avLst/>
-          </a:prstGeom>
-          <a:noFill/>
-        </p:spPr>
-        <p:txBody>
-          <a:bodyPr wrap="square">
-            <a:spAutoFit/>
-          </a:bodyPr>
-          <a:lstStyle/>
-          <a:p>
-            <a:pPr algn="ctr"/>
-            <a:r>
-              <a:rPr sz="1200" b="0" i="1">
-                <a:solidFill>
-                  <a:srgbClr val="666666"/>
-                </a:solidFill>
-                <a:latin typeface="Calibri"/>
-              </a:rPr>
-              <a:t>EXPOSE, CMD y el «-p» del run llevan el MISMO puerto. Y el «COPY. .» solo es seguro con «.dockerignore» al lado.</a:t>
-            </a:r>
-          </a:p>
-        </p:txBody>
-      </p:sp>
-      <p:sp>
-        <p:nvSpPr>
-          <p:cNvPr id="10" name="TextBox 9"/>
           <p:cNvSpPr txBox="1"/>
           <p:nvPr/>
         </p:nvSpPr>
@@ -10997,7 +10426,7 @@
         <p:spPr>
           <a:xfrm>
             <a:off x="0" y="0"/>
-            <a:ext cx="12191695" cy="1170432"/>
+            <a:ext cx="12191695" cy="960120"/>
           </a:xfrm>
           <a:prstGeom prst="rect">
             <a:avLst/>
@@ -11039,7 +10468,7 @@
         </p:nvSpPr>
         <p:spPr>
           <a:xfrm>
-            <a:off x="0" y="1170432"/>
+            <a:off x="0" y="960120"/>
             <a:ext cx="12191695" cy="41148"/>
           </a:xfrm>
           <a:prstGeom prst="rect">
@@ -11083,7 +10512,7 @@
         <p:spPr>
           <a:xfrm>
             <a:off x="457200" y="164592"/>
-            <a:ext cx="11277295" cy="384048"/>
+            <a:ext cx="11277295" cy="502920"/>
           </a:xfrm>
           <a:prstGeom prst="rect">
             <a:avLst/>
@@ -11103,55 +10532,21 @@
                 </a:solidFill>
                 <a:latin typeface="Calibri"/>
               </a:rPr>
-              <a:t>Herramientas de hoy</a:t>
-            </a:r>
-          </a:p>
-        </p:txBody>
-      </p:sp>
-      <p:sp>
-        <p:nvSpPr>
-          <p:cNvPr id="5" name="TextBox 4"/>
-          <p:cNvSpPr txBox="1"/>
-          <p:nvPr/>
-        </p:nvSpPr>
-        <p:spPr>
-          <a:xfrm>
-            <a:off x="457200" y="566928"/>
-            <a:ext cx="11277295" cy="411480"/>
-          </a:xfrm>
-          <a:prstGeom prst="rect">
-            <a:avLst/>
-          </a:prstGeom>
-          <a:noFill/>
-        </p:spPr>
-        <p:txBody>
-          <a:bodyPr wrap="square">
-            <a:spAutoFit/>
-          </a:bodyPr>
-          <a:lstStyle/>
-          <a:p>
-            <a:r>
-              <a:rPr sz="1400" b="0" i="0">
-                <a:solidFill>
-                  <a:srgbClr val="B8D8EE"/>
-                </a:solidFill>
-                <a:latin typeface="Calibri"/>
-              </a:rPr>
-              <a:t>Gratis · navegador o free tier · sin cuenta de pago</a:t>
-            </a:r>
-          </a:p>
-        </p:txBody>
-      </p:sp>
-      <p:sp>
-        <p:nvSpPr>
-          <p:cNvPr id="6" name="Rounded Rectangle 5"/>
+              <a:t>Limpiar, y la prueba de que el contenedor no guarda estado</a:t>
+            </a:r>
+          </a:p>
+        </p:txBody>
+      </p:sp>
+      <p:sp>
+        <p:nvSpPr>
+          <p:cNvPr id="5" name="Rounded Rectangle 4"/>
           <p:cNvSpPr/>
           <p:nvPr/>
         </p:nvSpPr>
         <p:spPr>
           <a:xfrm>
-            <a:off x="457200" y="1591056"/>
-            <a:ext cx="3624986" cy="2299716"/>
+            <a:off x="457200" y="1261872"/>
+            <a:ext cx="11277295" cy="5093208"/>
           </a:xfrm>
           <a:prstGeom prst="roundRect">
             <a:avLst>
@@ -11159,7 +10554,7 @@
             </a:avLst>
           </a:prstGeom>
           <a:solidFill>
-            <a:srgbClr val="F2F2F2"/>
+            <a:srgbClr val="1E2A38"/>
           </a:solidFill>
           <a:ln>
             <a:noFill/>
@@ -11189,14 +10584,14 @@
       </p:sp>
       <p:sp>
         <p:nvSpPr>
-          <p:cNvPr id="7" name="Rectangle 6"/>
+          <p:cNvPr id="6" name="Rectangle 5"/>
           <p:cNvSpPr/>
           <p:nvPr/>
         </p:nvSpPr>
         <p:spPr>
           <a:xfrm>
-            <a:off x="457200" y="1591056"/>
-            <a:ext cx="3624986" cy="64008"/>
+            <a:off x="457200" y="1261872"/>
+            <a:ext cx="11277295" cy="320040"/>
           </a:xfrm>
           <a:prstGeom prst="rect">
             <a:avLst/>
@@ -11232,81 +10627,14 @@
       </p:sp>
       <p:sp>
         <p:nvSpPr>
-          <p:cNvPr id="8" name="Rectangle 7"/>
-          <p:cNvSpPr/>
-          <p:nvPr/>
-        </p:nvSpPr>
-        <p:spPr>
-          <a:xfrm>
-            <a:off x="457200" y="1655064"/>
-            <a:ext cx="3624986" cy="27432"/>
-          </a:xfrm>
-          <a:prstGeom prst="rect">
-            <a:avLst/>
-          </a:prstGeom>
-          <a:solidFill>
-            <a:srgbClr val="FFD000"/>
-          </a:solidFill>
-          <a:ln>
-            <a:noFill/>
-          </a:ln>
-        </p:spPr>
-        <p:style>
-          <a:lnRef idx="1">
-            <a:schemeClr val="accent1"/>
-          </a:lnRef>
-          <a:fillRef idx="3">
-            <a:schemeClr val="accent1"/>
-          </a:fillRef>
-          <a:effectRef idx="2">
-            <a:schemeClr val="accent1"/>
-          </a:effectRef>
-          <a:fontRef idx="minor">
-            <a:schemeClr val="lt1"/>
-          </a:fontRef>
-        </p:style>
-        <p:txBody>
-          <a:bodyPr rtlCol="0" anchor="ctr"/>
-          <a:lstStyle/>
-          <a:p>
-            <a:pPr algn="ctr"/>
-          </a:p>
-        </p:txBody>
-      </p:sp>
-      <p:pic>
-        <p:nvPicPr>
-          <p:cNvPr id="9" name="Picture 8" descr="killercoda.png"/>
-          <p:cNvPicPr>
-            <a:picLocks noChangeAspect="1"/>
-          </p:cNvPicPr>
-          <p:nvPr/>
-        </p:nvPicPr>
-        <p:blipFill>
-          <a:blip r:embed="rId2"/>
-          <a:stretch>
-            <a:fillRect/>
-          </a:stretch>
-        </p:blipFill>
-        <p:spPr>
-          <a:xfrm>
-            <a:off x="1659331" y="1847087"/>
-            <a:ext cx="1220724" cy="1220724"/>
-          </a:xfrm>
-          <a:prstGeom prst="rect">
-            <a:avLst/>
-          </a:prstGeom>
-        </p:spPr>
-      </p:pic>
-      <p:sp>
-        <p:nvSpPr>
-          <p:cNvPr id="10" name="TextBox 9"/>
+          <p:cNvPr id="7" name="TextBox 6"/>
           <p:cNvSpPr txBox="1"/>
           <p:nvPr/>
         </p:nvSpPr>
         <p:spPr>
           <a:xfrm>
-            <a:off x="530352" y="3159251"/>
-            <a:ext cx="3478682" cy="621792"/>
+            <a:off x="685800" y="1307592"/>
+            <a:ext cx="10820095" cy="256032"/>
           </a:xfrm>
           <a:prstGeom prst="rect">
             <a:avLst/>
@@ -11314,203 +10642,31 @@
           <a:noFill/>
         </p:spPr>
         <p:txBody>
-          <a:bodyPr wrap="square" anchor="t"/>
-          <a:lstStyle/>
-          <a:p>
-            <a:pPr algn="ctr"/>
-            <a:r>
-              <a:rPr sz="1300" b="1" i="0">
-                <a:solidFill>
-                  <a:srgbClr val="095292"/>
-                </a:solidFill>
-                <a:latin typeface="Calibri"/>
-              </a:rPr>
-              <a:t>Killercoda</a:t>
-            </a:r>
-          </a:p>
-          <a:p>
-            <a:pPr algn="ctr">
-              <a:spcBef>
-                <a:spcPts val="200"/>
-              </a:spcBef>
-            </a:pPr>
-            <a:r>
-              <a:rPr sz="1000" b="0" i="0">
-                <a:solidFill>
-                  <a:srgbClr val="666666"/>
-                </a:solidFill>
-                <a:latin typeface="Calibri"/>
-              </a:rPr>
-              <a:t>Lab del dia · sesion 1 h</a:t>
-            </a:r>
-          </a:p>
-        </p:txBody>
-      </p:sp>
-      <p:sp>
-        <p:nvSpPr>
-          <p:cNvPr id="11" name="Rounded Rectangle 10"/>
-          <p:cNvSpPr/>
-          <p:nvPr/>
-        </p:nvSpPr>
-        <p:spPr>
-          <a:xfrm>
-            <a:off x="4283354" y="1591056"/>
-            <a:ext cx="3624986" cy="2299716"/>
-          </a:xfrm>
-          <a:prstGeom prst="roundRect">
-            <a:avLst>
-              <a:gd name="adj" fmla="val 12000"/>
-            </a:avLst>
-          </a:prstGeom>
-          <a:solidFill>
-            <a:srgbClr val="F2F2F2"/>
-          </a:solidFill>
-          <a:ln>
-            <a:noFill/>
-          </a:ln>
-        </p:spPr>
-        <p:style>
-          <a:lnRef idx="1">
-            <a:schemeClr val="accent1"/>
-          </a:lnRef>
-          <a:fillRef idx="3">
-            <a:schemeClr val="accent1"/>
-          </a:fillRef>
-          <a:effectRef idx="2">
-            <a:schemeClr val="accent1"/>
-          </a:effectRef>
-          <a:fontRef idx="minor">
-            <a:schemeClr val="lt1"/>
-          </a:fontRef>
-        </p:style>
-        <p:txBody>
-          <a:bodyPr rtlCol="0" anchor="ctr"/>
-          <a:lstStyle/>
-          <a:p>
-            <a:pPr algn="ctr"/>
-          </a:p>
-        </p:txBody>
-      </p:sp>
-      <p:sp>
-        <p:nvSpPr>
-          <p:cNvPr id="12" name="Rectangle 11"/>
-          <p:cNvSpPr/>
-          <p:nvPr/>
-        </p:nvSpPr>
-        <p:spPr>
-          <a:xfrm>
-            <a:off x="4283354" y="1591056"/>
-            <a:ext cx="3624986" cy="64008"/>
-          </a:xfrm>
-          <a:prstGeom prst="rect">
-            <a:avLst/>
-          </a:prstGeom>
-          <a:solidFill>
-            <a:srgbClr val="095292"/>
-          </a:solidFill>
-          <a:ln>
-            <a:noFill/>
-          </a:ln>
-        </p:spPr>
-        <p:style>
-          <a:lnRef idx="1">
-            <a:schemeClr val="accent1"/>
-          </a:lnRef>
-          <a:fillRef idx="3">
-            <a:schemeClr val="accent1"/>
-          </a:fillRef>
-          <a:effectRef idx="2">
-            <a:schemeClr val="accent1"/>
-          </a:effectRef>
-          <a:fontRef idx="minor">
-            <a:schemeClr val="lt1"/>
-          </a:fontRef>
-        </p:style>
-        <p:txBody>
-          <a:bodyPr rtlCol="0" anchor="ctr"/>
-          <a:lstStyle/>
-          <a:p>
-            <a:pPr algn="ctr"/>
-          </a:p>
-        </p:txBody>
-      </p:sp>
-      <p:sp>
-        <p:nvSpPr>
-          <p:cNvPr id="13" name="Rectangle 12"/>
-          <p:cNvSpPr/>
-          <p:nvPr/>
-        </p:nvSpPr>
-        <p:spPr>
-          <a:xfrm>
-            <a:off x="4283354" y="1655064"/>
-            <a:ext cx="3624986" cy="27432"/>
-          </a:xfrm>
-          <a:prstGeom prst="rect">
-            <a:avLst/>
-          </a:prstGeom>
-          <a:solidFill>
-            <a:srgbClr val="FFD000"/>
-          </a:solidFill>
-          <a:ln>
-            <a:noFill/>
-          </a:ln>
-        </p:spPr>
-        <p:style>
-          <a:lnRef idx="1">
-            <a:schemeClr val="accent1"/>
-          </a:lnRef>
-          <a:fillRef idx="3">
-            <a:schemeClr val="accent1"/>
-          </a:fillRef>
-          <a:effectRef idx="2">
-            <a:schemeClr val="accent1"/>
-          </a:effectRef>
-          <a:fontRef idx="minor">
-            <a:schemeClr val="lt1"/>
-          </a:fontRef>
-        </p:style>
-        <p:txBody>
-          <a:bodyPr rtlCol="0" anchor="ctr"/>
-          <a:lstStyle/>
-          <a:p>
-            <a:pPr algn="ctr"/>
-          </a:p>
-        </p:txBody>
-      </p:sp>
-      <p:pic>
-        <p:nvPicPr>
-          <p:cNvPr id="14" name="Picture 13" descr="labex.png"/>
-          <p:cNvPicPr>
-            <a:picLocks noChangeAspect="1"/>
-          </p:cNvPicPr>
-          <p:nvPr/>
-        </p:nvPicPr>
-        <p:blipFill>
-          <a:blip r:embed="rId3"/>
-          <a:stretch>
-            <a:fillRect/>
-          </a:stretch>
-        </p:blipFill>
-        <p:spPr>
-          <a:xfrm>
-            <a:off x="5485485" y="1847087"/>
-            <a:ext cx="1220724" cy="1220724"/>
-          </a:xfrm>
-          <a:prstGeom prst="rect">
-            <a:avLst/>
-          </a:prstGeom>
-        </p:spPr>
-      </p:pic>
-      <p:sp>
-        <p:nvSpPr>
-          <p:cNvPr id="15" name="TextBox 14"/>
+          <a:bodyPr wrap="square" anchor="ctr"/>
+          <a:lstStyle/>
+          <a:p>
+            <a:r>
+              <a:rPr sz="1000" b="1" i="0">
+                <a:solidFill>
+                  <a:srgbClr val="269CCB"/>
+                </a:solidFill>
+                <a:latin typeface="Calibri"/>
+              </a:rPr>
+              <a:t>● ● ●</a:t>
+            </a:r>
+          </a:p>
+        </p:txBody>
+      </p:sp>
+      <p:sp>
+        <p:nvSpPr>
+          <p:cNvPr id="8" name="TextBox 7"/>
           <p:cNvSpPr txBox="1"/>
           <p:nvPr/>
         </p:nvSpPr>
         <p:spPr>
           <a:xfrm>
-            <a:off x="4356506" y="3159251"/>
-            <a:ext cx="3478682" cy="621792"/>
+            <a:off x="777240" y="1719072"/>
+            <a:ext cx="10637215" cy="4453128"/>
           </a:xfrm>
           <a:prstGeom prst="rect">
             <a:avLst/>
@@ -11518,449 +10674,191 @@
           <a:noFill/>
         </p:spPr>
         <p:txBody>
-          <a:bodyPr wrap="square" anchor="t"/>
-          <a:lstStyle/>
-          <a:p>
-            <a:pPr algn="ctr"/>
-            <a:r>
-              <a:rPr sz="1300" b="1" i="0">
-                <a:solidFill>
-                  <a:srgbClr val="095292"/>
-                </a:solidFill>
-                <a:latin typeface="Calibri"/>
-              </a:rPr>
-              <a:t>LabEx Docker Playground</a:t>
-            </a:r>
-          </a:p>
-          <a:p>
-            <a:pPr algn="ctr">
-              <a:spcBef>
-                <a:spcPts val="200"/>
-              </a:spcBef>
-            </a:pPr>
-            <a:r>
-              <a:rPr sz="1000" b="0" i="0">
-                <a:solidFill>
-                  <a:srgbClr val="666666"/>
-                </a:solidFill>
-                <a:latin typeface="Calibri"/>
-              </a:rPr>
-              <a:t>Alterna · 3 al dia</a:t>
-            </a:r>
-          </a:p>
-        </p:txBody>
-      </p:sp>
-      <p:sp>
-        <p:nvSpPr>
-          <p:cNvPr id="16" name="Rounded Rectangle 15"/>
-          <p:cNvSpPr/>
-          <p:nvPr/>
-        </p:nvSpPr>
-        <p:spPr>
-          <a:xfrm>
-            <a:off x="8109508" y="1591056"/>
-            <a:ext cx="3624986" cy="2299716"/>
-          </a:xfrm>
-          <a:prstGeom prst="roundRect">
-            <a:avLst>
-              <a:gd name="adj" fmla="val 12000"/>
-            </a:avLst>
-          </a:prstGeom>
-          <a:solidFill>
-            <a:srgbClr val="F2F2F2"/>
-          </a:solidFill>
-          <a:ln>
-            <a:noFill/>
-          </a:ln>
-        </p:spPr>
-        <p:style>
-          <a:lnRef idx="1">
-            <a:schemeClr val="accent1"/>
-          </a:lnRef>
-          <a:fillRef idx="3">
-            <a:schemeClr val="accent1"/>
-          </a:fillRef>
-          <a:effectRef idx="2">
-            <a:schemeClr val="accent1"/>
-          </a:effectRef>
-          <a:fontRef idx="minor">
-            <a:schemeClr val="lt1"/>
-          </a:fontRef>
-        </p:style>
-        <p:txBody>
-          <a:bodyPr rtlCol="0" anchor="ctr"/>
-          <a:lstStyle/>
-          <a:p>
-            <a:pPr algn="ctr"/>
-          </a:p>
-        </p:txBody>
-      </p:sp>
-      <p:sp>
-        <p:nvSpPr>
-          <p:cNvPr id="17" name="Rectangle 16"/>
-          <p:cNvSpPr/>
-          <p:nvPr/>
-        </p:nvSpPr>
-        <p:spPr>
-          <a:xfrm>
-            <a:off x="8109508" y="1591056"/>
-            <a:ext cx="3624986" cy="64008"/>
-          </a:xfrm>
-          <a:prstGeom prst="rect">
-            <a:avLst/>
-          </a:prstGeom>
-          <a:solidFill>
-            <a:srgbClr val="095292"/>
-          </a:solidFill>
-          <a:ln>
-            <a:noFill/>
-          </a:ln>
-        </p:spPr>
-        <p:style>
-          <a:lnRef idx="1">
-            <a:schemeClr val="accent1"/>
-          </a:lnRef>
-          <a:fillRef idx="3">
-            <a:schemeClr val="accent1"/>
-          </a:fillRef>
-          <a:effectRef idx="2">
-            <a:schemeClr val="accent1"/>
-          </a:effectRef>
-          <a:fontRef idx="minor">
-            <a:schemeClr val="lt1"/>
-          </a:fontRef>
-        </p:style>
-        <p:txBody>
-          <a:bodyPr rtlCol="0" anchor="ctr"/>
-          <a:lstStyle/>
-          <a:p>
-            <a:pPr algn="ctr"/>
-          </a:p>
-        </p:txBody>
-      </p:sp>
-      <p:sp>
-        <p:nvSpPr>
-          <p:cNvPr id="18" name="Rectangle 17"/>
-          <p:cNvSpPr/>
-          <p:nvPr/>
-        </p:nvSpPr>
-        <p:spPr>
-          <a:xfrm>
-            <a:off x="8109508" y="1655064"/>
-            <a:ext cx="3624986" cy="27432"/>
-          </a:xfrm>
-          <a:prstGeom prst="rect">
-            <a:avLst/>
-          </a:prstGeom>
-          <a:solidFill>
-            <a:srgbClr val="FFD000"/>
-          </a:solidFill>
-          <a:ln>
-            <a:noFill/>
-          </a:ln>
-        </p:spPr>
-        <p:style>
-          <a:lnRef idx="1">
-            <a:schemeClr val="accent1"/>
-          </a:lnRef>
-          <a:fillRef idx="3">
-            <a:schemeClr val="accent1"/>
-          </a:fillRef>
-          <a:effectRef idx="2">
-            <a:schemeClr val="accent1"/>
-          </a:effectRef>
-          <a:fontRef idx="minor">
-            <a:schemeClr val="lt1"/>
-          </a:fontRef>
-        </p:style>
-        <p:txBody>
-          <a:bodyPr rtlCol="0" anchor="ctr"/>
-          <a:lstStyle/>
-          <a:p>
-            <a:pPr algn="ctr"/>
-          </a:p>
-        </p:txBody>
-      </p:sp>
-      <p:pic>
-        <p:nvPicPr>
-          <p:cNvPr id="19" name="Picture 18" descr="google_docs.png"/>
-          <p:cNvPicPr>
-            <a:picLocks noChangeAspect="1"/>
-          </p:cNvPicPr>
-          <p:nvPr/>
-        </p:nvPicPr>
-        <p:blipFill>
-          <a:blip r:embed="rId4"/>
-          <a:stretch>
-            <a:fillRect/>
-          </a:stretch>
-        </p:blipFill>
-        <p:spPr>
-          <a:xfrm>
-            <a:off x="9311640" y="1847087"/>
-            <a:ext cx="1220724" cy="1220724"/>
-          </a:xfrm>
-          <a:prstGeom prst="rect">
-            <a:avLst/>
-          </a:prstGeom>
-        </p:spPr>
-      </p:pic>
-      <p:sp>
-        <p:nvSpPr>
-          <p:cNvPr id="20" name="TextBox 19"/>
-          <p:cNvSpPr txBox="1"/>
-          <p:nvPr/>
-        </p:nvSpPr>
-        <p:spPr>
-          <a:xfrm>
-            <a:off x="8182660" y="3159251"/>
-            <a:ext cx="3478682" cy="621792"/>
-          </a:xfrm>
-          <a:prstGeom prst="rect">
-            <a:avLst/>
-          </a:prstGeom>
-          <a:noFill/>
-        </p:spPr>
-        <p:txBody>
-          <a:bodyPr wrap="square" anchor="t"/>
-          <a:lstStyle/>
-          <a:p>
-            <a:pPr algn="ctr"/>
-            <a:r>
-              <a:rPr sz="1300" b="1" i="0">
-                <a:solidFill>
-                  <a:srgbClr val="095292"/>
-                </a:solidFill>
-                <a:latin typeface="Calibri"/>
-              </a:rPr>
-              <a:t>Google Docs</a:t>
-            </a:r>
-          </a:p>
-          <a:p>
-            <a:pPr algn="ctr">
-              <a:spcBef>
-                <a:spcPts val="200"/>
-              </a:spcBef>
-            </a:pPr>
-            <a:r>
-              <a:rPr sz="1000" b="0" i="0">
-                <a:solidFill>
-                  <a:srgbClr val="666666"/>
-                </a:solidFill>
-                <a:latin typeface="Calibri"/>
-              </a:rPr>
-              <a:t>Informe PI</a:t>
-            </a:r>
-          </a:p>
-        </p:txBody>
-      </p:sp>
-      <p:sp>
-        <p:nvSpPr>
-          <p:cNvPr id="21" name="Rounded Rectangle 20"/>
-          <p:cNvSpPr/>
-          <p:nvPr/>
-        </p:nvSpPr>
-        <p:spPr>
-          <a:xfrm>
-            <a:off x="4283354" y="4055364"/>
-            <a:ext cx="3624986" cy="2299716"/>
-          </a:xfrm>
-          <a:prstGeom prst="roundRect">
-            <a:avLst>
-              <a:gd name="adj" fmla="val 12000"/>
-            </a:avLst>
-          </a:prstGeom>
-          <a:solidFill>
-            <a:srgbClr val="F2F2F2"/>
-          </a:solidFill>
-          <a:ln>
-            <a:noFill/>
-          </a:ln>
-        </p:spPr>
-        <p:style>
-          <a:lnRef idx="1">
-            <a:schemeClr val="accent1"/>
-          </a:lnRef>
-          <a:fillRef idx="3">
-            <a:schemeClr val="accent1"/>
-          </a:fillRef>
-          <a:effectRef idx="2">
-            <a:schemeClr val="accent1"/>
-          </a:effectRef>
-          <a:fontRef idx="minor">
-            <a:schemeClr val="lt1"/>
-          </a:fontRef>
-        </p:style>
-        <p:txBody>
-          <a:bodyPr rtlCol="0" anchor="ctr"/>
-          <a:lstStyle/>
-          <a:p>
-            <a:pPr algn="ctr"/>
-          </a:p>
-        </p:txBody>
-      </p:sp>
-      <p:sp>
-        <p:nvSpPr>
-          <p:cNvPr id="22" name="Rectangle 21"/>
-          <p:cNvSpPr/>
-          <p:nvPr/>
-        </p:nvSpPr>
-        <p:spPr>
-          <a:xfrm>
-            <a:off x="4283354" y="4055364"/>
-            <a:ext cx="3624986" cy="64008"/>
-          </a:xfrm>
-          <a:prstGeom prst="rect">
-            <a:avLst/>
-          </a:prstGeom>
-          <a:solidFill>
-            <a:srgbClr val="095292"/>
-          </a:solidFill>
-          <a:ln>
-            <a:noFill/>
-          </a:ln>
-        </p:spPr>
-        <p:style>
-          <a:lnRef idx="1">
-            <a:schemeClr val="accent1"/>
-          </a:lnRef>
-          <a:fillRef idx="3">
-            <a:schemeClr val="accent1"/>
-          </a:fillRef>
-          <a:effectRef idx="2">
-            <a:schemeClr val="accent1"/>
-          </a:effectRef>
-          <a:fontRef idx="minor">
-            <a:schemeClr val="lt1"/>
-          </a:fontRef>
-        </p:style>
-        <p:txBody>
-          <a:bodyPr rtlCol="0" anchor="ctr"/>
-          <a:lstStyle/>
-          <a:p>
-            <a:pPr algn="ctr"/>
-          </a:p>
-        </p:txBody>
-      </p:sp>
-      <p:sp>
-        <p:nvSpPr>
-          <p:cNvPr id="23" name="Rectangle 22"/>
-          <p:cNvSpPr/>
-          <p:nvPr/>
-        </p:nvSpPr>
-        <p:spPr>
-          <a:xfrm>
-            <a:off x="4283354" y="4119372"/>
-            <a:ext cx="3624986" cy="27432"/>
-          </a:xfrm>
-          <a:prstGeom prst="rect">
-            <a:avLst/>
-          </a:prstGeom>
-          <a:solidFill>
-            <a:srgbClr val="FFD000"/>
-          </a:solidFill>
-          <a:ln>
-            <a:noFill/>
-          </a:ln>
-        </p:spPr>
-        <p:style>
-          <a:lnRef idx="1">
-            <a:schemeClr val="accent1"/>
-          </a:lnRef>
-          <a:fillRef idx="3">
-            <a:schemeClr val="accent1"/>
-          </a:fillRef>
-          <a:effectRef idx="2">
-            <a:schemeClr val="accent1"/>
-          </a:effectRef>
-          <a:fontRef idx="minor">
-            <a:schemeClr val="lt1"/>
-          </a:fontRef>
-        </p:style>
-        <p:txBody>
-          <a:bodyPr rtlCol="0" anchor="ctr"/>
-          <a:lstStyle/>
-          <a:p>
-            <a:pPr algn="ctr"/>
-          </a:p>
-        </p:txBody>
-      </p:sp>
-      <p:pic>
-        <p:nvPicPr>
-          <p:cNvPr id="24" name="Picture 23" descr="examlab.png"/>
-          <p:cNvPicPr>
-            <a:picLocks noChangeAspect="1"/>
-          </p:cNvPicPr>
-          <p:nvPr/>
-        </p:nvPicPr>
-        <p:blipFill>
-          <a:blip r:embed="rId5"/>
-          <a:stretch>
-            <a:fillRect/>
-          </a:stretch>
-        </p:blipFill>
-        <p:spPr>
-          <a:xfrm>
-            <a:off x="5485485" y="4311396"/>
-            <a:ext cx="1220724" cy="1220724"/>
-          </a:xfrm>
-          <a:prstGeom prst="rect">
-            <a:avLst/>
-          </a:prstGeom>
-        </p:spPr>
-      </p:pic>
-      <p:sp>
-        <p:nvSpPr>
-          <p:cNvPr id="25" name="TextBox 24"/>
-          <p:cNvSpPr txBox="1"/>
-          <p:nvPr/>
-        </p:nvSpPr>
-        <p:spPr>
-          <a:xfrm>
-            <a:off x="4356506" y="5623560"/>
-            <a:ext cx="3478682" cy="621792"/>
-          </a:xfrm>
-          <a:prstGeom prst="rect">
-            <a:avLst/>
-          </a:prstGeom>
-          <a:noFill/>
-        </p:spPr>
-        <p:txBody>
-          <a:bodyPr wrap="square" anchor="t"/>
-          <a:lstStyle/>
-          <a:p>
-            <a:pPr algn="ctr"/>
-            <a:r>
-              <a:rPr sz="1300" b="1" i="0">
-                <a:solidFill>
-                  <a:srgbClr val="095292"/>
-                </a:solidFill>
-                <a:latin typeface="Calibri"/>
-              </a:rPr>
-              <a:t>la plataforma del curso</a:t>
-            </a:r>
-          </a:p>
-          <a:p>
-            <a:pPr algn="ctr">
-              <a:spcBef>
-                <a:spcPts val="200"/>
-              </a:spcBef>
-            </a:pPr>
-            <a:r>
-              <a:rPr sz="1000" b="0" i="0">
-                <a:solidFill>
-                  <a:srgbClr val="666666"/>
-                </a:solidFill>
-                <a:latin typeface="Calibri"/>
-              </a:rPr>
-              <a:t>Donde se entrega</a:t>
-            </a:r>
-          </a:p>
-        </p:txBody>
-      </p:sp>
-      <p:sp>
-        <p:nvSpPr>
-          <p:cNvPr id="26" name="TextBox 25"/>
+          <a:bodyPr wrap="square">
+            <a:spAutoFit/>
+          </a:bodyPr>
+          <a:lstStyle/>
+          <a:p>
+            <a:pPr>
+              <a:spcAft>
+                <a:spcPts val="400"/>
+              </a:spcAft>
+            </a:pPr>
+            <a:r>
+              <a:rPr sz="1400" b="0" i="0">
+                <a:solidFill>
+                  <a:srgbClr val="FFFFFF"/>
+                </a:solidFill>
+                <a:latin typeface="Calibri"/>
+              </a:rPr>
+              <a:t>$ docker stop cloudlite &amp;&amp; docker rm cloudlite</a:t>
+            </a:r>
+          </a:p>
+          <a:p>
+            <a:pPr>
+              <a:spcAft>
+                <a:spcPts val="400"/>
+              </a:spcAft>
+            </a:pPr>
+            <a:r>
+              <a:rPr sz="1400" b="0" i="0">
+                <a:solidFill>
+                  <a:srgbClr val="FFFFFF"/>
+                </a:solidFill>
+                <a:latin typeface="Calibri"/>
+              </a:rPr>
+              <a:t/>
+            </a:r>
+          </a:p>
+          <a:p>
+            <a:pPr>
+              <a:spcAft>
+                <a:spcPts val="400"/>
+              </a:spcAft>
+            </a:pPr>
+            <a:r>
+              <a:rPr sz="1400" b="0" i="0">
+                <a:solidFill>
+                  <a:srgbClr val="FFFFFF"/>
+                </a:solidFill>
+                <a:latin typeface="Calibri"/>
+              </a:rPr>
+              <a:t># Lo escrito DENTRO del contenedor se va con el:</a:t>
+            </a:r>
+          </a:p>
+          <a:p>
+            <a:pPr>
+              <a:spcAft>
+                <a:spcPts val="400"/>
+              </a:spcAft>
+            </a:pPr>
+            <a:r>
+              <a:rPr sz="1400" b="0" i="0">
+                <a:solidFill>
+                  <a:srgbClr val="FFFFFF"/>
+                </a:solidFill>
+                <a:latin typeface="Calibri"/>
+              </a:rPr>
+              <a:t>$ docker run -d --name c1 cloudlite-api:0.1.0</a:t>
+            </a:r>
+          </a:p>
+          <a:p>
+            <a:pPr>
+              <a:spcAft>
+                <a:spcPts val="400"/>
+              </a:spcAft>
+            </a:pPr>
+            <a:r>
+              <a:rPr sz="1400" b="0" i="0">
+                <a:solidFill>
+                  <a:srgbClr val="FFFFFF"/>
+                </a:solidFill>
+                <a:latin typeface="Calibri"/>
+              </a:rPr>
+              <a:t>$ docker exec c1 sh -c 'echo hola &gt; /tmp/dato.txt'</a:t>
+            </a:r>
+          </a:p>
+          <a:p>
+            <a:pPr>
+              <a:spcAft>
+                <a:spcPts val="400"/>
+              </a:spcAft>
+            </a:pPr>
+            <a:r>
+              <a:rPr sz="1400" b="0" i="0">
+                <a:solidFill>
+                  <a:srgbClr val="FFFFFF"/>
+                </a:solidFill>
+                <a:latin typeface="Calibri"/>
+              </a:rPr>
+              <a:t>$ docker rm -f c1</a:t>
+            </a:r>
+          </a:p>
+          <a:p>
+            <a:pPr>
+              <a:spcAft>
+                <a:spcPts val="400"/>
+              </a:spcAft>
+            </a:pPr>
+            <a:r>
+              <a:rPr sz="1400" b="0" i="0">
+                <a:solidFill>
+                  <a:srgbClr val="FFFFFF"/>
+                </a:solidFill>
+                <a:latin typeface="Calibri"/>
+              </a:rPr>
+              <a:t>$ docker run --rm cloudlite-api:0.1.0 cat /tmp/dato.txt</a:t>
+            </a:r>
+          </a:p>
+          <a:p>
+            <a:pPr>
+              <a:spcAft>
+                <a:spcPts val="400"/>
+              </a:spcAft>
+            </a:pPr>
+            <a:r>
+              <a:rPr sz="1400" b="0" i="0">
+                <a:solidFill>
+                  <a:srgbClr val="FFFFFF"/>
+                </a:solidFill>
+                <a:latin typeface="Calibri"/>
+              </a:rPr>
+              <a:t>cat: can't open '/tmp/dato.txt': No such file or directory</a:t>
+            </a:r>
+          </a:p>
+          <a:p>
+            <a:pPr>
+              <a:spcAft>
+                <a:spcPts val="400"/>
+              </a:spcAft>
+            </a:pPr>
+            <a:r>
+              <a:rPr sz="1400" b="0" i="0">
+                <a:solidFill>
+                  <a:srgbClr val="FFFFFF"/>
+                </a:solidFill>
+                <a:latin typeface="Calibri"/>
+              </a:rPr>
+              <a:t/>
+            </a:r>
+          </a:p>
+          <a:p>
+            <a:pPr>
+              <a:spcAft>
+                <a:spcPts val="400"/>
+              </a:spcAft>
+            </a:pPr>
+            <a:r>
+              <a:rPr sz="1400" b="0" i="0">
+                <a:solidFill>
+                  <a:srgbClr val="FFFFFF"/>
+                </a:solidFill>
+                <a:latin typeface="Calibri"/>
+              </a:rPr>
+              <a:t># Por eso el estado vive fuera: volumen o base de datos gestionada.</a:t>
+            </a:r>
+          </a:p>
+          <a:p>
+            <a:pPr>
+              <a:spcAft>
+                <a:spcPts val="400"/>
+              </a:spcAft>
+            </a:pPr>
+            <a:r>
+              <a:rPr sz="1400" b="0" i="0">
+                <a:solidFill>
+                  <a:srgbClr val="FFFFFF"/>
+                </a:solidFill>
+                <a:latin typeface="Calibri"/>
+              </a:rPr>
+              <a:t>$ docker run -d -v cloudlite_datos:/app/data cloudlite-api:0.1.0</a:t>
+            </a:r>
+          </a:p>
+        </p:txBody>
+      </p:sp>
+      <p:sp>
+        <p:nvSpPr>
+          <p:cNvPr id="9" name="TextBox 8"/>
           <p:cNvSpPr txBox="1"/>
           <p:nvPr/>
         </p:nvSpPr>
@@ -12028,7 +10926,7 @@
         <p:spPr>
           <a:xfrm>
             <a:off x="0" y="0"/>
-            <a:ext cx="12191695" cy="960120"/>
+            <a:ext cx="12191695" cy="1170432"/>
           </a:xfrm>
           <a:prstGeom prst="rect">
             <a:avLst/>
@@ -12070,7 +10968,7 @@
         </p:nvSpPr>
         <p:spPr>
           <a:xfrm>
-            <a:off x="0" y="960120"/>
+            <a:off x="0" y="1170432"/>
             <a:ext cx="12191695" cy="41148"/>
           </a:xfrm>
           <a:prstGeom prst="rect">
@@ -12114,7 +11012,7 @@
         <p:spPr>
           <a:xfrm>
             <a:off x="457200" y="164592"/>
-            <a:ext cx="11277295" cy="502920"/>
+            <a:ext cx="11277295" cy="384048"/>
           </a:xfrm>
           <a:prstGeom prst="rect">
             <a:avLst/>
@@ -12134,7 +11032,7 @@
                 </a:solidFill>
                 <a:latin typeface="Calibri"/>
               </a:rPr>
-              <a:t>PI CloudLite — entregable de hoy</a:t>
+              <a:t>Máquinas virtuales vs. contenedores</a:t>
             </a:r>
           </a:p>
         </p:txBody>
@@ -12147,8 +11045,8 @@
         </p:nvSpPr>
         <p:spPr>
           <a:xfrm>
-            <a:off x="457200" y="1170432"/>
-            <a:ext cx="11277295" cy="5230368"/>
+            <a:off x="457200" y="566928"/>
+            <a:ext cx="11277295" cy="411480"/>
           </a:xfrm>
           <a:prstGeom prst="rect">
             <a:avLst/>
@@ -12161,119 +11059,707 @@
           </a:bodyPr>
           <a:lstStyle/>
           <a:p>
-            <a:pPr>
-              <a:spcAft>
-                <a:spcPts val="800"/>
-              </a:spcAft>
-            </a:pPr>
-            <a:r>
-              <a:rPr sz="2000" b="0" i="0">
-                <a:solidFill>
-                  <a:srgbClr val="333333"/>
-                </a:solidFill>
-                <a:latin typeface="Calibri"/>
-              </a:rPr>
-              <a:t>–   </a:t>
-            </a:r>
-            <a:r>
-              <a:rPr sz="2000" b="1" i="0">
-                <a:solidFill>
-                  <a:srgbClr val="333333"/>
-                </a:solidFill>
-                <a:latin typeface="Calibri"/>
-              </a:rPr>
-              <a:t>Entregable:</a:t>
-            </a:r>
-            <a:r>
-              <a:rPr sz="2000" b="0" i="0">
-                <a:solidFill>
-                  <a:srgbClr val="333333"/>
-                </a:solidFill>
-                <a:latin typeface="Calibri"/>
-              </a:rPr>
-              <a:t> Dockerfile del stub + bitácora de 5 comandos con la salida real + captura del lab</a:t>
-            </a:r>
-          </a:p>
-          <a:p>
-            <a:pPr>
-              <a:spcAft>
-                <a:spcPts val="800"/>
-              </a:spcAft>
-            </a:pPr>
-            <a:r>
-              <a:rPr sz="2000" b="0" i="0">
-                <a:solidFill>
-                  <a:srgbClr val="333333"/>
-                </a:solidFill>
-                <a:latin typeface="Calibri"/>
-              </a:rPr>
-              <a:t>–   Herramienta: </a:t>
-            </a:r>
-            <a:r>
-              <a:rPr sz="2000" b="1" i="0">
-                <a:solidFill>
-                  <a:srgbClr val="333333"/>
-                </a:solidFill>
-                <a:latin typeface="Calibri"/>
-              </a:rPr>
-              <a:t>Killercoda · alterna si no carga: LabEx Docker Playground</a:t>
-            </a:r>
-          </a:p>
-          <a:p>
-            <a:pPr>
-              <a:spcAft>
-                <a:spcPts val="800"/>
-              </a:spcAft>
-            </a:pPr>
-            <a:r>
-              <a:rPr sz="2000" b="0" i="0">
-                <a:solidFill>
-                  <a:srgbClr val="333333"/>
-                </a:solidFill>
-                <a:latin typeface="Calibri"/>
-              </a:rPr>
-              <a:t>–   Todo lo que construyan hoy entra al </a:t>
-            </a:r>
-            <a:r>
-              <a:rPr sz="2000" b="1" i="0">
-                <a:solidFill>
-                  <a:srgbClr val="333333"/>
-                </a:solidFill>
-                <a:latin typeface="Calibri"/>
-              </a:rPr>
-              <a:t>informe/repo del PI</a:t>
-            </a:r>
-            <a:r>
-              <a:rPr sz="2000" b="0" i="0">
-                <a:solidFill>
-                  <a:srgbClr val="333333"/>
-                </a:solidFill>
-                <a:latin typeface="Calibri"/>
-              </a:rPr>
-              <a:t> (no es lab suelto).</a:t>
-            </a:r>
-          </a:p>
-          <a:p>
-            <a:pPr>
-              <a:spcAft>
-                <a:spcPts val="800"/>
-              </a:spcAft>
-            </a:pPr>
-            <a:r>
-              <a:rPr sz="2000" b="0" i="0">
-                <a:solidFill>
-                  <a:srgbClr val="333333"/>
-                </a:solidFill>
-                <a:latin typeface="Calibri"/>
-              </a:rPr>
-              <a:t>–   Individual por defecto · el docente puede autorizar equipos de 2–3; la entrega en la plataforma del curso siempre es individual.</a:t>
-            </a:r>
-          </a:p>
-        </p:txBody>
-      </p:sp>
-      <p:sp>
-        <p:nvSpPr>
-          <p:cNvPr id="6" name="TextBox 5"/>
+            <a:r>
+              <a:rPr sz="1400" b="0" i="0">
+                <a:solidFill>
+                  <a:srgbClr val="B8D8EE"/>
+                </a:solidFill>
+                <a:latin typeface="Calibri"/>
+              </a:rPr>
+              <a:t>Misma capacidad de cómputo, distinto nivel de aislamiento</a:t>
+            </a:r>
+          </a:p>
+        </p:txBody>
+      </p:sp>
+      <p:sp>
+        <p:nvSpPr>
+          <p:cNvPr id="6" name="Rounded Rectangle 5"/>
+          <p:cNvSpPr/>
+          <p:nvPr/>
+        </p:nvSpPr>
+        <p:spPr>
+          <a:xfrm>
+            <a:off x="822960" y="1417320"/>
+            <a:ext cx="3931920" cy="457200"/>
+          </a:xfrm>
+          <a:prstGeom prst="roundRect">
+            <a:avLst>
+              <a:gd name="adj" fmla="val 12000"/>
+            </a:avLst>
+          </a:prstGeom>
+          <a:solidFill>
+            <a:srgbClr val="095292"/>
+          </a:solidFill>
+          <a:ln>
+            <a:noFill/>
+          </a:ln>
+        </p:spPr>
+        <p:style>
+          <a:lnRef idx="1">
+            <a:schemeClr val="accent1"/>
+          </a:lnRef>
+          <a:fillRef idx="3">
+            <a:schemeClr val="accent1"/>
+          </a:fillRef>
+          <a:effectRef idx="2">
+            <a:schemeClr val="accent1"/>
+          </a:effectRef>
+          <a:fontRef idx="minor">
+            <a:schemeClr val="lt1"/>
+          </a:fontRef>
+        </p:style>
+        <p:txBody>
+          <a:bodyPr rtlCol="0" anchor="ctr" wrap="square"/>
+          <a:lstStyle/>
+          <a:p>
+            <a:pPr algn="ctr"/>
+            <a:r>
+              <a:rPr sz="1200" b="1" i="0">
+                <a:solidFill>
+                  <a:srgbClr val="FFFFFF"/>
+                </a:solidFill>
+                <a:latin typeface="Calibri"/>
+              </a:rPr>
+              <a:t>Máquinas virtuales</a:t>
+            </a:r>
+          </a:p>
+        </p:txBody>
+      </p:sp>
+      <p:sp>
+        <p:nvSpPr>
+          <p:cNvPr id="7" name="Rounded Rectangle 6"/>
+          <p:cNvSpPr/>
+          <p:nvPr/>
+        </p:nvSpPr>
+        <p:spPr>
+          <a:xfrm>
+            <a:off x="822960" y="2057400"/>
+            <a:ext cx="3931920" cy="594360"/>
+          </a:xfrm>
+          <a:prstGeom prst="roundRect">
+            <a:avLst>
+              <a:gd name="adj" fmla="val 12000"/>
+            </a:avLst>
+          </a:prstGeom>
+          <a:solidFill>
+            <a:srgbClr val="333333"/>
+          </a:solidFill>
+          <a:ln>
+            <a:noFill/>
+          </a:ln>
+        </p:spPr>
+        <p:style>
+          <a:lnRef idx="1">
+            <a:schemeClr val="accent1"/>
+          </a:lnRef>
+          <a:fillRef idx="3">
+            <a:schemeClr val="accent1"/>
+          </a:fillRef>
+          <a:effectRef idx="2">
+            <a:schemeClr val="accent1"/>
+          </a:effectRef>
+          <a:fontRef idx="minor">
+            <a:schemeClr val="lt1"/>
+          </a:fontRef>
+        </p:style>
+        <p:txBody>
+          <a:bodyPr rtlCol="0" anchor="ctr" wrap="square"/>
+          <a:lstStyle/>
+          <a:p>
+            <a:pPr algn="ctr"/>
+            <a:r>
+              <a:rPr sz="1300" b="1" i="0">
+                <a:solidFill>
+                  <a:srgbClr val="FFFFFF"/>
+                </a:solidFill>
+                <a:latin typeface="Calibri"/>
+              </a:rPr>
+              <a:t>Hardware físico</a:t>
+            </a:r>
+          </a:p>
+        </p:txBody>
+      </p:sp>
+      <p:sp>
+        <p:nvSpPr>
+          <p:cNvPr id="8" name="Rounded Rectangle 7"/>
+          <p:cNvSpPr/>
+          <p:nvPr/>
+        </p:nvSpPr>
+        <p:spPr>
+          <a:xfrm>
+            <a:off x="822960" y="2697480"/>
+            <a:ext cx="3931920" cy="594360"/>
+          </a:xfrm>
+          <a:prstGeom prst="roundRect">
+            <a:avLst>
+              <a:gd name="adj" fmla="val 12000"/>
+            </a:avLst>
+          </a:prstGeom>
+          <a:solidFill>
+            <a:srgbClr val="269CCB"/>
+          </a:solidFill>
+          <a:ln>
+            <a:noFill/>
+          </a:ln>
+        </p:spPr>
+        <p:style>
+          <a:lnRef idx="1">
+            <a:schemeClr val="accent1"/>
+          </a:lnRef>
+          <a:fillRef idx="3">
+            <a:schemeClr val="accent1"/>
+          </a:fillRef>
+          <a:effectRef idx="2">
+            <a:schemeClr val="accent1"/>
+          </a:effectRef>
+          <a:fontRef idx="minor">
+            <a:schemeClr val="lt1"/>
+          </a:fontRef>
+        </p:style>
+        <p:txBody>
+          <a:bodyPr rtlCol="0" anchor="ctr" wrap="square"/>
+          <a:lstStyle/>
+          <a:p>
+            <a:pPr algn="ctr"/>
+            <a:r>
+              <a:rPr sz="1300" b="1" i="0">
+                <a:solidFill>
+                  <a:srgbClr val="FFFFFF"/>
+                </a:solidFill>
+                <a:latin typeface="Calibri"/>
+              </a:rPr>
+              <a:t>Hipervisor</a:t>
+            </a:r>
+          </a:p>
+        </p:txBody>
+      </p:sp>
+      <p:sp>
+        <p:nvSpPr>
+          <p:cNvPr id="9" name="Rounded Rectangle 8"/>
+          <p:cNvSpPr/>
+          <p:nvPr/>
+        </p:nvSpPr>
+        <p:spPr>
+          <a:xfrm>
+            <a:off x="822960" y="3337560"/>
+            <a:ext cx="1874519" cy="640080"/>
+          </a:xfrm>
+          <a:prstGeom prst="roundRect">
+            <a:avLst>
+              <a:gd name="adj" fmla="val 12000"/>
+            </a:avLst>
+          </a:prstGeom>
+          <a:solidFill>
+            <a:srgbClr val="269CCB"/>
+          </a:solidFill>
+          <a:ln>
+            <a:noFill/>
+          </a:ln>
+        </p:spPr>
+        <p:style>
+          <a:lnRef idx="1">
+            <a:schemeClr val="accent1"/>
+          </a:lnRef>
+          <a:fillRef idx="3">
+            <a:schemeClr val="accent1"/>
+          </a:fillRef>
+          <a:effectRef idx="2">
+            <a:schemeClr val="accent1"/>
+          </a:effectRef>
+          <a:fontRef idx="minor">
+            <a:schemeClr val="lt1"/>
+          </a:fontRef>
+        </p:style>
+        <p:txBody>
+          <a:bodyPr rtlCol="0" anchor="ctr" wrap="square"/>
+          <a:lstStyle/>
+          <a:p>
+            <a:pPr algn="ctr"/>
+            <a:r>
+              <a:rPr sz="1100" b="1" i="0">
+                <a:solidFill>
+                  <a:srgbClr val="FFFFFF"/>
+                </a:solidFill>
+                <a:latin typeface="Calibri"/>
+              </a:rPr>
+              <a:t>SO invitado A
+(completo)</a:t>
+            </a:r>
+          </a:p>
+        </p:txBody>
+      </p:sp>
+      <p:sp>
+        <p:nvSpPr>
+          <p:cNvPr id="10" name="Rounded Rectangle 9"/>
+          <p:cNvSpPr/>
+          <p:nvPr/>
+        </p:nvSpPr>
+        <p:spPr>
+          <a:xfrm>
+            <a:off x="2880360" y="3337560"/>
+            <a:ext cx="1874519" cy="640080"/>
+          </a:xfrm>
+          <a:prstGeom prst="roundRect">
+            <a:avLst>
+              <a:gd name="adj" fmla="val 12000"/>
+            </a:avLst>
+          </a:prstGeom>
+          <a:solidFill>
+            <a:srgbClr val="269CCB"/>
+          </a:solidFill>
+          <a:ln>
+            <a:noFill/>
+          </a:ln>
+        </p:spPr>
+        <p:style>
+          <a:lnRef idx="1">
+            <a:schemeClr val="accent1"/>
+          </a:lnRef>
+          <a:fillRef idx="3">
+            <a:schemeClr val="accent1"/>
+          </a:fillRef>
+          <a:effectRef idx="2">
+            <a:schemeClr val="accent1"/>
+          </a:effectRef>
+          <a:fontRef idx="minor">
+            <a:schemeClr val="lt1"/>
+          </a:fontRef>
+        </p:style>
+        <p:txBody>
+          <a:bodyPr rtlCol="0" anchor="ctr" wrap="square"/>
+          <a:lstStyle/>
+          <a:p>
+            <a:pPr algn="ctr"/>
+            <a:r>
+              <a:rPr sz="1100" b="1" i="0">
+                <a:solidFill>
+                  <a:srgbClr val="FFFFFF"/>
+                </a:solidFill>
+                <a:latin typeface="Calibri"/>
+              </a:rPr>
+              <a:t>SO invitado B
+(completo)</a:t>
+            </a:r>
+          </a:p>
+        </p:txBody>
+      </p:sp>
+      <p:sp>
+        <p:nvSpPr>
+          <p:cNvPr id="11" name="Rounded Rectangle 10"/>
+          <p:cNvSpPr/>
+          <p:nvPr/>
+        </p:nvSpPr>
+        <p:spPr>
+          <a:xfrm>
+            <a:off x="822960" y="4023360"/>
+            <a:ext cx="1874519" cy="548640"/>
+          </a:xfrm>
+          <a:prstGeom prst="roundRect">
+            <a:avLst>
+              <a:gd name="adj" fmla="val 12000"/>
+            </a:avLst>
+          </a:prstGeom>
+          <a:solidFill>
+            <a:srgbClr val="FFD000"/>
+          </a:solidFill>
+          <a:ln>
+            <a:noFill/>
+          </a:ln>
+        </p:spPr>
+        <p:style>
+          <a:lnRef idx="1">
+            <a:schemeClr val="accent1"/>
+          </a:lnRef>
+          <a:fillRef idx="3">
+            <a:schemeClr val="accent1"/>
+          </a:fillRef>
+          <a:effectRef idx="2">
+            <a:schemeClr val="accent1"/>
+          </a:effectRef>
+          <a:fontRef idx="minor">
+            <a:schemeClr val="lt1"/>
+          </a:fontRef>
+        </p:style>
+        <p:txBody>
+          <a:bodyPr rtlCol="0" anchor="ctr" wrap="square"/>
+          <a:lstStyle/>
+          <a:p>
+            <a:pPr algn="ctr"/>
+            <a:r>
+              <a:rPr sz="1300" b="1" i="0">
+                <a:solidFill>
+                  <a:srgbClr val="095292"/>
+                </a:solidFill>
+                <a:latin typeface="Calibri"/>
+              </a:rPr>
+              <a:t>App A</a:t>
+            </a:r>
+          </a:p>
+        </p:txBody>
+      </p:sp>
+      <p:sp>
+        <p:nvSpPr>
+          <p:cNvPr id="12" name="Rounded Rectangle 11"/>
+          <p:cNvSpPr/>
+          <p:nvPr/>
+        </p:nvSpPr>
+        <p:spPr>
+          <a:xfrm>
+            <a:off x="2880360" y="4023360"/>
+            <a:ext cx="1874519" cy="548640"/>
+          </a:xfrm>
+          <a:prstGeom prst="roundRect">
+            <a:avLst>
+              <a:gd name="adj" fmla="val 12000"/>
+            </a:avLst>
+          </a:prstGeom>
+          <a:solidFill>
+            <a:srgbClr val="FFD000"/>
+          </a:solidFill>
+          <a:ln>
+            <a:noFill/>
+          </a:ln>
+        </p:spPr>
+        <p:style>
+          <a:lnRef idx="1">
+            <a:schemeClr val="accent1"/>
+          </a:lnRef>
+          <a:fillRef idx="3">
+            <a:schemeClr val="accent1"/>
+          </a:fillRef>
+          <a:effectRef idx="2">
+            <a:schemeClr val="accent1"/>
+          </a:effectRef>
+          <a:fontRef idx="minor">
+            <a:schemeClr val="lt1"/>
+          </a:fontRef>
+        </p:style>
+        <p:txBody>
+          <a:bodyPr rtlCol="0" anchor="ctr" wrap="square"/>
+          <a:lstStyle/>
+          <a:p>
+            <a:pPr algn="ctr"/>
+            <a:r>
+              <a:rPr sz="1300" b="1" i="0">
+                <a:solidFill>
+                  <a:srgbClr val="095292"/>
+                </a:solidFill>
+                <a:latin typeface="Calibri"/>
+              </a:rPr>
+              <a:t>App B</a:t>
+            </a:r>
+          </a:p>
+        </p:txBody>
+      </p:sp>
+      <p:sp>
+        <p:nvSpPr>
+          <p:cNvPr id="13" name="Rounded Rectangle 12"/>
+          <p:cNvSpPr/>
+          <p:nvPr/>
+        </p:nvSpPr>
+        <p:spPr>
+          <a:xfrm>
+            <a:off x="7315200" y="1417320"/>
+            <a:ext cx="3931920" cy="457200"/>
+          </a:xfrm>
+          <a:prstGeom prst="roundRect">
+            <a:avLst>
+              <a:gd name="adj" fmla="val 12000"/>
+            </a:avLst>
+          </a:prstGeom>
+          <a:solidFill>
+            <a:srgbClr val="095292"/>
+          </a:solidFill>
+          <a:ln>
+            <a:noFill/>
+          </a:ln>
+        </p:spPr>
+        <p:style>
+          <a:lnRef idx="1">
+            <a:schemeClr val="accent1"/>
+          </a:lnRef>
+          <a:fillRef idx="3">
+            <a:schemeClr val="accent1"/>
+          </a:fillRef>
+          <a:effectRef idx="2">
+            <a:schemeClr val="accent1"/>
+          </a:effectRef>
+          <a:fontRef idx="minor">
+            <a:schemeClr val="lt1"/>
+          </a:fontRef>
+        </p:style>
+        <p:txBody>
+          <a:bodyPr rtlCol="0" anchor="ctr" wrap="square"/>
+          <a:lstStyle/>
+          <a:p>
+            <a:pPr algn="ctr"/>
+            <a:r>
+              <a:rPr sz="1200" b="1" i="0">
+                <a:solidFill>
+                  <a:srgbClr val="FFFFFF"/>
+                </a:solidFill>
+                <a:latin typeface="Calibri"/>
+              </a:rPr>
+              <a:t>Contenedores</a:t>
+            </a:r>
+          </a:p>
+        </p:txBody>
+      </p:sp>
+      <p:sp>
+        <p:nvSpPr>
+          <p:cNvPr id="14" name="Rounded Rectangle 13"/>
+          <p:cNvSpPr/>
+          <p:nvPr/>
+        </p:nvSpPr>
+        <p:spPr>
+          <a:xfrm>
+            <a:off x="7315200" y="2057400"/>
+            <a:ext cx="3931920" cy="594360"/>
+          </a:xfrm>
+          <a:prstGeom prst="roundRect">
+            <a:avLst>
+              <a:gd name="adj" fmla="val 12000"/>
+            </a:avLst>
+          </a:prstGeom>
+          <a:solidFill>
+            <a:srgbClr val="333333"/>
+          </a:solidFill>
+          <a:ln>
+            <a:noFill/>
+          </a:ln>
+        </p:spPr>
+        <p:style>
+          <a:lnRef idx="1">
+            <a:schemeClr val="accent1"/>
+          </a:lnRef>
+          <a:fillRef idx="3">
+            <a:schemeClr val="accent1"/>
+          </a:fillRef>
+          <a:effectRef idx="2">
+            <a:schemeClr val="accent1"/>
+          </a:effectRef>
+          <a:fontRef idx="minor">
+            <a:schemeClr val="lt1"/>
+          </a:fontRef>
+        </p:style>
+        <p:txBody>
+          <a:bodyPr rtlCol="0" anchor="ctr" wrap="square"/>
+          <a:lstStyle/>
+          <a:p>
+            <a:pPr algn="ctr"/>
+            <a:r>
+              <a:rPr sz="1300" b="1" i="0">
+                <a:solidFill>
+                  <a:srgbClr val="FFFFFF"/>
+                </a:solidFill>
+                <a:latin typeface="Calibri"/>
+              </a:rPr>
+              <a:t>Hardware físico</a:t>
+            </a:r>
+          </a:p>
+        </p:txBody>
+      </p:sp>
+      <p:sp>
+        <p:nvSpPr>
+          <p:cNvPr id="15" name="Rounded Rectangle 14"/>
+          <p:cNvSpPr/>
+          <p:nvPr/>
+        </p:nvSpPr>
+        <p:spPr>
+          <a:xfrm>
+            <a:off x="7315200" y="2697480"/>
+            <a:ext cx="3931920" cy="594360"/>
+          </a:xfrm>
+          <a:prstGeom prst="roundRect">
+            <a:avLst>
+              <a:gd name="adj" fmla="val 12000"/>
+            </a:avLst>
+          </a:prstGeom>
+          <a:solidFill>
+            <a:srgbClr val="269CCB"/>
+          </a:solidFill>
+          <a:ln>
+            <a:noFill/>
+          </a:ln>
+        </p:spPr>
+        <p:style>
+          <a:lnRef idx="1">
+            <a:schemeClr val="accent1"/>
+          </a:lnRef>
+          <a:fillRef idx="3">
+            <a:schemeClr val="accent1"/>
+          </a:fillRef>
+          <a:effectRef idx="2">
+            <a:schemeClr val="accent1"/>
+          </a:effectRef>
+          <a:fontRef idx="minor">
+            <a:schemeClr val="lt1"/>
+          </a:fontRef>
+        </p:style>
+        <p:txBody>
+          <a:bodyPr rtlCol="0" anchor="ctr" wrap="square"/>
+          <a:lstStyle/>
+          <a:p>
+            <a:pPr algn="ctr"/>
+            <a:r>
+              <a:rPr sz="1050" b="1" i="0">
+                <a:solidFill>
+                  <a:srgbClr val="FFFFFF"/>
+                </a:solidFill>
+                <a:latin typeface="Calibri"/>
+              </a:rPr>
+              <a:t>SO anfitrión + motor de contenedores (kernel compartido)</a:t>
+            </a:r>
+          </a:p>
+        </p:txBody>
+      </p:sp>
+      <p:sp>
+        <p:nvSpPr>
+          <p:cNvPr id="16" name="Rounded Rectangle 15"/>
+          <p:cNvSpPr/>
+          <p:nvPr/>
+        </p:nvSpPr>
+        <p:spPr>
+          <a:xfrm>
+            <a:off x="7315200" y="3337560"/>
+            <a:ext cx="1874519" cy="640080"/>
+          </a:xfrm>
+          <a:prstGeom prst="roundRect">
+            <a:avLst>
+              <a:gd name="adj" fmla="val 12000"/>
+            </a:avLst>
+          </a:prstGeom>
+          <a:solidFill>
+            <a:srgbClr val="FFD000"/>
+          </a:solidFill>
+          <a:ln>
+            <a:noFill/>
+          </a:ln>
+        </p:spPr>
+        <p:style>
+          <a:lnRef idx="1">
+            <a:schemeClr val="accent1"/>
+          </a:lnRef>
+          <a:fillRef idx="3">
+            <a:schemeClr val="accent1"/>
+          </a:fillRef>
+          <a:effectRef idx="2">
+            <a:schemeClr val="accent1"/>
+          </a:effectRef>
+          <a:fontRef idx="minor">
+            <a:schemeClr val="lt1"/>
+          </a:fontRef>
+        </p:style>
+        <p:txBody>
+          <a:bodyPr rtlCol="0" anchor="ctr" wrap="square"/>
+          <a:lstStyle/>
+          <a:p>
+            <a:pPr algn="ctr"/>
+            <a:r>
+              <a:rPr sz="1100" b="1" i="0">
+                <a:solidFill>
+                  <a:srgbClr val="095292"/>
+                </a:solidFill>
+                <a:latin typeface="Calibri"/>
+              </a:rPr>
+              <a:t>Contenedor A
+(App A)</a:t>
+            </a:r>
+          </a:p>
+        </p:txBody>
+      </p:sp>
+      <p:sp>
+        <p:nvSpPr>
+          <p:cNvPr id="17" name="Rounded Rectangle 16"/>
+          <p:cNvSpPr/>
+          <p:nvPr/>
+        </p:nvSpPr>
+        <p:spPr>
+          <a:xfrm>
+            <a:off x="9372600" y="3337560"/>
+            <a:ext cx="1874519" cy="640080"/>
+          </a:xfrm>
+          <a:prstGeom prst="roundRect">
+            <a:avLst>
+              <a:gd name="adj" fmla="val 12000"/>
+            </a:avLst>
+          </a:prstGeom>
+          <a:solidFill>
+            <a:srgbClr val="FFD000"/>
+          </a:solidFill>
+          <a:ln>
+            <a:noFill/>
+          </a:ln>
+        </p:spPr>
+        <p:style>
+          <a:lnRef idx="1">
+            <a:schemeClr val="accent1"/>
+          </a:lnRef>
+          <a:fillRef idx="3">
+            <a:schemeClr val="accent1"/>
+          </a:fillRef>
+          <a:effectRef idx="2">
+            <a:schemeClr val="accent1"/>
+          </a:effectRef>
+          <a:fontRef idx="minor">
+            <a:schemeClr val="lt1"/>
+          </a:fontRef>
+        </p:style>
+        <p:txBody>
+          <a:bodyPr rtlCol="0" anchor="ctr" wrap="square"/>
+          <a:lstStyle/>
+          <a:p>
+            <a:pPr algn="ctr"/>
+            <a:r>
+              <a:rPr sz="1100" b="1" i="0">
+                <a:solidFill>
+                  <a:srgbClr val="095292"/>
+                </a:solidFill>
+                <a:latin typeface="Calibri"/>
+              </a:rPr>
+              <a:t>Contenedor B
+(App B)</a:t>
+            </a:r>
+          </a:p>
+        </p:txBody>
+      </p:sp>
+      <p:sp>
+        <p:nvSpPr>
+          <p:cNvPr id="18" name="TextBox 17"/>
+          <p:cNvSpPr txBox="1"/>
+          <p:nvPr/>
+        </p:nvSpPr>
+        <p:spPr>
+          <a:xfrm>
+            <a:off x="457200" y="6263640"/>
+            <a:ext cx="11277295" cy="411480"/>
+          </a:xfrm>
+          <a:prstGeom prst="rect">
+            <a:avLst/>
+          </a:prstGeom>
+          <a:noFill/>
+        </p:spPr>
+        <p:txBody>
+          <a:bodyPr wrap="square">
+            <a:spAutoFit/>
+          </a:bodyPr>
+          <a:lstStyle/>
+          <a:p>
+            <a:r>
+              <a:rPr sz="1100" b="0" i="1">
+                <a:solidFill>
+                  <a:srgbClr val="666666"/>
+                </a:solidFill>
+                <a:latin typeface="Calibri"/>
+              </a:rPr>
+              <a:t>VM: cada instancia carga un SO completo (aislamiento fuerte, más pesado). Contenedor: comparte el kernel del anfitrión y solo empaqueta app + dependencias (arranca en segundos, pesa MB no GB).</a:t>
+            </a:r>
+          </a:p>
+        </p:txBody>
+      </p:sp>
+      <p:sp>
+        <p:nvSpPr>
+          <p:cNvPr id="19" name="TextBox 18"/>
           <p:cNvSpPr txBox="1"/>
           <p:nvPr/>
         </p:nvSpPr>
@@ -12447,21 +11933,142 @@
                 </a:solidFill>
                 <a:latin typeface="Calibri"/>
               </a:rPr>
-              <a:t>Manos a la obra (paso a paso)</a:t>
-            </a:r>
-          </a:p>
-        </p:txBody>
-      </p:sp>
-      <p:sp>
-        <p:nvSpPr>
-          <p:cNvPr id="5" name="TextBox 4"/>
+              <a:t>Maquina virtual vs contenedor — que cambia de verdad</a:t>
+            </a:r>
+          </a:p>
+        </p:txBody>
+      </p:sp>
+      <p:sp>
+        <p:nvSpPr>
+          <p:cNvPr id="5" name="Rounded Rectangle 4"/>
+          <p:cNvSpPr/>
+          <p:nvPr/>
+        </p:nvSpPr>
+        <p:spPr>
+          <a:xfrm>
+            <a:off x="457200" y="1261872"/>
+            <a:ext cx="5478627" cy="5093208"/>
+          </a:xfrm>
+          <a:prstGeom prst="roundRect">
+            <a:avLst>
+              <a:gd name="adj" fmla="val 12000"/>
+            </a:avLst>
+          </a:prstGeom>
+          <a:solidFill>
+            <a:srgbClr val="FBE4E4"/>
+          </a:solidFill>
+          <a:ln>
+            <a:noFill/>
+          </a:ln>
+        </p:spPr>
+        <p:style>
+          <a:lnRef idx="1">
+            <a:schemeClr val="accent1"/>
+          </a:lnRef>
+          <a:fillRef idx="3">
+            <a:schemeClr val="accent1"/>
+          </a:fillRef>
+          <a:effectRef idx="2">
+            <a:schemeClr val="accent1"/>
+          </a:effectRef>
+          <a:fontRef idx="minor">
+            <a:schemeClr val="lt1"/>
+          </a:fontRef>
+        </p:style>
+        <p:txBody>
+          <a:bodyPr rtlCol="0" anchor="ctr"/>
+          <a:lstStyle/>
+          <a:p>
+            <a:pPr algn="ctr"/>
+          </a:p>
+        </p:txBody>
+      </p:sp>
+      <p:sp>
+        <p:nvSpPr>
+          <p:cNvPr id="6" name="Rectangle 5"/>
+          <p:cNvSpPr/>
+          <p:nvPr/>
+        </p:nvSpPr>
+        <p:spPr>
+          <a:xfrm>
+            <a:off x="457200" y="1261872"/>
+            <a:ext cx="5478627" cy="502920"/>
+          </a:xfrm>
+          <a:prstGeom prst="rect">
+            <a:avLst/>
+          </a:prstGeom>
+          <a:solidFill>
+            <a:srgbClr val="A02030"/>
+          </a:solidFill>
+          <a:ln>
+            <a:noFill/>
+          </a:ln>
+        </p:spPr>
+        <p:style>
+          <a:lnRef idx="1">
+            <a:schemeClr val="accent1"/>
+          </a:lnRef>
+          <a:fillRef idx="3">
+            <a:schemeClr val="accent1"/>
+          </a:fillRef>
+          <a:effectRef idx="2">
+            <a:schemeClr val="accent1"/>
+          </a:effectRef>
+          <a:fontRef idx="minor">
+            <a:schemeClr val="lt1"/>
+          </a:fontRef>
+        </p:style>
+        <p:txBody>
+          <a:bodyPr rtlCol="0" anchor="ctr"/>
+          <a:lstStyle/>
+          <a:p>
+            <a:pPr algn="ctr"/>
+          </a:p>
+        </p:txBody>
+      </p:sp>
+      <p:sp>
+        <p:nvSpPr>
+          <p:cNvPr id="7" name="TextBox 6"/>
           <p:cNvSpPr txBox="1"/>
           <p:nvPr/>
         </p:nvSpPr>
         <p:spPr>
           <a:xfrm>
-            <a:off x="457200" y="1170432"/>
-            <a:ext cx="11277295" cy="5230368"/>
+            <a:off x="594360" y="1353312"/>
+            <a:ext cx="5204307" cy="365760"/>
+          </a:xfrm>
+          <a:prstGeom prst="rect">
+            <a:avLst/>
+          </a:prstGeom>
+          <a:noFill/>
+        </p:spPr>
+        <p:txBody>
+          <a:bodyPr wrap="square" anchor="ctr"/>
+          <a:lstStyle/>
+          <a:p>
+            <a:pPr algn="ctr"/>
+            <a:r>
+              <a:rPr sz="1600" b="1" i="0">
+                <a:solidFill>
+                  <a:srgbClr val="FFFFFF"/>
+                </a:solidFill>
+                <a:latin typeface="Calibri"/>
+              </a:rPr>
+              <a:t>Maquina virtual</a:t>
+            </a:r>
+          </a:p>
+        </p:txBody>
+      </p:sp>
+      <p:sp>
+        <p:nvSpPr>
+          <p:cNvPr id="8" name="TextBox 7"/>
+          <p:cNvSpPr txBox="1"/>
+          <p:nvPr/>
+        </p:nvSpPr>
+        <p:spPr>
+          <a:xfrm>
+            <a:off x="621792" y="1901952"/>
+            <a:ext cx="5158587" cy="4498848"/>
           </a:xfrm>
           <a:prstGeom prst="rect">
             <a:avLst/>
@@ -12480,22 +12087,31 @@
               </a:spcAft>
             </a:pPr>
             <a:r>
-              <a:rPr sz="2000" b="1" i="0">
-                <a:solidFill>
-                  <a:srgbClr val="333333"/>
-                </a:solidFill>
-                <a:latin typeface="Calibri"/>
-              </a:rPr>
-              <a:t>1.</a:t>
-            </a:r>
-            <a:r>
-              <a:rPr sz="2000" b="0" i="0">
-                <a:solidFill>
-                  <a:srgbClr val="333333"/>
-                </a:solidFill>
-                <a:latin typeface="Calibri"/>
-              </a:rPr>
-              <a:t> Paso 1: elija en la pregunta 8 cual servicio de su C4 Context va a contenedorizar y justifiquelo en 2 o 3 frases; escriba a continuacion el Dockerfile completo con la imagen base ligera y con etiqueta fija, el COPY de dependencias antes del COPY del codigo, el EXPOSE y el CMD, verificando que no copie el .env ni ninguna clave.</a:t>
+              <a:rPr sz="1500" b="0" i="0">
+                <a:solidFill>
+                  <a:srgbClr val="333333"/>
+                </a:solidFill>
+                <a:latin typeface="Calibri"/>
+              </a:rPr>
+              <a:t>–   Cada instancia trae un </a:t>
+            </a:r>
+            <a:r>
+              <a:rPr sz="1500" b="1" i="0">
+                <a:solidFill>
+                  <a:srgbClr val="333333"/>
+                </a:solidFill>
+                <a:latin typeface="Calibri"/>
+              </a:rPr>
+              <a:t>SO completo</a:t>
+            </a:r>
+            <a:r>
+              <a:rPr sz="1500" b="0" i="0">
+                <a:solidFill>
+                  <a:srgbClr val="333333"/>
+                </a:solidFill>
+                <a:latin typeface="Calibri"/>
+              </a:rPr>
+              <a:t> (kernel propio)</a:t>
             </a:r>
           </a:p>
           <a:p>
@@ -12505,7 +12121,226 @@
               </a:spcAft>
             </a:pPr>
             <a:r>
-              <a:rPr sz="2000" b="0" i="0">
+              <a:rPr sz="1500" b="0" i="0">
+                <a:solidFill>
+                  <a:srgbClr val="333333"/>
+                </a:solidFill>
+                <a:latin typeface="Calibri"/>
+              </a:rPr>
+              <a:t>–   Aislamiento fuerte a nivel de hardware virtual</a:t>
+            </a:r>
+          </a:p>
+          <a:p>
+            <a:pPr>
+              <a:spcAft>
+                <a:spcPts val="800"/>
+              </a:spcAft>
+            </a:pPr>
+            <a:r>
+              <a:rPr sz="1500" b="0" i="0">
+                <a:solidFill>
+                  <a:srgbClr val="333333"/>
+                </a:solidFill>
+                <a:latin typeface="Calibri"/>
+              </a:rPr>
+              <a:t>–   Arranque en </a:t>
+            </a:r>
+            <a:r>
+              <a:rPr sz="1500" b="1" i="0">
+                <a:solidFill>
+                  <a:srgbClr val="333333"/>
+                </a:solidFill>
+                <a:latin typeface="Calibri"/>
+              </a:rPr>
+              <a:t>minutos</a:t>
+            </a:r>
+            <a:r>
+              <a:rPr sz="1500" b="0" i="0">
+                <a:solidFill>
+                  <a:srgbClr val="333333"/>
+                </a:solidFill>
+                <a:latin typeface="Calibri"/>
+              </a:rPr>
+              <a:t>, tamaño en </a:t>
+            </a:r>
+            <a:r>
+              <a:rPr sz="1500" b="1" i="0">
+                <a:solidFill>
+                  <a:srgbClr val="333333"/>
+                </a:solidFill>
+                <a:latin typeface="Calibri"/>
+              </a:rPr>
+              <a:t>GB</a:t>
+            </a:r>
+          </a:p>
+          <a:p>
+            <a:pPr>
+              <a:spcAft>
+                <a:spcPts val="800"/>
+              </a:spcAft>
+            </a:pPr>
+            <a:r>
+              <a:rPr sz="1500" b="0" i="0">
+                <a:solidFill>
+                  <a:srgbClr val="333333"/>
+                </a:solidFill>
+                <a:latin typeface="Calibri"/>
+              </a:rPr>
+              <a:t>–   Util cuando se necesitan SO distintos</a:t>
+            </a:r>
+          </a:p>
+        </p:txBody>
+      </p:sp>
+      <p:sp>
+        <p:nvSpPr>
+          <p:cNvPr id="9" name="Rounded Rectangle 8"/>
+          <p:cNvSpPr/>
+          <p:nvPr/>
+        </p:nvSpPr>
+        <p:spPr>
+          <a:xfrm>
+            <a:off x="6255867" y="1261872"/>
+            <a:ext cx="5478627" cy="5093208"/>
+          </a:xfrm>
+          <a:prstGeom prst="roundRect">
+            <a:avLst>
+              <a:gd name="adj" fmla="val 12000"/>
+            </a:avLst>
+          </a:prstGeom>
+          <a:solidFill>
+            <a:srgbClr val="E8F4FA"/>
+          </a:solidFill>
+          <a:ln>
+            <a:noFill/>
+          </a:ln>
+        </p:spPr>
+        <p:style>
+          <a:lnRef idx="1">
+            <a:schemeClr val="accent1"/>
+          </a:lnRef>
+          <a:fillRef idx="3">
+            <a:schemeClr val="accent1"/>
+          </a:fillRef>
+          <a:effectRef idx="2">
+            <a:schemeClr val="accent1"/>
+          </a:effectRef>
+          <a:fontRef idx="minor">
+            <a:schemeClr val="lt1"/>
+          </a:fontRef>
+        </p:style>
+        <p:txBody>
+          <a:bodyPr rtlCol="0" anchor="ctr"/>
+          <a:lstStyle/>
+          <a:p>
+            <a:pPr algn="ctr"/>
+          </a:p>
+        </p:txBody>
+      </p:sp>
+      <p:sp>
+        <p:nvSpPr>
+          <p:cNvPr id="10" name="Rectangle 9"/>
+          <p:cNvSpPr/>
+          <p:nvPr/>
+        </p:nvSpPr>
+        <p:spPr>
+          <a:xfrm>
+            <a:off x="6255867" y="1261872"/>
+            <a:ext cx="5478627" cy="502920"/>
+          </a:xfrm>
+          <a:prstGeom prst="rect">
+            <a:avLst/>
+          </a:prstGeom>
+          <a:solidFill>
+            <a:srgbClr val="095292"/>
+          </a:solidFill>
+          <a:ln>
+            <a:noFill/>
+          </a:ln>
+        </p:spPr>
+        <p:style>
+          <a:lnRef idx="1">
+            <a:schemeClr val="accent1"/>
+          </a:lnRef>
+          <a:fillRef idx="3">
+            <a:schemeClr val="accent1"/>
+          </a:fillRef>
+          <a:effectRef idx="2">
+            <a:schemeClr val="accent1"/>
+          </a:effectRef>
+          <a:fontRef idx="minor">
+            <a:schemeClr val="lt1"/>
+          </a:fontRef>
+        </p:style>
+        <p:txBody>
+          <a:bodyPr rtlCol="0" anchor="ctr"/>
+          <a:lstStyle/>
+          <a:p>
+            <a:pPr algn="ctr"/>
+          </a:p>
+        </p:txBody>
+      </p:sp>
+      <p:sp>
+        <p:nvSpPr>
+          <p:cNvPr id="11" name="TextBox 10"/>
+          <p:cNvSpPr txBox="1"/>
+          <p:nvPr/>
+        </p:nvSpPr>
+        <p:spPr>
+          <a:xfrm>
+            <a:off x="6393027" y="1353312"/>
+            <a:ext cx="5204307" cy="365760"/>
+          </a:xfrm>
+          <a:prstGeom prst="rect">
+            <a:avLst/>
+          </a:prstGeom>
+          <a:noFill/>
+        </p:spPr>
+        <p:txBody>
+          <a:bodyPr wrap="square" anchor="ctr"/>
+          <a:lstStyle/>
+          <a:p>
+            <a:pPr algn="ctr"/>
+            <a:r>
+              <a:rPr sz="1600" b="1" i="0">
+                <a:solidFill>
+                  <a:srgbClr val="FFFFFF"/>
+                </a:solidFill>
+                <a:latin typeface="Calibri"/>
+              </a:rPr>
+              <a:t>Contenedor</a:t>
+            </a:r>
+          </a:p>
+        </p:txBody>
+      </p:sp>
+      <p:sp>
+        <p:nvSpPr>
+          <p:cNvPr id="12" name="TextBox 11"/>
+          <p:cNvSpPr txBox="1"/>
+          <p:nvPr/>
+        </p:nvSpPr>
+        <p:spPr>
+          <a:xfrm>
+            <a:off x="6420459" y="1901952"/>
+            <a:ext cx="5158587" cy="4498848"/>
+          </a:xfrm>
+          <a:prstGeom prst="rect">
+            <a:avLst/>
+          </a:prstGeom>
+          <a:noFill/>
+        </p:spPr>
+        <p:txBody>
+          <a:bodyPr wrap="square">
+            <a:spAutoFit/>
+          </a:bodyPr>
+          <a:lstStyle/>
+          <a:p>
+            <a:pPr>
+              <a:spcAft>
+                <a:spcPts val="800"/>
+              </a:spcAft>
+            </a:pPr>
+            <a:r>
+              <a:rPr sz="1500" b="0" i="0">
                 <a:solidFill>
                   <a:srgbClr val="333333"/>
                 </a:solidFill>
@@ -12514,22 +12349,22 @@
               <a:t>–   </a:t>
             </a:r>
             <a:r>
-              <a:rPr sz="2000" b="1" i="0">
-                <a:solidFill>
-                  <a:srgbClr val="333333"/>
-                </a:solidFill>
-                <a:latin typeface="Calibri"/>
-              </a:rPr>
-              <a:t>2.</a:t>
-            </a:r>
-            <a:r>
-              <a:rPr sz="2000" b="0" i="0">
-                <a:solidFill>
-                  <a:srgbClr val="333333"/>
-                </a:solidFill>
-                <a:latin typeface="Calibri"/>
-              </a:rPr>
-              <a:t> Paso 2: explique en la pregunta 9, sobre su propio Dockerfile, la diferencia entre imagen y contenedor, que instrucciones de SU archivo crean capa, por que el orden aprovecha el cache y en que se diferencia su contenedor de una maquina virtual; verifique que no escribio que un contenedor es una VM ligera.</a:t>
+              <a:rPr sz="1500" b="1" i="0">
+                <a:solidFill>
+                  <a:srgbClr val="333333"/>
+                </a:solidFill>
+                <a:latin typeface="Calibri"/>
+              </a:rPr>
+              <a:t>Comparte el kernel</a:t>
+            </a:r>
+            <a:r>
+              <a:rPr sz="1500" b="0" i="0">
+                <a:solidFill>
+                  <a:srgbClr val="333333"/>
+                </a:solidFill>
+                <a:latin typeface="Calibri"/>
+              </a:rPr>
+              <a:t> del anfitrion</a:t>
             </a:r>
           </a:p>
           <a:p>
@@ -12539,31 +12374,13 @@
               </a:spcAft>
             </a:pPr>
             <a:r>
-              <a:rPr sz="2000" b="0" i="0">
-                <a:solidFill>
-                  <a:srgbClr val="333333"/>
-                </a:solidFill>
-                <a:latin typeface="Calibri"/>
-              </a:rPr>
-              <a:t>–   </a:t>
-            </a:r>
-            <a:r>
-              <a:rPr sz="2000" b="1" i="0">
-                <a:solidFill>
-                  <a:srgbClr val="333333"/>
-                </a:solidFill>
-                <a:latin typeface="Calibri"/>
-              </a:rPr>
-              <a:t>3.</a:t>
-            </a:r>
-            <a:r>
-              <a:rPr sz="2000" b="0" i="0">
-                <a:solidFill>
-                  <a:srgbClr val="333333"/>
-                </a:solidFill>
-                <a:latin typeface="Calibri"/>
-              </a:rPr>
-              <a:t> Paso 3: describa en la pregunta 10 el ciclo completo con los comandos exactos de build y de run, explicando que lado del mapeo de puertos es el anfitrion y que lado el contenedor, y cierre con el contrato del endpoint de salud (ruta, codigo de estado y cuerpo); verifique que el puerto sea el mismo que puso en el EXPOSE.</a:t>
+              <a:rPr sz="1500" b="0" i="0">
+                <a:solidFill>
+                  <a:srgbClr val="333333"/>
+                </a:solidFill>
+                <a:latin typeface="Calibri"/>
+              </a:rPr>
+              <a:t>–   Empaqueta solo app + dependencias</a:t>
             </a:r>
           </a:p>
           <a:p>
@@ -12573,38 +12390,63 @@
               </a:spcAft>
             </a:pPr>
             <a:r>
-              <a:rPr sz="2000" b="0" i="0">
-                <a:solidFill>
-                  <a:srgbClr val="333333"/>
-                </a:solidFill>
-                <a:latin typeface="Calibri"/>
-              </a:rPr>
-              <a:t>–   </a:t>
-            </a:r>
-            <a:r>
-              <a:rPr sz="2000" b="1" i="0">
-                <a:solidFill>
-                  <a:srgbClr val="333333"/>
-                </a:solidFill>
-                <a:latin typeface="Calibri"/>
-              </a:rPr>
-              <a:t>4.</a:t>
-            </a:r>
-            <a:r>
-              <a:rPr sz="2000" b="0" i="0">
-                <a:solidFill>
-                  <a:srgbClr val="333333"/>
-                </a:solidFill>
-                <a:latin typeface="Calibri"/>
-              </a:rPr>
-              <a:t> Paso 4: ejecute de verdad el ciclo en Killercoda y reporte en la pregunta 11 la tabla de 5 filas con la salida real pegada textualmente, la descripcion de la captura con prompt, docker ps y hora del sistema, y una fila de incidente; recuerde que la sesion caduca a 1 hora, asi que capture la evidencia ANTES de cerrarla.</a:t>
-            </a:r>
-          </a:p>
-        </p:txBody>
-      </p:sp>
-      <p:sp>
-        <p:nvSpPr>
-          <p:cNvPr id="6" name="TextBox 5"/>
+              <a:rPr sz="1500" b="0" i="0">
+                <a:solidFill>
+                  <a:srgbClr val="333333"/>
+                </a:solidFill>
+                <a:latin typeface="Calibri"/>
+              </a:rPr>
+              <a:t>–   Arranque en </a:t>
+            </a:r>
+            <a:r>
+              <a:rPr sz="1500" b="1" i="0">
+                <a:solidFill>
+                  <a:srgbClr val="333333"/>
+                </a:solidFill>
+                <a:latin typeface="Calibri"/>
+              </a:rPr>
+              <a:t>segundos</a:t>
+            </a:r>
+            <a:r>
+              <a:rPr sz="1500" b="0" i="0">
+                <a:solidFill>
+                  <a:srgbClr val="333333"/>
+                </a:solidFill>
+                <a:latin typeface="Calibri"/>
+              </a:rPr>
+              <a:t>, tamaño en </a:t>
+            </a:r>
+            <a:r>
+              <a:rPr sz="1500" b="1" i="0">
+                <a:solidFill>
+                  <a:srgbClr val="333333"/>
+                </a:solidFill>
+                <a:latin typeface="Calibri"/>
+              </a:rPr>
+              <a:t>MB</a:t>
+            </a:r>
+          </a:p>
+          <a:p>
+            <a:pPr>
+              <a:spcAft>
+                <a:spcPts val="800"/>
+              </a:spcAft>
+            </a:pPr>
+            <a:r>
+              <a:rPr sz="1500" b="0" i="0">
+                <a:solidFill>
+                  <a:srgbClr val="333333"/>
+                </a:solidFill>
+                <a:latin typeface="Calibri"/>
+              </a:rPr>
+              <a:t>–   Util para desplegar el mismo servicio muchas veces</a:t>
+            </a:r>
+          </a:p>
+        </p:txBody>
+      </p:sp>
+      <p:sp>
+        <p:nvSpPr>
+          <p:cNvPr id="13" name="TextBox 12"/>
           <p:cNvSpPr txBox="1"/>
           <p:nvPr/>
         </p:nvSpPr>
@@ -12778,7 +12620,7 @@
                 </a:solidFill>
                 <a:latin typeface="Calibri"/>
               </a:rPr>
-              <a:t>Para continuar (PI)</a:t>
+              <a:t>Dockerfile minimo del stub CloudLite</a:t>
             </a:r>
           </a:p>
         </p:txBody>
@@ -12792,7 +12634,7 @@
         <p:spPr>
           <a:xfrm>
             <a:off x="457200" y="1261872"/>
-            <a:ext cx="11277295" cy="1051560"/>
+            <a:ext cx="11277295" cy="4773168"/>
           </a:xfrm>
           <a:prstGeom prst="roundRect">
             <a:avLst>
@@ -12800,7 +12642,7 @@
             </a:avLst>
           </a:prstGeom>
           <a:solidFill>
-            <a:srgbClr val="E8F4FA"/>
+            <a:srgbClr val="1E2A38"/>
           </a:solidFill>
           <a:ln>
             <a:noFill/>
@@ -12837,13 +12679,13 @@
         <p:spPr>
           <a:xfrm>
             <a:off x="457200" y="1261872"/>
-            <a:ext cx="128016" cy="1051560"/>
+            <a:ext cx="11277295" cy="320040"/>
           </a:xfrm>
           <a:prstGeom prst="rect">
             <a:avLst/>
           </a:prstGeom>
           <a:solidFill>
-            <a:srgbClr val="269CCB"/>
+            <a:srgbClr val="095292"/>
           </a:solidFill>
           <a:ln>
             <a:noFill/>
@@ -12879,8 +12721,40 @@
         </p:nvSpPr>
         <p:spPr>
           <a:xfrm>
-            <a:off x="777240" y="1399031"/>
-            <a:ext cx="10774375" cy="822959"/>
+            <a:off x="685800" y="1307592"/>
+            <a:ext cx="10820095" cy="256032"/>
+          </a:xfrm>
+          <a:prstGeom prst="rect">
+            <a:avLst/>
+          </a:prstGeom>
+          <a:noFill/>
+        </p:spPr>
+        <p:txBody>
+          <a:bodyPr wrap="square" anchor="ctr"/>
+          <a:lstStyle/>
+          <a:p>
+            <a:r>
+              <a:rPr sz="1000" b="1" i="0">
+                <a:solidFill>
+                  <a:srgbClr val="269CCB"/>
+                </a:solidFill>
+                <a:latin typeface="Calibri"/>
+              </a:rPr>
+              <a:t>● ● ●</a:t>
+            </a:r>
+          </a:p>
+        </p:txBody>
+      </p:sp>
+      <p:sp>
+        <p:nvSpPr>
+          <p:cNvPr id="8" name="TextBox 7"/>
+          <p:cNvSpPr txBox="1"/>
+          <p:nvPr/>
+        </p:nvSpPr>
+        <p:spPr>
+          <a:xfrm>
+            <a:off x="777240" y="1719072"/>
+            <a:ext cx="10637215" cy="4133087"/>
           </a:xfrm>
           <a:prstGeom prst="rect">
             <a:avLst/>
@@ -12893,132 +12767,241 @@
           </a:bodyPr>
           <a:lstStyle/>
           <a:p>
-            <a:r>
-              <a:rPr sz="1200" b="1" i="0">
-                <a:solidFill>
-                  <a:srgbClr val="269CCB"/>
-                </a:solidFill>
-                <a:latin typeface="Calibri"/>
-              </a:rPr>
-              <a:t>Info</a:t>
-            </a:r>
-          </a:p>
-          <a:p>
-            <a:pPr>
-              <a:spcBef>
+            <a:pPr>
+              <a:spcAft>
                 <a:spcPts val="400"/>
-              </a:spcBef>
+              </a:spcAft>
             </a:pPr>
             <a:r>
               <a:rPr sz="1400" b="0" i="0">
                 <a:solidFill>
-                  <a:srgbClr val="333333"/>
-                </a:solidFill>
-                <a:latin typeface="Calibri"/>
-              </a:rPr>
-              <a:t>Entregable: Dockerfile del stub + bitácora de 5 comandos con la salida real + captura del lab</a:t>
-            </a:r>
-          </a:p>
-        </p:txBody>
-      </p:sp>
-      <p:sp>
-        <p:nvSpPr>
-          <p:cNvPr id="8" name="Rounded Rectangle 7"/>
-          <p:cNvSpPr/>
-          <p:nvPr/>
-        </p:nvSpPr>
-        <p:spPr>
-          <a:xfrm>
-            <a:off x="457200" y="2478024"/>
-            <a:ext cx="11277295" cy="1051560"/>
-          </a:xfrm>
-          <a:prstGeom prst="roundRect">
-            <a:avLst>
-              <a:gd name="adj" fmla="val 12000"/>
-            </a:avLst>
-          </a:prstGeom>
-          <a:solidFill>
-            <a:srgbClr val="FFF8E1"/>
-          </a:solidFill>
-          <a:ln>
-            <a:noFill/>
-          </a:ln>
-        </p:spPr>
-        <p:style>
-          <a:lnRef idx="1">
-            <a:schemeClr val="accent1"/>
-          </a:lnRef>
-          <a:fillRef idx="3">
-            <a:schemeClr val="accent1"/>
-          </a:fillRef>
-          <a:effectRef idx="2">
-            <a:schemeClr val="accent1"/>
-          </a:effectRef>
-          <a:fontRef idx="minor">
-            <a:schemeClr val="lt1"/>
-          </a:fontRef>
-        </p:style>
-        <p:txBody>
-          <a:bodyPr rtlCol="0" anchor="ctr"/>
-          <a:lstStyle/>
-          <a:p>
-            <a:pPr algn="ctr"/>
-          </a:p>
-        </p:txBody>
-      </p:sp>
-      <p:sp>
-        <p:nvSpPr>
-          <p:cNvPr id="9" name="Rectangle 8"/>
-          <p:cNvSpPr/>
-          <p:nvPr/>
-        </p:nvSpPr>
-        <p:spPr>
-          <a:xfrm>
-            <a:off x="457200" y="2478024"/>
-            <a:ext cx="128016" cy="1051560"/>
-          </a:xfrm>
-          <a:prstGeom prst="rect">
-            <a:avLst/>
-          </a:prstGeom>
-          <a:solidFill>
-            <a:srgbClr val="FFD000"/>
-          </a:solidFill>
-          <a:ln>
-            <a:noFill/>
-          </a:ln>
-        </p:spPr>
-        <p:style>
-          <a:lnRef idx="1">
-            <a:schemeClr val="accent1"/>
-          </a:lnRef>
-          <a:fillRef idx="3">
-            <a:schemeClr val="accent1"/>
-          </a:fillRef>
-          <a:effectRef idx="2">
-            <a:schemeClr val="accent1"/>
-          </a:effectRef>
-          <a:fontRef idx="minor">
-            <a:schemeClr val="lt1"/>
-          </a:fontRef>
-        </p:style>
-        <p:txBody>
-          <a:bodyPr rtlCol="0" anchor="ctr"/>
-          <a:lstStyle/>
-          <a:p>
-            <a:pPr algn="ctr"/>
-          </a:p>
-        </p:txBody>
-      </p:sp>
-      <p:sp>
-        <p:nvSpPr>
-          <p:cNvPr id="10" name="TextBox 9"/>
+                  <a:srgbClr val="FFFFFF"/>
+                </a:solidFill>
+                <a:latin typeface="Calibri"/>
+              </a:rPr>
+              <a:t>FROM node:20-alpine          # base ligera y etiqueta FIJA: nunca latest</a:t>
+            </a:r>
+          </a:p>
+          <a:p>
+            <a:pPr>
+              <a:spcAft>
+                <a:spcPts val="400"/>
+              </a:spcAft>
+            </a:pPr>
+            <a:r>
+              <a:rPr sz="1400" b="0" i="0">
+                <a:solidFill>
+                  <a:srgbClr val="FFFFFF"/>
+                </a:solidFill>
+                <a:latin typeface="Calibri"/>
+              </a:rPr>
+              <a:t>WORKDIR /app</a:t>
+            </a:r>
+          </a:p>
+          <a:p>
+            <a:pPr>
+              <a:spcAft>
+                <a:spcPts val="400"/>
+              </a:spcAft>
+            </a:pPr>
+            <a:r>
+              <a:rPr sz="1400" b="0" i="0">
+                <a:solidFill>
+                  <a:srgbClr val="FFFFFF"/>
+                </a:solidFill>
+                <a:latin typeface="Calibri"/>
+              </a:rPr>
+              <a:t>COPY package*.json ./        # dependencias PRIMERO: cambian poco</a:t>
+            </a:r>
+          </a:p>
+          <a:p>
+            <a:pPr>
+              <a:spcAft>
+                <a:spcPts val="400"/>
+              </a:spcAft>
+            </a:pPr>
+            <a:r>
+              <a:rPr sz="1400" b="0" i="0">
+                <a:solidFill>
+                  <a:srgbClr val="FFFFFF"/>
+                </a:solidFill>
+                <a:latin typeface="Calibri"/>
+              </a:rPr>
+              <a:t>RUN npm ci --omit=dev        # se instalan DENTRO de la imagen</a:t>
+            </a:r>
+          </a:p>
+          <a:p>
+            <a:pPr>
+              <a:spcAft>
+                <a:spcPts val="400"/>
+              </a:spcAft>
+            </a:pPr>
+            <a:r>
+              <a:rPr sz="1400" b="0" i="0">
+                <a:solidFill>
+                  <a:srgbClr val="FFFFFF"/>
+                </a:solidFill>
+                <a:latin typeface="Calibri"/>
+              </a:rPr>
+              <a:t>COPY..                     # el codigo despues: cambia en cada commit</a:t>
+            </a:r>
+          </a:p>
+          <a:p>
+            <a:pPr>
+              <a:spcAft>
+                <a:spcPts val="400"/>
+              </a:spcAft>
+            </a:pPr>
+            <a:r>
+              <a:rPr sz="1400" b="0" i="0">
+                <a:solidFill>
+                  <a:srgbClr val="FFFFFF"/>
+                </a:solidFill>
+                <a:latin typeface="Calibri"/>
+              </a:rPr>
+              <a:t>EXPOSE 8080                  # documenta el puerto; NO lo publica</a:t>
+            </a:r>
+          </a:p>
+          <a:p>
+            <a:pPr>
+              <a:spcAft>
+                <a:spcPts val="400"/>
+              </a:spcAft>
+            </a:pPr>
+            <a:r>
+              <a:rPr sz="1400" b="0" i="0">
+                <a:solidFill>
+                  <a:srgbClr val="FFFFFF"/>
+                </a:solidFill>
+                <a:latin typeface="Calibri"/>
+              </a:rPr>
+              <a:t>CMD ["node", "server.js"]    # UN proceso principal por contenedor</a:t>
+            </a:r>
+          </a:p>
+          <a:p>
+            <a:pPr>
+              <a:spcAft>
+                <a:spcPts val="400"/>
+              </a:spcAft>
+            </a:pPr>
+            <a:r>
+              <a:rPr sz="1400" b="0" i="0">
+                <a:solidFill>
+                  <a:srgbClr val="FFFFFF"/>
+                </a:solidFill>
+                <a:latin typeface="Calibri"/>
+              </a:rPr>
+              <a:t/>
+            </a:r>
+          </a:p>
+          <a:p>
+            <a:pPr>
+              <a:spcAft>
+                <a:spcPts val="400"/>
+              </a:spcAft>
+            </a:pPr>
+            <a:r>
+              <a:rPr sz="1400" b="0" i="0">
+                <a:solidFill>
+                  <a:srgbClr val="FFFFFF"/>
+                </a:solidFill>
+                <a:latin typeface="Calibri"/>
+              </a:rPr>
+              <a:t># .dockerignore  &lt;- archivo aparte, en la misma carpeta que el Dockerfile.</a:t>
+            </a:r>
+          </a:p>
+          <a:p>
+            <a:pPr>
+              <a:spcAft>
+                <a:spcPts val="400"/>
+              </a:spcAft>
+            </a:pPr>
+            <a:r>
+              <a:rPr sz="1400" b="0" i="0">
+                <a:solidFill>
+                  <a:srgbClr val="FFFFFF"/>
+                </a:solidFill>
+                <a:latin typeface="Calibri"/>
+              </a:rPr>
+              <a:t># Sin el, el COPY.. de arriba se lleva el .env a las capas de la imagen.</a:t>
+            </a:r>
+          </a:p>
+          <a:p>
+            <a:pPr>
+              <a:spcAft>
+                <a:spcPts val="400"/>
+              </a:spcAft>
+            </a:pPr>
+            <a:r>
+              <a:rPr sz="1400" b="0" i="0">
+                <a:solidFill>
+                  <a:srgbClr val="FFFFFF"/>
+                </a:solidFill>
+                <a:latin typeface="Calibri"/>
+              </a:rPr>
+              <a:t>node_modules</a:t>
+            </a:r>
+          </a:p>
+          <a:p>
+            <a:pPr>
+              <a:spcAft>
+                <a:spcPts val="400"/>
+              </a:spcAft>
+            </a:pPr>
+            <a:r>
+              <a:rPr sz="1400" b="0" i="0">
+                <a:solidFill>
+                  <a:srgbClr val="FFFFFF"/>
+                </a:solidFill>
+                <a:latin typeface="Calibri"/>
+              </a:rPr>
+              <a:t>.env</a:t>
+            </a:r>
+          </a:p>
+          <a:p>
+            <a:pPr>
+              <a:spcAft>
+                <a:spcPts val="400"/>
+              </a:spcAft>
+            </a:pPr>
+            <a:r>
+              <a:rPr sz="1400" b="0" i="0">
+                <a:solidFill>
+                  <a:srgbClr val="FFFFFF"/>
+                </a:solidFill>
+                <a:latin typeface="Calibri"/>
+              </a:rPr>
+              <a:t>.env.*</a:t>
+            </a:r>
+          </a:p>
+          <a:p>
+            <a:pPr>
+              <a:spcAft>
+                <a:spcPts val="400"/>
+              </a:spcAft>
+            </a:pPr>
+            <a:r>
+              <a:rPr sz="1400" b="0" i="0">
+                <a:solidFill>
+                  <a:srgbClr val="FFFFFF"/>
+                </a:solidFill>
+                <a:latin typeface="Calibri"/>
+              </a:rPr>
+              <a:t>.git</a:t>
+            </a:r>
+          </a:p>
+        </p:txBody>
+      </p:sp>
+      <p:sp>
+        <p:nvSpPr>
+          <p:cNvPr id="9" name="TextBox 8"/>
           <p:cNvSpPr txBox="1"/>
           <p:nvPr/>
         </p:nvSpPr>
         <p:spPr>
           <a:xfrm>
-            <a:off x="777240" y="2615184"/>
-            <a:ext cx="10774375" cy="822959"/>
+            <a:off x="457200" y="6080760"/>
+            <a:ext cx="11277295" cy="320040"/>
           </a:xfrm>
           <a:prstGeom prst="rect">
             <a:avLst/>
@@ -13031,175 +13014,22 @@
           </a:bodyPr>
           <a:lstStyle/>
           <a:p>
-            <a:r>
-              <a:rPr sz="1200" b="1" i="0">
-                <a:solidFill>
-                  <a:srgbClr val="FFD000"/>
-                </a:solidFill>
-                <a:latin typeface="Calibri"/>
-              </a:rPr>
-              <a:t>Aclaración</a:t>
-            </a:r>
-          </a:p>
-          <a:p>
-            <a:pPr>
-              <a:spcBef>
-                <a:spcPts val="400"/>
-              </a:spcBef>
-            </a:pPr>
-            <a:r>
-              <a:rPr sz="1400" b="0" i="0">
-                <a:solidFill>
-                  <a:srgbClr val="333333"/>
-                </a:solidFill>
-                <a:latin typeface="Calibri"/>
-              </a:rPr>
-              <a:t>Subir evidencias al paquete CloudLite (Drive/repo) y a la plataforma del curso en la fecha que indique el docente.</a:t>
-            </a:r>
-          </a:p>
-        </p:txBody>
-      </p:sp>
-      <p:sp>
-        <p:nvSpPr>
-          <p:cNvPr id="11" name="Rounded Rectangle 10"/>
-          <p:cNvSpPr/>
-          <p:nvPr/>
-        </p:nvSpPr>
-        <p:spPr>
-          <a:xfrm>
-            <a:off x="457200" y="3694176"/>
-            <a:ext cx="11277295" cy="1051560"/>
-          </a:xfrm>
-          <a:prstGeom prst="roundRect">
-            <a:avLst>
-              <a:gd name="adj" fmla="val 12000"/>
-            </a:avLst>
-          </a:prstGeom>
-          <a:solidFill>
-            <a:srgbClr val="FBE4E4"/>
-          </a:solidFill>
-          <a:ln>
-            <a:noFill/>
-          </a:ln>
-        </p:spPr>
-        <p:style>
-          <a:lnRef idx="1">
-            <a:schemeClr val="accent1"/>
-          </a:lnRef>
-          <a:fillRef idx="3">
-            <a:schemeClr val="accent1"/>
-          </a:fillRef>
-          <a:effectRef idx="2">
-            <a:schemeClr val="accent1"/>
-          </a:effectRef>
-          <a:fontRef idx="minor">
-            <a:schemeClr val="lt1"/>
-          </a:fontRef>
-        </p:style>
-        <p:txBody>
-          <a:bodyPr rtlCol="0" anchor="ctr"/>
-          <a:lstStyle/>
-          <a:p>
             <a:pPr algn="ctr"/>
-          </a:p>
-        </p:txBody>
-      </p:sp>
-      <p:sp>
-        <p:nvSpPr>
-          <p:cNvPr id="12" name="Rectangle 11"/>
-          <p:cNvSpPr/>
-          <p:nvPr/>
-        </p:nvSpPr>
-        <p:spPr>
-          <a:xfrm>
-            <a:off x="457200" y="3694176"/>
-            <a:ext cx="128016" cy="1051560"/>
-          </a:xfrm>
-          <a:prstGeom prst="rect">
-            <a:avLst/>
-          </a:prstGeom>
-          <a:solidFill>
-            <a:srgbClr val="A02030"/>
-          </a:solidFill>
-          <a:ln>
-            <a:noFill/>
-          </a:ln>
-        </p:spPr>
-        <p:style>
-          <a:lnRef idx="1">
-            <a:schemeClr val="accent1"/>
-          </a:lnRef>
-          <a:fillRef idx="3">
-            <a:schemeClr val="accent1"/>
-          </a:fillRef>
-          <a:effectRef idx="2">
-            <a:schemeClr val="accent1"/>
-          </a:effectRef>
-          <a:fontRef idx="minor">
-            <a:schemeClr val="lt1"/>
-          </a:fontRef>
-        </p:style>
-        <p:txBody>
-          <a:bodyPr rtlCol="0" anchor="ctr"/>
-          <a:lstStyle/>
-          <a:p>
-            <a:pPr algn="ctr"/>
-          </a:p>
-        </p:txBody>
-      </p:sp>
-      <p:sp>
-        <p:nvSpPr>
-          <p:cNvPr id="13" name="TextBox 12"/>
-          <p:cNvSpPr txBox="1"/>
-          <p:nvPr/>
-        </p:nvSpPr>
-        <p:spPr>
-          <a:xfrm>
-            <a:off x="777240" y="3831336"/>
-            <a:ext cx="10774375" cy="822959"/>
-          </a:xfrm>
-          <a:prstGeom prst="rect">
-            <a:avLst/>
-          </a:prstGeom>
-          <a:noFill/>
-        </p:spPr>
-        <p:txBody>
-          <a:bodyPr wrap="square">
-            <a:spAutoFit/>
-          </a:bodyPr>
-          <a:lstStyle/>
-          <a:p>
-            <a:r>
-              <a:rPr sz="1200" b="1" i="0">
-                <a:solidFill>
-                  <a:srgbClr val="A02030"/>
-                </a:solidFill>
-                <a:latin typeface="Calibri"/>
-              </a:rPr>
-              <a:t>Atención</a:t>
-            </a:r>
-          </a:p>
-          <a:p>
-            <a:pPr>
-              <a:spcBef>
-                <a:spcPts val="400"/>
-              </a:spcBef>
-            </a:pPr>
-            <a:r>
-              <a:rPr sz="1400" b="0" i="0">
-                <a:solidFill>
-                  <a:srgbClr val="333333"/>
-                </a:solidFill>
-                <a:latin typeface="Calibri"/>
-              </a:rPr>
-              <a:t>Sin cloud de pago ni instalaciones obligatorias de hipervisores/Docker Desktop.</a:t>
-            </a:r>
-          </a:p>
-        </p:txBody>
-      </p:sp>
-      <p:sp>
-        <p:nvSpPr>
-          <p:cNvPr id="14" name="TextBox 13"/>
+            <a:r>
+              <a:rPr sz="1200" b="0" i="1">
+                <a:solidFill>
+                  <a:srgbClr val="666666"/>
+                </a:solidFill>
+                <a:latin typeface="Calibri"/>
+              </a:rPr>
+              <a:t>EXPOSE, CMD y el «-p» del run llevan el MISMO puerto. Y el «COPY. .» solo es seguro con «.dockerignore» al lado.</a:t>
+            </a:r>
+          </a:p>
+        </p:txBody>
+      </p:sp>
+      <p:sp>
+        <p:nvSpPr>
+          <p:cNvPr id="10" name="TextBox 9"/>
           <p:cNvSpPr txBox="1"/>
           <p:nvPr/>
         </p:nvSpPr>
@@ -13241,6 +13071,2276 @@
 </file>
 
 <file path=ppt/slides/slide34.xml><?xml version="1.0" encoding="utf-8"?>
+<p:sld xmlns:a="http://schemas.openxmlformats.org/drawingml/2006/main" xmlns:p="http://schemas.openxmlformats.org/presentationml/2006/main" xmlns:r="http://schemas.openxmlformats.org/officeDocument/2006/relationships">
+  <p:cSld>
+    <p:bg>
+      <p:bgPr>
+        <a:solidFill>
+          <a:srgbClr val="FFFFFF"/>
+        </a:solidFill>
+        <a:effectLst/>
+      </p:bgPr>
+    </p:bg>
+    <p:spTree>
+      <p:nvGrpSpPr>
+        <p:cNvPr id="1" name=""/>
+        <p:cNvGrpSpPr/>
+        <p:nvPr/>
+      </p:nvGrpSpPr>
+      <p:grpSpPr/>
+      <p:sp>
+        <p:nvSpPr>
+          <p:cNvPr id="2" name="Rectangle 1"/>
+          <p:cNvSpPr/>
+          <p:nvPr/>
+        </p:nvSpPr>
+        <p:spPr>
+          <a:xfrm>
+            <a:off x="0" y="0"/>
+            <a:ext cx="12191695" cy="1170432"/>
+          </a:xfrm>
+          <a:prstGeom prst="rect">
+            <a:avLst/>
+          </a:prstGeom>
+          <a:solidFill>
+            <a:srgbClr val="095292"/>
+          </a:solidFill>
+          <a:ln>
+            <a:noFill/>
+          </a:ln>
+        </p:spPr>
+        <p:style>
+          <a:lnRef idx="1">
+            <a:schemeClr val="accent1"/>
+          </a:lnRef>
+          <a:fillRef idx="3">
+            <a:schemeClr val="accent1"/>
+          </a:fillRef>
+          <a:effectRef idx="2">
+            <a:schemeClr val="accent1"/>
+          </a:effectRef>
+          <a:fontRef idx="minor">
+            <a:schemeClr val="lt1"/>
+          </a:fontRef>
+        </p:style>
+        <p:txBody>
+          <a:bodyPr rtlCol="0" anchor="ctr"/>
+          <a:lstStyle/>
+          <a:p>
+            <a:pPr algn="ctr"/>
+          </a:p>
+        </p:txBody>
+      </p:sp>
+      <p:sp>
+        <p:nvSpPr>
+          <p:cNvPr id="3" name="Rectangle 2"/>
+          <p:cNvSpPr/>
+          <p:nvPr/>
+        </p:nvSpPr>
+        <p:spPr>
+          <a:xfrm>
+            <a:off x="0" y="1170432"/>
+            <a:ext cx="12191695" cy="41148"/>
+          </a:xfrm>
+          <a:prstGeom prst="rect">
+            <a:avLst/>
+          </a:prstGeom>
+          <a:solidFill>
+            <a:srgbClr val="FFD000"/>
+          </a:solidFill>
+          <a:ln>
+            <a:noFill/>
+          </a:ln>
+        </p:spPr>
+        <p:style>
+          <a:lnRef idx="1">
+            <a:schemeClr val="accent1"/>
+          </a:lnRef>
+          <a:fillRef idx="3">
+            <a:schemeClr val="accent1"/>
+          </a:fillRef>
+          <a:effectRef idx="2">
+            <a:schemeClr val="accent1"/>
+          </a:effectRef>
+          <a:fontRef idx="minor">
+            <a:schemeClr val="lt1"/>
+          </a:fontRef>
+        </p:style>
+        <p:txBody>
+          <a:bodyPr rtlCol="0" anchor="ctr"/>
+          <a:lstStyle/>
+          <a:p>
+            <a:pPr algn="ctr"/>
+          </a:p>
+        </p:txBody>
+      </p:sp>
+      <p:sp>
+        <p:nvSpPr>
+          <p:cNvPr id="4" name="TextBox 3"/>
+          <p:cNvSpPr txBox="1"/>
+          <p:nvPr/>
+        </p:nvSpPr>
+        <p:spPr>
+          <a:xfrm>
+            <a:off x="457200" y="164592"/>
+            <a:ext cx="11277295" cy="384048"/>
+          </a:xfrm>
+          <a:prstGeom prst="rect">
+            <a:avLst/>
+          </a:prstGeom>
+          <a:noFill/>
+        </p:spPr>
+        <p:txBody>
+          <a:bodyPr wrap="square">
+            <a:spAutoFit/>
+          </a:bodyPr>
+          <a:lstStyle/>
+          <a:p>
+            <a:r>
+              <a:rPr sz="2600" b="1" i="0">
+                <a:solidFill>
+                  <a:srgbClr val="FFFFFF"/>
+                </a:solidFill>
+                <a:latin typeface="Calibri"/>
+              </a:rPr>
+              <a:t>Herramientas de hoy</a:t>
+            </a:r>
+          </a:p>
+        </p:txBody>
+      </p:sp>
+      <p:sp>
+        <p:nvSpPr>
+          <p:cNvPr id="5" name="TextBox 4"/>
+          <p:cNvSpPr txBox="1"/>
+          <p:nvPr/>
+        </p:nvSpPr>
+        <p:spPr>
+          <a:xfrm>
+            <a:off x="457200" y="566928"/>
+            <a:ext cx="11277295" cy="411480"/>
+          </a:xfrm>
+          <a:prstGeom prst="rect">
+            <a:avLst/>
+          </a:prstGeom>
+          <a:noFill/>
+        </p:spPr>
+        <p:txBody>
+          <a:bodyPr wrap="square">
+            <a:spAutoFit/>
+          </a:bodyPr>
+          <a:lstStyle/>
+          <a:p>
+            <a:r>
+              <a:rPr sz="1400" b="0" i="0">
+                <a:solidFill>
+                  <a:srgbClr val="B8D8EE"/>
+                </a:solidFill>
+                <a:latin typeface="Calibri"/>
+              </a:rPr>
+              <a:t>Gratis · navegador o free tier · sin cuenta de pago</a:t>
+            </a:r>
+          </a:p>
+        </p:txBody>
+      </p:sp>
+      <p:sp>
+        <p:nvSpPr>
+          <p:cNvPr id="6" name="Rounded Rectangle 5"/>
+          <p:cNvSpPr/>
+          <p:nvPr/>
+        </p:nvSpPr>
+        <p:spPr>
+          <a:xfrm>
+            <a:off x="457200" y="1591056"/>
+            <a:ext cx="3624986" cy="2299716"/>
+          </a:xfrm>
+          <a:prstGeom prst="roundRect">
+            <a:avLst>
+              <a:gd name="adj" fmla="val 12000"/>
+            </a:avLst>
+          </a:prstGeom>
+          <a:solidFill>
+            <a:srgbClr val="F2F2F2"/>
+          </a:solidFill>
+          <a:ln>
+            <a:noFill/>
+          </a:ln>
+        </p:spPr>
+        <p:style>
+          <a:lnRef idx="1">
+            <a:schemeClr val="accent1"/>
+          </a:lnRef>
+          <a:fillRef idx="3">
+            <a:schemeClr val="accent1"/>
+          </a:fillRef>
+          <a:effectRef idx="2">
+            <a:schemeClr val="accent1"/>
+          </a:effectRef>
+          <a:fontRef idx="minor">
+            <a:schemeClr val="lt1"/>
+          </a:fontRef>
+        </p:style>
+        <p:txBody>
+          <a:bodyPr rtlCol="0" anchor="ctr"/>
+          <a:lstStyle/>
+          <a:p>
+            <a:pPr algn="ctr"/>
+          </a:p>
+        </p:txBody>
+      </p:sp>
+      <p:sp>
+        <p:nvSpPr>
+          <p:cNvPr id="7" name="Rectangle 6"/>
+          <p:cNvSpPr/>
+          <p:nvPr/>
+        </p:nvSpPr>
+        <p:spPr>
+          <a:xfrm>
+            <a:off x="457200" y="1591056"/>
+            <a:ext cx="3624986" cy="64008"/>
+          </a:xfrm>
+          <a:prstGeom prst="rect">
+            <a:avLst/>
+          </a:prstGeom>
+          <a:solidFill>
+            <a:srgbClr val="095292"/>
+          </a:solidFill>
+          <a:ln>
+            <a:noFill/>
+          </a:ln>
+        </p:spPr>
+        <p:style>
+          <a:lnRef idx="1">
+            <a:schemeClr val="accent1"/>
+          </a:lnRef>
+          <a:fillRef idx="3">
+            <a:schemeClr val="accent1"/>
+          </a:fillRef>
+          <a:effectRef idx="2">
+            <a:schemeClr val="accent1"/>
+          </a:effectRef>
+          <a:fontRef idx="minor">
+            <a:schemeClr val="lt1"/>
+          </a:fontRef>
+        </p:style>
+        <p:txBody>
+          <a:bodyPr rtlCol="0" anchor="ctr"/>
+          <a:lstStyle/>
+          <a:p>
+            <a:pPr algn="ctr"/>
+          </a:p>
+        </p:txBody>
+      </p:sp>
+      <p:sp>
+        <p:nvSpPr>
+          <p:cNvPr id="8" name="Rectangle 7"/>
+          <p:cNvSpPr/>
+          <p:nvPr/>
+        </p:nvSpPr>
+        <p:spPr>
+          <a:xfrm>
+            <a:off x="457200" y="1655064"/>
+            <a:ext cx="3624986" cy="27432"/>
+          </a:xfrm>
+          <a:prstGeom prst="rect">
+            <a:avLst/>
+          </a:prstGeom>
+          <a:solidFill>
+            <a:srgbClr val="FFD000"/>
+          </a:solidFill>
+          <a:ln>
+            <a:noFill/>
+          </a:ln>
+        </p:spPr>
+        <p:style>
+          <a:lnRef idx="1">
+            <a:schemeClr val="accent1"/>
+          </a:lnRef>
+          <a:fillRef idx="3">
+            <a:schemeClr val="accent1"/>
+          </a:fillRef>
+          <a:effectRef idx="2">
+            <a:schemeClr val="accent1"/>
+          </a:effectRef>
+          <a:fontRef idx="minor">
+            <a:schemeClr val="lt1"/>
+          </a:fontRef>
+        </p:style>
+        <p:txBody>
+          <a:bodyPr rtlCol="0" anchor="ctr"/>
+          <a:lstStyle/>
+          <a:p>
+            <a:pPr algn="ctr"/>
+          </a:p>
+        </p:txBody>
+      </p:sp>
+      <p:pic>
+        <p:nvPicPr>
+          <p:cNvPr id="9" name="Picture 8" descr="killercoda.png"/>
+          <p:cNvPicPr>
+            <a:picLocks noChangeAspect="1"/>
+          </p:cNvPicPr>
+          <p:nvPr/>
+        </p:nvPicPr>
+        <p:blipFill>
+          <a:blip r:embed="rId2"/>
+          <a:stretch>
+            <a:fillRect/>
+          </a:stretch>
+        </p:blipFill>
+        <p:spPr>
+          <a:xfrm>
+            <a:off x="1659331" y="1847087"/>
+            <a:ext cx="1220724" cy="1220724"/>
+          </a:xfrm>
+          <a:prstGeom prst="rect">
+            <a:avLst/>
+          </a:prstGeom>
+        </p:spPr>
+      </p:pic>
+      <p:sp>
+        <p:nvSpPr>
+          <p:cNvPr id="10" name="TextBox 9"/>
+          <p:cNvSpPr txBox="1"/>
+          <p:nvPr/>
+        </p:nvSpPr>
+        <p:spPr>
+          <a:xfrm>
+            <a:off x="530352" y="3159251"/>
+            <a:ext cx="3478682" cy="621792"/>
+          </a:xfrm>
+          <a:prstGeom prst="rect">
+            <a:avLst/>
+          </a:prstGeom>
+          <a:noFill/>
+        </p:spPr>
+        <p:txBody>
+          <a:bodyPr wrap="square" anchor="t"/>
+          <a:lstStyle/>
+          <a:p>
+            <a:pPr algn="ctr"/>
+            <a:r>
+              <a:rPr sz="1300" b="1" i="0">
+                <a:solidFill>
+                  <a:srgbClr val="095292"/>
+                </a:solidFill>
+                <a:latin typeface="Calibri"/>
+              </a:rPr>
+              <a:t>Killercoda</a:t>
+            </a:r>
+          </a:p>
+          <a:p>
+            <a:pPr algn="ctr">
+              <a:spcBef>
+                <a:spcPts val="200"/>
+              </a:spcBef>
+            </a:pPr>
+            <a:r>
+              <a:rPr sz="1000" b="0" i="0">
+                <a:solidFill>
+                  <a:srgbClr val="666666"/>
+                </a:solidFill>
+                <a:latin typeface="Calibri"/>
+              </a:rPr>
+              <a:t>Lab del dia · sesion 1 h</a:t>
+            </a:r>
+          </a:p>
+        </p:txBody>
+      </p:sp>
+      <p:sp>
+        <p:nvSpPr>
+          <p:cNvPr id="11" name="Rounded Rectangle 10"/>
+          <p:cNvSpPr/>
+          <p:nvPr/>
+        </p:nvSpPr>
+        <p:spPr>
+          <a:xfrm>
+            <a:off x="4283354" y="1591056"/>
+            <a:ext cx="3624986" cy="2299716"/>
+          </a:xfrm>
+          <a:prstGeom prst="roundRect">
+            <a:avLst>
+              <a:gd name="adj" fmla="val 12000"/>
+            </a:avLst>
+          </a:prstGeom>
+          <a:solidFill>
+            <a:srgbClr val="F2F2F2"/>
+          </a:solidFill>
+          <a:ln>
+            <a:noFill/>
+          </a:ln>
+        </p:spPr>
+        <p:style>
+          <a:lnRef idx="1">
+            <a:schemeClr val="accent1"/>
+          </a:lnRef>
+          <a:fillRef idx="3">
+            <a:schemeClr val="accent1"/>
+          </a:fillRef>
+          <a:effectRef idx="2">
+            <a:schemeClr val="accent1"/>
+          </a:effectRef>
+          <a:fontRef idx="minor">
+            <a:schemeClr val="lt1"/>
+          </a:fontRef>
+        </p:style>
+        <p:txBody>
+          <a:bodyPr rtlCol="0" anchor="ctr"/>
+          <a:lstStyle/>
+          <a:p>
+            <a:pPr algn="ctr"/>
+          </a:p>
+        </p:txBody>
+      </p:sp>
+      <p:sp>
+        <p:nvSpPr>
+          <p:cNvPr id="12" name="Rectangle 11"/>
+          <p:cNvSpPr/>
+          <p:nvPr/>
+        </p:nvSpPr>
+        <p:spPr>
+          <a:xfrm>
+            <a:off x="4283354" y="1591056"/>
+            <a:ext cx="3624986" cy="64008"/>
+          </a:xfrm>
+          <a:prstGeom prst="rect">
+            <a:avLst/>
+          </a:prstGeom>
+          <a:solidFill>
+            <a:srgbClr val="095292"/>
+          </a:solidFill>
+          <a:ln>
+            <a:noFill/>
+          </a:ln>
+        </p:spPr>
+        <p:style>
+          <a:lnRef idx="1">
+            <a:schemeClr val="accent1"/>
+          </a:lnRef>
+          <a:fillRef idx="3">
+            <a:schemeClr val="accent1"/>
+          </a:fillRef>
+          <a:effectRef idx="2">
+            <a:schemeClr val="accent1"/>
+          </a:effectRef>
+          <a:fontRef idx="minor">
+            <a:schemeClr val="lt1"/>
+          </a:fontRef>
+        </p:style>
+        <p:txBody>
+          <a:bodyPr rtlCol="0" anchor="ctr"/>
+          <a:lstStyle/>
+          <a:p>
+            <a:pPr algn="ctr"/>
+          </a:p>
+        </p:txBody>
+      </p:sp>
+      <p:sp>
+        <p:nvSpPr>
+          <p:cNvPr id="13" name="Rectangle 12"/>
+          <p:cNvSpPr/>
+          <p:nvPr/>
+        </p:nvSpPr>
+        <p:spPr>
+          <a:xfrm>
+            <a:off x="4283354" y="1655064"/>
+            <a:ext cx="3624986" cy="27432"/>
+          </a:xfrm>
+          <a:prstGeom prst="rect">
+            <a:avLst/>
+          </a:prstGeom>
+          <a:solidFill>
+            <a:srgbClr val="FFD000"/>
+          </a:solidFill>
+          <a:ln>
+            <a:noFill/>
+          </a:ln>
+        </p:spPr>
+        <p:style>
+          <a:lnRef idx="1">
+            <a:schemeClr val="accent1"/>
+          </a:lnRef>
+          <a:fillRef idx="3">
+            <a:schemeClr val="accent1"/>
+          </a:fillRef>
+          <a:effectRef idx="2">
+            <a:schemeClr val="accent1"/>
+          </a:effectRef>
+          <a:fontRef idx="minor">
+            <a:schemeClr val="lt1"/>
+          </a:fontRef>
+        </p:style>
+        <p:txBody>
+          <a:bodyPr rtlCol="0" anchor="ctr"/>
+          <a:lstStyle/>
+          <a:p>
+            <a:pPr algn="ctr"/>
+          </a:p>
+        </p:txBody>
+      </p:sp>
+      <p:pic>
+        <p:nvPicPr>
+          <p:cNvPr id="14" name="Picture 13" descr="labex.png"/>
+          <p:cNvPicPr>
+            <a:picLocks noChangeAspect="1"/>
+          </p:cNvPicPr>
+          <p:nvPr/>
+        </p:nvPicPr>
+        <p:blipFill>
+          <a:blip r:embed="rId3"/>
+          <a:stretch>
+            <a:fillRect/>
+          </a:stretch>
+        </p:blipFill>
+        <p:spPr>
+          <a:xfrm>
+            <a:off x="5485485" y="1847087"/>
+            <a:ext cx="1220724" cy="1220724"/>
+          </a:xfrm>
+          <a:prstGeom prst="rect">
+            <a:avLst/>
+          </a:prstGeom>
+        </p:spPr>
+      </p:pic>
+      <p:sp>
+        <p:nvSpPr>
+          <p:cNvPr id="15" name="TextBox 14"/>
+          <p:cNvSpPr txBox="1"/>
+          <p:nvPr/>
+        </p:nvSpPr>
+        <p:spPr>
+          <a:xfrm>
+            <a:off x="4356506" y="3159251"/>
+            <a:ext cx="3478682" cy="621792"/>
+          </a:xfrm>
+          <a:prstGeom prst="rect">
+            <a:avLst/>
+          </a:prstGeom>
+          <a:noFill/>
+        </p:spPr>
+        <p:txBody>
+          <a:bodyPr wrap="square" anchor="t"/>
+          <a:lstStyle/>
+          <a:p>
+            <a:pPr algn="ctr"/>
+            <a:r>
+              <a:rPr sz="1300" b="1" i="0">
+                <a:solidFill>
+                  <a:srgbClr val="095292"/>
+                </a:solidFill>
+                <a:latin typeface="Calibri"/>
+              </a:rPr>
+              <a:t>LabEx Docker Playground</a:t>
+            </a:r>
+          </a:p>
+          <a:p>
+            <a:pPr algn="ctr">
+              <a:spcBef>
+                <a:spcPts val="200"/>
+              </a:spcBef>
+            </a:pPr>
+            <a:r>
+              <a:rPr sz="1000" b="0" i="0">
+                <a:solidFill>
+                  <a:srgbClr val="666666"/>
+                </a:solidFill>
+                <a:latin typeface="Calibri"/>
+              </a:rPr>
+              <a:t>Alterna · 3 al dia</a:t>
+            </a:r>
+          </a:p>
+        </p:txBody>
+      </p:sp>
+      <p:sp>
+        <p:nvSpPr>
+          <p:cNvPr id="16" name="Rounded Rectangle 15"/>
+          <p:cNvSpPr/>
+          <p:nvPr/>
+        </p:nvSpPr>
+        <p:spPr>
+          <a:xfrm>
+            <a:off x="8109508" y="1591056"/>
+            <a:ext cx="3624986" cy="2299716"/>
+          </a:xfrm>
+          <a:prstGeom prst="roundRect">
+            <a:avLst>
+              <a:gd name="adj" fmla="val 12000"/>
+            </a:avLst>
+          </a:prstGeom>
+          <a:solidFill>
+            <a:srgbClr val="F2F2F2"/>
+          </a:solidFill>
+          <a:ln>
+            <a:noFill/>
+          </a:ln>
+        </p:spPr>
+        <p:style>
+          <a:lnRef idx="1">
+            <a:schemeClr val="accent1"/>
+          </a:lnRef>
+          <a:fillRef idx="3">
+            <a:schemeClr val="accent1"/>
+          </a:fillRef>
+          <a:effectRef idx="2">
+            <a:schemeClr val="accent1"/>
+          </a:effectRef>
+          <a:fontRef idx="minor">
+            <a:schemeClr val="lt1"/>
+          </a:fontRef>
+        </p:style>
+        <p:txBody>
+          <a:bodyPr rtlCol="0" anchor="ctr"/>
+          <a:lstStyle/>
+          <a:p>
+            <a:pPr algn="ctr"/>
+          </a:p>
+        </p:txBody>
+      </p:sp>
+      <p:sp>
+        <p:nvSpPr>
+          <p:cNvPr id="17" name="Rectangle 16"/>
+          <p:cNvSpPr/>
+          <p:nvPr/>
+        </p:nvSpPr>
+        <p:spPr>
+          <a:xfrm>
+            <a:off x="8109508" y="1591056"/>
+            <a:ext cx="3624986" cy="64008"/>
+          </a:xfrm>
+          <a:prstGeom prst="rect">
+            <a:avLst/>
+          </a:prstGeom>
+          <a:solidFill>
+            <a:srgbClr val="095292"/>
+          </a:solidFill>
+          <a:ln>
+            <a:noFill/>
+          </a:ln>
+        </p:spPr>
+        <p:style>
+          <a:lnRef idx="1">
+            <a:schemeClr val="accent1"/>
+          </a:lnRef>
+          <a:fillRef idx="3">
+            <a:schemeClr val="accent1"/>
+          </a:fillRef>
+          <a:effectRef idx="2">
+            <a:schemeClr val="accent1"/>
+          </a:effectRef>
+          <a:fontRef idx="minor">
+            <a:schemeClr val="lt1"/>
+          </a:fontRef>
+        </p:style>
+        <p:txBody>
+          <a:bodyPr rtlCol="0" anchor="ctr"/>
+          <a:lstStyle/>
+          <a:p>
+            <a:pPr algn="ctr"/>
+          </a:p>
+        </p:txBody>
+      </p:sp>
+      <p:sp>
+        <p:nvSpPr>
+          <p:cNvPr id="18" name="Rectangle 17"/>
+          <p:cNvSpPr/>
+          <p:nvPr/>
+        </p:nvSpPr>
+        <p:spPr>
+          <a:xfrm>
+            <a:off x="8109508" y="1655064"/>
+            <a:ext cx="3624986" cy="27432"/>
+          </a:xfrm>
+          <a:prstGeom prst="rect">
+            <a:avLst/>
+          </a:prstGeom>
+          <a:solidFill>
+            <a:srgbClr val="FFD000"/>
+          </a:solidFill>
+          <a:ln>
+            <a:noFill/>
+          </a:ln>
+        </p:spPr>
+        <p:style>
+          <a:lnRef idx="1">
+            <a:schemeClr val="accent1"/>
+          </a:lnRef>
+          <a:fillRef idx="3">
+            <a:schemeClr val="accent1"/>
+          </a:fillRef>
+          <a:effectRef idx="2">
+            <a:schemeClr val="accent1"/>
+          </a:effectRef>
+          <a:fontRef idx="minor">
+            <a:schemeClr val="lt1"/>
+          </a:fontRef>
+        </p:style>
+        <p:txBody>
+          <a:bodyPr rtlCol="0" anchor="ctr"/>
+          <a:lstStyle/>
+          <a:p>
+            <a:pPr algn="ctr"/>
+          </a:p>
+        </p:txBody>
+      </p:sp>
+      <p:pic>
+        <p:nvPicPr>
+          <p:cNvPr id="19" name="Picture 18" descr="google_docs.png"/>
+          <p:cNvPicPr>
+            <a:picLocks noChangeAspect="1"/>
+          </p:cNvPicPr>
+          <p:nvPr/>
+        </p:nvPicPr>
+        <p:blipFill>
+          <a:blip r:embed="rId4"/>
+          <a:stretch>
+            <a:fillRect/>
+          </a:stretch>
+        </p:blipFill>
+        <p:spPr>
+          <a:xfrm>
+            <a:off x="9311640" y="1847087"/>
+            <a:ext cx="1220724" cy="1220724"/>
+          </a:xfrm>
+          <a:prstGeom prst="rect">
+            <a:avLst/>
+          </a:prstGeom>
+        </p:spPr>
+      </p:pic>
+      <p:sp>
+        <p:nvSpPr>
+          <p:cNvPr id="20" name="TextBox 19"/>
+          <p:cNvSpPr txBox="1"/>
+          <p:nvPr/>
+        </p:nvSpPr>
+        <p:spPr>
+          <a:xfrm>
+            <a:off x="8182660" y="3159251"/>
+            <a:ext cx="3478682" cy="621792"/>
+          </a:xfrm>
+          <a:prstGeom prst="rect">
+            <a:avLst/>
+          </a:prstGeom>
+          <a:noFill/>
+        </p:spPr>
+        <p:txBody>
+          <a:bodyPr wrap="square" anchor="t"/>
+          <a:lstStyle/>
+          <a:p>
+            <a:pPr algn="ctr"/>
+            <a:r>
+              <a:rPr sz="1300" b="1" i="0">
+                <a:solidFill>
+                  <a:srgbClr val="095292"/>
+                </a:solidFill>
+                <a:latin typeface="Calibri"/>
+              </a:rPr>
+              <a:t>Google Docs</a:t>
+            </a:r>
+          </a:p>
+          <a:p>
+            <a:pPr algn="ctr">
+              <a:spcBef>
+                <a:spcPts val="200"/>
+              </a:spcBef>
+            </a:pPr>
+            <a:r>
+              <a:rPr sz="1000" b="0" i="0">
+                <a:solidFill>
+                  <a:srgbClr val="666666"/>
+                </a:solidFill>
+                <a:latin typeface="Calibri"/>
+              </a:rPr>
+              <a:t>Informe PI</a:t>
+            </a:r>
+          </a:p>
+        </p:txBody>
+      </p:sp>
+      <p:sp>
+        <p:nvSpPr>
+          <p:cNvPr id="21" name="Rounded Rectangle 20"/>
+          <p:cNvSpPr/>
+          <p:nvPr/>
+        </p:nvSpPr>
+        <p:spPr>
+          <a:xfrm>
+            <a:off x="4283354" y="4055364"/>
+            <a:ext cx="3624986" cy="2299716"/>
+          </a:xfrm>
+          <a:prstGeom prst="roundRect">
+            <a:avLst>
+              <a:gd name="adj" fmla="val 12000"/>
+            </a:avLst>
+          </a:prstGeom>
+          <a:solidFill>
+            <a:srgbClr val="F2F2F2"/>
+          </a:solidFill>
+          <a:ln>
+            <a:noFill/>
+          </a:ln>
+        </p:spPr>
+        <p:style>
+          <a:lnRef idx="1">
+            <a:schemeClr val="accent1"/>
+          </a:lnRef>
+          <a:fillRef idx="3">
+            <a:schemeClr val="accent1"/>
+          </a:fillRef>
+          <a:effectRef idx="2">
+            <a:schemeClr val="accent1"/>
+          </a:effectRef>
+          <a:fontRef idx="minor">
+            <a:schemeClr val="lt1"/>
+          </a:fontRef>
+        </p:style>
+        <p:txBody>
+          <a:bodyPr rtlCol="0" anchor="ctr"/>
+          <a:lstStyle/>
+          <a:p>
+            <a:pPr algn="ctr"/>
+          </a:p>
+        </p:txBody>
+      </p:sp>
+      <p:sp>
+        <p:nvSpPr>
+          <p:cNvPr id="22" name="Rectangle 21"/>
+          <p:cNvSpPr/>
+          <p:nvPr/>
+        </p:nvSpPr>
+        <p:spPr>
+          <a:xfrm>
+            <a:off x="4283354" y="4055364"/>
+            <a:ext cx="3624986" cy="64008"/>
+          </a:xfrm>
+          <a:prstGeom prst="rect">
+            <a:avLst/>
+          </a:prstGeom>
+          <a:solidFill>
+            <a:srgbClr val="095292"/>
+          </a:solidFill>
+          <a:ln>
+            <a:noFill/>
+          </a:ln>
+        </p:spPr>
+        <p:style>
+          <a:lnRef idx="1">
+            <a:schemeClr val="accent1"/>
+          </a:lnRef>
+          <a:fillRef idx="3">
+            <a:schemeClr val="accent1"/>
+          </a:fillRef>
+          <a:effectRef idx="2">
+            <a:schemeClr val="accent1"/>
+          </a:effectRef>
+          <a:fontRef idx="minor">
+            <a:schemeClr val="lt1"/>
+          </a:fontRef>
+        </p:style>
+        <p:txBody>
+          <a:bodyPr rtlCol="0" anchor="ctr"/>
+          <a:lstStyle/>
+          <a:p>
+            <a:pPr algn="ctr"/>
+          </a:p>
+        </p:txBody>
+      </p:sp>
+      <p:sp>
+        <p:nvSpPr>
+          <p:cNvPr id="23" name="Rectangle 22"/>
+          <p:cNvSpPr/>
+          <p:nvPr/>
+        </p:nvSpPr>
+        <p:spPr>
+          <a:xfrm>
+            <a:off x="4283354" y="4119372"/>
+            <a:ext cx="3624986" cy="27432"/>
+          </a:xfrm>
+          <a:prstGeom prst="rect">
+            <a:avLst/>
+          </a:prstGeom>
+          <a:solidFill>
+            <a:srgbClr val="FFD000"/>
+          </a:solidFill>
+          <a:ln>
+            <a:noFill/>
+          </a:ln>
+        </p:spPr>
+        <p:style>
+          <a:lnRef idx="1">
+            <a:schemeClr val="accent1"/>
+          </a:lnRef>
+          <a:fillRef idx="3">
+            <a:schemeClr val="accent1"/>
+          </a:fillRef>
+          <a:effectRef idx="2">
+            <a:schemeClr val="accent1"/>
+          </a:effectRef>
+          <a:fontRef idx="minor">
+            <a:schemeClr val="lt1"/>
+          </a:fontRef>
+        </p:style>
+        <p:txBody>
+          <a:bodyPr rtlCol="0" anchor="ctr"/>
+          <a:lstStyle/>
+          <a:p>
+            <a:pPr algn="ctr"/>
+          </a:p>
+        </p:txBody>
+      </p:sp>
+      <p:pic>
+        <p:nvPicPr>
+          <p:cNvPr id="24" name="Picture 23" descr="examlab.png"/>
+          <p:cNvPicPr>
+            <a:picLocks noChangeAspect="1"/>
+          </p:cNvPicPr>
+          <p:nvPr/>
+        </p:nvPicPr>
+        <p:blipFill>
+          <a:blip r:embed="rId5"/>
+          <a:stretch>
+            <a:fillRect/>
+          </a:stretch>
+        </p:blipFill>
+        <p:spPr>
+          <a:xfrm>
+            <a:off x="5485485" y="4311396"/>
+            <a:ext cx="1220724" cy="1220724"/>
+          </a:xfrm>
+          <a:prstGeom prst="rect">
+            <a:avLst/>
+          </a:prstGeom>
+        </p:spPr>
+      </p:pic>
+      <p:sp>
+        <p:nvSpPr>
+          <p:cNvPr id="25" name="TextBox 24"/>
+          <p:cNvSpPr txBox="1"/>
+          <p:nvPr/>
+        </p:nvSpPr>
+        <p:spPr>
+          <a:xfrm>
+            <a:off x="4356506" y="5623560"/>
+            <a:ext cx="3478682" cy="621792"/>
+          </a:xfrm>
+          <a:prstGeom prst="rect">
+            <a:avLst/>
+          </a:prstGeom>
+          <a:noFill/>
+        </p:spPr>
+        <p:txBody>
+          <a:bodyPr wrap="square" anchor="t"/>
+          <a:lstStyle/>
+          <a:p>
+            <a:pPr algn="ctr"/>
+            <a:r>
+              <a:rPr sz="1300" b="1" i="0">
+                <a:solidFill>
+                  <a:srgbClr val="095292"/>
+                </a:solidFill>
+                <a:latin typeface="Calibri"/>
+              </a:rPr>
+              <a:t>la plataforma del curso</a:t>
+            </a:r>
+          </a:p>
+          <a:p>
+            <a:pPr algn="ctr">
+              <a:spcBef>
+                <a:spcPts val="200"/>
+              </a:spcBef>
+            </a:pPr>
+            <a:r>
+              <a:rPr sz="1000" b="0" i="0">
+                <a:solidFill>
+                  <a:srgbClr val="666666"/>
+                </a:solidFill>
+                <a:latin typeface="Calibri"/>
+              </a:rPr>
+              <a:t>Donde se entrega</a:t>
+            </a:r>
+          </a:p>
+        </p:txBody>
+      </p:sp>
+      <p:sp>
+        <p:nvSpPr>
+          <p:cNvPr id="26" name="TextBox 25"/>
+          <p:cNvSpPr txBox="1"/>
+          <p:nvPr/>
+        </p:nvSpPr>
+        <p:spPr>
+          <a:xfrm>
+            <a:off x="11185855" y="6473952"/>
+            <a:ext cx="640080" cy="274320"/>
+          </a:xfrm>
+          <a:prstGeom prst="rect">
+            <a:avLst/>
+          </a:prstGeom>
+          <a:noFill/>
+        </p:spPr>
+        <p:txBody>
+          <a:bodyPr wrap="square">
+            <a:spAutoFit/>
+          </a:bodyPr>
+          <a:lstStyle/>
+          <a:p>
+            <a:pPr algn="r"/>
+            <a:r>
+              <a:rPr sz="1100" b="0" i="0">
+                <a:solidFill>
+                  <a:srgbClr val="666666"/>
+                </a:solidFill>
+                <a:latin typeface="Calibri"/>
+              </a:rPr>
+              <a:t>34</a:t>
+            </a:r>
+          </a:p>
+        </p:txBody>
+      </p:sp>
+    </p:spTree>
+  </p:cSld>
+  <p:clrMapOvr>
+    <a:masterClrMapping/>
+  </p:clrMapOvr>
+</p:sld>
+</file>
+
+<file path=ppt/slides/slide35.xml><?xml version="1.0" encoding="utf-8"?>
+<p:sld xmlns:a="http://schemas.openxmlformats.org/drawingml/2006/main" xmlns:p="http://schemas.openxmlformats.org/presentationml/2006/main" xmlns:r="http://schemas.openxmlformats.org/officeDocument/2006/relationships">
+  <p:cSld>
+    <p:bg>
+      <p:bgPr>
+        <a:solidFill>
+          <a:srgbClr val="FFFFFF"/>
+        </a:solidFill>
+        <a:effectLst/>
+      </p:bgPr>
+    </p:bg>
+    <p:spTree>
+      <p:nvGrpSpPr>
+        <p:cNvPr id="1" name=""/>
+        <p:cNvGrpSpPr/>
+        <p:nvPr/>
+      </p:nvGrpSpPr>
+      <p:grpSpPr/>
+      <p:sp>
+        <p:nvSpPr>
+          <p:cNvPr id="2" name="Rectangle 1"/>
+          <p:cNvSpPr/>
+          <p:nvPr/>
+        </p:nvSpPr>
+        <p:spPr>
+          <a:xfrm>
+            <a:off x="0" y="0"/>
+            <a:ext cx="12191695" cy="960120"/>
+          </a:xfrm>
+          <a:prstGeom prst="rect">
+            <a:avLst/>
+          </a:prstGeom>
+          <a:solidFill>
+            <a:srgbClr val="095292"/>
+          </a:solidFill>
+          <a:ln>
+            <a:noFill/>
+          </a:ln>
+        </p:spPr>
+        <p:style>
+          <a:lnRef idx="1">
+            <a:schemeClr val="accent1"/>
+          </a:lnRef>
+          <a:fillRef idx="3">
+            <a:schemeClr val="accent1"/>
+          </a:fillRef>
+          <a:effectRef idx="2">
+            <a:schemeClr val="accent1"/>
+          </a:effectRef>
+          <a:fontRef idx="minor">
+            <a:schemeClr val="lt1"/>
+          </a:fontRef>
+        </p:style>
+        <p:txBody>
+          <a:bodyPr rtlCol="0" anchor="ctr"/>
+          <a:lstStyle/>
+          <a:p>
+            <a:pPr algn="ctr"/>
+          </a:p>
+        </p:txBody>
+      </p:sp>
+      <p:sp>
+        <p:nvSpPr>
+          <p:cNvPr id="3" name="Rectangle 2"/>
+          <p:cNvSpPr/>
+          <p:nvPr/>
+        </p:nvSpPr>
+        <p:spPr>
+          <a:xfrm>
+            <a:off x="0" y="960120"/>
+            <a:ext cx="12191695" cy="41148"/>
+          </a:xfrm>
+          <a:prstGeom prst="rect">
+            <a:avLst/>
+          </a:prstGeom>
+          <a:solidFill>
+            <a:srgbClr val="FFD000"/>
+          </a:solidFill>
+          <a:ln>
+            <a:noFill/>
+          </a:ln>
+        </p:spPr>
+        <p:style>
+          <a:lnRef idx="1">
+            <a:schemeClr val="accent1"/>
+          </a:lnRef>
+          <a:fillRef idx="3">
+            <a:schemeClr val="accent1"/>
+          </a:fillRef>
+          <a:effectRef idx="2">
+            <a:schemeClr val="accent1"/>
+          </a:effectRef>
+          <a:fontRef idx="minor">
+            <a:schemeClr val="lt1"/>
+          </a:fontRef>
+        </p:style>
+        <p:txBody>
+          <a:bodyPr rtlCol="0" anchor="ctr"/>
+          <a:lstStyle/>
+          <a:p>
+            <a:pPr algn="ctr"/>
+          </a:p>
+        </p:txBody>
+      </p:sp>
+      <p:sp>
+        <p:nvSpPr>
+          <p:cNvPr id="4" name="TextBox 3"/>
+          <p:cNvSpPr txBox="1"/>
+          <p:nvPr/>
+        </p:nvSpPr>
+        <p:spPr>
+          <a:xfrm>
+            <a:off x="457200" y="164592"/>
+            <a:ext cx="11277295" cy="502920"/>
+          </a:xfrm>
+          <a:prstGeom prst="rect">
+            <a:avLst/>
+          </a:prstGeom>
+          <a:noFill/>
+        </p:spPr>
+        <p:txBody>
+          <a:bodyPr wrap="square">
+            <a:spAutoFit/>
+          </a:bodyPr>
+          <a:lstStyle/>
+          <a:p>
+            <a:r>
+              <a:rPr sz="2600" b="1" i="0">
+                <a:solidFill>
+                  <a:srgbClr val="FFFFFF"/>
+                </a:solidFill>
+                <a:latin typeface="Calibri"/>
+              </a:rPr>
+              <a:t>PI CloudLite — entregable de hoy</a:t>
+            </a:r>
+          </a:p>
+        </p:txBody>
+      </p:sp>
+      <p:sp>
+        <p:nvSpPr>
+          <p:cNvPr id="5" name="TextBox 4"/>
+          <p:cNvSpPr txBox="1"/>
+          <p:nvPr/>
+        </p:nvSpPr>
+        <p:spPr>
+          <a:xfrm>
+            <a:off x="457200" y="1170432"/>
+            <a:ext cx="11277295" cy="5230368"/>
+          </a:xfrm>
+          <a:prstGeom prst="rect">
+            <a:avLst/>
+          </a:prstGeom>
+          <a:noFill/>
+        </p:spPr>
+        <p:txBody>
+          <a:bodyPr wrap="square">
+            <a:spAutoFit/>
+          </a:bodyPr>
+          <a:lstStyle/>
+          <a:p>
+            <a:pPr>
+              <a:spcAft>
+                <a:spcPts val="800"/>
+              </a:spcAft>
+            </a:pPr>
+            <a:r>
+              <a:rPr sz="2000" b="0" i="0">
+                <a:solidFill>
+                  <a:srgbClr val="333333"/>
+                </a:solidFill>
+                <a:latin typeface="Calibri"/>
+              </a:rPr>
+              <a:t>–   </a:t>
+            </a:r>
+            <a:r>
+              <a:rPr sz="2000" b="1" i="0">
+                <a:solidFill>
+                  <a:srgbClr val="333333"/>
+                </a:solidFill>
+                <a:latin typeface="Calibri"/>
+              </a:rPr>
+              <a:t>Entregable:</a:t>
+            </a:r>
+            <a:r>
+              <a:rPr sz="2000" b="0" i="0">
+                <a:solidFill>
+                  <a:srgbClr val="333333"/>
+                </a:solidFill>
+                <a:latin typeface="Calibri"/>
+              </a:rPr>
+              <a:t> Dockerfile del stub + bitácora de 5 comandos con la salida real + captura del lab</a:t>
+            </a:r>
+          </a:p>
+          <a:p>
+            <a:pPr>
+              <a:spcAft>
+                <a:spcPts val="800"/>
+              </a:spcAft>
+            </a:pPr>
+            <a:r>
+              <a:rPr sz="2000" b="0" i="0">
+                <a:solidFill>
+                  <a:srgbClr val="333333"/>
+                </a:solidFill>
+                <a:latin typeface="Calibri"/>
+              </a:rPr>
+              <a:t>–   Herramienta: </a:t>
+            </a:r>
+            <a:r>
+              <a:rPr sz="2000" b="1" i="0">
+                <a:solidFill>
+                  <a:srgbClr val="333333"/>
+                </a:solidFill>
+                <a:latin typeface="Calibri"/>
+              </a:rPr>
+              <a:t>Killercoda · alterna si no carga: LabEx Docker Playground</a:t>
+            </a:r>
+          </a:p>
+          <a:p>
+            <a:pPr>
+              <a:spcAft>
+                <a:spcPts val="800"/>
+              </a:spcAft>
+            </a:pPr>
+            <a:r>
+              <a:rPr sz="2000" b="0" i="0">
+                <a:solidFill>
+                  <a:srgbClr val="333333"/>
+                </a:solidFill>
+                <a:latin typeface="Calibri"/>
+              </a:rPr>
+              <a:t>–   Todo lo que construyan hoy entra al </a:t>
+            </a:r>
+            <a:r>
+              <a:rPr sz="2000" b="1" i="0">
+                <a:solidFill>
+                  <a:srgbClr val="333333"/>
+                </a:solidFill>
+                <a:latin typeface="Calibri"/>
+              </a:rPr>
+              <a:t>informe/repo del PI</a:t>
+            </a:r>
+            <a:r>
+              <a:rPr sz="2000" b="0" i="0">
+                <a:solidFill>
+                  <a:srgbClr val="333333"/>
+                </a:solidFill>
+                <a:latin typeface="Calibri"/>
+              </a:rPr>
+              <a:t> (no es lab suelto).</a:t>
+            </a:r>
+          </a:p>
+          <a:p>
+            <a:pPr>
+              <a:spcAft>
+                <a:spcPts val="800"/>
+              </a:spcAft>
+            </a:pPr>
+            <a:r>
+              <a:rPr sz="2000" b="0" i="0">
+                <a:solidFill>
+                  <a:srgbClr val="333333"/>
+                </a:solidFill>
+                <a:latin typeface="Calibri"/>
+              </a:rPr>
+              <a:t>–   Individual por defecto · el docente puede autorizar equipos de 2–3; la entrega en la plataforma del curso siempre es individual.</a:t>
+            </a:r>
+          </a:p>
+        </p:txBody>
+      </p:sp>
+      <p:sp>
+        <p:nvSpPr>
+          <p:cNvPr id="6" name="TextBox 5"/>
+          <p:cNvSpPr txBox="1"/>
+          <p:nvPr/>
+        </p:nvSpPr>
+        <p:spPr>
+          <a:xfrm>
+            <a:off x="11185855" y="6473952"/>
+            <a:ext cx="640080" cy="274320"/>
+          </a:xfrm>
+          <a:prstGeom prst="rect">
+            <a:avLst/>
+          </a:prstGeom>
+          <a:noFill/>
+        </p:spPr>
+        <p:txBody>
+          <a:bodyPr wrap="square">
+            <a:spAutoFit/>
+          </a:bodyPr>
+          <a:lstStyle/>
+          <a:p>
+            <a:pPr algn="r"/>
+            <a:r>
+              <a:rPr sz="1100" b="0" i="0">
+                <a:solidFill>
+                  <a:srgbClr val="666666"/>
+                </a:solidFill>
+                <a:latin typeface="Calibri"/>
+              </a:rPr>
+              <a:t>35</a:t>
+            </a:r>
+          </a:p>
+        </p:txBody>
+      </p:sp>
+    </p:spTree>
+  </p:cSld>
+  <p:clrMapOvr>
+    <a:masterClrMapping/>
+  </p:clrMapOvr>
+</p:sld>
+</file>
+
+<file path=ppt/slides/slide36.xml><?xml version="1.0" encoding="utf-8"?>
+<p:sld xmlns:a="http://schemas.openxmlformats.org/drawingml/2006/main" xmlns:p="http://schemas.openxmlformats.org/presentationml/2006/main" xmlns:r="http://schemas.openxmlformats.org/officeDocument/2006/relationships">
+  <p:cSld>
+    <p:bg>
+      <p:bgPr>
+        <a:solidFill>
+          <a:srgbClr val="FFFFFF"/>
+        </a:solidFill>
+        <a:effectLst/>
+      </p:bgPr>
+    </p:bg>
+    <p:spTree>
+      <p:nvGrpSpPr>
+        <p:cNvPr id="1" name=""/>
+        <p:cNvGrpSpPr/>
+        <p:nvPr/>
+      </p:nvGrpSpPr>
+      <p:grpSpPr/>
+      <p:sp>
+        <p:nvSpPr>
+          <p:cNvPr id="2" name="Rectangle 1"/>
+          <p:cNvSpPr/>
+          <p:nvPr/>
+        </p:nvSpPr>
+        <p:spPr>
+          <a:xfrm>
+            <a:off x="0" y="0"/>
+            <a:ext cx="12191695" cy="960120"/>
+          </a:xfrm>
+          <a:prstGeom prst="rect">
+            <a:avLst/>
+          </a:prstGeom>
+          <a:solidFill>
+            <a:srgbClr val="095292"/>
+          </a:solidFill>
+          <a:ln>
+            <a:noFill/>
+          </a:ln>
+        </p:spPr>
+        <p:style>
+          <a:lnRef idx="1">
+            <a:schemeClr val="accent1"/>
+          </a:lnRef>
+          <a:fillRef idx="3">
+            <a:schemeClr val="accent1"/>
+          </a:fillRef>
+          <a:effectRef idx="2">
+            <a:schemeClr val="accent1"/>
+          </a:effectRef>
+          <a:fontRef idx="minor">
+            <a:schemeClr val="lt1"/>
+          </a:fontRef>
+        </p:style>
+        <p:txBody>
+          <a:bodyPr rtlCol="0" anchor="ctr"/>
+          <a:lstStyle/>
+          <a:p>
+            <a:pPr algn="ctr"/>
+          </a:p>
+        </p:txBody>
+      </p:sp>
+      <p:sp>
+        <p:nvSpPr>
+          <p:cNvPr id="3" name="Rectangle 2"/>
+          <p:cNvSpPr/>
+          <p:nvPr/>
+        </p:nvSpPr>
+        <p:spPr>
+          <a:xfrm>
+            <a:off x="0" y="960120"/>
+            <a:ext cx="12191695" cy="41148"/>
+          </a:xfrm>
+          <a:prstGeom prst="rect">
+            <a:avLst/>
+          </a:prstGeom>
+          <a:solidFill>
+            <a:srgbClr val="FFD000"/>
+          </a:solidFill>
+          <a:ln>
+            <a:noFill/>
+          </a:ln>
+        </p:spPr>
+        <p:style>
+          <a:lnRef idx="1">
+            <a:schemeClr val="accent1"/>
+          </a:lnRef>
+          <a:fillRef idx="3">
+            <a:schemeClr val="accent1"/>
+          </a:fillRef>
+          <a:effectRef idx="2">
+            <a:schemeClr val="accent1"/>
+          </a:effectRef>
+          <a:fontRef idx="minor">
+            <a:schemeClr val="lt1"/>
+          </a:fontRef>
+        </p:style>
+        <p:txBody>
+          <a:bodyPr rtlCol="0" anchor="ctr"/>
+          <a:lstStyle/>
+          <a:p>
+            <a:pPr algn="ctr"/>
+          </a:p>
+        </p:txBody>
+      </p:sp>
+      <p:sp>
+        <p:nvSpPr>
+          <p:cNvPr id="4" name="TextBox 3"/>
+          <p:cNvSpPr txBox="1"/>
+          <p:nvPr/>
+        </p:nvSpPr>
+        <p:spPr>
+          <a:xfrm>
+            <a:off x="457200" y="164592"/>
+            <a:ext cx="11277295" cy="502920"/>
+          </a:xfrm>
+          <a:prstGeom prst="rect">
+            <a:avLst/>
+          </a:prstGeom>
+          <a:noFill/>
+        </p:spPr>
+        <p:txBody>
+          <a:bodyPr wrap="square">
+            <a:spAutoFit/>
+          </a:bodyPr>
+          <a:lstStyle/>
+          <a:p>
+            <a:r>
+              <a:rPr sz="2600" b="1" i="0">
+                <a:solidFill>
+                  <a:srgbClr val="FFFFFF"/>
+                </a:solidFill>
+                <a:latin typeface="Calibri"/>
+              </a:rPr>
+              <a:t>Manos a la obra (paso a paso)</a:t>
+            </a:r>
+          </a:p>
+        </p:txBody>
+      </p:sp>
+      <p:sp>
+        <p:nvSpPr>
+          <p:cNvPr id="5" name="TextBox 4"/>
+          <p:cNvSpPr txBox="1"/>
+          <p:nvPr/>
+        </p:nvSpPr>
+        <p:spPr>
+          <a:xfrm>
+            <a:off x="457200" y="1170432"/>
+            <a:ext cx="11277295" cy="5230368"/>
+          </a:xfrm>
+          <a:prstGeom prst="rect">
+            <a:avLst/>
+          </a:prstGeom>
+          <a:noFill/>
+        </p:spPr>
+        <p:txBody>
+          <a:bodyPr wrap="square">
+            <a:spAutoFit/>
+          </a:bodyPr>
+          <a:lstStyle/>
+          <a:p>
+            <a:pPr>
+              <a:spcAft>
+                <a:spcPts val="800"/>
+              </a:spcAft>
+            </a:pPr>
+            <a:r>
+              <a:rPr sz="2000" b="1" i="0">
+                <a:solidFill>
+                  <a:srgbClr val="333333"/>
+                </a:solidFill>
+                <a:latin typeface="Calibri"/>
+              </a:rPr>
+              <a:t>1.</a:t>
+            </a:r>
+            <a:r>
+              <a:rPr sz="2000" b="0" i="0">
+                <a:solidFill>
+                  <a:srgbClr val="333333"/>
+                </a:solidFill>
+                <a:latin typeface="Calibri"/>
+              </a:rPr>
+              <a:t> Paso 1: elija en la pregunta 8 cual servicio de su C4 Context va a contenedorizar y justifiquelo en 2 o 3 frases; escriba a continuacion el Dockerfile completo con la imagen base ligera y con etiqueta fija, el COPY de dependencias antes del COPY del codigo, el EXPOSE y el CMD, verificando que no copie el .env ni ninguna clave.</a:t>
+            </a:r>
+          </a:p>
+          <a:p>
+            <a:pPr>
+              <a:spcAft>
+                <a:spcPts val="800"/>
+              </a:spcAft>
+            </a:pPr>
+            <a:r>
+              <a:rPr sz="2000" b="0" i="0">
+                <a:solidFill>
+                  <a:srgbClr val="333333"/>
+                </a:solidFill>
+                <a:latin typeface="Calibri"/>
+              </a:rPr>
+              <a:t>–   </a:t>
+            </a:r>
+            <a:r>
+              <a:rPr sz="2000" b="1" i="0">
+                <a:solidFill>
+                  <a:srgbClr val="333333"/>
+                </a:solidFill>
+                <a:latin typeface="Calibri"/>
+              </a:rPr>
+              <a:t>2.</a:t>
+            </a:r>
+            <a:r>
+              <a:rPr sz="2000" b="0" i="0">
+                <a:solidFill>
+                  <a:srgbClr val="333333"/>
+                </a:solidFill>
+                <a:latin typeface="Calibri"/>
+              </a:rPr>
+              <a:t> Paso 2: explique en la pregunta 9, sobre su propio Dockerfile, la diferencia entre imagen y contenedor, que instrucciones de SU archivo crean capa, por que el orden aprovecha el cache y en que se diferencia su contenedor de una maquina virtual; verifique que no escribio que un contenedor es una VM ligera.</a:t>
+            </a:r>
+          </a:p>
+          <a:p>
+            <a:pPr>
+              <a:spcAft>
+                <a:spcPts val="800"/>
+              </a:spcAft>
+            </a:pPr>
+            <a:r>
+              <a:rPr sz="2000" b="0" i="0">
+                <a:solidFill>
+                  <a:srgbClr val="333333"/>
+                </a:solidFill>
+                <a:latin typeface="Calibri"/>
+              </a:rPr>
+              <a:t>–   </a:t>
+            </a:r>
+            <a:r>
+              <a:rPr sz="2000" b="1" i="0">
+                <a:solidFill>
+                  <a:srgbClr val="333333"/>
+                </a:solidFill>
+                <a:latin typeface="Calibri"/>
+              </a:rPr>
+              <a:t>3.</a:t>
+            </a:r>
+            <a:r>
+              <a:rPr sz="2000" b="0" i="0">
+                <a:solidFill>
+                  <a:srgbClr val="333333"/>
+                </a:solidFill>
+                <a:latin typeface="Calibri"/>
+              </a:rPr>
+              <a:t> Paso 3: describa en la pregunta 10 el ciclo completo con los comandos exactos de build y de run, explicando que lado del mapeo de puertos es el anfitrion y que lado el contenedor, y cierre con el contrato del endpoint de salud (ruta, codigo de estado y cuerpo); verifique que el puerto sea el mismo que puso en el EXPOSE.</a:t>
+            </a:r>
+          </a:p>
+          <a:p>
+            <a:pPr>
+              <a:spcAft>
+                <a:spcPts val="800"/>
+              </a:spcAft>
+            </a:pPr>
+            <a:r>
+              <a:rPr sz="2000" b="0" i="0">
+                <a:solidFill>
+                  <a:srgbClr val="333333"/>
+                </a:solidFill>
+                <a:latin typeface="Calibri"/>
+              </a:rPr>
+              <a:t>–   </a:t>
+            </a:r>
+            <a:r>
+              <a:rPr sz="2000" b="1" i="0">
+                <a:solidFill>
+                  <a:srgbClr val="333333"/>
+                </a:solidFill>
+                <a:latin typeface="Calibri"/>
+              </a:rPr>
+              <a:t>4.</a:t>
+            </a:r>
+            <a:r>
+              <a:rPr sz="2000" b="0" i="0">
+                <a:solidFill>
+                  <a:srgbClr val="333333"/>
+                </a:solidFill>
+                <a:latin typeface="Calibri"/>
+              </a:rPr>
+              <a:t> Paso 4: ejecute de verdad el ciclo en Killercoda y reporte en la pregunta 11 la tabla de 5 filas con la salida real pegada textualmente, la descripcion de la captura con prompt, docker ps y hora del sistema, y una fila de incidente; recuerde que la sesion caduca a 1 hora, asi que capture la evidencia ANTES de cerrarla.</a:t>
+            </a:r>
+          </a:p>
+        </p:txBody>
+      </p:sp>
+      <p:sp>
+        <p:nvSpPr>
+          <p:cNvPr id="6" name="TextBox 5"/>
+          <p:cNvSpPr txBox="1"/>
+          <p:nvPr/>
+        </p:nvSpPr>
+        <p:spPr>
+          <a:xfrm>
+            <a:off x="11185855" y="6473952"/>
+            <a:ext cx="640080" cy="274320"/>
+          </a:xfrm>
+          <a:prstGeom prst="rect">
+            <a:avLst/>
+          </a:prstGeom>
+          <a:noFill/>
+        </p:spPr>
+        <p:txBody>
+          <a:bodyPr wrap="square">
+            <a:spAutoFit/>
+          </a:bodyPr>
+          <a:lstStyle/>
+          <a:p>
+            <a:pPr algn="r"/>
+            <a:r>
+              <a:rPr sz="1100" b="0" i="0">
+                <a:solidFill>
+                  <a:srgbClr val="666666"/>
+                </a:solidFill>
+                <a:latin typeface="Calibri"/>
+              </a:rPr>
+              <a:t>36</a:t>
+            </a:r>
+          </a:p>
+        </p:txBody>
+      </p:sp>
+    </p:spTree>
+  </p:cSld>
+  <p:clrMapOvr>
+    <a:masterClrMapping/>
+  </p:clrMapOvr>
+</p:sld>
+</file>
+
+<file path=ppt/slides/slide37.xml><?xml version="1.0" encoding="utf-8"?>
+<p:sld xmlns:a="http://schemas.openxmlformats.org/drawingml/2006/main" xmlns:p="http://schemas.openxmlformats.org/presentationml/2006/main" xmlns:r="http://schemas.openxmlformats.org/officeDocument/2006/relationships">
+  <p:cSld>
+    <p:bg>
+      <p:bgPr>
+        <a:solidFill>
+          <a:srgbClr val="FFFFFF"/>
+        </a:solidFill>
+        <a:effectLst/>
+      </p:bgPr>
+    </p:bg>
+    <p:spTree>
+      <p:nvGrpSpPr>
+        <p:cNvPr id="1" name=""/>
+        <p:cNvGrpSpPr/>
+        <p:nvPr/>
+      </p:nvGrpSpPr>
+      <p:grpSpPr/>
+      <p:sp>
+        <p:nvSpPr>
+          <p:cNvPr id="2" name="Rectangle 1"/>
+          <p:cNvSpPr/>
+          <p:nvPr/>
+        </p:nvSpPr>
+        <p:spPr>
+          <a:xfrm>
+            <a:off x="0" y="0"/>
+            <a:ext cx="12191695" cy="960120"/>
+          </a:xfrm>
+          <a:prstGeom prst="rect">
+            <a:avLst/>
+          </a:prstGeom>
+          <a:solidFill>
+            <a:srgbClr val="095292"/>
+          </a:solidFill>
+          <a:ln>
+            <a:noFill/>
+          </a:ln>
+        </p:spPr>
+        <p:style>
+          <a:lnRef idx="1">
+            <a:schemeClr val="accent1"/>
+          </a:lnRef>
+          <a:fillRef idx="3">
+            <a:schemeClr val="accent1"/>
+          </a:fillRef>
+          <a:effectRef idx="2">
+            <a:schemeClr val="accent1"/>
+          </a:effectRef>
+          <a:fontRef idx="minor">
+            <a:schemeClr val="lt1"/>
+          </a:fontRef>
+        </p:style>
+        <p:txBody>
+          <a:bodyPr rtlCol="0" anchor="ctr"/>
+          <a:lstStyle/>
+          <a:p>
+            <a:pPr algn="ctr"/>
+          </a:p>
+        </p:txBody>
+      </p:sp>
+      <p:sp>
+        <p:nvSpPr>
+          <p:cNvPr id="3" name="Rectangle 2"/>
+          <p:cNvSpPr/>
+          <p:nvPr/>
+        </p:nvSpPr>
+        <p:spPr>
+          <a:xfrm>
+            <a:off x="0" y="960120"/>
+            <a:ext cx="12191695" cy="41148"/>
+          </a:xfrm>
+          <a:prstGeom prst="rect">
+            <a:avLst/>
+          </a:prstGeom>
+          <a:solidFill>
+            <a:srgbClr val="FFD000"/>
+          </a:solidFill>
+          <a:ln>
+            <a:noFill/>
+          </a:ln>
+        </p:spPr>
+        <p:style>
+          <a:lnRef idx="1">
+            <a:schemeClr val="accent1"/>
+          </a:lnRef>
+          <a:fillRef idx="3">
+            <a:schemeClr val="accent1"/>
+          </a:fillRef>
+          <a:effectRef idx="2">
+            <a:schemeClr val="accent1"/>
+          </a:effectRef>
+          <a:fontRef idx="minor">
+            <a:schemeClr val="lt1"/>
+          </a:fontRef>
+        </p:style>
+        <p:txBody>
+          <a:bodyPr rtlCol="0" anchor="ctr"/>
+          <a:lstStyle/>
+          <a:p>
+            <a:pPr algn="ctr"/>
+          </a:p>
+        </p:txBody>
+      </p:sp>
+      <p:sp>
+        <p:nvSpPr>
+          <p:cNvPr id="4" name="TextBox 3"/>
+          <p:cNvSpPr txBox="1"/>
+          <p:nvPr/>
+        </p:nvSpPr>
+        <p:spPr>
+          <a:xfrm>
+            <a:off x="457200" y="164592"/>
+            <a:ext cx="11277295" cy="502920"/>
+          </a:xfrm>
+          <a:prstGeom prst="rect">
+            <a:avLst/>
+          </a:prstGeom>
+          <a:noFill/>
+        </p:spPr>
+        <p:txBody>
+          <a:bodyPr wrap="square">
+            <a:spAutoFit/>
+          </a:bodyPr>
+          <a:lstStyle/>
+          <a:p>
+            <a:r>
+              <a:rPr sz="2600" b="1" i="0">
+                <a:solidFill>
+                  <a:srgbClr val="FFFFFF"/>
+                </a:solidFill>
+                <a:latin typeface="Calibri"/>
+              </a:rPr>
+              <a:t>Para continuar (PI)</a:t>
+            </a:r>
+          </a:p>
+        </p:txBody>
+      </p:sp>
+      <p:sp>
+        <p:nvSpPr>
+          <p:cNvPr id="5" name="Rounded Rectangle 4"/>
+          <p:cNvSpPr/>
+          <p:nvPr/>
+        </p:nvSpPr>
+        <p:spPr>
+          <a:xfrm>
+            <a:off x="457200" y="1261872"/>
+            <a:ext cx="11277295" cy="1051560"/>
+          </a:xfrm>
+          <a:prstGeom prst="roundRect">
+            <a:avLst>
+              <a:gd name="adj" fmla="val 12000"/>
+            </a:avLst>
+          </a:prstGeom>
+          <a:solidFill>
+            <a:srgbClr val="E8F4FA"/>
+          </a:solidFill>
+          <a:ln>
+            <a:noFill/>
+          </a:ln>
+        </p:spPr>
+        <p:style>
+          <a:lnRef idx="1">
+            <a:schemeClr val="accent1"/>
+          </a:lnRef>
+          <a:fillRef idx="3">
+            <a:schemeClr val="accent1"/>
+          </a:fillRef>
+          <a:effectRef idx="2">
+            <a:schemeClr val="accent1"/>
+          </a:effectRef>
+          <a:fontRef idx="minor">
+            <a:schemeClr val="lt1"/>
+          </a:fontRef>
+        </p:style>
+        <p:txBody>
+          <a:bodyPr rtlCol="0" anchor="ctr"/>
+          <a:lstStyle/>
+          <a:p>
+            <a:pPr algn="ctr"/>
+          </a:p>
+        </p:txBody>
+      </p:sp>
+      <p:sp>
+        <p:nvSpPr>
+          <p:cNvPr id="6" name="Rectangle 5"/>
+          <p:cNvSpPr/>
+          <p:nvPr/>
+        </p:nvSpPr>
+        <p:spPr>
+          <a:xfrm>
+            <a:off x="457200" y="1261872"/>
+            <a:ext cx="128016" cy="1051560"/>
+          </a:xfrm>
+          <a:prstGeom prst="rect">
+            <a:avLst/>
+          </a:prstGeom>
+          <a:solidFill>
+            <a:srgbClr val="269CCB"/>
+          </a:solidFill>
+          <a:ln>
+            <a:noFill/>
+          </a:ln>
+        </p:spPr>
+        <p:style>
+          <a:lnRef idx="1">
+            <a:schemeClr val="accent1"/>
+          </a:lnRef>
+          <a:fillRef idx="3">
+            <a:schemeClr val="accent1"/>
+          </a:fillRef>
+          <a:effectRef idx="2">
+            <a:schemeClr val="accent1"/>
+          </a:effectRef>
+          <a:fontRef idx="minor">
+            <a:schemeClr val="lt1"/>
+          </a:fontRef>
+        </p:style>
+        <p:txBody>
+          <a:bodyPr rtlCol="0" anchor="ctr"/>
+          <a:lstStyle/>
+          <a:p>
+            <a:pPr algn="ctr"/>
+          </a:p>
+        </p:txBody>
+      </p:sp>
+      <p:sp>
+        <p:nvSpPr>
+          <p:cNvPr id="7" name="TextBox 6"/>
+          <p:cNvSpPr txBox="1"/>
+          <p:nvPr/>
+        </p:nvSpPr>
+        <p:spPr>
+          <a:xfrm>
+            <a:off x="777240" y="1399031"/>
+            <a:ext cx="10774375" cy="822959"/>
+          </a:xfrm>
+          <a:prstGeom prst="rect">
+            <a:avLst/>
+          </a:prstGeom>
+          <a:noFill/>
+        </p:spPr>
+        <p:txBody>
+          <a:bodyPr wrap="square">
+            <a:spAutoFit/>
+          </a:bodyPr>
+          <a:lstStyle/>
+          <a:p>
+            <a:r>
+              <a:rPr sz="1200" b="1" i="0">
+                <a:solidFill>
+                  <a:srgbClr val="269CCB"/>
+                </a:solidFill>
+                <a:latin typeface="Calibri"/>
+              </a:rPr>
+              <a:t>Info</a:t>
+            </a:r>
+          </a:p>
+          <a:p>
+            <a:pPr>
+              <a:spcBef>
+                <a:spcPts val="400"/>
+              </a:spcBef>
+            </a:pPr>
+            <a:r>
+              <a:rPr sz="1400" b="0" i="0">
+                <a:solidFill>
+                  <a:srgbClr val="333333"/>
+                </a:solidFill>
+                <a:latin typeface="Calibri"/>
+              </a:rPr>
+              <a:t>Entregable: Dockerfile del stub + bitácora de 5 comandos con la salida real + captura del lab</a:t>
+            </a:r>
+          </a:p>
+        </p:txBody>
+      </p:sp>
+      <p:sp>
+        <p:nvSpPr>
+          <p:cNvPr id="8" name="Rounded Rectangle 7"/>
+          <p:cNvSpPr/>
+          <p:nvPr/>
+        </p:nvSpPr>
+        <p:spPr>
+          <a:xfrm>
+            <a:off x="457200" y="2478024"/>
+            <a:ext cx="11277295" cy="1051560"/>
+          </a:xfrm>
+          <a:prstGeom prst="roundRect">
+            <a:avLst>
+              <a:gd name="adj" fmla="val 12000"/>
+            </a:avLst>
+          </a:prstGeom>
+          <a:solidFill>
+            <a:srgbClr val="FFF8E1"/>
+          </a:solidFill>
+          <a:ln>
+            <a:noFill/>
+          </a:ln>
+        </p:spPr>
+        <p:style>
+          <a:lnRef idx="1">
+            <a:schemeClr val="accent1"/>
+          </a:lnRef>
+          <a:fillRef idx="3">
+            <a:schemeClr val="accent1"/>
+          </a:fillRef>
+          <a:effectRef idx="2">
+            <a:schemeClr val="accent1"/>
+          </a:effectRef>
+          <a:fontRef idx="minor">
+            <a:schemeClr val="lt1"/>
+          </a:fontRef>
+        </p:style>
+        <p:txBody>
+          <a:bodyPr rtlCol="0" anchor="ctr"/>
+          <a:lstStyle/>
+          <a:p>
+            <a:pPr algn="ctr"/>
+          </a:p>
+        </p:txBody>
+      </p:sp>
+      <p:sp>
+        <p:nvSpPr>
+          <p:cNvPr id="9" name="Rectangle 8"/>
+          <p:cNvSpPr/>
+          <p:nvPr/>
+        </p:nvSpPr>
+        <p:spPr>
+          <a:xfrm>
+            <a:off x="457200" y="2478024"/>
+            <a:ext cx="128016" cy="1051560"/>
+          </a:xfrm>
+          <a:prstGeom prst="rect">
+            <a:avLst/>
+          </a:prstGeom>
+          <a:solidFill>
+            <a:srgbClr val="FFD000"/>
+          </a:solidFill>
+          <a:ln>
+            <a:noFill/>
+          </a:ln>
+        </p:spPr>
+        <p:style>
+          <a:lnRef idx="1">
+            <a:schemeClr val="accent1"/>
+          </a:lnRef>
+          <a:fillRef idx="3">
+            <a:schemeClr val="accent1"/>
+          </a:fillRef>
+          <a:effectRef idx="2">
+            <a:schemeClr val="accent1"/>
+          </a:effectRef>
+          <a:fontRef idx="minor">
+            <a:schemeClr val="lt1"/>
+          </a:fontRef>
+        </p:style>
+        <p:txBody>
+          <a:bodyPr rtlCol="0" anchor="ctr"/>
+          <a:lstStyle/>
+          <a:p>
+            <a:pPr algn="ctr"/>
+          </a:p>
+        </p:txBody>
+      </p:sp>
+      <p:sp>
+        <p:nvSpPr>
+          <p:cNvPr id="10" name="TextBox 9"/>
+          <p:cNvSpPr txBox="1"/>
+          <p:nvPr/>
+        </p:nvSpPr>
+        <p:spPr>
+          <a:xfrm>
+            <a:off x="777240" y="2615184"/>
+            <a:ext cx="10774375" cy="822959"/>
+          </a:xfrm>
+          <a:prstGeom prst="rect">
+            <a:avLst/>
+          </a:prstGeom>
+          <a:noFill/>
+        </p:spPr>
+        <p:txBody>
+          <a:bodyPr wrap="square">
+            <a:spAutoFit/>
+          </a:bodyPr>
+          <a:lstStyle/>
+          <a:p>
+            <a:r>
+              <a:rPr sz="1200" b="1" i="0">
+                <a:solidFill>
+                  <a:srgbClr val="FFD000"/>
+                </a:solidFill>
+                <a:latin typeface="Calibri"/>
+              </a:rPr>
+              <a:t>Aclaración</a:t>
+            </a:r>
+          </a:p>
+          <a:p>
+            <a:pPr>
+              <a:spcBef>
+                <a:spcPts val="400"/>
+              </a:spcBef>
+            </a:pPr>
+            <a:r>
+              <a:rPr sz="1400" b="0" i="0">
+                <a:solidFill>
+                  <a:srgbClr val="333333"/>
+                </a:solidFill>
+                <a:latin typeface="Calibri"/>
+              </a:rPr>
+              <a:t>Subir evidencias al paquete CloudLite (Drive/repo) y a la plataforma del curso en la fecha que indique el docente.</a:t>
+            </a:r>
+          </a:p>
+        </p:txBody>
+      </p:sp>
+      <p:sp>
+        <p:nvSpPr>
+          <p:cNvPr id="11" name="Rounded Rectangle 10"/>
+          <p:cNvSpPr/>
+          <p:nvPr/>
+        </p:nvSpPr>
+        <p:spPr>
+          <a:xfrm>
+            <a:off x="457200" y="3694176"/>
+            <a:ext cx="11277295" cy="1051560"/>
+          </a:xfrm>
+          <a:prstGeom prst="roundRect">
+            <a:avLst>
+              <a:gd name="adj" fmla="val 12000"/>
+            </a:avLst>
+          </a:prstGeom>
+          <a:solidFill>
+            <a:srgbClr val="FBE4E4"/>
+          </a:solidFill>
+          <a:ln>
+            <a:noFill/>
+          </a:ln>
+        </p:spPr>
+        <p:style>
+          <a:lnRef idx="1">
+            <a:schemeClr val="accent1"/>
+          </a:lnRef>
+          <a:fillRef idx="3">
+            <a:schemeClr val="accent1"/>
+          </a:fillRef>
+          <a:effectRef idx="2">
+            <a:schemeClr val="accent1"/>
+          </a:effectRef>
+          <a:fontRef idx="minor">
+            <a:schemeClr val="lt1"/>
+          </a:fontRef>
+        </p:style>
+        <p:txBody>
+          <a:bodyPr rtlCol="0" anchor="ctr"/>
+          <a:lstStyle/>
+          <a:p>
+            <a:pPr algn="ctr"/>
+          </a:p>
+        </p:txBody>
+      </p:sp>
+      <p:sp>
+        <p:nvSpPr>
+          <p:cNvPr id="12" name="Rectangle 11"/>
+          <p:cNvSpPr/>
+          <p:nvPr/>
+        </p:nvSpPr>
+        <p:spPr>
+          <a:xfrm>
+            <a:off x="457200" y="3694176"/>
+            <a:ext cx="128016" cy="1051560"/>
+          </a:xfrm>
+          <a:prstGeom prst="rect">
+            <a:avLst/>
+          </a:prstGeom>
+          <a:solidFill>
+            <a:srgbClr val="A02030"/>
+          </a:solidFill>
+          <a:ln>
+            <a:noFill/>
+          </a:ln>
+        </p:spPr>
+        <p:style>
+          <a:lnRef idx="1">
+            <a:schemeClr val="accent1"/>
+          </a:lnRef>
+          <a:fillRef idx="3">
+            <a:schemeClr val="accent1"/>
+          </a:fillRef>
+          <a:effectRef idx="2">
+            <a:schemeClr val="accent1"/>
+          </a:effectRef>
+          <a:fontRef idx="minor">
+            <a:schemeClr val="lt1"/>
+          </a:fontRef>
+        </p:style>
+        <p:txBody>
+          <a:bodyPr rtlCol="0" anchor="ctr"/>
+          <a:lstStyle/>
+          <a:p>
+            <a:pPr algn="ctr"/>
+          </a:p>
+        </p:txBody>
+      </p:sp>
+      <p:sp>
+        <p:nvSpPr>
+          <p:cNvPr id="13" name="TextBox 12"/>
+          <p:cNvSpPr txBox="1"/>
+          <p:nvPr/>
+        </p:nvSpPr>
+        <p:spPr>
+          <a:xfrm>
+            <a:off x="777240" y="3831336"/>
+            <a:ext cx="10774375" cy="822959"/>
+          </a:xfrm>
+          <a:prstGeom prst="rect">
+            <a:avLst/>
+          </a:prstGeom>
+          <a:noFill/>
+        </p:spPr>
+        <p:txBody>
+          <a:bodyPr wrap="square">
+            <a:spAutoFit/>
+          </a:bodyPr>
+          <a:lstStyle/>
+          <a:p>
+            <a:r>
+              <a:rPr sz="1200" b="1" i="0">
+                <a:solidFill>
+                  <a:srgbClr val="A02030"/>
+                </a:solidFill>
+                <a:latin typeface="Calibri"/>
+              </a:rPr>
+              <a:t>Atención</a:t>
+            </a:r>
+          </a:p>
+          <a:p>
+            <a:pPr>
+              <a:spcBef>
+                <a:spcPts val="400"/>
+              </a:spcBef>
+            </a:pPr>
+            <a:r>
+              <a:rPr sz="1400" b="0" i="0">
+                <a:solidFill>
+                  <a:srgbClr val="333333"/>
+                </a:solidFill>
+                <a:latin typeface="Calibri"/>
+              </a:rPr>
+              <a:t>Sin cloud de pago ni instalaciones obligatorias de hipervisores/Docker Desktop.</a:t>
+            </a:r>
+          </a:p>
+        </p:txBody>
+      </p:sp>
+      <p:sp>
+        <p:nvSpPr>
+          <p:cNvPr id="14" name="TextBox 13"/>
+          <p:cNvSpPr txBox="1"/>
+          <p:nvPr/>
+        </p:nvSpPr>
+        <p:spPr>
+          <a:xfrm>
+            <a:off x="11185855" y="6473952"/>
+            <a:ext cx="640080" cy="274320"/>
+          </a:xfrm>
+          <a:prstGeom prst="rect">
+            <a:avLst/>
+          </a:prstGeom>
+          <a:noFill/>
+        </p:spPr>
+        <p:txBody>
+          <a:bodyPr wrap="square">
+            <a:spAutoFit/>
+          </a:bodyPr>
+          <a:lstStyle/>
+          <a:p>
+            <a:pPr algn="r"/>
+            <a:r>
+              <a:rPr sz="1100" b="0" i="0">
+                <a:solidFill>
+                  <a:srgbClr val="666666"/>
+                </a:solidFill>
+                <a:latin typeface="Calibri"/>
+              </a:rPr>
+              <a:t>37</a:t>
+            </a:r>
+          </a:p>
+        </p:txBody>
+      </p:sp>
+    </p:spTree>
+  </p:cSld>
+  <p:clrMapOvr>
+    <a:masterClrMapping/>
+  </p:clrMapOvr>
+</p:sld>
+</file>
+
+<file path=ppt/slides/slide38.xml><?xml version="1.0" encoding="utf-8"?>
 <p:sld xmlns:a="http://schemas.openxmlformats.org/drawingml/2006/main" xmlns:p="http://schemas.openxmlformats.org/presentationml/2006/main" xmlns:r="http://schemas.openxmlformats.org/officeDocument/2006/relationships">
   <p:cSld>
     <p:bg>

--- a/Arquitectura de Sistemas Computacionales/Clases/Clase 3 - Virtualizacion y contenedores/Presentacion.pptx
+++ b/Arquitectura de Sistemas Computacionales/Clases/Clase 3 - Virtualizacion y contenedores/Presentacion.pptx
@@ -14679,7 +14679,7 @@
                 </a:solidFill>
                 <a:latin typeface="Calibri"/>
               </a:rPr>
-              <a:t> Paso 4: ejecute de verdad el ciclo en Killercoda y reporte en la pregunta 11 la tabla de 5 filas con la salida real pegada textualmente, la descripcion de la captura con prompt, docker ps y hora del sistema, y una fila de incidente; recuerde que la sesion caduca a 1 hora, asi que capture la evidencia ANTES de cerrarla.</a:t>
+              <a:t> Paso 4: complete en la pregunta 11 la tabla de 5 filas con el fragmento CONCRETO que espera leer en cada comando y con el sintoma que delataria su fallo, y desarrolle abajo un caso que falla sobre su propio Dockerfile, con el comando de diagnostico y la correccion; verifique que no escribio «sale bien» en ninguna fila, porque es justo lo que la pregunta no acepta.</a:t>
             </a:r>
           </a:p>
         </p:txBody>
@@ -17344,7 +17344,7 @@
                 </a:solidFill>
                 <a:latin typeface="Calibri"/>
               </a:rPr>
-              <a:t>–   El entregable es un Dockerfile y una captura del contenedor corriendo, obtenida en Killercoda, un laboratorio gratuito que funciona en el navegador.</a:t>
+              <a:t>–   El entregable es un Dockerfile con su ciclo de construccion razonado: se escribe y se justifica, sin depender de ejecutarlo en ningun laboratorio externo para poder entregar.</a:t>
             </a:r>
           </a:p>
         </p:txBody>

--- a/Arquitectura de Sistemas Computacionales/Clases/Clase 3 - Virtualizacion y contenedores/Presentacion.pptx
+++ b/Arquitectura de Sistemas Computacionales/Clases/Clase 3 - Virtualizacion y contenedores/Presentacion.pptx
@@ -13,36 +13,32 @@
     <p:sldId id="261" r:id="rId12"/>
     <p:sldId id="262" r:id="rId13"/>
     <p:sldId id="263" r:id="rId14"/>
-    <p:sldId id="264" r:id="rId15"/>
-    <p:sldId id="265" r:id="rId16"/>
-    <p:sldId id="266" r:id="rId17"/>
-    <p:sldId id="267" r:id="rId18"/>
-    <p:sldId id="268" r:id="rId19"/>
-    <p:sldId id="269" r:id="rId20"/>
-    <p:sldId id="270" r:id="rId21"/>
-    <p:sldId id="271" r:id="rId22"/>
-    <p:sldId id="272" r:id="rId23"/>
-    <p:sldId id="273" r:id="rId24"/>
-    <p:sldId id="274" r:id="rId25"/>
-    <p:sldId id="275" r:id="rId26"/>
-    <p:sldId id="276" r:id="rId27"/>
-    <p:sldId id="277" r:id="rId28"/>
-    <p:sldId id="278" r:id="rId29"/>
-    <p:sldId id="279" r:id="rId30"/>
-    <p:sldId id="280" r:id="rId31"/>
-    <p:sldId id="281" r:id="rId32"/>
-    <p:sldId id="282" r:id="rId33"/>
-    <p:sldId id="283" r:id="rId34"/>
-    <p:sldId id="284" r:id="rId35"/>
-    <p:sldId id="285" r:id="rId36"/>
-    <p:sldId id="286" r:id="rId37"/>
-    <p:sldId id="287" r:id="rId38"/>
-    <p:sldId id="288" r:id="rId39"/>
-    <p:sldId id="289" r:id="rId40"/>
-    <p:sldId id="290" r:id="rId41"/>
-    <p:sldId id="291" r:id="rId42"/>
-    <p:sldId id="292" r:id="rId43"/>
-    <p:sldId id="293" r:id="rId44"/>
+    <p:sldId id="264" r:id="rId16"/>
+    <p:sldId id="265" r:id="rId17"/>
+    <p:sldId id="266" r:id="rId18"/>
+    <p:sldId id="267" r:id="rId19"/>
+    <p:sldId id="268" r:id="rId20"/>
+    <p:sldId id="269" r:id="rId21"/>
+    <p:sldId id="270" r:id="rId22"/>
+    <p:sldId id="271" r:id="rId23"/>
+    <p:sldId id="272" r:id="rId24"/>
+    <p:sldId id="273" r:id="rId25"/>
+    <p:sldId id="274" r:id="rId26"/>
+    <p:sldId id="275" r:id="rId27"/>
+    <p:sldId id="276" r:id="rId28"/>
+    <p:sldId id="277" r:id="rId29"/>
+    <p:sldId id="278" r:id="rId30"/>
+    <p:sldId id="279" r:id="rId31"/>
+    <p:sldId id="280" r:id="rId32"/>
+    <p:sldId id="281" r:id="rId33"/>
+    <p:sldId id="282" r:id="rId34"/>
+    <p:sldId id="283" r:id="rId35"/>
+    <p:sldId id="284" r:id="rId36"/>
+    <p:sldId id="285" r:id="rId37"/>
+    <p:sldId id="286" r:id="rId38"/>
+    <p:sldId id="287" r:id="rId39"/>
+    <p:sldId id="288" r:id="rId40"/>
+    <p:sldId id="289" r:id="rId41"/>
   </p:sldIdLst>
   <p:sldSz cx="12191695" cy="6858000" type="screen4x3"/>
   <p:notesSz cx="6858000" cy="9144000"/>
@@ -142,6 +138,1100 @@
     </a:lvl9pPr>
   </p:defaultTextStyle>
 </p:presentation>
+</file>
+
+<file path=ppt/notesMasters/notesMaster1.xml><?xml version="1.0" encoding="utf-8"?>
+<p:notesMaster xmlns:a="http://schemas.openxmlformats.org/drawingml/2006/main" xmlns:p="http://schemas.openxmlformats.org/presentationml/2006/main" xmlns:r="http://schemas.openxmlformats.org/officeDocument/2006/relationships">
+  <p:cSld>
+    <p:bg>
+      <p:bgRef idx="1001">
+        <a:schemeClr val="bg1"/>
+      </p:bgRef>
+    </p:bg>
+    <p:spTree>
+      <p:nvGrpSpPr>
+        <p:cNvPr id="1" name=""/>
+        <p:cNvGrpSpPr/>
+        <p:nvPr/>
+      </p:nvGrpSpPr>
+      <p:grpSpPr>
+        <a:xfrm>
+          <a:off x="0" y="0"/>
+          <a:ext cx="0" cy="0"/>
+          <a:chOff x="0" y="0"/>
+          <a:chExt cx="0" cy="0"/>
+        </a:xfrm>
+      </p:grpSpPr>
+      <p:sp>
+        <p:nvSpPr>
+          <p:cNvPr id="2" name="Header Placeholder 1"/>
+          <p:cNvSpPr>
+            <a:spLocks noGrp="1"/>
+          </p:cNvSpPr>
+          <p:nvPr>
+            <p:ph type="hdr" sz="quarter"/>
+          </p:nvPr>
+        </p:nvSpPr>
+        <p:spPr>
+          <a:xfrm>
+            <a:off x="0" y="0"/>
+            <a:ext cx="2971800" cy="457200"/>
+          </a:xfrm>
+          <a:prstGeom prst="rect">
+            <a:avLst/>
+          </a:prstGeom>
+        </p:spPr>
+        <p:txBody>
+          <a:bodyPr vert="horz" lIns="91440" tIns="45720" rIns="91440" bIns="45720" rtlCol="0"/>
+          <a:lstStyle>
+            <a:lvl1pPr algn="l">
+              <a:defRPr sz="1200"/>
+            </a:lvl1pPr>
+          </a:lstStyle>
+          <a:p>
+            <a:endParaRPr lang="en-US"/>
+          </a:p>
+        </p:txBody>
+      </p:sp>
+      <p:sp>
+        <p:nvSpPr>
+          <p:cNvPr id="3" name="Date Placeholder 2"/>
+          <p:cNvSpPr>
+            <a:spLocks noGrp="1"/>
+          </p:cNvSpPr>
+          <p:nvPr>
+            <p:ph type="dt" idx="1"/>
+          </p:nvPr>
+        </p:nvSpPr>
+        <p:spPr>
+          <a:xfrm>
+            <a:off x="3884613" y="0"/>
+            <a:ext cx="2971800" cy="457200"/>
+          </a:xfrm>
+          <a:prstGeom prst="rect">
+            <a:avLst/>
+          </a:prstGeom>
+        </p:spPr>
+        <p:txBody>
+          <a:bodyPr vert="horz" lIns="91440" tIns="45720" rIns="91440" bIns="45720" rtlCol="0"/>
+          <a:lstStyle>
+            <a:lvl1pPr algn="r">
+              <a:defRPr sz="1200"/>
+            </a:lvl1pPr>
+          </a:lstStyle>
+          <a:p>
+            <a:fld id="{0F89C1C7-3DCD-1040-A9CF-14679D8B5DDD}" type="datetimeFigureOut">
+              <a:rPr lang="en-US" smtClean="0"/>
+              <a:t>10/17/16</a:t>
+            </a:fld>
+            <a:endParaRPr lang="en-US"/>
+          </a:p>
+        </p:txBody>
+      </p:sp>
+      <p:sp>
+        <p:nvSpPr>
+          <p:cNvPr id="4" name="Slide Image Placeholder 3"/>
+          <p:cNvSpPr>
+            <a:spLocks noGrp="1" noRot="1" noChangeAspect="1"/>
+          </p:cNvSpPr>
+          <p:nvPr>
+            <p:ph type="sldImg" idx="2"/>
+          </p:nvPr>
+        </p:nvSpPr>
+        <p:spPr>
+          <a:xfrm>
+            <a:off x="1143000" y="685800"/>
+            <a:ext cx="4572000" cy="3429000"/>
+          </a:xfrm>
+          <a:prstGeom prst="rect">
+            <a:avLst/>
+          </a:prstGeom>
+          <a:noFill/>
+          <a:ln w="12700">
+            <a:solidFill>
+              <a:prstClr val="black"/>
+            </a:solidFill>
+          </a:ln>
+        </p:spPr>
+        <p:txBody>
+          <a:bodyPr vert="horz" lIns="91440" tIns="45720" rIns="91440" bIns="45720" rtlCol="0" anchor="ctr"/>
+          <a:lstStyle/>
+          <a:p>
+            <a:endParaRPr lang="en-US"/>
+          </a:p>
+        </p:txBody>
+      </p:sp>
+      <p:sp>
+        <p:nvSpPr>
+          <p:cNvPr id="5" name="Notes Placeholder 4"/>
+          <p:cNvSpPr>
+            <a:spLocks noGrp="1"/>
+          </p:cNvSpPr>
+          <p:nvPr>
+            <p:ph type="body" sz="quarter" idx="3"/>
+          </p:nvPr>
+        </p:nvSpPr>
+        <p:spPr>
+          <a:xfrm>
+            <a:off x="685800" y="4343400"/>
+            <a:ext cx="5486400" cy="4114800"/>
+          </a:xfrm>
+          <a:prstGeom prst="rect">
+            <a:avLst/>
+          </a:prstGeom>
+        </p:spPr>
+        <p:txBody>
+          <a:bodyPr vert="horz" lIns="91440" tIns="45720" rIns="91440" bIns="45720" rtlCol="0"/>
+          <a:lstStyle/>
+          <a:p>
+            <a:pPr lvl="0"/>
+            <a:r>
+              <a:rPr lang="en-US" smtClean="0"/>
+              <a:t>Click to edit Master text styles</a:t>
+            </a:r>
+          </a:p>
+          <a:p>
+            <a:pPr lvl="1"/>
+            <a:r>
+              <a:rPr lang="en-US" smtClean="0"/>
+              <a:t>Second level</a:t>
+            </a:r>
+          </a:p>
+          <a:p>
+            <a:pPr lvl="2"/>
+            <a:r>
+              <a:rPr lang="en-US" smtClean="0"/>
+              <a:t>Third level</a:t>
+            </a:r>
+          </a:p>
+          <a:p>
+            <a:pPr lvl="3"/>
+            <a:r>
+              <a:rPr lang="en-US" smtClean="0"/>
+              <a:t>Fourth level</a:t>
+            </a:r>
+          </a:p>
+          <a:p>
+            <a:pPr lvl="4"/>
+            <a:r>
+              <a:rPr lang="en-US" smtClean="0"/>
+              <a:t>Fifth level</a:t>
+            </a:r>
+            <a:endParaRPr lang="en-US"/>
+          </a:p>
+        </p:txBody>
+      </p:sp>
+      <p:sp>
+        <p:nvSpPr>
+          <p:cNvPr id="6" name="Footer Placeholder 5"/>
+          <p:cNvSpPr>
+            <a:spLocks noGrp="1"/>
+          </p:cNvSpPr>
+          <p:nvPr>
+            <p:ph type="ftr" sz="quarter" idx="4"/>
+          </p:nvPr>
+        </p:nvSpPr>
+        <p:spPr>
+          <a:xfrm>
+            <a:off x="0" y="8685213"/>
+            <a:ext cx="2971800" cy="457200"/>
+          </a:xfrm>
+          <a:prstGeom prst="rect">
+            <a:avLst/>
+          </a:prstGeom>
+        </p:spPr>
+        <p:txBody>
+          <a:bodyPr vert="horz" lIns="91440" tIns="45720" rIns="91440" bIns="45720" rtlCol="0" anchor="b"/>
+          <a:lstStyle>
+            <a:lvl1pPr algn="l">
+              <a:defRPr sz="1200"/>
+            </a:lvl1pPr>
+          </a:lstStyle>
+          <a:p>
+            <a:endParaRPr lang="en-US"/>
+          </a:p>
+        </p:txBody>
+      </p:sp>
+      <p:sp>
+        <p:nvSpPr>
+          <p:cNvPr id="7" name="Slide Number Placeholder 6"/>
+          <p:cNvSpPr>
+            <a:spLocks noGrp="1"/>
+          </p:cNvSpPr>
+          <p:nvPr>
+            <p:ph type="sldNum" sz="quarter" idx="5"/>
+          </p:nvPr>
+        </p:nvSpPr>
+        <p:spPr>
+          <a:xfrm>
+            <a:off x="3884613" y="8685213"/>
+            <a:ext cx="2971800" cy="457200"/>
+          </a:xfrm>
+          <a:prstGeom prst="rect">
+            <a:avLst/>
+          </a:prstGeom>
+        </p:spPr>
+        <p:txBody>
+          <a:bodyPr vert="horz" lIns="91440" tIns="45720" rIns="91440" bIns="45720" rtlCol="0" anchor="b"/>
+          <a:lstStyle>
+            <a:lvl1pPr algn="r">
+              <a:defRPr sz="1200"/>
+            </a:lvl1pPr>
+          </a:lstStyle>
+          <a:p>
+            <a:fld id="{BB5E49A5-4136-284D-997B-48E1D791AD67}" type="slidenum">
+              <a:rPr lang="en-US" smtClean="0"/>
+              <a:t>‹#›</a:t>
+            </a:fld>
+            <a:endParaRPr lang="en-US"/>
+          </a:p>
+        </p:txBody>
+      </p:sp>
+    </p:spTree>
+    <p:extLst>
+      <p:ext uri="{BB962C8B-B14F-4D97-AF65-F5344CB8AC3E}">
+        <p14:creationId xmlns:p14="http://schemas.microsoft.com/office/powerpoint/2010/main" val="2623252185"/>
+      </p:ext>
+    </p:extLst>
+  </p:cSld>
+  <p:clrMap bg1="lt1" tx1="dk1" bg2="lt2" tx2="dk2" accent1="accent1" accent2="accent2" accent3="accent3" accent4="accent4" accent5="accent5" accent6="accent6" hlink="hlink" folHlink="folHlink"/>
+  <p:notesStyle>
+    <a:lvl1pPr marL="0" algn="l" defTabSz="457200" rtl="0" eaLnBrk="1" latinLnBrk="0" hangingPunct="1">
+      <a:defRPr sz="1200" kern="1200">
+        <a:solidFill>
+          <a:schemeClr val="tx1"/>
+        </a:solidFill>
+        <a:latin typeface="+mn-lt"/>
+        <a:ea typeface="+mn-ea"/>
+        <a:cs typeface="+mn-cs"/>
+      </a:defRPr>
+    </a:lvl1pPr>
+    <a:lvl2pPr marL="457200" algn="l" defTabSz="457200" rtl="0" eaLnBrk="1" latinLnBrk="0" hangingPunct="1">
+      <a:defRPr sz="1200" kern="1200">
+        <a:solidFill>
+          <a:schemeClr val="tx1"/>
+        </a:solidFill>
+        <a:latin typeface="+mn-lt"/>
+        <a:ea typeface="+mn-ea"/>
+        <a:cs typeface="+mn-cs"/>
+      </a:defRPr>
+    </a:lvl2pPr>
+    <a:lvl3pPr marL="914400" algn="l" defTabSz="457200" rtl="0" eaLnBrk="1" latinLnBrk="0" hangingPunct="1">
+      <a:defRPr sz="1200" kern="1200">
+        <a:solidFill>
+          <a:schemeClr val="tx1"/>
+        </a:solidFill>
+        <a:latin typeface="+mn-lt"/>
+        <a:ea typeface="+mn-ea"/>
+        <a:cs typeface="+mn-cs"/>
+      </a:defRPr>
+    </a:lvl3pPr>
+    <a:lvl4pPr marL="1371600" algn="l" defTabSz="457200" rtl="0" eaLnBrk="1" latinLnBrk="0" hangingPunct="1">
+      <a:defRPr sz="1200" kern="1200">
+        <a:solidFill>
+          <a:schemeClr val="tx1"/>
+        </a:solidFill>
+        <a:latin typeface="+mn-lt"/>
+        <a:ea typeface="+mn-ea"/>
+        <a:cs typeface="+mn-cs"/>
+      </a:defRPr>
+    </a:lvl4pPr>
+    <a:lvl5pPr marL="1828800" algn="l" defTabSz="457200" rtl="0" eaLnBrk="1" latinLnBrk="0" hangingPunct="1">
+      <a:defRPr sz="1200" kern="1200">
+        <a:solidFill>
+          <a:schemeClr val="tx1"/>
+        </a:solidFill>
+        <a:latin typeface="+mn-lt"/>
+        <a:ea typeface="+mn-ea"/>
+        <a:cs typeface="+mn-cs"/>
+      </a:defRPr>
+    </a:lvl5pPr>
+    <a:lvl6pPr marL="2286000" algn="l" defTabSz="457200" rtl="0" eaLnBrk="1" latinLnBrk="0" hangingPunct="1">
+      <a:defRPr sz="1200" kern="1200">
+        <a:solidFill>
+          <a:schemeClr val="tx1"/>
+        </a:solidFill>
+        <a:latin typeface="+mn-lt"/>
+        <a:ea typeface="+mn-ea"/>
+        <a:cs typeface="+mn-cs"/>
+      </a:defRPr>
+    </a:lvl6pPr>
+    <a:lvl7pPr marL="2743200" algn="l" defTabSz="457200" rtl="0" eaLnBrk="1" latinLnBrk="0" hangingPunct="1">
+      <a:defRPr sz="1200" kern="1200">
+        <a:solidFill>
+          <a:schemeClr val="tx1"/>
+        </a:solidFill>
+        <a:latin typeface="+mn-lt"/>
+        <a:ea typeface="+mn-ea"/>
+        <a:cs typeface="+mn-cs"/>
+      </a:defRPr>
+    </a:lvl7pPr>
+    <a:lvl8pPr marL="3200400" algn="l" defTabSz="457200" rtl="0" eaLnBrk="1" latinLnBrk="0" hangingPunct="1">
+      <a:defRPr sz="1200" kern="1200">
+        <a:solidFill>
+          <a:schemeClr val="tx1"/>
+        </a:solidFill>
+        <a:latin typeface="+mn-lt"/>
+        <a:ea typeface="+mn-ea"/>
+        <a:cs typeface="+mn-cs"/>
+      </a:defRPr>
+    </a:lvl8pPr>
+    <a:lvl9pPr marL="3657600" algn="l" defTabSz="457200" rtl="0" eaLnBrk="1" latinLnBrk="0" hangingPunct="1">
+      <a:defRPr sz="1200" kern="1200">
+        <a:solidFill>
+          <a:schemeClr val="tx1"/>
+        </a:solidFill>
+        <a:latin typeface="+mn-lt"/>
+        <a:ea typeface="+mn-ea"/>
+        <a:cs typeface="+mn-cs"/>
+      </a:defRPr>
+    </a:lvl9pPr>
+  </p:notesStyle>
+</p:notesMaster>
+</file>
+
+<file path=ppt/notesSlides/notesSlide1.xml><?xml version="1.0" encoding="utf-8"?>
+<p:notes xmlns:a="http://schemas.openxmlformats.org/drawingml/2006/main" xmlns:p="http://schemas.openxmlformats.org/presentationml/2006/main" xmlns:r="http://schemas.openxmlformats.org/officeDocument/2006/relationships">
+  <p:cSld>
+    <p:spTree>
+      <p:nvGrpSpPr>
+        <p:cNvPr id="1" name=""/>
+        <p:cNvGrpSpPr/>
+        <p:nvPr/>
+      </p:nvGrpSpPr>
+      <p:grpSpPr>
+        <a:xfrm>
+          <a:off x="0" y="0"/>
+          <a:ext cx="0" cy="0"/>
+          <a:chOff x="0" y="0"/>
+          <a:chExt cx="0" cy="0"/>
+        </a:xfrm>
+      </p:grpSpPr>
+      <p:sp>
+        <p:nvSpPr>
+          <p:cNvPr id="2" name="Slide Image Placeholder 1"/>
+          <p:cNvSpPr>
+            <a:spLocks noGrp="1"/>
+          </p:cNvSpPr>
+          <p:nvPr>
+            <p:ph type="sldImg" idx="2"/>
+          </p:nvPr>
+        </p:nvSpPr>
+        <p:spPr/>
+      </p:sp>
+      <p:sp>
+        <p:nvSpPr>
+          <p:cNvPr id="3" name="Notes Placeholder 2"/>
+          <p:cNvSpPr>
+            <a:spLocks noGrp="1"/>
+          </p:cNvSpPr>
+          <p:nvPr>
+            <p:ph type="body" idx="3" sz="quarter"/>
+          </p:nvPr>
+        </p:nvSpPr>
+        <p:spPr/>
+        <p:txBody>
+          <a:bodyPr/>
+          <a:lstStyle/>
+          <a:p>
+            <a:r>
+              <a:t>Las dos clases anteriores decidieron QUE se va a construir (dominio, capacidades, actores, diagrama de contexto) y BAJO QUE modelo de servicio se va a operar, con su registro de decision.</a:t>
+            </a:r>
+          </a:p>
+          <a:p/>
+          <a:p>
+            <a:r>
+              <a:t>Conviene decir desde el minuto uno por que esto importa para la arquitectura y no solo para la operacion: el contenedor es la unidad de despliegue con la que se razona en todos los diagramas siguientes, y sin entender que es exactamente, el nivel de contenedores del modelo C4 que se dibuja en la Clase 4 queda en pura metafora.</a:t>
+            </a:r>
+          </a:p>
+        </p:txBody>
+      </p:sp>
+      <p:sp>
+        <p:nvSpPr>
+          <p:cNvPr id="4" name="Slide Number Placeholder 3"/>
+          <p:cNvSpPr>
+            <a:spLocks noGrp="1"/>
+          </p:cNvSpPr>
+          <p:nvPr>
+            <p:ph type="sldNum" idx="5" sz="quarter"/>
+          </p:nvPr>
+        </p:nvSpPr>
+        <p:spPr/>
+      </p:sp>
+    </p:spTree>
+  </p:cSld>
+  <p:clrMapOvr>
+    <a:masterClrMapping/>
+  </p:clrMapOvr>
+</p:notes>
+</file>
+
+<file path=ppt/notesSlides/notesSlide2.xml><?xml version="1.0" encoding="utf-8"?>
+<p:notes xmlns:a="http://schemas.openxmlformats.org/drawingml/2006/main" xmlns:p="http://schemas.openxmlformats.org/presentationml/2006/main" xmlns:r="http://schemas.openxmlformats.org/officeDocument/2006/relationships">
+  <p:cSld>
+    <p:spTree>
+      <p:nvGrpSpPr>
+        <p:cNvPr id="1" name=""/>
+        <p:cNvGrpSpPr/>
+        <p:nvPr/>
+      </p:nvGrpSpPr>
+      <p:grpSpPr>
+        <a:xfrm>
+          <a:off x="0" y="0"/>
+          <a:ext cx="0" cy="0"/>
+          <a:chOff x="0" y="0"/>
+          <a:chExt cx="0" cy="0"/>
+        </a:xfrm>
+      </p:grpSpPr>
+      <p:sp>
+        <p:nvSpPr>
+          <p:cNvPr id="2" name="Slide Image Placeholder 1"/>
+          <p:cNvSpPr>
+            <a:spLocks noGrp="1"/>
+          </p:cNvSpPr>
+          <p:nvPr>
+            <p:ph type="sldImg" idx="2"/>
+          </p:nvPr>
+        </p:nvSpPr>
+        <p:spPr/>
+      </p:sp>
+      <p:sp>
+        <p:nvSpPr>
+          <p:cNvPr id="3" name="Notes Placeholder 2"/>
+          <p:cNvSpPr>
+            <a:spLocks noGrp="1"/>
+          </p:cNvSpPr>
+          <p:nvPr>
+            <p:ph type="body" idx="3" sz="quarter"/>
+          </p:nvPr>
+        </p:nvSpPr>
+        <p:spPr/>
+        <p:txBody>
+          <a:bodyPr/>
+          <a:lstStyle/>
+          <a:p>
+            <a:r>
+              <a:t>La virtualizacion resolvio eso con una pieza de software llamada hipervisor, que se interpone entre el hardware y los sistemas operativos y presenta a cada uno la ilusion de tener una maquina completa para si.</a:t>
+            </a:r>
+          </a:p>
+          <a:p/>
+          <a:p>
+            <a:r>
+              <a:t>Los ordenes de magnitud que el docente debe poder citar: una maquina virtual ocupa varios gigabytes en disco y tarda entre 30 segundos y unos minutos en arrancar, porque debe iniciar un sistema operativo completo.</a:t>
+            </a:r>
+          </a:p>
+        </p:txBody>
+      </p:sp>
+      <p:sp>
+        <p:nvSpPr>
+          <p:cNvPr id="4" name="Slide Number Placeholder 3"/>
+          <p:cNvSpPr>
+            <a:spLocks noGrp="1"/>
+          </p:cNvSpPr>
+          <p:nvPr>
+            <p:ph type="sldNum" idx="5" sz="quarter"/>
+          </p:nvPr>
+        </p:nvSpPr>
+        <p:spPr/>
+      </p:sp>
+    </p:spTree>
+  </p:cSld>
+  <p:clrMapOvr>
+    <a:masterClrMapping/>
+  </p:clrMapOvr>
+</p:notes>
+</file>
+
+<file path=ppt/notesSlides/notesSlide3.xml><?xml version="1.0" encoding="utf-8"?>
+<p:notes xmlns:a="http://schemas.openxmlformats.org/drawingml/2006/main" xmlns:p="http://schemas.openxmlformats.org/presentationml/2006/main" xmlns:r="http://schemas.openxmlformats.org/officeDocument/2006/relationships">
+  <p:cSld>
+    <p:spTree>
+      <p:nvGrpSpPr>
+        <p:cNvPr id="1" name=""/>
+        <p:cNvGrpSpPr/>
+        <p:nvPr/>
+      </p:nvGrpSpPr>
+      <p:grpSpPr>
+        <a:xfrm>
+          <a:off x="0" y="0"/>
+          <a:ext cx="0" cy="0"/>
+          <a:chOff x="0" y="0"/>
+          <a:chExt cx="0" cy="0"/>
+        </a:xfrm>
+      </p:grpSpPr>
+      <p:sp>
+        <p:nvSpPr>
+          <p:cNvPr id="2" name="Slide Image Placeholder 1"/>
+          <p:cNvSpPr>
+            <a:spLocks noGrp="1"/>
+          </p:cNvSpPr>
+          <p:nvPr>
+            <p:ph type="sldImg" idx="2"/>
+          </p:nvPr>
+        </p:nvSpPr>
+        <p:spPr/>
+      </p:sp>
+      <p:sp>
+        <p:nvSpPr>
+          <p:cNvPr id="3" name="Notes Placeholder 2"/>
+          <p:cNvSpPr>
+            <a:spLocks noGrp="1"/>
+          </p:cNvSpPr>
+          <p:nvPr>
+            <p:ph type="body" idx="3" sz="quarter"/>
+          </p:nvPr>
+        </p:nvSpPr>
+        <p:spPr/>
+        <p:txBody>
+          <a:bodyPr/>
+          <a:lstStyle/>
+          <a:p>
+            <a:r>
+              <a:t>Conviene cerrar con lo que el dibujo NO muestra y la seccion anterior si dijo: en la nube las dos pilas se apilan, con los contenedores corriendo DENTRO de maquinas virtuales.</a:t>
+            </a:r>
+          </a:p>
+        </p:txBody>
+      </p:sp>
+      <p:sp>
+        <p:nvSpPr>
+          <p:cNvPr id="4" name="Slide Number Placeholder 3"/>
+          <p:cNvSpPr>
+            <a:spLocks noGrp="1"/>
+          </p:cNvSpPr>
+          <p:nvPr>
+            <p:ph type="sldNum" idx="5" sz="quarter"/>
+          </p:nvPr>
+        </p:nvSpPr>
+        <p:spPr/>
+      </p:sp>
+    </p:spTree>
+  </p:cSld>
+  <p:clrMapOvr>
+    <a:masterClrMapping/>
+  </p:clrMapOvr>
+</p:notes>
+</file>
+
+<file path=ppt/notesSlides/notesSlide4.xml><?xml version="1.0" encoding="utf-8"?>
+<p:notes xmlns:a="http://schemas.openxmlformats.org/drawingml/2006/main" xmlns:p="http://schemas.openxmlformats.org/presentationml/2006/main" xmlns:r="http://schemas.openxmlformats.org/officeDocument/2006/relationships">
+  <p:cSld>
+    <p:spTree>
+      <p:nvGrpSpPr>
+        <p:cNvPr id="1" name=""/>
+        <p:cNvGrpSpPr/>
+        <p:nvPr/>
+      </p:nvGrpSpPr>
+      <p:grpSpPr>
+        <a:xfrm>
+          <a:off x="0" y="0"/>
+          <a:ext cx="0" cy="0"/>
+          <a:chOff x="0" y="0"/>
+          <a:chExt cx="0" cy="0"/>
+        </a:xfrm>
+      </p:grpSpPr>
+      <p:sp>
+        <p:nvSpPr>
+          <p:cNvPr id="2" name="Slide Image Placeholder 1"/>
+          <p:cNvSpPr>
+            <a:spLocks noGrp="1"/>
+          </p:cNvSpPr>
+          <p:nvPr>
+            <p:ph type="sldImg" idx="2"/>
+          </p:nvPr>
+        </p:nvSpPr>
+        <p:spPr/>
+      </p:sp>
+      <p:sp>
+        <p:nvSpPr>
+          <p:cNvPr id="3" name="Notes Placeholder 2"/>
+          <p:cNvSpPr>
+            <a:spLocks noGrp="1"/>
+          </p:cNvSpPr>
+          <p:nvPr>
+            <p:ph type="body" idx="3" sz="quarter"/>
+          </p:nvPr>
+        </p:nvSpPr>
+        <p:spPr/>
+        <p:txBody>
+          <a:bodyPr/>
+          <a:lstStyle/>
+          <a:p>
+            <a:r>
+              <a:t>Todos los contenedores de una maquina comparten el kernel del anfitrion, y el aislamiento se consigue con dos mecanismos del propio Linux.</a:t>
+            </a:r>
+          </a:p>
+          <a:p/>
+          <a:p>
+            <a:r>
+              <a:t>Los cgroups, o grupos de control, limitan cuanta CPU y cuanta memoria puede consumir.</a:t>
+            </a:r>
+          </a:p>
+        </p:txBody>
+      </p:sp>
+      <p:sp>
+        <p:nvSpPr>
+          <p:cNvPr id="4" name="Slide Number Placeholder 3"/>
+          <p:cNvSpPr>
+            <a:spLocks noGrp="1"/>
+          </p:cNvSpPr>
+          <p:nvPr>
+            <p:ph type="sldNum" idx="5" sz="quarter"/>
+          </p:nvPr>
+        </p:nvSpPr>
+        <p:spPr/>
+      </p:sp>
+    </p:spTree>
+  </p:cSld>
+  <p:clrMapOvr>
+    <a:masterClrMapping/>
+  </p:clrMapOvr>
+</p:notes>
+</file>
+
+<file path=ppt/notesSlides/notesSlide5.xml><?xml version="1.0" encoding="utf-8"?>
+<p:notes xmlns:a="http://schemas.openxmlformats.org/drawingml/2006/main" xmlns:p="http://schemas.openxmlformats.org/presentationml/2006/main" xmlns:r="http://schemas.openxmlformats.org/officeDocument/2006/relationships">
+  <p:cSld>
+    <p:spTree>
+      <p:nvGrpSpPr>
+        <p:cNvPr id="1" name=""/>
+        <p:cNvGrpSpPr/>
+        <p:nvPr/>
+      </p:nvGrpSpPr>
+      <p:grpSpPr>
+        <a:xfrm>
+          <a:off x="0" y="0"/>
+          <a:ext cx="0" cy="0"/>
+          <a:chOff x="0" y="0"/>
+          <a:chExt cx="0" cy="0"/>
+        </a:xfrm>
+      </p:grpSpPr>
+      <p:sp>
+        <p:nvSpPr>
+          <p:cNvPr id="2" name="Slide Image Placeholder 1"/>
+          <p:cNvSpPr>
+            <a:spLocks noGrp="1"/>
+          </p:cNvSpPr>
+          <p:nvPr>
+            <p:ph type="sldImg" idx="2"/>
+          </p:nvPr>
+        </p:nvSpPr>
+        <p:spPr/>
+      </p:sp>
+      <p:sp>
+        <p:nvSpPr>
+          <p:cNvPr id="3" name="Notes Placeholder 2"/>
+          <p:cNvSpPr>
+            <a:spLocks noGrp="1"/>
+          </p:cNvSpPr>
+          <p:nvPr>
+            <p:ph type="body" idx="3" sz="quarter"/>
+          </p:nvPr>
+        </p:nvSpPr>
+        <p:spPr/>
+        <p:txBody>
+          <a:bodyPr/>
+          <a:lstStyle/>
+          <a:p>
+            <a:r>
+              <a:t>Cuatro terminos se confunden de forma sistematica y conviene fijarlos con una sola analogia.</a:t>
+            </a:r>
+          </a:p>
+          <a:p/>
+          <a:p>
+            <a:r>
+              <a:t>De ahi la unica optimizacion que hay que ensenar hoy: copiar primero el archivo de dependencias e instalarlas, y solo despues copiar el codigo fuente, porque el codigo cambia en cada commit y las dependencias casi nunca.</a:t>
+            </a:r>
+          </a:p>
+        </p:txBody>
+      </p:sp>
+      <p:sp>
+        <p:nvSpPr>
+          <p:cNvPr id="4" name="Slide Number Placeholder 3"/>
+          <p:cNvSpPr>
+            <a:spLocks noGrp="1"/>
+          </p:cNvSpPr>
+          <p:nvPr>
+            <p:ph type="sldNum" idx="5" sz="quarter"/>
+          </p:nvPr>
+        </p:nvSpPr>
+        <p:spPr/>
+      </p:sp>
+    </p:spTree>
+  </p:cSld>
+  <p:clrMapOvr>
+    <a:masterClrMapping/>
+  </p:clrMapOvr>
+</p:notes>
+</file>
+
+<file path=ppt/notesSlides/notesSlide6.xml><?xml version="1.0" encoding="utf-8"?>
+<p:notes xmlns:a="http://schemas.openxmlformats.org/drawingml/2006/main" xmlns:p="http://schemas.openxmlformats.org/presentationml/2006/main" xmlns:r="http://schemas.openxmlformats.org/officeDocument/2006/relationships">
+  <p:cSld>
+    <p:spTree>
+      <p:nvGrpSpPr>
+        <p:cNvPr id="1" name=""/>
+        <p:cNvGrpSpPr/>
+        <p:nvPr/>
+      </p:nvGrpSpPr>
+      <p:grpSpPr>
+        <a:xfrm>
+          <a:off x="0" y="0"/>
+          <a:ext cx="0" cy="0"/>
+          <a:chOff x="0" y="0"/>
+          <a:chExt cx="0" cy="0"/>
+        </a:xfrm>
+      </p:grpSpPr>
+      <p:sp>
+        <p:nvSpPr>
+          <p:cNvPr id="2" name="Slide Image Placeholder 1"/>
+          <p:cNvSpPr>
+            <a:spLocks noGrp="1"/>
+          </p:cNvSpPr>
+          <p:nvPr>
+            <p:ph type="sldImg" idx="2"/>
+          </p:nvPr>
+        </p:nvSpPr>
+        <p:spPr/>
+      </p:sp>
+      <p:sp>
+        <p:nvSpPr>
+          <p:cNvPr id="3" name="Notes Placeholder 2"/>
+          <p:cNvSpPr>
+            <a:spLocks noGrp="1"/>
+          </p:cNvSpPr>
+          <p:nvPr>
+            <p:ph type="body" idx="3" sz="quarter"/>
+          </p:nvPr>
+        </p:nvSpPr>
+        <p:spPr/>
+        <p:txBody>
+          <a:bodyPr/>
+          <a:lstStyle/>
+          <a:p>
+            <a:r>
+              <a:t>Primer ejemplo concreto en CloudLite.</a:t>
+            </a:r>
+          </a:p>
+          <a:p/>
+          <a:p>
+            <a:r>
+              <a:t>Su Dockerfile tiene siete instrucciones —esa cifra se califica, asi que conviene contarlas en voz alta— y el docente debe poder explicar cada una.</a:t>
+            </a:r>
+          </a:p>
+          <a:p/>
+          <a:p>
+            <a:r>
+              <a:t>WORKDIR /app fija el directorio dentro del contenedor donde ocurrira todo lo demas.</a:t>
+            </a:r>
+          </a:p>
+          <a:p/>
+          <a:p>
+            <a:r>
+              <a:t>COPY package*.json./ trae solo la lista de dependencias.</a:t>
+            </a:r>
+          </a:p>
+          <a:p/>
+          <a:p>
+            <a:r>
+              <a:t>COPY.. trae el resto del codigo, y va DESPUES por la razon de cache de la seccion anterior.</a:t>
+            </a:r>
+          </a:p>
+          <a:p/>
+          <a:p>
+            <a:r>
+              <a:t>Y CMD indica que comando ejecutar cuando el contenedor arranque, uno solo y en primer plano.</a:t>
+            </a:r>
+          </a:p>
+          <a:p/>
+          <a:p>
+            <a:r>
+              <a:t>Por eso al lado del Dockerfile va un segundo archivo, el.dockerignore, con al menos.env, node_modules y.git.</a:t>
+            </a:r>
+          </a:p>
+          <a:p/>
+          <a:p>
+            <a:r>
+              <a:t>Lo que realmente publica el puerto es la opcion -p al ejecutar, y ese es el tema de la diapositiva siguiente.</a:t>
+            </a:r>
+          </a:p>
+        </p:txBody>
+      </p:sp>
+      <p:sp>
+        <p:nvSpPr>
+          <p:cNvPr id="4" name="Slide Number Placeholder 3"/>
+          <p:cNvSpPr>
+            <a:spLocks noGrp="1"/>
+          </p:cNvSpPr>
+          <p:nvPr>
+            <p:ph type="sldNum" idx="5" sz="quarter"/>
+          </p:nvPr>
+        </p:nvSpPr>
+        <p:spPr/>
+      </p:sp>
+    </p:spTree>
+  </p:cSld>
+  <p:clrMapOvr>
+    <a:masterClrMapping/>
+  </p:clrMapOvr>
+</p:notes>
+</file>
+
+<file path=ppt/notesSlides/notesSlide7.xml><?xml version="1.0" encoding="utf-8"?>
+<p:notes xmlns:a="http://schemas.openxmlformats.org/drawingml/2006/main" xmlns:p="http://schemas.openxmlformats.org/presentationml/2006/main" xmlns:r="http://schemas.openxmlformats.org/officeDocument/2006/relationships">
+  <p:cSld>
+    <p:spTree>
+      <p:nvGrpSpPr>
+        <p:cNvPr id="1" name=""/>
+        <p:cNvGrpSpPr/>
+        <p:nvPr/>
+      </p:nvGrpSpPr>
+      <p:grpSpPr>
+        <a:xfrm>
+          <a:off x="0" y="0"/>
+          <a:ext cx="0" cy="0"/>
+          <a:chOff x="0" y="0"/>
+          <a:chExt cx="0" cy="0"/>
+        </a:xfrm>
+      </p:grpSpPr>
+      <p:sp>
+        <p:nvSpPr>
+          <p:cNvPr id="2" name="Slide Image Placeholder 1"/>
+          <p:cNvSpPr>
+            <a:spLocks noGrp="1"/>
+          </p:cNvSpPr>
+          <p:nvPr>
+            <p:ph type="sldImg" idx="2"/>
+          </p:nvPr>
+        </p:nvSpPr>
+        <p:spPr/>
+      </p:sp>
+      <p:sp>
+        <p:nvSpPr>
+          <p:cNvPr id="3" name="Notes Placeholder 2"/>
+          <p:cNvSpPr>
+            <a:spLocks noGrp="1"/>
+          </p:cNvSpPr>
+          <p:nvPr>
+            <p:ph type="body" idx="3" sz="quarter"/>
+          </p:nvPr>
+        </p:nvSpPr>
+        <p:spPr/>
+        <p:txBody>
+          <a:bodyPr/>
+          <a:lstStyle/>
+          <a:p>
+            <a:r>
+              <a:t>El -d lo manda a segundo plano y el --name le da un nombre estable para no andar copiando identificadores.</a:t>
+            </a:r>
+          </a:p>
+          <a:p/>
+          <a:p>
+            <a:r>
+              <a:t>Y hay que anunciar el sintoma de invertirlos, que es lo que hace perder la tarde: docker ps sigue reportando el contenedor como Up y la peticion simplemente no obtiene respuesta o muere con una conexion reiniciada.</a:t>
+            </a:r>
+          </a:p>
+          <a:p/>
+          <a:p>
+            <a:r>
+              <a:t>El sintoma no senala la causa, y el estudiante busca el error en el codigo cuando esta en una linea del comando.</a:t>
+            </a:r>
+          </a:p>
+          <a:p/>
+          <a:p>
+            <a:r>
+              <a:t>Por eso el cuerpo lleva al menos un campo verificable, por ejemplo un estado y el nombre del servicio en JSON.</a:t>
+            </a:r>
+          </a:p>
+        </p:txBody>
+      </p:sp>
+      <p:sp>
+        <p:nvSpPr>
+          <p:cNvPr id="4" name="Slide Number Placeholder 3"/>
+          <p:cNvSpPr>
+            <a:spLocks noGrp="1"/>
+          </p:cNvSpPr>
+          <p:nvPr>
+            <p:ph type="sldNum" idx="5" sz="quarter"/>
+          </p:nvPr>
+        </p:nvSpPr>
+        <p:spPr/>
+      </p:sp>
+    </p:spTree>
+  </p:cSld>
+  <p:clrMapOvr>
+    <a:masterClrMapping/>
+  </p:clrMapOvr>
+</p:notes>
+</file>
+
+<file path=ppt/notesSlides/notesSlide8.xml><?xml version="1.0" encoding="utf-8"?>
+<p:notes xmlns:a="http://schemas.openxmlformats.org/drawingml/2006/main" xmlns:p="http://schemas.openxmlformats.org/presentationml/2006/main" xmlns:r="http://schemas.openxmlformats.org/officeDocument/2006/relationships">
+  <p:cSld>
+    <p:spTree>
+      <p:nvGrpSpPr>
+        <p:cNvPr id="1" name=""/>
+        <p:cNvGrpSpPr/>
+        <p:nvPr/>
+      </p:nvGrpSpPr>
+      <p:grpSpPr>
+        <a:xfrm>
+          <a:off x="0" y="0"/>
+          <a:ext cx="0" cy="0"/>
+          <a:chOff x="0" y="0"/>
+          <a:chExt cx="0" cy="0"/>
+        </a:xfrm>
+      </p:grpSpPr>
+      <p:sp>
+        <p:nvSpPr>
+          <p:cNvPr id="2" name="Slide Image Placeholder 1"/>
+          <p:cNvSpPr>
+            <a:spLocks noGrp="1"/>
+          </p:cNvSpPr>
+          <p:nvPr>
+            <p:ph type="sldImg" idx="2"/>
+          </p:nvPr>
+        </p:nvSpPr>
+        <p:spPr/>
+      </p:sp>
+      <p:sp>
+        <p:nvSpPr>
+          <p:cNvPr id="3" name="Notes Placeholder 2"/>
+          <p:cNvSpPr>
+            <a:spLocks noGrp="1"/>
+          </p:cNvSpPr>
+          <p:nvPr>
+            <p:ph type="body" idx="3" sz="quarter"/>
+          </p:nvPr>
+        </p:nvSpPr>
+        <p:spPr/>
+        <p:txBody>
+          <a:bodyPr/>
+          <a:lstStyle/>
+          <a:p>
+            <a:r>
+              <a:t>Segundo ejemplo concreto.</a:t>
+            </a:r>
+          </a:p>
+          <a:p/>
+          <a:p>
+            <a:r>
+              <a:t>La columna de estado es la que hay que mirar: si dice Up seguido de un tiempo, el contenedor vive; si dice Exited con un codigo entre parentesis, murio, y ese codigo es la primera pista del problema.</a:t>
+            </a:r>
+          </a:p>
+          <a:p/>
+          <a:p>
+            <a:r>
+              <a:t>Hay dos limites que conviene anunciar ANTES de empezar y no despues, porque cambian como se planifica la hora de taller.</a:t>
+            </a:r>
+          </a:p>
+          <a:p/>
+          <a:p>
+            <a:r>
+              <a:t>De ahi sale la regla operativa del dia, y hay que decirla como consecuencia del limite y no como consejo suelto: el Dockerfile se escribe en la carpeta del proyecto y se PEGA en el laboratorio, nunca al contrario, y las capturas se guardan antes de cerrar.</a:t>
+            </a:r>
+          </a:p>
+          <a:p/>
+          <a:p>
+            <a:r>
+              <a:t>Por eso la alterna es alterna y no la primera opcion.</a:t>
+            </a:r>
+          </a:p>
+        </p:txBody>
+      </p:sp>
+      <p:sp>
+        <p:nvSpPr>
+          <p:cNvPr id="4" name="Slide Number Placeholder 3"/>
+          <p:cNvSpPr>
+            <a:spLocks noGrp="1"/>
+          </p:cNvSpPr>
+          <p:nvPr>
+            <p:ph type="sldNum" idx="5" sz="quarter"/>
+          </p:nvPr>
+        </p:nvSpPr>
+        <p:spPr/>
+      </p:sp>
+    </p:spTree>
+  </p:cSld>
+  <p:clrMapOvr>
+    <a:masterClrMapping/>
+  </p:clrMapOvr>
+</p:notes>
+</file>
+
+<file path=ppt/notesSlides/notesSlide9.xml><?xml version="1.0" encoding="utf-8"?>
+<p:notes xmlns:a="http://schemas.openxmlformats.org/drawingml/2006/main" xmlns:p="http://schemas.openxmlformats.org/presentationml/2006/main" xmlns:r="http://schemas.openxmlformats.org/officeDocument/2006/relationships">
+  <p:cSld>
+    <p:spTree>
+      <p:nvGrpSpPr>
+        <p:cNvPr id="1" name=""/>
+        <p:cNvGrpSpPr/>
+        <p:nvPr/>
+      </p:nvGrpSpPr>
+      <p:grpSpPr>
+        <a:xfrm>
+          <a:off x="0" y="0"/>
+          <a:ext cx="0" cy="0"/>
+          <a:chOff x="0" y="0"/>
+          <a:chExt cx="0" cy="0"/>
+        </a:xfrm>
+      </p:grpSpPr>
+      <p:sp>
+        <p:nvSpPr>
+          <p:cNvPr id="2" name="Slide Image Placeholder 1"/>
+          <p:cNvSpPr>
+            <a:spLocks noGrp="1"/>
+          </p:cNvSpPr>
+          <p:nvPr>
+            <p:ph type="sldImg" idx="2"/>
+          </p:nvPr>
+        </p:nvSpPr>
+        <p:spPr/>
+      </p:sp>
+      <p:sp>
+        <p:nvSpPr>
+          <p:cNvPr id="3" name="Notes Placeholder 2"/>
+          <p:cNvSpPr>
+            <a:spLocks noGrp="1"/>
+          </p:cNvSpPr>
+          <p:nvPr>
+            <p:ph type="body" idx="3" sz="quarter"/>
+          </p:nvPr>
+        </p:nvSpPr>
+        <p:spPr/>
+        <p:txBody>
+          <a:bodyPr/>
+          <a:lstStyle/>
+          <a:p>
+            <a:r>
+              <a:t>Tres preguntas se repiten en esta clase.</a:t>
+            </a:r>
+          </a:p>
+          <a:p/>
+          <a:p>
+            <a:r>
+              <a:t>La respuesta, dicha desde ya, es no.</a:t>
+            </a:r>
+          </a:p>
+        </p:txBody>
+      </p:sp>
+      <p:sp>
+        <p:nvSpPr>
+          <p:cNvPr id="4" name="Slide Number Placeholder 3"/>
+          <p:cNvSpPr>
+            <a:spLocks noGrp="1"/>
+          </p:cNvSpPr>
+          <p:nvPr>
+            <p:ph type="sldNum" idx="5" sz="quarter"/>
+          </p:nvPr>
+        </p:nvSpPr>
+        <p:spPr/>
+      </p:sp>
+    </p:spTree>
+  </p:cSld>
+  <p:clrMapOvr>
+    <a:masterClrMapping/>
+  </p:clrMapOvr>
+</p:notes>
 </file>
 
 <file path=ppt/slideLayouts/slideLayout1.xml><?xml version="1.0" encoding="utf-8"?>
@@ -3355,13 +4445,22 @@
               </a:spcAft>
             </a:pPr>
             <a:r>
+              <a:rPr sz="1500" b="0" i="0">
+                <a:solidFill>
+                  <a:srgbClr val="333333"/>
+                </a:solidFill>
+                <a:latin typeface="Calibri"/>
+              </a:rPr>
+              <a:t>Bloque </a:t>
+            </a:r>
+            <a:r>
               <a:rPr sz="1500" b="1" i="0">
                 <a:solidFill>
                   <a:srgbClr val="333333"/>
                 </a:solidFill>
                 <a:latin typeface="Calibri"/>
               </a:rPr>
-              <a:t>Hoy avanzamos el PI en:</a:t>
+              <a:t>120 min</a:t>
             </a:r>
             <a:r>
               <a:rPr sz="1500" b="0" i="0">
@@ -3370,7 +4469,25 @@
                 </a:solidFill>
                 <a:latin typeface="Calibri"/>
               </a:rPr>
-              <a:t> Contenerizar un stub del servicio principal de CloudLite</a:t>
+              <a:t> · sesión </a:t>
+            </a:r>
+            <a:r>
+              <a:rPr sz="1500" b="1" i="0">
+                <a:solidFill>
+                  <a:srgbClr val="333333"/>
+                </a:solidFill>
+                <a:latin typeface="Calibri"/>
+              </a:rPr>
+              <a:t>virtual síncrona</a:t>
+            </a:r>
+            <a:r>
+              <a:rPr sz="1500" b="0" i="0">
+                <a:solidFill>
+                  <a:srgbClr val="333333"/>
+                </a:solidFill>
+                <a:latin typeface="Calibri"/>
+              </a:rPr>
+              <a:t> por Google Meet.</a:t>
             </a:r>
           </a:p>
           <a:p>
@@ -3386,41 +4503,7 @@
                 </a:solidFill>
                 <a:latin typeface="Calibri"/>
               </a:rPr>
-              <a:t>Bloque </a:t>
-            </a:r>
-            <a:r>
-              <a:rPr sz="1500" b="1" i="0">
-                <a:solidFill>
-                  <a:srgbClr val="333333"/>
-                </a:solidFill>
-                <a:latin typeface="Calibri"/>
-              </a:rPr>
-              <a:t>120 min</a:t>
-            </a:r>
-            <a:r>
-              <a:rPr sz="1500" b="0" i="0">
-                <a:solidFill>
-                  <a:srgbClr val="333333"/>
-                </a:solidFill>
-                <a:latin typeface="Calibri"/>
-              </a:rPr>
-              <a:t> · Teoría breve · Taller PI · cierre.</a:t>
-            </a:r>
-          </a:p>
-          <a:p>
-            <a:pPr>
-              <a:spcAft>
-                <a:spcPts val="800"/>
-              </a:spcAft>
-            </a:pPr>
-            <a:r>
-              <a:rPr sz="1500" b="0" i="0">
-                <a:solidFill>
-                  <a:srgbClr val="333333"/>
-                </a:solidFill>
-                <a:latin typeface="Calibri"/>
-              </a:rPr>
-              <a:t>Herramientas gratis + navegador · sin AWS/GCP/Oracle Cloud.</a:t>
+              <a:t>Conceptos del tema, ejemplos resueltos sobre CloudLite y cierre conceptual.</a:t>
             </a:r>
           </a:p>
         </p:txBody>
@@ -6386,7 +7469,7 @@
                 </a:solidFill>
                 <a:latin typeface="Calibri"/>
               </a:rPr>
-              <a:t> Encuadre: hoy avanzamos el PI en… + entregable concreto.</a:t>
+              <a:t> Encuadre del tema y objetivos de la clase.</a:t>
             </a:r>
           </a:p>
           <a:p>
@@ -6402,7 +7485,7 @@
                 </a:solidFill>
                 <a:latin typeface="Calibri"/>
               </a:rPr>
-              <a:t>10–40</a:t>
+              <a:t>10–70</a:t>
             </a:r>
             <a:r>
               <a:rPr sz="2000" b="0" i="0">
@@ -6411,7 +7494,7 @@
                 </a:solidFill>
                 <a:latin typeface="Calibri"/>
               </a:rPr>
-              <a:t> Teoría Core breve (solo lo necesario para el taller PI).</a:t>
+              <a:t> Conceptos del tema, uno por lámina, con ejemplos sobre CloudLite.</a:t>
             </a:r>
           </a:p>
           <a:p>
@@ -6436,7 +7519,7 @@
                 </a:solidFill>
                 <a:latin typeface="Calibri"/>
               </a:rPr>
-              <a:t>40–100</a:t>
+              <a:t>70–100</a:t>
             </a:r>
             <a:r>
               <a:rPr sz="2000" b="0" i="0">
@@ -6445,7 +7528,7 @@
                 </a:solidFill>
                 <a:latin typeface="Calibri"/>
               </a:rPr>
-              <a:t> Trabajo guiado del PI (demo en vivo + avance individual).</a:t>
+              <a:t> Ejemplos resueltos y demo del docente sobre el tema.</a:t>
             </a:r>
           </a:p>
           <a:p>
@@ -6470,7 +7553,7 @@
                 </a:solidFill>
                 <a:latin typeface="Calibri"/>
               </a:rPr>
-              <a:t> Revisión de evidencias del PI.</a:t>
+              <a:t> Práctica (opcional, guía en la carpeta de la clase).</a:t>
             </a:r>
           </a:p>
           <a:p>
@@ -6495,7 +7578,7 @@
                 </a:solidFill>
                 <a:latin typeface="Calibri"/>
               </a:rPr>
-              <a:t> Cierre: criterio de éxito + plazo en la fecha que indique el docente.</a:t>
+              <a:t> Preguntas y cierre conceptual.</a:t>
             </a:r>
           </a:p>
         </p:txBody>
@@ -13079,13 +14162,13 @@
         <p:spPr>
           <a:xfrm>
             <a:off x="0" y="0"/>
-            <a:ext cx="12191695" cy="1170432"/>
+            <a:ext cx="12191695" cy="164592"/>
           </a:xfrm>
           <a:prstGeom prst="rect">
             <a:avLst/>
           </a:prstGeom>
           <a:solidFill>
-            <a:srgbClr val="095292"/>
+            <a:srgbClr val="269CCB"/>
           </a:solidFill>
           <a:ln>
             <a:noFill/>
@@ -13113,251 +14196,9 @@
           </a:p>
         </p:txBody>
       </p:sp>
-      <p:sp>
-        <p:nvSpPr>
-          <p:cNvPr id="3" name="Rectangle 2"/>
-          <p:cNvSpPr/>
-          <p:nvPr/>
-        </p:nvSpPr>
-        <p:spPr>
-          <a:xfrm>
-            <a:off x="0" y="1170432"/>
-            <a:ext cx="12191695" cy="41148"/>
-          </a:xfrm>
-          <a:prstGeom prst="rect">
-            <a:avLst/>
-          </a:prstGeom>
-          <a:solidFill>
-            <a:srgbClr val="FFD000"/>
-          </a:solidFill>
-          <a:ln>
-            <a:noFill/>
-          </a:ln>
-        </p:spPr>
-        <p:style>
-          <a:lnRef idx="1">
-            <a:schemeClr val="accent1"/>
-          </a:lnRef>
-          <a:fillRef idx="3">
-            <a:schemeClr val="accent1"/>
-          </a:fillRef>
-          <a:effectRef idx="2">
-            <a:schemeClr val="accent1"/>
-          </a:effectRef>
-          <a:fontRef idx="minor">
-            <a:schemeClr val="lt1"/>
-          </a:fontRef>
-        </p:style>
-        <p:txBody>
-          <a:bodyPr rtlCol="0" anchor="ctr"/>
-          <a:lstStyle/>
-          <a:p>
-            <a:pPr algn="ctr"/>
-          </a:p>
-        </p:txBody>
-      </p:sp>
-      <p:sp>
-        <p:nvSpPr>
-          <p:cNvPr id="4" name="TextBox 3"/>
-          <p:cNvSpPr txBox="1"/>
-          <p:nvPr/>
-        </p:nvSpPr>
-        <p:spPr>
-          <a:xfrm>
-            <a:off x="457200" y="164592"/>
-            <a:ext cx="11277295" cy="384048"/>
-          </a:xfrm>
-          <a:prstGeom prst="rect">
-            <a:avLst/>
-          </a:prstGeom>
-          <a:noFill/>
-        </p:spPr>
-        <p:txBody>
-          <a:bodyPr wrap="square">
-            <a:spAutoFit/>
-          </a:bodyPr>
-          <a:lstStyle/>
-          <a:p>
-            <a:r>
-              <a:rPr sz="2600" b="1" i="0">
-                <a:solidFill>
-                  <a:srgbClr val="FFFFFF"/>
-                </a:solidFill>
-                <a:latin typeface="Calibri"/>
-              </a:rPr>
-              <a:t>Herramientas de hoy</a:t>
-            </a:r>
-          </a:p>
-        </p:txBody>
-      </p:sp>
-      <p:sp>
-        <p:nvSpPr>
-          <p:cNvPr id="5" name="TextBox 4"/>
-          <p:cNvSpPr txBox="1"/>
-          <p:nvPr/>
-        </p:nvSpPr>
-        <p:spPr>
-          <a:xfrm>
-            <a:off x="457200" y="566928"/>
-            <a:ext cx="11277295" cy="411480"/>
-          </a:xfrm>
-          <a:prstGeom prst="rect">
-            <a:avLst/>
-          </a:prstGeom>
-          <a:noFill/>
-        </p:spPr>
-        <p:txBody>
-          <a:bodyPr wrap="square">
-            <a:spAutoFit/>
-          </a:bodyPr>
-          <a:lstStyle/>
-          <a:p>
-            <a:r>
-              <a:rPr sz="1400" b="0" i="0">
-                <a:solidFill>
-                  <a:srgbClr val="B8D8EE"/>
-                </a:solidFill>
-                <a:latin typeface="Calibri"/>
-              </a:rPr>
-              <a:t>Gratis · navegador o free tier · sin cuenta de pago</a:t>
-            </a:r>
-          </a:p>
-        </p:txBody>
-      </p:sp>
-      <p:sp>
-        <p:nvSpPr>
-          <p:cNvPr id="6" name="Rounded Rectangle 5"/>
-          <p:cNvSpPr/>
-          <p:nvPr/>
-        </p:nvSpPr>
-        <p:spPr>
-          <a:xfrm>
-            <a:off x="457200" y="1591056"/>
-            <a:ext cx="3624986" cy="2299716"/>
-          </a:xfrm>
-          <a:prstGeom prst="roundRect">
-            <a:avLst>
-              <a:gd name="adj" fmla="val 12000"/>
-            </a:avLst>
-          </a:prstGeom>
-          <a:solidFill>
-            <a:srgbClr val="F2F2F2"/>
-          </a:solidFill>
-          <a:ln>
-            <a:noFill/>
-          </a:ln>
-        </p:spPr>
-        <p:style>
-          <a:lnRef idx="1">
-            <a:schemeClr val="accent1"/>
-          </a:lnRef>
-          <a:fillRef idx="3">
-            <a:schemeClr val="accent1"/>
-          </a:fillRef>
-          <a:effectRef idx="2">
-            <a:schemeClr val="accent1"/>
-          </a:effectRef>
-          <a:fontRef idx="minor">
-            <a:schemeClr val="lt1"/>
-          </a:fontRef>
-        </p:style>
-        <p:txBody>
-          <a:bodyPr rtlCol="0" anchor="ctr"/>
-          <a:lstStyle/>
-          <a:p>
-            <a:pPr algn="ctr"/>
-          </a:p>
-        </p:txBody>
-      </p:sp>
-      <p:sp>
-        <p:nvSpPr>
-          <p:cNvPr id="7" name="Rectangle 6"/>
-          <p:cNvSpPr/>
-          <p:nvPr/>
-        </p:nvSpPr>
-        <p:spPr>
-          <a:xfrm>
-            <a:off x="457200" y="1591056"/>
-            <a:ext cx="3624986" cy="64008"/>
-          </a:xfrm>
-          <a:prstGeom prst="rect">
-            <a:avLst/>
-          </a:prstGeom>
-          <a:solidFill>
-            <a:srgbClr val="095292"/>
-          </a:solidFill>
-          <a:ln>
-            <a:noFill/>
-          </a:ln>
-        </p:spPr>
-        <p:style>
-          <a:lnRef idx="1">
-            <a:schemeClr val="accent1"/>
-          </a:lnRef>
-          <a:fillRef idx="3">
-            <a:schemeClr val="accent1"/>
-          </a:fillRef>
-          <a:effectRef idx="2">
-            <a:schemeClr val="accent1"/>
-          </a:effectRef>
-          <a:fontRef idx="minor">
-            <a:schemeClr val="lt1"/>
-          </a:fontRef>
-        </p:style>
-        <p:txBody>
-          <a:bodyPr rtlCol="0" anchor="ctr"/>
-          <a:lstStyle/>
-          <a:p>
-            <a:pPr algn="ctr"/>
-          </a:p>
-        </p:txBody>
-      </p:sp>
-      <p:sp>
-        <p:nvSpPr>
-          <p:cNvPr id="8" name="Rectangle 7"/>
-          <p:cNvSpPr/>
-          <p:nvPr/>
-        </p:nvSpPr>
-        <p:spPr>
-          <a:xfrm>
-            <a:off x="457200" y="1655064"/>
-            <a:ext cx="3624986" cy="27432"/>
-          </a:xfrm>
-          <a:prstGeom prst="rect">
-            <a:avLst/>
-          </a:prstGeom>
-          <a:solidFill>
-            <a:srgbClr val="FFD000"/>
-          </a:solidFill>
-          <a:ln>
-            <a:noFill/>
-          </a:ln>
-        </p:spPr>
-        <p:style>
-          <a:lnRef idx="1">
-            <a:schemeClr val="accent1"/>
-          </a:lnRef>
-          <a:fillRef idx="3">
-            <a:schemeClr val="accent1"/>
-          </a:fillRef>
-          <a:effectRef idx="2">
-            <a:schemeClr val="accent1"/>
-          </a:effectRef>
-          <a:fontRef idx="minor">
-            <a:schemeClr val="lt1"/>
-          </a:fontRef>
-        </p:style>
-        <p:txBody>
-          <a:bodyPr rtlCol="0" anchor="ctr"/>
-          <a:lstStyle/>
-          <a:p>
-            <a:pPr algn="ctr"/>
-          </a:p>
-        </p:txBody>
-      </p:sp>
       <p:pic>
         <p:nvPicPr>
-          <p:cNvPr id="9" name="Picture 8" descr="killercoda.png"/>
+          <p:cNvPr id="3" name="Picture 2" descr="logo_uniajc_color.png"/>
           <p:cNvPicPr>
             <a:picLocks noChangeAspect="1"/>
           </p:cNvPicPr>
@@ -13371,8 +14212,8 @@
         </p:blipFill>
         <p:spPr>
           <a:xfrm>
-            <a:off x="1659331" y="1847087"/>
-            <a:ext cx="1220724" cy="1220724"/>
+            <a:off x="10271455" y="5998464"/>
+            <a:ext cx="1463040" cy="643233"/>
           </a:xfrm>
           <a:prstGeom prst="rect">
             <a:avLst/>
@@ -13381,14 +14222,14 @@
       </p:pic>
       <p:sp>
         <p:nvSpPr>
-          <p:cNvPr id="10" name="TextBox 9"/>
+          <p:cNvPr id="4" name="TextBox 3"/>
           <p:cNvSpPr txBox="1"/>
           <p:nvPr/>
         </p:nvSpPr>
         <p:spPr>
           <a:xfrm>
-            <a:off x="530352" y="3159251"/>
-            <a:ext cx="3478682" cy="621792"/>
+            <a:off x="457200" y="1737360"/>
+            <a:ext cx="11277295" cy="1097280"/>
           </a:xfrm>
           <a:prstGeom prst="rect">
             <a:avLst/>
@@ -13396,660 +14237,32 @@
           <a:noFill/>
         </p:spPr>
         <p:txBody>
-          <a:bodyPr wrap="square" anchor="t"/>
+          <a:bodyPr wrap="square" anchor="ctr"/>
           <a:lstStyle/>
           <a:p>
             <a:pPr algn="ctr"/>
             <a:r>
-              <a:rPr sz="1300" b="1" i="0">
+              <a:rPr sz="3400" b="1" i="0">
                 <a:solidFill>
                   <a:srgbClr val="095292"/>
                 </a:solidFill>
                 <a:latin typeface="Calibri"/>
               </a:rPr>
-              <a:t>Killercoda</a:t>
-            </a:r>
-          </a:p>
-          <a:p>
-            <a:pPr algn="ctr">
-              <a:spcBef>
-                <a:spcPts val="200"/>
-              </a:spcBef>
-            </a:pPr>
-            <a:r>
-              <a:rPr sz="1000" b="0" i="0">
-                <a:solidFill>
-                  <a:srgbClr val="666666"/>
-                </a:solidFill>
-                <a:latin typeface="Calibri"/>
-              </a:rPr>
-              <a:t>Lab del dia · sesion 1 h</a:t>
-            </a:r>
-          </a:p>
-        </p:txBody>
-      </p:sp>
-      <p:sp>
-        <p:nvSpPr>
-          <p:cNvPr id="11" name="Rounded Rectangle 10"/>
-          <p:cNvSpPr/>
-          <p:nvPr/>
-        </p:nvSpPr>
-        <p:spPr>
-          <a:xfrm>
-            <a:off x="4283354" y="1591056"/>
-            <a:ext cx="3624986" cy="2299716"/>
-          </a:xfrm>
-          <a:prstGeom prst="roundRect">
-            <a:avLst>
-              <a:gd name="adj" fmla="val 12000"/>
-            </a:avLst>
-          </a:prstGeom>
-          <a:solidFill>
-            <a:srgbClr val="F2F2F2"/>
-          </a:solidFill>
-          <a:ln>
-            <a:noFill/>
-          </a:ln>
-        </p:spPr>
-        <p:style>
-          <a:lnRef idx="1">
-            <a:schemeClr val="accent1"/>
-          </a:lnRef>
-          <a:fillRef idx="3">
-            <a:schemeClr val="accent1"/>
-          </a:fillRef>
-          <a:effectRef idx="2">
-            <a:schemeClr val="accent1"/>
-          </a:effectRef>
-          <a:fontRef idx="minor">
-            <a:schemeClr val="lt1"/>
-          </a:fontRef>
-        </p:style>
-        <p:txBody>
-          <a:bodyPr rtlCol="0" anchor="ctr"/>
-          <a:lstStyle/>
-          <a:p>
-            <a:pPr algn="ctr"/>
-          </a:p>
-        </p:txBody>
-      </p:sp>
-      <p:sp>
-        <p:nvSpPr>
-          <p:cNvPr id="12" name="Rectangle 11"/>
-          <p:cNvSpPr/>
-          <p:nvPr/>
-        </p:nvSpPr>
-        <p:spPr>
-          <a:xfrm>
-            <a:off x="4283354" y="1591056"/>
-            <a:ext cx="3624986" cy="64008"/>
-          </a:xfrm>
-          <a:prstGeom prst="rect">
-            <a:avLst/>
-          </a:prstGeom>
-          <a:solidFill>
-            <a:srgbClr val="095292"/>
-          </a:solidFill>
-          <a:ln>
-            <a:noFill/>
-          </a:ln>
-        </p:spPr>
-        <p:style>
-          <a:lnRef idx="1">
-            <a:schemeClr val="accent1"/>
-          </a:lnRef>
-          <a:fillRef idx="3">
-            <a:schemeClr val="accent1"/>
-          </a:fillRef>
-          <a:effectRef idx="2">
-            <a:schemeClr val="accent1"/>
-          </a:effectRef>
-          <a:fontRef idx="minor">
-            <a:schemeClr val="lt1"/>
-          </a:fontRef>
-        </p:style>
-        <p:txBody>
-          <a:bodyPr rtlCol="0" anchor="ctr"/>
-          <a:lstStyle/>
-          <a:p>
-            <a:pPr algn="ctr"/>
-          </a:p>
-        </p:txBody>
-      </p:sp>
-      <p:sp>
-        <p:nvSpPr>
-          <p:cNvPr id="13" name="Rectangle 12"/>
-          <p:cNvSpPr/>
-          <p:nvPr/>
-        </p:nvSpPr>
-        <p:spPr>
-          <a:xfrm>
-            <a:off x="4283354" y="1655064"/>
-            <a:ext cx="3624986" cy="27432"/>
-          </a:xfrm>
-          <a:prstGeom prst="rect">
-            <a:avLst/>
-          </a:prstGeom>
-          <a:solidFill>
-            <a:srgbClr val="FFD000"/>
-          </a:solidFill>
-          <a:ln>
-            <a:noFill/>
-          </a:ln>
-        </p:spPr>
-        <p:style>
-          <a:lnRef idx="1">
-            <a:schemeClr val="accent1"/>
-          </a:lnRef>
-          <a:fillRef idx="3">
-            <a:schemeClr val="accent1"/>
-          </a:fillRef>
-          <a:effectRef idx="2">
-            <a:schemeClr val="accent1"/>
-          </a:effectRef>
-          <a:fontRef idx="minor">
-            <a:schemeClr val="lt1"/>
-          </a:fontRef>
-        </p:style>
-        <p:txBody>
-          <a:bodyPr rtlCol="0" anchor="ctr"/>
-          <a:lstStyle/>
-          <a:p>
-            <a:pPr algn="ctr"/>
-          </a:p>
-        </p:txBody>
-      </p:sp>
-      <p:pic>
-        <p:nvPicPr>
-          <p:cNvPr id="14" name="Picture 13" descr="labex.png"/>
-          <p:cNvPicPr>
-            <a:picLocks noChangeAspect="1"/>
-          </p:cNvPicPr>
-          <p:nvPr/>
-        </p:nvPicPr>
-        <p:blipFill>
-          <a:blip r:embed="rId3"/>
-          <a:stretch>
-            <a:fillRect/>
-          </a:stretch>
-        </p:blipFill>
-        <p:spPr>
-          <a:xfrm>
-            <a:off x="5485485" y="1847087"/>
-            <a:ext cx="1220724" cy="1220724"/>
-          </a:xfrm>
-          <a:prstGeom prst="rect">
-            <a:avLst/>
-          </a:prstGeom>
-        </p:spPr>
-      </p:pic>
-      <p:sp>
-        <p:nvSpPr>
-          <p:cNvPr id="15" name="TextBox 14"/>
+              <a:t>Clase 3 · cierre conceptual</a:t>
+            </a:r>
+          </a:p>
+        </p:txBody>
+      </p:sp>
+      <p:sp>
+        <p:nvSpPr>
+          <p:cNvPr id="5" name="TextBox 4"/>
           <p:cNvSpPr txBox="1"/>
           <p:nvPr/>
         </p:nvSpPr>
         <p:spPr>
           <a:xfrm>
-            <a:off x="4356506" y="3159251"/>
-            <a:ext cx="3478682" cy="621792"/>
-          </a:xfrm>
-          <a:prstGeom prst="rect">
-            <a:avLst/>
-          </a:prstGeom>
-          <a:noFill/>
-        </p:spPr>
-        <p:txBody>
-          <a:bodyPr wrap="square" anchor="t"/>
-          <a:lstStyle/>
-          <a:p>
-            <a:pPr algn="ctr"/>
-            <a:r>
-              <a:rPr sz="1300" b="1" i="0">
-                <a:solidFill>
-                  <a:srgbClr val="095292"/>
-                </a:solidFill>
-                <a:latin typeface="Calibri"/>
-              </a:rPr>
-              <a:t>LabEx Docker Playground</a:t>
-            </a:r>
-          </a:p>
-          <a:p>
-            <a:pPr algn="ctr">
-              <a:spcBef>
-                <a:spcPts val="200"/>
-              </a:spcBef>
-            </a:pPr>
-            <a:r>
-              <a:rPr sz="1000" b="0" i="0">
-                <a:solidFill>
-                  <a:srgbClr val="666666"/>
-                </a:solidFill>
-                <a:latin typeface="Calibri"/>
-              </a:rPr>
-              <a:t>Alterna · 3 al dia</a:t>
-            </a:r>
-          </a:p>
-        </p:txBody>
-      </p:sp>
-      <p:sp>
-        <p:nvSpPr>
-          <p:cNvPr id="16" name="Rounded Rectangle 15"/>
-          <p:cNvSpPr/>
-          <p:nvPr/>
-        </p:nvSpPr>
-        <p:spPr>
-          <a:xfrm>
-            <a:off x="8109508" y="1591056"/>
-            <a:ext cx="3624986" cy="2299716"/>
-          </a:xfrm>
-          <a:prstGeom prst="roundRect">
-            <a:avLst>
-              <a:gd name="adj" fmla="val 12000"/>
-            </a:avLst>
-          </a:prstGeom>
-          <a:solidFill>
-            <a:srgbClr val="F2F2F2"/>
-          </a:solidFill>
-          <a:ln>
-            <a:noFill/>
-          </a:ln>
-        </p:spPr>
-        <p:style>
-          <a:lnRef idx="1">
-            <a:schemeClr val="accent1"/>
-          </a:lnRef>
-          <a:fillRef idx="3">
-            <a:schemeClr val="accent1"/>
-          </a:fillRef>
-          <a:effectRef idx="2">
-            <a:schemeClr val="accent1"/>
-          </a:effectRef>
-          <a:fontRef idx="minor">
-            <a:schemeClr val="lt1"/>
-          </a:fontRef>
-        </p:style>
-        <p:txBody>
-          <a:bodyPr rtlCol="0" anchor="ctr"/>
-          <a:lstStyle/>
-          <a:p>
-            <a:pPr algn="ctr"/>
-          </a:p>
-        </p:txBody>
-      </p:sp>
-      <p:sp>
-        <p:nvSpPr>
-          <p:cNvPr id="17" name="Rectangle 16"/>
-          <p:cNvSpPr/>
-          <p:nvPr/>
-        </p:nvSpPr>
-        <p:spPr>
-          <a:xfrm>
-            <a:off x="8109508" y="1591056"/>
-            <a:ext cx="3624986" cy="64008"/>
-          </a:xfrm>
-          <a:prstGeom prst="rect">
-            <a:avLst/>
-          </a:prstGeom>
-          <a:solidFill>
-            <a:srgbClr val="095292"/>
-          </a:solidFill>
-          <a:ln>
-            <a:noFill/>
-          </a:ln>
-        </p:spPr>
-        <p:style>
-          <a:lnRef idx="1">
-            <a:schemeClr val="accent1"/>
-          </a:lnRef>
-          <a:fillRef idx="3">
-            <a:schemeClr val="accent1"/>
-          </a:fillRef>
-          <a:effectRef idx="2">
-            <a:schemeClr val="accent1"/>
-          </a:effectRef>
-          <a:fontRef idx="minor">
-            <a:schemeClr val="lt1"/>
-          </a:fontRef>
-        </p:style>
-        <p:txBody>
-          <a:bodyPr rtlCol="0" anchor="ctr"/>
-          <a:lstStyle/>
-          <a:p>
-            <a:pPr algn="ctr"/>
-          </a:p>
-        </p:txBody>
-      </p:sp>
-      <p:sp>
-        <p:nvSpPr>
-          <p:cNvPr id="18" name="Rectangle 17"/>
-          <p:cNvSpPr/>
-          <p:nvPr/>
-        </p:nvSpPr>
-        <p:spPr>
-          <a:xfrm>
-            <a:off x="8109508" y="1655064"/>
-            <a:ext cx="3624986" cy="27432"/>
-          </a:xfrm>
-          <a:prstGeom prst="rect">
-            <a:avLst/>
-          </a:prstGeom>
-          <a:solidFill>
-            <a:srgbClr val="FFD000"/>
-          </a:solidFill>
-          <a:ln>
-            <a:noFill/>
-          </a:ln>
-        </p:spPr>
-        <p:style>
-          <a:lnRef idx="1">
-            <a:schemeClr val="accent1"/>
-          </a:lnRef>
-          <a:fillRef idx="3">
-            <a:schemeClr val="accent1"/>
-          </a:fillRef>
-          <a:effectRef idx="2">
-            <a:schemeClr val="accent1"/>
-          </a:effectRef>
-          <a:fontRef idx="minor">
-            <a:schemeClr val="lt1"/>
-          </a:fontRef>
-        </p:style>
-        <p:txBody>
-          <a:bodyPr rtlCol="0" anchor="ctr"/>
-          <a:lstStyle/>
-          <a:p>
-            <a:pPr algn="ctr"/>
-          </a:p>
-        </p:txBody>
-      </p:sp>
-      <p:pic>
-        <p:nvPicPr>
-          <p:cNvPr id="19" name="Picture 18" descr="google_docs.png"/>
-          <p:cNvPicPr>
-            <a:picLocks noChangeAspect="1"/>
-          </p:cNvPicPr>
-          <p:nvPr/>
-        </p:nvPicPr>
-        <p:blipFill>
-          <a:blip r:embed="rId4"/>
-          <a:stretch>
-            <a:fillRect/>
-          </a:stretch>
-        </p:blipFill>
-        <p:spPr>
-          <a:xfrm>
-            <a:off x="9311640" y="1847087"/>
-            <a:ext cx="1220724" cy="1220724"/>
-          </a:xfrm>
-          <a:prstGeom prst="rect">
-            <a:avLst/>
-          </a:prstGeom>
-        </p:spPr>
-      </p:pic>
-      <p:sp>
-        <p:nvSpPr>
-          <p:cNvPr id="20" name="TextBox 19"/>
-          <p:cNvSpPr txBox="1"/>
-          <p:nvPr/>
-        </p:nvSpPr>
-        <p:spPr>
-          <a:xfrm>
-            <a:off x="8182660" y="3159251"/>
-            <a:ext cx="3478682" cy="621792"/>
-          </a:xfrm>
-          <a:prstGeom prst="rect">
-            <a:avLst/>
-          </a:prstGeom>
-          <a:noFill/>
-        </p:spPr>
-        <p:txBody>
-          <a:bodyPr wrap="square" anchor="t"/>
-          <a:lstStyle/>
-          <a:p>
-            <a:pPr algn="ctr"/>
-            <a:r>
-              <a:rPr sz="1300" b="1" i="0">
-                <a:solidFill>
-                  <a:srgbClr val="095292"/>
-                </a:solidFill>
-                <a:latin typeface="Calibri"/>
-              </a:rPr>
-              <a:t>Google Docs</a:t>
-            </a:r>
-          </a:p>
-          <a:p>
-            <a:pPr algn="ctr">
-              <a:spcBef>
-                <a:spcPts val="200"/>
-              </a:spcBef>
-            </a:pPr>
-            <a:r>
-              <a:rPr sz="1000" b="0" i="0">
-                <a:solidFill>
-                  <a:srgbClr val="666666"/>
-                </a:solidFill>
-                <a:latin typeface="Calibri"/>
-              </a:rPr>
-              <a:t>Informe PI</a:t>
-            </a:r>
-          </a:p>
-        </p:txBody>
-      </p:sp>
-      <p:sp>
-        <p:nvSpPr>
-          <p:cNvPr id="21" name="Rounded Rectangle 20"/>
-          <p:cNvSpPr/>
-          <p:nvPr/>
-        </p:nvSpPr>
-        <p:spPr>
-          <a:xfrm>
-            <a:off x="4283354" y="4055364"/>
-            <a:ext cx="3624986" cy="2299716"/>
-          </a:xfrm>
-          <a:prstGeom prst="roundRect">
-            <a:avLst>
-              <a:gd name="adj" fmla="val 12000"/>
-            </a:avLst>
-          </a:prstGeom>
-          <a:solidFill>
-            <a:srgbClr val="F2F2F2"/>
-          </a:solidFill>
-          <a:ln>
-            <a:noFill/>
-          </a:ln>
-        </p:spPr>
-        <p:style>
-          <a:lnRef idx="1">
-            <a:schemeClr val="accent1"/>
-          </a:lnRef>
-          <a:fillRef idx="3">
-            <a:schemeClr val="accent1"/>
-          </a:fillRef>
-          <a:effectRef idx="2">
-            <a:schemeClr val="accent1"/>
-          </a:effectRef>
-          <a:fontRef idx="minor">
-            <a:schemeClr val="lt1"/>
-          </a:fontRef>
-        </p:style>
-        <p:txBody>
-          <a:bodyPr rtlCol="0" anchor="ctr"/>
-          <a:lstStyle/>
-          <a:p>
-            <a:pPr algn="ctr"/>
-          </a:p>
-        </p:txBody>
-      </p:sp>
-      <p:sp>
-        <p:nvSpPr>
-          <p:cNvPr id="22" name="Rectangle 21"/>
-          <p:cNvSpPr/>
-          <p:nvPr/>
-        </p:nvSpPr>
-        <p:spPr>
-          <a:xfrm>
-            <a:off x="4283354" y="4055364"/>
-            <a:ext cx="3624986" cy="64008"/>
-          </a:xfrm>
-          <a:prstGeom prst="rect">
-            <a:avLst/>
-          </a:prstGeom>
-          <a:solidFill>
-            <a:srgbClr val="095292"/>
-          </a:solidFill>
-          <a:ln>
-            <a:noFill/>
-          </a:ln>
-        </p:spPr>
-        <p:style>
-          <a:lnRef idx="1">
-            <a:schemeClr val="accent1"/>
-          </a:lnRef>
-          <a:fillRef idx="3">
-            <a:schemeClr val="accent1"/>
-          </a:fillRef>
-          <a:effectRef idx="2">
-            <a:schemeClr val="accent1"/>
-          </a:effectRef>
-          <a:fontRef idx="minor">
-            <a:schemeClr val="lt1"/>
-          </a:fontRef>
-        </p:style>
-        <p:txBody>
-          <a:bodyPr rtlCol="0" anchor="ctr"/>
-          <a:lstStyle/>
-          <a:p>
-            <a:pPr algn="ctr"/>
-          </a:p>
-        </p:txBody>
-      </p:sp>
-      <p:sp>
-        <p:nvSpPr>
-          <p:cNvPr id="23" name="Rectangle 22"/>
-          <p:cNvSpPr/>
-          <p:nvPr/>
-        </p:nvSpPr>
-        <p:spPr>
-          <a:xfrm>
-            <a:off x="4283354" y="4119372"/>
-            <a:ext cx="3624986" cy="27432"/>
-          </a:xfrm>
-          <a:prstGeom prst="rect">
-            <a:avLst/>
-          </a:prstGeom>
-          <a:solidFill>
-            <a:srgbClr val="FFD000"/>
-          </a:solidFill>
-          <a:ln>
-            <a:noFill/>
-          </a:ln>
-        </p:spPr>
-        <p:style>
-          <a:lnRef idx="1">
-            <a:schemeClr val="accent1"/>
-          </a:lnRef>
-          <a:fillRef idx="3">
-            <a:schemeClr val="accent1"/>
-          </a:fillRef>
-          <a:effectRef idx="2">
-            <a:schemeClr val="accent1"/>
-          </a:effectRef>
-          <a:fontRef idx="minor">
-            <a:schemeClr val="lt1"/>
-          </a:fontRef>
-        </p:style>
-        <p:txBody>
-          <a:bodyPr rtlCol="0" anchor="ctr"/>
-          <a:lstStyle/>
-          <a:p>
-            <a:pPr algn="ctr"/>
-          </a:p>
-        </p:txBody>
-      </p:sp>
-      <p:pic>
-        <p:nvPicPr>
-          <p:cNvPr id="24" name="Picture 23" descr="examlab.png"/>
-          <p:cNvPicPr>
-            <a:picLocks noChangeAspect="1"/>
-          </p:cNvPicPr>
-          <p:nvPr/>
-        </p:nvPicPr>
-        <p:blipFill>
-          <a:blip r:embed="rId5"/>
-          <a:stretch>
-            <a:fillRect/>
-          </a:stretch>
-        </p:blipFill>
-        <p:spPr>
-          <a:xfrm>
-            <a:off x="5485485" y="4311396"/>
-            <a:ext cx="1220724" cy="1220724"/>
-          </a:xfrm>
-          <a:prstGeom prst="rect">
-            <a:avLst/>
-          </a:prstGeom>
-        </p:spPr>
-      </p:pic>
-      <p:sp>
-        <p:nvSpPr>
-          <p:cNvPr id="25" name="TextBox 24"/>
-          <p:cNvSpPr txBox="1"/>
-          <p:nvPr/>
-        </p:nvSpPr>
-        <p:spPr>
-          <a:xfrm>
-            <a:off x="4356506" y="5623560"/>
-            <a:ext cx="3478682" cy="621792"/>
-          </a:xfrm>
-          <a:prstGeom prst="rect">
-            <a:avLst/>
-          </a:prstGeom>
-          <a:noFill/>
-        </p:spPr>
-        <p:txBody>
-          <a:bodyPr wrap="square" anchor="t"/>
-          <a:lstStyle/>
-          <a:p>
-            <a:pPr algn="ctr"/>
-            <a:r>
-              <a:rPr sz="1300" b="1" i="0">
-                <a:solidFill>
-                  <a:srgbClr val="095292"/>
-                </a:solidFill>
-                <a:latin typeface="Calibri"/>
-              </a:rPr>
-              <a:t>la plataforma del curso</a:t>
-            </a:r>
-          </a:p>
-          <a:p>
-            <a:pPr algn="ctr">
-              <a:spcBef>
-                <a:spcPts val="200"/>
-              </a:spcBef>
-            </a:pPr>
-            <a:r>
-              <a:rPr sz="1000" b="0" i="0">
-                <a:solidFill>
-                  <a:srgbClr val="666666"/>
-                </a:solidFill>
-                <a:latin typeface="Calibri"/>
-              </a:rPr>
-              <a:t>Donde se entrega</a:t>
-            </a:r>
-          </a:p>
-        </p:txBody>
-      </p:sp>
-      <p:sp>
-        <p:nvSpPr>
-          <p:cNvPr id="26" name="TextBox 25"/>
-          <p:cNvSpPr txBox="1"/>
-          <p:nvPr/>
-        </p:nvSpPr>
-        <p:spPr>
-          <a:xfrm>
-            <a:off x="11185855" y="6473952"/>
-            <a:ext cx="640080" cy="274320"/>
+            <a:off x="457200" y="3017520"/>
+            <a:ext cx="11277295" cy="1645920"/>
           </a:xfrm>
           <a:prstGeom prst="rect">
             <a:avLst/>
@@ -14062,141 +14275,65 @@
           </a:bodyPr>
           <a:lstStyle/>
           <a:p>
-            <a:pPr algn="r"/>
-            <a:r>
-              <a:rPr sz="1100" b="0" i="0">
-                <a:solidFill>
-                  <a:srgbClr val="666666"/>
-                </a:solidFill>
-                <a:latin typeface="Calibri"/>
-              </a:rPr>
-              <a:t>34</a:t>
-            </a:r>
-          </a:p>
-        </p:txBody>
-      </p:sp>
-    </p:spTree>
-  </p:cSld>
-  <p:clrMapOvr>
-    <a:masterClrMapping/>
-  </p:clrMapOvr>
-</p:sld>
-</file>
-
-<file path=ppt/slides/slide35.xml><?xml version="1.0" encoding="utf-8"?>
-<p:sld xmlns:a="http://schemas.openxmlformats.org/drawingml/2006/main" xmlns:p="http://schemas.openxmlformats.org/presentationml/2006/main" xmlns:r="http://schemas.openxmlformats.org/officeDocument/2006/relationships">
-  <p:cSld>
-    <p:bg>
-      <p:bgPr>
-        <a:solidFill>
-          <a:srgbClr val="FFFFFF"/>
-        </a:solidFill>
-        <a:effectLst/>
-      </p:bgPr>
-    </p:bg>
-    <p:spTree>
-      <p:nvGrpSpPr>
-        <p:cNvPr id="1" name=""/>
-        <p:cNvGrpSpPr/>
-        <p:nvPr/>
-      </p:nvGrpSpPr>
-      <p:grpSpPr/>
-      <p:sp>
-        <p:nvSpPr>
-          <p:cNvPr id="2" name="Rectangle 1"/>
-          <p:cNvSpPr/>
-          <p:nvPr/>
-        </p:nvSpPr>
-        <p:spPr>
-          <a:xfrm>
-            <a:off x="0" y="0"/>
-            <a:ext cx="12191695" cy="960120"/>
-          </a:xfrm>
-          <a:prstGeom prst="rect">
-            <a:avLst/>
-          </a:prstGeom>
-          <a:solidFill>
-            <a:srgbClr val="095292"/>
-          </a:solidFill>
-          <a:ln>
-            <a:noFill/>
-          </a:ln>
-        </p:spPr>
-        <p:style>
-          <a:lnRef idx="1">
-            <a:schemeClr val="accent1"/>
-          </a:lnRef>
-          <a:fillRef idx="3">
-            <a:schemeClr val="accent1"/>
-          </a:fillRef>
-          <a:effectRef idx="2">
-            <a:schemeClr val="accent1"/>
-          </a:effectRef>
-          <a:fontRef idx="minor">
-            <a:schemeClr val="lt1"/>
-          </a:fontRef>
-        </p:style>
-        <p:txBody>
-          <a:bodyPr rtlCol="0" anchor="ctr"/>
-          <a:lstStyle/>
-          <a:p>
-            <a:pPr algn="ctr"/>
-          </a:p>
-        </p:txBody>
-      </p:sp>
-      <p:sp>
-        <p:nvSpPr>
-          <p:cNvPr id="3" name="Rectangle 2"/>
-          <p:cNvSpPr/>
-          <p:nvPr/>
-        </p:nvSpPr>
-        <p:spPr>
-          <a:xfrm>
-            <a:off x="0" y="960120"/>
-            <a:ext cx="12191695" cy="41148"/>
-          </a:xfrm>
-          <a:prstGeom prst="rect">
-            <a:avLst/>
-          </a:prstGeom>
-          <a:solidFill>
-            <a:srgbClr val="FFD000"/>
-          </a:solidFill>
-          <a:ln>
-            <a:noFill/>
-          </a:ln>
-        </p:spPr>
-        <p:style>
-          <a:lnRef idx="1">
-            <a:schemeClr val="accent1"/>
-          </a:lnRef>
-          <a:fillRef idx="3">
-            <a:schemeClr val="accent1"/>
-          </a:fillRef>
-          <a:effectRef idx="2">
-            <a:schemeClr val="accent1"/>
-          </a:effectRef>
-          <a:fontRef idx="minor">
-            <a:schemeClr val="lt1"/>
-          </a:fontRef>
-        </p:style>
-        <p:txBody>
-          <a:bodyPr rtlCol="0" anchor="ctr"/>
-          <a:lstStyle/>
-          <a:p>
-            <a:pPr algn="ctr"/>
-          </a:p>
-        </p:txBody>
-      </p:sp>
-      <p:sp>
-        <p:nvSpPr>
-          <p:cNvPr id="4" name="TextBox 3"/>
+            <a:pPr algn="ctr">
+              <a:spcAft>
+                <a:spcPts val="600"/>
+              </a:spcAft>
+            </a:pPr>
+            <a:r>
+              <a:rPr sz="1600" b="0" i="0">
+                <a:solidFill>
+                  <a:srgbClr val="333333"/>
+                </a:solidFill>
+                <a:latin typeface="Calibri"/>
+              </a:rPr>
+              <a:t>Diferenciar VM vs contenedor y el rol de la imagen.</a:t>
+            </a:r>
+          </a:p>
+          <a:p>
+            <a:pPr algn="ctr">
+              <a:spcAft>
+                <a:spcPts val="600"/>
+              </a:spcAft>
+            </a:pPr>
+            <a:r>
+              <a:rPr sz="1600" b="0" i="0">
+                <a:solidFill>
+                  <a:srgbClr val="333333"/>
+                </a:solidFill>
+                <a:latin typeface="Calibri"/>
+              </a:rPr>
+              <a:t>Razonar el ciclo build → run → verify: qué imprime cada comando y por qué.</a:t>
+            </a:r>
+          </a:p>
+          <a:p>
+            <a:pPr algn="ctr">
+              <a:spcAft>
+                <a:spcPts val="600"/>
+              </a:spcAft>
+            </a:pPr>
+            <a:r>
+              <a:rPr sz="1600" b="0" i="0">
+                <a:solidFill>
+                  <a:srgbClr val="333333"/>
+                </a:solidFill>
+                <a:latin typeface="Calibri"/>
+              </a:rPr>
+              <a:t>Publicar el puerto y verificar el servicio con un endpoint de salud (ruta, código, cuerpo).</a:t>
+            </a:r>
+          </a:p>
+        </p:txBody>
+      </p:sp>
+      <p:sp>
+        <p:nvSpPr>
+          <p:cNvPr id="6" name="TextBox 5"/>
           <p:cNvSpPr txBox="1"/>
           <p:nvPr/>
         </p:nvSpPr>
         <p:spPr>
           <a:xfrm>
-            <a:off x="457200" y="164592"/>
-            <a:ext cx="11277295" cy="502920"/>
+            <a:off x="457200" y="4754880"/>
+            <a:ext cx="11277295" cy="640080"/>
           </a:xfrm>
           <a:prstGeom prst="rect">
             <a:avLst/>
@@ -14209,1339 +14346,15 @@
           </a:bodyPr>
           <a:lstStyle/>
           <a:p>
-            <a:r>
-              <a:rPr sz="2600" b="1" i="0">
-                <a:solidFill>
-                  <a:srgbClr val="FFFFFF"/>
-                </a:solidFill>
-                <a:latin typeface="Calibri"/>
-              </a:rPr>
-              <a:t>PI CloudLite — entregable de hoy</a:t>
-            </a:r>
-          </a:p>
-        </p:txBody>
-      </p:sp>
-      <p:sp>
-        <p:nvSpPr>
-          <p:cNvPr id="5" name="TextBox 4"/>
-          <p:cNvSpPr txBox="1"/>
-          <p:nvPr/>
-        </p:nvSpPr>
-        <p:spPr>
-          <a:xfrm>
-            <a:off x="457200" y="1170432"/>
-            <a:ext cx="11277295" cy="5230368"/>
-          </a:xfrm>
-          <a:prstGeom prst="rect">
-            <a:avLst/>
-          </a:prstGeom>
-          <a:noFill/>
-        </p:spPr>
-        <p:txBody>
-          <a:bodyPr wrap="square">
-            <a:spAutoFit/>
-          </a:bodyPr>
-          <a:lstStyle/>
-          <a:p>
-            <a:pPr>
-              <a:spcAft>
-                <a:spcPts val="800"/>
-              </a:spcAft>
-            </a:pPr>
-            <a:r>
-              <a:rPr sz="2000" b="0" i="0">
-                <a:solidFill>
-                  <a:srgbClr val="333333"/>
-                </a:solidFill>
-                <a:latin typeface="Calibri"/>
-              </a:rPr>
-              <a:t>–   </a:t>
-            </a:r>
+            <a:pPr algn="ctr"/>
             <a:r>
               <a:rPr sz="2000" b="1" i="0">
                 <a:solidFill>
-                  <a:srgbClr val="333333"/>
-                </a:solidFill>
-                <a:latin typeface="Calibri"/>
-              </a:rPr>
-              <a:t>Entregable:</a:t>
-            </a:r>
-            <a:r>
-              <a:rPr sz="2000" b="0" i="0">
-                <a:solidFill>
-                  <a:srgbClr val="333333"/>
-                </a:solidFill>
-                <a:latin typeface="Calibri"/>
-              </a:rPr>
-              <a:t> Dockerfile del stub + .dockerignore + ciclo de 5 comandos con la salida esperada y su justificación</a:t>
-            </a:r>
-          </a:p>
-          <a:p>
-            <a:pPr>
-              <a:spcAft>
-                <a:spcPts val="800"/>
-              </a:spcAft>
-            </a:pPr>
-            <a:r>
-              <a:rPr sz="2000" b="0" i="0">
-                <a:solidFill>
-                  <a:srgbClr val="333333"/>
-                </a:solidFill>
-                <a:latin typeface="Calibri"/>
-              </a:rPr>
-              <a:t>–   Herramienta: </a:t>
-            </a:r>
-            <a:r>
-              <a:rPr sz="2000" b="1" i="0">
-                <a:solidFill>
-                  <a:srgbClr val="333333"/>
-                </a:solidFill>
-                <a:latin typeface="Calibri"/>
-              </a:rPr>
-              <a:t>Navegador · editor de código del curso · lab de contenedores recomendado (no obligatorio)</a:t>
-            </a:r>
-          </a:p>
-          <a:p>
-            <a:pPr>
-              <a:spcAft>
-                <a:spcPts val="800"/>
-              </a:spcAft>
-            </a:pPr>
-            <a:r>
-              <a:rPr sz="2000" b="0" i="0">
-                <a:solidFill>
-                  <a:srgbClr val="333333"/>
-                </a:solidFill>
-                <a:latin typeface="Calibri"/>
-              </a:rPr>
-              <a:t>–   Todo lo que construyan hoy entra al </a:t>
-            </a:r>
-            <a:r>
-              <a:rPr sz="2000" b="1" i="0">
-                <a:solidFill>
-                  <a:srgbClr val="333333"/>
-                </a:solidFill>
-                <a:latin typeface="Calibri"/>
-              </a:rPr>
-              <a:t>informe/repo del PI</a:t>
-            </a:r>
-            <a:r>
-              <a:rPr sz="2000" b="0" i="0">
-                <a:solidFill>
-                  <a:srgbClr val="333333"/>
-                </a:solidFill>
-                <a:latin typeface="Calibri"/>
-              </a:rPr>
-              <a:t> (no es lab suelto).</a:t>
-            </a:r>
-          </a:p>
-          <a:p>
-            <a:pPr>
-              <a:spcAft>
-                <a:spcPts val="800"/>
-              </a:spcAft>
-            </a:pPr>
-            <a:r>
-              <a:rPr sz="2000" b="0" i="0">
-                <a:solidFill>
-                  <a:srgbClr val="333333"/>
-                </a:solidFill>
-                <a:latin typeface="Calibri"/>
-              </a:rPr>
-              <a:t>–   Individual por defecto · el docente puede autorizar equipos de 2–3; la entrega en la plataforma del curso siempre es individual.</a:t>
-            </a:r>
-          </a:p>
-        </p:txBody>
-      </p:sp>
-      <p:sp>
-        <p:nvSpPr>
-          <p:cNvPr id="6" name="TextBox 5"/>
-          <p:cNvSpPr txBox="1"/>
-          <p:nvPr/>
-        </p:nvSpPr>
-        <p:spPr>
-          <a:xfrm>
-            <a:off x="11185855" y="6473952"/>
-            <a:ext cx="640080" cy="274320"/>
-          </a:xfrm>
-          <a:prstGeom prst="rect">
-            <a:avLst/>
-          </a:prstGeom>
-          <a:noFill/>
-        </p:spPr>
-        <p:txBody>
-          <a:bodyPr wrap="square">
-            <a:spAutoFit/>
-          </a:bodyPr>
-          <a:lstStyle/>
-          <a:p>
-            <a:pPr algn="r"/>
-            <a:r>
-              <a:rPr sz="1100" b="0" i="0">
-                <a:solidFill>
-                  <a:srgbClr val="666666"/>
-                </a:solidFill>
-                <a:latin typeface="Calibri"/>
-              </a:rPr>
-              <a:t>35</a:t>
-            </a:r>
-          </a:p>
-        </p:txBody>
-      </p:sp>
-    </p:spTree>
-  </p:cSld>
-  <p:clrMapOvr>
-    <a:masterClrMapping/>
-  </p:clrMapOvr>
-</p:sld>
-</file>
-
-<file path=ppt/slides/slide36.xml><?xml version="1.0" encoding="utf-8"?>
-<p:sld xmlns:a="http://schemas.openxmlformats.org/drawingml/2006/main" xmlns:p="http://schemas.openxmlformats.org/presentationml/2006/main" xmlns:r="http://schemas.openxmlformats.org/officeDocument/2006/relationships">
-  <p:cSld>
-    <p:bg>
-      <p:bgPr>
-        <a:solidFill>
-          <a:srgbClr val="FFFFFF"/>
-        </a:solidFill>
-        <a:effectLst/>
-      </p:bgPr>
-    </p:bg>
-    <p:spTree>
-      <p:nvGrpSpPr>
-        <p:cNvPr id="1" name=""/>
-        <p:cNvGrpSpPr/>
-        <p:nvPr/>
-      </p:nvGrpSpPr>
-      <p:grpSpPr/>
-      <p:sp>
-        <p:nvSpPr>
-          <p:cNvPr id="2" name="Rectangle 1"/>
-          <p:cNvSpPr/>
-          <p:nvPr/>
-        </p:nvSpPr>
-        <p:spPr>
-          <a:xfrm>
-            <a:off x="0" y="0"/>
-            <a:ext cx="12191695" cy="960120"/>
-          </a:xfrm>
-          <a:prstGeom prst="rect">
-            <a:avLst/>
-          </a:prstGeom>
-          <a:solidFill>
-            <a:srgbClr val="095292"/>
-          </a:solidFill>
-          <a:ln>
-            <a:noFill/>
-          </a:ln>
-        </p:spPr>
-        <p:style>
-          <a:lnRef idx="1">
-            <a:schemeClr val="accent1"/>
-          </a:lnRef>
-          <a:fillRef idx="3">
-            <a:schemeClr val="accent1"/>
-          </a:fillRef>
-          <a:effectRef idx="2">
-            <a:schemeClr val="accent1"/>
-          </a:effectRef>
-          <a:fontRef idx="minor">
-            <a:schemeClr val="lt1"/>
-          </a:fontRef>
-        </p:style>
-        <p:txBody>
-          <a:bodyPr rtlCol="0" anchor="ctr"/>
-          <a:lstStyle/>
-          <a:p>
-            <a:pPr algn="ctr"/>
-          </a:p>
-        </p:txBody>
-      </p:sp>
-      <p:sp>
-        <p:nvSpPr>
-          <p:cNvPr id="3" name="Rectangle 2"/>
-          <p:cNvSpPr/>
-          <p:nvPr/>
-        </p:nvSpPr>
-        <p:spPr>
-          <a:xfrm>
-            <a:off x="0" y="960120"/>
-            <a:ext cx="12191695" cy="41148"/>
-          </a:xfrm>
-          <a:prstGeom prst="rect">
-            <a:avLst/>
-          </a:prstGeom>
-          <a:solidFill>
-            <a:srgbClr val="FFD000"/>
-          </a:solidFill>
-          <a:ln>
-            <a:noFill/>
-          </a:ln>
-        </p:spPr>
-        <p:style>
-          <a:lnRef idx="1">
-            <a:schemeClr val="accent1"/>
-          </a:lnRef>
-          <a:fillRef idx="3">
-            <a:schemeClr val="accent1"/>
-          </a:fillRef>
-          <a:effectRef idx="2">
-            <a:schemeClr val="accent1"/>
-          </a:effectRef>
-          <a:fontRef idx="minor">
-            <a:schemeClr val="lt1"/>
-          </a:fontRef>
-        </p:style>
-        <p:txBody>
-          <a:bodyPr rtlCol="0" anchor="ctr"/>
-          <a:lstStyle/>
-          <a:p>
-            <a:pPr algn="ctr"/>
-          </a:p>
-        </p:txBody>
-      </p:sp>
-      <p:sp>
-        <p:nvSpPr>
-          <p:cNvPr id="4" name="TextBox 3"/>
-          <p:cNvSpPr txBox="1"/>
-          <p:nvPr/>
-        </p:nvSpPr>
-        <p:spPr>
-          <a:xfrm>
-            <a:off x="457200" y="164592"/>
-            <a:ext cx="11277295" cy="502920"/>
-          </a:xfrm>
-          <a:prstGeom prst="rect">
-            <a:avLst/>
-          </a:prstGeom>
-          <a:noFill/>
-        </p:spPr>
-        <p:txBody>
-          <a:bodyPr wrap="square">
-            <a:spAutoFit/>
-          </a:bodyPr>
-          <a:lstStyle/>
-          <a:p>
-            <a:r>
-              <a:rPr sz="2600" b="1" i="0">
-                <a:solidFill>
-                  <a:srgbClr val="FFFFFF"/>
-                </a:solidFill>
-                <a:latin typeface="Calibri"/>
-              </a:rPr>
-              <a:t>Manos a la obra (paso a paso)</a:t>
-            </a:r>
-          </a:p>
-        </p:txBody>
-      </p:sp>
-      <p:sp>
-        <p:nvSpPr>
-          <p:cNvPr id="5" name="TextBox 4"/>
-          <p:cNvSpPr txBox="1"/>
-          <p:nvPr/>
-        </p:nvSpPr>
-        <p:spPr>
-          <a:xfrm>
-            <a:off x="457200" y="1170432"/>
-            <a:ext cx="11277295" cy="5230368"/>
-          </a:xfrm>
-          <a:prstGeom prst="rect">
-            <a:avLst/>
-          </a:prstGeom>
-          <a:noFill/>
-        </p:spPr>
-        <p:txBody>
-          <a:bodyPr wrap="square">
-            <a:spAutoFit/>
-          </a:bodyPr>
-          <a:lstStyle/>
-          <a:p>
-            <a:pPr>
-              <a:spcAft>
-                <a:spcPts val="800"/>
-              </a:spcAft>
-            </a:pPr>
-            <a:r>
-              <a:rPr sz="2000" b="1" i="0">
-                <a:solidFill>
-                  <a:srgbClr val="333333"/>
-                </a:solidFill>
-                <a:latin typeface="Calibri"/>
-              </a:rPr>
-              <a:t>1.</a:t>
-            </a:r>
-            <a:r>
-              <a:rPr sz="2000" b="0" i="0">
-                <a:solidFill>
-                  <a:srgbClr val="333333"/>
-                </a:solidFill>
-                <a:latin typeface="Calibri"/>
-              </a:rPr>
-              <a:t> Paso 1: elija en la pregunta 8 cual servicio de su C4 Context va a contenedorizar y justifiquelo en 2 o 3 frases; escriba a continuacion el Dockerfile completo con la imagen base ligera y con etiqueta fija, el COPY de dependencias antes del COPY del codigo, el EXPOSE y el CMD, verificando que no copie el .env ni ninguna clave.</a:t>
-            </a:r>
-          </a:p>
-          <a:p>
-            <a:pPr>
-              <a:spcAft>
-                <a:spcPts val="800"/>
-              </a:spcAft>
-            </a:pPr>
-            <a:r>
-              <a:rPr sz="2000" b="0" i="0">
-                <a:solidFill>
-                  <a:srgbClr val="333333"/>
-                </a:solidFill>
-                <a:latin typeface="Calibri"/>
-              </a:rPr>
-              <a:t>–   </a:t>
-            </a:r>
-            <a:r>
-              <a:rPr sz="2000" b="1" i="0">
-                <a:solidFill>
-                  <a:srgbClr val="333333"/>
-                </a:solidFill>
-                <a:latin typeface="Calibri"/>
-              </a:rPr>
-              <a:t>2.</a:t>
-            </a:r>
-            <a:r>
-              <a:rPr sz="2000" b="0" i="0">
-                <a:solidFill>
-                  <a:srgbClr val="333333"/>
-                </a:solidFill>
-                <a:latin typeface="Calibri"/>
-              </a:rPr>
-              <a:t> Paso 2: explique en la pregunta 9, sobre su propio Dockerfile, la diferencia entre imagen y contenedor, que instrucciones de SU archivo crean capa, por que el orden aprovecha el cache y en que se diferencia su contenedor de una maquina virtual; verifique que no escribio que un contenedor es una VM ligera.</a:t>
-            </a:r>
-          </a:p>
-          <a:p>
-            <a:pPr>
-              <a:spcAft>
-                <a:spcPts val="800"/>
-              </a:spcAft>
-            </a:pPr>
-            <a:r>
-              <a:rPr sz="2000" b="0" i="0">
-                <a:solidFill>
-                  <a:srgbClr val="333333"/>
-                </a:solidFill>
-                <a:latin typeface="Calibri"/>
-              </a:rPr>
-              <a:t>–   </a:t>
-            </a:r>
-            <a:r>
-              <a:rPr sz="2000" b="1" i="0">
-                <a:solidFill>
-                  <a:srgbClr val="333333"/>
-                </a:solidFill>
-                <a:latin typeface="Calibri"/>
-              </a:rPr>
-              <a:t>3.</a:t>
-            </a:r>
-            <a:r>
-              <a:rPr sz="2000" b="0" i="0">
-                <a:solidFill>
-                  <a:srgbClr val="333333"/>
-                </a:solidFill>
-                <a:latin typeface="Calibri"/>
-              </a:rPr>
-              <a:t> Paso 3: describa en la pregunta 10 el ciclo completo con los comandos exactos de build y de run, explicando que lado del mapeo de puertos es el anfitrion y que lado el contenedor, y cierre con el contrato del endpoint de salud (ruta, codigo de estado y cuerpo); verifique que el puerto sea el mismo que puso en el EXPOSE.</a:t>
-            </a:r>
-          </a:p>
-          <a:p>
-            <a:pPr>
-              <a:spcAft>
-                <a:spcPts val="800"/>
-              </a:spcAft>
-            </a:pPr>
-            <a:r>
-              <a:rPr sz="2000" b="0" i="0">
-                <a:solidFill>
-                  <a:srgbClr val="333333"/>
-                </a:solidFill>
-                <a:latin typeface="Calibri"/>
-              </a:rPr>
-              <a:t>–   </a:t>
-            </a:r>
-            <a:r>
-              <a:rPr sz="2000" b="1" i="0">
-                <a:solidFill>
-                  <a:srgbClr val="333333"/>
-                </a:solidFill>
-                <a:latin typeface="Calibri"/>
-              </a:rPr>
-              <a:t>4.</a:t>
-            </a:r>
-            <a:r>
-              <a:rPr sz="2000" b="0" i="0">
-                <a:solidFill>
-                  <a:srgbClr val="333333"/>
-                </a:solidFill>
-                <a:latin typeface="Calibri"/>
-              </a:rPr>
-              <a:t> Paso 4: complete en la pregunta 11 la tabla de 5 filas con el fragmento CONCRETO que espera leer en cada comando y con el sintoma que delataria su fallo, y desarrolle abajo un caso que falla sobre su propio Dockerfile, con el comando de diagnostico y la correccion; verifique que no escribio «sale bien» en ninguna fila, porque es justo lo que la pregunta no acepta.</a:t>
-            </a:r>
-          </a:p>
-        </p:txBody>
-      </p:sp>
-      <p:sp>
-        <p:nvSpPr>
-          <p:cNvPr id="6" name="TextBox 5"/>
-          <p:cNvSpPr txBox="1"/>
-          <p:nvPr/>
-        </p:nvSpPr>
-        <p:spPr>
-          <a:xfrm>
-            <a:off x="11185855" y="6473952"/>
-            <a:ext cx="640080" cy="274320"/>
-          </a:xfrm>
-          <a:prstGeom prst="rect">
-            <a:avLst/>
-          </a:prstGeom>
-          <a:noFill/>
-        </p:spPr>
-        <p:txBody>
-          <a:bodyPr wrap="square">
-            <a:spAutoFit/>
-          </a:bodyPr>
-          <a:lstStyle/>
-          <a:p>
-            <a:pPr algn="r"/>
-            <a:r>
-              <a:rPr sz="1100" b="0" i="0">
-                <a:solidFill>
-                  <a:srgbClr val="666666"/>
-                </a:solidFill>
-                <a:latin typeface="Calibri"/>
-              </a:rPr>
-              <a:t>36</a:t>
-            </a:r>
-          </a:p>
-        </p:txBody>
-      </p:sp>
-    </p:spTree>
-  </p:cSld>
-  <p:clrMapOvr>
-    <a:masterClrMapping/>
-  </p:clrMapOvr>
-</p:sld>
-</file>
-
-<file path=ppt/slides/slide37.xml><?xml version="1.0" encoding="utf-8"?>
-<p:sld xmlns:a="http://schemas.openxmlformats.org/drawingml/2006/main" xmlns:p="http://schemas.openxmlformats.org/presentationml/2006/main" xmlns:r="http://schemas.openxmlformats.org/officeDocument/2006/relationships">
-  <p:cSld>
-    <p:bg>
-      <p:bgPr>
-        <a:solidFill>
-          <a:srgbClr val="FFFFFF"/>
-        </a:solidFill>
-        <a:effectLst/>
-      </p:bgPr>
-    </p:bg>
-    <p:spTree>
-      <p:nvGrpSpPr>
-        <p:cNvPr id="1" name=""/>
-        <p:cNvGrpSpPr/>
-        <p:nvPr/>
-      </p:nvGrpSpPr>
-      <p:grpSpPr/>
-      <p:sp>
-        <p:nvSpPr>
-          <p:cNvPr id="2" name="Rectangle 1"/>
-          <p:cNvSpPr/>
-          <p:nvPr/>
-        </p:nvSpPr>
-        <p:spPr>
-          <a:xfrm>
-            <a:off x="0" y="0"/>
-            <a:ext cx="12191695" cy="960120"/>
-          </a:xfrm>
-          <a:prstGeom prst="rect">
-            <a:avLst/>
-          </a:prstGeom>
-          <a:solidFill>
-            <a:srgbClr val="095292"/>
-          </a:solidFill>
-          <a:ln>
-            <a:noFill/>
-          </a:ln>
-        </p:spPr>
-        <p:style>
-          <a:lnRef idx="1">
-            <a:schemeClr val="accent1"/>
-          </a:lnRef>
-          <a:fillRef idx="3">
-            <a:schemeClr val="accent1"/>
-          </a:fillRef>
-          <a:effectRef idx="2">
-            <a:schemeClr val="accent1"/>
-          </a:effectRef>
-          <a:fontRef idx="minor">
-            <a:schemeClr val="lt1"/>
-          </a:fontRef>
-        </p:style>
-        <p:txBody>
-          <a:bodyPr rtlCol="0" anchor="ctr"/>
-          <a:lstStyle/>
-          <a:p>
-            <a:pPr algn="ctr"/>
-          </a:p>
-        </p:txBody>
-      </p:sp>
-      <p:sp>
-        <p:nvSpPr>
-          <p:cNvPr id="3" name="Rectangle 2"/>
-          <p:cNvSpPr/>
-          <p:nvPr/>
-        </p:nvSpPr>
-        <p:spPr>
-          <a:xfrm>
-            <a:off x="0" y="960120"/>
-            <a:ext cx="12191695" cy="41148"/>
-          </a:xfrm>
-          <a:prstGeom prst="rect">
-            <a:avLst/>
-          </a:prstGeom>
-          <a:solidFill>
-            <a:srgbClr val="FFD000"/>
-          </a:solidFill>
-          <a:ln>
-            <a:noFill/>
-          </a:ln>
-        </p:spPr>
-        <p:style>
-          <a:lnRef idx="1">
-            <a:schemeClr val="accent1"/>
-          </a:lnRef>
-          <a:fillRef idx="3">
-            <a:schemeClr val="accent1"/>
-          </a:fillRef>
-          <a:effectRef idx="2">
-            <a:schemeClr val="accent1"/>
-          </a:effectRef>
-          <a:fontRef idx="minor">
-            <a:schemeClr val="lt1"/>
-          </a:fontRef>
-        </p:style>
-        <p:txBody>
-          <a:bodyPr rtlCol="0" anchor="ctr"/>
-          <a:lstStyle/>
-          <a:p>
-            <a:pPr algn="ctr"/>
-          </a:p>
-        </p:txBody>
-      </p:sp>
-      <p:sp>
-        <p:nvSpPr>
-          <p:cNvPr id="4" name="TextBox 3"/>
-          <p:cNvSpPr txBox="1"/>
-          <p:nvPr/>
-        </p:nvSpPr>
-        <p:spPr>
-          <a:xfrm>
-            <a:off x="457200" y="164592"/>
-            <a:ext cx="11277295" cy="502920"/>
-          </a:xfrm>
-          <a:prstGeom prst="rect">
-            <a:avLst/>
-          </a:prstGeom>
-          <a:noFill/>
-        </p:spPr>
-        <p:txBody>
-          <a:bodyPr wrap="square">
-            <a:spAutoFit/>
-          </a:bodyPr>
-          <a:lstStyle/>
-          <a:p>
-            <a:r>
-              <a:rPr sz="2600" b="1" i="0">
-                <a:solidFill>
-                  <a:srgbClr val="FFFFFF"/>
-                </a:solidFill>
-                <a:latin typeface="Calibri"/>
-              </a:rPr>
-              <a:t>Para continuar (PI)</a:t>
-            </a:r>
-          </a:p>
-        </p:txBody>
-      </p:sp>
-      <p:sp>
-        <p:nvSpPr>
-          <p:cNvPr id="5" name="Rounded Rectangle 4"/>
-          <p:cNvSpPr/>
-          <p:nvPr/>
-        </p:nvSpPr>
-        <p:spPr>
-          <a:xfrm>
-            <a:off x="457200" y="1261872"/>
-            <a:ext cx="11277295" cy="1051560"/>
-          </a:xfrm>
-          <a:prstGeom prst="roundRect">
-            <a:avLst>
-              <a:gd name="adj" fmla="val 12000"/>
-            </a:avLst>
-          </a:prstGeom>
-          <a:solidFill>
-            <a:srgbClr val="E8F4FA"/>
-          </a:solidFill>
-          <a:ln>
-            <a:noFill/>
-          </a:ln>
-        </p:spPr>
-        <p:style>
-          <a:lnRef idx="1">
-            <a:schemeClr val="accent1"/>
-          </a:lnRef>
-          <a:fillRef idx="3">
-            <a:schemeClr val="accent1"/>
-          </a:fillRef>
-          <a:effectRef idx="2">
-            <a:schemeClr val="accent1"/>
-          </a:effectRef>
-          <a:fontRef idx="minor">
-            <a:schemeClr val="lt1"/>
-          </a:fontRef>
-        </p:style>
-        <p:txBody>
-          <a:bodyPr rtlCol="0" anchor="ctr"/>
-          <a:lstStyle/>
-          <a:p>
-            <a:pPr algn="ctr"/>
-          </a:p>
-        </p:txBody>
-      </p:sp>
-      <p:sp>
-        <p:nvSpPr>
-          <p:cNvPr id="6" name="Rectangle 5"/>
-          <p:cNvSpPr/>
-          <p:nvPr/>
-        </p:nvSpPr>
-        <p:spPr>
-          <a:xfrm>
-            <a:off x="457200" y="1261872"/>
-            <a:ext cx="128016" cy="1051560"/>
-          </a:xfrm>
-          <a:prstGeom prst="rect">
-            <a:avLst/>
-          </a:prstGeom>
-          <a:solidFill>
-            <a:srgbClr val="269CCB"/>
-          </a:solidFill>
-          <a:ln>
-            <a:noFill/>
-          </a:ln>
-        </p:spPr>
-        <p:style>
-          <a:lnRef idx="1">
-            <a:schemeClr val="accent1"/>
-          </a:lnRef>
-          <a:fillRef idx="3">
-            <a:schemeClr val="accent1"/>
-          </a:fillRef>
-          <a:effectRef idx="2">
-            <a:schemeClr val="accent1"/>
-          </a:effectRef>
-          <a:fontRef idx="minor">
-            <a:schemeClr val="lt1"/>
-          </a:fontRef>
-        </p:style>
-        <p:txBody>
-          <a:bodyPr rtlCol="0" anchor="ctr"/>
-          <a:lstStyle/>
-          <a:p>
-            <a:pPr algn="ctr"/>
-          </a:p>
-        </p:txBody>
-      </p:sp>
-      <p:sp>
-        <p:nvSpPr>
-          <p:cNvPr id="7" name="TextBox 6"/>
-          <p:cNvSpPr txBox="1"/>
-          <p:nvPr/>
-        </p:nvSpPr>
-        <p:spPr>
-          <a:xfrm>
-            <a:off x="777240" y="1399031"/>
-            <a:ext cx="10774375" cy="822959"/>
-          </a:xfrm>
-          <a:prstGeom prst="rect">
-            <a:avLst/>
-          </a:prstGeom>
-          <a:noFill/>
-        </p:spPr>
-        <p:txBody>
-          <a:bodyPr wrap="square">
-            <a:spAutoFit/>
-          </a:bodyPr>
-          <a:lstStyle/>
-          <a:p>
-            <a:r>
-              <a:rPr sz="1200" b="1" i="0">
-                <a:solidFill>
                   <a:srgbClr val="269CCB"/>
                 </a:solidFill>
                 <a:latin typeface="Calibri"/>
               </a:rPr>
-              <a:t>Info</a:t>
-            </a:r>
-          </a:p>
-          <a:p>
-            <a:pPr>
-              <a:spcBef>
-                <a:spcPts val="400"/>
-              </a:spcBef>
-            </a:pPr>
-            <a:r>
-              <a:rPr sz="1400" b="0" i="0">
-                <a:solidFill>
-                  <a:srgbClr val="333333"/>
-                </a:solidFill>
-                <a:latin typeface="Calibri"/>
-              </a:rPr>
-              <a:t>Entregable: Dockerfile del stub + .dockerignore + ciclo de 5 comandos con la salida esperada y su justificación</a:t>
-            </a:r>
-          </a:p>
-        </p:txBody>
-      </p:sp>
-      <p:sp>
-        <p:nvSpPr>
-          <p:cNvPr id="8" name="Rounded Rectangle 7"/>
-          <p:cNvSpPr/>
-          <p:nvPr/>
-        </p:nvSpPr>
-        <p:spPr>
-          <a:xfrm>
-            <a:off x="457200" y="2478024"/>
-            <a:ext cx="11277295" cy="1051560"/>
-          </a:xfrm>
-          <a:prstGeom prst="roundRect">
-            <a:avLst>
-              <a:gd name="adj" fmla="val 12000"/>
-            </a:avLst>
-          </a:prstGeom>
-          <a:solidFill>
-            <a:srgbClr val="FFF8E1"/>
-          </a:solidFill>
-          <a:ln>
-            <a:noFill/>
-          </a:ln>
-        </p:spPr>
-        <p:style>
-          <a:lnRef idx="1">
-            <a:schemeClr val="accent1"/>
-          </a:lnRef>
-          <a:fillRef idx="3">
-            <a:schemeClr val="accent1"/>
-          </a:fillRef>
-          <a:effectRef idx="2">
-            <a:schemeClr val="accent1"/>
-          </a:effectRef>
-          <a:fontRef idx="minor">
-            <a:schemeClr val="lt1"/>
-          </a:fontRef>
-        </p:style>
-        <p:txBody>
-          <a:bodyPr rtlCol="0" anchor="ctr"/>
-          <a:lstStyle/>
-          <a:p>
-            <a:pPr algn="ctr"/>
-          </a:p>
-        </p:txBody>
-      </p:sp>
-      <p:sp>
-        <p:nvSpPr>
-          <p:cNvPr id="9" name="Rectangle 8"/>
-          <p:cNvSpPr/>
-          <p:nvPr/>
-        </p:nvSpPr>
-        <p:spPr>
-          <a:xfrm>
-            <a:off x="457200" y="2478024"/>
-            <a:ext cx="128016" cy="1051560"/>
-          </a:xfrm>
-          <a:prstGeom prst="rect">
-            <a:avLst/>
-          </a:prstGeom>
-          <a:solidFill>
-            <a:srgbClr val="FFD000"/>
-          </a:solidFill>
-          <a:ln>
-            <a:noFill/>
-          </a:ln>
-        </p:spPr>
-        <p:style>
-          <a:lnRef idx="1">
-            <a:schemeClr val="accent1"/>
-          </a:lnRef>
-          <a:fillRef idx="3">
-            <a:schemeClr val="accent1"/>
-          </a:fillRef>
-          <a:effectRef idx="2">
-            <a:schemeClr val="accent1"/>
-          </a:effectRef>
-          <a:fontRef idx="minor">
-            <a:schemeClr val="lt1"/>
-          </a:fontRef>
-        </p:style>
-        <p:txBody>
-          <a:bodyPr rtlCol="0" anchor="ctr"/>
-          <a:lstStyle/>
-          <a:p>
-            <a:pPr algn="ctr"/>
-          </a:p>
-        </p:txBody>
-      </p:sp>
-      <p:sp>
-        <p:nvSpPr>
-          <p:cNvPr id="10" name="TextBox 9"/>
-          <p:cNvSpPr txBox="1"/>
-          <p:nvPr/>
-        </p:nvSpPr>
-        <p:spPr>
-          <a:xfrm>
-            <a:off x="777240" y="2615184"/>
-            <a:ext cx="10774375" cy="822959"/>
-          </a:xfrm>
-          <a:prstGeom prst="rect">
-            <a:avLst/>
-          </a:prstGeom>
-          <a:noFill/>
-        </p:spPr>
-        <p:txBody>
-          <a:bodyPr wrap="square">
-            <a:spAutoFit/>
-          </a:bodyPr>
-          <a:lstStyle/>
-          <a:p>
-            <a:r>
-              <a:rPr sz="1200" b="1" i="0">
-                <a:solidFill>
-                  <a:srgbClr val="FFD000"/>
-                </a:solidFill>
-                <a:latin typeface="Calibri"/>
-              </a:rPr>
-              <a:t>Aclaración</a:t>
-            </a:r>
-          </a:p>
-          <a:p>
-            <a:pPr>
-              <a:spcBef>
-                <a:spcPts val="400"/>
-              </a:spcBef>
-            </a:pPr>
-            <a:r>
-              <a:rPr sz="1400" b="0" i="0">
-                <a:solidFill>
-                  <a:srgbClr val="333333"/>
-                </a:solidFill>
-                <a:latin typeface="Calibri"/>
-              </a:rPr>
-              <a:t>Subir evidencias al paquete CloudLite (Drive/repo) y a la plataforma del curso (la plataforma del curso) en la fecha que indique el docente.</a:t>
-            </a:r>
-          </a:p>
-        </p:txBody>
-      </p:sp>
-      <p:sp>
-        <p:nvSpPr>
-          <p:cNvPr id="11" name="Rounded Rectangle 10"/>
-          <p:cNvSpPr/>
-          <p:nvPr/>
-        </p:nvSpPr>
-        <p:spPr>
-          <a:xfrm>
-            <a:off x="457200" y="3694176"/>
-            <a:ext cx="11277295" cy="1051560"/>
-          </a:xfrm>
-          <a:prstGeom prst="roundRect">
-            <a:avLst>
-              <a:gd name="adj" fmla="val 12000"/>
-            </a:avLst>
-          </a:prstGeom>
-          <a:solidFill>
-            <a:srgbClr val="FBE4E4"/>
-          </a:solidFill>
-          <a:ln>
-            <a:noFill/>
-          </a:ln>
-        </p:spPr>
-        <p:style>
-          <a:lnRef idx="1">
-            <a:schemeClr val="accent1"/>
-          </a:lnRef>
-          <a:fillRef idx="3">
-            <a:schemeClr val="accent1"/>
-          </a:fillRef>
-          <a:effectRef idx="2">
-            <a:schemeClr val="accent1"/>
-          </a:effectRef>
-          <a:fontRef idx="minor">
-            <a:schemeClr val="lt1"/>
-          </a:fontRef>
-        </p:style>
-        <p:txBody>
-          <a:bodyPr rtlCol="0" anchor="ctr"/>
-          <a:lstStyle/>
-          <a:p>
-            <a:pPr algn="ctr"/>
-          </a:p>
-        </p:txBody>
-      </p:sp>
-      <p:sp>
-        <p:nvSpPr>
-          <p:cNvPr id="12" name="Rectangle 11"/>
-          <p:cNvSpPr/>
-          <p:nvPr/>
-        </p:nvSpPr>
-        <p:spPr>
-          <a:xfrm>
-            <a:off x="457200" y="3694176"/>
-            <a:ext cx="128016" cy="1051560"/>
-          </a:xfrm>
-          <a:prstGeom prst="rect">
-            <a:avLst/>
-          </a:prstGeom>
-          <a:solidFill>
-            <a:srgbClr val="A02030"/>
-          </a:solidFill>
-          <a:ln>
-            <a:noFill/>
-          </a:ln>
-        </p:spPr>
-        <p:style>
-          <a:lnRef idx="1">
-            <a:schemeClr val="accent1"/>
-          </a:lnRef>
-          <a:fillRef idx="3">
-            <a:schemeClr val="accent1"/>
-          </a:fillRef>
-          <a:effectRef idx="2">
-            <a:schemeClr val="accent1"/>
-          </a:effectRef>
-          <a:fontRef idx="minor">
-            <a:schemeClr val="lt1"/>
-          </a:fontRef>
-        </p:style>
-        <p:txBody>
-          <a:bodyPr rtlCol="0" anchor="ctr"/>
-          <a:lstStyle/>
-          <a:p>
-            <a:pPr algn="ctr"/>
-          </a:p>
-        </p:txBody>
-      </p:sp>
-      <p:sp>
-        <p:nvSpPr>
-          <p:cNvPr id="13" name="TextBox 12"/>
-          <p:cNvSpPr txBox="1"/>
-          <p:nvPr/>
-        </p:nvSpPr>
-        <p:spPr>
-          <a:xfrm>
-            <a:off x="777240" y="3831336"/>
-            <a:ext cx="10774375" cy="822959"/>
-          </a:xfrm>
-          <a:prstGeom prst="rect">
-            <a:avLst/>
-          </a:prstGeom>
-          <a:noFill/>
-        </p:spPr>
-        <p:txBody>
-          <a:bodyPr wrap="square">
-            <a:spAutoFit/>
-          </a:bodyPr>
-          <a:lstStyle/>
-          <a:p>
-            <a:r>
-              <a:rPr sz="1200" b="1" i="0">
-                <a:solidFill>
-                  <a:srgbClr val="A02030"/>
-                </a:solidFill>
-                <a:latin typeface="Calibri"/>
-              </a:rPr>
-              <a:t>Atención</a:t>
-            </a:r>
-          </a:p>
-          <a:p>
-            <a:pPr>
-              <a:spcBef>
-                <a:spcPts val="400"/>
-              </a:spcBef>
-            </a:pPr>
-            <a:r>
-              <a:rPr sz="1400" b="0" i="0">
-                <a:solidFill>
-                  <a:srgbClr val="333333"/>
-                </a:solidFill>
-                <a:latin typeface="Calibri"/>
-              </a:rPr>
-              <a:t>Sin cloud de pago ni instalaciones obligatorias de hipervisores/Docker Desktop.</a:t>
-            </a:r>
-          </a:p>
-        </p:txBody>
-      </p:sp>
-      <p:sp>
-        <p:nvSpPr>
-          <p:cNvPr id="14" name="TextBox 13"/>
-          <p:cNvSpPr txBox="1"/>
-          <p:nvPr/>
-        </p:nvSpPr>
-        <p:spPr>
-          <a:xfrm>
-            <a:off x="11185855" y="6473952"/>
-            <a:ext cx="640080" cy="274320"/>
-          </a:xfrm>
-          <a:prstGeom prst="rect">
-            <a:avLst/>
-          </a:prstGeom>
-          <a:noFill/>
-        </p:spPr>
-        <p:txBody>
-          <a:bodyPr wrap="square">
-            <a:spAutoFit/>
-          </a:bodyPr>
-          <a:lstStyle/>
-          <a:p>
-            <a:pPr algn="r"/>
-            <a:r>
-              <a:rPr sz="1100" b="0" i="0">
-                <a:solidFill>
-                  <a:srgbClr val="666666"/>
-                </a:solidFill>
-                <a:latin typeface="Calibri"/>
-              </a:rPr>
-              <a:t>37</a:t>
-            </a:r>
-          </a:p>
-        </p:txBody>
-      </p:sp>
-    </p:spTree>
-  </p:cSld>
-  <p:clrMapOvr>
-    <a:masterClrMapping/>
-  </p:clrMapOvr>
-</p:sld>
-</file>
-
-<file path=ppt/slides/slide38.xml><?xml version="1.0" encoding="utf-8"?>
-<p:sld xmlns:a="http://schemas.openxmlformats.org/drawingml/2006/main" xmlns:p="http://schemas.openxmlformats.org/presentationml/2006/main" xmlns:r="http://schemas.openxmlformats.org/officeDocument/2006/relationships">
-  <p:cSld>
-    <p:bg>
-      <p:bgPr>
-        <a:solidFill>
-          <a:srgbClr val="FFFFFF"/>
-        </a:solidFill>
-        <a:effectLst/>
-      </p:bgPr>
-    </p:bg>
-    <p:spTree>
-      <p:nvGrpSpPr>
-        <p:cNvPr id="1" name=""/>
-        <p:cNvGrpSpPr/>
-        <p:nvPr/>
-      </p:nvGrpSpPr>
-      <p:grpSpPr/>
-      <p:sp>
-        <p:nvSpPr>
-          <p:cNvPr id="2" name="Rectangle 1"/>
-          <p:cNvSpPr/>
-          <p:nvPr/>
-        </p:nvSpPr>
-        <p:spPr>
-          <a:xfrm>
-            <a:off x="0" y="0"/>
-            <a:ext cx="12191695" cy="164592"/>
-          </a:xfrm>
-          <a:prstGeom prst="rect">
-            <a:avLst/>
-          </a:prstGeom>
-          <a:solidFill>
-            <a:srgbClr val="269CCB"/>
-          </a:solidFill>
-          <a:ln>
-            <a:noFill/>
-          </a:ln>
-        </p:spPr>
-        <p:style>
-          <a:lnRef idx="1">
-            <a:schemeClr val="accent1"/>
-          </a:lnRef>
-          <a:fillRef idx="3">
-            <a:schemeClr val="accent1"/>
-          </a:fillRef>
-          <a:effectRef idx="2">
-            <a:schemeClr val="accent1"/>
-          </a:effectRef>
-          <a:fontRef idx="minor">
-            <a:schemeClr val="lt1"/>
-          </a:fontRef>
-        </p:style>
-        <p:txBody>
-          <a:bodyPr rtlCol="0" anchor="ctr"/>
-          <a:lstStyle/>
-          <a:p>
-            <a:pPr algn="ctr"/>
-          </a:p>
-        </p:txBody>
-      </p:sp>
-      <p:pic>
-        <p:nvPicPr>
-          <p:cNvPr id="3" name="Picture 2" descr="logo_uniajc_color.png"/>
-          <p:cNvPicPr>
-            <a:picLocks noChangeAspect="1"/>
-          </p:cNvPicPr>
-          <p:nvPr/>
-        </p:nvPicPr>
-        <p:blipFill>
-          <a:blip r:embed="rId2"/>
-          <a:stretch>
-            <a:fillRect/>
-          </a:stretch>
-        </p:blipFill>
-        <p:spPr>
-          <a:xfrm>
-            <a:off x="10271455" y="5998464"/>
-            <a:ext cx="1463040" cy="643233"/>
-          </a:xfrm>
-          <a:prstGeom prst="rect">
-            <a:avLst/>
-          </a:prstGeom>
-        </p:spPr>
-      </p:pic>
-      <p:sp>
-        <p:nvSpPr>
-          <p:cNvPr id="4" name="TextBox 3"/>
-          <p:cNvSpPr txBox="1"/>
-          <p:nvPr/>
-        </p:nvSpPr>
-        <p:spPr>
-          <a:xfrm>
-            <a:off x="457200" y="1737360"/>
-            <a:ext cx="11277295" cy="1097280"/>
-          </a:xfrm>
-          <a:prstGeom prst="rect">
-            <a:avLst/>
-          </a:prstGeom>
-          <a:noFill/>
-        </p:spPr>
-        <p:txBody>
-          <a:bodyPr wrap="square" anchor="ctr"/>
-          <a:lstStyle/>
-          <a:p>
-            <a:pPr algn="ctr"/>
-            <a:r>
-              <a:rPr sz="3400" b="1" i="0">
-                <a:solidFill>
-                  <a:srgbClr val="095292"/>
-                </a:solidFill>
-                <a:latin typeface="Calibri"/>
-              </a:rPr>
-              <a:t>Clase 3 · PI en movimiento</a:t>
-            </a:r>
-          </a:p>
-        </p:txBody>
-      </p:sp>
-      <p:sp>
-        <p:nvSpPr>
-          <p:cNvPr id="5" name="TextBox 4"/>
-          <p:cNvSpPr txBox="1"/>
-          <p:nvPr/>
-        </p:nvSpPr>
-        <p:spPr>
-          <a:xfrm>
-            <a:off x="457200" y="3017520"/>
-            <a:ext cx="11277295" cy="1645920"/>
-          </a:xfrm>
-          <a:prstGeom prst="rect">
-            <a:avLst/>
-          </a:prstGeom>
-          <a:noFill/>
-        </p:spPr>
-        <p:txBody>
-          <a:bodyPr wrap="square">
-            <a:spAutoFit/>
-          </a:bodyPr>
-          <a:lstStyle/>
-          <a:p>
-            <a:pPr algn="ctr">
-              <a:spcAft>
-                <a:spcPts val="600"/>
-              </a:spcAft>
-            </a:pPr>
-            <a:r>
-              <a:rPr sz="1600" b="0" i="0">
-                <a:solidFill>
-                  <a:srgbClr val="333333"/>
-                </a:solidFill>
-                <a:latin typeface="Calibri"/>
-              </a:rPr>
-              <a:t>Contenerizar un stub del servicio principal de CloudLite</a:t>
-            </a:r>
-          </a:p>
-          <a:p>
-            <a:pPr algn="ctr">
-              <a:spcAft>
-                <a:spcPts val="600"/>
-              </a:spcAft>
-            </a:pPr>
-            <a:r>
-              <a:rPr sz="1600" b="0" i="0">
-                <a:solidFill>
-                  <a:srgbClr val="333333"/>
-                </a:solidFill>
-                <a:latin typeface="Calibri"/>
-              </a:rPr>
-              <a:t>Evidencia: Dockerfile del stub + .dockerignore + ciclo de 5 comandos con la salida esperada y su justificación</a:t>
-            </a:r>
-          </a:p>
-          <a:p>
-            <a:pPr algn="ctr">
-              <a:spcAft>
-                <a:spcPts val="600"/>
-              </a:spcAft>
-            </a:pPr>
-            <a:r>
-              <a:rPr sz="1600" b="0" i="0">
-                <a:solidFill>
-                  <a:srgbClr val="333333"/>
-                </a:solidFill>
-                <a:latin typeface="Calibri"/>
-              </a:rPr>
-              <a:t>Siguiente paso = siguiente hito del PI CloudLite</a:t>
-            </a:r>
-          </a:p>
-        </p:txBody>
-      </p:sp>
-      <p:sp>
-        <p:nvSpPr>
-          <p:cNvPr id="6" name="TextBox 5"/>
-          <p:cNvSpPr txBox="1"/>
-          <p:nvPr/>
-        </p:nvSpPr>
-        <p:spPr>
-          <a:xfrm>
-            <a:off x="457200" y="4754880"/>
-            <a:ext cx="11277295" cy="640080"/>
-          </a:xfrm>
-          <a:prstGeom prst="rect">
-            <a:avLst/>
-          </a:prstGeom>
-          <a:noFill/>
-        </p:spPr>
-        <p:txBody>
-          <a:bodyPr wrap="square">
-            <a:spAutoFit/>
-          </a:bodyPr>
-          <a:lstStyle/>
-          <a:p>
-            <a:pPr algn="ctr"/>
-            <a:r>
-              <a:rPr sz="2000" b="1" i="0">
-                <a:solidFill>
-                  <a:srgbClr val="269CCB"/>
-                </a:solidFill>
-                <a:latin typeface="Calibri"/>
-              </a:rPr>
-              <a:t>Teoría al servicio del proyecto</a:t>
+              <a:t>Teoría al servicio del diseño</a:t>
             </a:r>
           </a:p>
         </p:txBody>
@@ -17978,4 +16791,324 @@
   </a:objectDefaults>
   <a:extraClrSchemeLst/>
 </a:theme>
+</file>
+
+<file path=ppt/theme/theme2.xml><?xml version="1.0" encoding="utf-8"?>
+<a:theme xmlns:a="http://schemas.openxmlformats.org/drawingml/2006/main" name="Office Theme">
+  <a:themeElements>
+    <a:clrScheme name="Office">
+      <a:dk1>
+        <a:sysClr val="windowText" lastClr="000000"/>
+      </a:dk1>
+      <a:lt1>
+        <a:sysClr val="window" lastClr="FFFFFF"/>
+      </a:lt1>
+      <a:dk2>
+        <a:srgbClr val="1F497D"/>
+      </a:dk2>
+      <a:lt2>
+        <a:srgbClr val="EEECE1"/>
+      </a:lt2>
+      <a:accent1>
+        <a:srgbClr val="4F81BD"/>
+      </a:accent1>
+      <a:accent2>
+        <a:srgbClr val="C0504D"/>
+      </a:accent2>
+      <a:accent3>
+        <a:srgbClr val="9BBB59"/>
+      </a:accent3>
+      <a:accent4>
+        <a:srgbClr val="8064A2"/>
+      </a:accent4>
+      <a:accent5>
+        <a:srgbClr val="4BACC6"/>
+      </a:accent5>
+      <a:accent6>
+        <a:srgbClr val="F79646"/>
+      </a:accent6>
+      <a:hlink>
+        <a:srgbClr val="0000FF"/>
+      </a:hlink>
+      <a:folHlink>
+        <a:srgbClr val="800080"/>
+      </a:folHlink>
+    </a:clrScheme>
+    <a:fontScheme name="Office">
+      <a:majorFont>
+        <a:latin typeface="Calibri"/>
+        <a:ea typeface=""/>
+        <a:cs typeface=""/>
+        <a:font script="Jpan" typeface="ＭＳ Ｐゴシック"/>
+        <a:font script="Hang" typeface="맑은 고딕"/>
+        <a:font script="Hans" typeface="宋体"/>
+        <a:font script="Hant" typeface="新細明體"/>
+        <a:font script="Arab" typeface="Times New Roman"/>
+        <a:font script="Hebr" typeface="Times New Roman"/>
+        <a:font script="Thai" typeface="Angsana New"/>
+        <a:font script="Ethi" typeface="Nyala"/>
+        <a:font script="Beng" typeface="Vrinda"/>
+        <a:font script="Gujr" typeface="Shruti"/>
+        <a:font script="Khmr" typeface="MoolBoran"/>
+        <a:font script="Knda" typeface="Tunga"/>
+        <a:font script="Guru" typeface="Raavi"/>
+        <a:font script="Cans" typeface="Euphemia"/>
+        <a:font script="Cher" typeface="Plantagenet Cherokee"/>
+        <a:font script="Yiii" typeface="Microsoft Yi Baiti"/>
+        <a:font script="Tibt" typeface="Microsoft Himalaya"/>
+        <a:font script="Thaa" typeface="MV Boli"/>
+        <a:font script="Deva" typeface="Mangal"/>
+        <a:font script="Telu" typeface="Gautami"/>
+        <a:font script="Taml" typeface="Latha"/>
+        <a:font script="Syrc" typeface="Estrangelo Edessa"/>
+        <a:font script="Orya" typeface="Kalinga"/>
+        <a:font script="Mlym" typeface="Kartika"/>
+        <a:font script="Laoo" typeface="DokChampa"/>
+        <a:font script="Sinh" typeface="Iskoola Pota"/>
+        <a:font script="Mong" typeface="Mongolian Baiti"/>
+        <a:font script="Viet" typeface="Times New Roman"/>
+        <a:font script="Uigh" typeface="Microsoft Uighur"/>
+        <a:font script="Geor" typeface="Sylfaen"/>
+      </a:majorFont>
+      <a:minorFont>
+        <a:latin typeface="Calibri"/>
+        <a:ea typeface=""/>
+        <a:cs typeface=""/>
+        <a:font script="Jpan" typeface="ＭＳ Ｐゴシック"/>
+        <a:font script="Hang" typeface="맑은 고딕"/>
+        <a:font script="Hans" typeface="宋体"/>
+        <a:font script="Hant" typeface="新細明體"/>
+        <a:font script="Arab" typeface="Arial"/>
+        <a:font script="Hebr" typeface="Arial"/>
+        <a:font script="Thai" typeface="Cordia New"/>
+        <a:font script="Ethi" typeface="Nyala"/>
+        <a:font script="Beng" typeface="Vrinda"/>
+        <a:font script="Gujr" typeface="Shruti"/>
+        <a:font script="Khmr" typeface="DaunPenh"/>
+        <a:font script="Knda" typeface="Tunga"/>
+        <a:font script="Guru" typeface="Raavi"/>
+        <a:font script="Cans" typeface="Euphemia"/>
+        <a:font script="Cher" typeface="Plantagenet Cherokee"/>
+        <a:font script="Yiii" typeface="Microsoft Yi Baiti"/>
+        <a:font script="Tibt" typeface="Microsoft Himalaya"/>
+        <a:font script="Thaa" typeface="MV Boli"/>
+        <a:font script="Deva" typeface="Mangal"/>
+        <a:font script="Telu" typeface="Gautami"/>
+        <a:font script="Taml" typeface="Latha"/>
+        <a:font script="Syrc" typeface="Estrangelo Edessa"/>
+        <a:font script="Orya" typeface="Kalinga"/>
+        <a:font script="Mlym" typeface="Kartika"/>
+        <a:font script="Laoo" typeface="DokChampa"/>
+        <a:font script="Sinh" typeface="Iskoola Pota"/>
+        <a:font script="Mong" typeface="Mongolian Baiti"/>
+        <a:font script="Viet" typeface="Arial"/>
+        <a:font script="Uigh" typeface="Microsoft Uighur"/>
+        <a:font script="Geor" typeface="Sylfaen"/>
+      </a:minorFont>
+    </a:fontScheme>
+    <a:fmtScheme name="Office">
+      <a:fillStyleLst>
+        <a:solidFill>
+          <a:schemeClr val="phClr"/>
+        </a:solidFill>
+        <a:gradFill rotWithShape="1">
+          <a:gsLst>
+            <a:gs pos="0">
+              <a:schemeClr val="phClr">
+                <a:tint val="50000"/>
+                <a:satMod val="300000"/>
+              </a:schemeClr>
+            </a:gs>
+            <a:gs pos="35000">
+              <a:schemeClr val="phClr">
+                <a:tint val="37000"/>
+                <a:satMod val="300000"/>
+              </a:schemeClr>
+            </a:gs>
+            <a:gs pos="100000">
+              <a:schemeClr val="phClr">
+                <a:tint val="15000"/>
+                <a:satMod val="350000"/>
+              </a:schemeClr>
+            </a:gs>
+          </a:gsLst>
+          <a:lin ang="16200000" scaled="1"/>
+        </a:gradFill>
+        <a:gradFill rotWithShape="1">
+          <a:gsLst>
+            <a:gs pos="0">
+              <a:schemeClr val="phClr">
+                <a:tint val="100000"/>
+                <a:shade val="100000"/>
+                <a:satMod val="130000"/>
+              </a:schemeClr>
+            </a:gs>
+            <a:gs pos="100000">
+              <a:schemeClr val="phClr">
+                <a:tint val="50000"/>
+                <a:shade val="100000"/>
+                <a:satMod val="350000"/>
+              </a:schemeClr>
+            </a:gs>
+          </a:gsLst>
+          <a:lin ang="16200000" scaled="0"/>
+        </a:gradFill>
+      </a:fillStyleLst>
+      <a:lnStyleLst>
+        <a:ln w="9525" cap="flat" cmpd="sng" algn="ctr">
+          <a:solidFill>
+            <a:schemeClr val="phClr">
+              <a:shade val="95000"/>
+              <a:satMod val="105000"/>
+            </a:schemeClr>
+          </a:solidFill>
+          <a:prstDash val="solid"/>
+        </a:ln>
+        <a:ln w="25400" cap="flat" cmpd="sng" algn="ctr">
+          <a:solidFill>
+            <a:schemeClr val="phClr"/>
+          </a:solidFill>
+          <a:prstDash val="solid"/>
+        </a:ln>
+        <a:ln w="38100" cap="flat" cmpd="sng" algn="ctr">
+          <a:solidFill>
+            <a:schemeClr val="phClr"/>
+          </a:solidFill>
+          <a:prstDash val="solid"/>
+        </a:ln>
+      </a:lnStyleLst>
+      <a:effectStyleLst>
+        <a:effectStyle>
+          <a:effectLst>
+            <a:outerShdw blurRad="40000" dist="20000" dir="5400000" rotWithShape="0">
+              <a:srgbClr val="000000">
+                <a:alpha val="38000"/>
+              </a:srgbClr>
+            </a:outerShdw>
+          </a:effectLst>
+        </a:effectStyle>
+        <a:effectStyle>
+          <a:effectLst>
+            <a:outerShdw blurRad="40000" dist="23000" dir="5400000" rotWithShape="0">
+              <a:srgbClr val="000000">
+                <a:alpha val="35000"/>
+              </a:srgbClr>
+            </a:outerShdw>
+          </a:effectLst>
+        </a:effectStyle>
+        <a:effectStyle>
+          <a:effectLst>
+            <a:outerShdw blurRad="40000" dist="23000" dir="5400000" rotWithShape="0">
+              <a:srgbClr val="000000">
+                <a:alpha val="35000"/>
+              </a:srgbClr>
+            </a:outerShdw>
+          </a:effectLst>
+          <a:scene3d>
+            <a:camera prst="orthographicFront">
+              <a:rot lat="0" lon="0" rev="0"/>
+            </a:camera>
+            <a:lightRig rig="threePt" dir="t">
+              <a:rot lat="0" lon="0" rev="1200000"/>
+            </a:lightRig>
+          </a:scene3d>
+          <a:sp3d>
+            <a:bevelT w="63500" h="25400"/>
+          </a:sp3d>
+        </a:effectStyle>
+      </a:effectStyleLst>
+      <a:bgFillStyleLst>
+        <a:solidFill>
+          <a:schemeClr val="phClr"/>
+        </a:solidFill>
+        <a:gradFill rotWithShape="1">
+          <a:gsLst>
+            <a:gs pos="0">
+              <a:schemeClr val="phClr">
+                <a:tint val="40000"/>
+                <a:satMod val="350000"/>
+              </a:schemeClr>
+            </a:gs>
+            <a:gs pos="40000">
+              <a:schemeClr val="phClr">
+                <a:tint val="45000"/>
+                <a:shade val="99000"/>
+                <a:satMod val="350000"/>
+              </a:schemeClr>
+            </a:gs>
+            <a:gs pos="100000">
+              <a:schemeClr val="phClr">
+                <a:shade val="20000"/>
+                <a:satMod val="255000"/>
+              </a:schemeClr>
+            </a:gs>
+          </a:gsLst>
+          <a:path path="circle">
+            <a:fillToRect l="50000" t="-80000" r="50000" b="180000"/>
+          </a:path>
+        </a:gradFill>
+        <a:gradFill rotWithShape="1">
+          <a:gsLst>
+            <a:gs pos="0">
+              <a:schemeClr val="phClr">
+                <a:tint val="80000"/>
+                <a:satMod val="300000"/>
+              </a:schemeClr>
+            </a:gs>
+            <a:gs pos="100000">
+              <a:schemeClr val="phClr">
+                <a:shade val="30000"/>
+                <a:satMod val="200000"/>
+              </a:schemeClr>
+            </a:gs>
+          </a:gsLst>
+          <a:path path="circle">
+            <a:fillToRect l="50000" t="50000" r="50000" b="50000"/>
+          </a:path>
+        </a:gradFill>
+      </a:bgFillStyleLst>
+    </a:fmtScheme>
+  </a:themeElements>
+  <a:objectDefaults>
+    <a:spDef>
+      <a:spPr/>
+      <a:bodyPr/>
+      <a:lstStyle/>
+      <a:style>
+        <a:lnRef idx="1">
+          <a:schemeClr val="accent1"/>
+        </a:lnRef>
+        <a:fillRef idx="3">
+          <a:schemeClr val="accent1"/>
+        </a:fillRef>
+        <a:effectRef idx="2">
+          <a:schemeClr val="accent1"/>
+        </a:effectRef>
+        <a:fontRef idx="minor">
+          <a:schemeClr val="lt1"/>
+        </a:fontRef>
+      </a:style>
+    </a:spDef>
+    <a:lnDef>
+      <a:spPr/>
+      <a:bodyPr/>
+      <a:lstStyle/>
+      <a:style>
+        <a:lnRef idx="2">
+          <a:schemeClr val="accent1"/>
+        </a:lnRef>
+        <a:fillRef idx="0">
+          <a:schemeClr val="accent1"/>
+        </a:fillRef>
+        <a:effectRef idx="1">
+          <a:schemeClr val="accent1"/>
+        </a:effectRef>
+        <a:fontRef idx="minor">
+          <a:schemeClr val="tx1"/>
+        </a:fontRef>
+      </a:style>
+    </a:lnDef>
+  </a:objectDefaults>
+  <a:extraClrSchemeLst/>
+</a:theme>
 </file>
--- a/Arquitectura de Sistemas Computacionales/Clases/Clase 3 - Virtualizacion y contenedores/Presentacion.pptx
+++ b/Arquitectura de Sistemas Computacionales/Clases/Clase 3 - Virtualizacion y contenedores/Presentacion.pptx
@@ -544,6 +544,12 @@
               <a:t>Conviene decir desde el minuto uno por que esto importa para la arquitectura y no solo para la operacion: el contenedor es la unidad de despliegue con la que se razona en todos los diagramas siguientes, y sin entender que es exactamente, el nivel de contenedores del modelo C4 que se dibuja en la Clase 4 queda en pura metafora.</a:t>
             </a:r>
           </a:p>
+          <a:p/>
+          <a:p>
+            <a:r>
+              <a:t>(Sobre la actividad, no se proyecta) El entregable es un Dockerfile con su ciclo de construccion razonado: se escribe y se justifica, sin depender de ejecutarlo en ningun laboratorio externo para poder entregar.</a:t>
+            </a:r>
+          </a:p>
         </p:txBody>
       </p:sp>
       <p:sp>
@@ -915,7 +921,7 @@
           <a:p/>
           <a:p>
             <a:r>
-              <a:t>Su Dockerfile tiene siete instrucciones —esa cifra se califica, asi que conviene contarlas en voz alta— y el docente debe poder explicar cada una.</a:t>
+              <a:t>Su Dockerfile tiene siete instrucciones, y el docente debe poder explicar cada una.</a:t>
             </a:r>
           </a:p>
           <a:p/>
@@ -1021,6 +1027,12 @@
           <a:lstStyle/>
           <a:p>
             <a:r>
+              <a:t>Con el Dockerfile escrito faltan tres comandos, cada uno con su sintaxis precisa.</a:t>
+            </a:r>
+          </a:p>
+          <a:p/>
+          <a:p>
+            <a:r>
               <a:t>El -d lo manda a segundo plano y el --name le da un nombre estable para no andar copiando identificadores.</a:t>
             </a:r>
           </a:p>
@@ -1121,19 +1133,19 @@
           <a:p/>
           <a:p>
             <a:r>
-              <a:t>Hay dos limites que conviene anunciar ANTES de empezar y no despues, porque cambian como se planifica la hora de taller.</a:t>
+              <a:t>De ahi sale la regla operativa del dia, y hay que decirla como consecuencia del limite y no como consejo suelto: el Dockerfile se escribe en la carpeta del proyecto y se PEGA en el laboratorio, nunca al contrario, y las capturas se guardan antes de cerrar.</a:t>
             </a:r>
           </a:p>
           <a:p/>
           <a:p>
             <a:r>
-              <a:t>De ahi sale la regla operativa del dia, y hay que decirla como consecuencia del limite y no como consejo suelto: el Dockerfile se escribe en la carpeta del proyecto y se PEGA en el laboratorio, nunca al contrario, y las capturas se guardan antes de cerrar.</a:t>
+              <a:t>Por eso la alterna es alterna y no la primera opcion.</a:t>
             </a:r>
           </a:p>
           <a:p/>
           <a:p>
             <a:r>
-              <a:t>Por eso la alterna es alterna y no la primera opcion.</a:t>
+              <a:t>(Sobre la actividad, no se proyecta) Hay dos limites que conviene anunciar ANTES de empezar y no despues, porque cambian como se planifica la hora de taller.</a:t>
             </a:r>
           </a:p>
         </p:txBody>
@@ -1210,6 +1222,12 @@
           <a:p>
             <a:r>
               <a:t>La respuesta, dicha desde ya, es no.</a:t>
+            </a:r>
+          </a:p>
+          <a:p/>
+          <a:p>
+            <a:r>
+              <a:t>(Sobre la actividad, no se proyecta) Un grupo que solo copio comandos consigue la captura del entregable, pero en la Clase 8, cuando el pipeline de integracion continua deba construir una imagen automaticamente, no sabra que esta construyendo ni por que su build tarda cinco minutos, y en la sustentacion de la Clase 15 describira su arquitectura diciendo que lo metieron en Docker, que no es una decision arquitectonica sino una herramienta sin justificar.</a:t>
             </a:r>
           </a:p>
         </p:txBody>
@@ -6567,23 +6585,7 @@
                 </a:solidFill>
                 <a:latin typeface="Calibri"/>
               </a:rPr>
-              <a:t>–   Ese COPY.. tiene una consecuencia que hay que decir mientras esta proyectado, porque vale cinco puntos de la actividad: copia TODO lo que haya en la carpeta, incluido el archivo.env con las credenciales</a:t>
-            </a:r>
-          </a:p>
-          <a:p>
-            <a:pPr>
-              <a:spcAft>
-                <a:spcPts val="800"/>
-              </a:spcAft>
-            </a:pPr>
-            <a:r>
-              <a:rPr sz="2000" b="0" i="0">
-                <a:solidFill>
-                  <a:srgbClr val="333333"/>
-                </a:solidFill>
-                <a:latin typeface="Calibri"/>
-              </a:rPr>
-              <a:t>–   Y una vez dentro de una capa ya no sale, ni siquiera borrandolo en una instruccion posterior.</a:t>
+              <a:t>–   Ese COPY.. tiene una consecuencia seria: copia TODO lo que haya en la carpeta, incluido el archivo.env con las credenciales, y una vez dentro de una capa ya no sale, ni siquiera borrandolo en una instruccion posterior.</a:t>
             </a:r>
           </a:p>
           <a:p>
@@ -6851,7 +6853,7 @@
                 </a:solidFill>
                 <a:latin typeface="Calibri"/>
               </a:rPr>
-              <a:t>–   Con el Dockerfile escrito faltan tres comandos, y los tres se califican por separado, asi que hay que dictarlos con la precision con la que se van a corregir.</a:t>
+              <a:t>–   El primero es la construccion: docker build -t cloudlite-api:0.1.0.</a:t>
             </a:r>
           </a:p>
           <a:p>
@@ -6867,7 +6869,7 @@
                 </a:solidFill>
                 <a:latin typeface="Calibri"/>
               </a:rPr>
-              <a:t>–   El primero es la construccion: docker build -t cloudlite-api:0.1.0.</a:t>
+              <a:t>–   El -t asigna nombre y etiqueta, y el punto final no es adorno sino el contexto de construccion, es decir la carpeta cuyo contenido se le entrega al motor.</a:t>
             </a:r>
           </a:p>
           <a:p>
@@ -6883,7 +6885,7 @@
                 </a:solidFill>
                 <a:latin typeface="Calibri"/>
               </a:rPr>
-              <a:t>–   El -t asigna nombre y etiqueta, y el punto final no es adorno sino el contexto de construccion, es decir la carpeta cuyo contenido se le entrega al motor.</a:t>
+              <a:t>–   Un build sin etiqueta funciona y por eso el estudiante no nota el problema: Docker le pone latest en silencio, y a partir de ahi nadie puede decir que version esta corriendo.</a:t>
             </a:r>
           </a:p>
           <a:p>
@@ -6899,7 +6901,7 @@
                 </a:solidFill>
                 <a:latin typeface="Calibri"/>
               </a:rPr>
-              <a:t>–   Un build sin etiqueta funciona y por eso el estudiante no nota el problema: Docker le pone latest en silencio, y a partir de ahi nadie puede decir que version esta corriendo.</a:t>
+              <a:t>–   Nombre Y etiqueta, siempre; la etiqueta suelta no basta y el nombre solo tampoco.</a:t>
             </a:r>
           </a:p>
           <a:p>
@@ -6915,7 +6917,7 @@
                 </a:solidFill>
                 <a:latin typeface="Calibri"/>
               </a:rPr>
-              <a:t>–   Nombre Y etiqueta, siempre; la etiqueta suelta no basta y el nombre solo tampoco.</a:t>
+              <a:t>–   El segundo es la ejecucion: docker run -d -p 8081:8080 --name api cloudlite-api:0.1.0.</a:t>
             </a:r>
           </a:p>
           <a:p>
@@ -6931,7 +6933,7 @@
                 </a:solidFill>
                 <a:latin typeface="Calibri"/>
               </a:rPr>
-              <a:t>–   El segundo es la ejecucion: docker run -d -p 8081:8080 --name api cloudlite-api:0.1.0.</a:t>
+              <a:t>–   El corazon de la instruccion es el -p, y conviene escribirlo en el tablero con las dos etiquetas encima: el numero de la IZQUIERDA es el del anfitrion, la maquina desde la que uno abre el navegador, y el de la DERECHA es el del contenedor, el mismo del EXPOSE.</a:t>
             </a:r>
           </a:p>
         </p:txBody>
@@ -7151,22 +7153,6 @@
                 </a:solidFill>
                 <a:latin typeface="Calibri"/>
               </a:rPr>
-              <a:t>–   El corazon de la instruccion es el -p, y conviene escribirlo en el tablero con las dos etiquetas encima: el numero de la IZQUIERDA es el del anfitrion, la maquina desde la que uno abre el navegador, y el de la DERECHA es el del contenedor, el mismo del EXPOSE.</a:t>
-            </a:r>
-          </a:p>
-          <a:p>
-            <a:pPr>
-              <a:spcAft>
-                <a:spcPts val="800"/>
-              </a:spcAft>
-            </a:pPr>
-            <a:r>
-              <a:rPr sz="2000" b="0" i="0">
-                <a:solidFill>
-                  <a:srgbClr val="333333"/>
-                </a:solidFill>
-                <a:latin typeface="Calibri"/>
-              </a:rPr>
               <a:t>–   Se lee de derecha a izquierda: el puerto 8080 de dentro queda accesible como 8081 desde fuera.</a:t>
             </a:r>
           </a:p>
@@ -8050,23 +8036,7 @@
                 </a:solidFill>
                 <a:latin typeface="Calibri"/>
               </a:rPr>
-              <a:t>–   Tras ejecutar el contenedor, el comando docker ps lista lo que esta corriendo con siete columnas</a:t>
-            </a:r>
-          </a:p>
-          <a:p>
-            <a:pPr>
-              <a:spcAft>
-                <a:spcPts val="800"/>
-              </a:spcAft>
-            </a:pPr>
-            <a:r>
-              <a:rPr sz="2000" b="0" i="0">
-                <a:solidFill>
-                  <a:srgbClr val="333333"/>
-                </a:solidFill>
-                <a:latin typeface="Calibri"/>
-              </a:rPr>
-              <a:t>–   Y leerlas es parte del entregable: identificador del contenedor, imagen de la que proviene, comando en ejecucion, tiempo desde su creacion, estado, puertos publicados y nombre asignado.</a:t>
+              <a:t>–   Tras ejecutar el contenedor, el comando docker ps lista lo que esta corriendo con siete columnas: identificador del contenedor, imagen de la que proviene, comando en ejecucion, tiempo desde su creacion, estado, puertos publicados y nombre asignado.</a:t>
             </a:r>
           </a:p>
           <a:p>
@@ -8985,22 +8955,6 @@
               <a:t>–   El contenedor de Docker, en cambio, es un mecanismo concreto de empaquetado y ejecucion.</a:t>
             </a:r>
           </a:p>
-          <a:p>
-            <a:pPr>
-              <a:spcAft>
-                <a:spcPts val="800"/>
-              </a:spcAft>
-            </a:pPr>
-            <a:r>
-              <a:rPr sz="2000" b="0" i="0">
-                <a:solidFill>
-                  <a:srgbClr val="333333"/>
-                </a:solidFill>
-                <a:latin typeface="Calibri"/>
-              </a:rPr>
-              <a:t>–   Se parecen y a menudo coinciden uno a uno, pero no son sinonimos: una base de datos gestionada que nadie contenerizo sigue siendo un contenedor en el sentido de C4.</a:t>
-            </a:r>
-          </a:p>
         </p:txBody>
       </p:sp>
       <p:sp>
@@ -9218,6 +9172,22 @@
                 </a:solidFill>
                 <a:latin typeface="Calibri"/>
               </a:rPr>
+              <a:t>–   Se parecen y a menudo coinciden uno a uno, pero no son sinonimos: una base de datos gestionada que nadie contenerizo sigue siendo un contenedor en el sentido de C4.</a:t>
+            </a:r>
+          </a:p>
+          <a:p>
+            <a:pPr>
+              <a:spcAft>
+                <a:spcPts val="800"/>
+              </a:spcAft>
+            </a:pPr>
+            <a:r>
+              <a:rPr sz="2000" b="0" i="0">
+                <a:solidFill>
+                  <a:srgbClr val="333333"/>
+                </a:solidFill>
+                <a:latin typeface="Calibri"/>
+              </a:rPr>
               <a:t>–   Decirlo hoy, mientras el estudiante tiene un docker ps en la pantalla, cuesta dos minutos</a:t>
             </a:r>
           </a:p>
@@ -9267,38 +9237,6 @@
                 <a:latin typeface="Calibri"/>
               </a:rPr>
               <a:t>–   El estudiante que aprende eso concluye que puede correr cualquier cosa en cualquier parte con aislamiento total</a:t>
-            </a:r>
-          </a:p>
-          <a:p>
-            <a:pPr>
-              <a:spcAft>
-                <a:spcPts val="800"/>
-              </a:spcAft>
-            </a:pPr>
-            <a:r>
-              <a:rPr sz="2000" b="0" i="0">
-                <a:solidFill>
-                  <a:srgbClr val="333333"/>
-                </a:solidFill>
-                <a:latin typeface="Calibri"/>
-              </a:rPr>
-              <a:t>–   Y en la Clase 6 no entendera por que el kernel compartido es un asunto de seguridad, ni por que existe la recomendacion de no ejecutar el proceso como usuario root dentro del contenedor.</a:t>
-            </a:r>
-          </a:p>
-          <a:p>
-            <a:pPr>
-              <a:spcAft>
-                <a:spcPts val="800"/>
-              </a:spcAft>
-            </a:pPr>
-            <a:r>
-              <a:rPr sz="2000" b="0" i="0">
-                <a:solidFill>
-                  <a:srgbClr val="333333"/>
-                </a:solidFill>
-                <a:latin typeface="Calibri"/>
-              </a:rPr>
-              <a:t>–   El segundo error es convertir la clase en un recetario de comandos: dictar docker build, docker run y docker ps al tablero para que todos copien, sin explicar la distincion entre imagen y contenedor ni el modelo de capas.</a:t>
             </a:r>
           </a:p>
         </p:txBody>
@@ -9518,7 +9456,7 @@
                 </a:solidFill>
                 <a:latin typeface="Calibri"/>
               </a:rPr>
-              <a:t>–   Un grupo que solo copio comandos consigue la captura del entregable, pero en la Clase 8, cuando el pipeline de integracion continua deba construir una imagen automaticamente, no sabra que esta construyendo ni por que su build tarda cinco minutos</a:t>
+              <a:t>–   Y en la Clase 6 no entendera por que el kernel compartido es un asunto de seguridad, ni por que existe la recomendacion de no ejecutar el proceso como usuario root dentro del contenedor.</a:t>
             </a:r>
           </a:p>
           <a:p>
@@ -9534,7 +9472,7 @@
                 </a:solidFill>
                 <a:latin typeface="Calibri"/>
               </a:rPr>
-              <a:t>–   Y en la sustentacion de la Clase 15 describira su arquitectura diciendo que lo metieron en Docker, que no es una decision arquitectonica sino una herramienta sin justificar.</a:t>
+              <a:t>–   El segundo error es convertir la clase en un recetario de comandos: dictar docker build, docker run y docker ps al tablero para que todos copien, sin explicar la distincion entre imagen y contenedor ni el modelo de capas.</a:t>
             </a:r>
           </a:p>
         </p:txBody>
@@ -14945,7 +14883,7 @@
                 </a:solidFill>
                 <a:latin typeface="Calibri"/>
               </a:rPr>
-              <a:t> carpeta del PI y se pega en el lab, nunca al contrario: lo que se cierra con la sesión no es tu entregable.</a:t>
+              <a:t> carpeta del PI y se pega en el lab, nunca al contrario: lo que se cierra con la sesión del lab se pierde.</a:t>
             </a:r>
           </a:p>
         </p:txBody>
@@ -16142,22 +16080,6 @@
                 <a:latin typeface="Calibri"/>
               </a:rPr>
               <a:t>–   Es la primera clase francamente tecnica del curso y la primera en la que el estudiante escribe algo que una maquina ejecuta.</a:t>
-            </a:r>
-          </a:p>
-          <a:p>
-            <a:pPr>
-              <a:spcAft>
-                <a:spcPts val="800"/>
-              </a:spcAft>
-            </a:pPr>
-            <a:r>
-              <a:rPr sz="2000" b="0" i="0">
-                <a:solidFill>
-                  <a:srgbClr val="333333"/>
-                </a:solidFill>
-                <a:latin typeface="Calibri"/>
-              </a:rPr>
-              <a:t>–   El entregable es un Dockerfile con su ciclo de construccion razonado: se escribe y se justifica, sin depender de ejecutarlo en ningun laboratorio externo para poder entregar.</a:t>
             </a:r>
           </a:p>
         </p:txBody>

--- a/Arquitectura de Sistemas Computacionales/Clases/Clase 3 - Virtualizacion y contenedores/Presentacion.pptx
+++ b/Arquitectura de Sistemas Computacionales/Clases/Clase 3 - Virtualizacion y contenedores/Presentacion.pptx
@@ -39,6 +39,7 @@
     <p:sldId id="287" r:id="rId39"/>
     <p:sldId id="288" r:id="rId40"/>
     <p:sldId id="289" r:id="rId41"/>
+    <p:sldId id="290" r:id="rId42"/>
   </p:sldIdLst>
   <p:sldSz cx="12191695" cy="6858000" type="screen4x3"/>
   <p:notesSz cx="6858000" cy="9144000"/>
@@ -4702,7 +4703,7 @@
                 </a:solidFill>
                 <a:latin typeface="Calibri"/>
               </a:rPr>
-              <a:t>Recorrer el diagrama de las dos pilas, de abajo hacia arriba (1/2)</a:t>
+              <a:t>Antes de la virtualizacion: un servidor por aplicacion</a:t>
             </a:r>
           </a:p>
         </p:txBody>
@@ -4741,7 +4742,7 @@
                 </a:solidFill>
                 <a:latin typeface="Calibri"/>
               </a:rPr>
-              <a:t>–   Esta diapositiva es la misma comparacion de la seccion anterior, ya dibujada, y conviene recorrerla con el puntero en vez de leerla.</a:t>
+              <a:t>–   Antes de la virtualizacion, cada aplicacion importante vivia en su propio servidor fisico, por una razon sencilla: si dos aplicaciones compartian maquina, una podia tumbar a la otra.</a:t>
             </a:r>
           </a:p>
           <a:p>
@@ -4757,7 +4758,7 @@
                 </a:solidFill>
                 <a:latin typeface="Calibri"/>
               </a:rPr>
-              <a:t>–   Se sube por la columna izquierda: hardware fisico, hipervisor, y encima DOS sistemas operativos invitados completos, uno por aplicacion.</a:t>
+              <a:t>–   El resultado era un desperdicio enorme, con servidores trabajando tipicamente entre el 5 % y el 15 % de su capacidad la mayor parte del tiempo.</a:t>
             </a:r>
           </a:p>
           <a:p>
@@ -4773,7 +4774,23 @@
                 </a:solidFill>
                 <a:latin typeface="Calibri"/>
               </a:rPr>
-              <a:t>–   Luego por la derecha: el mismo hardware, un solo sistema operativo anfitrion con el motor de contenedores, y encima los contenedores, que ya no traen sistema operativo propio.</a:t>
+              <a:t>–   Cada una de esas maquinas se llama maquina virtual y contiene un sistema operativo entero, kernel incluido, donde kernel es el nucleo del sistema operativo, la parte que administra memoria, procesos y acceso al hardware.</a:t>
+            </a:r>
+          </a:p>
+          <a:p>
+            <a:pPr>
+              <a:spcAft>
+                <a:spcPts val="800"/>
+              </a:spcAft>
+            </a:pPr>
+            <a:r>
+              <a:rPr sz="2000" b="0" i="0">
+                <a:solidFill>
+                  <a:srgbClr val="333333"/>
+                </a:solidFill>
+                <a:latin typeface="Calibri"/>
+              </a:rPr>
+              <a:t>–   En contraparte, su aislamiento es fuerte, ya que dos maquinas virtuales no comparten kernel y un problema en el nucleo de una no alcanza a la otra.</a:t>
             </a:r>
           </a:p>
         </p:txBody>
@@ -4954,7 +4971,7 @@
                 </a:solidFill>
                 <a:latin typeface="Calibri"/>
               </a:rPr>
-              <a:t>Recorrer el diagrama de las dos pilas, de abajo hacia arriba (2/2)</a:t>
+              <a:t>Recorrer el diagrama de las dos pilas, de abajo hacia arriba (1/2)</a:t>
             </a:r>
           </a:p>
         </p:txBody>
@@ -4993,7 +5010,7 @@
                 </a:solidFill>
                 <a:latin typeface="Calibri"/>
               </a:rPr>
-              <a:t>–   La pregunta que hay que hacer en voz alta, senalando el hueco, es cual es la caja que desaparecio, y la respuesta es el segundo sistema operativo.</a:t>
+              <a:t>–   Esta diapositiva es la misma comparacion de la seccion anterior, ya dibujada, y conviene recorrerla con el puntero en vez de leerla.</a:t>
             </a:r>
           </a:p>
           <a:p>
@@ -5009,7 +5026,39 @@
                 </a:solidFill>
                 <a:latin typeface="Calibri"/>
               </a:rPr>
-              <a:t>–   Todo lo demas —arranque en segundos y no en minutos, megabytes y no gigabytes— es consecuencia de esa caja que ya no esta, y decirlo en ese orden evita que el estudiante memorice cuatro cifras sueltas sin saber de donde salen.</a:t>
+              <a:t>–   Se sube por la columna izquierda: hardware fisico, hipervisor, y encima DOS sistemas operativos invitados completos, uno por aplicacion.</a:t>
+            </a:r>
+          </a:p>
+          <a:p>
+            <a:pPr>
+              <a:spcAft>
+                <a:spcPts val="800"/>
+              </a:spcAft>
+            </a:pPr>
+            <a:r>
+              <a:rPr sz="2000" b="0" i="0">
+                <a:solidFill>
+                  <a:srgbClr val="333333"/>
+                </a:solidFill>
+                <a:latin typeface="Calibri"/>
+              </a:rPr>
+              <a:t>–   Luego por la derecha: el mismo hardware, un solo sistema operativo anfitrion con el motor de contenedores, y encima los contenedores, que ya no traen sistema operativo propio.</a:t>
+            </a:r>
+          </a:p>
+          <a:p>
+            <a:pPr>
+              <a:spcAft>
+                <a:spcPts val="800"/>
+              </a:spcAft>
+            </a:pPr>
+            <a:r>
+              <a:rPr sz="2000" b="0" i="0">
+                <a:solidFill>
+                  <a:srgbClr val="333333"/>
+                </a:solidFill>
+                <a:latin typeface="Calibri"/>
+              </a:rPr>
+              <a:t>–   La caja que desaparece al pasar de la pila de la maquina virtual a la del contenedor es el segundo sistema operativo.</a:t>
             </a:r>
           </a:p>
         </p:txBody>
@@ -5190,7 +5239,7 @@
                 </a:solidFill>
                 <a:latin typeface="Calibri"/>
               </a:rPr>
-              <a:t>El contenedor: aislamiento sin otro sistema operativo (1/2)</a:t>
+              <a:t>Recorrer el diagrama de las dos pilas, de abajo hacia arriba (2/2)</a:t>
             </a:r>
           </a:p>
         </p:txBody>
@@ -5229,7 +5278,7 @@
                 </a:solidFill>
                 <a:latin typeface="Calibri"/>
               </a:rPr>
-              <a:t>–   Un contenedor parte de una observacion distinta: casi nunca se necesita otro sistema operativo, solo un espacio aislado dentro del que ya existe.</a:t>
+              <a:t>–   Todo lo demas —arranque en segundos y no en minutos, megabytes y no gigabytes— es consecuencia de esa caja que ya no esta.</a:t>
             </a:r>
           </a:p>
           <a:p>
@@ -5245,7 +5294,7 @@
                 </a:solidFill>
                 <a:latin typeface="Calibri"/>
               </a:rPr>
-              <a:t>–   Los namespaces le dan a cada contenedor su propia vista de procesos, red, usuarios y sistema de archivos, de modo que dentro del contenedor su proceso principal se ve con el numero 1 y no ve los procesos vecinos.</a:t>
+              <a:t>–   Leida de abajo hacia arriba, la pila de la maquina virtual es: hardware, hipervisor, sistema operativo invitado, librerias y aplicacion.</a:t>
             </a:r>
           </a:p>
           <a:p>
@@ -5261,7 +5310,7 @@
                 </a:solidFill>
                 <a:latin typeface="Calibri"/>
               </a:rPr>
-              <a:t>–   Sin sistema operativo propio, los numeros cambian de escala: una imagen basada en Alpine Linux pesa del orden de 5 a 10 MB</a:t>
+              <a:t>–   La del contenedor es: hardware, sistema operativo del anfitrion, motor de contenedores, librerias y aplicacion.</a:t>
             </a:r>
           </a:p>
           <a:p>
@@ -5277,7 +5326,7 @@
                 </a:solidFill>
                 <a:latin typeface="Calibri"/>
               </a:rPr>
-              <a:t>–   Una imagen slim de un runtime como Node ronda los 150 a 250 MB frente a cerca de 1 GB de la version completa, y el arranque es de decimas de segundo.</a:t>
+              <a:t>–   Un error comun es creer que el contenedor no usa sistema operativo: usa el del anfitrion, y por eso una imagen Linux necesita un kernel Linux debajo.</a:t>
             </a:r>
           </a:p>
         </p:txBody>
@@ -5458,7 +5507,7 @@
                 </a:solidFill>
                 <a:latin typeface="Calibri"/>
               </a:rPr>
-              <a:t>El contenedor: aislamiento sin otro sistema operativo (2/2)</a:t>
+              <a:t>El contenedor: aislamiento sin otro sistema operativo (1/2)</a:t>
             </a:r>
           </a:p>
         </p:txBody>
@@ -5497,7 +5546,7 @@
                 </a:solidFill>
                 <a:latin typeface="Calibri"/>
               </a:rPr>
-              <a:t>–   Aqui esta la respuesta a la frase que hay que evitar: un contenedor no es «una maquina virtual ligera».</a:t>
+              <a:t>–   Un contenedor parte de una observacion distinta: casi nunca se necesita otro sistema operativo, solo un espacio aislado dentro del que ya existe.</a:t>
             </a:r>
           </a:p>
           <a:p>
@@ -5513,7 +5562,7 @@
                 </a:solidFill>
                 <a:latin typeface="Calibri"/>
               </a:rPr>
-              <a:t>–   La diferencia no es el peso sino el aislamiento; como el kernel es compartido, una vulnerabilidad del kernel puede afectar a todos los contenedores de esa maquina</a:t>
+              <a:t>–   Los namespaces le dan a cada contenedor su propia vista de procesos, red, usuarios y sistema de archivos, de modo que dentro del contenedor su proceso principal se ve con el numero 1 y no ve los procesos vecinos.</a:t>
             </a:r>
           </a:p>
           <a:p>
@@ -5529,7 +5578,7 @@
                 </a:solidFill>
                 <a:latin typeface="Calibri"/>
               </a:rPr>
-              <a:t>–   Y por eso los proveedores de nube siguen usando maquinas virtuales para separar clientes distintos y ejecutan los contenedores DENTRO de ellas.</a:t>
+              <a:t>–   Sin sistema operativo propio, los numeros cambian de escala: una imagen basada en Alpine Linux pesa del orden de 5 a 10 MB</a:t>
             </a:r>
           </a:p>
           <a:p>
@@ -5545,7 +5594,7 @@
                 </a:solidFill>
                 <a:latin typeface="Calibri"/>
               </a:rPr>
-              <a:t>–   Contenedores y maquinas virtuales no compiten: se apilan.</a:t>
+              <a:t>–   Una imagen slim de un runtime como Node ronda los 150 a 250 MB frente a cerca de 1 GB de la version completa, y el arranque es de decimas de segundo.</a:t>
             </a:r>
           </a:p>
         </p:txBody>
@@ -5726,7 +5775,7 @@
                 </a:solidFill>
                 <a:latin typeface="Calibri"/>
               </a:rPr>
-              <a:t>Dockerfile, imagen, contenedor y registro: los cuatro terminos (1/2)</a:t>
+              <a:t>El contenedor: aislamiento sin otro sistema operativo (2/2)</a:t>
             </a:r>
           </a:p>
         </p:txBody>
@@ -5765,7 +5814,7 @@
                 </a:solidFill>
                 <a:latin typeface="Calibri"/>
               </a:rPr>
-              <a:t>–   El Dockerfile es la receta: un archivo de texto con instrucciones.</a:t>
+              <a:t>–   Aqui esta la respuesta a la frase que hay que evitar: un contenedor no es «una maquina virtual ligera».</a:t>
             </a:r>
           </a:p>
           <a:p>
@@ -5781,7 +5830,7 @@
                 </a:solidFill>
                 <a:latin typeface="Calibri"/>
               </a:rPr>
-              <a:t>–   La imagen es el resultado de ejecutar esa receta, un paquete inmutable y de solo lectura con el codigo, las dependencias y la configuracion.</a:t>
+              <a:t>–   La diferencia no es el peso sino el aislamiento; como el kernel es compartido, una vulnerabilidad del kernel puede afectar a todos los contenedores de esa maquina</a:t>
             </a:r>
           </a:p>
           <a:p>
@@ -5797,7 +5846,7 @@
                 </a:solidFill>
                 <a:latin typeface="Calibri"/>
               </a:rPr>
-              <a:t>–   El contenedor es una instancia en ejecucion de esa imagen, y de una misma imagen se pueden lanzar diez contenedores identicos, igual que de una clase se instancian muchos objetos</a:t>
+              <a:t>–   Y por eso los proveedores de nube siguen usando maquinas virtuales para separar clientes distintos y ejecutan los contenedores DENTRO de ellas.</a:t>
             </a:r>
           </a:p>
           <a:p>
@@ -5813,7 +5862,7 @@
                 </a:solidFill>
                 <a:latin typeface="Calibri"/>
               </a:rPr>
-              <a:t>–   Esa comparacion funciona bien con estudiantes que ya vieron programacion orientada a objetos.</a:t>
+              <a:t>–   Contenedores y maquinas virtuales no compiten: se apilan.</a:t>
             </a:r>
           </a:p>
         </p:txBody>
@@ -5994,7 +6043,7 @@
                 </a:solidFill>
                 <a:latin typeface="Calibri"/>
               </a:rPr>
-              <a:t>Dockerfile, imagen, contenedor y registro: los cuatro terminos (2/2)</a:t>
+              <a:t>Dockerfile, imagen, contenedor y registro: los cuatro terminos (1/2)</a:t>
             </a:r>
           </a:p>
         </p:txBody>
@@ -6033,7 +6082,7 @@
                 </a:solidFill>
                 <a:latin typeface="Calibri"/>
               </a:rPr>
-              <a:t>–   Y el registro, o registry, es el repositorio donde las imagenes se publican y se descargan.</a:t>
+              <a:t>–   El Dockerfile es la receta: un archivo de texto con instrucciones.</a:t>
             </a:r>
           </a:p>
           <a:p>
@@ -6049,7 +6098,7 @@
                 </a:solidFill>
                 <a:latin typeface="Calibri"/>
               </a:rPr>
-              <a:t>–   Un detalle que explica el comportamiento diario: la imagen se construye por capas, una por instruccion, y esas capas quedan en cache; si una instruccion no cambio, la reconstruccion la reutiliza en lugar de volver a ejecutarla.</a:t>
+              <a:t>–   La imagen es el resultado de ejecutar esa receta, un paquete inmutable y de solo lectura con el codigo, las dependencias y la configuracion.</a:t>
             </a:r>
           </a:p>
           <a:p>
@@ -6065,7 +6114,23 @@
                 </a:solidFill>
                 <a:latin typeface="Calibri"/>
               </a:rPr>
-              <a:t>–   Hacerlo al reves obliga a reinstalar todo en cada construccion y convierte una build de 10 segundos en una de varios minutos.</a:t>
+              <a:t>–   El contenedor es una instancia en ejecucion de esa imagen, y de una misma imagen se pueden lanzar diez contenedores identicos, igual que de una clase se instancian muchos objetos</a:t>
+            </a:r>
+          </a:p>
+          <a:p>
+            <a:pPr>
+              <a:spcAft>
+                <a:spcPts val="800"/>
+              </a:spcAft>
+            </a:pPr>
+            <a:r>
+              <a:rPr sz="2000" b="0" i="0">
+                <a:solidFill>
+                  <a:srgbClr val="333333"/>
+                </a:solidFill>
+                <a:latin typeface="Calibri"/>
+              </a:rPr>
+              <a:t>–   Esa comparacion funciona bien con estudiantes que ya vieron programacion orientada a objetos.</a:t>
             </a:r>
           </a:p>
         </p:txBody>
@@ -6246,7 +6311,7 @@
                 </a:solidFill>
                 <a:latin typeface="Calibri"/>
               </a:rPr>
-              <a:t>Primer ejemplo: el stub de la API de CloudLite (1/2)</a:t>
+              <a:t>Dockerfile, imagen, contenedor y registro: los cuatro terminos (2/2)</a:t>
             </a:r>
           </a:p>
         </p:txBody>
@@ -6285,7 +6350,7 @@
                 </a:solidFill>
                 <a:latin typeface="Calibri"/>
               </a:rPr>
-              <a:t>–   En CloudLite Turnos el estudiante contenerizara un stub de su API, es decir una version minima que responde algo verificable: el endpoint GET /health, que devuelve un cuerpo en formato JSON con al menos un campo que se pueda comprobar.</a:t>
+              <a:t>–   Y el registro, o registry, es el repositorio donde las imagenes se publican y se descargan.</a:t>
             </a:r>
           </a:p>
           <a:p>
@@ -6301,7 +6366,7 @@
                 </a:solidFill>
                 <a:latin typeface="Calibri"/>
               </a:rPr>
-              <a:t>–   FROM node:20-alpine elige la imagen base, o sea el punto de partida ya construido por otros, en este caso un Linux minimo con Node instalado; la etiqueta 20-alpine es FIJA y eso importa</a:t>
+              <a:t>–   Un detalle que explica el comportamiento diario: la imagen se construye por capas, una por instruccion, y esas capas quedan en cache; si una instruccion no cambio, la reconstruccion la reutiliza en lugar de volver a ejecutarla.</a:t>
             </a:r>
           </a:p>
           <a:p>
@@ -6317,39 +6382,7 @@
                 </a:solidFill>
                 <a:latin typeface="Calibri"/>
               </a:rPr>
-              <a:t>–   Porque con latest la imagen de hoy no es la de manana y la reconstruccion deja de ser reproducible.</a:t>
-            </a:r>
-          </a:p>
-          <a:p>
-            <a:pPr>
-              <a:spcAft>
-                <a:spcPts val="800"/>
-              </a:spcAft>
-            </a:pPr>
-            <a:r>
-              <a:rPr sz="2000" b="0" i="0">
-                <a:solidFill>
-                  <a:srgbClr val="333333"/>
-                </a:solidFill>
-                <a:latin typeface="Calibri"/>
-              </a:rPr>
-              <a:t>–   RUN npm ci --omit=dev las instala dentro de la imagen y no en la maquina del estudiante, lo cual es el punto entero del ejercicio</a:t>
-            </a:r>
-          </a:p>
-          <a:p>
-            <a:pPr>
-              <a:spcAft>
-                <a:spcPts val="800"/>
-              </a:spcAft>
-            </a:pPr>
-            <a:r>
-              <a:rPr sz="2000" b="0" i="0">
-                <a:solidFill>
-                  <a:srgbClr val="333333"/>
-                </a:solidFill>
-                <a:latin typeface="Calibri"/>
-              </a:rPr>
-              <a:t>–   Porque la dependencia viaja con el artefacto; se usa npm ci y no npm install porque respeta el archivo de bloqueo y por tanto instala exactamente las mismas versiones en cada construccion.</a:t>
+              <a:t>–   Hacerlo al reves obliga a reinstalar todo en cada construccion y convierte una build de 10 segundos en una de varios minutos.</a:t>
             </a:r>
           </a:p>
         </p:txBody>
@@ -6530,7 +6563,7 @@
                 </a:solidFill>
                 <a:latin typeface="Calibri"/>
               </a:rPr>
-              <a:t>Primer ejemplo: el stub de la API de CloudLite (2/2)</a:t>
+              <a:t>Primer ejemplo: el stub de la API de CloudLite (1/2)</a:t>
             </a:r>
           </a:p>
         </p:txBody>
@@ -6569,7 +6602,7 @@
                 </a:solidFill>
                 <a:latin typeface="Calibri"/>
               </a:rPr>
-              <a:t>–   EXPOSE 8080 documenta en que puerto escucha el proceso.</a:t>
+              <a:t>–   En CloudLite Turnos el estudiante contenerizara un stub de su API, es decir una version minima que responde algo verificable: el endpoint GET /health, que devuelve un cuerpo en formato JSON con al menos un campo que se pueda comprobar.</a:t>
             </a:r>
           </a:p>
           <a:p>
@@ -6585,7 +6618,7 @@
                 </a:solidFill>
                 <a:latin typeface="Calibri"/>
               </a:rPr>
-              <a:t>–   Ese COPY.. tiene una consecuencia seria: copia TODO lo que haya en la carpeta, incluido el archivo.env con las credenciales, y una vez dentro de una capa ya no sale, ni siquiera borrandolo en una instruccion posterior.</a:t>
+              <a:t>–   FROM node:20-alpine elige la imagen base, o sea el punto de partida ya construido por otros, en este caso un Linux minimo con Node instalado; la etiqueta 20-alpine es FIJA y eso importa</a:t>
             </a:r>
           </a:p>
           <a:p>
@@ -6601,7 +6634,7 @@
                 </a:solidFill>
                 <a:latin typeface="Calibri"/>
               </a:rPr>
-              <a:t>–   La diapositiva lo proyecta junto al Dockerfile y no como nota al pie a proposito: son dos archivos hermanos en la misma carpeta, y el estudiante que entrega el primero sin el segundo entrega un artefacto que filtra secretos.</a:t>
+              <a:t>–   Porque con latest la imagen de hoy no es la de manana y la reconstruccion deja de ser reproducible.</a:t>
             </a:r>
           </a:p>
           <a:p>
@@ -6617,7 +6650,7 @@
                 </a:solidFill>
                 <a:latin typeface="Calibri"/>
               </a:rPr>
-              <a:t>–   La regla se enuncia en una linea: si haces COPY.., el.dockerignore va al lado y se menciona en la entrega.</a:t>
+              <a:t>–   RUN npm ci --omit=dev las instala dentro de la imagen y no en la maquina del estudiante, lo cual es el punto entero del ejercicio</a:t>
             </a:r>
           </a:p>
           <a:p>
@@ -6633,7 +6666,7 @@
                 </a:solidFill>
                 <a:latin typeface="Calibri"/>
               </a:rPr>
-              <a:t>–   Un ultimo detalle del que depende media clase: EXPOSE no abre nada, solo documenta.</a:t>
+              <a:t>–   Porque la dependencia viaja con el artefacto; se usa npm ci y no npm install porque respeta el archivo de bloqueo y por tanto instala exactamente las mismas versiones en cada construccion.</a:t>
             </a:r>
           </a:p>
         </p:txBody>
@@ -6814,7 +6847,7 @@
                 </a:solidFill>
                 <a:latin typeface="Calibri"/>
               </a:rPr>
-              <a:t>Construir, correr y verificar: los tres comandos y el contrato de salud (1/3)</a:t>
+              <a:t>Primer ejemplo: el stub de la API de CloudLite (2/2)</a:t>
             </a:r>
           </a:p>
         </p:txBody>
@@ -6853,7 +6886,7 @@
                 </a:solidFill>
                 <a:latin typeface="Calibri"/>
               </a:rPr>
-              <a:t>–   El primero es la construccion: docker build -t cloudlite-api:0.1.0.</a:t>
+              <a:t>–   EXPOSE 8080 documenta en que puerto escucha el proceso.</a:t>
             </a:r>
           </a:p>
           <a:p>
@@ -6869,7 +6902,7 @@
                 </a:solidFill>
                 <a:latin typeface="Calibri"/>
               </a:rPr>
-              <a:t>–   El -t asigna nombre y etiqueta, y el punto final no es adorno sino el contexto de construccion, es decir la carpeta cuyo contenido se le entrega al motor.</a:t>
+              <a:t>–   Ese COPY.. tiene una consecuencia seria: copia TODO lo que haya en la carpeta, incluido el archivo.env con las credenciales, y una vez dentro de una capa ya no sale, ni siquiera borrandolo en una instruccion posterior.</a:t>
             </a:r>
           </a:p>
           <a:p>
@@ -6885,7 +6918,7 @@
                 </a:solidFill>
                 <a:latin typeface="Calibri"/>
               </a:rPr>
-              <a:t>–   Un build sin etiqueta funciona y por eso el estudiante no nota el problema: Docker le pone latest en silencio, y a partir de ahi nadie puede decir que version esta corriendo.</a:t>
+              <a:t>–   La diapositiva lo proyecta junto al Dockerfile y no como nota al pie a proposito: son dos archivos hermanos en la misma carpeta, y el estudiante que entrega el primero sin el segundo entrega un artefacto que filtra secretos.</a:t>
             </a:r>
           </a:p>
           <a:p>
@@ -6901,7 +6934,7 @@
                 </a:solidFill>
                 <a:latin typeface="Calibri"/>
               </a:rPr>
-              <a:t>–   Nombre Y etiqueta, siempre; la etiqueta suelta no basta y el nombre solo tampoco.</a:t>
+              <a:t>–   La regla se enuncia en una linea: si haces COPY.., el.dockerignore va al lado y se menciona en la entrega.</a:t>
             </a:r>
           </a:p>
           <a:p>
@@ -6917,23 +6950,7 @@
                 </a:solidFill>
                 <a:latin typeface="Calibri"/>
               </a:rPr>
-              <a:t>–   El segundo es la ejecucion: docker run -d -p 8081:8080 --name api cloudlite-api:0.1.0.</a:t>
-            </a:r>
-          </a:p>
-          <a:p>
-            <a:pPr>
-              <a:spcAft>
-                <a:spcPts val="800"/>
-              </a:spcAft>
-            </a:pPr>
-            <a:r>
-              <a:rPr sz="2000" b="0" i="0">
-                <a:solidFill>
-                  <a:srgbClr val="333333"/>
-                </a:solidFill>
-                <a:latin typeface="Calibri"/>
-              </a:rPr>
-              <a:t>–   El corazon de la instruccion es el -p, y conviene escribirlo en el tablero con las dos etiquetas encima: el numero de la IZQUIERDA es el del anfitrion, la maquina desde la que uno abre el navegador, y el de la DERECHA es el del contenedor, el mismo del EXPOSE.</a:t>
+              <a:t>–   Un ultimo detalle del que depende media clase: EXPOSE no abre nada, solo documenta.</a:t>
             </a:r>
           </a:p>
         </p:txBody>
@@ -7114,7 +7131,7 @@
                 </a:solidFill>
                 <a:latin typeface="Calibri"/>
               </a:rPr>
-              <a:t>Construir, correr y verificar: los tres comandos y el contrato de salud (2/3)</a:t>
+              <a:t>Construir, correr y verificar: los tres comandos y el contrato de salud (1/3)</a:t>
             </a:r>
           </a:p>
         </p:txBody>
@@ -7153,7 +7170,7 @@
                 </a:solidFill>
                 <a:latin typeface="Calibri"/>
               </a:rPr>
-              <a:t>–   Se lee de derecha a izquierda: el puerto 8080 de dentro queda accesible como 8081 desde fuera.</a:t>
+              <a:t>–   El primero es la construccion: docker build -t cloudlite-api:0.1.0.</a:t>
             </a:r>
           </a:p>
           <a:p>
@@ -7169,7 +7186,7 @@
                 </a:solidFill>
                 <a:latin typeface="Calibri"/>
               </a:rPr>
-              <a:t>–   En el ejemplo estan a proposito DISTINTOS, porque cuando se escribe -p 8080:8080 los dos lados se confunden y el estudiante no puede decir cual es cual; en la actividad se le pide justamente explicar la diferencia.</a:t>
+              <a:t>–   El -t asigna nombre y etiqueta, y el punto final no es adorno sino el contexto de construccion, es decir la carpeta cuyo contenido se le entrega al motor.</a:t>
             </a:r>
           </a:p>
           <a:p>
@@ -7185,7 +7202,7 @@
                 </a:solidFill>
                 <a:latin typeface="Calibri"/>
               </a:rPr>
-              <a:t>–   El tercero es la verificacion, y aqui hay un concepto y no solo un comando.</a:t>
+              <a:t>–   Un build sin etiqueta funciona y por eso el estudiante no nota el problema: Docker le pone latest en silencio, y a partir de ahi nadie puede decir que version esta corriendo.</a:t>
             </a:r>
           </a:p>
           <a:p>
@@ -7201,7 +7218,7 @@
                 </a:solidFill>
                 <a:latin typeface="Calibri"/>
               </a:rPr>
-              <a:t>–   Un endpoint de salud es una ruta cuyo unico proposito es que alguien de afuera pueda preguntar si el servicio esta en condiciones de atender</a:t>
+              <a:t>–   Nombre Y etiqueta, siempre; la etiqueta suelta no basta y el nombre solo tampoco.</a:t>
             </a:r>
           </a:p>
           <a:p>
@@ -7217,7 +7234,23 @@
                 </a:solidFill>
                 <a:latin typeface="Calibri"/>
               </a:rPr>
-              <a:t>–   Y su contrato tiene TRES datos, los tres exigibles: la ruta (GET /health), el codigo de estado (200 cuando el servicio puede atender, 503 cuando esta arriba pero sin su dependencia, tipicamente la base de datos) y el cuerpo con su formato declarado.</a:t>
+              <a:t>–   El segundo es la ejecucion: docker run -d -p 8081:8080 --name api cloudlite-api:0.1.0.</a:t>
+            </a:r>
+          </a:p>
+          <a:p>
+            <a:pPr>
+              <a:spcAft>
+                <a:spcPts val="800"/>
+              </a:spcAft>
+            </a:pPr>
+            <a:r>
+              <a:rPr sz="2000" b="0" i="0">
+                <a:solidFill>
+                  <a:srgbClr val="333333"/>
+                </a:solidFill>
+                <a:latin typeface="Calibri"/>
+              </a:rPr>
+              <a:t>–   El corazon de la instruccion es el -p, y conviene escribirlo en el tablero con las dos etiquetas encima: el numero de la IZQUIERDA es el del anfitrion, la maquina desde la que uno abre el navegador, y el de la DERECHA es el del contenedor, el mismo del EXPOSE.</a:t>
             </a:r>
           </a:p>
         </p:txBody>
@@ -7745,7 +7778,7 @@
                 </a:solidFill>
                 <a:latin typeface="Calibri"/>
               </a:rPr>
-              <a:t>Construir, correr y verificar: los tres comandos y el contrato de salud (3/3)</a:t>
+              <a:t>Construir, correr y verificar: los tres comandos y el contrato de salud (2/3)</a:t>
             </a:r>
           </a:p>
         </p:txBody>
@@ -7784,7 +7817,7 @@
                 </a:solidFill>
                 <a:latin typeface="Calibri"/>
               </a:rPr>
-              <a:t>–   El tercero es el que se olvida y el que hace util al endpoint: un 200 con el cuerpo vacio no distingue «vivo» de «vivo pero roto», porque el proceso puede estar respondiendo mientras su conexion a datos esta caida.</a:t>
+              <a:t>–   Se lee de derecha a izquierda: el puerto 8080 de dentro queda accesible como 8081 desde fuera.</a:t>
             </a:r>
           </a:p>
           <a:p>
@@ -7800,7 +7833,7 @@
                 </a:solidFill>
                 <a:latin typeface="Calibri"/>
               </a:rPr>
-              <a:t>–   Se comprueba con curl -i http://localhost:8081/health, y el -i importa: sin el, curl imprime el cuerpo pero esconde el codigo de estado, que es un tercio del contrato.</a:t>
+              <a:t>–   En el ejemplo estan a proposito DISTINTOS, porque cuando se escribe -p 8080:8080 los dos lados se confunden y el estudiante no puede decir cual es cual; en la actividad se le pide justamente explicar la diferencia.</a:t>
             </a:r>
           </a:p>
           <a:p>
@@ -7816,7 +7849,39 @@
                 </a:solidFill>
                 <a:latin typeface="Calibri"/>
               </a:rPr>
-              <a:t>–   Este mismo endpoint reaparece en la Clase 7, donde el balanceador lo consulta para decidir si sigue enviandole trafico a una instancia, y en la Clase 8, donde el pipeline lo usa como prueba de humo despues de construir la imagen.</a:t>
+              <a:t>–   El tercero es la verificacion, y aqui hay un concepto y no solo un comando.</a:t>
+            </a:r>
+          </a:p>
+          <a:p>
+            <a:pPr>
+              <a:spcAft>
+                <a:spcPts val="800"/>
+              </a:spcAft>
+            </a:pPr>
+            <a:r>
+              <a:rPr sz="2000" b="0" i="0">
+                <a:solidFill>
+                  <a:srgbClr val="333333"/>
+                </a:solidFill>
+                <a:latin typeface="Calibri"/>
+              </a:rPr>
+              <a:t>–   Un endpoint de salud es una ruta cuyo unico proposito es que alguien de afuera pueda preguntar si el servicio esta en condiciones de atender</a:t>
+            </a:r>
+          </a:p>
+          <a:p>
+            <a:pPr>
+              <a:spcAft>
+                <a:spcPts val="800"/>
+              </a:spcAft>
+            </a:pPr>
+            <a:r>
+              <a:rPr sz="2000" b="0" i="0">
+                <a:solidFill>
+                  <a:srgbClr val="333333"/>
+                </a:solidFill>
+                <a:latin typeface="Calibri"/>
+              </a:rPr>
+              <a:t>–   Y su contrato tiene TRES datos, los tres exigibles: la ruta (GET /health), el codigo de estado (200 cuando el servicio puede atender, 503 cuando esta arriba pero sin su dependencia, tipicamente la base de datos) y el cuerpo con su formato declarado.</a:t>
             </a:r>
           </a:p>
         </p:txBody>
@@ -7997,7 +8062,7 @@
                 </a:solidFill>
                 <a:latin typeface="Calibri"/>
               </a:rPr>
-              <a:t>Segundo ejemplo: leer las siete columnas de docker ps (1/2)</a:t>
+              <a:t>Construir, correr y verificar: los tres comandos y el contrato de salud (3/3)</a:t>
             </a:r>
           </a:p>
         </p:txBody>
@@ -8036,7 +8101,7 @@
                 </a:solidFill>
                 <a:latin typeface="Calibri"/>
               </a:rPr>
-              <a:t>–   Tras ejecutar el contenedor, el comando docker ps lista lo que esta corriendo con siete columnas: identificador del contenedor, imagen de la que proviene, comando en ejecucion, tiempo desde su creacion, estado, puertos publicados y nombre asignado.</a:t>
+              <a:t>–   El tercero es el que se olvida y el que hace util al endpoint: un 200 con el cuerpo vacio no distingue «vivo» de «vivo pero roto», porque el proceso puede estar respondiendo mientras su conexion a datos esta caida.</a:t>
             </a:r>
           </a:p>
           <a:p>
@@ -8052,7 +8117,7 @@
                 </a:solidFill>
                 <a:latin typeface="Calibri"/>
               </a:rPr>
-              <a:t>–   Un estudiante mas adelantado puede levantar dos contenedores, la API y un stub de notificaciones</a:t>
+              <a:t>–   Se comprueba con curl -i http://localhost:8081/health, y el -i importa: sin el, curl imprime el cuerpo pero esconde el codigo de estado, que es un tercio del contrato.</a:t>
             </a:r>
           </a:p>
           <a:p>
@@ -8068,39 +8133,7 @@
                 </a:solidFill>
                 <a:latin typeface="Calibri"/>
               </a:rPr>
-              <a:t>–   Y comprobar algo que sera central en la Clase 4: desde el contenedor de la API, la direccion localhost NO es la maquina anfitriona ni el otro contenedor, es el propio contenedor</a:t>
-            </a:r>
-          </a:p>
-          <a:p>
-            <a:pPr>
-              <a:spcAft>
-                <a:spcPts val="800"/>
-              </a:spcAft>
-            </a:pPr>
-            <a:r>
-              <a:rPr sz="2000" b="0" i="0">
-                <a:solidFill>
-                  <a:srgbClr val="333333"/>
-                </a:solidFill>
-                <a:latin typeface="Calibri"/>
-              </a:rPr>
-              <a:t>–   Y para que dos contenedores se hablen hay que ponerlos en una misma red y llamarse por nombre.</a:t>
-            </a:r>
-          </a:p>
-          <a:p>
-            <a:pPr>
-              <a:spcAft>
-                <a:spcPts val="800"/>
-              </a:spcAft>
-            </a:pPr>
-            <a:r>
-              <a:rPr sz="2000" b="0" i="0">
-                <a:solidFill>
-                  <a:srgbClr val="333333"/>
-                </a:solidFill>
-                <a:latin typeface="Calibri"/>
-              </a:rPr>
-              <a:t>–   Todo esto ocurre en Killercoda (killercoda.com, cuenta gratuita y sin tarjeta, escenario Ubuntu), que entrega una terminal Linux real con Docker ya instalado dentro del navegador, sin instalar Docker Desktop</a:t>
+              <a:t>–   Este mismo endpoint reaparece en la Clase 7, donde el balanceador lo consulta para decidir si sigue enviandole trafico a una instancia, y en la Clase 8, donde el pipeline lo usa como prueba de humo despues de construir la imagen.</a:t>
             </a:r>
           </a:p>
         </p:txBody>
@@ -8281,7 +8314,7 @@
                 </a:solidFill>
                 <a:latin typeface="Calibri"/>
               </a:rPr>
-              <a:t>Segundo ejemplo: leer las siete columnas de docker ps (2/2)</a:t>
+              <a:t>Segundo ejemplo: leer las siete columnas de docker ps (1/2)</a:t>
             </a:r>
           </a:p>
         </p:txBody>
@@ -8320,7 +8353,7 @@
                 </a:solidFill>
                 <a:latin typeface="Calibri"/>
               </a:rPr>
-              <a:t>–   Que en equipos institucionales suele estar bloqueado y tiene condiciones de licencia para organizaciones grandes.</a:t>
+              <a:t>–   Tras ejecutar el contenedor, el comando docker ps lista lo que esta corriendo con siete columnas: identificador del contenedor, imagen de la que proviene, comando en ejecucion, tiempo desde su creacion, estado, puertos publicados y nombre asignado.</a:t>
             </a:r>
           </a:p>
           <a:p>
@@ -8336,7 +8369,7 @@
                 </a:solidFill>
                 <a:latin typeface="Calibri"/>
               </a:rPr>
-              <a:t>–   El primero: la sesion caduca a una hora y al cerrarse se pierde lo que exista solo alli.</a:t>
+              <a:t>–   Un estudiante mas adelantado puede levantar dos contenedores, la API y un stub de notificaciones</a:t>
             </a:r>
           </a:p>
           <a:p>
@@ -8352,7 +8385,7 @@
                 </a:solidFill>
                 <a:latin typeface="Calibri"/>
               </a:rPr>
-              <a:t>–   El segundo: en el plan gratuito solo se trabaja un escenario a la vez, asi que no sirve dejar dos labs abiertos.</a:t>
+              <a:t>–   Y comprobar algo que sera central en la Clase 4: desde el contenedor de la API, la direccion localhost NO es la maquina anfitriona ni el otro contenedor, es el propio contenedor</a:t>
             </a:r>
           </a:p>
           <a:p>
@@ -8368,7 +8401,7 @@
                 </a:solidFill>
                 <a:latin typeface="Calibri"/>
               </a:rPr>
-              <a:t>–   La alterna, si Killercoda no carga, es LabEx Docker Playground, que cumple la misma funcion tambien gratis y en el navegador</a:t>
+              <a:t>–   Y para que dos contenedores se hablen hay que ponerlos en una misma red y llamarse por nombre.</a:t>
             </a:r>
           </a:p>
           <a:p>
@@ -8384,7 +8417,7 @@
                 </a:solidFill>
                 <a:latin typeface="Calibri"/>
               </a:rPr>
-              <a:t>–   Pero con una restriccion mas dura que conviene mencionar: su plan gratuito da solo tres sesiones al dia, de modo que quien la use para depurar puede quedarse sin intentos justo el dia de la entrega.</a:t>
+              <a:t>–   Todo esto ocurre en Killercoda (killercoda.com, cuenta gratuita y sin tarjeta, escenario Ubuntu), que entrega una terminal Linux real con Docker ya instalado dentro del navegador, sin instalar Docker Desktop</a:t>
             </a:r>
           </a:p>
         </p:txBody>
@@ -8565,7 +8598,7 @@
                 </a:solidFill>
                 <a:latin typeface="Calibri"/>
               </a:rPr>
-              <a:t>Preguntas frecuentes y cierre conceptual () (1/4)</a:t>
+              <a:t>Segundo ejemplo: leer las siete columnas de docker ps (2/2)</a:t>
             </a:r>
           </a:p>
         </p:txBody>
@@ -8604,7 +8637,7 @@
                 </a:solidFill>
                 <a:latin typeface="Calibri"/>
               </a:rPr>
-              <a:t>–   Por que mi contenedor arranca y se muere de inmediato: porque un contenedor vive exactamente lo que vive su proceso principal, y si el comando termina, el contenedor termina.</a:t>
+              <a:t>–   Que en equipos institucionales suele estar bloqueado y tiene condiciones de licencia para organizaciones grandes.</a:t>
             </a:r>
           </a:p>
           <a:p>
@@ -8620,7 +8653,7 @@
                 </a:solidFill>
                 <a:latin typeface="Calibri"/>
               </a:rPr>
-              <a:t>–   No es un error, es el diseno; un contenedor no es una maquina encendida esperando ordenes, es un proceso envuelto en aislamiento, y la solucion es que el comando quede corriendo en primer plano.</a:t>
+              <a:t>–   El primero: la sesion caduca a una hora y al cerrarse se pierde lo que exista solo alli.</a:t>
             </a:r>
           </a:p>
           <a:p>
@@ -8636,7 +8669,7 @@
                 </a:solidFill>
                 <a:latin typeface="Calibri"/>
               </a:rPr>
-              <a:t>–   Segunda: donde quedan mis datos si borro el contenedor.</a:t>
+              <a:t>–   El segundo: en el plan gratuito solo se trabaja un escenario a la vez, asi que no sirve dejar dos labs abiertos.</a:t>
             </a:r>
           </a:p>
           <a:p>
@@ -8652,7 +8685,7 @@
                 </a:solidFill>
                 <a:latin typeface="Calibri"/>
               </a:rPr>
-              <a:t>–   Se pierden, porque el sistema de archivos del contenedor es efimero; para persistir hay que montar un volumen, es decir un almacenamiento cuyo ciclo de vida es independiente del contenedor</a:t>
+              <a:t>–   La alterna, si Killercoda no carga, es LabEx Docker Playground, que cumple la misma funcion tambien gratis y en el navegador</a:t>
             </a:r>
           </a:p>
           <a:p>
@@ -8668,7 +8701,7 @@
                 </a:solidFill>
                 <a:latin typeface="Calibri"/>
               </a:rPr>
-              <a:t>–   Y esa es la razon por la cual una base de datos no se trata igual que una API, tema que reaparece en la Clase 7 con almacenamiento y en la Clase 13 al discutir que piezas se pueden replicar.</a:t>
+              <a:t>–   Pero con una restriccion mas dura que conviene mencionar: su plan gratuito da solo tres sesiones al dia, de modo que quien la use para depurar puede quedarse sin intentos justo el dia de la entrega.</a:t>
             </a:r>
           </a:p>
         </p:txBody>
@@ -8849,7 +8882,7 @@
                 </a:solidFill>
                 <a:latin typeface="Calibri"/>
               </a:rPr>
-              <a:t>Preguntas frecuentes y cierre conceptual () (2/4)</a:t>
+              <a:t>Preguntas frecuentes y cierre conceptual () (1/4)</a:t>
             </a:r>
           </a:p>
         </p:txBody>
@@ -8888,7 +8921,7 @@
                 </a:solidFill>
                 <a:latin typeface="Calibri"/>
               </a:rPr>
-              <a:t>–   Tercera: entonces la base de datos tambien va en un contenedor.</a:t>
+              <a:t>–   Por que mi contenedor arranca y se muere de inmediato: porque un contenedor vive exactamente lo que vive su proceso principal, y si el comando termina, el contenedor termina.</a:t>
             </a:r>
           </a:p>
           <a:p>
@@ -8904,7 +8937,7 @@
                 </a:solidFill>
                 <a:latin typeface="Calibri"/>
               </a:rPr>
-              <a:t>–   Para desarrollo y para este curso si, y es la practica normal; en produccion la respuesta honesta es que muchas organizaciones prefieren un servicio de datos gestionado, que es precisamente la decision registrada en el ADR de la Clase 2.</a:t>
+              <a:t>–   No es un error, es el diseno; un contenedor no es una maquina encendida esperando ordenes, es un proceso envuelto en aislamiento, y la solucion es que el comando quede corriendo en primer plano.</a:t>
             </a:r>
           </a:p>
           <a:p>
@@ -8920,7 +8953,7 @@
                 </a:solidFill>
                 <a:latin typeface="Calibri"/>
               </a:rPr>
-              <a:t>–   Antes de cerrar hay que desactivar una colision de vocabulario que arruina la Clase 4 si no se advierte hoy.</a:t>
+              <a:t>–   Segunda: donde quedan mis datos si borro el contenedor.</a:t>
             </a:r>
           </a:p>
           <a:p>
@@ -8936,7 +8969,7 @@
                 </a:solidFill>
                 <a:latin typeface="Calibri"/>
               </a:rPr>
-              <a:t>–   En el modelo C4, la palabra contenedor significa cualquier cosa que se ejecuta o almacena de forma independiente, como una aplicacion web, una API o una base de datos, y es un concepto de diagrama anterior a Docker.</a:t>
+              <a:t>–   Se pierden, porque el sistema de archivos del contenedor es efimero; para persistir hay que montar un volumen, es decir un almacenamiento cuyo ciclo de vida es independiente del contenedor</a:t>
             </a:r>
           </a:p>
           <a:p>
@@ -8952,7 +8985,7 @@
                 </a:solidFill>
                 <a:latin typeface="Calibri"/>
               </a:rPr>
-              <a:t>–   El contenedor de Docker, en cambio, es un mecanismo concreto de empaquetado y ejecucion.</a:t>
+              <a:t>–   Y esa es la razon por la cual una base de datos no se trata igual que una API, tema que reaparece en la Clase 7 con almacenamiento y en la Clase 13 al discutir que piezas se pueden replicar.</a:t>
             </a:r>
           </a:p>
         </p:txBody>
@@ -9133,7 +9166,7 @@
                 </a:solidFill>
                 <a:latin typeface="Calibri"/>
               </a:rPr>
-              <a:t>Preguntas frecuentes y cierre conceptual () (3/4)</a:t>
+              <a:t>Preguntas frecuentes y cierre conceptual () (2/4)</a:t>
             </a:r>
           </a:p>
         </p:txBody>
@@ -9172,7 +9205,7 @@
                 </a:solidFill>
                 <a:latin typeface="Calibri"/>
               </a:rPr>
-              <a:t>–   Se parecen y a menudo coinciden uno a uno, pero no son sinonimos: una base de datos gestionada que nadie contenerizo sigue siendo un contenedor en el sentido de C4.</a:t>
+              <a:t>–   Tercera: entonces la base de datos tambien va en un contenedor.</a:t>
             </a:r>
           </a:p>
           <a:p>
@@ -9188,7 +9221,7 @@
                 </a:solidFill>
                 <a:latin typeface="Calibri"/>
               </a:rPr>
-              <a:t>–   Decirlo hoy, mientras el estudiante tiene un docker ps en la pantalla, cuesta dos minutos</a:t>
+              <a:t>–   Para desarrollo y para este curso si, y es la practica normal; en produccion la respuesta honesta es que muchas organizaciones prefieren un servicio de datos gestionado, que es precisamente la decision registrada en el ADR de la Clase 2.</a:t>
             </a:r>
           </a:p>
           <a:p>
@@ -9204,7 +9237,7 @@
                 </a:solidFill>
                 <a:latin typeface="Calibri"/>
               </a:rPr>
-              <a:t>–   No decirlo cuesta media clase de confusion la semana siguiente, cuando se dibuje el C4 Containers de CloudLite y alguien pregunte si debe dockerizar cada caja del diagrama.</a:t>
+              <a:t>–   Antes de cerrar hay que desactivar una colision de vocabulario que arruina la Clase 4 si no se advierte hoy.</a:t>
             </a:r>
           </a:p>
           <a:p>
@@ -9220,7 +9253,7 @@
                 </a:solidFill>
                 <a:latin typeface="Calibri"/>
               </a:rPr>
-              <a:t>–   Error tipico del docente que no domina el tema: repetir que un contenedor es una maquina virtual liviana y dejarlo ahi.</a:t>
+              <a:t>–   En el modelo C4, la palabra contenedor significa cualquier cosa que se ejecuta o almacena de forma independiente, como una aplicacion web, una API o una base de datos, y es un concepto de diagrama anterior a Docker.</a:t>
             </a:r>
           </a:p>
           <a:p>
@@ -9236,7 +9269,7 @@
                 </a:solidFill>
                 <a:latin typeface="Calibri"/>
               </a:rPr>
-              <a:t>–   El estudiante que aprende eso concluye que puede correr cualquier cosa en cualquier parte con aislamiento total</a:t>
+              <a:t>–   El contenedor de Docker, en cambio, es un mecanismo concreto de empaquetado y ejecucion.</a:t>
             </a:r>
           </a:p>
         </p:txBody>
@@ -9417,7 +9450,7 @@
                 </a:solidFill>
                 <a:latin typeface="Calibri"/>
               </a:rPr>
-              <a:t>Preguntas frecuentes y cierre conceptual () (4/4)</a:t>
+              <a:t>Preguntas frecuentes y cierre conceptual () (3/4)</a:t>
             </a:r>
           </a:p>
         </p:txBody>
@@ -9456,7 +9489,7 @@
                 </a:solidFill>
                 <a:latin typeface="Calibri"/>
               </a:rPr>
-              <a:t>–   Y en la Clase 6 no entendera por que el kernel compartido es un asunto de seguridad, ni por que existe la recomendacion de no ejecutar el proceso como usuario root dentro del contenedor.</a:t>
+              <a:t>–   Se parecen y a menudo coinciden uno a uno, pero no son sinonimos: una base de datos gestionada que nadie contenerizo sigue siendo un contenedor en el sentido de C4.</a:t>
             </a:r>
           </a:p>
           <a:p>
@@ -9472,7 +9505,55 @@
                 </a:solidFill>
                 <a:latin typeface="Calibri"/>
               </a:rPr>
-              <a:t>–   El segundo error es convertir la clase en un recetario de comandos: dictar docker build, docker run y docker ps al tablero para que todos copien, sin explicar la distincion entre imagen y contenedor ni el modelo de capas.</a:t>
+              <a:t>–   Decirlo hoy, mientras el estudiante tiene un docker ps en la pantalla, cuesta dos minutos</a:t>
+            </a:r>
+          </a:p>
+          <a:p>
+            <a:pPr>
+              <a:spcAft>
+                <a:spcPts val="800"/>
+              </a:spcAft>
+            </a:pPr>
+            <a:r>
+              <a:rPr sz="2000" b="0" i="0">
+                <a:solidFill>
+                  <a:srgbClr val="333333"/>
+                </a:solidFill>
+                <a:latin typeface="Calibri"/>
+              </a:rPr>
+              <a:t>–   No decirlo cuesta media clase de confusion la semana siguiente, cuando se dibuje el C4 Containers de CloudLite y alguien pregunte si debe dockerizar cada caja del diagrama.</a:t>
+            </a:r>
+          </a:p>
+          <a:p>
+            <a:pPr>
+              <a:spcAft>
+                <a:spcPts val="800"/>
+              </a:spcAft>
+            </a:pPr>
+            <a:r>
+              <a:rPr sz="2000" b="0" i="0">
+                <a:solidFill>
+                  <a:srgbClr val="333333"/>
+                </a:solidFill>
+                <a:latin typeface="Calibri"/>
+              </a:rPr>
+              <a:t>–   Error tipico del docente que no domina el tema: repetir que un contenedor es una maquina virtual liviana y dejarlo ahi.</a:t>
+            </a:r>
+          </a:p>
+          <a:p>
+            <a:pPr>
+              <a:spcAft>
+                <a:spcPts val="800"/>
+              </a:spcAft>
+            </a:pPr>
+            <a:r>
+              <a:rPr sz="2000" b="0" i="0">
+                <a:solidFill>
+                  <a:srgbClr val="333333"/>
+                </a:solidFill>
+                <a:latin typeface="Calibri"/>
+              </a:rPr>
+              <a:t>–   El estudiante que aprende eso concluye que puede correr cualquier cosa en cualquier parte con aislamiento total</a:t>
             </a:r>
           </a:p>
         </p:txBody>
@@ -9653,141 +9734,21 @@
                 </a:solidFill>
                 <a:latin typeface="Calibri"/>
               </a:rPr>
-              <a:t>El Dockerfile minimo, capa por capa</a:t>
-            </a:r>
-          </a:p>
-        </p:txBody>
-      </p:sp>
-      <p:sp>
-        <p:nvSpPr>
-          <p:cNvPr id="5" name="Rounded Rectangle 4"/>
-          <p:cNvSpPr/>
-          <p:nvPr/>
-        </p:nvSpPr>
-        <p:spPr>
-          <a:xfrm>
-            <a:off x="457200" y="1261872"/>
-            <a:ext cx="11277295" cy="5093208"/>
-          </a:xfrm>
-          <a:prstGeom prst="roundRect">
-            <a:avLst>
-              <a:gd name="adj" fmla="val 12000"/>
-            </a:avLst>
-          </a:prstGeom>
-          <a:solidFill>
-            <a:srgbClr val="1E2A38"/>
-          </a:solidFill>
-          <a:ln>
-            <a:noFill/>
-          </a:ln>
-        </p:spPr>
-        <p:style>
-          <a:lnRef idx="1">
-            <a:schemeClr val="accent1"/>
-          </a:lnRef>
-          <a:fillRef idx="3">
-            <a:schemeClr val="accent1"/>
-          </a:fillRef>
-          <a:effectRef idx="2">
-            <a:schemeClr val="accent1"/>
-          </a:effectRef>
-          <a:fontRef idx="minor">
-            <a:schemeClr val="lt1"/>
-          </a:fontRef>
-        </p:style>
-        <p:txBody>
-          <a:bodyPr rtlCol="0" anchor="ctr"/>
-          <a:lstStyle/>
-          <a:p>
-            <a:pPr algn="ctr"/>
-          </a:p>
-        </p:txBody>
-      </p:sp>
-      <p:sp>
-        <p:nvSpPr>
-          <p:cNvPr id="6" name="Rectangle 5"/>
-          <p:cNvSpPr/>
-          <p:nvPr/>
-        </p:nvSpPr>
-        <p:spPr>
-          <a:xfrm>
-            <a:off x="457200" y="1261872"/>
-            <a:ext cx="11277295" cy="320040"/>
-          </a:xfrm>
-          <a:prstGeom prst="rect">
-            <a:avLst/>
-          </a:prstGeom>
-          <a:solidFill>
-            <a:srgbClr val="095292"/>
-          </a:solidFill>
-          <a:ln>
-            <a:noFill/>
-          </a:ln>
-        </p:spPr>
-        <p:style>
-          <a:lnRef idx="1">
-            <a:schemeClr val="accent1"/>
-          </a:lnRef>
-          <a:fillRef idx="3">
-            <a:schemeClr val="accent1"/>
-          </a:fillRef>
-          <a:effectRef idx="2">
-            <a:schemeClr val="accent1"/>
-          </a:effectRef>
-          <a:fontRef idx="minor">
-            <a:schemeClr val="lt1"/>
-          </a:fontRef>
-        </p:style>
-        <p:txBody>
-          <a:bodyPr rtlCol="0" anchor="ctr"/>
-          <a:lstStyle/>
-          <a:p>
-            <a:pPr algn="ctr"/>
-          </a:p>
-        </p:txBody>
-      </p:sp>
-      <p:sp>
-        <p:nvSpPr>
-          <p:cNvPr id="7" name="TextBox 6"/>
+              <a:t>Preguntas frecuentes y cierre conceptual () (4/4)</a:t>
+            </a:r>
+          </a:p>
+        </p:txBody>
+      </p:sp>
+      <p:sp>
+        <p:nvSpPr>
+          <p:cNvPr id="5" name="TextBox 4"/>
           <p:cNvSpPr txBox="1"/>
           <p:nvPr/>
         </p:nvSpPr>
         <p:spPr>
           <a:xfrm>
-            <a:off x="685800" y="1307592"/>
-            <a:ext cx="10820095" cy="256032"/>
-          </a:xfrm>
-          <a:prstGeom prst="rect">
-            <a:avLst/>
-          </a:prstGeom>
-          <a:noFill/>
-        </p:spPr>
-        <p:txBody>
-          <a:bodyPr wrap="square" anchor="ctr"/>
-          <a:lstStyle/>
-          <a:p>
-            <a:r>
-              <a:rPr sz="1000" b="1" i="0">
-                <a:solidFill>
-                  <a:srgbClr val="269CCB"/>
-                </a:solidFill>
-                <a:latin typeface="Calibri"/>
-              </a:rPr>
-              <a:t>● ● ●</a:t>
-            </a:r>
-          </a:p>
-        </p:txBody>
-      </p:sp>
-      <p:sp>
-        <p:nvSpPr>
-          <p:cNvPr id="8" name="TextBox 7"/>
-          <p:cNvSpPr txBox="1"/>
-          <p:nvPr/>
-        </p:nvSpPr>
-        <p:spPr>
-          <a:xfrm>
-            <a:off x="777240" y="1719072"/>
-            <a:ext cx="10637215" cy="4453128"/>
+            <a:off x="457200" y="1170432"/>
+            <a:ext cx="11277295" cy="5230368"/>
           </a:xfrm>
           <a:prstGeom prst="rect">
             <a:avLst/>
@@ -9802,248 +9763,40 @@
           <a:p>
             <a:pPr>
               <a:spcAft>
-                <a:spcPts val="400"/>
-              </a:spcAft>
-            </a:pPr>
-            <a:r>
-              <a:rPr sz="1400" b="0" i="0">
-                <a:solidFill>
-                  <a:srgbClr val="FFFFFF"/>
-                </a:solidFill>
-                <a:latin typeface="Calibri"/>
-              </a:rPr>
-              <a:t># Cada instruccion es UNA CAPA. El orden decide que se reconstruye.</a:t>
-            </a:r>
-          </a:p>
-          <a:p>
-            <a:pPr>
-              <a:spcAft>
-                <a:spcPts val="400"/>
-              </a:spcAft>
-            </a:pPr>
-            <a:r>
-              <a:rPr sz="1400" b="0" i="0">
-                <a:solidFill>
-                  <a:srgbClr val="FFFFFF"/>
-                </a:solidFill>
-                <a:latin typeface="Calibri"/>
-              </a:rPr>
-              <a:t>FROM node:20-alpine</a:t>
-            </a:r>
-          </a:p>
-          <a:p>
-            <a:pPr>
-              <a:spcAft>
-                <a:spcPts val="400"/>
-              </a:spcAft>
-            </a:pPr>
-            <a:r>
-              <a:rPr sz="1400" b="0" i="0">
-                <a:solidFill>
-                  <a:srgbClr val="FFFFFF"/>
-                </a:solidFill>
-                <a:latin typeface="Calibri"/>
-              </a:rPr>
-              <a:t/>
-            </a:r>
-          </a:p>
-          <a:p>
-            <a:pPr>
-              <a:spcAft>
-                <a:spcPts val="400"/>
-              </a:spcAft>
-            </a:pPr>
-            <a:r>
-              <a:rPr sz="1400" b="0" i="0">
-                <a:solidFill>
-                  <a:srgbClr val="FFFFFF"/>
-                </a:solidFill>
-                <a:latin typeface="Calibri"/>
-              </a:rPr>
-              <a:t>WORKDIR /app</a:t>
-            </a:r>
-          </a:p>
-          <a:p>
-            <a:pPr>
-              <a:spcAft>
-                <a:spcPts val="400"/>
-              </a:spcAft>
-            </a:pPr>
-            <a:r>
-              <a:rPr sz="1400" b="0" i="0">
-                <a:solidFill>
-                  <a:srgbClr val="FFFFFF"/>
-                </a:solidFill>
-                <a:latin typeface="Calibri"/>
-              </a:rPr>
-              <a:t/>
-            </a:r>
-          </a:p>
-          <a:p>
-            <a:pPr>
-              <a:spcAft>
-                <a:spcPts val="400"/>
-              </a:spcAft>
-            </a:pPr>
-            <a:r>
-              <a:rPr sz="1400" b="0" i="0">
-                <a:solidFill>
-                  <a:srgbClr val="FFFFFF"/>
-                </a:solidFill>
-                <a:latin typeface="Calibri"/>
-              </a:rPr>
-              <a:t># Primero las dependencias: si el codigo cambia y package.json no,</a:t>
-            </a:r>
-          </a:p>
-          <a:p>
-            <a:pPr>
-              <a:spcAft>
-                <a:spcPts val="400"/>
-              </a:spcAft>
-            </a:pPr>
-            <a:r>
-              <a:rPr sz="1400" b="0" i="0">
-                <a:solidFill>
-                  <a:srgbClr val="FFFFFF"/>
-                </a:solidFill>
-                <a:latin typeface="Calibri"/>
-              </a:rPr>
-              <a:t># esta capa se reutiliza de la cache y el build tarda segundos.</a:t>
-            </a:r>
-          </a:p>
-          <a:p>
-            <a:pPr>
-              <a:spcAft>
-                <a:spcPts val="400"/>
-              </a:spcAft>
-            </a:pPr>
-            <a:r>
-              <a:rPr sz="1400" b="0" i="0">
-                <a:solidFill>
-                  <a:srgbClr val="FFFFFF"/>
-                </a:solidFill>
-                <a:latin typeface="Calibri"/>
-              </a:rPr>
-              <a:t>COPY package*.json ./</a:t>
-            </a:r>
-          </a:p>
-          <a:p>
-            <a:pPr>
-              <a:spcAft>
-                <a:spcPts val="400"/>
-              </a:spcAft>
-            </a:pPr>
-            <a:r>
-              <a:rPr sz="1400" b="0" i="0">
-                <a:solidFill>
-                  <a:srgbClr val="FFFFFF"/>
-                </a:solidFill>
-                <a:latin typeface="Calibri"/>
-              </a:rPr>
-              <a:t>RUN npm ci --omit=dev</a:t>
-            </a:r>
-          </a:p>
-          <a:p>
-            <a:pPr>
-              <a:spcAft>
-                <a:spcPts val="400"/>
-              </a:spcAft>
-            </a:pPr>
-            <a:r>
-              <a:rPr sz="1400" b="0" i="0">
-                <a:solidFill>
-                  <a:srgbClr val="FFFFFF"/>
-                </a:solidFill>
-                <a:latin typeface="Calibri"/>
-              </a:rPr>
-              <a:t/>
-            </a:r>
-          </a:p>
-          <a:p>
-            <a:pPr>
-              <a:spcAft>
-                <a:spcPts val="400"/>
-              </a:spcAft>
-            </a:pPr>
-            <a:r>
-              <a:rPr sz="1400" b="0" i="0">
-                <a:solidFill>
-                  <a:srgbClr val="FFFFFF"/>
-                </a:solidFill>
-                <a:latin typeface="Calibri"/>
-              </a:rPr>
-              <a:t># Despues el codigo, que es lo que cambia en cada commit.</a:t>
-            </a:r>
-          </a:p>
-          <a:p>
-            <a:pPr>
-              <a:spcAft>
-                <a:spcPts val="400"/>
-              </a:spcAft>
-            </a:pPr>
-            <a:r>
-              <a:rPr sz="1400" b="0" i="0">
-                <a:solidFill>
-                  <a:srgbClr val="FFFFFF"/>
-                </a:solidFill>
-                <a:latin typeface="Calibri"/>
-              </a:rPr>
-              <a:t>COPY..</a:t>
-            </a:r>
-          </a:p>
-          <a:p>
-            <a:pPr>
-              <a:spcAft>
-                <a:spcPts val="400"/>
-              </a:spcAft>
-            </a:pPr>
-            <a:r>
-              <a:rPr sz="1400" b="0" i="0">
-                <a:solidFill>
-                  <a:srgbClr val="FFFFFF"/>
-                </a:solidFill>
-                <a:latin typeface="Calibri"/>
-              </a:rPr>
-              <a:t/>
-            </a:r>
-          </a:p>
-          <a:p>
-            <a:pPr>
-              <a:spcAft>
-                <a:spcPts val="400"/>
-              </a:spcAft>
-            </a:pPr>
-            <a:r>
-              <a:rPr sz="1400" b="0" i="0">
-                <a:solidFill>
-                  <a:srgbClr val="FFFFFF"/>
-                </a:solidFill>
-                <a:latin typeface="Calibri"/>
-              </a:rPr>
-              <a:t>EXPOSE 3000</a:t>
-            </a:r>
-          </a:p>
-          <a:p>
-            <a:pPr>
-              <a:spcAft>
-                <a:spcPts val="400"/>
-              </a:spcAft>
-            </a:pPr>
-            <a:r>
-              <a:rPr sz="1400" b="0" i="0">
-                <a:solidFill>
-                  <a:srgbClr val="FFFFFF"/>
-                </a:solidFill>
-                <a:latin typeface="Calibri"/>
-              </a:rPr>
-              <a:t>CMD ["node", "server.js"]</a:t>
-            </a:r>
-          </a:p>
-        </p:txBody>
-      </p:sp>
-      <p:sp>
-        <p:nvSpPr>
-          <p:cNvPr id="9" name="TextBox 8"/>
+                <a:spcPts val="800"/>
+              </a:spcAft>
+            </a:pPr>
+            <a:r>
+              <a:rPr sz="2000" b="0" i="0">
+                <a:solidFill>
+                  <a:srgbClr val="333333"/>
+                </a:solidFill>
+                <a:latin typeface="Calibri"/>
+              </a:rPr>
+              <a:t>–   Y en la Clase 6 no entendera por que el kernel compartido es un asunto de seguridad, ni por que existe la recomendacion de no ejecutar el proceso como usuario root dentro del contenedor.</a:t>
+            </a:r>
+          </a:p>
+          <a:p>
+            <a:pPr>
+              <a:spcAft>
+                <a:spcPts val="800"/>
+              </a:spcAft>
+            </a:pPr>
+            <a:r>
+              <a:rPr sz="2000" b="0" i="0">
+                <a:solidFill>
+                  <a:srgbClr val="333333"/>
+                </a:solidFill>
+                <a:latin typeface="Calibri"/>
+              </a:rPr>
+              <a:t>–   El segundo error es convertir la clase en un recetario de comandos: dictar docker build, docker run y docker ps al tablero para que todos copien, sin explicar la distincion entre imagen y contenedor ni el modelo de capas.</a:t>
+            </a:r>
+          </a:p>
+        </p:txBody>
+      </p:sp>
+      <p:sp>
+        <p:nvSpPr>
+          <p:cNvPr id="6" name="TextBox 5"/>
           <p:cNvSpPr txBox="1"/>
           <p:nvPr/>
         </p:nvSpPr>
@@ -10217,7 +9970,7 @@
                 </a:solidFill>
                 <a:latin typeface="Calibri"/>
               </a:rPr>
-              <a:t>El ciclo completo: construir, ejecutar, verificar</a:t>
+              <a:t>El Dockerfile minimo, capa por capa</a:t>
             </a:r>
           </a:p>
         </p:txBody>
@@ -10376,7 +10129,7 @@
                 </a:solidFill>
                 <a:latin typeface="Calibri"/>
               </a:rPr>
-              <a:t># 1. construir la imagen y etiquetarla con version</a:t>
+              <a:t># Cada instruccion es UNA CAPA. El orden decide que se reconstruye.</a:t>
             </a:r>
           </a:p>
           <a:p>
@@ -10392,7 +10145,7 @@
                 </a:solidFill>
                 <a:latin typeface="Calibri"/>
               </a:rPr>
-              <a:t>$ docker build -t cloudlite-api:0.1.0.</a:t>
+              <a:t>FROM node:20-alpine</a:t>
             </a:r>
           </a:p>
           <a:p>
@@ -10424,7 +10177,7 @@
                 </a:solidFill>
                 <a:latin typeface="Calibri"/>
               </a:rPr>
-              <a:t># 2. ejecutarla publicando el puerto (host:contenedor)</a:t>
+              <a:t>WORKDIR /app</a:t>
             </a:r>
           </a:p>
           <a:p>
@@ -10440,7 +10193,7 @@
                 </a:solidFill>
                 <a:latin typeface="Calibri"/>
               </a:rPr>
-              <a:t>$ docker run -d --name cloudlite -p 8080:3000 cloudlite-api:0.1.0</a:t>
+              <a:t/>
             </a:r>
           </a:p>
           <a:p>
@@ -10456,6 +10209,70 @@
                 </a:solidFill>
                 <a:latin typeface="Calibri"/>
               </a:rPr>
+              <a:t># Primero las dependencias: si el codigo cambia y package.json no,</a:t>
+            </a:r>
+          </a:p>
+          <a:p>
+            <a:pPr>
+              <a:spcAft>
+                <a:spcPts val="400"/>
+              </a:spcAft>
+            </a:pPr>
+            <a:r>
+              <a:rPr sz="1400" b="0" i="0">
+                <a:solidFill>
+                  <a:srgbClr val="FFFFFF"/>
+                </a:solidFill>
+                <a:latin typeface="Calibri"/>
+              </a:rPr>
+              <a:t># esta capa se reutiliza de la cache y el build tarda segundos.</a:t>
+            </a:r>
+          </a:p>
+          <a:p>
+            <a:pPr>
+              <a:spcAft>
+                <a:spcPts val="400"/>
+              </a:spcAft>
+            </a:pPr>
+            <a:r>
+              <a:rPr sz="1400" b="0" i="0">
+                <a:solidFill>
+                  <a:srgbClr val="FFFFFF"/>
+                </a:solidFill>
+                <a:latin typeface="Calibri"/>
+              </a:rPr>
+              <a:t>COPY package*.json ./</a:t>
+            </a:r>
+          </a:p>
+          <a:p>
+            <a:pPr>
+              <a:spcAft>
+                <a:spcPts val="400"/>
+              </a:spcAft>
+            </a:pPr>
+            <a:r>
+              <a:rPr sz="1400" b="0" i="0">
+                <a:solidFill>
+                  <a:srgbClr val="FFFFFF"/>
+                </a:solidFill>
+                <a:latin typeface="Calibri"/>
+              </a:rPr>
+              <a:t>RUN npm ci --omit=dev</a:t>
+            </a:r>
+          </a:p>
+          <a:p>
+            <a:pPr>
+              <a:spcAft>
+                <a:spcPts val="400"/>
+              </a:spcAft>
+            </a:pPr>
+            <a:r>
+              <a:rPr sz="1400" b="0" i="0">
+                <a:solidFill>
+                  <a:srgbClr val="FFFFFF"/>
+                </a:solidFill>
+                <a:latin typeface="Calibri"/>
+              </a:rPr>
               <a:t/>
             </a:r>
           </a:p>
@@ -10472,7 +10289,7 @@
                 </a:solidFill>
                 <a:latin typeface="Calibri"/>
               </a:rPr>
-              <a:t># 3. verificar que responde DE VERDAD, no que el contenedor existe</a:t>
+              <a:t># Despues el codigo, que es lo que cambia en cada commit.</a:t>
             </a:r>
           </a:p>
           <a:p>
@@ -10488,7 +10305,7 @@
                 </a:solidFill>
                 <a:latin typeface="Calibri"/>
               </a:rPr>
-              <a:t>$ curl -i http://localhost:8080/health</a:t>
+              <a:t>COPY..</a:t>
             </a:r>
           </a:p>
           <a:p>
@@ -10504,7 +10321,7 @@
                 </a:solidFill>
                 <a:latin typeface="Calibri"/>
               </a:rPr>
-              <a:t>HTTP/1.1 200 OK</a:t>
+              <a:t/>
             </a:r>
           </a:p>
           <a:p>
@@ -10520,7 +10337,7 @@
                 </a:solidFill>
                 <a:latin typeface="Calibri"/>
               </a:rPr>
-              <a:t/>
+              <a:t>EXPOSE 3000</a:t>
             </a:r>
           </a:p>
           <a:p>
@@ -10536,23 +10353,7 @@
                 </a:solidFill>
                 <a:latin typeface="Calibri"/>
               </a:rPr>
-              <a:t># 4. si no responde, el log es el primer sitio, no el ultimo</a:t>
-            </a:r>
-          </a:p>
-          <a:p>
-            <a:pPr>
-              <a:spcAft>
-                <a:spcPts val="400"/>
-              </a:spcAft>
-            </a:pPr>
-            <a:r>
-              <a:rPr sz="1400" b="0" i="0">
-                <a:solidFill>
-                  <a:srgbClr val="FFFFFF"/>
-                </a:solidFill>
-                <a:latin typeface="Calibri"/>
-              </a:rPr>
-              <a:t>$ docker logs cloudlite --tail 20</a:t>
+              <a:t>CMD ["node", "server.js"]</a:t>
             </a:r>
           </a:p>
         </p:txBody>
@@ -10733,7 +10534,7 @@
                 </a:solidFill>
                 <a:latin typeface="Calibri"/>
               </a:rPr>
-              <a:t>Imagen, contenedor y capas: los comandos que lo demuestran</a:t>
+              <a:t>El ciclo completo: construir, ejecutar, verificar</a:t>
             </a:r>
           </a:p>
         </p:txBody>
@@ -10892,7 +10693,7 @@
                 </a:solidFill>
                 <a:latin typeface="Calibri"/>
               </a:rPr>
-              <a:t># La IMAGEN es la plantilla; el CONTENEDOR es una instancia en ejecucion.</a:t>
+              <a:t># 1. construir la imagen y etiquetarla con version</a:t>
             </a:r>
           </a:p>
           <a:p>
@@ -10908,7 +10709,7 @@
                 </a:solidFill>
                 <a:latin typeface="Calibri"/>
               </a:rPr>
-              <a:t>$ docker images cloudlite-api</a:t>
+              <a:t>$ docker build -t cloudlite-api:0.1.0.</a:t>
             </a:r>
           </a:p>
           <a:p>
@@ -10924,7 +10725,7 @@
                 </a:solidFill>
                 <a:latin typeface="Calibri"/>
               </a:rPr>
-              <a:t>REPOSITORY      TAG     IMAGE ID       SIZE</a:t>
+              <a:t/>
             </a:r>
           </a:p>
           <a:p>
@@ -10940,7 +10741,7 @@
                 </a:solidFill>
                 <a:latin typeface="Calibri"/>
               </a:rPr>
-              <a:t>cloudlite-api   0.1.0   a1b2c3d4e5f6   142MB</a:t>
+              <a:t># 2. ejecutarla publicando el puerto (host:contenedor)</a:t>
             </a:r>
           </a:p>
           <a:p>
@@ -10956,6 +10757,22 @@
                 </a:solidFill>
                 <a:latin typeface="Calibri"/>
               </a:rPr>
+              <a:t>$ docker run -d --name cloudlite -p 8080:3000 cloudlite-api:0.1.0</a:t>
+            </a:r>
+          </a:p>
+          <a:p>
+            <a:pPr>
+              <a:spcAft>
+                <a:spcPts val="400"/>
+              </a:spcAft>
+            </a:pPr>
+            <a:r>
+              <a:rPr sz="1400" b="0" i="0">
+                <a:solidFill>
+                  <a:srgbClr val="FFFFFF"/>
+                </a:solidFill>
+                <a:latin typeface="Calibri"/>
+              </a:rPr>
               <a:t/>
             </a:r>
           </a:p>
@@ -10972,7 +10789,7 @@
                 </a:solidFill>
                 <a:latin typeface="Calibri"/>
               </a:rPr>
-              <a:t>$ docker ps</a:t>
+              <a:t># 3. verificar que responde DE VERDAD, no que el contenedor existe</a:t>
             </a:r>
           </a:p>
           <a:p>
@@ -10988,7 +10805,7 @@
                 </a:solidFill>
                 <a:latin typeface="Calibri"/>
               </a:rPr>
-              <a:t>CONTAINER ID   IMAGE                 STATUS         PORTS</a:t>
+              <a:t>$ curl -i http://localhost:8080/health</a:t>
             </a:r>
           </a:p>
           <a:p>
@@ -11004,7 +10821,7 @@
                 </a:solidFill>
                 <a:latin typeface="Calibri"/>
               </a:rPr>
-              <a:t>9f8e7d6c5b4a   cloudlite-api:0.1.0   Up 2 minutes   0.0.0.0:8080-&gt;3000/tcp</a:t>
+              <a:t>HTTP/1.1 200 OK</a:t>
             </a:r>
           </a:p>
           <a:p>
@@ -11036,7 +10853,7 @@
                 </a:solidFill>
                 <a:latin typeface="Calibri"/>
               </a:rPr>
-              <a:t># De una imagen salen N contenedores: eso es lo que hace escalar barato.</a:t>
+              <a:t># 4. si no responde, el log es el primer sitio, no el ultimo</a:t>
             </a:r>
           </a:p>
           <a:p>
@@ -11052,23 +10869,7 @@
                 </a:solidFill>
                 <a:latin typeface="Calibri"/>
               </a:rPr>
-              <a:t>$ docker run -d -p 8081:3000 cloudlite-api:0.1.0</a:t>
-            </a:r>
-          </a:p>
-          <a:p>
-            <a:pPr>
-              <a:spcAft>
-                <a:spcPts val="400"/>
-              </a:spcAft>
-            </a:pPr>
-            <a:r>
-              <a:rPr sz="1400" b="0" i="0">
-                <a:solidFill>
-                  <a:srgbClr val="FFFFFF"/>
-                </a:solidFill>
-                <a:latin typeface="Calibri"/>
-              </a:rPr>
-              <a:t>$ docker run -d -p 8082:3000 cloudlite-api:0.1.0</a:t>
+              <a:t>$ docker logs cloudlite --tail 20</a:t>
             </a:r>
           </a:p>
         </p:txBody>
@@ -11535,7 +11336,7 @@
                 </a:solidFill>
                 <a:latin typeface="Calibri"/>
               </a:rPr>
-              <a:t>Limpiar, y la prueba de que el contenedor no guarda estado</a:t>
+              <a:t>Imagen, contenedor y capas: los comandos que lo demuestran</a:t>
             </a:r>
           </a:p>
         </p:txBody>
@@ -11694,7 +11495,7 @@
                 </a:solidFill>
                 <a:latin typeface="Calibri"/>
               </a:rPr>
-              <a:t>$ docker stop cloudlite &amp;&amp; docker rm cloudlite</a:t>
+              <a:t># La IMAGEN es la plantilla; el CONTENEDOR es una instancia en ejecucion.</a:t>
             </a:r>
           </a:p>
           <a:p>
@@ -11710,6 +11511,54 @@
                 </a:solidFill>
                 <a:latin typeface="Calibri"/>
               </a:rPr>
+              <a:t>$ docker images cloudlite-api</a:t>
+            </a:r>
+          </a:p>
+          <a:p>
+            <a:pPr>
+              <a:spcAft>
+                <a:spcPts val="400"/>
+              </a:spcAft>
+            </a:pPr>
+            <a:r>
+              <a:rPr sz="1400" b="0" i="0">
+                <a:solidFill>
+                  <a:srgbClr val="FFFFFF"/>
+                </a:solidFill>
+                <a:latin typeface="Calibri"/>
+              </a:rPr>
+              <a:t>REPOSITORY      TAG     IMAGE ID       SIZE</a:t>
+            </a:r>
+          </a:p>
+          <a:p>
+            <a:pPr>
+              <a:spcAft>
+                <a:spcPts val="400"/>
+              </a:spcAft>
+            </a:pPr>
+            <a:r>
+              <a:rPr sz="1400" b="0" i="0">
+                <a:solidFill>
+                  <a:srgbClr val="FFFFFF"/>
+                </a:solidFill>
+                <a:latin typeface="Calibri"/>
+              </a:rPr>
+              <a:t>cloudlite-api   0.1.0   a1b2c3d4e5f6   142MB</a:t>
+            </a:r>
+          </a:p>
+          <a:p>
+            <a:pPr>
+              <a:spcAft>
+                <a:spcPts val="400"/>
+              </a:spcAft>
+            </a:pPr>
+            <a:r>
+              <a:rPr sz="1400" b="0" i="0">
+                <a:solidFill>
+                  <a:srgbClr val="FFFFFF"/>
+                </a:solidFill>
+                <a:latin typeface="Calibri"/>
+              </a:rPr>
               <a:t/>
             </a:r>
           </a:p>
@@ -11726,7 +11575,7 @@
                 </a:solidFill>
                 <a:latin typeface="Calibri"/>
               </a:rPr>
-              <a:t># Lo escrito DENTRO del contenedor se va con el:</a:t>
+              <a:t>$ docker ps</a:t>
             </a:r>
           </a:p>
           <a:p>
@@ -11742,7 +11591,7 @@
                 </a:solidFill>
                 <a:latin typeface="Calibri"/>
               </a:rPr>
-              <a:t>$ docker run -d --name c1 cloudlite-api:0.1.0</a:t>
+              <a:t>CONTAINER ID   IMAGE                 STATUS         PORTS</a:t>
             </a:r>
           </a:p>
           <a:p>
@@ -11758,7 +11607,7 @@
                 </a:solidFill>
                 <a:latin typeface="Calibri"/>
               </a:rPr>
-              <a:t>$ docker exec c1 sh -c 'echo hola &gt; /tmp/dato.txt'</a:t>
+              <a:t>9f8e7d6c5b4a   cloudlite-api:0.1.0   Up 2 minutes   0.0.0.0:8080-&gt;3000/tcp</a:t>
             </a:r>
           </a:p>
           <a:p>
@@ -11774,7 +11623,7 @@
                 </a:solidFill>
                 <a:latin typeface="Calibri"/>
               </a:rPr>
-              <a:t>$ docker rm -f c1</a:t>
+              <a:t/>
             </a:r>
           </a:p>
           <a:p>
@@ -11790,7 +11639,7 @@
                 </a:solidFill>
                 <a:latin typeface="Calibri"/>
               </a:rPr>
-              <a:t>$ docker run --rm cloudlite-api:0.1.0 cat /tmp/dato.txt</a:t>
+              <a:t># De una imagen salen N contenedores: eso es lo que hace escalar barato.</a:t>
             </a:r>
           </a:p>
           <a:p>
@@ -11806,7 +11655,7 @@
                 </a:solidFill>
                 <a:latin typeface="Calibri"/>
               </a:rPr>
-              <a:t>cat: can't open '/tmp/dato.txt': No such file or directory</a:t>
+              <a:t>$ docker run -d -p 8081:3000 cloudlite-api:0.1.0</a:t>
             </a:r>
           </a:p>
           <a:p>
@@ -11822,39 +11671,7 @@
                 </a:solidFill>
                 <a:latin typeface="Calibri"/>
               </a:rPr>
-              <a:t/>
-            </a:r>
-          </a:p>
-          <a:p>
-            <a:pPr>
-              <a:spcAft>
-                <a:spcPts val="400"/>
-              </a:spcAft>
-            </a:pPr>
-            <a:r>
-              <a:rPr sz="1400" b="0" i="0">
-                <a:solidFill>
-                  <a:srgbClr val="FFFFFF"/>
-                </a:solidFill>
-                <a:latin typeface="Calibri"/>
-              </a:rPr>
-              <a:t># Por eso el estado vive fuera: volumen o base de datos gestionada.</a:t>
-            </a:r>
-          </a:p>
-          <a:p>
-            <a:pPr>
-              <a:spcAft>
-                <a:spcPts val="400"/>
-              </a:spcAft>
-            </a:pPr>
-            <a:r>
-              <a:rPr sz="1400" b="0" i="0">
-                <a:solidFill>
-                  <a:srgbClr val="FFFFFF"/>
-                </a:solidFill>
-                <a:latin typeface="Calibri"/>
-              </a:rPr>
-              <a:t>$ docker run -d -v cloudlite_datos:/app/data cloudlite-api:0.1.0</a:t>
+              <a:t>$ docker run -d -p 8082:3000 cloudlite-api:0.1.0</a:t>
             </a:r>
           </a:p>
         </p:txBody>
@@ -11929,7 +11746,7 @@
         <p:spPr>
           <a:xfrm>
             <a:off x="0" y="0"/>
-            <a:ext cx="12191695" cy="1170432"/>
+            <a:ext cx="12191695" cy="960120"/>
           </a:xfrm>
           <a:prstGeom prst="rect">
             <a:avLst/>
@@ -11971,7 +11788,7 @@
         </p:nvSpPr>
         <p:spPr>
           <a:xfrm>
-            <a:off x="0" y="1170432"/>
+            <a:off x="0" y="960120"/>
             <a:ext cx="12191695" cy="41148"/>
           </a:xfrm>
           <a:prstGeom prst="rect">
@@ -12015,7 +11832,7 @@
         <p:spPr>
           <a:xfrm>
             <a:off x="457200" y="164592"/>
-            <a:ext cx="11277295" cy="384048"/>
+            <a:ext cx="11277295" cy="502920"/>
           </a:xfrm>
           <a:prstGeom prst="rect">
             <a:avLst/>
@@ -12035,60 +11852,69 @@
                 </a:solidFill>
                 <a:latin typeface="Calibri"/>
               </a:rPr>
-              <a:t>Máquinas virtuales vs. contenedores</a:t>
-            </a:r>
-          </a:p>
-        </p:txBody>
-      </p:sp>
-      <p:sp>
-        <p:nvSpPr>
-          <p:cNvPr id="5" name="TextBox 4"/>
-          <p:cNvSpPr txBox="1"/>
-          <p:nvPr/>
-        </p:nvSpPr>
-        <p:spPr>
-          <a:xfrm>
-            <a:off x="457200" y="566928"/>
-            <a:ext cx="11277295" cy="411480"/>
-          </a:xfrm>
-          <a:prstGeom prst="rect">
-            <a:avLst/>
-          </a:prstGeom>
-          <a:noFill/>
-        </p:spPr>
-        <p:txBody>
-          <a:bodyPr wrap="square">
-            <a:spAutoFit/>
-          </a:bodyPr>
-          <a:lstStyle/>
-          <a:p>
-            <a:r>
-              <a:rPr sz="1400" b="0" i="0">
-                <a:solidFill>
-                  <a:srgbClr val="B8D8EE"/>
-                </a:solidFill>
-                <a:latin typeface="Calibri"/>
-              </a:rPr>
-              <a:t>Misma capacidad de cómputo, distinto nivel de aislamiento</a:t>
-            </a:r>
-          </a:p>
-        </p:txBody>
-      </p:sp>
-      <p:sp>
-        <p:nvSpPr>
-          <p:cNvPr id="6" name="Rounded Rectangle 5"/>
+              <a:t>Limpiar, y la prueba de que el contenedor no guarda estado</a:t>
+            </a:r>
+          </a:p>
+        </p:txBody>
+      </p:sp>
+      <p:sp>
+        <p:nvSpPr>
+          <p:cNvPr id="5" name="Rounded Rectangle 4"/>
           <p:cNvSpPr/>
           <p:nvPr/>
         </p:nvSpPr>
         <p:spPr>
           <a:xfrm>
-            <a:off x="822960" y="1417320"/>
-            <a:ext cx="3931920" cy="457200"/>
+            <a:off x="457200" y="1261872"/>
+            <a:ext cx="11277295" cy="5093208"/>
           </a:xfrm>
           <a:prstGeom prst="roundRect">
             <a:avLst>
               <a:gd name="adj" fmla="val 12000"/>
             </a:avLst>
+          </a:prstGeom>
+          <a:solidFill>
+            <a:srgbClr val="1E2A38"/>
+          </a:solidFill>
+          <a:ln>
+            <a:noFill/>
+          </a:ln>
+        </p:spPr>
+        <p:style>
+          <a:lnRef idx="1">
+            <a:schemeClr val="accent1"/>
+          </a:lnRef>
+          <a:fillRef idx="3">
+            <a:schemeClr val="accent1"/>
+          </a:fillRef>
+          <a:effectRef idx="2">
+            <a:schemeClr val="accent1"/>
+          </a:effectRef>
+          <a:fontRef idx="minor">
+            <a:schemeClr val="lt1"/>
+          </a:fontRef>
+        </p:style>
+        <p:txBody>
+          <a:bodyPr rtlCol="0" anchor="ctr"/>
+          <a:lstStyle/>
+          <a:p>
+            <a:pPr algn="ctr"/>
+          </a:p>
+        </p:txBody>
+      </p:sp>
+      <p:sp>
+        <p:nvSpPr>
+          <p:cNvPr id="6" name="Rectangle 5"/>
+          <p:cNvSpPr/>
+          <p:nvPr/>
+        </p:nvSpPr>
+        <p:spPr>
+          <a:xfrm>
+            <a:off x="457200" y="1261872"/>
+            <a:ext cx="11277295" cy="320040"/>
+          </a:xfrm>
+          <a:prstGeom prst="rect">
+            <a:avLst/>
           </a:prstGeom>
           <a:solidFill>
             <a:srgbClr val="095292"/>
@@ -12112,630 +11938,55 @@
           </a:fontRef>
         </p:style>
         <p:txBody>
-          <a:bodyPr rtlCol="0" anchor="ctr" wrap="square"/>
+          <a:bodyPr rtlCol="0" anchor="ctr"/>
           <a:lstStyle/>
           <a:p>
             <a:pPr algn="ctr"/>
-            <a:r>
-              <a:rPr sz="1200" b="1" i="0">
-                <a:solidFill>
-                  <a:srgbClr val="FFFFFF"/>
-                </a:solidFill>
-                <a:latin typeface="Calibri"/>
-              </a:rPr>
-              <a:t>Máquinas virtuales</a:t>
-            </a:r>
-          </a:p>
-        </p:txBody>
-      </p:sp>
-      <p:sp>
-        <p:nvSpPr>
-          <p:cNvPr id="7" name="Rounded Rectangle 6"/>
-          <p:cNvSpPr/>
-          <p:nvPr/>
-        </p:nvSpPr>
-        <p:spPr>
-          <a:xfrm>
-            <a:off x="822960" y="2057400"/>
-            <a:ext cx="3931920" cy="594360"/>
-          </a:xfrm>
-          <a:prstGeom prst="roundRect">
-            <a:avLst>
-              <a:gd name="adj" fmla="val 12000"/>
-            </a:avLst>
-          </a:prstGeom>
-          <a:solidFill>
-            <a:srgbClr val="333333"/>
-          </a:solidFill>
-          <a:ln>
-            <a:noFill/>
-          </a:ln>
-        </p:spPr>
-        <p:style>
-          <a:lnRef idx="1">
-            <a:schemeClr val="accent1"/>
-          </a:lnRef>
-          <a:fillRef idx="3">
-            <a:schemeClr val="accent1"/>
-          </a:fillRef>
-          <a:effectRef idx="2">
-            <a:schemeClr val="accent1"/>
-          </a:effectRef>
-          <a:fontRef idx="minor">
-            <a:schemeClr val="lt1"/>
-          </a:fontRef>
-        </p:style>
-        <p:txBody>
-          <a:bodyPr rtlCol="0" anchor="ctr" wrap="square"/>
-          <a:lstStyle/>
-          <a:p>
-            <a:pPr algn="ctr"/>
-            <a:r>
-              <a:rPr sz="1300" b="1" i="0">
-                <a:solidFill>
-                  <a:srgbClr val="FFFFFF"/>
-                </a:solidFill>
-                <a:latin typeface="Calibri"/>
-              </a:rPr>
-              <a:t>Hardware físico</a:t>
-            </a:r>
-          </a:p>
-        </p:txBody>
-      </p:sp>
-      <p:sp>
-        <p:nvSpPr>
-          <p:cNvPr id="8" name="Rounded Rectangle 7"/>
-          <p:cNvSpPr/>
-          <p:nvPr/>
-        </p:nvSpPr>
-        <p:spPr>
-          <a:xfrm>
-            <a:off x="822960" y="2697480"/>
-            <a:ext cx="3931920" cy="594360"/>
-          </a:xfrm>
-          <a:prstGeom prst="roundRect">
-            <a:avLst>
-              <a:gd name="adj" fmla="val 12000"/>
-            </a:avLst>
-          </a:prstGeom>
-          <a:solidFill>
-            <a:srgbClr val="269CCB"/>
-          </a:solidFill>
-          <a:ln>
-            <a:noFill/>
-          </a:ln>
-        </p:spPr>
-        <p:style>
-          <a:lnRef idx="1">
-            <a:schemeClr val="accent1"/>
-          </a:lnRef>
-          <a:fillRef idx="3">
-            <a:schemeClr val="accent1"/>
-          </a:fillRef>
-          <a:effectRef idx="2">
-            <a:schemeClr val="accent1"/>
-          </a:effectRef>
-          <a:fontRef idx="minor">
-            <a:schemeClr val="lt1"/>
-          </a:fontRef>
-        </p:style>
-        <p:txBody>
-          <a:bodyPr rtlCol="0" anchor="ctr" wrap="square"/>
-          <a:lstStyle/>
-          <a:p>
-            <a:pPr algn="ctr"/>
-            <a:r>
-              <a:rPr sz="1300" b="1" i="0">
-                <a:solidFill>
-                  <a:srgbClr val="FFFFFF"/>
-                </a:solidFill>
-                <a:latin typeface="Calibri"/>
-              </a:rPr>
-              <a:t>Hipervisor</a:t>
-            </a:r>
-          </a:p>
-        </p:txBody>
-      </p:sp>
-      <p:sp>
-        <p:nvSpPr>
-          <p:cNvPr id="9" name="Rounded Rectangle 8"/>
-          <p:cNvSpPr/>
-          <p:nvPr/>
-        </p:nvSpPr>
-        <p:spPr>
-          <a:xfrm>
-            <a:off x="822960" y="3337560"/>
-            <a:ext cx="1874519" cy="640080"/>
-          </a:xfrm>
-          <a:prstGeom prst="roundRect">
-            <a:avLst>
-              <a:gd name="adj" fmla="val 12000"/>
-            </a:avLst>
-          </a:prstGeom>
-          <a:solidFill>
-            <a:srgbClr val="269CCB"/>
-          </a:solidFill>
-          <a:ln>
-            <a:noFill/>
-          </a:ln>
-        </p:spPr>
-        <p:style>
-          <a:lnRef idx="1">
-            <a:schemeClr val="accent1"/>
-          </a:lnRef>
-          <a:fillRef idx="3">
-            <a:schemeClr val="accent1"/>
-          </a:fillRef>
-          <a:effectRef idx="2">
-            <a:schemeClr val="accent1"/>
-          </a:effectRef>
-          <a:fontRef idx="minor">
-            <a:schemeClr val="lt1"/>
-          </a:fontRef>
-        </p:style>
-        <p:txBody>
-          <a:bodyPr rtlCol="0" anchor="ctr" wrap="square"/>
-          <a:lstStyle/>
-          <a:p>
-            <a:pPr algn="ctr"/>
-            <a:r>
-              <a:rPr sz="1100" b="1" i="0">
-                <a:solidFill>
-                  <a:srgbClr val="FFFFFF"/>
-                </a:solidFill>
-                <a:latin typeface="Calibri"/>
-              </a:rPr>
-              <a:t>SO invitado A
-(completo)</a:t>
-            </a:r>
-          </a:p>
-        </p:txBody>
-      </p:sp>
-      <p:sp>
-        <p:nvSpPr>
-          <p:cNvPr id="10" name="Rounded Rectangle 9"/>
-          <p:cNvSpPr/>
-          <p:nvPr/>
-        </p:nvSpPr>
-        <p:spPr>
-          <a:xfrm>
-            <a:off x="2880360" y="3337560"/>
-            <a:ext cx="1874519" cy="640080"/>
-          </a:xfrm>
-          <a:prstGeom prst="roundRect">
-            <a:avLst>
-              <a:gd name="adj" fmla="val 12000"/>
-            </a:avLst>
-          </a:prstGeom>
-          <a:solidFill>
-            <a:srgbClr val="269CCB"/>
-          </a:solidFill>
-          <a:ln>
-            <a:noFill/>
-          </a:ln>
-        </p:spPr>
-        <p:style>
-          <a:lnRef idx="1">
-            <a:schemeClr val="accent1"/>
-          </a:lnRef>
-          <a:fillRef idx="3">
-            <a:schemeClr val="accent1"/>
-          </a:fillRef>
-          <a:effectRef idx="2">
-            <a:schemeClr val="accent1"/>
-          </a:effectRef>
-          <a:fontRef idx="minor">
-            <a:schemeClr val="lt1"/>
-          </a:fontRef>
-        </p:style>
-        <p:txBody>
-          <a:bodyPr rtlCol="0" anchor="ctr" wrap="square"/>
-          <a:lstStyle/>
-          <a:p>
-            <a:pPr algn="ctr"/>
-            <a:r>
-              <a:rPr sz="1100" b="1" i="0">
-                <a:solidFill>
-                  <a:srgbClr val="FFFFFF"/>
-                </a:solidFill>
-                <a:latin typeface="Calibri"/>
-              </a:rPr>
-              <a:t>SO invitado B
-(completo)</a:t>
-            </a:r>
-          </a:p>
-        </p:txBody>
-      </p:sp>
-      <p:sp>
-        <p:nvSpPr>
-          <p:cNvPr id="11" name="Rounded Rectangle 10"/>
-          <p:cNvSpPr/>
-          <p:nvPr/>
-        </p:nvSpPr>
-        <p:spPr>
-          <a:xfrm>
-            <a:off x="822960" y="4023360"/>
-            <a:ext cx="1874519" cy="548640"/>
-          </a:xfrm>
-          <a:prstGeom prst="roundRect">
-            <a:avLst>
-              <a:gd name="adj" fmla="val 12000"/>
-            </a:avLst>
-          </a:prstGeom>
-          <a:solidFill>
-            <a:srgbClr val="FFD000"/>
-          </a:solidFill>
-          <a:ln>
-            <a:noFill/>
-          </a:ln>
-        </p:spPr>
-        <p:style>
-          <a:lnRef idx="1">
-            <a:schemeClr val="accent1"/>
-          </a:lnRef>
-          <a:fillRef idx="3">
-            <a:schemeClr val="accent1"/>
-          </a:fillRef>
-          <a:effectRef idx="2">
-            <a:schemeClr val="accent1"/>
-          </a:effectRef>
-          <a:fontRef idx="minor">
-            <a:schemeClr val="lt1"/>
-          </a:fontRef>
-        </p:style>
-        <p:txBody>
-          <a:bodyPr rtlCol="0" anchor="ctr" wrap="square"/>
-          <a:lstStyle/>
-          <a:p>
-            <a:pPr algn="ctr"/>
-            <a:r>
-              <a:rPr sz="1300" b="1" i="0">
-                <a:solidFill>
-                  <a:srgbClr val="095292"/>
-                </a:solidFill>
-                <a:latin typeface="Calibri"/>
-              </a:rPr>
-              <a:t>App A</a:t>
-            </a:r>
-          </a:p>
-        </p:txBody>
-      </p:sp>
-      <p:sp>
-        <p:nvSpPr>
-          <p:cNvPr id="12" name="Rounded Rectangle 11"/>
-          <p:cNvSpPr/>
-          <p:nvPr/>
-        </p:nvSpPr>
-        <p:spPr>
-          <a:xfrm>
-            <a:off x="2880360" y="4023360"/>
-            <a:ext cx="1874519" cy="548640"/>
-          </a:xfrm>
-          <a:prstGeom prst="roundRect">
-            <a:avLst>
-              <a:gd name="adj" fmla="val 12000"/>
-            </a:avLst>
-          </a:prstGeom>
-          <a:solidFill>
-            <a:srgbClr val="FFD000"/>
-          </a:solidFill>
-          <a:ln>
-            <a:noFill/>
-          </a:ln>
-        </p:spPr>
-        <p:style>
-          <a:lnRef idx="1">
-            <a:schemeClr val="accent1"/>
-          </a:lnRef>
-          <a:fillRef idx="3">
-            <a:schemeClr val="accent1"/>
-          </a:fillRef>
-          <a:effectRef idx="2">
-            <a:schemeClr val="accent1"/>
-          </a:effectRef>
-          <a:fontRef idx="minor">
-            <a:schemeClr val="lt1"/>
-          </a:fontRef>
-        </p:style>
-        <p:txBody>
-          <a:bodyPr rtlCol="0" anchor="ctr" wrap="square"/>
-          <a:lstStyle/>
-          <a:p>
-            <a:pPr algn="ctr"/>
-            <a:r>
-              <a:rPr sz="1300" b="1" i="0">
-                <a:solidFill>
-                  <a:srgbClr val="095292"/>
-                </a:solidFill>
-                <a:latin typeface="Calibri"/>
-              </a:rPr>
-              <a:t>App B</a:t>
-            </a:r>
-          </a:p>
-        </p:txBody>
-      </p:sp>
-      <p:sp>
-        <p:nvSpPr>
-          <p:cNvPr id="13" name="Rounded Rectangle 12"/>
-          <p:cNvSpPr/>
-          <p:nvPr/>
-        </p:nvSpPr>
-        <p:spPr>
-          <a:xfrm>
-            <a:off x="7315200" y="1417320"/>
-            <a:ext cx="3931920" cy="457200"/>
-          </a:xfrm>
-          <a:prstGeom prst="roundRect">
-            <a:avLst>
-              <a:gd name="adj" fmla="val 12000"/>
-            </a:avLst>
-          </a:prstGeom>
-          <a:solidFill>
-            <a:srgbClr val="095292"/>
-          </a:solidFill>
-          <a:ln>
-            <a:noFill/>
-          </a:ln>
-        </p:spPr>
-        <p:style>
-          <a:lnRef idx="1">
-            <a:schemeClr val="accent1"/>
-          </a:lnRef>
-          <a:fillRef idx="3">
-            <a:schemeClr val="accent1"/>
-          </a:fillRef>
-          <a:effectRef idx="2">
-            <a:schemeClr val="accent1"/>
-          </a:effectRef>
-          <a:fontRef idx="minor">
-            <a:schemeClr val="lt1"/>
-          </a:fontRef>
-        </p:style>
-        <p:txBody>
-          <a:bodyPr rtlCol="0" anchor="ctr" wrap="square"/>
-          <a:lstStyle/>
-          <a:p>
-            <a:pPr algn="ctr"/>
-            <a:r>
-              <a:rPr sz="1200" b="1" i="0">
-                <a:solidFill>
-                  <a:srgbClr val="FFFFFF"/>
-                </a:solidFill>
-                <a:latin typeface="Calibri"/>
-              </a:rPr>
-              <a:t>Contenedores</a:t>
-            </a:r>
-          </a:p>
-        </p:txBody>
-      </p:sp>
-      <p:sp>
-        <p:nvSpPr>
-          <p:cNvPr id="14" name="Rounded Rectangle 13"/>
-          <p:cNvSpPr/>
-          <p:nvPr/>
-        </p:nvSpPr>
-        <p:spPr>
-          <a:xfrm>
-            <a:off x="7315200" y="2057400"/>
-            <a:ext cx="3931920" cy="594360"/>
-          </a:xfrm>
-          <a:prstGeom prst="roundRect">
-            <a:avLst>
-              <a:gd name="adj" fmla="val 12000"/>
-            </a:avLst>
-          </a:prstGeom>
-          <a:solidFill>
-            <a:srgbClr val="333333"/>
-          </a:solidFill>
-          <a:ln>
-            <a:noFill/>
-          </a:ln>
-        </p:spPr>
-        <p:style>
-          <a:lnRef idx="1">
-            <a:schemeClr val="accent1"/>
-          </a:lnRef>
-          <a:fillRef idx="3">
-            <a:schemeClr val="accent1"/>
-          </a:fillRef>
-          <a:effectRef idx="2">
-            <a:schemeClr val="accent1"/>
-          </a:effectRef>
-          <a:fontRef idx="minor">
-            <a:schemeClr val="lt1"/>
-          </a:fontRef>
-        </p:style>
-        <p:txBody>
-          <a:bodyPr rtlCol="0" anchor="ctr" wrap="square"/>
-          <a:lstStyle/>
-          <a:p>
-            <a:pPr algn="ctr"/>
-            <a:r>
-              <a:rPr sz="1300" b="1" i="0">
-                <a:solidFill>
-                  <a:srgbClr val="FFFFFF"/>
-                </a:solidFill>
-                <a:latin typeface="Calibri"/>
-              </a:rPr>
-              <a:t>Hardware físico</a:t>
-            </a:r>
-          </a:p>
-        </p:txBody>
-      </p:sp>
-      <p:sp>
-        <p:nvSpPr>
-          <p:cNvPr id="15" name="Rounded Rectangle 14"/>
-          <p:cNvSpPr/>
-          <p:nvPr/>
-        </p:nvSpPr>
-        <p:spPr>
-          <a:xfrm>
-            <a:off x="7315200" y="2697480"/>
-            <a:ext cx="3931920" cy="594360"/>
-          </a:xfrm>
-          <a:prstGeom prst="roundRect">
-            <a:avLst>
-              <a:gd name="adj" fmla="val 12000"/>
-            </a:avLst>
-          </a:prstGeom>
-          <a:solidFill>
-            <a:srgbClr val="269CCB"/>
-          </a:solidFill>
-          <a:ln>
-            <a:noFill/>
-          </a:ln>
-        </p:spPr>
-        <p:style>
-          <a:lnRef idx="1">
-            <a:schemeClr val="accent1"/>
-          </a:lnRef>
-          <a:fillRef idx="3">
-            <a:schemeClr val="accent1"/>
-          </a:fillRef>
-          <a:effectRef idx="2">
-            <a:schemeClr val="accent1"/>
-          </a:effectRef>
-          <a:fontRef idx="minor">
-            <a:schemeClr val="lt1"/>
-          </a:fontRef>
-        </p:style>
-        <p:txBody>
-          <a:bodyPr rtlCol="0" anchor="ctr" wrap="square"/>
-          <a:lstStyle/>
-          <a:p>
-            <a:pPr algn="ctr"/>
-            <a:r>
-              <a:rPr sz="1050" b="1" i="0">
-                <a:solidFill>
-                  <a:srgbClr val="FFFFFF"/>
-                </a:solidFill>
-                <a:latin typeface="Calibri"/>
-              </a:rPr>
-              <a:t>SO anfitrión + motor de contenedores (kernel compartido)</a:t>
-            </a:r>
-          </a:p>
-        </p:txBody>
-      </p:sp>
-      <p:sp>
-        <p:nvSpPr>
-          <p:cNvPr id="16" name="Rounded Rectangle 15"/>
-          <p:cNvSpPr/>
-          <p:nvPr/>
-        </p:nvSpPr>
-        <p:spPr>
-          <a:xfrm>
-            <a:off x="7315200" y="3337560"/>
-            <a:ext cx="1874519" cy="640080"/>
-          </a:xfrm>
-          <a:prstGeom prst="roundRect">
-            <a:avLst>
-              <a:gd name="adj" fmla="val 12000"/>
-            </a:avLst>
-          </a:prstGeom>
-          <a:solidFill>
-            <a:srgbClr val="FFD000"/>
-          </a:solidFill>
-          <a:ln>
-            <a:noFill/>
-          </a:ln>
-        </p:spPr>
-        <p:style>
-          <a:lnRef idx="1">
-            <a:schemeClr val="accent1"/>
-          </a:lnRef>
-          <a:fillRef idx="3">
-            <a:schemeClr val="accent1"/>
-          </a:fillRef>
-          <a:effectRef idx="2">
-            <a:schemeClr val="accent1"/>
-          </a:effectRef>
-          <a:fontRef idx="minor">
-            <a:schemeClr val="lt1"/>
-          </a:fontRef>
-        </p:style>
-        <p:txBody>
-          <a:bodyPr rtlCol="0" anchor="ctr" wrap="square"/>
-          <a:lstStyle/>
-          <a:p>
-            <a:pPr algn="ctr"/>
-            <a:r>
-              <a:rPr sz="1100" b="1" i="0">
-                <a:solidFill>
-                  <a:srgbClr val="095292"/>
-                </a:solidFill>
-                <a:latin typeface="Calibri"/>
-              </a:rPr>
-              <a:t>Contenedor A
-(App A)</a:t>
-            </a:r>
-          </a:p>
-        </p:txBody>
-      </p:sp>
-      <p:sp>
-        <p:nvSpPr>
-          <p:cNvPr id="17" name="Rounded Rectangle 16"/>
-          <p:cNvSpPr/>
-          <p:nvPr/>
-        </p:nvSpPr>
-        <p:spPr>
-          <a:xfrm>
-            <a:off x="9372600" y="3337560"/>
-            <a:ext cx="1874519" cy="640080"/>
-          </a:xfrm>
-          <a:prstGeom prst="roundRect">
-            <a:avLst>
-              <a:gd name="adj" fmla="val 12000"/>
-            </a:avLst>
-          </a:prstGeom>
-          <a:solidFill>
-            <a:srgbClr val="FFD000"/>
-          </a:solidFill>
-          <a:ln>
-            <a:noFill/>
-          </a:ln>
-        </p:spPr>
-        <p:style>
-          <a:lnRef idx="1">
-            <a:schemeClr val="accent1"/>
-          </a:lnRef>
-          <a:fillRef idx="3">
-            <a:schemeClr val="accent1"/>
-          </a:fillRef>
-          <a:effectRef idx="2">
-            <a:schemeClr val="accent1"/>
-          </a:effectRef>
-          <a:fontRef idx="minor">
-            <a:schemeClr val="lt1"/>
-          </a:fontRef>
-        </p:style>
-        <p:txBody>
-          <a:bodyPr rtlCol="0" anchor="ctr" wrap="square"/>
-          <a:lstStyle/>
-          <a:p>
-            <a:pPr algn="ctr"/>
-            <a:r>
-              <a:rPr sz="1100" b="1" i="0">
-                <a:solidFill>
-                  <a:srgbClr val="095292"/>
-                </a:solidFill>
-                <a:latin typeface="Calibri"/>
-              </a:rPr>
-              <a:t>Contenedor B
-(App B)</a:t>
-            </a:r>
-          </a:p>
-        </p:txBody>
-      </p:sp>
-      <p:sp>
-        <p:nvSpPr>
-          <p:cNvPr id="18" name="TextBox 17"/>
+          </a:p>
+        </p:txBody>
+      </p:sp>
+      <p:sp>
+        <p:nvSpPr>
+          <p:cNvPr id="7" name="TextBox 6"/>
           <p:cNvSpPr txBox="1"/>
           <p:nvPr/>
         </p:nvSpPr>
         <p:spPr>
           <a:xfrm>
-            <a:off x="457200" y="6263640"/>
-            <a:ext cx="11277295" cy="411480"/>
+            <a:off x="685800" y="1307592"/>
+            <a:ext cx="10820095" cy="256032"/>
+          </a:xfrm>
+          <a:prstGeom prst="rect">
+            <a:avLst/>
+          </a:prstGeom>
+          <a:noFill/>
+        </p:spPr>
+        <p:txBody>
+          <a:bodyPr wrap="square" anchor="ctr"/>
+          <a:lstStyle/>
+          <a:p>
+            <a:r>
+              <a:rPr sz="1000" b="1" i="0">
+                <a:solidFill>
+                  <a:srgbClr val="269CCB"/>
+                </a:solidFill>
+                <a:latin typeface="Calibri"/>
+              </a:rPr>
+              <a:t>● ● ●</a:t>
+            </a:r>
+          </a:p>
+        </p:txBody>
+      </p:sp>
+      <p:sp>
+        <p:nvSpPr>
+          <p:cNvPr id="8" name="TextBox 7"/>
+          <p:cNvSpPr txBox="1"/>
+          <p:nvPr/>
+        </p:nvSpPr>
+        <p:spPr>
+          <a:xfrm>
+            <a:off x="777240" y="1719072"/>
+            <a:ext cx="10637215" cy="4453128"/>
           </a:xfrm>
           <a:prstGeom prst="rect">
             <a:avLst/>
@@ -12748,21 +11999,186 @@
           </a:bodyPr>
           <a:lstStyle/>
           <a:p>
-            <a:r>
-              <a:rPr sz="1100" b="0" i="1">
-                <a:solidFill>
-                  <a:srgbClr val="666666"/>
-                </a:solidFill>
-                <a:latin typeface="Calibri"/>
-              </a:rPr>
-              <a:t>VM: cada instancia carga un SO completo (aislamiento fuerte, más pesado). Contenedor: comparte el kernel del anfitrión y solo empaqueta app + dependencias (arranca en segundos, pesa MB no GB).</a:t>
-            </a:r>
-          </a:p>
-        </p:txBody>
-      </p:sp>
-      <p:sp>
-        <p:nvSpPr>
-          <p:cNvPr id="19" name="TextBox 18"/>
+            <a:pPr>
+              <a:spcAft>
+                <a:spcPts val="400"/>
+              </a:spcAft>
+            </a:pPr>
+            <a:r>
+              <a:rPr sz="1400" b="0" i="0">
+                <a:solidFill>
+                  <a:srgbClr val="FFFFFF"/>
+                </a:solidFill>
+                <a:latin typeface="Calibri"/>
+              </a:rPr>
+              <a:t>$ docker stop cloudlite &amp;&amp; docker rm cloudlite</a:t>
+            </a:r>
+          </a:p>
+          <a:p>
+            <a:pPr>
+              <a:spcAft>
+                <a:spcPts val="400"/>
+              </a:spcAft>
+            </a:pPr>
+            <a:r>
+              <a:rPr sz="1400" b="0" i="0">
+                <a:solidFill>
+                  <a:srgbClr val="FFFFFF"/>
+                </a:solidFill>
+                <a:latin typeface="Calibri"/>
+              </a:rPr>
+              <a:t/>
+            </a:r>
+          </a:p>
+          <a:p>
+            <a:pPr>
+              <a:spcAft>
+                <a:spcPts val="400"/>
+              </a:spcAft>
+            </a:pPr>
+            <a:r>
+              <a:rPr sz="1400" b="0" i="0">
+                <a:solidFill>
+                  <a:srgbClr val="FFFFFF"/>
+                </a:solidFill>
+                <a:latin typeface="Calibri"/>
+              </a:rPr>
+              <a:t># Lo escrito DENTRO del contenedor se va con el:</a:t>
+            </a:r>
+          </a:p>
+          <a:p>
+            <a:pPr>
+              <a:spcAft>
+                <a:spcPts val="400"/>
+              </a:spcAft>
+            </a:pPr>
+            <a:r>
+              <a:rPr sz="1400" b="0" i="0">
+                <a:solidFill>
+                  <a:srgbClr val="FFFFFF"/>
+                </a:solidFill>
+                <a:latin typeface="Calibri"/>
+              </a:rPr>
+              <a:t>$ docker run -d --name c1 cloudlite-api:0.1.0</a:t>
+            </a:r>
+          </a:p>
+          <a:p>
+            <a:pPr>
+              <a:spcAft>
+                <a:spcPts val="400"/>
+              </a:spcAft>
+            </a:pPr>
+            <a:r>
+              <a:rPr sz="1400" b="0" i="0">
+                <a:solidFill>
+                  <a:srgbClr val="FFFFFF"/>
+                </a:solidFill>
+                <a:latin typeface="Calibri"/>
+              </a:rPr>
+              <a:t>$ docker exec c1 sh -c 'echo hola &gt; /tmp/dato.txt'</a:t>
+            </a:r>
+          </a:p>
+          <a:p>
+            <a:pPr>
+              <a:spcAft>
+                <a:spcPts val="400"/>
+              </a:spcAft>
+            </a:pPr>
+            <a:r>
+              <a:rPr sz="1400" b="0" i="0">
+                <a:solidFill>
+                  <a:srgbClr val="FFFFFF"/>
+                </a:solidFill>
+                <a:latin typeface="Calibri"/>
+              </a:rPr>
+              <a:t>$ docker rm -f c1</a:t>
+            </a:r>
+          </a:p>
+          <a:p>
+            <a:pPr>
+              <a:spcAft>
+                <a:spcPts val="400"/>
+              </a:spcAft>
+            </a:pPr>
+            <a:r>
+              <a:rPr sz="1400" b="0" i="0">
+                <a:solidFill>
+                  <a:srgbClr val="FFFFFF"/>
+                </a:solidFill>
+                <a:latin typeface="Calibri"/>
+              </a:rPr>
+              <a:t>$ docker run --rm cloudlite-api:0.1.0 cat /tmp/dato.txt</a:t>
+            </a:r>
+          </a:p>
+          <a:p>
+            <a:pPr>
+              <a:spcAft>
+                <a:spcPts val="400"/>
+              </a:spcAft>
+            </a:pPr>
+            <a:r>
+              <a:rPr sz="1400" b="0" i="0">
+                <a:solidFill>
+                  <a:srgbClr val="FFFFFF"/>
+                </a:solidFill>
+                <a:latin typeface="Calibri"/>
+              </a:rPr>
+              <a:t>cat: can't open '/tmp/dato.txt': No such file or directory</a:t>
+            </a:r>
+          </a:p>
+          <a:p>
+            <a:pPr>
+              <a:spcAft>
+                <a:spcPts val="400"/>
+              </a:spcAft>
+            </a:pPr>
+            <a:r>
+              <a:rPr sz="1400" b="0" i="0">
+                <a:solidFill>
+                  <a:srgbClr val="FFFFFF"/>
+                </a:solidFill>
+                <a:latin typeface="Calibri"/>
+              </a:rPr>
+              <a:t/>
+            </a:r>
+          </a:p>
+          <a:p>
+            <a:pPr>
+              <a:spcAft>
+                <a:spcPts val="400"/>
+              </a:spcAft>
+            </a:pPr>
+            <a:r>
+              <a:rPr sz="1400" b="0" i="0">
+                <a:solidFill>
+                  <a:srgbClr val="FFFFFF"/>
+                </a:solidFill>
+                <a:latin typeface="Calibri"/>
+              </a:rPr>
+              <a:t># Por eso el estado vive fuera: volumen o base de datos gestionada.</a:t>
+            </a:r>
+          </a:p>
+          <a:p>
+            <a:pPr>
+              <a:spcAft>
+                <a:spcPts val="400"/>
+              </a:spcAft>
+            </a:pPr>
+            <a:r>
+              <a:rPr sz="1400" b="0" i="0">
+                <a:solidFill>
+                  <a:srgbClr val="FFFFFF"/>
+                </a:solidFill>
+                <a:latin typeface="Calibri"/>
+              </a:rPr>
+              <a:t>$ docker run -d -v cloudlite_datos:/app/data cloudlite-api:0.1.0</a:t>
+            </a:r>
+          </a:p>
+        </p:txBody>
+      </p:sp>
+      <p:sp>
+        <p:nvSpPr>
+          <p:cNvPr id="9" name="TextBox 8"/>
           <p:cNvSpPr txBox="1"/>
           <p:nvPr/>
         </p:nvSpPr>
@@ -12830,7 +12246,7 @@
         <p:spPr>
           <a:xfrm>
             <a:off x="0" y="0"/>
-            <a:ext cx="12191695" cy="960120"/>
+            <a:ext cx="12191695" cy="1170432"/>
           </a:xfrm>
           <a:prstGeom prst="rect">
             <a:avLst/>
@@ -12872,7 +12288,7 @@
         </p:nvSpPr>
         <p:spPr>
           <a:xfrm>
-            <a:off x="0" y="960120"/>
+            <a:off x="0" y="1170432"/>
             <a:ext cx="12191695" cy="41148"/>
           </a:xfrm>
           <a:prstGeom prst="rect">
@@ -12916,7 +12332,7 @@
         <p:spPr>
           <a:xfrm>
             <a:off x="457200" y="164592"/>
-            <a:ext cx="11277295" cy="502920"/>
+            <a:ext cx="11277295" cy="384048"/>
           </a:xfrm>
           <a:prstGeom prst="rect">
             <a:avLst/>
@@ -12936,322 +12352,60 @@
                 </a:solidFill>
                 <a:latin typeface="Calibri"/>
               </a:rPr>
-              <a:t>Maquina virtual vs contenedor — que cambia de verdad</a:t>
-            </a:r>
-          </a:p>
-        </p:txBody>
-      </p:sp>
-      <p:sp>
-        <p:nvSpPr>
-          <p:cNvPr id="5" name="Rounded Rectangle 4"/>
+              <a:t>Máquinas virtuales vs. contenedores</a:t>
+            </a:r>
+          </a:p>
+        </p:txBody>
+      </p:sp>
+      <p:sp>
+        <p:nvSpPr>
+          <p:cNvPr id="5" name="TextBox 4"/>
+          <p:cNvSpPr txBox="1"/>
+          <p:nvPr/>
+        </p:nvSpPr>
+        <p:spPr>
+          <a:xfrm>
+            <a:off x="457200" y="566928"/>
+            <a:ext cx="11277295" cy="411480"/>
+          </a:xfrm>
+          <a:prstGeom prst="rect">
+            <a:avLst/>
+          </a:prstGeom>
+          <a:noFill/>
+        </p:spPr>
+        <p:txBody>
+          <a:bodyPr wrap="square">
+            <a:spAutoFit/>
+          </a:bodyPr>
+          <a:lstStyle/>
+          <a:p>
+            <a:r>
+              <a:rPr sz="1400" b="0" i="0">
+                <a:solidFill>
+                  <a:srgbClr val="B8D8EE"/>
+                </a:solidFill>
+                <a:latin typeface="Calibri"/>
+              </a:rPr>
+              <a:t>Misma capacidad de cómputo, distinto nivel de aislamiento</a:t>
+            </a:r>
+          </a:p>
+        </p:txBody>
+      </p:sp>
+      <p:sp>
+        <p:nvSpPr>
+          <p:cNvPr id="6" name="Rounded Rectangle 5"/>
           <p:cNvSpPr/>
           <p:nvPr/>
         </p:nvSpPr>
         <p:spPr>
           <a:xfrm>
-            <a:off x="457200" y="1261872"/>
-            <a:ext cx="5478627" cy="5093208"/>
+            <a:off x="822960" y="1417320"/>
+            <a:ext cx="3931920" cy="457200"/>
           </a:xfrm>
           <a:prstGeom prst="roundRect">
             <a:avLst>
               <a:gd name="adj" fmla="val 12000"/>
             </a:avLst>
-          </a:prstGeom>
-          <a:solidFill>
-            <a:srgbClr val="FBE4E4"/>
-          </a:solidFill>
-          <a:ln>
-            <a:noFill/>
-          </a:ln>
-        </p:spPr>
-        <p:style>
-          <a:lnRef idx="1">
-            <a:schemeClr val="accent1"/>
-          </a:lnRef>
-          <a:fillRef idx="3">
-            <a:schemeClr val="accent1"/>
-          </a:fillRef>
-          <a:effectRef idx="2">
-            <a:schemeClr val="accent1"/>
-          </a:effectRef>
-          <a:fontRef idx="minor">
-            <a:schemeClr val="lt1"/>
-          </a:fontRef>
-        </p:style>
-        <p:txBody>
-          <a:bodyPr rtlCol="0" anchor="ctr"/>
-          <a:lstStyle/>
-          <a:p>
-            <a:pPr algn="ctr"/>
-          </a:p>
-        </p:txBody>
-      </p:sp>
-      <p:sp>
-        <p:nvSpPr>
-          <p:cNvPr id="6" name="Rectangle 5"/>
-          <p:cNvSpPr/>
-          <p:nvPr/>
-        </p:nvSpPr>
-        <p:spPr>
-          <a:xfrm>
-            <a:off x="457200" y="1261872"/>
-            <a:ext cx="5478627" cy="502920"/>
-          </a:xfrm>
-          <a:prstGeom prst="rect">
-            <a:avLst/>
-          </a:prstGeom>
-          <a:solidFill>
-            <a:srgbClr val="A02030"/>
-          </a:solidFill>
-          <a:ln>
-            <a:noFill/>
-          </a:ln>
-        </p:spPr>
-        <p:style>
-          <a:lnRef idx="1">
-            <a:schemeClr val="accent1"/>
-          </a:lnRef>
-          <a:fillRef idx="3">
-            <a:schemeClr val="accent1"/>
-          </a:fillRef>
-          <a:effectRef idx="2">
-            <a:schemeClr val="accent1"/>
-          </a:effectRef>
-          <a:fontRef idx="minor">
-            <a:schemeClr val="lt1"/>
-          </a:fontRef>
-        </p:style>
-        <p:txBody>
-          <a:bodyPr rtlCol="0" anchor="ctr"/>
-          <a:lstStyle/>
-          <a:p>
-            <a:pPr algn="ctr"/>
-          </a:p>
-        </p:txBody>
-      </p:sp>
-      <p:sp>
-        <p:nvSpPr>
-          <p:cNvPr id="7" name="TextBox 6"/>
-          <p:cNvSpPr txBox="1"/>
-          <p:nvPr/>
-        </p:nvSpPr>
-        <p:spPr>
-          <a:xfrm>
-            <a:off x="594360" y="1353312"/>
-            <a:ext cx="5204307" cy="365760"/>
-          </a:xfrm>
-          <a:prstGeom prst="rect">
-            <a:avLst/>
-          </a:prstGeom>
-          <a:noFill/>
-        </p:spPr>
-        <p:txBody>
-          <a:bodyPr wrap="square" anchor="ctr"/>
-          <a:lstStyle/>
-          <a:p>
-            <a:pPr algn="ctr"/>
-            <a:r>
-              <a:rPr sz="1600" b="1" i="0">
-                <a:solidFill>
-                  <a:srgbClr val="FFFFFF"/>
-                </a:solidFill>
-                <a:latin typeface="Calibri"/>
-              </a:rPr>
-              <a:t>Maquina virtual</a:t>
-            </a:r>
-          </a:p>
-        </p:txBody>
-      </p:sp>
-      <p:sp>
-        <p:nvSpPr>
-          <p:cNvPr id="8" name="TextBox 7"/>
-          <p:cNvSpPr txBox="1"/>
-          <p:nvPr/>
-        </p:nvSpPr>
-        <p:spPr>
-          <a:xfrm>
-            <a:off x="621792" y="1901952"/>
-            <a:ext cx="5158587" cy="4498848"/>
-          </a:xfrm>
-          <a:prstGeom prst="rect">
-            <a:avLst/>
-          </a:prstGeom>
-          <a:noFill/>
-        </p:spPr>
-        <p:txBody>
-          <a:bodyPr wrap="square">
-            <a:spAutoFit/>
-          </a:bodyPr>
-          <a:lstStyle/>
-          <a:p>
-            <a:pPr>
-              <a:spcAft>
-                <a:spcPts val="800"/>
-              </a:spcAft>
-            </a:pPr>
-            <a:r>
-              <a:rPr sz="1500" b="0" i="0">
-                <a:solidFill>
-                  <a:srgbClr val="333333"/>
-                </a:solidFill>
-                <a:latin typeface="Calibri"/>
-              </a:rPr>
-              <a:t>–   Cada instancia trae un </a:t>
-            </a:r>
-            <a:r>
-              <a:rPr sz="1500" b="1" i="0">
-                <a:solidFill>
-                  <a:srgbClr val="333333"/>
-                </a:solidFill>
-                <a:latin typeface="Calibri"/>
-              </a:rPr>
-              <a:t>SO completo</a:t>
-            </a:r>
-            <a:r>
-              <a:rPr sz="1500" b="0" i="0">
-                <a:solidFill>
-                  <a:srgbClr val="333333"/>
-                </a:solidFill>
-                <a:latin typeface="Calibri"/>
-              </a:rPr>
-              <a:t> (kernel propio)</a:t>
-            </a:r>
-          </a:p>
-          <a:p>
-            <a:pPr>
-              <a:spcAft>
-                <a:spcPts val="800"/>
-              </a:spcAft>
-            </a:pPr>
-            <a:r>
-              <a:rPr sz="1500" b="0" i="0">
-                <a:solidFill>
-                  <a:srgbClr val="333333"/>
-                </a:solidFill>
-                <a:latin typeface="Calibri"/>
-              </a:rPr>
-              <a:t>–   Aislamiento fuerte a nivel de hardware virtual</a:t>
-            </a:r>
-          </a:p>
-          <a:p>
-            <a:pPr>
-              <a:spcAft>
-                <a:spcPts val="800"/>
-              </a:spcAft>
-            </a:pPr>
-            <a:r>
-              <a:rPr sz="1500" b="0" i="0">
-                <a:solidFill>
-                  <a:srgbClr val="333333"/>
-                </a:solidFill>
-                <a:latin typeface="Calibri"/>
-              </a:rPr>
-              <a:t>–   Arranque en </a:t>
-            </a:r>
-            <a:r>
-              <a:rPr sz="1500" b="1" i="0">
-                <a:solidFill>
-                  <a:srgbClr val="333333"/>
-                </a:solidFill>
-                <a:latin typeface="Calibri"/>
-              </a:rPr>
-              <a:t>minutos</a:t>
-            </a:r>
-            <a:r>
-              <a:rPr sz="1500" b="0" i="0">
-                <a:solidFill>
-                  <a:srgbClr val="333333"/>
-                </a:solidFill>
-                <a:latin typeface="Calibri"/>
-              </a:rPr>
-              <a:t>, tamaño en </a:t>
-            </a:r>
-            <a:r>
-              <a:rPr sz="1500" b="1" i="0">
-                <a:solidFill>
-                  <a:srgbClr val="333333"/>
-                </a:solidFill>
-                <a:latin typeface="Calibri"/>
-              </a:rPr>
-              <a:t>GB</a:t>
-            </a:r>
-          </a:p>
-          <a:p>
-            <a:pPr>
-              <a:spcAft>
-                <a:spcPts val="800"/>
-              </a:spcAft>
-            </a:pPr>
-            <a:r>
-              <a:rPr sz="1500" b="0" i="0">
-                <a:solidFill>
-                  <a:srgbClr val="333333"/>
-                </a:solidFill>
-                <a:latin typeface="Calibri"/>
-              </a:rPr>
-              <a:t>–   Util cuando se necesitan SO distintos</a:t>
-            </a:r>
-          </a:p>
-        </p:txBody>
-      </p:sp>
-      <p:sp>
-        <p:nvSpPr>
-          <p:cNvPr id="9" name="Rounded Rectangle 8"/>
-          <p:cNvSpPr/>
-          <p:nvPr/>
-        </p:nvSpPr>
-        <p:spPr>
-          <a:xfrm>
-            <a:off x="6255867" y="1261872"/>
-            <a:ext cx="5478627" cy="5093208"/>
-          </a:xfrm>
-          <a:prstGeom prst="roundRect">
-            <a:avLst>
-              <a:gd name="adj" fmla="val 12000"/>
-            </a:avLst>
-          </a:prstGeom>
-          <a:solidFill>
-            <a:srgbClr val="E8F4FA"/>
-          </a:solidFill>
-          <a:ln>
-            <a:noFill/>
-          </a:ln>
-        </p:spPr>
-        <p:style>
-          <a:lnRef idx="1">
-            <a:schemeClr val="accent1"/>
-          </a:lnRef>
-          <a:fillRef idx="3">
-            <a:schemeClr val="accent1"/>
-          </a:fillRef>
-          <a:effectRef idx="2">
-            <a:schemeClr val="accent1"/>
-          </a:effectRef>
-          <a:fontRef idx="minor">
-            <a:schemeClr val="lt1"/>
-          </a:fontRef>
-        </p:style>
-        <p:txBody>
-          <a:bodyPr rtlCol="0" anchor="ctr"/>
-          <a:lstStyle/>
-          <a:p>
-            <a:pPr algn="ctr"/>
-          </a:p>
-        </p:txBody>
-      </p:sp>
-      <p:sp>
-        <p:nvSpPr>
-          <p:cNvPr id="10" name="Rectangle 9"/>
-          <p:cNvSpPr/>
-          <p:nvPr/>
-        </p:nvSpPr>
-        <p:spPr>
-          <a:xfrm>
-            <a:off x="6255867" y="1261872"/>
-            <a:ext cx="5478627" cy="502920"/>
-          </a:xfrm>
-          <a:prstGeom prst="rect">
-            <a:avLst/>
           </a:prstGeom>
           <a:solidFill>
             <a:srgbClr val="095292"/>
@@ -13275,56 +12429,630 @@
           </a:fontRef>
         </p:style>
         <p:txBody>
-          <a:bodyPr rtlCol="0" anchor="ctr"/>
+          <a:bodyPr rtlCol="0" anchor="ctr" wrap="square"/>
           <a:lstStyle/>
           <a:p>
             <a:pPr algn="ctr"/>
-          </a:p>
-        </p:txBody>
-      </p:sp>
-      <p:sp>
-        <p:nvSpPr>
-          <p:cNvPr id="11" name="TextBox 10"/>
+            <a:r>
+              <a:rPr sz="1200" b="1" i="0">
+                <a:solidFill>
+                  <a:srgbClr val="FFFFFF"/>
+                </a:solidFill>
+                <a:latin typeface="Calibri"/>
+              </a:rPr>
+              <a:t>Máquinas virtuales</a:t>
+            </a:r>
+          </a:p>
+        </p:txBody>
+      </p:sp>
+      <p:sp>
+        <p:nvSpPr>
+          <p:cNvPr id="7" name="Rounded Rectangle 6"/>
+          <p:cNvSpPr/>
+          <p:nvPr/>
+        </p:nvSpPr>
+        <p:spPr>
+          <a:xfrm>
+            <a:off x="822960" y="2057400"/>
+            <a:ext cx="3931920" cy="594360"/>
+          </a:xfrm>
+          <a:prstGeom prst="roundRect">
+            <a:avLst>
+              <a:gd name="adj" fmla="val 12000"/>
+            </a:avLst>
+          </a:prstGeom>
+          <a:solidFill>
+            <a:srgbClr val="333333"/>
+          </a:solidFill>
+          <a:ln>
+            <a:noFill/>
+          </a:ln>
+        </p:spPr>
+        <p:style>
+          <a:lnRef idx="1">
+            <a:schemeClr val="accent1"/>
+          </a:lnRef>
+          <a:fillRef idx="3">
+            <a:schemeClr val="accent1"/>
+          </a:fillRef>
+          <a:effectRef idx="2">
+            <a:schemeClr val="accent1"/>
+          </a:effectRef>
+          <a:fontRef idx="minor">
+            <a:schemeClr val="lt1"/>
+          </a:fontRef>
+        </p:style>
+        <p:txBody>
+          <a:bodyPr rtlCol="0" anchor="ctr" wrap="square"/>
+          <a:lstStyle/>
+          <a:p>
+            <a:pPr algn="ctr"/>
+            <a:r>
+              <a:rPr sz="1300" b="1" i="0">
+                <a:solidFill>
+                  <a:srgbClr val="FFFFFF"/>
+                </a:solidFill>
+                <a:latin typeface="Calibri"/>
+              </a:rPr>
+              <a:t>Hardware físico</a:t>
+            </a:r>
+          </a:p>
+        </p:txBody>
+      </p:sp>
+      <p:sp>
+        <p:nvSpPr>
+          <p:cNvPr id="8" name="Rounded Rectangle 7"/>
+          <p:cNvSpPr/>
+          <p:nvPr/>
+        </p:nvSpPr>
+        <p:spPr>
+          <a:xfrm>
+            <a:off x="822960" y="2697480"/>
+            <a:ext cx="3931920" cy="594360"/>
+          </a:xfrm>
+          <a:prstGeom prst="roundRect">
+            <a:avLst>
+              <a:gd name="adj" fmla="val 12000"/>
+            </a:avLst>
+          </a:prstGeom>
+          <a:solidFill>
+            <a:srgbClr val="269CCB"/>
+          </a:solidFill>
+          <a:ln>
+            <a:noFill/>
+          </a:ln>
+        </p:spPr>
+        <p:style>
+          <a:lnRef idx="1">
+            <a:schemeClr val="accent1"/>
+          </a:lnRef>
+          <a:fillRef idx="3">
+            <a:schemeClr val="accent1"/>
+          </a:fillRef>
+          <a:effectRef idx="2">
+            <a:schemeClr val="accent1"/>
+          </a:effectRef>
+          <a:fontRef idx="minor">
+            <a:schemeClr val="lt1"/>
+          </a:fontRef>
+        </p:style>
+        <p:txBody>
+          <a:bodyPr rtlCol="0" anchor="ctr" wrap="square"/>
+          <a:lstStyle/>
+          <a:p>
+            <a:pPr algn="ctr"/>
+            <a:r>
+              <a:rPr sz="1300" b="1" i="0">
+                <a:solidFill>
+                  <a:srgbClr val="FFFFFF"/>
+                </a:solidFill>
+                <a:latin typeface="Calibri"/>
+              </a:rPr>
+              <a:t>Hipervisor</a:t>
+            </a:r>
+          </a:p>
+        </p:txBody>
+      </p:sp>
+      <p:sp>
+        <p:nvSpPr>
+          <p:cNvPr id="9" name="Rounded Rectangle 8"/>
+          <p:cNvSpPr/>
+          <p:nvPr/>
+        </p:nvSpPr>
+        <p:spPr>
+          <a:xfrm>
+            <a:off x="822960" y="3337560"/>
+            <a:ext cx="1874519" cy="640080"/>
+          </a:xfrm>
+          <a:prstGeom prst="roundRect">
+            <a:avLst>
+              <a:gd name="adj" fmla="val 12000"/>
+            </a:avLst>
+          </a:prstGeom>
+          <a:solidFill>
+            <a:srgbClr val="269CCB"/>
+          </a:solidFill>
+          <a:ln>
+            <a:noFill/>
+          </a:ln>
+        </p:spPr>
+        <p:style>
+          <a:lnRef idx="1">
+            <a:schemeClr val="accent1"/>
+          </a:lnRef>
+          <a:fillRef idx="3">
+            <a:schemeClr val="accent1"/>
+          </a:fillRef>
+          <a:effectRef idx="2">
+            <a:schemeClr val="accent1"/>
+          </a:effectRef>
+          <a:fontRef idx="minor">
+            <a:schemeClr val="lt1"/>
+          </a:fontRef>
+        </p:style>
+        <p:txBody>
+          <a:bodyPr rtlCol="0" anchor="ctr" wrap="square"/>
+          <a:lstStyle/>
+          <a:p>
+            <a:pPr algn="ctr"/>
+            <a:r>
+              <a:rPr sz="1100" b="1" i="0">
+                <a:solidFill>
+                  <a:srgbClr val="FFFFFF"/>
+                </a:solidFill>
+                <a:latin typeface="Calibri"/>
+              </a:rPr>
+              <a:t>SO invitado A
+(completo)</a:t>
+            </a:r>
+          </a:p>
+        </p:txBody>
+      </p:sp>
+      <p:sp>
+        <p:nvSpPr>
+          <p:cNvPr id="10" name="Rounded Rectangle 9"/>
+          <p:cNvSpPr/>
+          <p:nvPr/>
+        </p:nvSpPr>
+        <p:spPr>
+          <a:xfrm>
+            <a:off x="2880360" y="3337560"/>
+            <a:ext cx="1874519" cy="640080"/>
+          </a:xfrm>
+          <a:prstGeom prst="roundRect">
+            <a:avLst>
+              <a:gd name="adj" fmla="val 12000"/>
+            </a:avLst>
+          </a:prstGeom>
+          <a:solidFill>
+            <a:srgbClr val="269CCB"/>
+          </a:solidFill>
+          <a:ln>
+            <a:noFill/>
+          </a:ln>
+        </p:spPr>
+        <p:style>
+          <a:lnRef idx="1">
+            <a:schemeClr val="accent1"/>
+          </a:lnRef>
+          <a:fillRef idx="3">
+            <a:schemeClr val="accent1"/>
+          </a:fillRef>
+          <a:effectRef idx="2">
+            <a:schemeClr val="accent1"/>
+          </a:effectRef>
+          <a:fontRef idx="minor">
+            <a:schemeClr val="lt1"/>
+          </a:fontRef>
+        </p:style>
+        <p:txBody>
+          <a:bodyPr rtlCol="0" anchor="ctr" wrap="square"/>
+          <a:lstStyle/>
+          <a:p>
+            <a:pPr algn="ctr"/>
+            <a:r>
+              <a:rPr sz="1100" b="1" i="0">
+                <a:solidFill>
+                  <a:srgbClr val="FFFFFF"/>
+                </a:solidFill>
+                <a:latin typeface="Calibri"/>
+              </a:rPr>
+              <a:t>SO invitado B
+(completo)</a:t>
+            </a:r>
+          </a:p>
+        </p:txBody>
+      </p:sp>
+      <p:sp>
+        <p:nvSpPr>
+          <p:cNvPr id="11" name="Rounded Rectangle 10"/>
+          <p:cNvSpPr/>
+          <p:nvPr/>
+        </p:nvSpPr>
+        <p:spPr>
+          <a:xfrm>
+            <a:off x="822960" y="4023360"/>
+            <a:ext cx="1874519" cy="548640"/>
+          </a:xfrm>
+          <a:prstGeom prst="roundRect">
+            <a:avLst>
+              <a:gd name="adj" fmla="val 12000"/>
+            </a:avLst>
+          </a:prstGeom>
+          <a:solidFill>
+            <a:srgbClr val="FFD000"/>
+          </a:solidFill>
+          <a:ln>
+            <a:noFill/>
+          </a:ln>
+        </p:spPr>
+        <p:style>
+          <a:lnRef idx="1">
+            <a:schemeClr val="accent1"/>
+          </a:lnRef>
+          <a:fillRef idx="3">
+            <a:schemeClr val="accent1"/>
+          </a:fillRef>
+          <a:effectRef idx="2">
+            <a:schemeClr val="accent1"/>
+          </a:effectRef>
+          <a:fontRef idx="minor">
+            <a:schemeClr val="lt1"/>
+          </a:fontRef>
+        </p:style>
+        <p:txBody>
+          <a:bodyPr rtlCol="0" anchor="ctr" wrap="square"/>
+          <a:lstStyle/>
+          <a:p>
+            <a:pPr algn="ctr"/>
+            <a:r>
+              <a:rPr sz="1300" b="1" i="0">
+                <a:solidFill>
+                  <a:srgbClr val="095292"/>
+                </a:solidFill>
+                <a:latin typeface="Calibri"/>
+              </a:rPr>
+              <a:t>App A</a:t>
+            </a:r>
+          </a:p>
+        </p:txBody>
+      </p:sp>
+      <p:sp>
+        <p:nvSpPr>
+          <p:cNvPr id="12" name="Rounded Rectangle 11"/>
+          <p:cNvSpPr/>
+          <p:nvPr/>
+        </p:nvSpPr>
+        <p:spPr>
+          <a:xfrm>
+            <a:off x="2880360" y="4023360"/>
+            <a:ext cx="1874519" cy="548640"/>
+          </a:xfrm>
+          <a:prstGeom prst="roundRect">
+            <a:avLst>
+              <a:gd name="adj" fmla="val 12000"/>
+            </a:avLst>
+          </a:prstGeom>
+          <a:solidFill>
+            <a:srgbClr val="FFD000"/>
+          </a:solidFill>
+          <a:ln>
+            <a:noFill/>
+          </a:ln>
+        </p:spPr>
+        <p:style>
+          <a:lnRef idx="1">
+            <a:schemeClr val="accent1"/>
+          </a:lnRef>
+          <a:fillRef idx="3">
+            <a:schemeClr val="accent1"/>
+          </a:fillRef>
+          <a:effectRef idx="2">
+            <a:schemeClr val="accent1"/>
+          </a:effectRef>
+          <a:fontRef idx="minor">
+            <a:schemeClr val="lt1"/>
+          </a:fontRef>
+        </p:style>
+        <p:txBody>
+          <a:bodyPr rtlCol="0" anchor="ctr" wrap="square"/>
+          <a:lstStyle/>
+          <a:p>
+            <a:pPr algn="ctr"/>
+            <a:r>
+              <a:rPr sz="1300" b="1" i="0">
+                <a:solidFill>
+                  <a:srgbClr val="095292"/>
+                </a:solidFill>
+                <a:latin typeface="Calibri"/>
+              </a:rPr>
+              <a:t>App B</a:t>
+            </a:r>
+          </a:p>
+        </p:txBody>
+      </p:sp>
+      <p:sp>
+        <p:nvSpPr>
+          <p:cNvPr id="13" name="Rounded Rectangle 12"/>
+          <p:cNvSpPr/>
+          <p:nvPr/>
+        </p:nvSpPr>
+        <p:spPr>
+          <a:xfrm>
+            <a:off x="7315200" y="1417320"/>
+            <a:ext cx="3931920" cy="457200"/>
+          </a:xfrm>
+          <a:prstGeom prst="roundRect">
+            <a:avLst>
+              <a:gd name="adj" fmla="val 12000"/>
+            </a:avLst>
+          </a:prstGeom>
+          <a:solidFill>
+            <a:srgbClr val="095292"/>
+          </a:solidFill>
+          <a:ln>
+            <a:noFill/>
+          </a:ln>
+        </p:spPr>
+        <p:style>
+          <a:lnRef idx="1">
+            <a:schemeClr val="accent1"/>
+          </a:lnRef>
+          <a:fillRef idx="3">
+            <a:schemeClr val="accent1"/>
+          </a:fillRef>
+          <a:effectRef idx="2">
+            <a:schemeClr val="accent1"/>
+          </a:effectRef>
+          <a:fontRef idx="minor">
+            <a:schemeClr val="lt1"/>
+          </a:fontRef>
+        </p:style>
+        <p:txBody>
+          <a:bodyPr rtlCol="0" anchor="ctr" wrap="square"/>
+          <a:lstStyle/>
+          <a:p>
+            <a:pPr algn="ctr"/>
+            <a:r>
+              <a:rPr sz="1200" b="1" i="0">
+                <a:solidFill>
+                  <a:srgbClr val="FFFFFF"/>
+                </a:solidFill>
+                <a:latin typeface="Calibri"/>
+              </a:rPr>
+              <a:t>Contenedores</a:t>
+            </a:r>
+          </a:p>
+        </p:txBody>
+      </p:sp>
+      <p:sp>
+        <p:nvSpPr>
+          <p:cNvPr id="14" name="Rounded Rectangle 13"/>
+          <p:cNvSpPr/>
+          <p:nvPr/>
+        </p:nvSpPr>
+        <p:spPr>
+          <a:xfrm>
+            <a:off x="7315200" y="2057400"/>
+            <a:ext cx="3931920" cy="594360"/>
+          </a:xfrm>
+          <a:prstGeom prst="roundRect">
+            <a:avLst>
+              <a:gd name="adj" fmla="val 12000"/>
+            </a:avLst>
+          </a:prstGeom>
+          <a:solidFill>
+            <a:srgbClr val="333333"/>
+          </a:solidFill>
+          <a:ln>
+            <a:noFill/>
+          </a:ln>
+        </p:spPr>
+        <p:style>
+          <a:lnRef idx="1">
+            <a:schemeClr val="accent1"/>
+          </a:lnRef>
+          <a:fillRef idx="3">
+            <a:schemeClr val="accent1"/>
+          </a:fillRef>
+          <a:effectRef idx="2">
+            <a:schemeClr val="accent1"/>
+          </a:effectRef>
+          <a:fontRef idx="minor">
+            <a:schemeClr val="lt1"/>
+          </a:fontRef>
+        </p:style>
+        <p:txBody>
+          <a:bodyPr rtlCol="0" anchor="ctr" wrap="square"/>
+          <a:lstStyle/>
+          <a:p>
+            <a:pPr algn="ctr"/>
+            <a:r>
+              <a:rPr sz="1300" b="1" i="0">
+                <a:solidFill>
+                  <a:srgbClr val="FFFFFF"/>
+                </a:solidFill>
+                <a:latin typeface="Calibri"/>
+              </a:rPr>
+              <a:t>Hardware físico</a:t>
+            </a:r>
+          </a:p>
+        </p:txBody>
+      </p:sp>
+      <p:sp>
+        <p:nvSpPr>
+          <p:cNvPr id="15" name="Rounded Rectangle 14"/>
+          <p:cNvSpPr/>
+          <p:nvPr/>
+        </p:nvSpPr>
+        <p:spPr>
+          <a:xfrm>
+            <a:off x="7315200" y="2697480"/>
+            <a:ext cx="3931920" cy="594360"/>
+          </a:xfrm>
+          <a:prstGeom prst="roundRect">
+            <a:avLst>
+              <a:gd name="adj" fmla="val 12000"/>
+            </a:avLst>
+          </a:prstGeom>
+          <a:solidFill>
+            <a:srgbClr val="269CCB"/>
+          </a:solidFill>
+          <a:ln>
+            <a:noFill/>
+          </a:ln>
+        </p:spPr>
+        <p:style>
+          <a:lnRef idx="1">
+            <a:schemeClr val="accent1"/>
+          </a:lnRef>
+          <a:fillRef idx="3">
+            <a:schemeClr val="accent1"/>
+          </a:fillRef>
+          <a:effectRef idx="2">
+            <a:schemeClr val="accent1"/>
+          </a:effectRef>
+          <a:fontRef idx="minor">
+            <a:schemeClr val="lt1"/>
+          </a:fontRef>
+        </p:style>
+        <p:txBody>
+          <a:bodyPr rtlCol="0" anchor="ctr" wrap="square"/>
+          <a:lstStyle/>
+          <a:p>
+            <a:pPr algn="ctr"/>
+            <a:r>
+              <a:rPr sz="1050" b="1" i="0">
+                <a:solidFill>
+                  <a:srgbClr val="FFFFFF"/>
+                </a:solidFill>
+                <a:latin typeface="Calibri"/>
+              </a:rPr>
+              <a:t>SO anfitrión + motor de contenedores (kernel compartido)</a:t>
+            </a:r>
+          </a:p>
+        </p:txBody>
+      </p:sp>
+      <p:sp>
+        <p:nvSpPr>
+          <p:cNvPr id="16" name="Rounded Rectangle 15"/>
+          <p:cNvSpPr/>
+          <p:nvPr/>
+        </p:nvSpPr>
+        <p:spPr>
+          <a:xfrm>
+            <a:off x="7315200" y="3337560"/>
+            <a:ext cx="1874519" cy="640080"/>
+          </a:xfrm>
+          <a:prstGeom prst="roundRect">
+            <a:avLst>
+              <a:gd name="adj" fmla="val 12000"/>
+            </a:avLst>
+          </a:prstGeom>
+          <a:solidFill>
+            <a:srgbClr val="FFD000"/>
+          </a:solidFill>
+          <a:ln>
+            <a:noFill/>
+          </a:ln>
+        </p:spPr>
+        <p:style>
+          <a:lnRef idx="1">
+            <a:schemeClr val="accent1"/>
+          </a:lnRef>
+          <a:fillRef idx="3">
+            <a:schemeClr val="accent1"/>
+          </a:fillRef>
+          <a:effectRef idx="2">
+            <a:schemeClr val="accent1"/>
+          </a:effectRef>
+          <a:fontRef idx="minor">
+            <a:schemeClr val="lt1"/>
+          </a:fontRef>
+        </p:style>
+        <p:txBody>
+          <a:bodyPr rtlCol="0" anchor="ctr" wrap="square"/>
+          <a:lstStyle/>
+          <a:p>
+            <a:pPr algn="ctr"/>
+            <a:r>
+              <a:rPr sz="1100" b="1" i="0">
+                <a:solidFill>
+                  <a:srgbClr val="095292"/>
+                </a:solidFill>
+                <a:latin typeface="Calibri"/>
+              </a:rPr>
+              <a:t>Contenedor A
+(App A)</a:t>
+            </a:r>
+          </a:p>
+        </p:txBody>
+      </p:sp>
+      <p:sp>
+        <p:nvSpPr>
+          <p:cNvPr id="17" name="Rounded Rectangle 16"/>
+          <p:cNvSpPr/>
+          <p:nvPr/>
+        </p:nvSpPr>
+        <p:spPr>
+          <a:xfrm>
+            <a:off x="9372600" y="3337560"/>
+            <a:ext cx="1874519" cy="640080"/>
+          </a:xfrm>
+          <a:prstGeom prst="roundRect">
+            <a:avLst>
+              <a:gd name="adj" fmla="val 12000"/>
+            </a:avLst>
+          </a:prstGeom>
+          <a:solidFill>
+            <a:srgbClr val="FFD000"/>
+          </a:solidFill>
+          <a:ln>
+            <a:noFill/>
+          </a:ln>
+        </p:spPr>
+        <p:style>
+          <a:lnRef idx="1">
+            <a:schemeClr val="accent1"/>
+          </a:lnRef>
+          <a:fillRef idx="3">
+            <a:schemeClr val="accent1"/>
+          </a:fillRef>
+          <a:effectRef idx="2">
+            <a:schemeClr val="accent1"/>
+          </a:effectRef>
+          <a:fontRef idx="minor">
+            <a:schemeClr val="lt1"/>
+          </a:fontRef>
+        </p:style>
+        <p:txBody>
+          <a:bodyPr rtlCol="0" anchor="ctr" wrap="square"/>
+          <a:lstStyle/>
+          <a:p>
+            <a:pPr algn="ctr"/>
+            <a:r>
+              <a:rPr sz="1100" b="1" i="0">
+                <a:solidFill>
+                  <a:srgbClr val="095292"/>
+                </a:solidFill>
+                <a:latin typeface="Calibri"/>
+              </a:rPr>
+              <a:t>Contenedor B
+(App B)</a:t>
+            </a:r>
+          </a:p>
+        </p:txBody>
+      </p:sp>
+      <p:sp>
+        <p:nvSpPr>
+          <p:cNvPr id="18" name="TextBox 17"/>
           <p:cNvSpPr txBox="1"/>
           <p:nvPr/>
         </p:nvSpPr>
         <p:spPr>
           <a:xfrm>
-            <a:off x="6393027" y="1353312"/>
-            <a:ext cx="5204307" cy="365760"/>
-          </a:xfrm>
-          <a:prstGeom prst="rect">
-            <a:avLst/>
-          </a:prstGeom>
-          <a:noFill/>
-        </p:spPr>
-        <p:txBody>
-          <a:bodyPr wrap="square" anchor="ctr"/>
-          <a:lstStyle/>
-          <a:p>
-            <a:pPr algn="ctr"/>
-            <a:r>
-              <a:rPr sz="1600" b="1" i="0">
-                <a:solidFill>
-                  <a:srgbClr val="FFFFFF"/>
-                </a:solidFill>
-                <a:latin typeface="Calibri"/>
-              </a:rPr>
-              <a:t>Contenedor</a:t>
-            </a:r>
-          </a:p>
-        </p:txBody>
-      </p:sp>
-      <p:sp>
-        <p:nvSpPr>
-          <p:cNvPr id="12" name="TextBox 11"/>
-          <p:cNvSpPr txBox="1"/>
-          <p:nvPr/>
-        </p:nvSpPr>
-        <p:spPr>
-          <a:xfrm>
-            <a:off x="6420459" y="1901952"/>
-            <a:ext cx="5158587" cy="4498848"/>
+            <a:off x="457200" y="6263640"/>
+            <a:ext cx="11277295" cy="411480"/>
           </a:xfrm>
           <a:prstGeom prst="rect">
             <a:avLst/>
@@ -13337,119 +13065,21 @@
           </a:bodyPr>
           <a:lstStyle/>
           <a:p>
-            <a:pPr>
-              <a:spcAft>
-                <a:spcPts val="800"/>
-              </a:spcAft>
-            </a:pPr>
-            <a:r>
-              <a:rPr sz="1500" b="0" i="0">
-                <a:solidFill>
-                  <a:srgbClr val="333333"/>
-                </a:solidFill>
-                <a:latin typeface="Calibri"/>
-              </a:rPr>
-              <a:t>–   </a:t>
-            </a:r>
-            <a:r>
-              <a:rPr sz="1500" b="1" i="0">
-                <a:solidFill>
-                  <a:srgbClr val="333333"/>
-                </a:solidFill>
-                <a:latin typeface="Calibri"/>
-              </a:rPr>
-              <a:t>Comparte el kernel</a:t>
-            </a:r>
-            <a:r>
-              <a:rPr sz="1500" b="0" i="0">
-                <a:solidFill>
-                  <a:srgbClr val="333333"/>
-                </a:solidFill>
-                <a:latin typeface="Calibri"/>
-              </a:rPr>
-              <a:t> del anfitrion</a:t>
-            </a:r>
-          </a:p>
-          <a:p>
-            <a:pPr>
-              <a:spcAft>
-                <a:spcPts val="800"/>
-              </a:spcAft>
-            </a:pPr>
-            <a:r>
-              <a:rPr sz="1500" b="0" i="0">
-                <a:solidFill>
-                  <a:srgbClr val="333333"/>
-                </a:solidFill>
-                <a:latin typeface="Calibri"/>
-              </a:rPr>
-              <a:t>–   Empaqueta solo app + dependencias</a:t>
-            </a:r>
-          </a:p>
-          <a:p>
-            <a:pPr>
-              <a:spcAft>
-                <a:spcPts val="800"/>
-              </a:spcAft>
-            </a:pPr>
-            <a:r>
-              <a:rPr sz="1500" b="0" i="0">
-                <a:solidFill>
-                  <a:srgbClr val="333333"/>
-                </a:solidFill>
-                <a:latin typeface="Calibri"/>
-              </a:rPr>
-              <a:t>–   Arranque en </a:t>
-            </a:r>
-            <a:r>
-              <a:rPr sz="1500" b="1" i="0">
-                <a:solidFill>
-                  <a:srgbClr val="333333"/>
-                </a:solidFill>
-                <a:latin typeface="Calibri"/>
-              </a:rPr>
-              <a:t>segundos</a:t>
-            </a:r>
-            <a:r>
-              <a:rPr sz="1500" b="0" i="0">
-                <a:solidFill>
-                  <a:srgbClr val="333333"/>
-                </a:solidFill>
-                <a:latin typeface="Calibri"/>
-              </a:rPr>
-              <a:t>, tamaño en </a:t>
-            </a:r>
-            <a:r>
-              <a:rPr sz="1500" b="1" i="0">
-                <a:solidFill>
-                  <a:srgbClr val="333333"/>
-                </a:solidFill>
-                <a:latin typeface="Calibri"/>
-              </a:rPr>
-              <a:t>MB</a:t>
-            </a:r>
-          </a:p>
-          <a:p>
-            <a:pPr>
-              <a:spcAft>
-                <a:spcPts val="800"/>
-              </a:spcAft>
-            </a:pPr>
-            <a:r>
-              <a:rPr sz="1500" b="0" i="0">
-                <a:solidFill>
-                  <a:srgbClr val="333333"/>
-                </a:solidFill>
-                <a:latin typeface="Calibri"/>
-              </a:rPr>
-              <a:t>–   Util para desplegar el mismo servicio muchas veces</a:t>
-            </a:r>
-          </a:p>
-        </p:txBody>
-      </p:sp>
-      <p:sp>
-        <p:nvSpPr>
-          <p:cNvPr id="13" name="TextBox 12"/>
+            <a:r>
+              <a:rPr sz="1100" b="0" i="1">
+                <a:solidFill>
+                  <a:srgbClr val="666666"/>
+                </a:solidFill>
+                <a:latin typeface="Calibri"/>
+              </a:rPr>
+              <a:t>VM: cada instancia carga un SO completo (aislamiento fuerte, más pesado). Contenedor: comparte el kernel del anfitrión y solo empaqueta app + dependencias (arranca en segundos, pesa MB no GB).</a:t>
+            </a:r>
+          </a:p>
+        </p:txBody>
+      </p:sp>
+      <p:sp>
+        <p:nvSpPr>
+          <p:cNvPr id="19" name="TextBox 18"/>
           <p:cNvSpPr txBox="1"/>
           <p:nvPr/>
         </p:nvSpPr>
@@ -13623,7 +13253,7 @@
                 </a:solidFill>
                 <a:latin typeface="Calibri"/>
               </a:rPr>
-              <a:t>Dockerfile minimo del stub CloudLite</a:t>
+              <a:t>Maquina virtual vs contenedor — que cambia de verdad</a:t>
             </a:r>
           </a:p>
         </p:txBody>
@@ -13637,7 +13267,7 @@
         <p:spPr>
           <a:xfrm>
             <a:off x="457200" y="1261872"/>
-            <a:ext cx="11277295" cy="4773168"/>
+            <a:ext cx="5478627" cy="5093208"/>
           </a:xfrm>
           <a:prstGeom prst="roundRect">
             <a:avLst>
@@ -13645,7 +13275,7 @@
             </a:avLst>
           </a:prstGeom>
           <a:solidFill>
-            <a:srgbClr val="1E2A38"/>
+            <a:srgbClr val="FBE4E4"/>
           </a:solidFill>
           <a:ln>
             <a:noFill/>
@@ -13682,7 +13312,276 @@
         <p:spPr>
           <a:xfrm>
             <a:off x="457200" y="1261872"/>
-            <a:ext cx="11277295" cy="320040"/>
+            <a:ext cx="5478627" cy="502920"/>
+          </a:xfrm>
+          <a:prstGeom prst="rect">
+            <a:avLst/>
+          </a:prstGeom>
+          <a:solidFill>
+            <a:srgbClr val="A02030"/>
+          </a:solidFill>
+          <a:ln>
+            <a:noFill/>
+          </a:ln>
+        </p:spPr>
+        <p:style>
+          <a:lnRef idx="1">
+            <a:schemeClr val="accent1"/>
+          </a:lnRef>
+          <a:fillRef idx="3">
+            <a:schemeClr val="accent1"/>
+          </a:fillRef>
+          <a:effectRef idx="2">
+            <a:schemeClr val="accent1"/>
+          </a:effectRef>
+          <a:fontRef idx="minor">
+            <a:schemeClr val="lt1"/>
+          </a:fontRef>
+        </p:style>
+        <p:txBody>
+          <a:bodyPr rtlCol="0" anchor="ctr"/>
+          <a:lstStyle/>
+          <a:p>
+            <a:pPr algn="ctr"/>
+          </a:p>
+        </p:txBody>
+      </p:sp>
+      <p:sp>
+        <p:nvSpPr>
+          <p:cNvPr id="7" name="TextBox 6"/>
+          <p:cNvSpPr txBox="1"/>
+          <p:nvPr/>
+        </p:nvSpPr>
+        <p:spPr>
+          <a:xfrm>
+            <a:off x="594360" y="1353312"/>
+            <a:ext cx="5204307" cy="365760"/>
+          </a:xfrm>
+          <a:prstGeom prst="rect">
+            <a:avLst/>
+          </a:prstGeom>
+          <a:noFill/>
+        </p:spPr>
+        <p:txBody>
+          <a:bodyPr wrap="square" anchor="ctr"/>
+          <a:lstStyle/>
+          <a:p>
+            <a:pPr algn="ctr"/>
+            <a:r>
+              <a:rPr sz="1600" b="1" i="0">
+                <a:solidFill>
+                  <a:srgbClr val="FFFFFF"/>
+                </a:solidFill>
+                <a:latin typeface="Calibri"/>
+              </a:rPr>
+              <a:t>Maquina virtual</a:t>
+            </a:r>
+          </a:p>
+        </p:txBody>
+      </p:sp>
+      <p:sp>
+        <p:nvSpPr>
+          <p:cNvPr id="8" name="TextBox 7"/>
+          <p:cNvSpPr txBox="1"/>
+          <p:nvPr/>
+        </p:nvSpPr>
+        <p:spPr>
+          <a:xfrm>
+            <a:off x="621792" y="1901952"/>
+            <a:ext cx="5158587" cy="4498848"/>
+          </a:xfrm>
+          <a:prstGeom prst="rect">
+            <a:avLst/>
+          </a:prstGeom>
+          <a:noFill/>
+        </p:spPr>
+        <p:txBody>
+          <a:bodyPr wrap="square">
+            <a:spAutoFit/>
+          </a:bodyPr>
+          <a:lstStyle/>
+          <a:p>
+            <a:pPr>
+              <a:spcAft>
+                <a:spcPts val="800"/>
+              </a:spcAft>
+            </a:pPr>
+            <a:r>
+              <a:rPr sz="1500" b="0" i="0">
+                <a:solidFill>
+                  <a:srgbClr val="333333"/>
+                </a:solidFill>
+                <a:latin typeface="Calibri"/>
+              </a:rPr>
+              <a:t>–   Cada instancia trae un </a:t>
+            </a:r>
+            <a:r>
+              <a:rPr sz="1500" b="1" i="0">
+                <a:solidFill>
+                  <a:srgbClr val="333333"/>
+                </a:solidFill>
+                <a:latin typeface="Calibri"/>
+              </a:rPr>
+              <a:t>SO completo</a:t>
+            </a:r>
+            <a:r>
+              <a:rPr sz="1500" b="0" i="0">
+                <a:solidFill>
+                  <a:srgbClr val="333333"/>
+                </a:solidFill>
+                <a:latin typeface="Calibri"/>
+              </a:rPr>
+              <a:t> (kernel propio)</a:t>
+            </a:r>
+          </a:p>
+          <a:p>
+            <a:pPr>
+              <a:spcAft>
+                <a:spcPts val="800"/>
+              </a:spcAft>
+            </a:pPr>
+            <a:r>
+              <a:rPr sz="1500" b="0" i="0">
+                <a:solidFill>
+                  <a:srgbClr val="333333"/>
+                </a:solidFill>
+                <a:latin typeface="Calibri"/>
+              </a:rPr>
+              <a:t>–   Aislamiento fuerte a nivel de hardware virtual</a:t>
+            </a:r>
+          </a:p>
+          <a:p>
+            <a:pPr>
+              <a:spcAft>
+                <a:spcPts val="800"/>
+              </a:spcAft>
+            </a:pPr>
+            <a:r>
+              <a:rPr sz="1500" b="0" i="0">
+                <a:solidFill>
+                  <a:srgbClr val="333333"/>
+                </a:solidFill>
+                <a:latin typeface="Calibri"/>
+              </a:rPr>
+              <a:t>–   Arranque en </a:t>
+            </a:r>
+            <a:r>
+              <a:rPr sz="1500" b="1" i="0">
+                <a:solidFill>
+                  <a:srgbClr val="333333"/>
+                </a:solidFill>
+                <a:latin typeface="Calibri"/>
+              </a:rPr>
+              <a:t>minutos</a:t>
+            </a:r>
+            <a:r>
+              <a:rPr sz="1500" b="0" i="0">
+                <a:solidFill>
+                  <a:srgbClr val="333333"/>
+                </a:solidFill>
+                <a:latin typeface="Calibri"/>
+              </a:rPr>
+              <a:t>, tamaño en </a:t>
+            </a:r>
+            <a:r>
+              <a:rPr sz="1500" b="1" i="0">
+                <a:solidFill>
+                  <a:srgbClr val="333333"/>
+                </a:solidFill>
+                <a:latin typeface="Calibri"/>
+              </a:rPr>
+              <a:t>GB</a:t>
+            </a:r>
+          </a:p>
+          <a:p>
+            <a:pPr>
+              <a:spcAft>
+                <a:spcPts val="800"/>
+              </a:spcAft>
+            </a:pPr>
+            <a:r>
+              <a:rPr sz="1500" b="0" i="0">
+                <a:solidFill>
+                  <a:srgbClr val="333333"/>
+                </a:solidFill>
+                <a:latin typeface="Calibri"/>
+              </a:rPr>
+              <a:t>–   Util cuando se necesitan SO distintos</a:t>
+            </a:r>
+          </a:p>
+          <a:p>
+            <a:pPr>
+              <a:spcAft>
+                <a:spcPts val="800"/>
+              </a:spcAft>
+            </a:pPr>
+            <a:r>
+              <a:rPr sz="1500" b="0" i="0">
+                <a:solidFill>
+                  <a:srgbClr val="333333"/>
+                </a:solidFill>
+                <a:latin typeface="Calibri"/>
+              </a:rPr>
+              <a:t>–   Ej.: un servidor Windows y uno Linux en el mismo host</a:t>
+            </a:r>
+          </a:p>
+        </p:txBody>
+      </p:sp>
+      <p:sp>
+        <p:nvSpPr>
+          <p:cNvPr id="9" name="Rounded Rectangle 8"/>
+          <p:cNvSpPr/>
+          <p:nvPr/>
+        </p:nvSpPr>
+        <p:spPr>
+          <a:xfrm>
+            <a:off x="6255867" y="1261872"/>
+            <a:ext cx="5478627" cy="5093208"/>
+          </a:xfrm>
+          <a:prstGeom prst="roundRect">
+            <a:avLst>
+              <a:gd name="adj" fmla="val 12000"/>
+            </a:avLst>
+          </a:prstGeom>
+          <a:solidFill>
+            <a:srgbClr val="E8F4FA"/>
+          </a:solidFill>
+          <a:ln>
+            <a:noFill/>
+          </a:ln>
+        </p:spPr>
+        <p:style>
+          <a:lnRef idx="1">
+            <a:schemeClr val="accent1"/>
+          </a:lnRef>
+          <a:fillRef idx="3">
+            <a:schemeClr val="accent1"/>
+          </a:fillRef>
+          <a:effectRef idx="2">
+            <a:schemeClr val="accent1"/>
+          </a:effectRef>
+          <a:fontRef idx="minor">
+            <a:schemeClr val="lt1"/>
+          </a:fontRef>
+        </p:style>
+        <p:txBody>
+          <a:bodyPr rtlCol="0" anchor="ctr"/>
+          <a:lstStyle/>
+          <a:p>
+            <a:pPr algn="ctr"/>
+          </a:p>
+        </p:txBody>
+      </p:sp>
+      <p:sp>
+        <p:nvSpPr>
+          <p:cNvPr id="10" name="Rectangle 9"/>
+          <p:cNvSpPr/>
+          <p:nvPr/>
+        </p:nvSpPr>
+        <p:spPr>
+          <a:xfrm>
+            <a:off x="6255867" y="1261872"/>
+            <a:ext cx="5478627" cy="502920"/>
           </a:xfrm>
           <a:prstGeom prst="rect">
             <a:avLst/>
@@ -13718,14 +13617,14 @@
       </p:sp>
       <p:sp>
         <p:nvSpPr>
-          <p:cNvPr id="7" name="TextBox 6"/>
+          <p:cNvPr id="11" name="TextBox 10"/>
           <p:cNvSpPr txBox="1"/>
           <p:nvPr/>
         </p:nvSpPr>
         <p:spPr>
           <a:xfrm>
-            <a:off x="685800" y="1307592"/>
-            <a:ext cx="10820095" cy="256032"/>
+            <a:off x="6393027" y="1353312"/>
+            <a:ext cx="5204307" cy="365760"/>
           </a:xfrm>
           <a:prstGeom prst="rect">
             <a:avLst/>
@@ -13736,28 +13635,29 @@
           <a:bodyPr wrap="square" anchor="ctr"/>
           <a:lstStyle/>
           <a:p>
-            <a:r>
-              <a:rPr sz="1000" b="1" i="0">
-                <a:solidFill>
-                  <a:srgbClr val="269CCB"/>
-                </a:solidFill>
-                <a:latin typeface="Calibri"/>
-              </a:rPr>
-              <a:t>● ● ●</a:t>
-            </a:r>
-          </a:p>
-        </p:txBody>
-      </p:sp>
-      <p:sp>
-        <p:nvSpPr>
-          <p:cNvPr id="8" name="TextBox 7"/>
+            <a:pPr algn="ctr"/>
+            <a:r>
+              <a:rPr sz="1600" b="1" i="0">
+                <a:solidFill>
+                  <a:srgbClr val="FFFFFF"/>
+                </a:solidFill>
+                <a:latin typeface="Calibri"/>
+              </a:rPr>
+              <a:t>Contenedor</a:t>
+            </a:r>
+          </a:p>
+        </p:txBody>
+      </p:sp>
+      <p:sp>
+        <p:nvSpPr>
+          <p:cNvPr id="12" name="TextBox 11"/>
           <p:cNvSpPr txBox="1"/>
           <p:nvPr/>
         </p:nvSpPr>
         <p:spPr>
           <a:xfrm>
-            <a:off x="777240" y="1719072"/>
-            <a:ext cx="10637215" cy="4133087"/>
+            <a:off x="6420459" y="1901952"/>
+            <a:ext cx="5158587" cy="4498848"/>
           </a:xfrm>
           <a:prstGeom prst="rect">
             <a:avLst/>
@@ -13772,267 +13672,133 @@
           <a:p>
             <a:pPr>
               <a:spcAft>
-                <a:spcPts val="400"/>
-              </a:spcAft>
-            </a:pPr>
-            <a:r>
-              <a:rPr sz="1400" b="0" i="0">
-                <a:solidFill>
-                  <a:srgbClr val="FFFFFF"/>
-                </a:solidFill>
-                <a:latin typeface="Calibri"/>
-              </a:rPr>
-              <a:t>FROM node:20-alpine          # base ligera y etiqueta FIJA: nunca latest</a:t>
-            </a:r>
-          </a:p>
-          <a:p>
-            <a:pPr>
-              <a:spcAft>
-                <a:spcPts val="400"/>
-              </a:spcAft>
-            </a:pPr>
-            <a:r>
-              <a:rPr sz="1400" b="0" i="0">
-                <a:solidFill>
-                  <a:srgbClr val="FFFFFF"/>
-                </a:solidFill>
-                <a:latin typeface="Calibri"/>
-              </a:rPr>
-              <a:t>WORKDIR /app</a:t>
-            </a:r>
-          </a:p>
-          <a:p>
-            <a:pPr>
-              <a:spcAft>
-                <a:spcPts val="400"/>
-              </a:spcAft>
-            </a:pPr>
-            <a:r>
-              <a:rPr sz="1400" b="0" i="0">
-                <a:solidFill>
-                  <a:srgbClr val="FFFFFF"/>
-                </a:solidFill>
-                <a:latin typeface="Calibri"/>
-              </a:rPr>
-              <a:t>COPY package*.json ./        # dependencias PRIMERO: cambian poco</a:t>
-            </a:r>
-          </a:p>
-          <a:p>
-            <a:pPr>
-              <a:spcAft>
-                <a:spcPts val="400"/>
-              </a:spcAft>
-            </a:pPr>
-            <a:r>
-              <a:rPr sz="1400" b="0" i="0">
-                <a:solidFill>
-                  <a:srgbClr val="FFFFFF"/>
-                </a:solidFill>
-                <a:latin typeface="Calibri"/>
-              </a:rPr>
-              <a:t>RUN npm ci --omit=dev        # se instalan DENTRO de la imagen</a:t>
-            </a:r>
-          </a:p>
-          <a:p>
-            <a:pPr>
-              <a:spcAft>
-                <a:spcPts val="400"/>
-              </a:spcAft>
-            </a:pPr>
-            <a:r>
-              <a:rPr sz="1400" b="0" i="0">
-                <a:solidFill>
-                  <a:srgbClr val="FFFFFF"/>
-                </a:solidFill>
-                <a:latin typeface="Calibri"/>
-              </a:rPr>
-              <a:t>COPY..                     # el codigo despues: cambia en cada commit</a:t>
-            </a:r>
-          </a:p>
-          <a:p>
-            <a:pPr>
-              <a:spcAft>
-                <a:spcPts val="400"/>
-              </a:spcAft>
-            </a:pPr>
-            <a:r>
-              <a:rPr sz="1400" b="0" i="0">
-                <a:solidFill>
-                  <a:srgbClr val="FFFFFF"/>
-                </a:solidFill>
-                <a:latin typeface="Calibri"/>
-              </a:rPr>
-              <a:t>EXPOSE 8080                  # documenta el puerto; NO lo publica</a:t>
-            </a:r>
-          </a:p>
-          <a:p>
-            <a:pPr>
-              <a:spcAft>
-                <a:spcPts val="400"/>
-              </a:spcAft>
-            </a:pPr>
-            <a:r>
-              <a:rPr sz="1400" b="0" i="0">
-                <a:solidFill>
-                  <a:srgbClr val="FFFFFF"/>
-                </a:solidFill>
-                <a:latin typeface="Calibri"/>
-              </a:rPr>
-              <a:t>CMD ["node", "server.js"]    # UN proceso principal por contenedor</a:t>
-            </a:r>
-          </a:p>
-          <a:p>
-            <a:pPr>
-              <a:spcAft>
-                <a:spcPts val="400"/>
-              </a:spcAft>
-            </a:pPr>
-            <a:r>
-              <a:rPr sz="1400" b="0" i="0">
-                <a:solidFill>
-                  <a:srgbClr val="FFFFFF"/>
-                </a:solidFill>
-                <a:latin typeface="Calibri"/>
-              </a:rPr>
-              <a:t/>
-            </a:r>
-          </a:p>
-          <a:p>
-            <a:pPr>
-              <a:spcAft>
-                <a:spcPts val="400"/>
-              </a:spcAft>
-            </a:pPr>
-            <a:r>
-              <a:rPr sz="1400" b="0" i="0">
-                <a:solidFill>
-                  <a:srgbClr val="FFFFFF"/>
-                </a:solidFill>
-                <a:latin typeface="Calibri"/>
-              </a:rPr>
-              <a:t># .dockerignore  &lt;- archivo aparte, en la misma carpeta que el Dockerfile.</a:t>
-            </a:r>
-          </a:p>
-          <a:p>
-            <a:pPr>
-              <a:spcAft>
-                <a:spcPts val="400"/>
-              </a:spcAft>
-            </a:pPr>
-            <a:r>
-              <a:rPr sz="1400" b="0" i="0">
-                <a:solidFill>
-                  <a:srgbClr val="FFFFFF"/>
-                </a:solidFill>
-                <a:latin typeface="Calibri"/>
-              </a:rPr>
-              <a:t># Sin el, el COPY.. de arriba se lleva el .env a las capas de la imagen.</a:t>
-            </a:r>
-          </a:p>
-          <a:p>
-            <a:pPr>
-              <a:spcAft>
-                <a:spcPts val="400"/>
-              </a:spcAft>
-            </a:pPr>
-            <a:r>
-              <a:rPr sz="1400" b="0" i="0">
-                <a:solidFill>
-                  <a:srgbClr val="FFFFFF"/>
-                </a:solidFill>
-                <a:latin typeface="Calibri"/>
-              </a:rPr>
-              <a:t>node_modules</a:t>
-            </a:r>
-          </a:p>
-          <a:p>
-            <a:pPr>
-              <a:spcAft>
-                <a:spcPts val="400"/>
-              </a:spcAft>
-            </a:pPr>
-            <a:r>
-              <a:rPr sz="1400" b="0" i="0">
-                <a:solidFill>
-                  <a:srgbClr val="FFFFFF"/>
-                </a:solidFill>
-                <a:latin typeface="Calibri"/>
-              </a:rPr>
-              <a:t>.env</a:t>
-            </a:r>
-          </a:p>
-          <a:p>
-            <a:pPr>
-              <a:spcAft>
-                <a:spcPts val="400"/>
-              </a:spcAft>
-            </a:pPr>
-            <a:r>
-              <a:rPr sz="1400" b="0" i="0">
-                <a:solidFill>
-                  <a:srgbClr val="FFFFFF"/>
-                </a:solidFill>
-                <a:latin typeface="Calibri"/>
-              </a:rPr>
-              <a:t>.env.*</a:t>
-            </a:r>
-          </a:p>
-          <a:p>
-            <a:pPr>
-              <a:spcAft>
-                <a:spcPts val="400"/>
-              </a:spcAft>
-            </a:pPr>
-            <a:r>
-              <a:rPr sz="1400" b="0" i="0">
-                <a:solidFill>
-                  <a:srgbClr val="FFFFFF"/>
-                </a:solidFill>
-                <a:latin typeface="Calibri"/>
-              </a:rPr>
-              <a:t>.git</a:t>
-            </a:r>
-          </a:p>
-        </p:txBody>
-      </p:sp>
-      <p:sp>
-        <p:nvSpPr>
-          <p:cNvPr id="9" name="TextBox 8"/>
-          <p:cNvSpPr txBox="1"/>
-          <p:nvPr/>
-        </p:nvSpPr>
-        <p:spPr>
-          <a:xfrm>
-            <a:off x="457200" y="6080760"/>
-            <a:ext cx="11277295" cy="320040"/>
-          </a:xfrm>
-          <a:prstGeom prst="rect">
-            <a:avLst/>
-          </a:prstGeom>
-          <a:noFill/>
-        </p:spPr>
-        <p:txBody>
-          <a:bodyPr wrap="square">
-            <a:spAutoFit/>
-          </a:bodyPr>
-          <a:lstStyle/>
-          <a:p>
-            <a:pPr algn="ctr"/>
-            <a:r>
-              <a:rPr sz="1200" b="0" i="1">
-                <a:solidFill>
-                  <a:srgbClr val="666666"/>
-                </a:solidFill>
-                <a:latin typeface="Calibri"/>
-              </a:rPr>
-              <a:t>EXPOSE, CMD y el «-p» del run llevan el MISMO puerto. Y el «COPY. .» solo es seguro con «.dockerignore» al lado.</a:t>
-            </a:r>
-          </a:p>
-        </p:txBody>
-      </p:sp>
-      <p:sp>
-        <p:nvSpPr>
-          <p:cNvPr id="10" name="TextBox 9"/>
+                <a:spcPts val="800"/>
+              </a:spcAft>
+            </a:pPr>
+            <a:r>
+              <a:rPr sz="1500" b="0" i="0">
+                <a:solidFill>
+                  <a:srgbClr val="333333"/>
+                </a:solidFill>
+                <a:latin typeface="Calibri"/>
+              </a:rPr>
+              <a:t>–   </a:t>
+            </a:r>
+            <a:r>
+              <a:rPr sz="1500" b="1" i="0">
+                <a:solidFill>
+                  <a:srgbClr val="333333"/>
+                </a:solidFill>
+                <a:latin typeface="Calibri"/>
+              </a:rPr>
+              <a:t>Comparte el kernel</a:t>
+            </a:r>
+            <a:r>
+              <a:rPr sz="1500" b="0" i="0">
+                <a:solidFill>
+                  <a:srgbClr val="333333"/>
+                </a:solidFill>
+                <a:latin typeface="Calibri"/>
+              </a:rPr>
+              <a:t> del anfitrion</a:t>
+            </a:r>
+          </a:p>
+          <a:p>
+            <a:pPr>
+              <a:spcAft>
+                <a:spcPts val="800"/>
+              </a:spcAft>
+            </a:pPr>
+            <a:r>
+              <a:rPr sz="1500" b="0" i="0">
+                <a:solidFill>
+                  <a:srgbClr val="333333"/>
+                </a:solidFill>
+                <a:latin typeface="Calibri"/>
+              </a:rPr>
+              <a:t>–   Empaqueta solo app + dependencias</a:t>
+            </a:r>
+          </a:p>
+          <a:p>
+            <a:pPr>
+              <a:spcAft>
+                <a:spcPts val="800"/>
+              </a:spcAft>
+            </a:pPr>
+            <a:r>
+              <a:rPr sz="1500" b="0" i="0">
+                <a:solidFill>
+                  <a:srgbClr val="333333"/>
+                </a:solidFill>
+                <a:latin typeface="Calibri"/>
+              </a:rPr>
+              <a:t>–   Arranque en </a:t>
+            </a:r>
+            <a:r>
+              <a:rPr sz="1500" b="1" i="0">
+                <a:solidFill>
+                  <a:srgbClr val="333333"/>
+                </a:solidFill>
+                <a:latin typeface="Calibri"/>
+              </a:rPr>
+              <a:t>segundos</a:t>
+            </a:r>
+            <a:r>
+              <a:rPr sz="1500" b="0" i="0">
+                <a:solidFill>
+                  <a:srgbClr val="333333"/>
+                </a:solidFill>
+                <a:latin typeface="Calibri"/>
+              </a:rPr>
+              <a:t>, tamaño en </a:t>
+            </a:r>
+            <a:r>
+              <a:rPr sz="1500" b="1" i="0">
+                <a:solidFill>
+                  <a:srgbClr val="333333"/>
+                </a:solidFill>
+                <a:latin typeface="Calibri"/>
+              </a:rPr>
+              <a:t>MB</a:t>
+            </a:r>
+          </a:p>
+          <a:p>
+            <a:pPr>
+              <a:spcAft>
+                <a:spcPts val="800"/>
+              </a:spcAft>
+            </a:pPr>
+            <a:r>
+              <a:rPr sz="1500" b="0" i="0">
+                <a:solidFill>
+                  <a:srgbClr val="333333"/>
+                </a:solidFill>
+                <a:latin typeface="Calibri"/>
+              </a:rPr>
+              <a:t>–   Util para desplegar el mismo servicio muchas veces</a:t>
+            </a:r>
+          </a:p>
+          <a:p>
+            <a:pPr>
+              <a:spcAft>
+                <a:spcPts val="800"/>
+              </a:spcAft>
+            </a:pPr>
+            <a:r>
+              <a:rPr sz="1500" b="0" i="0">
+                <a:solidFill>
+                  <a:srgbClr val="333333"/>
+                </a:solidFill>
+                <a:latin typeface="Calibri"/>
+              </a:rPr>
+              <a:t>–   Ej.: el stub de CloudLite, replicado detras del balanceador</a:t>
+            </a:r>
+          </a:p>
+        </p:txBody>
+      </p:sp>
+      <p:sp>
+        <p:nvSpPr>
+          <p:cNvPr id="13" name="TextBox 12"/>
           <p:cNvSpPr txBox="1"/>
           <p:nvPr/>
         </p:nvSpPr>
@@ -14100,6 +13866,589 @@
         <p:spPr>
           <a:xfrm>
             <a:off x="0" y="0"/>
+            <a:ext cx="12191695" cy="960120"/>
+          </a:xfrm>
+          <a:prstGeom prst="rect">
+            <a:avLst/>
+          </a:prstGeom>
+          <a:solidFill>
+            <a:srgbClr val="095292"/>
+          </a:solidFill>
+          <a:ln>
+            <a:noFill/>
+          </a:ln>
+        </p:spPr>
+        <p:style>
+          <a:lnRef idx="1">
+            <a:schemeClr val="accent1"/>
+          </a:lnRef>
+          <a:fillRef idx="3">
+            <a:schemeClr val="accent1"/>
+          </a:fillRef>
+          <a:effectRef idx="2">
+            <a:schemeClr val="accent1"/>
+          </a:effectRef>
+          <a:fontRef idx="minor">
+            <a:schemeClr val="lt1"/>
+          </a:fontRef>
+        </p:style>
+        <p:txBody>
+          <a:bodyPr rtlCol="0" anchor="ctr"/>
+          <a:lstStyle/>
+          <a:p>
+            <a:pPr algn="ctr"/>
+          </a:p>
+        </p:txBody>
+      </p:sp>
+      <p:sp>
+        <p:nvSpPr>
+          <p:cNvPr id="3" name="Rectangle 2"/>
+          <p:cNvSpPr/>
+          <p:nvPr/>
+        </p:nvSpPr>
+        <p:spPr>
+          <a:xfrm>
+            <a:off x="0" y="960120"/>
+            <a:ext cx="12191695" cy="41148"/>
+          </a:xfrm>
+          <a:prstGeom prst="rect">
+            <a:avLst/>
+          </a:prstGeom>
+          <a:solidFill>
+            <a:srgbClr val="FFD000"/>
+          </a:solidFill>
+          <a:ln>
+            <a:noFill/>
+          </a:ln>
+        </p:spPr>
+        <p:style>
+          <a:lnRef idx="1">
+            <a:schemeClr val="accent1"/>
+          </a:lnRef>
+          <a:fillRef idx="3">
+            <a:schemeClr val="accent1"/>
+          </a:fillRef>
+          <a:effectRef idx="2">
+            <a:schemeClr val="accent1"/>
+          </a:effectRef>
+          <a:fontRef idx="minor">
+            <a:schemeClr val="lt1"/>
+          </a:fontRef>
+        </p:style>
+        <p:txBody>
+          <a:bodyPr rtlCol="0" anchor="ctr"/>
+          <a:lstStyle/>
+          <a:p>
+            <a:pPr algn="ctr"/>
+          </a:p>
+        </p:txBody>
+      </p:sp>
+      <p:sp>
+        <p:nvSpPr>
+          <p:cNvPr id="4" name="TextBox 3"/>
+          <p:cNvSpPr txBox="1"/>
+          <p:nvPr/>
+        </p:nvSpPr>
+        <p:spPr>
+          <a:xfrm>
+            <a:off x="457200" y="164592"/>
+            <a:ext cx="11277295" cy="502920"/>
+          </a:xfrm>
+          <a:prstGeom prst="rect">
+            <a:avLst/>
+          </a:prstGeom>
+          <a:noFill/>
+        </p:spPr>
+        <p:txBody>
+          <a:bodyPr wrap="square">
+            <a:spAutoFit/>
+          </a:bodyPr>
+          <a:lstStyle/>
+          <a:p>
+            <a:r>
+              <a:rPr sz="2600" b="1" i="0">
+                <a:solidFill>
+                  <a:srgbClr val="FFFFFF"/>
+                </a:solidFill>
+                <a:latin typeface="Calibri"/>
+              </a:rPr>
+              <a:t>Dockerfile minimo del stub CloudLite</a:t>
+            </a:r>
+          </a:p>
+        </p:txBody>
+      </p:sp>
+      <p:sp>
+        <p:nvSpPr>
+          <p:cNvPr id="5" name="Rounded Rectangle 4"/>
+          <p:cNvSpPr/>
+          <p:nvPr/>
+        </p:nvSpPr>
+        <p:spPr>
+          <a:xfrm>
+            <a:off x="457200" y="1261872"/>
+            <a:ext cx="11277295" cy="4773168"/>
+          </a:xfrm>
+          <a:prstGeom prst="roundRect">
+            <a:avLst>
+              <a:gd name="adj" fmla="val 12000"/>
+            </a:avLst>
+          </a:prstGeom>
+          <a:solidFill>
+            <a:srgbClr val="1E2A38"/>
+          </a:solidFill>
+          <a:ln>
+            <a:noFill/>
+          </a:ln>
+        </p:spPr>
+        <p:style>
+          <a:lnRef idx="1">
+            <a:schemeClr val="accent1"/>
+          </a:lnRef>
+          <a:fillRef idx="3">
+            <a:schemeClr val="accent1"/>
+          </a:fillRef>
+          <a:effectRef idx="2">
+            <a:schemeClr val="accent1"/>
+          </a:effectRef>
+          <a:fontRef idx="minor">
+            <a:schemeClr val="lt1"/>
+          </a:fontRef>
+        </p:style>
+        <p:txBody>
+          <a:bodyPr rtlCol="0" anchor="ctr"/>
+          <a:lstStyle/>
+          <a:p>
+            <a:pPr algn="ctr"/>
+          </a:p>
+        </p:txBody>
+      </p:sp>
+      <p:sp>
+        <p:nvSpPr>
+          <p:cNvPr id="6" name="Rectangle 5"/>
+          <p:cNvSpPr/>
+          <p:nvPr/>
+        </p:nvSpPr>
+        <p:spPr>
+          <a:xfrm>
+            <a:off x="457200" y="1261872"/>
+            <a:ext cx="11277295" cy="320040"/>
+          </a:xfrm>
+          <a:prstGeom prst="rect">
+            <a:avLst/>
+          </a:prstGeom>
+          <a:solidFill>
+            <a:srgbClr val="095292"/>
+          </a:solidFill>
+          <a:ln>
+            <a:noFill/>
+          </a:ln>
+        </p:spPr>
+        <p:style>
+          <a:lnRef idx="1">
+            <a:schemeClr val="accent1"/>
+          </a:lnRef>
+          <a:fillRef idx="3">
+            <a:schemeClr val="accent1"/>
+          </a:fillRef>
+          <a:effectRef idx="2">
+            <a:schemeClr val="accent1"/>
+          </a:effectRef>
+          <a:fontRef idx="minor">
+            <a:schemeClr val="lt1"/>
+          </a:fontRef>
+        </p:style>
+        <p:txBody>
+          <a:bodyPr rtlCol="0" anchor="ctr"/>
+          <a:lstStyle/>
+          <a:p>
+            <a:pPr algn="ctr"/>
+          </a:p>
+        </p:txBody>
+      </p:sp>
+      <p:sp>
+        <p:nvSpPr>
+          <p:cNvPr id="7" name="TextBox 6"/>
+          <p:cNvSpPr txBox="1"/>
+          <p:nvPr/>
+        </p:nvSpPr>
+        <p:spPr>
+          <a:xfrm>
+            <a:off x="685800" y="1307592"/>
+            <a:ext cx="10820095" cy="256032"/>
+          </a:xfrm>
+          <a:prstGeom prst="rect">
+            <a:avLst/>
+          </a:prstGeom>
+          <a:noFill/>
+        </p:spPr>
+        <p:txBody>
+          <a:bodyPr wrap="square" anchor="ctr"/>
+          <a:lstStyle/>
+          <a:p>
+            <a:r>
+              <a:rPr sz="1000" b="1" i="0">
+                <a:solidFill>
+                  <a:srgbClr val="269CCB"/>
+                </a:solidFill>
+                <a:latin typeface="Calibri"/>
+              </a:rPr>
+              <a:t>● ● ●</a:t>
+            </a:r>
+          </a:p>
+        </p:txBody>
+      </p:sp>
+      <p:sp>
+        <p:nvSpPr>
+          <p:cNvPr id="8" name="TextBox 7"/>
+          <p:cNvSpPr txBox="1"/>
+          <p:nvPr/>
+        </p:nvSpPr>
+        <p:spPr>
+          <a:xfrm>
+            <a:off x="777240" y="1719072"/>
+            <a:ext cx="10637215" cy="4133087"/>
+          </a:xfrm>
+          <a:prstGeom prst="rect">
+            <a:avLst/>
+          </a:prstGeom>
+          <a:noFill/>
+        </p:spPr>
+        <p:txBody>
+          <a:bodyPr wrap="square">
+            <a:spAutoFit/>
+          </a:bodyPr>
+          <a:lstStyle/>
+          <a:p>
+            <a:pPr>
+              <a:spcAft>
+                <a:spcPts val="400"/>
+              </a:spcAft>
+            </a:pPr>
+            <a:r>
+              <a:rPr sz="1400" b="0" i="0">
+                <a:solidFill>
+                  <a:srgbClr val="FFFFFF"/>
+                </a:solidFill>
+                <a:latin typeface="Calibri"/>
+              </a:rPr>
+              <a:t>FROM node:20-alpine          # base ligera y etiqueta FIJA: nunca latest</a:t>
+            </a:r>
+          </a:p>
+          <a:p>
+            <a:pPr>
+              <a:spcAft>
+                <a:spcPts val="400"/>
+              </a:spcAft>
+            </a:pPr>
+            <a:r>
+              <a:rPr sz="1400" b="0" i="0">
+                <a:solidFill>
+                  <a:srgbClr val="FFFFFF"/>
+                </a:solidFill>
+                <a:latin typeface="Calibri"/>
+              </a:rPr>
+              <a:t>WORKDIR /app</a:t>
+            </a:r>
+          </a:p>
+          <a:p>
+            <a:pPr>
+              <a:spcAft>
+                <a:spcPts val="400"/>
+              </a:spcAft>
+            </a:pPr>
+            <a:r>
+              <a:rPr sz="1400" b="0" i="0">
+                <a:solidFill>
+                  <a:srgbClr val="FFFFFF"/>
+                </a:solidFill>
+                <a:latin typeface="Calibri"/>
+              </a:rPr>
+              <a:t>COPY package*.json ./        # dependencias PRIMERO: cambian poco</a:t>
+            </a:r>
+          </a:p>
+          <a:p>
+            <a:pPr>
+              <a:spcAft>
+                <a:spcPts val="400"/>
+              </a:spcAft>
+            </a:pPr>
+            <a:r>
+              <a:rPr sz="1400" b="0" i="0">
+                <a:solidFill>
+                  <a:srgbClr val="FFFFFF"/>
+                </a:solidFill>
+                <a:latin typeface="Calibri"/>
+              </a:rPr>
+              <a:t>RUN npm ci --omit=dev        # se instalan DENTRO de la imagen</a:t>
+            </a:r>
+          </a:p>
+          <a:p>
+            <a:pPr>
+              <a:spcAft>
+                <a:spcPts val="400"/>
+              </a:spcAft>
+            </a:pPr>
+            <a:r>
+              <a:rPr sz="1400" b="0" i="0">
+                <a:solidFill>
+                  <a:srgbClr val="FFFFFF"/>
+                </a:solidFill>
+                <a:latin typeface="Calibri"/>
+              </a:rPr>
+              <a:t>COPY..                     # el codigo despues: cambia en cada commit</a:t>
+            </a:r>
+          </a:p>
+          <a:p>
+            <a:pPr>
+              <a:spcAft>
+                <a:spcPts val="400"/>
+              </a:spcAft>
+            </a:pPr>
+            <a:r>
+              <a:rPr sz="1400" b="0" i="0">
+                <a:solidFill>
+                  <a:srgbClr val="FFFFFF"/>
+                </a:solidFill>
+                <a:latin typeface="Calibri"/>
+              </a:rPr>
+              <a:t>EXPOSE 8080                  # documenta el puerto; NO lo publica</a:t>
+            </a:r>
+          </a:p>
+          <a:p>
+            <a:pPr>
+              <a:spcAft>
+                <a:spcPts val="400"/>
+              </a:spcAft>
+            </a:pPr>
+            <a:r>
+              <a:rPr sz="1400" b="0" i="0">
+                <a:solidFill>
+                  <a:srgbClr val="FFFFFF"/>
+                </a:solidFill>
+                <a:latin typeface="Calibri"/>
+              </a:rPr>
+              <a:t>CMD ["node", "server.js"]    # UN proceso principal por contenedor</a:t>
+            </a:r>
+          </a:p>
+          <a:p>
+            <a:pPr>
+              <a:spcAft>
+                <a:spcPts val="400"/>
+              </a:spcAft>
+            </a:pPr>
+            <a:r>
+              <a:rPr sz="1400" b="0" i="0">
+                <a:solidFill>
+                  <a:srgbClr val="FFFFFF"/>
+                </a:solidFill>
+                <a:latin typeface="Calibri"/>
+              </a:rPr>
+              <a:t/>
+            </a:r>
+          </a:p>
+          <a:p>
+            <a:pPr>
+              <a:spcAft>
+                <a:spcPts val="400"/>
+              </a:spcAft>
+            </a:pPr>
+            <a:r>
+              <a:rPr sz="1400" b="0" i="0">
+                <a:solidFill>
+                  <a:srgbClr val="FFFFFF"/>
+                </a:solidFill>
+                <a:latin typeface="Calibri"/>
+              </a:rPr>
+              <a:t># .dockerignore  &lt;- archivo aparte, en la misma carpeta que el Dockerfile.</a:t>
+            </a:r>
+          </a:p>
+          <a:p>
+            <a:pPr>
+              <a:spcAft>
+                <a:spcPts val="400"/>
+              </a:spcAft>
+            </a:pPr>
+            <a:r>
+              <a:rPr sz="1400" b="0" i="0">
+                <a:solidFill>
+                  <a:srgbClr val="FFFFFF"/>
+                </a:solidFill>
+                <a:latin typeface="Calibri"/>
+              </a:rPr>
+              <a:t># Sin el, el COPY.. de arriba se lleva el .env a las capas de la imagen.</a:t>
+            </a:r>
+          </a:p>
+          <a:p>
+            <a:pPr>
+              <a:spcAft>
+                <a:spcPts val="400"/>
+              </a:spcAft>
+            </a:pPr>
+            <a:r>
+              <a:rPr sz="1400" b="0" i="0">
+                <a:solidFill>
+                  <a:srgbClr val="FFFFFF"/>
+                </a:solidFill>
+                <a:latin typeface="Calibri"/>
+              </a:rPr>
+              <a:t>node_modules</a:t>
+            </a:r>
+          </a:p>
+          <a:p>
+            <a:pPr>
+              <a:spcAft>
+                <a:spcPts val="400"/>
+              </a:spcAft>
+            </a:pPr>
+            <a:r>
+              <a:rPr sz="1400" b="0" i="0">
+                <a:solidFill>
+                  <a:srgbClr val="FFFFFF"/>
+                </a:solidFill>
+                <a:latin typeface="Calibri"/>
+              </a:rPr>
+              <a:t>.env</a:t>
+            </a:r>
+          </a:p>
+          <a:p>
+            <a:pPr>
+              <a:spcAft>
+                <a:spcPts val="400"/>
+              </a:spcAft>
+            </a:pPr>
+            <a:r>
+              <a:rPr sz="1400" b="0" i="0">
+                <a:solidFill>
+                  <a:srgbClr val="FFFFFF"/>
+                </a:solidFill>
+                <a:latin typeface="Calibri"/>
+              </a:rPr>
+              <a:t>.env.*</a:t>
+            </a:r>
+          </a:p>
+          <a:p>
+            <a:pPr>
+              <a:spcAft>
+                <a:spcPts val="400"/>
+              </a:spcAft>
+            </a:pPr>
+            <a:r>
+              <a:rPr sz="1400" b="0" i="0">
+                <a:solidFill>
+                  <a:srgbClr val="FFFFFF"/>
+                </a:solidFill>
+                <a:latin typeface="Calibri"/>
+              </a:rPr>
+              <a:t>.git</a:t>
+            </a:r>
+          </a:p>
+        </p:txBody>
+      </p:sp>
+      <p:sp>
+        <p:nvSpPr>
+          <p:cNvPr id="9" name="TextBox 8"/>
+          <p:cNvSpPr txBox="1"/>
+          <p:nvPr/>
+        </p:nvSpPr>
+        <p:spPr>
+          <a:xfrm>
+            <a:off x="457200" y="6080760"/>
+            <a:ext cx="11277295" cy="320040"/>
+          </a:xfrm>
+          <a:prstGeom prst="rect">
+            <a:avLst/>
+          </a:prstGeom>
+          <a:noFill/>
+        </p:spPr>
+        <p:txBody>
+          <a:bodyPr wrap="square">
+            <a:spAutoFit/>
+          </a:bodyPr>
+          <a:lstStyle/>
+          <a:p>
+            <a:pPr algn="ctr"/>
+            <a:r>
+              <a:rPr sz="1200" b="0" i="1">
+                <a:solidFill>
+                  <a:srgbClr val="666666"/>
+                </a:solidFill>
+                <a:latin typeface="Calibri"/>
+              </a:rPr>
+              <a:t>EXPOSE, CMD y el «-p» del run llevan el MISMO puerto. Y el «COPY. .» solo es seguro con «.dockerignore» al lado.</a:t>
+            </a:r>
+          </a:p>
+        </p:txBody>
+      </p:sp>
+      <p:sp>
+        <p:nvSpPr>
+          <p:cNvPr id="10" name="TextBox 9"/>
+          <p:cNvSpPr txBox="1"/>
+          <p:nvPr/>
+        </p:nvSpPr>
+        <p:spPr>
+          <a:xfrm>
+            <a:off x="11185855" y="6473952"/>
+            <a:ext cx="640080" cy="274320"/>
+          </a:xfrm>
+          <a:prstGeom prst="rect">
+            <a:avLst/>
+          </a:prstGeom>
+          <a:noFill/>
+        </p:spPr>
+        <p:txBody>
+          <a:bodyPr wrap="square">
+            <a:spAutoFit/>
+          </a:bodyPr>
+          <a:lstStyle/>
+          <a:p>
+            <a:pPr algn="r"/>
+            <a:r>
+              <a:rPr sz="1100" b="0" i="0">
+                <a:solidFill>
+                  <a:srgbClr val="666666"/>
+                </a:solidFill>
+                <a:latin typeface="Calibri"/>
+              </a:rPr>
+              <a:t>34</a:t>
+            </a:r>
+          </a:p>
+        </p:txBody>
+      </p:sp>
+    </p:spTree>
+  </p:cSld>
+  <p:clrMapOvr>
+    <a:masterClrMapping/>
+  </p:clrMapOvr>
+</p:sld>
+</file>
+
+<file path=ppt/slides/slide35.xml><?xml version="1.0" encoding="utf-8"?>
+<p:sld xmlns:a="http://schemas.openxmlformats.org/drawingml/2006/main" xmlns:p="http://schemas.openxmlformats.org/presentationml/2006/main" xmlns:r="http://schemas.openxmlformats.org/officeDocument/2006/relationships">
+  <p:cSld>
+    <p:bg>
+      <p:bgPr>
+        <a:solidFill>
+          <a:srgbClr val="FFFFFF"/>
+        </a:solidFill>
+        <a:effectLst/>
+      </p:bgPr>
+    </p:bg>
+    <p:spTree>
+      <p:nvGrpSpPr>
+        <p:cNvPr id="1" name=""/>
+        <p:cNvGrpSpPr/>
+        <p:nvPr/>
+      </p:nvGrpSpPr>
+      <p:grpSpPr/>
+      <p:sp>
+        <p:nvSpPr>
+          <p:cNvPr id="2" name="Rectangle 1"/>
+          <p:cNvSpPr/>
+          <p:nvPr/>
+        </p:nvSpPr>
+        <p:spPr>
+          <a:xfrm>
+            <a:off x="0" y="0"/>
             <a:ext cx="12191695" cy="164592"/>
           </a:xfrm>
           <a:prstGeom prst="rect">
@@ -14546,6 +14895,22 @@
               <a:t> servicio (API stub o front estático).</a:t>
             </a:r>
           </a:p>
+          <a:p>
+            <a:pPr>
+              <a:spcAft>
+                <a:spcPts val="800"/>
+              </a:spcAft>
+            </a:pPr>
+            <a:r>
+              <a:rPr sz="2000" b="0" i="0">
+                <a:solidFill>
+                  <a:srgbClr val="333333"/>
+                </a:solidFill>
+                <a:latin typeface="Calibri"/>
+              </a:rPr>
+              <a:t>–   Error común: creer que el contenedor «no tiene sistema operativo»: usa el kernel del anfitrión, por eso una imagen Linux necesita un kernel Linux debajo.</a:t>
+            </a:r>
+          </a:p>
         </p:txBody>
       </p:sp>
       <p:sp>
@@ -16024,7 +16389,7 @@
                 </a:solidFill>
                 <a:latin typeface="Calibri"/>
               </a:rPr>
-              <a:t>De donde viene la clase y que se entrega hoy</a:t>
+              <a:t>De donde viene la clase: virtualizacion y contenedores (1/2)</a:t>
             </a:r>
           </a:p>
         </p:txBody>
@@ -16080,6 +16445,38 @@
                 <a:latin typeface="Calibri"/>
               </a:rPr>
               <a:t>–   Es la primera clase francamente tecnica del curso y la primera en la que el estudiante escribe algo que una maquina ejecuta.</a:t>
+            </a:r>
+          </a:p>
+          <a:p>
+            <a:pPr>
+              <a:spcAft>
+                <a:spcPts val="800"/>
+              </a:spcAft>
+            </a:pPr>
+            <a:r>
+              <a:rPr sz="2000" b="0" i="0">
+                <a:solidFill>
+                  <a:srgbClr val="333333"/>
+                </a:solidFill>
+                <a:latin typeface="Calibri"/>
+              </a:rPr>
+              <a:t>–   La virtualizacion es la tecnica que permite ejecutar varias maquinas logicas sobre un mismo hardware fisico, y el hipervisor es el software que la hace posible.</a:t>
+            </a:r>
+          </a:p>
+          <a:p>
+            <a:pPr>
+              <a:spcAft>
+                <a:spcPts val="800"/>
+              </a:spcAft>
+            </a:pPr>
+            <a:r>
+              <a:rPr sz="2000" b="0" i="0">
+                <a:solidFill>
+                  <a:srgbClr val="333333"/>
+                </a:solidFill>
+                <a:latin typeface="Calibri"/>
+              </a:rPr>
+              <a:t>–   Un contenedor es un proceso aislado que comparte el kernel del anfitrion: no trae sistema operativo propio.</a:t>
             </a:r>
           </a:p>
         </p:txBody>
@@ -16260,7 +16657,7 @@
                 </a:solidFill>
                 <a:latin typeface="Calibri"/>
               </a:rPr>
-              <a:t>Antes de la virtualizacion: un servidor por aplicacion</a:t>
+              <a:t>De donde viene la clase: virtualizacion y contenedores (2/2)</a:t>
             </a:r>
           </a:p>
         </p:txBody>
@@ -16299,7 +16696,7 @@
                 </a:solidFill>
                 <a:latin typeface="Calibri"/>
               </a:rPr>
-              <a:t>–   Antes de la virtualizacion, cada aplicacion importante vivia en su propio servidor fisico, por una razon sencilla: si dos aplicaciones compartian maquina, una podia tumbar a la otra.</a:t>
+              <a:t>–   Las dos tecnicas resuelven el mismo problema, aprovechar mejor un servidor, con costos distintos: la maquina virtual aisla mas y pesa gigabytes; el contenedor arranca en segundos y pesa megabytes.</a:t>
             </a:r>
           </a:p>
           <a:p>
@@ -16315,7 +16712,7 @@
                 </a:solidFill>
                 <a:latin typeface="Calibri"/>
               </a:rPr>
-              <a:t>–   El resultado era un desperdicio enorme, con servidores trabajando tipicamente entre el 5 % y el 15 % de su capacidad la mayor parte del tiempo.</a:t>
+              <a:t>–   En CloudLite el stub de la API se empaqueta como contenedor porque es un solo servicio que se despliega muchas veces.</a:t>
             </a:r>
           </a:p>
           <a:p>
@@ -16331,23 +16728,7 @@
                 </a:solidFill>
                 <a:latin typeface="Calibri"/>
               </a:rPr>
-              <a:t>–   Cada una de esas maquinas se llama maquina virtual y contiene un sistema operativo entero, kernel incluido, donde kernel es el nucleo del sistema operativo, la parte que administra memoria, procesos y acceso al hardware.</a:t>
-            </a:r>
-          </a:p>
-          <a:p>
-            <a:pPr>
-              <a:spcAft>
-                <a:spcPts val="800"/>
-              </a:spcAft>
-            </a:pPr>
-            <a:r>
-              <a:rPr sz="2000" b="0" i="0">
-                <a:solidFill>
-                  <a:srgbClr val="333333"/>
-                </a:solidFill>
-                <a:latin typeface="Calibri"/>
-              </a:rPr>
-              <a:t>–   En contraparte, su aislamiento es fuerte, ya que dos maquinas virtuales no comparten kernel y un problema en el nucleo de una no alcanza a la otra.</a:t>
+              <a:t>–   Un error comun es tratar el contenedor como una maquina virtual pequena, entrando a configurarlo a mano: un contenedor se reconstruye desde su imagen, no se repara por dentro.</a:t>
             </a:r>
           </a:p>
         </p:txBody>

--- a/Arquitectura de Sistemas Computacionales/Clases/Clase 3 - Virtualizacion y contenedores/Presentacion.pptx
+++ b/Arquitectura de Sistemas Computacionales/Clases/Clase 3 - Virtualizacion y contenedores/Presentacion.pptx
@@ -4431,7 +4431,7 @@
                 </a:solidFill>
                 <a:latin typeface="Calibri"/>
               </a:rPr>
-              <a:t>Lab Killercoda → stub CloudLite</a:t>
+              <a:t>Lab Killercoda → stub de la app</a:t>
             </a:r>
           </a:p>
         </p:txBody>
@@ -4522,7 +4522,7 @@
                 </a:solidFill>
                 <a:latin typeface="Calibri"/>
               </a:rPr>
-              <a:t>Conceptos del tema, ejemplos resueltos sobre CloudLite y cierre conceptual.</a:t>
+              <a:t>Conceptos del tema, ejemplos resueltos sobre la app y cierre conceptual.</a:t>
             </a:r>
           </a:p>
         </p:txBody>
@@ -6563,7 +6563,7 @@
                 </a:solidFill>
                 <a:latin typeface="Calibri"/>
               </a:rPr>
-              <a:t>Primer ejemplo: el stub de la API de CloudLite (1/2)</a:t>
+              <a:t>Primer ejemplo: el stub de la API de la app (1/2)</a:t>
             </a:r>
           </a:p>
         </p:txBody>
@@ -6602,7 +6602,7 @@
                 </a:solidFill>
                 <a:latin typeface="Calibri"/>
               </a:rPr>
-              <a:t>–   En CloudLite Turnos el estudiante contenerizara un stub de su API, es decir una version minima que responde algo verificable: el endpoint GET /health, que devuelve un cuerpo en formato JSON con al menos un campo que se pueda comprobar.</a:t>
+              <a:t>–   En la app de turnos el estudiante contenerizara un stub de su API, es decir una version minima que responde algo verificable: el endpoint GET /health, que devuelve un cuerpo en formato JSON con al menos un campo que se pueda comprobar.</a:t>
             </a:r>
           </a:p>
           <a:p>
@@ -6847,7 +6847,7 @@
                 </a:solidFill>
                 <a:latin typeface="Calibri"/>
               </a:rPr>
-              <a:t>Primer ejemplo: el stub de la API de CloudLite (2/2)</a:t>
+              <a:t>Primer ejemplo: el stub de la API de la app (2/2)</a:t>
             </a:r>
           </a:p>
         </p:txBody>
@@ -7170,7 +7170,7 @@
                 </a:solidFill>
                 <a:latin typeface="Calibri"/>
               </a:rPr>
-              <a:t>–   El primero es la construccion: docker build -t cloudlite-api:0.1.0.</a:t>
+              <a:t>–   El primero es la construccion: docker build -t turnos-api:0.1.0.</a:t>
             </a:r>
           </a:p>
           <a:p>
@@ -7234,7 +7234,7 @@
                 </a:solidFill>
                 <a:latin typeface="Calibri"/>
               </a:rPr>
-              <a:t>–   El segundo es la ejecucion: docker run -d -p 8081:8080 --name api cloudlite-api:0.1.0.</a:t>
+              <a:t>–   El segundo es la ejecucion: docker run -d -p 8081:8080 --name api turnos-api:0.1.0.</a:t>
             </a:r>
           </a:p>
           <a:p>
@@ -7513,7 +7513,7 @@
                 </a:solidFill>
                 <a:latin typeface="Calibri"/>
               </a:rPr>
-              <a:t> Conceptos del tema, uno por lámina, con ejemplos sobre CloudLite.</a:t>
+              <a:t> Conceptos del tema, uno por lámina, con ejemplos sobre la app.</a:t>
             </a:r>
           </a:p>
           <a:p>
@@ -9521,7 +9521,7 @@
                 </a:solidFill>
                 <a:latin typeface="Calibri"/>
               </a:rPr>
-              <a:t>–   No decirlo cuesta media clase de confusion la semana siguiente, cuando se dibuje el C4 Containers de CloudLite y alguien pregunte si debe dockerizar cada caja del diagrama.</a:t>
+              <a:t>–   No decirlo cuesta media clase de confusion la semana siguiente, cuando se dibuje el C4 Containers de la app y alguien pregunte si debe dockerizar cada caja del diagrama.</a:t>
             </a:r>
           </a:p>
           <a:p>
@@ -10709,7 +10709,7 @@
                 </a:solidFill>
                 <a:latin typeface="Calibri"/>
               </a:rPr>
-              <a:t>$ docker build -t cloudlite-api:0.1.0.</a:t>
+              <a:t>$ docker build -t turnos-api:0.1.0.</a:t>
             </a:r>
           </a:p>
           <a:p>
@@ -10757,7 +10757,7 @@
                 </a:solidFill>
                 <a:latin typeface="Calibri"/>
               </a:rPr>
-              <a:t>$ docker run -d --name cloudlite -p 8080:3000 cloudlite-api:0.1.0</a:t>
+              <a:t>$ docker run -d --name turnos -p 8080:3000 turnos-api:0.1.0</a:t>
             </a:r>
           </a:p>
           <a:p>
@@ -10869,7 +10869,7 @@
                 </a:solidFill>
                 <a:latin typeface="Calibri"/>
               </a:rPr>
-              <a:t>$ docker logs cloudlite --tail 20</a:t>
+              <a:t>$ docker logs turnos --tail 20</a:t>
             </a:r>
           </a:p>
         </p:txBody>
@@ -11155,7 +11155,7 @@
                 </a:solidFill>
                 <a:latin typeface="Calibri"/>
               </a:rPr>
-              <a:t>–   Dejar evidencia PI: Dockerfile del stub CloudLite + ciclo justificado.</a:t>
+              <a:t>–   Dejar evidencia: Dockerfile del stub de la app + ciclo justificado.</a:t>
             </a:r>
           </a:p>
         </p:txBody>
@@ -11511,7 +11511,7 @@
                 </a:solidFill>
                 <a:latin typeface="Calibri"/>
               </a:rPr>
-              <a:t>$ docker images cloudlite-api</a:t>
+              <a:t>$ docker images turnos-api</a:t>
             </a:r>
           </a:p>
           <a:p>
@@ -11543,7 +11543,7 @@
                 </a:solidFill>
                 <a:latin typeface="Calibri"/>
               </a:rPr>
-              <a:t>cloudlite-api   0.1.0   a1b2c3d4e5f6   142MB</a:t>
+              <a:t>turnos-api   0.1.0   a1b2c3d4e5f6   142MB</a:t>
             </a:r>
           </a:p>
           <a:p>
@@ -11607,7 +11607,7 @@
                 </a:solidFill>
                 <a:latin typeface="Calibri"/>
               </a:rPr>
-              <a:t>9f8e7d6c5b4a   cloudlite-api:0.1.0   Up 2 minutes   0.0.0.0:8080-&gt;3000/tcp</a:t>
+              <a:t>9f8e7d6c5b4a   turnos-api:0.1.0   Up 2 minutes   0.0.0.0:8080-&gt;3000/tcp</a:t>
             </a:r>
           </a:p>
           <a:p>
@@ -11655,7 +11655,7 @@
                 </a:solidFill>
                 <a:latin typeface="Calibri"/>
               </a:rPr>
-              <a:t>$ docker run -d -p 8081:3000 cloudlite-api:0.1.0</a:t>
+              <a:t>$ docker run -d -p 8081:3000 turnos-api:0.1.0</a:t>
             </a:r>
           </a:p>
           <a:p>
@@ -11671,7 +11671,7 @@
                 </a:solidFill>
                 <a:latin typeface="Calibri"/>
               </a:rPr>
-              <a:t>$ docker run -d -p 8082:3000 cloudlite-api:0.1.0</a:t>
+              <a:t>$ docker run -d -p 8082:3000 turnos-api:0.1.0</a:t>
             </a:r>
           </a:p>
         </p:txBody>
@@ -12011,7 +12011,7 @@
                 </a:solidFill>
                 <a:latin typeface="Calibri"/>
               </a:rPr>
-              <a:t>$ docker stop cloudlite &amp;&amp; docker rm cloudlite</a:t>
+              <a:t>$ docker stop turnos &amp;&amp; docker rm turnos</a:t>
             </a:r>
           </a:p>
           <a:p>
@@ -12059,7 +12059,7 @@
                 </a:solidFill>
                 <a:latin typeface="Calibri"/>
               </a:rPr>
-              <a:t>$ docker run -d --name c1 cloudlite-api:0.1.0</a:t>
+              <a:t>$ docker run -d --name c1 turnos-api:0.1.0</a:t>
             </a:r>
           </a:p>
           <a:p>
@@ -12107,7 +12107,7 @@
                 </a:solidFill>
                 <a:latin typeface="Calibri"/>
               </a:rPr>
-              <a:t>$ docker run --rm cloudlite-api:0.1.0 cat /tmp/dato.txt</a:t>
+              <a:t>$ docker run --rm turnos-api:0.1.0 cat /tmp/dato.txt</a:t>
             </a:r>
           </a:p>
           <a:p>
@@ -12171,7 +12171,7 @@
                 </a:solidFill>
                 <a:latin typeface="Calibri"/>
               </a:rPr>
-              <a:t>$ docker run -d -v cloudlite_datos:/app/data cloudlite-api:0.1.0</a:t>
+              <a:t>$ docker run -d -v turnos_datos:/app/data turnos-api:0.1.0</a:t>
             </a:r>
           </a:p>
         </p:txBody>
@@ -13791,7 +13791,7 @@
                 </a:solidFill>
                 <a:latin typeface="Calibri"/>
               </a:rPr>
-              <a:t>–   Ej.: el stub de CloudLite, replicado detras del balanceador</a:t>
+              <a:t>–   Ej.: el stub de la app, replicado detras del balanceador</a:t>
             </a:r>
           </a:p>
         </p:txBody>
@@ -13972,7 +13972,7 @@
                 </a:solidFill>
                 <a:latin typeface="Calibri"/>
               </a:rPr>
-              <a:t>Dockerfile minimo del stub CloudLite</a:t>
+              <a:t>Dockerfile minimo del stub de la app</a:t>
             </a:r>
           </a:p>
         </p:txBody>
@@ -14874,7 +14874,7 @@
                 </a:solidFill>
                 <a:latin typeface="Calibri"/>
               </a:rPr>
-              <a:t>–   CloudLite: contenerizamos al menos </a:t>
+              <a:t>–   la app: contenerizamos al menos </a:t>
             </a:r>
             <a:r>
               <a:rPr sz="2000" b="1" i="0">
@@ -15248,7 +15248,7 @@
                 </a:solidFill>
                 <a:latin typeface="Calibri"/>
               </a:rPr>
-              <a:t> carpeta del PI y se pega en el lab, nunca al contrario: lo que se cierra con la sesión del lab se pierde.</a:t>
+              <a:t> carpeta y se pega en el lab, nunca al contrario: lo que se cierra con la sesión del lab se pierde.</a:t>
             </a:r>
           </a:p>
         </p:txBody>
@@ -15930,7 +15930,7 @@
                 </a:solidFill>
                 <a:latin typeface="Calibri"/>
               </a:rPr>
-              <a:t> «docker build -t cloudlite-api:0.1.0 .» — nombre </a:t>
+              <a:t> «docker build -t turnos-api:0.1.0 .» — nombre </a:t>
             </a:r>
             <a:r>
               <a:rPr sz="2000" b="1" i="0">
@@ -15982,7 +15982,7 @@
                 </a:solidFill>
                 <a:latin typeface="Calibri"/>
               </a:rPr>
-              <a:t> «docker run -d -p 8081:8080 --name api cloudlite-api:0.1.0».</a:t>
+              <a:t> «docker run -d -p 8081:8080 --name api turnos-api:0.1.0».</a:t>
             </a:r>
           </a:p>
           <a:p>
@@ -16712,7 +16712,7 @@
                 </a:solidFill>
                 <a:latin typeface="Calibri"/>
               </a:rPr>
-              <a:t>–   En CloudLite el stub de la API se empaqueta como contenedor porque es un solo servicio que se despliega muchas veces.</a:t>
+              <a:t>–   En la app el stub de la API se empaqueta como contenedor porque es un solo servicio que se despliega muchas veces.</a:t>
             </a:r>
           </a:p>
           <a:p>

--- a/Arquitectura de Sistemas Computacionales/Clases/Clase 3 - Virtualizacion y contenedores/Presentacion.pptx
+++ b/Arquitectura de Sistemas Computacionales/Clases/Clase 3 - Virtualizacion y contenedores/Presentacion.pptx
@@ -36,10 +36,6 @@
     <p:sldId id="284" r:id="rId36"/>
     <p:sldId id="285" r:id="rId37"/>
     <p:sldId id="286" r:id="rId38"/>
-    <p:sldId id="287" r:id="rId39"/>
-    <p:sldId id="288" r:id="rId40"/>
-    <p:sldId id="289" r:id="rId41"/>
-    <p:sldId id="290" r:id="rId42"/>
   </p:sldIdLst>
   <p:sldSz cx="12191695" cy="6858000" type="screen4x3"/>
   <p:notesSz cx="6858000" cy="9144000"/>
@@ -542,13 +538,19 @@
           <a:p/>
           <a:p>
             <a:r>
-              <a:t>Conviene decir desde el minuto uno por que esto importa para la arquitectura y no solo para la operacion: el contenedor es la unidad de despliegue con la que se razona en todos los diagramas siguientes, y sin entender que es exactamente, el nivel de contenedores del modelo C4 que se dibuja en la Clase 4 queda en pura metafora.</a:t>
+              <a:t>(No se proyecta) Es la primera clase francamente tecnica del curso y la primera en la que el estudiante escribe algo que una maquina ejecuta.</a:t>
             </a:r>
           </a:p>
           <a:p/>
           <a:p>
             <a:r>
-              <a:t>(Sobre la actividad, no se proyecta) El entregable es un Dockerfile con su ciclo de construccion razonado: se escribe y se justifica, sin depender de ejecutarlo en ningun laboratorio externo para poder entregar.</a:t>
+              <a:t>(No se proyecta) El entregable es un Dockerfile con su ciclo de construccion razonado: se escribe y se justifica, sin depender de ejecutarlo en ningun laboratorio externo para poder entregar.</a:t>
+            </a:r>
+          </a:p>
+          <a:p/>
+          <a:p>
+            <a:r>
+              <a:t>(No se proyecta) Conviene decir desde el minuto uno por que esto importa para la arquitectura y no solo para la operacion: el contenedor es la unidad de despliegue con la que se razona en todos los diagramas siguientes, y sin entender que es exactamente, el nivel de contenedores del modelo C4 que se dibuja en la Clase 4 queda en pura metafora.</a:t>
             </a:r>
           </a:p>
         </p:txBody>
@@ -624,7 +626,7 @@
           <a:p/>
           <a:p>
             <a:r>
-              <a:t>Los ordenes de magnitud que el docente debe poder citar: una maquina virtual ocupa varios gigabytes en disco y tarda entre 30 segundos y unos minutos en arrancar, porque debe iniciar un sistema operativo completo.</a:t>
+              <a:t>(No se proyecta) Los ordenes de magnitud que el docente debe poder citar: una maquina virtual ocupa varios gigabytes en disco y tarda entre 30 segundos y unos minutos en arrancar, porque debe iniciar un sistema operativo completo.</a:t>
             </a:r>
           </a:p>
         </p:txBody>
@@ -694,7 +696,13 @@
           <a:lstStyle/>
           <a:p>
             <a:r>
-              <a:t>Conviene cerrar con lo que el dibujo NO muestra y la seccion anterior si dijo: en la nube las dos pilas se apilan, con los contenedores corriendo DENTRO de maquinas virtuales.</a:t>
+              <a:t>(No se proyecta) Esta diapositiva es la misma comparacion de la seccion anterior, ya dibujada, y conviene recorrerla con el puntero en vez de leerla.</a:t>
+            </a:r>
+          </a:p>
+          <a:p/>
+          <a:p>
+            <a:r>
+              <a:t>(No se proyecta) Conviene cerrar con lo que el dibujo NO muestra y la seccion anterior si dijo: en la nube las dos pilas se apilan, con los contenedores corriendo DENTRO de maquinas virtuales.</a:t>
             </a:r>
           </a:p>
         </p:txBody>
@@ -840,13 +848,13 @@
           <a:lstStyle/>
           <a:p>
             <a:r>
-              <a:t>Cuatro terminos se confunden de forma sistematica y conviene fijarlos con una sola analogia.</a:t>
+              <a:t>De ahi la unica optimizacion que hay que ensenar hoy: copiar primero el archivo de dependencias e instalarlas, y solo despues copiar el codigo fuente, porque el codigo cambia en cada commit y las dependencias casi nunca.</a:t>
             </a:r>
           </a:p>
           <a:p/>
           <a:p>
             <a:r>
-              <a:t>De ahi la unica optimizacion que hay que ensenar hoy: copiar primero el archivo de dependencias e instalarlas, y solo despues copiar el codigo fuente, porque el codigo cambia en cada commit y las dependencias casi nunca.</a:t>
+              <a:t>(No se proyecta) Cuatro terminos se confunden de forma sistematica y conviene fijarlos con una sola analogia.</a:t>
             </a:r>
           </a:p>
         </p:txBody>
@@ -922,43 +930,55 @@
           <a:p/>
           <a:p>
             <a:r>
-              <a:t>Su Dockerfile tiene siete instrucciones, y el docente debe poder explicar cada una.</a:t>
+              <a:t>WORKDIR /app fija el directorio dentro del contenedor donde ocurrira todo lo demas.</a:t>
             </a:r>
           </a:p>
           <a:p/>
           <a:p>
             <a:r>
-              <a:t>WORKDIR /app fija el directorio dentro del contenedor donde ocurrira todo lo demas.</a:t>
+              <a:t>COPY package*.json./ trae solo la lista de dependencias.</a:t>
             </a:r>
           </a:p>
           <a:p/>
           <a:p>
             <a:r>
-              <a:t>COPY package*.json./ trae solo la lista de dependencias.</a:t>
+              <a:t>COPY.. trae el resto del codigo, y va DESPUES por la razon de cache de la seccion anterior.</a:t>
             </a:r>
           </a:p>
           <a:p/>
           <a:p>
             <a:r>
-              <a:t>COPY.. trae el resto del codigo, y va DESPUES por la razon de cache de la seccion anterior.</a:t>
+              <a:t>Y CMD indica que comando ejecutar cuando el contenedor arranque, uno solo y en primer plano.</a:t>
             </a:r>
           </a:p>
           <a:p/>
           <a:p>
             <a:r>
-              <a:t>Y CMD indica que comando ejecutar cuando el contenedor arranque, uno solo y en primer plano.</a:t>
+              <a:t>Por eso al lado del Dockerfile va un segundo archivo, el.dockerignore, con al menos.env, node_modules y.git.</a:t>
             </a:r>
           </a:p>
           <a:p/>
           <a:p>
             <a:r>
-              <a:t>Por eso al lado del Dockerfile va un segundo archivo, el.dockerignore, con al menos.env, node_modules y.git.</a:t>
+              <a:t>Lo que realmente publica el puerto es la opcion -p al ejecutar, y ese es el tema de la diapositiva siguiente.</a:t>
             </a:r>
           </a:p>
           <a:p/>
           <a:p>
             <a:r>
-              <a:t>Lo que realmente publica el puerto es la opcion -p al ejecutar, y ese es el tema de la diapositiva siguiente.</a:t>
+              <a:t>(No se proyecta) En CloudLite Turnos el estudiante contenerizara un stub de su API, es decir una version minima que responde algo verificable: el endpoint GET /health, que devuelve un cuerpo en formato JSON con al menos un campo que se pueda comprobar.</a:t>
+            </a:r>
+          </a:p>
+          <a:p/>
+          <a:p>
+            <a:r>
+              <a:t>(No se proyecta) Su Dockerfile tiene siete instrucciones, y el docente debe poder explicar cada una.</a:t>
+            </a:r>
+          </a:p>
+          <a:p/>
+          <a:p>
+            <a:r>
+              <a:t>(No se proyecta) La diapositiva lo proyecta junto al Dockerfile y no como nota al pie a proposito: son dos archivos hermanos en la misma carpeta, y el estudiante que entrega el primero sin el segundo entrega un artefacto que filtra secretos.</a:t>
             </a:r>
           </a:p>
         </p:txBody>
@@ -1040,19 +1060,43 @@
           <a:p/>
           <a:p>
             <a:r>
-              <a:t>Y hay que anunciar el sintoma de invertirlos, que es lo que hace perder la tarde: docker ps sigue reportando el contenedor como Up y la peticion simplemente no obtiene respuesta o muere con una conexion reiniciada.</a:t>
+              <a:t>Por eso el cuerpo lleva al menos un campo verificable, por ejemplo un estado y el nombre del servicio en JSON.</a:t>
             </a:r>
           </a:p>
           <a:p/>
           <a:p>
             <a:r>
-              <a:t>El sintoma no senala la causa, y el estudiante busca el error en el codigo cuando esta en una linea del comando.</a:t>
+              <a:t>(No se proyecta) Un build sin etiqueta funciona y por eso el estudiante no nota el problema: Docker le pone latest en silencio, y a partir de ahi nadie puede decir que version esta corriendo.</a:t>
             </a:r>
           </a:p>
           <a:p/>
           <a:p>
             <a:r>
-              <a:t>Por eso el cuerpo lleva al menos un campo verificable, por ejemplo un estado y el nombre del servicio en JSON.</a:t>
+              <a:t>(No se proyecta) El corazon de la instruccion es el -p, y conviene escribirlo en el tablero con las dos etiquetas encima: el numero de la IZQUIERDA es el del anfitrion, la maquina desde la que uno abre el navegador, y el de la DERECHA es el del contenedor, el mismo del EXPOSE.</a:t>
+            </a:r>
+          </a:p>
+          <a:p/>
+          <a:p>
+            <a:r>
+              <a:t>(No se proyecta) En el ejemplo estan a proposito DISTINTOS, porque cuando se escribe -p 8080:8080 los dos lados se confunden y el estudiante no puede decir cual es cual; en la actividad se le pide justamente explicar la diferencia.</a:t>
+            </a:r>
+          </a:p>
+          <a:p/>
+          <a:p>
+            <a:r>
+              <a:t>(No se proyecta) Y hay que anunciar el sintoma de invertirlos, que es lo que hace perder la tarde: docker ps sigue reportando el contenedor como Up y la peticion simplemente no obtiene respuesta o muere con una conexion reiniciada.</a:t>
+            </a:r>
+          </a:p>
+          <a:p/>
+          <a:p>
+            <a:r>
+              <a:t>(No se proyecta) El sintoma no senala la causa, y el estudiante busca el error en el codigo cuando esta en una linea del comando.</a:t>
+            </a:r>
+          </a:p>
+          <a:p/>
+          <a:p>
+            <a:r>
+              <a:t>(No se proyecta) Este mismo endpoint reaparece en la Clase 7, donde el balanceador lo consulta para decidir si sigue enviandole trafico a una instancia, y en la Clase 8, donde el pipeline lo usa como prueba de humo despues de construir la imagen.</a:t>
             </a:r>
           </a:p>
         </p:txBody>
@@ -1134,19 +1178,31 @@
           <a:p/>
           <a:p>
             <a:r>
-              <a:t>De ahi sale la regla operativa del dia, y hay que decirla como consecuencia del limite y no como consejo suelto: el Dockerfile se escribe en la carpeta del proyecto y se PEGA en el laboratorio, nunca al contrario, y las capturas se guardan antes de cerrar.</a:t>
+              <a:t>Por eso la alterna es alterna y no la primera opcion.</a:t>
             </a:r>
           </a:p>
           <a:p/>
           <a:p>
             <a:r>
-              <a:t>Por eso la alterna es alterna y no la primera opcion.</a:t>
+              <a:t>(No se proyecta) Un estudiante mas adelantado puede levantar dos contenedores, la API y un stub de notificaciones, y comprobar algo que sera central en la Clase 4: desde el contenedor de la API, la direccion localhost NO es la maquina anfitriona ni el otro contenedor, es el propio contenedor, y para que dos contenedores se hablen hay que ponerlos en una misma red y llamarse por nombre.</a:t>
             </a:r>
           </a:p>
           <a:p/>
           <a:p>
             <a:r>
-              <a:t>(Sobre la actividad, no se proyecta) Hay dos limites que conviene anunciar ANTES de empezar y no despues, porque cambian como se planifica la hora de taller.</a:t>
+              <a:t>(No se proyecta) Hay dos limites que conviene anunciar ANTES de empezar y no despues, porque cambian como se planifica la hora de taller.</a:t>
+            </a:r>
+          </a:p>
+          <a:p/>
+          <a:p>
+            <a:r>
+              <a:t>(No se proyecta) De ahi sale la regla operativa del dia, y hay que decirla como consecuencia del limite y no como consejo suelto: el Dockerfile se escribe en la carpeta del proyecto y se PEGA en el laboratorio, nunca al contrario, y las capturas se guardan antes de cerrar.</a:t>
+            </a:r>
+          </a:p>
+          <a:p/>
+          <a:p>
+            <a:r>
+              <a:t>(No se proyecta) La alterna, si Killercoda no carga, es LabEx Docker Playground, que cumple la misma funcion tambien gratis y en el navegador, pero con una restriccion mas dura que conviene mencionar: su plan gratuito da solo tres sesiones al dia, de modo que quien la use para depurar puede quedarse sin intentos justo el dia de la entrega.</a:t>
             </a:r>
           </a:p>
         </p:txBody>
@@ -1216,19 +1272,7 @@
           <a:lstStyle/>
           <a:p>
             <a:r>
-              <a:t>Tres preguntas se repiten en esta clase.</a:t>
-            </a:r>
-          </a:p>
-          <a:p/>
-          <a:p>
-            <a:r>
               <a:t>La respuesta, dicha desde ya, es no.</a:t>
-            </a:r>
-          </a:p>
-          <a:p/>
-          <a:p>
-            <a:r>
-              <a:t>(Sobre la actividad, no se proyecta) Un grupo que solo copio comandos consigue la captura del entregable, pero en la Clase 8, cuando el pipeline de integracion continua deba construir una imagen automaticamente, no sabra que esta construyendo ni por que su build tarda cinco minutos, y en la sustentacion de la Clase 15 describira su arquitectura diciendo que lo metieron en Docker, que no es una decision arquitectonica sino una herramienta sin justificar.</a:t>
             </a:r>
           </a:p>
         </p:txBody>
@@ -5010,7 +5054,7 @@
                 </a:solidFill>
                 <a:latin typeface="Calibri"/>
               </a:rPr>
-              <a:t>–   Esta diapositiva es la misma comparacion de la seccion anterior, ya dibujada, y conviene recorrerla con el puntero en vez de leerla.</a:t>
+              <a:t>–   Se sube por la columna izquierda: hardware fisico, hipervisor, y encima DOS sistemas operativos invitados completos, uno por aplicacion.</a:t>
             </a:r>
           </a:p>
           <a:p>
@@ -5026,7 +5070,7 @@
                 </a:solidFill>
                 <a:latin typeface="Calibri"/>
               </a:rPr>
-              <a:t>–   Se sube por la columna izquierda: hardware fisico, hipervisor, y encima DOS sistemas operativos invitados completos, uno por aplicacion.</a:t>
+              <a:t>–   Luego por la derecha: el mismo hardware, un solo sistema operativo anfitrion con el motor de contenedores, y encima los contenedores, que ya no traen sistema operativo propio.</a:t>
             </a:r>
           </a:p>
           <a:p>
@@ -5042,7 +5086,7 @@
                 </a:solidFill>
                 <a:latin typeface="Calibri"/>
               </a:rPr>
-              <a:t>–   Luego por la derecha: el mismo hardware, un solo sistema operativo anfitrion con el motor de contenedores, y encima los contenedores, que ya no traen sistema operativo propio.</a:t>
+              <a:t>–   La caja que desaparece al pasar de la pila de la maquina virtual a la del contenedor es el segundo sistema operativo.</a:t>
             </a:r>
           </a:p>
           <a:p>
@@ -5058,7 +5102,7 @@
                 </a:solidFill>
                 <a:latin typeface="Calibri"/>
               </a:rPr>
-              <a:t>–   La caja que desaparece al pasar de la pila de la maquina virtual a la del contenedor es el segundo sistema operativo.</a:t>
+              <a:t>–   Todo lo demas —arranque en segundos y no en minutos, megabytes y no gigabytes— es consecuencia de esa caja que ya no esta.</a:t>
             </a:r>
           </a:p>
         </p:txBody>
@@ -5278,22 +5322,6 @@
                 </a:solidFill>
                 <a:latin typeface="Calibri"/>
               </a:rPr>
-              <a:t>–   Todo lo demas —arranque en segundos y no en minutos, megabytes y no gigabytes— es consecuencia de esa caja que ya no esta.</a:t>
-            </a:r>
-          </a:p>
-          <a:p>
-            <a:pPr>
-              <a:spcAft>
-                <a:spcPts val="800"/>
-              </a:spcAft>
-            </a:pPr>
-            <a:r>
-              <a:rPr sz="2000" b="0" i="0">
-                <a:solidFill>
-                  <a:srgbClr val="333333"/>
-                </a:solidFill>
-                <a:latin typeface="Calibri"/>
-              </a:rPr>
               <a:t>–   Leida de abajo hacia arriba, la pila de la maquina virtual es: hardware, hipervisor, sistema operativo invitado, librerias y aplicacion.</a:t>
             </a:r>
           </a:p>
@@ -6602,22 +6630,6 @@
                 </a:solidFill>
                 <a:latin typeface="Calibri"/>
               </a:rPr>
-              <a:t>–   En la app de turnos el estudiante contenerizara un stub de su API, es decir una version minima que responde algo verificable: el endpoint GET /health, que devuelve un cuerpo en formato JSON con al menos un campo que se pueda comprobar.</a:t>
-            </a:r>
-          </a:p>
-          <a:p>
-            <a:pPr>
-              <a:spcAft>
-                <a:spcPts val="800"/>
-              </a:spcAft>
-            </a:pPr>
-            <a:r>
-              <a:rPr sz="2000" b="0" i="0">
-                <a:solidFill>
-                  <a:srgbClr val="333333"/>
-                </a:solidFill>
-                <a:latin typeface="Calibri"/>
-              </a:rPr>
               <a:t>–   FROM node:20-alpine elige la imagen base, o sea el punto de partida ya construido por otros, en este caso un Linux minimo con Node instalado; la etiqueta 20-alpine es FIJA y eso importa</a:t>
             </a:r>
           </a:p>
@@ -6918,22 +6930,6 @@
                 </a:solidFill>
                 <a:latin typeface="Calibri"/>
               </a:rPr>
-              <a:t>–   La diapositiva lo proyecta junto al Dockerfile y no como nota al pie a proposito: son dos archivos hermanos en la misma carpeta, y el estudiante que entrega el primero sin el segundo entrega un artefacto que filtra secretos.</a:t>
-            </a:r>
-          </a:p>
-          <a:p>
-            <a:pPr>
-              <a:spcAft>
-                <a:spcPts val="800"/>
-              </a:spcAft>
-            </a:pPr>
-            <a:r>
-              <a:rPr sz="2000" b="0" i="0">
-                <a:solidFill>
-                  <a:srgbClr val="333333"/>
-                </a:solidFill>
-                <a:latin typeface="Calibri"/>
-              </a:rPr>
               <a:t>–   La regla se enuncia en una linea: si haces COPY.., el.dockerignore va al lado y se menciona en la entrega.</a:t>
             </a:r>
           </a:p>
@@ -7131,7 +7127,7 @@
                 </a:solidFill>
                 <a:latin typeface="Calibri"/>
               </a:rPr>
-              <a:t>Construir, correr y verificar: los tres comandos y el contrato de salud (1/3)</a:t>
+              <a:t>Construir, correr y verificar: los tres comandos y el contrato de salud (1/2)</a:t>
             </a:r>
           </a:p>
         </p:txBody>
@@ -7202,7 +7198,7 @@
                 </a:solidFill>
                 <a:latin typeface="Calibri"/>
               </a:rPr>
-              <a:t>–   Un build sin etiqueta funciona y por eso el estudiante no nota el problema: Docker le pone latest en silencio, y a partir de ahi nadie puede decir que version esta corriendo.</a:t>
+              <a:t>–   Nombre Y etiqueta, siempre; la etiqueta suelta no basta y el nombre solo tampoco.</a:t>
             </a:r>
           </a:p>
           <a:p>
@@ -7218,7 +7214,7 @@
                 </a:solidFill>
                 <a:latin typeface="Calibri"/>
               </a:rPr>
-              <a:t>–   Nombre Y etiqueta, siempre; la etiqueta suelta no basta y el nombre solo tampoco.</a:t>
+              <a:t>–   El segundo es la ejecucion: docker run -d -p 8081:8080 --name api turnos-api:0.1.0.</a:t>
             </a:r>
           </a:p>
           <a:p>
@@ -7234,7 +7230,7 @@
                 </a:solidFill>
                 <a:latin typeface="Calibri"/>
               </a:rPr>
-              <a:t>–   El segundo es la ejecucion: docker run -d -p 8081:8080 --name api turnos-api:0.1.0.</a:t>
+              <a:t>–   Se lee de derecha a izquierda: el puerto 8080 de dentro queda accesible como 8081 desde fuera.</a:t>
             </a:r>
           </a:p>
           <a:p>
@@ -7250,7 +7246,7 @@
                 </a:solidFill>
                 <a:latin typeface="Calibri"/>
               </a:rPr>
-              <a:t>–   El corazon de la instruccion es el -p, y conviene escribirlo en el tablero con las dos etiquetas encima: el numero de la IZQUIERDA es el del anfitrion, la maquina desde la que uno abre el navegador, y el de la DERECHA es el del contenedor, el mismo del EXPOSE.</a:t>
+              <a:t>–   El tercero es la verificacion, y aqui hay un concepto y no solo un comando.</a:t>
             </a:r>
           </a:p>
         </p:txBody>
@@ -7547,7 +7543,7 @@
                 </a:solidFill>
                 <a:latin typeface="Calibri"/>
               </a:rPr>
-              <a:t> Ejemplos resueltos y demo del docente sobre el tema.</a:t>
+              <a:t> Ejemplos resueltos y demostración sobre el tema.</a:t>
             </a:r>
           </a:p>
           <a:p>
@@ -7778,7 +7774,7 @@
                 </a:solidFill>
                 <a:latin typeface="Calibri"/>
               </a:rPr>
-              <a:t>Construir, correr y verificar: los tres comandos y el contrato de salud (2/3)</a:t>
+              <a:t>Construir, correr y verificar: los tres comandos y el contrato de salud (2/2)</a:t>
             </a:r>
           </a:p>
         </p:txBody>
@@ -7817,7 +7813,7 @@
                 </a:solidFill>
                 <a:latin typeface="Calibri"/>
               </a:rPr>
-              <a:t>–   Se lee de derecha a izquierda: el puerto 8080 de dentro queda accesible como 8081 desde fuera.</a:t>
+              <a:t>–   Un endpoint de salud es una ruta cuyo unico proposito es que alguien de afuera pueda preguntar si el servicio esta en condiciones de atender</a:t>
             </a:r>
           </a:p>
           <a:p>
@@ -7833,7 +7829,7 @@
                 </a:solidFill>
                 <a:latin typeface="Calibri"/>
               </a:rPr>
-              <a:t>–   En el ejemplo estan a proposito DISTINTOS, porque cuando se escribe -p 8080:8080 los dos lados se confunden y el estudiante no puede decir cual es cual; en la actividad se le pide justamente explicar la diferencia.</a:t>
+              <a:t>–   Y su contrato tiene TRES datos, los tres exigibles: la ruta (GET /health), el codigo de estado (200 cuando el servicio puede atender, 503 cuando esta arriba pero sin su dependencia, tipicamente la base de datos) y el cuerpo con su formato declarado.</a:t>
             </a:r>
           </a:p>
           <a:p>
@@ -7849,7 +7845,7 @@
                 </a:solidFill>
                 <a:latin typeface="Calibri"/>
               </a:rPr>
-              <a:t>–   El tercero es la verificacion, y aqui hay un concepto y no solo un comando.</a:t>
+              <a:t>–   El tercero es el que se olvida y el que hace util al endpoint: un 200 con el cuerpo vacio no distingue «vivo» de «vivo pero roto», porque el proceso puede estar respondiendo mientras su conexion a datos esta caida.</a:t>
             </a:r>
           </a:p>
           <a:p>
@@ -7865,23 +7861,7 @@
                 </a:solidFill>
                 <a:latin typeface="Calibri"/>
               </a:rPr>
-              <a:t>–   Un endpoint de salud es una ruta cuyo unico proposito es que alguien de afuera pueda preguntar si el servicio esta en condiciones de atender</a:t>
-            </a:r>
-          </a:p>
-          <a:p>
-            <a:pPr>
-              <a:spcAft>
-                <a:spcPts val="800"/>
-              </a:spcAft>
-            </a:pPr>
-            <a:r>
-              <a:rPr sz="2000" b="0" i="0">
-                <a:solidFill>
-                  <a:srgbClr val="333333"/>
-                </a:solidFill>
-                <a:latin typeface="Calibri"/>
-              </a:rPr>
-              <a:t>–   Y su contrato tiene TRES datos, los tres exigibles: la ruta (GET /health), el codigo de estado (200 cuando el servicio puede atender, 503 cuando esta arriba pero sin su dependencia, tipicamente la base de datos) y el cuerpo con su formato declarado.</a:t>
+              <a:t>–   Se comprueba con curl -i http://localhost:8081/health, y el -i importa: sin el, curl imprime el cuerpo pero esconde el codigo de estado, que es un tercio del contrato.</a:t>
             </a:r>
           </a:p>
         </p:txBody>
@@ -8062,7 +8042,7 @@
                 </a:solidFill>
                 <a:latin typeface="Calibri"/>
               </a:rPr>
-              <a:t>Construir, correr y verificar: los tres comandos y el contrato de salud (3/3)</a:t>
+              <a:t>Segundo ejemplo: leer las siete columnas de docker ps</a:t>
             </a:r>
           </a:p>
         </p:txBody>
@@ -8101,7 +8081,7 @@
                 </a:solidFill>
                 <a:latin typeface="Calibri"/>
               </a:rPr>
-              <a:t>–   El tercero es el que se olvida y el que hace util al endpoint: un 200 con el cuerpo vacio no distingue «vivo» de «vivo pero roto», porque el proceso puede estar respondiendo mientras su conexion a datos esta caida.</a:t>
+              <a:t>–   Tras ejecutar el contenedor, el comando docker ps lista lo que esta corriendo con siete columnas: identificador del contenedor, imagen de la que proviene, comando en ejecucion, tiempo desde su creacion, estado, puertos publicados y nombre asignado.</a:t>
             </a:r>
           </a:p>
           <a:p>
@@ -8117,7 +8097,7 @@
                 </a:solidFill>
                 <a:latin typeface="Calibri"/>
               </a:rPr>
-              <a:t>–   Se comprueba con curl -i http://localhost:8081/health, y el -i importa: sin el, curl imprime el cuerpo pero esconde el codigo de estado, que es un tercio del contrato.</a:t>
+              <a:t>–   Todo esto ocurre en Killercoda (killercoda.com, cuenta gratuita y sin tarjeta, escenario Ubuntu), que entrega una terminal Linux real con Docker ya instalado dentro del navegador, sin instalar Docker Desktop</a:t>
             </a:r>
           </a:p>
           <a:p>
@@ -8133,7 +8113,39 @@
                 </a:solidFill>
                 <a:latin typeface="Calibri"/>
               </a:rPr>
-              <a:t>–   Este mismo endpoint reaparece en la Clase 7, donde el balanceador lo consulta para decidir si sigue enviandole trafico a una instancia, y en la Clase 8, donde el pipeline lo usa como prueba de humo despues de construir la imagen.</a:t>
+              <a:t>–   Que en equipos institucionales suele estar bloqueado y tiene condiciones de licencia para organizaciones grandes.</a:t>
+            </a:r>
+          </a:p>
+          <a:p>
+            <a:pPr>
+              <a:spcAft>
+                <a:spcPts val="800"/>
+              </a:spcAft>
+            </a:pPr>
+            <a:r>
+              <a:rPr sz="2000" b="0" i="0">
+                <a:solidFill>
+                  <a:srgbClr val="333333"/>
+                </a:solidFill>
+                <a:latin typeface="Calibri"/>
+              </a:rPr>
+              <a:t>–   El primero: la sesion caduca a una hora y al cerrarse se pierde lo que exista solo alli.</a:t>
+            </a:r>
+          </a:p>
+          <a:p>
+            <a:pPr>
+              <a:spcAft>
+                <a:spcPts val="800"/>
+              </a:spcAft>
+            </a:pPr>
+            <a:r>
+              <a:rPr sz="2000" b="0" i="0">
+                <a:solidFill>
+                  <a:srgbClr val="333333"/>
+                </a:solidFill>
+                <a:latin typeface="Calibri"/>
+              </a:rPr>
+              <a:t>–   El segundo: en el plan gratuito solo se trabaja un escenario a la vez, asi que no sirve dejar dos labs abiertos.</a:t>
             </a:r>
           </a:p>
         </p:txBody>
@@ -8314,7 +8326,7 @@
                 </a:solidFill>
                 <a:latin typeface="Calibri"/>
               </a:rPr>
-              <a:t>Segundo ejemplo: leer las siete columnas de docker ps (1/2)</a:t>
+              <a:t>Preguntas frecuentes y cierre conceptual (1/2)</a:t>
             </a:r>
           </a:p>
         </p:txBody>
@@ -8353,7 +8365,7 @@
                 </a:solidFill>
                 <a:latin typeface="Calibri"/>
               </a:rPr>
-              <a:t>–   Tras ejecutar el contenedor, el comando docker ps lista lo que esta corriendo con siete columnas: identificador del contenedor, imagen de la que proviene, comando en ejecucion, tiempo desde su creacion, estado, puertos publicados y nombre asignado.</a:t>
+              <a:t>–   Por que mi contenedor arranca y se muere de inmediato: porque un contenedor vive exactamente lo que vive su proceso principal, y si el comando termina, el contenedor termina.</a:t>
             </a:r>
           </a:p>
           <a:p>
@@ -8369,7 +8381,7 @@
                 </a:solidFill>
                 <a:latin typeface="Calibri"/>
               </a:rPr>
-              <a:t>–   Un estudiante mas adelantado puede levantar dos contenedores, la API y un stub de notificaciones</a:t>
+              <a:t>–   No es un error, es el diseno; un contenedor no es una maquina encendida esperando ordenes, es un proceso envuelto en aislamiento, y la solucion es que el comando quede corriendo en primer plano.</a:t>
             </a:r>
           </a:p>
           <a:p>
@@ -8385,7 +8397,7 @@
                 </a:solidFill>
                 <a:latin typeface="Calibri"/>
               </a:rPr>
-              <a:t>–   Y comprobar algo que sera central en la Clase 4: desde el contenedor de la API, la direccion localhost NO es la maquina anfitriona ni el otro contenedor, es el propio contenedor</a:t>
+              <a:t>–   Segunda: donde quedan mis datos si borro el contenedor.</a:t>
             </a:r>
           </a:p>
           <a:p>
@@ -8401,23 +8413,7 @@
                 </a:solidFill>
                 <a:latin typeface="Calibri"/>
               </a:rPr>
-              <a:t>–   Y para que dos contenedores se hablen hay que ponerlos en una misma red y llamarse por nombre.</a:t>
-            </a:r>
-          </a:p>
-          <a:p>
-            <a:pPr>
-              <a:spcAft>
-                <a:spcPts val="800"/>
-              </a:spcAft>
-            </a:pPr>
-            <a:r>
-              <a:rPr sz="2000" b="0" i="0">
-                <a:solidFill>
-                  <a:srgbClr val="333333"/>
-                </a:solidFill>
-                <a:latin typeface="Calibri"/>
-              </a:rPr>
-              <a:t>–   Todo esto ocurre en Killercoda (killercoda.com, cuenta gratuita y sin tarjeta, escenario Ubuntu), que entrega una terminal Linux real con Docker ya instalado dentro del navegador, sin instalar Docker Desktop</a:t>
+              <a:t>–   Tercera: entonces la base de datos tambien va en un contenedor.</a:t>
             </a:r>
           </a:p>
         </p:txBody>
@@ -8598,7 +8594,7 @@
                 </a:solidFill>
                 <a:latin typeface="Calibri"/>
               </a:rPr>
-              <a:t>Segundo ejemplo: leer las siete columnas de docker ps (2/2)</a:t>
+              <a:t>Preguntas frecuentes y cierre conceptual (2/2)</a:t>
             </a:r>
           </a:p>
         </p:txBody>
@@ -8637,7 +8633,7 @@
                 </a:solidFill>
                 <a:latin typeface="Calibri"/>
               </a:rPr>
-              <a:t>–   Que en equipos institucionales suele estar bloqueado y tiene condiciones de licencia para organizaciones grandes.</a:t>
+              <a:t>–   En el modelo C4, la palabra contenedor significa cualquier cosa que se ejecuta o almacena de forma independiente, como una aplicacion web, una API o una base de datos, y es un concepto de diagrama anterior a Docker.</a:t>
             </a:r>
           </a:p>
           <a:p>
@@ -8653,7 +8649,7 @@
                 </a:solidFill>
                 <a:latin typeface="Calibri"/>
               </a:rPr>
-              <a:t>–   El primero: la sesion caduca a una hora y al cerrarse se pierde lo que exista solo alli.</a:t>
+              <a:t>–   El contenedor de Docker, en cambio, es un mecanismo concreto de empaquetado y ejecucion.</a:t>
             </a:r>
           </a:p>
           <a:p>
@@ -8669,39 +8665,7 @@
                 </a:solidFill>
                 <a:latin typeface="Calibri"/>
               </a:rPr>
-              <a:t>–   El segundo: en el plan gratuito solo se trabaja un escenario a la vez, asi que no sirve dejar dos labs abiertos.</a:t>
-            </a:r>
-          </a:p>
-          <a:p>
-            <a:pPr>
-              <a:spcAft>
-                <a:spcPts val="800"/>
-              </a:spcAft>
-            </a:pPr>
-            <a:r>
-              <a:rPr sz="2000" b="0" i="0">
-                <a:solidFill>
-                  <a:srgbClr val="333333"/>
-                </a:solidFill>
-                <a:latin typeface="Calibri"/>
-              </a:rPr>
-              <a:t>–   La alterna, si Killercoda no carga, es LabEx Docker Playground, que cumple la misma funcion tambien gratis y en el navegador</a:t>
-            </a:r>
-          </a:p>
-          <a:p>
-            <a:pPr>
-              <a:spcAft>
-                <a:spcPts val="800"/>
-              </a:spcAft>
-            </a:pPr>
-            <a:r>
-              <a:rPr sz="2000" b="0" i="0">
-                <a:solidFill>
-                  <a:srgbClr val="333333"/>
-                </a:solidFill>
-                <a:latin typeface="Calibri"/>
-              </a:rPr>
-              <a:t>–   Pero con una restriccion mas dura que conviene mencionar: su plan gratuito da solo tres sesiones al dia, de modo que quien la use para depurar puede quedarse sin intentos justo el dia de la entrega.</a:t>
+              <a:t>–   Se parecen y a menudo coinciden uno a uno, pero no son sinonimos: una base de datos gestionada que nadie contenerizo sigue siendo un contenedor en el sentido de C4.</a:t>
             </a:r>
           </a:p>
         </p:txBody>
@@ -8882,21 +8846,141 @@
                 </a:solidFill>
                 <a:latin typeface="Calibri"/>
               </a:rPr>
-              <a:t>Preguntas frecuentes y cierre conceptual () (1/4)</a:t>
-            </a:r>
-          </a:p>
-        </p:txBody>
-      </p:sp>
-      <p:sp>
-        <p:nvSpPr>
-          <p:cNvPr id="5" name="TextBox 4"/>
+              <a:t>El Dockerfile minimo, capa por capa</a:t>
+            </a:r>
+          </a:p>
+        </p:txBody>
+      </p:sp>
+      <p:sp>
+        <p:nvSpPr>
+          <p:cNvPr id="5" name="Rounded Rectangle 4"/>
+          <p:cNvSpPr/>
+          <p:nvPr/>
+        </p:nvSpPr>
+        <p:spPr>
+          <a:xfrm>
+            <a:off x="457200" y="1261872"/>
+            <a:ext cx="11277295" cy="5093208"/>
+          </a:xfrm>
+          <a:prstGeom prst="roundRect">
+            <a:avLst>
+              <a:gd name="adj" fmla="val 12000"/>
+            </a:avLst>
+          </a:prstGeom>
+          <a:solidFill>
+            <a:srgbClr val="1E2A38"/>
+          </a:solidFill>
+          <a:ln>
+            <a:noFill/>
+          </a:ln>
+        </p:spPr>
+        <p:style>
+          <a:lnRef idx="1">
+            <a:schemeClr val="accent1"/>
+          </a:lnRef>
+          <a:fillRef idx="3">
+            <a:schemeClr val="accent1"/>
+          </a:fillRef>
+          <a:effectRef idx="2">
+            <a:schemeClr val="accent1"/>
+          </a:effectRef>
+          <a:fontRef idx="minor">
+            <a:schemeClr val="lt1"/>
+          </a:fontRef>
+        </p:style>
+        <p:txBody>
+          <a:bodyPr rtlCol="0" anchor="ctr"/>
+          <a:lstStyle/>
+          <a:p>
+            <a:pPr algn="ctr"/>
+          </a:p>
+        </p:txBody>
+      </p:sp>
+      <p:sp>
+        <p:nvSpPr>
+          <p:cNvPr id="6" name="Rectangle 5"/>
+          <p:cNvSpPr/>
+          <p:nvPr/>
+        </p:nvSpPr>
+        <p:spPr>
+          <a:xfrm>
+            <a:off x="457200" y="1261872"/>
+            <a:ext cx="11277295" cy="320040"/>
+          </a:xfrm>
+          <a:prstGeom prst="rect">
+            <a:avLst/>
+          </a:prstGeom>
+          <a:solidFill>
+            <a:srgbClr val="095292"/>
+          </a:solidFill>
+          <a:ln>
+            <a:noFill/>
+          </a:ln>
+        </p:spPr>
+        <p:style>
+          <a:lnRef idx="1">
+            <a:schemeClr val="accent1"/>
+          </a:lnRef>
+          <a:fillRef idx="3">
+            <a:schemeClr val="accent1"/>
+          </a:fillRef>
+          <a:effectRef idx="2">
+            <a:schemeClr val="accent1"/>
+          </a:effectRef>
+          <a:fontRef idx="minor">
+            <a:schemeClr val="lt1"/>
+          </a:fontRef>
+        </p:style>
+        <p:txBody>
+          <a:bodyPr rtlCol="0" anchor="ctr"/>
+          <a:lstStyle/>
+          <a:p>
+            <a:pPr algn="ctr"/>
+          </a:p>
+        </p:txBody>
+      </p:sp>
+      <p:sp>
+        <p:nvSpPr>
+          <p:cNvPr id="7" name="TextBox 6"/>
           <p:cNvSpPr txBox="1"/>
           <p:nvPr/>
         </p:nvSpPr>
         <p:spPr>
           <a:xfrm>
-            <a:off x="457200" y="1170432"/>
-            <a:ext cx="11277295" cy="5230368"/>
+            <a:off x="685800" y="1307592"/>
+            <a:ext cx="10820095" cy="256032"/>
+          </a:xfrm>
+          <a:prstGeom prst="rect">
+            <a:avLst/>
+          </a:prstGeom>
+          <a:noFill/>
+        </p:spPr>
+        <p:txBody>
+          <a:bodyPr wrap="square" anchor="ctr"/>
+          <a:lstStyle/>
+          <a:p>
+            <a:r>
+              <a:rPr sz="1000" b="1" i="0">
+                <a:solidFill>
+                  <a:srgbClr val="269CCB"/>
+                </a:solidFill>
+                <a:latin typeface="Calibri"/>
+              </a:rPr>
+              <a:t>● ● ●</a:t>
+            </a:r>
+          </a:p>
+        </p:txBody>
+      </p:sp>
+      <p:sp>
+        <p:nvSpPr>
+          <p:cNvPr id="8" name="TextBox 7"/>
+          <p:cNvSpPr txBox="1"/>
+          <p:nvPr/>
+        </p:nvSpPr>
+        <p:spPr>
+          <a:xfrm>
+            <a:off x="777240" y="1719072"/>
+            <a:ext cx="10637215" cy="4453128"/>
           </a:xfrm>
           <a:prstGeom prst="rect">
             <a:avLst/>
@@ -8911,88 +8995,248 @@
           <a:p>
             <a:pPr>
               <a:spcAft>
-                <a:spcPts val="800"/>
-              </a:spcAft>
-            </a:pPr>
-            <a:r>
-              <a:rPr sz="2000" b="0" i="0">
-                <a:solidFill>
-                  <a:srgbClr val="333333"/>
-                </a:solidFill>
-                <a:latin typeface="Calibri"/>
-              </a:rPr>
-              <a:t>–   Por que mi contenedor arranca y se muere de inmediato: porque un contenedor vive exactamente lo que vive su proceso principal, y si el comando termina, el contenedor termina.</a:t>
-            </a:r>
-          </a:p>
-          <a:p>
-            <a:pPr>
-              <a:spcAft>
-                <a:spcPts val="800"/>
-              </a:spcAft>
-            </a:pPr>
-            <a:r>
-              <a:rPr sz="2000" b="0" i="0">
-                <a:solidFill>
-                  <a:srgbClr val="333333"/>
-                </a:solidFill>
-                <a:latin typeface="Calibri"/>
-              </a:rPr>
-              <a:t>–   No es un error, es el diseno; un contenedor no es una maquina encendida esperando ordenes, es un proceso envuelto en aislamiento, y la solucion es que el comando quede corriendo en primer plano.</a:t>
-            </a:r>
-          </a:p>
-          <a:p>
-            <a:pPr>
-              <a:spcAft>
-                <a:spcPts val="800"/>
-              </a:spcAft>
-            </a:pPr>
-            <a:r>
-              <a:rPr sz="2000" b="0" i="0">
-                <a:solidFill>
-                  <a:srgbClr val="333333"/>
-                </a:solidFill>
-                <a:latin typeface="Calibri"/>
-              </a:rPr>
-              <a:t>–   Segunda: donde quedan mis datos si borro el contenedor.</a:t>
-            </a:r>
-          </a:p>
-          <a:p>
-            <a:pPr>
-              <a:spcAft>
-                <a:spcPts val="800"/>
-              </a:spcAft>
-            </a:pPr>
-            <a:r>
-              <a:rPr sz="2000" b="0" i="0">
-                <a:solidFill>
-                  <a:srgbClr val="333333"/>
-                </a:solidFill>
-                <a:latin typeface="Calibri"/>
-              </a:rPr>
-              <a:t>–   Se pierden, porque el sistema de archivos del contenedor es efimero; para persistir hay que montar un volumen, es decir un almacenamiento cuyo ciclo de vida es independiente del contenedor</a:t>
-            </a:r>
-          </a:p>
-          <a:p>
-            <a:pPr>
-              <a:spcAft>
-                <a:spcPts val="800"/>
-              </a:spcAft>
-            </a:pPr>
-            <a:r>
-              <a:rPr sz="2000" b="0" i="0">
-                <a:solidFill>
-                  <a:srgbClr val="333333"/>
-                </a:solidFill>
-                <a:latin typeface="Calibri"/>
-              </a:rPr>
-              <a:t>–   Y esa es la razon por la cual una base de datos no se trata igual que una API, tema que reaparece en la Clase 7 con almacenamiento y en la Clase 13 al discutir que piezas se pueden replicar.</a:t>
-            </a:r>
-          </a:p>
-        </p:txBody>
-      </p:sp>
-      <p:sp>
-        <p:nvSpPr>
-          <p:cNvPr id="6" name="TextBox 5"/>
+                <a:spcPts val="400"/>
+              </a:spcAft>
+            </a:pPr>
+            <a:r>
+              <a:rPr sz="1400" b="0" i="0">
+                <a:solidFill>
+                  <a:srgbClr val="FFFFFF"/>
+                </a:solidFill>
+                <a:latin typeface="Calibri"/>
+              </a:rPr>
+              <a:t># Cada instruccion es UNA CAPA. El orden decide que se reconstruye.</a:t>
+            </a:r>
+          </a:p>
+          <a:p>
+            <a:pPr>
+              <a:spcAft>
+                <a:spcPts val="400"/>
+              </a:spcAft>
+            </a:pPr>
+            <a:r>
+              <a:rPr sz="1400" b="0" i="0">
+                <a:solidFill>
+                  <a:srgbClr val="FFFFFF"/>
+                </a:solidFill>
+                <a:latin typeface="Calibri"/>
+              </a:rPr>
+              <a:t>FROM node:20-alpine</a:t>
+            </a:r>
+          </a:p>
+          <a:p>
+            <a:pPr>
+              <a:spcAft>
+                <a:spcPts val="400"/>
+              </a:spcAft>
+            </a:pPr>
+            <a:r>
+              <a:rPr sz="1400" b="0" i="0">
+                <a:solidFill>
+                  <a:srgbClr val="FFFFFF"/>
+                </a:solidFill>
+                <a:latin typeface="Calibri"/>
+              </a:rPr>
+              <a:t/>
+            </a:r>
+          </a:p>
+          <a:p>
+            <a:pPr>
+              <a:spcAft>
+                <a:spcPts val="400"/>
+              </a:spcAft>
+            </a:pPr>
+            <a:r>
+              <a:rPr sz="1400" b="0" i="0">
+                <a:solidFill>
+                  <a:srgbClr val="FFFFFF"/>
+                </a:solidFill>
+                <a:latin typeface="Calibri"/>
+              </a:rPr>
+              <a:t>WORKDIR /app</a:t>
+            </a:r>
+          </a:p>
+          <a:p>
+            <a:pPr>
+              <a:spcAft>
+                <a:spcPts val="400"/>
+              </a:spcAft>
+            </a:pPr>
+            <a:r>
+              <a:rPr sz="1400" b="0" i="0">
+                <a:solidFill>
+                  <a:srgbClr val="FFFFFF"/>
+                </a:solidFill>
+                <a:latin typeface="Calibri"/>
+              </a:rPr>
+              <a:t/>
+            </a:r>
+          </a:p>
+          <a:p>
+            <a:pPr>
+              <a:spcAft>
+                <a:spcPts val="400"/>
+              </a:spcAft>
+            </a:pPr>
+            <a:r>
+              <a:rPr sz="1400" b="0" i="0">
+                <a:solidFill>
+                  <a:srgbClr val="FFFFFF"/>
+                </a:solidFill>
+                <a:latin typeface="Calibri"/>
+              </a:rPr>
+              <a:t># Primero las dependencias: si el codigo cambia y package.json no,</a:t>
+            </a:r>
+          </a:p>
+          <a:p>
+            <a:pPr>
+              <a:spcAft>
+                <a:spcPts val="400"/>
+              </a:spcAft>
+            </a:pPr>
+            <a:r>
+              <a:rPr sz="1400" b="0" i="0">
+                <a:solidFill>
+                  <a:srgbClr val="FFFFFF"/>
+                </a:solidFill>
+                <a:latin typeface="Calibri"/>
+              </a:rPr>
+              <a:t># esta capa se reutiliza de la cache y el build tarda segundos.</a:t>
+            </a:r>
+          </a:p>
+          <a:p>
+            <a:pPr>
+              <a:spcAft>
+                <a:spcPts val="400"/>
+              </a:spcAft>
+            </a:pPr>
+            <a:r>
+              <a:rPr sz="1400" b="0" i="0">
+                <a:solidFill>
+                  <a:srgbClr val="FFFFFF"/>
+                </a:solidFill>
+                <a:latin typeface="Calibri"/>
+              </a:rPr>
+              <a:t>COPY package*.json ./</a:t>
+            </a:r>
+          </a:p>
+          <a:p>
+            <a:pPr>
+              <a:spcAft>
+                <a:spcPts val="400"/>
+              </a:spcAft>
+            </a:pPr>
+            <a:r>
+              <a:rPr sz="1400" b="0" i="0">
+                <a:solidFill>
+                  <a:srgbClr val="FFFFFF"/>
+                </a:solidFill>
+                <a:latin typeface="Calibri"/>
+              </a:rPr>
+              <a:t>RUN npm ci --omit=dev</a:t>
+            </a:r>
+          </a:p>
+          <a:p>
+            <a:pPr>
+              <a:spcAft>
+                <a:spcPts val="400"/>
+              </a:spcAft>
+            </a:pPr>
+            <a:r>
+              <a:rPr sz="1400" b="0" i="0">
+                <a:solidFill>
+                  <a:srgbClr val="FFFFFF"/>
+                </a:solidFill>
+                <a:latin typeface="Calibri"/>
+              </a:rPr>
+              <a:t/>
+            </a:r>
+          </a:p>
+          <a:p>
+            <a:pPr>
+              <a:spcAft>
+                <a:spcPts val="400"/>
+              </a:spcAft>
+            </a:pPr>
+            <a:r>
+              <a:rPr sz="1400" b="0" i="0">
+                <a:solidFill>
+                  <a:srgbClr val="FFFFFF"/>
+                </a:solidFill>
+                <a:latin typeface="Calibri"/>
+              </a:rPr>
+              <a:t># Despues el codigo, que es lo que cambia en cada commit.</a:t>
+            </a:r>
+          </a:p>
+          <a:p>
+            <a:pPr>
+              <a:spcAft>
+                <a:spcPts val="400"/>
+              </a:spcAft>
+            </a:pPr>
+            <a:r>
+              <a:rPr sz="1400" b="0" i="0">
+                <a:solidFill>
+                  <a:srgbClr val="FFFFFF"/>
+                </a:solidFill>
+                <a:latin typeface="Calibri"/>
+              </a:rPr>
+              <a:t>COPY..</a:t>
+            </a:r>
+          </a:p>
+          <a:p>
+            <a:pPr>
+              <a:spcAft>
+                <a:spcPts val="400"/>
+              </a:spcAft>
+            </a:pPr>
+            <a:r>
+              <a:rPr sz="1400" b="0" i="0">
+                <a:solidFill>
+                  <a:srgbClr val="FFFFFF"/>
+                </a:solidFill>
+                <a:latin typeface="Calibri"/>
+              </a:rPr>
+              <a:t/>
+            </a:r>
+          </a:p>
+          <a:p>
+            <a:pPr>
+              <a:spcAft>
+                <a:spcPts val="400"/>
+              </a:spcAft>
+            </a:pPr>
+            <a:r>
+              <a:rPr sz="1400" b="0" i="0">
+                <a:solidFill>
+                  <a:srgbClr val="FFFFFF"/>
+                </a:solidFill>
+                <a:latin typeface="Calibri"/>
+              </a:rPr>
+              <a:t>EXPOSE 3000</a:t>
+            </a:r>
+          </a:p>
+          <a:p>
+            <a:pPr>
+              <a:spcAft>
+                <a:spcPts val="400"/>
+              </a:spcAft>
+            </a:pPr>
+            <a:r>
+              <a:rPr sz="1400" b="0" i="0">
+                <a:solidFill>
+                  <a:srgbClr val="FFFFFF"/>
+                </a:solidFill>
+                <a:latin typeface="Calibri"/>
+              </a:rPr>
+              <a:t>CMD ["node", "server.js"]</a:t>
+            </a:r>
+          </a:p>
+        </p:txBody>
+      </p:sp>
+      <p:sp>
+        <p:nvSpPr>
+          <p:cNvPr id="9" name="TextBox 8"/>
           <p:cNvSpPr txBox="1"/>
           <p:nvPr/>
         </p:nvSpPr>
@@ -9166,21 +9410,141 @@
                 </a:solidFill>
                 <a:latin typeface="Calibri"/>
               </a:rPr>
-              <a:t>Preguntas frecuentes y cierre conceptual () (2/4)</a:t>
-            </a:r>
-          </a:p>
-        </p:txBody>
-      </p:sp>
-      <p:sp>
-        <p:nvSpPr>
-          <p:cNvPr id="5" name="TextBox 4"/>
+              <a:t>El ciclo completo: construir, ejecutar, verificar</a:t>
+            </a:r>
+          </a:p>
+        </p:txBody>
+      </p:sp>
+      <p:sp>
+        <p:nvSpPr>
+          <p:cNvPr id="5" name="Rounded Rectangle 4"/>
+          <p:cNvSpPr/>
+          <p:nvPr/>
+        </p:nvSpPr>
+        <p:spPr>
+          <a:xfrm>
+            <a:off x="457200" y="1261872"/>
+            <a:ext cx="11277295" cy="5093208"/>
+          </a:xfrm>
+          <a:prstGeom prst="roundRect">
+            <a:avLst>
+              <a:gd name="adj" fmla="val 12000"/>
+            </a:avLst>
+          </a:prstGeom>
+          <a:solidFill>
+            <a:srgbClr val="1E2A38"/>
+          </a:solidFill>
+          <a:ln>
+            <a:noFill/>
+          </a:ln>
+        </p:spPr>
+        <p:style>
+          <a:lnRef idx="1">
+            <a:schemeClr val="accent1"/>
+          </a:lnRef>
+          <a:fillRef idx="3">
+            <a:schemeClr val="accent1"/>
+          </a:fillRef>
+          <a:effectRef idx="2">
+            <a:schemeClr val="accent1"/>
+          </a:effectRef>
+          <a:fontRef idx="minor">
+            <a:schemeClr val="lt1"/>
+          </a:fontRef>
+        </p:style>
+        <p:txBody>
+          <a:bodyPr rtlCol="0" anchor="ctr"/>
+          <a:lstStyle/>
+          <a:p>
+            <a:pPr algn="ctr"/>
+          </a:p>
+        </p:txBody>
+      </p:sp>
+      <p:sp>
+        <p:nvSpPr>
+          <p:cNvPr id="6" name="Rectangle 5"/>
+          <p:cNvSpPr/>
+          <p:nvPr/>
+        </p:nvSpPr>
+        <p:spPr>
+          <a:xfrm>
+            <a:off x="457200" y="1261872"/>
+            <a:ext cx="11277295" cy="320040"/>
+          </a:xfrm>
+          <a:prstGeom prst="rect">
+            <a:avLst/>
+          </a:prstGeom>
+          <a:solidFill>
+            <a:srgbClr val="095292"/>
+          </a:solidFill>
+          <a:ln>
+            <a:noFill/>
+          </a:ln>
+        </p:spPr>
+        <p:style>
+          <a:lnRef idx="1">
+            <a:schemeClr val="accent1"/>
+          </a:lnRef>
+          <a:fillRef idx="3">
+            <a:schemeClr val="accent1"/>
+          </a:fillRef>
+          <a:effectRef idx="2">
+            <a:schemeClr val="accent1"/>
+          </a:effectRef>
+          <a:fontRef idx="minor">
+            <a:schemeClr val="lt1"/>
+          </a:fontRef>
+        </p:style>
+        <p:txBody>
+          <a:bodyPr rtlCol="0" anchor="ctr"/>
+          <a:lstStyle/>
+          <a:p>
+            <a:pPr algn="ctr"/>
+          </a:p>
+        </p:txBody>
+      </p:sp>
+      <p:sp>
+        <p:nvSpPr>
+          <p:cNvPr id="7" name="TextBox 6"/>
           <p:cNvSpPr txBox="1"/>
           <p:nvPr/>
         </p:nvSpPr>
         <p:spPr>
           <a:xfrm>
-            <a:off x="457200" y="1170432"/>
-            <a:ext cx="11277295" cy="5230368"/>
+            <a:off x="685800" y="1307592"/>
+            <a:ext cx="10820095" cy="256032"/>
+          </a:xfrm>
+          <a:prstGeom prst="rect">
+            <a:avLst/>
+          </a:prstGeom>
+          <a:noFill/>
+        </p:spPr>
+        <p:txBody>
+          <a:bodyPr wrap="square" anchor="ctr"/>
+          <a:lstStyle/>
+          <a:p>
+            <a:r>
+              <a:rPr sz="1000" b="1" i="0">
+                <a:solidFill>
+                  <a:srgbClr val="269CCB"/>
+                </a:solidFill>
+                <a:latin typeface="Calibri"/>
+              </a:rPr>
+              <a:t>● ● ●</a:t>
+            </a:r>
+          </a:p>
+        </p:txBody>
+      </p:sp>
+      <p:sp>
+        <p:nvSpPr>
+          <p:cNvPr id="8" name="TextBox 7"/>
+          <p:cNvSpPr txBox="1"/>
+          <p:nvPr/>
+        </p:nvSpPr>
+        <p:spPr>
+          <a:xfrm>
+            <a:off x="777240" y="1719072"/>
+            <a:ext cx="10637215" cy="4453128"/>
           </a:xfrm>
           <a:prstGeom prst="rect">
             <a:avLst/>
@@ -9195,88 +9559,200 @@
           <a:p>
             <a:pPr>
               <a:spcAft>
-                <a:spcPts val="800"/>
-              </a:spcAft>
-            </a:pPr>
-            <a:r>
-              <a:rPr sz="2000" b="0" i="0">
-                <a:solidFill>
-                  <a:srgbClr val="333333"/>
-                </a:solidFill>
-                <a:latin typeface="Calibri"/>
-              </a:rPr>
-              <a:t>–   Tercera: entonces la base de datos tambien va en un contenedor.</a:t>
-            </a:r>
-          </a:p>
-          <a:p>
-            <a:pPr>
-              <a:spcAft>
-                <a:spcPts val="800"/>
-              </a:spcAft>
-            </a:pPr>
-            <a:r>
-              <a:rPr sz="2000" b="0" i="0">
-                <a:solidFill>
-                  <a:srgbClr val="333333"/>
-                </a:solidFill>
-                <a:latin typeface="Calibri"/>
-              </a:rPr>
-              <a:t>–   Para desarrollo y para este curso si, y es la practica normal; en produccion la respuesta honesta es que muchas organizaciones prefieren un servicio de datos gestionado, que es precisamente la decision registrada en el ADR de la Clase 2.</a:t>
-            </a:r>
-          </a:p>
-          <a:p>
-            <a:pPr>
-              <a:spcAft>
-                <a:spcPts val="800"/>
-              </a:spcAft>
-            </a:pPr>
-            <a:r>
-              <a:rPr sz="2000" b="0" i="0">
-                <a:solidFill>
-                  <a:srgbClr val="333333"/>
-                </a:solidFill>
-                <a:latin typeface="Calibri"/>
-              </a:rPr>
-              <a:t>–   Antes de cerrar hay que desactivar una colision de vocabulario que arruina la Clase 4 si no se advierte hoy.</a:t>
-            </a:r>
-          </a:p>
-          <a:p>
-            <a:pPr>
-              <a:spcAft>
-                <a:spcPts val="800"/>
-              </a:spcAft>
-            </a:pPr>
-            <a:r>
-              <a:rPr sz="2000" b="0" i="0">
-                <a:solidFill>
-                  <a:srgbClr val="333333"/>
-                </a:solidFill>
-                <a:latin typeface="Calibri"/>
-              </a:rPr>
-              <a:t>–   En el modelo C4, la palabra contenedor significa cualquier cosa que se ejecuta o almacena de forma independiente, como una aplicacion web, una API o una base de datos, y es un concepto de diagrama anterior a Docker.</a:t>
-            </a:r>
-          </a:p>
-          <a:p>
-            <a:pPr>
-              <a:spcAft>
-                <a:spcPts val="800"/>
-              </a:spcAft>
-            </a:pPr>
-            <a:r>
-              <a:rPr sz="2000" b="0" i="0">
-                <a:solidFill>
-                  <a:srgbClr val="333333"/>
-                </a:solidFill>
-                <a:latin typeface="Calibri"/>
-              </a:rPr>
-              <a:t>–   El contenedor de Docker, en cambio, es un mecanismo concreto de empaquetado y ejecucion.</a:t>
-            </a:r>
-          </a:p>
-        </p:txBody>
-      </p:sp>
-      <p:sp>
-        <p:nvSpPr>
-          <p:cNvPr id="6" name="TextBox 5"/>
+                <a:spcPts val="400"/>
+              </a:spcAft>
+            </a:pPr>
+            <a:r>
+              <a:rPr sz="1400" b="0" i="0">
+                <a:solidFill>
+                  <a:srgbClr val="FFFFFF"/>
+                </a:solidFill>
+                <a:latin typeface="Calibri"/>
+              </a:rPr>
+              <a:t># 1. construir la imagen y etiquetarla con version</a:t>
+            </a:r>
+          </a:p>
+          <a:p>
+            <a:pPr>
+              <a:spcAft>
+                <a:spcPts val="400"/>
+              </a:spcAft>
+            </a:pPr>
+            <a:r>
+              <a:rPr sz="1400" b="0" i="0">
+                <a:solidFill>
+                  <a:srgbClr val="FFFFFF"/>
+                </a:solidFill>
+                <a:latin typeface="Calibri"/>
+              </a:rPr>
+              <a:t>$ docker build -t turnos-api:0.1.0.</a:t>
+            </a:r>
+          </a:p>
+          <a:p>
+            <a:pPr>
+              <a:spcAft>
+                <a:spcPts val="400"/>
+              </a:spcAft>
+            </a:pPr>
+            <a:r>
+              <a:rPr sz="1400" b="0" i="0">
+                <a:solidFill>
+                  <a:srgbClr val="FFFFFF"/>
+                </a:solidFill>
+                <a:latin typeface="Calibri"/>
+              </a:rPr>
+              <a:t/>
+            </a:r>
+          </a:p>
+          <a:p>
+            <a:pPr>
+              <a:spcAft>
+                <a:spcPts val="400"/>
+              </a:spcAft>
+            </a:pPr>
+            <a:r>
+              <a:rPr sz="1400" b="0" i="0">
+                <a:solidFill>
+                  <a:srgbClr val="FFFFFF"/>
+                </a:solidFill>
+                <a:latin typeface="Calibri"/>
+              </a:rPr>
+              <a:t># 2. ejecutarla publicando el puerto (host:contenedor)</a:t>
+            </a:r>
+          </a:p>
+          <a:p>
+            <a:pPr>
+              <a:spcAft>
+                <a:spcPts val="400"/>
+              </a:spcAft>
+            </a:pPr>
+            <a:r>
+              <a:rPr sz="1400" b="0" i="0">
+                <a:solidFill>
+                  <a:srgbClr val="FFFFFF"/>
+                </a:solidFill>
+                <a:latin typeface="Calibri"/>
+              </a:rPr>
+              <a:t>$ docker run -d --name turnos -p 8080:3000 turnos-api:0.1.0</a:t>
+            </a:r>
+          </a:p>
+          <a:p>
+            <a:pPr>
+              <a:spcAft>
+                <a:spcPts val="400"/>
+              </a:spcAft>
+            </a:pPr>
+            <a:r>
+              <a:rPr sz="1400" b="0" i="0">
+                <a:solidFill>
+                  <a:srgbClr val="FFFFFF"/>
+                </a:solidFill>
+                <a:latin typeface="Calibri"/>
+              </a:rPr>
+              <a:t/>
+            </a:r>
+          </a:p>
+          <a:p>
+            <a:pPr>
+              <a:spcAft>
+                <a:spcPts val="400"/>
+              </a:spcAft>
+            </a:pPr>
+            <a:r>
+              <a:rPr sz="1400" b="0" i="0">
+                <a:solidFill>
+                  <a:srgbClr val="FFFFFF"/>
+                </a:solidFill>
+                <a:latin typeface="Calibri"/>
+              </a:rPr>
+              <a:t># 3. verificar que responde DE VERDAD, no que el contenedor existe</a:t>
+            </a:r>
+          </a:p>
+          <a:p>
+            <a:pPr>
+              <a:spcAft>
+                <a:spcPts val="400"/>
+              </a:spcAft>
+            </a:pPr>
+            <a:r>
+              <a:rPr sz="1400" b="0" i="0">
+                <a:solidFill>
+                  <a:srgbClr val="FFFFFF"/>
+                </a:solidFill>
+                <a:latin typeface="Calibri"/>
+              </a:rPr>
+              <a:t>$ curl -i http://localhost:8080/health</a:t>
+            </a:r>
+          </a:p>
+          <a:p>
+            <a:pPr>
+              <a:spcAft>
+                <a:spcPts val="400"/>
+              </a:spcAft>
+            </a:pPr>
+            <a:r>
+              <a:rPr sz="1400" b="0" i="0">
+                <a:solidFill>
+                  <a:srgbClr val="FFFFFF"/>
+                </a:solidFill>
+                <a:latin typeface="Calibri"/>
+              </a:rPr>
+              <a:t>HTTP/1.1 200 OK</a:t>
+            </a:r>
+          </a:p>
+          <a:p>
+            <a:pPr>
+              <a:spcAft>
+                <a:spcPts val="400"/>
+              </a:spcAft>
+            </a:pPr>
+            <a:r>
+              <a:rPr sz="1400" b="0" i="0">
+                <a:solidFill>
+                  <a:srgbClr val="FFFFFF"/>
+                </a:solidFill>
+                <a:latin typeface="Calibri"/>
+              </a:rPr>
+              <a:t/>
+            </a:r>
+          </a:p>
+          <a:p>
+            <a:pPr>
+              <a:spcAft>
+                <a:spcPts val="400"/>
+              </a:spcAft>
+            </a:pPr>
+            <a:r>
+              <a:rPr sz="1400" b="0" i="0">
+                <a:solidFill>
+                  <a:srgbClr val="FFFFFF"/>
+                </a:solidFill>
+                <a:latin typeface="Calibri"/>
+              </a:rPr>
+              <a:t># 4. si no responde, el log es el primer sitio, no el ultimo</a:t>
+            </a:r>
+          </a:p>
+          <a:p>
+            <a:pPr>
+              <a:spcAft>
+                <a:spcPts val="400"/>
+              </a:spcAft>
+            </a:pPr>
+            <a:r>
+              <a:rPr sz="1400" b="0" i="0">
+                <a:solidFill>
+                  <a:srgbClr val="FFFFFF"/>
+                </a:solidFill>
+                <a:latin typeface="Calibri"/>
+              </a:rPr>
+              <a:t>$ docker logs turnos --tail 20</a:t>
+            </a:r>
+          </a:p>
+        </p:txBody>
+      </p:sp>
+      <p:sp>
+        <p:nvSpPr>
+          <p:cNvPr id="9" name="TextBox 8"/>
           <p:cNvSpPr txBox="1"/>
           <p:nvPr/>
         </p:nvSpPr>
@@ -9450,21 +9926,141 @@
                 </a:solidFill>
                 <a:latin typeface="Calibri"/>
               </a:rPr>
-              <a:t>Preguntas frecuentes y cierre conceptual () (3/4)</a:t>
-            </a:r>
-          </a:p>
-        </p:txBody>
-      </p:sp>
-      <p:sp>
-        <p:nvSpPr>
-          <p:cNvPr id="5" name="TextBox 4"/>
+              <a:t>Imagen, contenedor y capas: los comandos que lo demuestran</a:t>
+            </a:r>
+          </a:p>
+        </p:txBody>
+      </p:sp>
+      <p:sp>
+        <p:nvSpPr>
+          <p:cNvPr id="5" name="Rounded Rectangle 4"/>
+          <p:cNvSpPr/>
+          <p:nvPr/>
+        </p:nvSpPr>
+        <p:spPr>
+          <a:xfrm>
+            <a:off x="457200" y="1261872"/>
+            <a:ext cx="11277295" cy="5093208"/>
+          </a:xfrm>
+          <a:prstGeom prst="roundRect">
+            <a:avLst>
+              <a:gd name="adj" fmla="val 12000"/>
+            </a:avLst>
+          </a:prstGeom>
+          <a:solidFill>
+            <a:srgbClr val="1E2A38"/>
+          </a:solidFill>
+          <a:ln>
+            <a:noFill/>
+          </a:ln>
+        </p:spPr>
+        <p:style>
+          <a:lnRef idx="1">
+            <a:schemeClr val="accent1"/>
+          </a:lnRef>
+          <a:fillRef idx="3">
+            <a:schemeClr val="accent1"/>
+          </a:fillRef>
+          <a:effectRef idx="2">
+            <a:schemeClr val="accent1"/>
+          </a:effectRef>
+          <a:fontRef idx="minor">
+            <a:schemeClr val="lt1"/>
+          </a:fontRef>
+        </p:style>
+        <p:txBody>
+          <a:bodyPr rtlCol="0" anchor="ctr"/>
+          <a:lstStyle/>
+          <a:p>
+            <a:pPr algn="ctr"/>
+          </a:p>
+        </p:txBody>
+      </p:sp>
+      <p:sp>
+        <p:nvSpPr>
+          <p:cNvPr id="6" name="Rectangle 5"/>
+          <p:cNvSpPr/>
+          <p:nvPr/>
+        </p:nvSpPr>
+        <p:spPr>
+          <a:xfrm>
+            <a:off x="457200" y="1261872"/>
+            <a:ext cx="11277295" cy="320040"/>
+          </a:xfrm>
+          <a:prstGeom prst="rect">
+            <a:avLst/>
+          </a:prstGeom>
+          <a:solidFill>
+            <a:srgbClr val="095292"/>
+          </a:solidFill>
+          <a:ln>
+            <a:noFill/>
+          </a:ln>
+        </p:spPr>
+        <p:style>
+          <a:lnRef idx="1">
+            <a:schemeClr val="accent1"/>
+          </a:lnRef>
+          <a:fillRef idx="3">
+            <a:schemeClr val="accent1"/>
+          </a:fillRef>
+          <a:effectRef idx="2">
+            <a:schemeClr val="accent1"/>
+          </a:effectRef>
+          <a:fontRef idx="minor">
+            <a:schemeClr val="lt1"/>
+          </a:fontRef>
+        </p:style>
+        <p:txBody>
+          <a:bodyPr rtlCol="0" anchor="ctr"/>
+          <a:lstStyle/>
+          <a:p>
+            <a:pPr algn="ctr"/>
+          </a:p>
+        </p:txBody>
+      </p:sp>
+      <p:sp>
+        <p:nvSpPr>
+          <p:cNvPr id="7" name="TextBox 6"/>
           <p:cNvSpPr txBox="1"/>
           <p:nvPr/>
         </p:nvSpPr>
         <p:spPr>
           <a:xfrm>
-            <a:off x="457200" y="1170432"/>
-            <a:ext cx="11277295" cy="5230368"/>
+            <a:off x="685800" y="1307592"/>
+            <a:ext cx="10820095" cy="256032"/>
+          </a:xfrm>
+          <a:prstGeom prst="rect">
+            <a:avLst/>
+          </a:prstGeom>
+          <a:noFill/>
+        </p:spPr>
+        <p:txBody>
+          <a:bodyPr wrap="square" anchor="ctr"/>
+          <a:lstStyle/>
+          <a:p>
+            <a:r>
+              <a:rPr sz="1000" b="1" i="0">
+                <a:solidFill>
+                  <a:srgbClr val="269CCB"/>
+                </a:solidFill>
+                <a:latin typeface="Calibri"/>
+              </a:rPr>
+              <a:t>● ● ●</a:t>
+            </a:r>
+          </a:p>
+        </p:txBody>
+      </p:sp>
+      <p:sp>
+        <p:nvSpPr>
+          <p:cNvPr id="8" name="TextBox 7"/>
+          <p:cNvSpPr txBox="1"/>
+          <p:nvPr/>
+        </p:nvSpPr>
+        <p:spPr>
+          <a:xfrm>
+            <a:off x="777240" y="1719072"/>
+            <a:ext cx="10637215" cy="4453128"/>
           </a:xfrm>
           <a:prstGeom prst="rect">
             <a:avLst/>
@@ -9479,88 +10075,200 @@
           <a:p>
             <a:pPr>
               <a:spcAft>
-                <a:spcPts val="800"/>
-              </a:spcAft>
-            </a:pPr>
-            <a:r>
-              <a:rPr sz="2000" b="0" i="0">
-                <a:solidFill>
-                  <a:srgbClr val="333333"/>
-                </a:solidFill>
-                <a:latin typeface="Calibri"/>
-              </a:rPr>
-              <a:t>–   Se parecen y a menudo coinciden uno a uno, pero no son sinonimos: una base de datos gestionada que nadie contenerizo sigue siendo un contenedor en el sentido de C4.</a:t>
-            </a:r>
-          </a:p>
-          <a:p>
-            <a:pPr>
-              <a:spcAft>
-                <a:spcPts val="800"/>
-              </a:spcAft>
-            </a:pPr>
-            <a:r>
-              <a:rPr sz="2000" b="0" i="0">
-                <a:solidFill>
-                  <a:srgbClr val="333333"/>
-                </a:solidFill>
-                <a:latin typeface="Calibri"/>
-              </a:rPr>
-              <a:t>–   Decirlo hoy, mientras el estudiante tiene un docker ps en la pantalla, cuesta dos minutos</a:t>
-            </a:r>
-          </a:p>
-          <a:p>
-            <a:pPr>
-              <a:spcAft>
-                <a:spcPts val="800"/>
-              </a:spcAft>
-            </a:pPr>
-            <a:r>
-              <a:rPr sz="2000" b="0" i="0">
-                <a:solidFill>
-                  <a:srgbClr val="333333"/>
-                </a:solidFill>
-                <a:latin typeface="Calibri"/>
-              </a:rPr>
-              <a:t>–   No decirlo cuesta media clase de confusion la semana siguiente, cuando se dibuje el C4 Containers de la app y alguien pregunte si debe dockerizar cada caja del diagrama.</a:t>
-            </a:r>
-          </a:p>
-          <a:p>
-            <a:pPr>
-              <a:spcAft>
-                <a:spcPts val="800"/>
-              </a:spcAft>
-            </a:pPr>
-            <a:r>
-              <a:rPr sz="2000" b="0" i="0">
-                <a:solidFill>
-                  <a:srgbClr val="333333"/>
-                </a:solidFill>
-                <a:latin typeface="Calibri"/>
-              </a:rPr>
-              <a:t>–   Error tipico del docente que no domina el tema: repetir que un contenedor es una maquina virtual liviana y dejarlo ahi.</a:t>
-            </a:r>
-          </a:p>
-          <a:p>
-            <a:pPr>
-              <a:spcAft>
-                <a:spcPts val="800"/>
-              </a:spcAft>
-            </a:pPr>
-            <a:r>
-              <a:rPr sz="2000" b="0" i="0">
-                <a:solidFill>
-                  <a:srgbClr val="333333"/>
-                </a:solidFill>
-                <a:latin typeface="Calibri"/>
-              </a:rPr>
-              <a:t>–   El estudiante que aprende eso concluye que puede correr cualquier cosa en cualquier parte con aislamiento total</a:t>
-            </a:r>
-          </a:p>
-        </p:txBody>
-      </p:sp>
-      <p:sp>
-        <p:nvSpPr>
-          <p:cNvPr id="6" name="TextBox 5"/>
+                <a:spcPts val="400"/>
+              </a:spcAft>
+            </a:pPr>
+            <a:r>
+              <a:rPr sz="1400" b="0" i="0">
+                <a:solidFill>
+                  <a:srgbClr val="FFFFFF"/>
+                </a:solidFill>
+                <a:latin typeface="Calibri"/>
+              </a:rPr>
+              <a:t># La IMAGEN es la plantilla; el CONTENEDOR es una instancia en ejecucion.</a:t>
+            </a:r>
+          </a:p>
+          <a:p>
+            <a:pPr>
+              <a:spcAft>
+                <a:spcPts val="400"/>
+              </a:spcAft>
+            </a:pPr>
+            <a:r>
+              <a:rPr sz="1400" b="0" i="0">
+                <a:solidFill>
+                  <a:srgbClr val="FFFFFF"/>
+                </a:solidFill>
+                <a:latin typeface="Calibri"/>
+              </a:rPr>
+              <a:t>$ docker images turnos-api</a:t>
+            </a:r>
+          </a:p>
+          <a:p>
+            <a:pPr>
+              <a:spcAft>
+                <a:spcPts val="400"/>
+              </a:spcAft>
+            </a:pPr>
+            <a:r>
+              <a:rPr sz="1400" b="0" i="0">
+                <a:solidFill>
+                  <a:srgbClr val="FFFFFF"/>
+                </a:solidFill>
+                <a:latin typeface="Calibri"/>
+              </a:rPr>
+              <a:t>REPOSITORY      TAG     IMAGE ID       SIZE</a:t>
+            </a:r>
+          </a:p>
+          <a:p>
+            <a:pPr>
+              <a:spcAft>
+                <a:spcPts val="400"/>
+              </a:spcAft>
+            </a:pPr>
+            <a:r>
+              <a:rPr sz="1400" b="0" i="0">
+                <a:solidFill>
+                  <a:srgbClr val="FFFFFF"/>
+                </a:solidFill>
+                <a:latin typeface="Calibri"/>
+              </a:rPr>
+              <a:t>turnos-api   0.1.0   a1b2c3d4e5f6   142MB</a:t>
+            </a:r>
+          </a:p>
+          <a:p>
+            <a:pPr>
+              <a:spcAft>
+                <a:spcPts val="400"/>
+              </a:spcAft>
+            </a:pPr>
+            <a:r>
+              <a:rPr sz="1400" b="0" i="0">
+                <a:solidFill>
+                  <a:srgbClr val="FFFFFF"/>
+                </a:solidFill>
+                <a:latin typeface="Calibri"/>
+              </a:rPr>
+              <a:t/>
+            </a:r>
+          </a:p>
+          <a:p>
+            <a:pPr>
+              <a:spcAft>
+                <a:spcPts val="400"/>
+              </a:spcAft>
+            </a:pPr>
+            <a:r>
+              <a:rPr sz="1400" b="0" i="0">
+                <a:solidFill>
+                  <a:srgbClr val="FFFFFF"/>
+                </a:solidFill>
+                <a:latin typeface="Calibri"/>
+              </a:rPr>
+              <a:t>$ docker ps</a:t>
+            </a:r>
+          </a:p>
+          <a:p>
+            <a:pPr>
+              <a:spcAft>
+                <a:spcPts val="400"/>
+              </a:spcAft>
+            </a:pPr>
+            <a:r>
+              <a:rPr sz="1400" b="0" i="0">
+                <a:solidFill>
+                  <a:srgbClr val="FFFFFF"/>
+                </a:solidFill>
+                <a:latin typeface="Calibri"/>
+              </a:rPr>
+              <a:t>CONTAINER ID   IMAGE                 STATUS         PORTS</a:t>
+            </a:r>
+          </a:p>
+          <a:p>
+            <a:pPr>
+              <a:spcAft>
+                <a:spcPts val="400"/>
+              </a:spcAft>
+            </a:pPr>
+            <a:r>
+              <a:rPr sz="1400" b="0" i="0">
+                <a:solidFill>
+                  <a:srgbClr val="FFFFFF"/>
+                </a:solidFill>
+                <a:latin typeface="Calibri"/>
+              </a:rPr>
+              <a:t>9f8e7d6c5b4a   turnos-api:0.1.0   Up 2 minutes   0.0.0.0:8080-&gt;3000/tcp</a:t>
+            </a:r>
+          </a:p>
+          <a:p>
+            <a:pPr>
+              <a:spcAft>
+                <a:spcPts val="400"/>
+              </a:spcAft>
+            </a:pPr>
+            <a:r>
+              <a:rPr sz="1400" b="0" i="0">
+                <a:solidFill>
+                  <a:srgbClr val="FFFFFF"/>
+                </a:solidFill>
+                <a:latin typeface="Calibri"/>
+              </a:rPr>
+              <a:t/>
+            </a:r>
+          </a:p>
+          <a:p>
+            <a:pPr>
+              <a:spcAft>
+                <a:spcPts val="400"/>
+              </a:spcAft>
+            </a:pPr>
+            <a:r>
+              <a:rPr sz="1400" b="0" i="0">
+                <a:solidFill>
+                  <a:srgbClr val="FFFFFF"/>
+                </a:solidFill>
+                <a:latin typeface="Calibri"/>
+              </a:rPr>
+              <a:t># De una imagen salen N contenedores: eso es lo que hace escalar barato.</a:t>
+            </a:r>
+          </a:p>
+          <a:p>
+            <a:pPr>
+              <a:spcAft>
+                <a:spcPts val="400"/>
+              </a:spcAft>
+            </a:pPr>
+            <a:r>
+              <a:rPr sz="1400" b="0" i="0">
+                <a:solidFill>
+                  <a:srgbClr val="FFFFFF"/>
+                </a:solidFill>
+                <a:latin typeface="Calibri"/>
+              </a:rPr>
+              <a:t>$ docker run -d -p 8081:3000 turnos-api:0.1.0</a:t>
+            </a:r>
+          </a:p>
+          <a:p>
+            <a:pPr>
+              <a:spcAft>
+                <a:spcPts val="400"/>
+              </a:spcAft>
+            </a:pPr>
+            <a:r>
+              <a:rPr sz="1400" b="0" i="0">
+                <a:solidFill>
+                  <a:srgbClr val="FFFFFF"/>
+                </a:solidFill>
+                <a:latin typeface="Calibri"/>
+              </a:rPr>
+              <a:t>$ docker run -d -p 8082:3000 turnos-api:0.1.0</a:t>
+            </a:r>
+          </a:p>
+        </p:txBody>
+      </p:sp>
+      <p:sp>
+        <p:nvSpPr>
+          <p:cNvPr id="9" name="TextBox 8"/>
           <p:cNvSpPr txBox="1"/>
           <p:nvPr/>
         </p:nvSpPr>
@@ -9734,21 +10442,141 @@
                 </a:solidFill>
                 <a:latin typeface="Calibri"/>
               </a:rPr>
-              <a:t>Preguntas frecuentes y cierre conceptual () (4/4)</a:t>
-            </a:r>
-          </a:p>
-        </p:txBody>
-      </p:sp>
-      <p:sp>
-        <p:nvSpPr>
-          <p:cNvPr id="5" name="TextBox 4"/>
+              <a:t>Limpiar, y la prueba de que el contenedor no guarda estado</a:t>
+            </a:r>
+          </a:p>
+        </p:txBody>
+      </p:sp>
+      <p:sp>
+        <p:nvSpPr>
+          <p:cNvPr id="5" name="Rounded Rectangle 4"/>
+          <p:cNvSpPr/>
+          <p:nvPr/>
+        </p:nvSpPr>
+        <p:spPr>
+          <a:xfrm>
+            <a:off x="457200" y="1261872"/>
+            <a:ext cx="11277295" cy="5093208"/>
+          </a:xfrm>
+          <a:prstGeom prst="roundRect">
+            <a:avLst>
+              <a:gd name="adj" fmla="val 12000"/>
+            </a:avLst>
+          </a:prstGeom>
+          <a:solidFill>
+            <a:srgbClr val="1E2A38"/>
+          </a:solidFill>
+          <a:ln>
+            <a:noFill/>
+          </a:ln>
+        </p:spPr>
+        <p:style>
+          <a:lnRef idx="1">
+            <a:schemeClr val="accent1"/>
+          </a:lnRef>
+          <a:fillRef idx="3">
+            <a:schemeClr val="accent1"/>
+          </a:fillRef>
+          <a:effectRef idx="2">
+            <a:schemeClr val="accent1"/>
+          </a:effectRef>
+          <a:fontRef idx="minor">
+            <a:schemeClr val="lt1"/>
+          </a:fontRef>
+        </p:style>
+        <p:txBody>
+          <a:bodyPr rtlCol="0" anchor="ctr"/>
+          <a:lstStyle/>
+          <a:p>
+            <a:pPr algn="ctr"/>
+          </a:p>
+        </p:txBody>
+      </p:sp>
+      <p:sp>
+        <p:nvSpPr>
+          <p:cNvPr id="6" name="Rectangle 5"/>
+          <p:cNvSpPr/>
+          <p:nvPr/>
+        </p:nvSpPr>
+        <p:spPr>
+          <a:xfrm>
+            <a:off x="457200" y="1261872"/>
+            <a:ext cx="11277295" cy="320040"/>
+          </a:xfrm>
+          <a:prstGeom prst="rect">
+            <a:avLst/>
+          </a:prstGeom>
+          <a:solidFill>
+            <a:srgbClr val="095292"/>
+          </a:solidFill>
+          <a:ln>
+            <a:noFill/>
+          </a:ln>
+        </p:spPr>
+        <p:style>
+          <a:lnRef idx="1">
+            <a:schemeClr val="accent1"/>
+          </a:lnRef>
+          <a:fillRef idx="3">
+            <a:schemeClr val="accent1"/>
+          </a:fillRef>
+          <a:effectRef idx="2">
+            <a:schemeClr val="accent1"/>
+          </a:effectRef>
+          <a:fontRef idx="minor">
+            <a:schemeClr val="lt1"/>
+          </a:fontRef>
+        </p:style>
+        <p:txBody>
+          <a:bodyPr rtlCol="0" anchor="ctr"/>
+          <a:lstStyle/>
+          <a:p>
+            <a:pPr algn="ctr"/>
+          </a:p>
+        </p:txBody>
+      </p:sp>
+      <p:sp>
+        <p:nvSpPr>
+          <p:cNvPr id="7" name="TextBox 6"/>
           <p:cNvSpPr txBox="1"/>
           <p:nvPr/>
         </p:nvSpPr>
         <p:spPr>
           <a:xfrm>
-            <a:off x="457200" y="1170432"/>
-            <a:ext cx="11277295" cy="5230368"/>
+            <a:off x="685800" y="1307592"/>
+            <a:ext cx="10820095" cy="256032"/>
+          </a:xfrm>
+          <a:prstGeom prst="rect">
+            <a:avLst/>
+          </a:prstGeom>
+          <a:noFill/>
+        </p:spPr>
+        <p:txBody>
+          <a:bodyPr wrap="square" anchor="ctr"/>
+          <a:lstStyle/>
+          <a:p>
+            <a:r>
+              <a:rPr sz="1000" b="1" i="0">
+                <a:solidFill>
+                  <a:srgbClr val="269CCB"/>
+                </a:solidFill>
+                <a:latin typeface="Calibri"/>
+              </a:rPr>
+              <a:t>● ● ●</a:t>
+            </a:r>
+          </a:p>
+        </p:txBody>
+      </p:sp>
+      <p:sp>
+        <p:nvSpPr>
+          <p:cNvPr id="8" name="TextBox 7"/>
+          <p:cNvSpPr txBox="1"/>
+          <p:nvPr/>
+        </p:nvSpPr>
+        <p:spPr>
+          <a:xfrm>
+            <a:off x="777240" y="1719072"/>
+            <a:ext cx="10637215" cy="4453128"/>
           </a:xfrm>
           <a:prstGeom prst="rect">
             <a:avLst/>
@@ -9763,40 +10591,184 @@
           <a:p>
             <a:pPr>
               <a:spcAft>
-                <a:spcPts val="800"/>
-              </a:spcAft>
-            </a:pPr>
-            <a:r>
-              <a:rPr sz="2000" b="0" i="0">
-                <a:solidFill>
-                  <a:srgbClr val="333333"/>
-                </a:solidFill>
-                <a:latin typeface="Calibri"/>
-              </a:rPr>
-              <a:t>–   Y en la Clase 6 no entendera por que el kernel compartido es un asunto de seguridad, ni por que existe la recomendacion de no ejecutar el proceso como usuario root dentro del contenedor.</a:t>
-            </a:r>
-          </a:p>
-          <a:p>
-            <a:pPr>
-              <a:spcAft>
-                <a:spcPts val="800"/>
-              </a:spcAft>
-            </a:pPr>
-            <a:r>
-              <a:rPr sz="2000" b="0" i="0">
-                <a:solidFill>
-                  <a:srgbClr val="333333"/>
-                </a:solidFill>
-                <a:latin typeface="Calibri"/>
-              </a:rPr>
-              <a:t>–   El segundo error es convertir la clase en un recetario de comandos: dictar docker build, docker run y docker ps al tablero para que todos copien, sin explicar la distincion entre imagen y contenedor ni el modelo de capas.</a:t>
-            </a:r>
-          </a:p>
-        </p:txBody>
-      </p:sp>
-      <p:sp>
-        <p:nvSpPr>
-          <p:cNvPr id="6" name="TextBox 5"/>
+                <a:spcPts val="400"/>
+              </a:spcAft>
+            </a:pPr>
+            <a:r>
+              <a:rPr sz="1400" b="0" i="0">
+                <a:solidFill>
+                  <a:srgbClr val="FFFFFF"/>
+                </a:solidFill>
+                <a:latin typeface="Calibri"/>
+              </a:rPr>
+              <a:t>$ docker stop turnos &amp;&amp; docker rm turnos</a:t>
+            </a:r>
+          </a:p>
+          <a:p>
+            <a:pPr>
+              <a:spcAft>
+                <a:spcPts val="400"/>
+              </a:spcAft>
+            </a:pPr>
+            <a:r>
+              <a:rPr sz="1400" b="0" i="0">
+                <a:solidFill>
+                  <a:srgbClr val="FFFFFF"/>
+                </a:solidFill>
+                <a:latin typeface="Calibri"/>
+              </a:rPr>
+              <a:t/>
+            </a:r>
+          </a:p>
+          <a:p>
+            <a:pPr>
+              <a:spcAft>
+                <a:spcPts val="400"/>
+              </a:spcAft>
+            </a:pPr>
+            <a:r>
+              <a:rPr sz="1400" b="0" i="0">
+                <a:solidFill>
+                  <a:srgbClr val="FFFFFF"/>
+                </a:solidFill>
+                <a:latin typeface="Calibri"/>
+              </a:rPr>
+              <a:t># Lo escrito DENTRO del contenedor se va con el:</a:t>
+            </a:r>
+          </a:p>
+          <a:p>
+            <a:pPr>
+              <a:spcAft>
+                <a:spcPts val="400"/>
+              </a:spcAft>
+            </a:pPr>
+            <a:r>
+              <a:rPr sz="1400" b="0" i="0">
+                <a:solidFill>
+                  <a:srgbClr val="FFFFFF"/>
+                </a:solidFill>
+                <a:latin typeface="Calibri"/>
+              </a:rPr>
+              <a:t>$ docker run -d --name c1 turnos-api:0.1.0</a:t>
+            </a:r>
+          </a:p>
+          <a:p>
+            <a:pPr>
+              <a:spcAft>
+                <a:spcPts val="400"/>
+              </a:spcAft>
+            </a:pPr>
+            <a:r>
+              <a:rPr sz="1400" b="0" i="0">
+                <a:solidFill>
+                  <a:srgbClr val="FFFFFF"/>
+                </a:solidFill>
+                <a:latin typeface="Calibri"/>
+              </a:rPr>
+              <a:t>$ docker exec c1 sh -c 'echo hola &gt; /tmp/dato.txt'</a:t>
+            </a:r>
+          </a:p>
+          <a:p>
+            <a:pPr>
+              <a:spcAft>
+                <a:spcPts val="400"/>
+              </a:spcAft>
+            </a:pPr>
+            <a:r>
+              <a:rPr sz="1400" b="0" i="0">
+                <a:solidFill>
+                  <a:srgbClr val="FFFFFF"/>
+                </a:solidFill>
+                <a:latin typeface="Calibri"/>
+              </a:rPr>
+              <a:t>$ docker rm -f c1</a:t>
+            </a:r>
+          </a:p>
+          <a:p>
+            <a:pPr>
+              <a:spcAft>
+                <a:spcPts val="400"/>
+              </a:spcAft>
+            </a:pPr>
+            <a:r>
+              <a:rPr sz="1400" b="0" i="0">
+                <a:solidFill>
+                  <a:srgbClr val="FFFFFF"/>
+                </a:solidFill>
+                <a:latin typeface="Calibri"/>
+              </a:rPr>
+              <a:t>$ docker run --rm turnos-api:0.1.0 cat /tmp/dato.txt</a:t>
+            </a:r>
+          </a:p>
+          <a:p>
+            <a:pPr>
+              <a:spcAft>
+                <a:spcPts val="400"/>
+              </a:spcAft>
+            </a:pPr>
+            <a:r>
+              <a:rPr sz="1400" b="0" i="0">
+                <a:solidFill>
+                  <a:srgbClr val="FFFFFF"/>
+                </a:solidFill>
+                <a:latin typeface="Calibri"/>
+              </a:rPr>
+              <a:t>cat: can't open '/tmp/dato.txt': No such file or directory</a:t>
+            </a:r>
+          </a:p>
+          <a:p>
+            <a:pPr>
+              <a:spcAft>
+                <a:spcPts val="400"/>
+              </a:spcAft>
+            </a:pPr>
+            <a:r>
+              <a:rPr sz="1400" b="0" i="0">
+                <a:solidFill>
+                  <a:srgbClr val="FFFFFF"/>
+                </a:solidFill>
+                <a:latin typeface="Calibri"/>
+              </a:rPr>
+              <a:t/>
+            </a:r>
+          </a:p>
+          <a:p>
+            <a:pPr>
+              <a:spcAft>
+                <a:spcPts val="400"/>
+              </a:spcAft>
+            </a:pPr>
+            <a:r>
+              <a:rPr sz="1400" b="0" i="0">
+                <a:solidFill>
+                  <a:srgbClr val="FFFFFF"/>
+                </a:solidFill>
+                <a:latin typeface="Calibri"/>
+              </a:rPr>
+              <a:t># Por eso el estado vive fuera: volumen o base de datos gestionada.</a:t>
+            </a:r>
+          </a:p>
+          <a:p>
+            <a:pPr>
+              <a:spcAft>
+                <a:spcPts val="400"/>
+              </a:spcAft>
+            </a:pPr>
+            <a:r>
+              <a:rPr sz="1400" b="0" i="0">
+                <a:solidFill>
+                  <a:srgbClr val="FFFFFF"/>
+                </a:solidFill>
+                <a:latin typeface="Calibri"/>
+              </a:rPr>
+              <a:t>$ docker run -d -v turnos_datos:/app/data turnos-api:0.1.0</a:t>
+            </a:r>
+          </a:p>
+        </p:txBody>
+      </p:sp>
+      <p:sp>
+        <p:nvSpPr>
+          <p:cNvPr id="9" name="TextBox 8"/>
           <p:cNvSpPr txBox="1"/>
           <p:nvPr/>
         </p:nvSpPr>
@@ -9864,7 +10836,7 @@
         <p:spPr>
           <a:xfrm>
             <a:off x="0" y="0"/>
-            <a:ext cx="12191695" cy="960120"/>
+            <a:ext cx="12191695" cy="1170432"/>
           </a:xfrm>
           <a:prstGeom prst="rect">
             <a:avLst/>
@@ -9906,7 +10878,7 @@
         </p:nvSpPr>
         <p:spPr>
           <a:xfrm>
-            <a:off x="0" y="960120"/>
+            <a:off x="0" y="1170432"/>
             <a:ext cx="12191695" cy="41148"/>
           </a:xfrm>
           <a:prstGeom prst="rect">
@@ -9950,7 +10922,7 @@
         <p:spPr>
           <a:xfrm>
             <a:off x="457200" y="164592"/>
-            <a:ext cx="11277295" cy="502920"/>
+            <a:ext cx="11277295" cy="384048"/>
           </a:xfrm>
           <a:prstGeom prst="rect">
             <a:avLst/>
@@ -9970,69 +10942,60 @@
                 </a:solidFill>
                 <a:latin typeface="Calibri"/>
               </a:rPr>
-              <a:t>El Dockerfile minimo, capa por capa</a:t>
-            </a:r>
-          </a:p>
-        </p:txBody>
-      </p:sp>
-      <p:sp>
-        <p:nvSpPr>
-          <p:cNvPr id="5" name="Rounded Rectangle 4"/>
+              <a:t>Máquinas virtuales vs. contenedores</a:t>
+            </a:r>
+          </a:p>
+        </p:txBody>
+      </p:sp>
+      <p:sp>
+        <p:nvSpPr>
+          <p:cNvPr id="5" name="TextBox 4"/>
+          <p:cNvSpPr txBox="1"/>
+          <p:nvPr/>
+        </p:nvSpPr>
+        <p:spPr>
+          <a:xfrm>
+            <a:off x="457200" y="566928"/>
+            <a:ext cx="11277295" cy="411480"/>
+          </a:xfrm>
+          <a:prstGeom prst="rect">
+            <a:avLst/>
+          </a:prstGeom>
+          <a:noFill/>
+        </p:spPr>
+        <p:txBody>
+          <a:bodyPr wrap="square">
+            <a:spAutoFit/>
+          </a:bodyPr>
+          <a:lstStyle/>
+          <a:p>
+            <a:r>
+              <a:rPr sz="1400" b="0" i="0">
+                <a:solidFill>
+                  <a:srgbClr val="B8D8EE"/>
+                </a:solidFill>
+                <a:latin typeface="Calibri"/>
+              </a:rPr>
+              <a:t>Misma capacidad de cómputo, distinto nivel de aislamiento</a:t>
+            </a:r>
+          </a:p>
+        </p:txBody>
+      </p:sp>
+      <p:sp>
+        <p:nvSpPr>
+          <p:cNvPr id="6" name="Rounded Rectangle 5"/>
           <p:cNvSpPr/>
           <p:nvPr/>
         </p:nvSpPr>
         <p:spPr>
           <a:xfrm>
-            <a:off x="457200" y="1261872"/>
-            <a:ext cx="11277295" cy="5093208"/>
+            <a:off x="822960" y="1417320"/>
+            <a:ext cx="3931920" cy="457200"/>
           </a:xfrm>
           <a:prstGeom prst="roundRect">
             <a:avLst>
               <a:gd name="adj" fmla="val 12000"/>
             </a:avLst>
-          </a:prstGeom>
-          <a:solidFill>
-            <a:srgbClr val="1E2A38"/>
-          </a:solidFill>
-          <a:ln>
-            <a:noFill/>
-          </a:ln>
-        </p:spPr>
-        <p:style>
-          <a:lnRef idx="1">
-            <a:schemeClr val="accent1"/>
-          </a:lnRef>
-          <a:fillRef idx="3">
-            <a:schemeClr val="accent1"/>
-          </a:fillRef>
-          <a:effectRef idx="2">
-            <a:schemeClr val="accent1"/>
-          </a:effectRef>
-          <a:fontRef idx="minor">
-            <a:schemeClr val="lt1"/>
-          </a:fontRef>
-        </p:style>
-        <p:txBody>
-          <a:bodyPr rtlCol="0" anchor="ctr"/>
-          <a:lstStyle/>
-          <a:p>
-            <a:pPr algn="ctr"/>
-          </a:p>
-        </p:txBody>
-      </p:sp>
-      <p:sp>
-        <p:nvSpPr>
-          <p:cNvPr id="6" name="Rectangle 5"/>
-          <p:cNvSpPr/>
-          <p:nvPr/>
-        </p:nvSpPr>
-        <p:spPr>
-          <a:xfrm>
-            <a:off x="457200" y="1261872"/>
-            <a:ext cx="11277295" cy="320040"/>
-          </a:xfrm>
-          <a:prstGeom prst="rect">
-            <a:avLst/>
           </a:prstGeom>
           <a:solidFill>
             <a:srgbClr val="095292"/>
@@ -10056,55 +11019,630 @@
           </a:fontRef>
         </p:style>
         <p:txBody>
-          <a:bodyPr rtlCol="0" anchor="ctr"/>
+          <a:bodyPr rtlCol="0" anchor="ctr" wrap="square"/>
           <a:lstStyle/>
           <a:p>
             <a:pPr algn="ctr"/>
-          </a:p>
-        </p:txBody>
-      </p:sp>
-      <p:sp>
-        <p:nvSpPr>
-          <p:cNvPr id="7" name="TextBox 6"/>
+            <a:r>
+              <a:rPr sz="1200" b="1" i="0">
+                <a:solidFill>
+                  <a:srgbClr val="FFFFFF"/>
+                </a:solidFill>
+                <a:latin typeface="Calibri"/>
+              </a:rPr>
+              <a:t>Máquinas virtuales</a:t>
+            </a:r>
+          </a:p>
+        </p:txBody>
+      </p:sp>
+      <p:sp>
+        <p:nvSpPr>
+          <p:cNvPr id="7" name="Rounded Rectangle 6"/>
+          <p:cNvSpPr/>
+          <p:nvPr/>
+        </p:nvSpPr>
+        <p:spPr>
+          <a:xfrm>
+            <a:off x="822960" y="2057400"/>
+            <a:ext cx="3931920" cy="594360"/>
+          </a:xfrm>
+          <a:prstGeom prst="roundRect">
+            <a:avLst>
+              <a:gd name="adj" fmla="val 12000"/>
+            </a:avLst>
+          </a:prstGeom>
+          <a:solidFill>
+            <a:srgbClr val="333333"/>
+          </a:solidFill>
+          <a:ln>
+            <a:noFill/>
+          </a:ln>
+        </p:spPr>
+        <p:style>
+          <a:lnRef idx="1">
+            <a:schemeClr val="accent1"/>
+          </a:lnRef>
+          <a:fillRef idx="3">
+            <a:schemeClr val="accent1"/>
+          </a:fillRef>
+          <a:effectRef idx="2">
+            <a:schemeClr val="accent1"/>
+          </a:effectRef>
+          <a:fontRef idx="minor">
+            <a:schemeClr val="lt1"/>
+          </a:fontRef>
+        </p:style>
+        <p:txBody>
+          <a:bodyPr rtlCol="0" anchor="ctr" wrap="square"/>
+          <a:lstStyle/>
+          <a:p>
+            <a:pPr algn="ctr"/>
+            <a:r>
+              <a:rPr sz="1300" b="1" i="0">
+                <a:solidFill>
+                  <a:srgbClr val="FFFFFF"/>
+                </a:solidFill>
+                <a:latin typeface="Calibri"/>
+              </a:rPr>
+              <a:t>Hardware físico</a:t>
+            </a:r>
+          </a:p>
+        </p:txBody>
+      </p:sp>
+      <p:sp>
+        <p:nvSpPr>
+          <p:cNvPr id="8" name="Rounded Rectangle 7"/>
+          <p:cNvSpPr/>
+          <p:nvPr/>
+        </p:nvSpPr>
+        <p:spPr>
+          <a:xfrm>
+            <a:off x="822960" y="2697480"/>
+            <a:ext cx="3931920" cy="594360"/>
+          </a:xfrm>
+          <a:prstGeom prst="roundRect">
+            <a:avLst>
+              <a:gd name="adj" fmla="val 12000"/>
+            </a:avLst>
+          </a:prstGeom>
+          <a:solidFill>
+            <a:srgbClr val="269CCB"/>
+          </a:solidFill>
+          <a:ln>
+            <a:noFill/>
+          </a:ln>
+        </p:spPr>
+        <p:style>
+          <a:lnRef idx="1">
+            <a:schemeClr val="accent1"/>
+          </a:lnRef>
+          <a:fillRef idx="3">
+            <a:schemeClr val="accent1"/>
+          </a:fillRef>
+          <a:effectRef idx="2">
+            <a:schemeClr val="accent1"/>
+          </a:effectRef>
+          <a:fontRef idx="minor">
+            <a:schemeClr val="lt1"/>
+          </a:fontRef>
+        </p:style>
+        <p:txBody>
+          <a:bodyPr rtlCol="0" anchor="ctr" wrap="square"/>
+          <a:lstStyle/>
+          <a:p>
+            <a:pPr algn="ctr"/>
+            <a:r>
+              <a:rPr sz="1300" b="1" i="0">
+                <a:solidFill>
+                  <a:srgbClr val="FFFFFF"/>
+                </a:solidFill>
+                <a:latin typeface="Calibri"/>
+              </a:rPr>
+              <a:t>Hipervisor</a:t>
+            </a:r>
+          </a:p>
+        </p:txBody>
+      </p:sp>
+      <p:sp>
+        <p:nvSpPr>
+          <p:cNvPr id="9" name="Rounded Rectangle 8"/>
+          <p:cNvSpPr/>
+          <p:nvPr/>
+        </p:nvSpPr>
+        <p:spPr>
+          <a:xfrm>
+            <a:off x="822960" y="3337560"/>
+            <a:ext cx="1874519" cy="640080"/>
+          </a:xfrm>
+          <a:prstGeom prst="roundRect">
+            <a:avLst>
+              <a:gd name="adj" fmla="val 12000"/>
+            </a:avLst>
+          </a:prstGeom>
+          <a:solidFill>
+            <a:srgbClr val="269CCB"/>
+          </a:solidFill>
+          <a:ln>
+            <a:noFill/>
+          </a:ln>
+        </p:spPr>
+        <p:style>
+          <a:lnRef idx="1">
+            <a:schemeClr val="accent1"/>
+          </a:lnRef>
+          <a:fillRef idx="3">
+            <a:schemeClr val="accent1"/>
+          </a:fillRef>
+          <a:effectRef idx="2">
+            <a:schemeClr val="accent1"/>
+          </a:effectRef>
+          <a:fontRef idx="minor">
+            <a:schemeClr val="lt1"/>
+          </a:fontRef>
+        </p:style>
+        <p:txBody>
+          <a:bodyPr rtlCol="0" anchor="ctr" wrap="square"/>
+          <a:lstStyle/>
+          <a:p>
+            <a:pPr algn="ctr"/>
+            <a:r>
+              <a:rPr sz="1100" b="1" i="0">
+                <a:solidFill>
+                  <a:srgbClr val="FFFFFF"/>
+                </a:solidFill>
+                <a:latin typeface="Calibri"/>
+              </a:rPr>
+              <a:t>SO invitado A
+(completo)</a:t>
+            </a:r>
+          </a:p>
+        </p:txBody>
+      </p:sp>
+      <p:sp>
+        <p:nvSpPr>
+          <p:cNvPr id="10" name="Rounded Rectangle 9"/>
+          <p:cNvSpPr/>
+          <p:nvPr/>
+        </p:nvSpPr>
+        <p:spPr>
+          <a:xfrm>
+            <a:off x="2880360" y="3337560"/>
+            <a:ext cx="1874519" cy="640080"/>
+          </a:xfrm>
+          <a:prstGeom prst="roundRect">
+            <a:avLst>
+              <a:gd name="adj" fmla="val 12000"/>
+            </a:avLst>
+          </a:prstGeom>
+          <a:solidFill>
+            <a:srgbClr val="269CCB"/>
+          </a:solidFill>
+          <a:ln>
+            <a:noFill/>
+          </a:ln>
+        </p:spPr>
+        <p:style>
+          <a:lnRef idx="1">
+            <a:schemeClr val="accent1"/>
+          </a:lnRef>
+          <a:fillRef idx="3">
+            <a:schemeClr val="accent1"/>
+          </a:fillRef>
+          <a:effectRef idx="2">
+            <a:schemeClr val="accent1"/>
+          </a:effectRef>
+          <a:fontRef idx="minor">
+            <a:schemeClr val="lt1"/>
+          </a:fontRef>
+        </p:style>
+        <p:txBody>
+          <a:bodyPr rtlCol="0" anchor="ctr" wrap="square"/>
+          <a:lstStyle/>
+          <a:p>
+            <a:pPr algn="ctr"/>
+            <a:r>
+              <a:rPr sz="1100" b="1" i="0">
+                <a:solidFill>
+                  <a:srgbClr val="FFFFFF"/>
+                </a:solidFill>
+                <a:latin typeface="Calibri"/>
+              </a:rPr>
+              <a:t>SO invitado B
+(completo)</a:t>
+            </a:r>
+          </a:p>
+        </p:txBody>
+      </p:sp>
+      <p:sp>
+        <p:nvSpPr>
+          <p:cNvPr id="11" name="Rounded Rectangle 10"/>
+          <p:cNvSpPr/>
+          <p:nvPr/>
+        </p:nvSpPr>
+        <p:spPr>
+          <a:xfrm>
+            <a:off x="822960" y="4023360"/>
+            <a:ext cx="1874519" cy="548640"/>
+          </a:xfrm>
+          <a:prstGeom prst="roundRect">
+            <a:avLst>
+              <a:gd name="adj" fmla="val 12000"/>
+            </a:avLst>
+          </a:prstGeom>
+          <a:solidFill>
+            <a:srgbClr val="FFD000"/>
+          </a:solidFill>
+          <a:ln>
+            <a:noFill/>
+          </a:ln>
+        </p:spPr>
+        <p:style>
+          <a:lnRef idx="1">
+            <a:schemeClr val="accent1"/>
+          </a:lnRef>
+          <a:fillRef idx="3">
+            <a:schemeClr val="accent1"/>
+          </a:fillRef>
+          <a:effectRef idx="2">
+            <a:schemeClr val="accent1"/>
+          </a:effectRef>
+          <a:fontRef idx="minor">
+            <a:schemeClr val="lt1"/>
+          </a:fontRef>
+        </p:style>
+        <p:txBody>
+          <a:bodyPr rtlCol="0" anchor="ctr" wrap="square"/>
+          <a:lstStyle/>
+          <a:p>
+            <a:pPr algn="ctr"/>
+            <a:r>
+              <a:rPr sz="1300" b="1" i="0">
+                <a:solidFill>
+                  <a:srgbClr val="095292"/>
+                </a:solidFill>
+                <a:latin typeface="Calibri"/>
+              </a:rPr>
+              <a:t>App A</a:t>
+            </a:r>
+          </a:p>
+        </p:txBody>
+      </p:sp>
+      <p:sp>
+        <p:nvSpPr>
+          <p:cNvPr id="12" name="Rounded Rectangle 11"/>
+          <p:cNvSpPr/>
+          <p:nvPr/>
+        </p:nvSpPr>
+        <p:spPr>
+          <a:xfrm>
+            <a:off x="2880360" y="4023360"/>
+            <a:ext cx="1874519" cy="548640"/>
+          </a:xfrm>
+          <a:prstGeom prst="roundRect">
+            <a:avLst>
+              <a:gd name="adj" fmla="val 12000"/>
+            </a:avLst>
+          </a:prstGeom>
+          <a:solidFill>
+            <a:srgbClr val="FFD000"/>
+          </a:solidFill>
+          <a:ln>
+            <a:noFill/>
+          </a:ln>
+        </p:spPr>
+        <p:style>
+          <a:lnRef idx="1">
+            <a:schemeClr val="accent1"/>
+          </a:lnRef>
+          <a:fillRef idx="3">
+            <a:schemeClr val="accent1"/>
+          </a:fillRef>
+          <a:effectRef idx="2">
+            <a:schemeClr val="accent1"/>
+          </a:effectRef>
+          <a:fontRef idx="minor">
+            <a:schemeClr val="lt1"/>
+          </a:fontRef>
+        </p:style>
+        <p:txBody>
+          <a:bodyPr rtlCol="0" anchor="ctr" wrap="square"/>
+          <a:lstStyle/>
+          <a:p>
+            <a:pPr algn="ctr"/>
+            <a:r>
+              <a:rPr sz="1300" b="1" i="0">
+                <a:solidFill>
+                  <a:srgbClr val="095292"/>
+                </a:solidFill>
+                <a:latin typeface="Calibri"/>
+              </a:rPr>
+              <a:t>App B</a:t>
+            </a:r>
+          </a:p>
+        </p:txBody>
+      </p:sp>
+      <p:sp>
+        <p:nvSpPr>
+          <p:cNvPr id="13" name="Rounded Rectangle 12"/>
+          <p:cNvSpPr/>
+          <p:nvPr/>
+        </p:nvSpPr>
+        <p:spPr>
+          <a:xfrm>
+            <a:off x="7315200" y="1417320"/>
+            <a:ext cx="3931920" cy="457200"/>
+          </a:xfrm>
+          <a:prstGeom prst="roundRect">
+            <a:avLst>
+              <a:gd name="adj" fmla="val 12000"/>
+            </a:avLst>
+          </a:prstGeom>
+          <a:solidFill>
+            <a:srgbClr val="095292"/>
+          </a:solidFill>
+          <a:ln>
+            <a:noFill/>
+          </a:ln>
+        </p:spPr>
+        <p:style>
+          <a:lnRef idx="1">
+            <a:schemeClr val="accent1"/>
+          </a:lnRef>
+          <a:fillRef idx="3">
+            <a:schemeClr val="accent1"/>
+          </a:fillRef>
+          <a:effectRef idx="2">
+            <a:schemeClr val="accent1"/>
+          </a:effectRef>
+          <a:fontRef idx="minor">
+            <a:schemeClr val="lt1"/>
+          </a:fontRef>
+        </p:style>
+        <p:txBody>
+          <a:bodyPr rtlCol="0" anchor="ctr" wrap="square"/>
+          <a:lstStyle/>
+          <a:p>
+            <a:pPr algn="ctr"/>
+            <a:r>
+              <a:rPr sz="1200" b="1" i="0">
+                <a:solidFill>
+                  <a:srgbClr val="FFFFFF"/>
+                </a:solidFill>
+                <a:latin typeface="Calibri"/>
+              </a:rPr>
+              <a:t>Contenedores</a:t>
+            </a:r>
+          </a:p>
+        </p:txBody>
+      </p:sp>
+      <p:sp>
+        <p:nvSpPr>
+          <p:cNvPr id="14" name="Rounded Rectangle 13"/>
+          <p:cNvSpPr/>
+          <p:nvPr/>
+        </p:nvSpPr>
+        <p:spPr>
+          <a:xfrm>
+            <a:off x="7315200" y="2057400"/>
+            <a:ext cx="3931920" cy="594360"/>
+          </a:xfrm>
+          <a:prstGeom prst="roundRect">
+            <a:avLst>
+              <a:gd name="adj" fmla="val 12000"/>
+            </a:avLst>
+          </a:prstGeom>
+          <a:solidFill>
+            <a:srgbClr val="333333"/>
+          </a:solidFill>
+          <a:ln>
+            <a:noFill/>
+          </a:ln>
+        </p:spPr>
+        <p:style>
+          <a:lnRef idx="1">
+            <a:schemeClr val="accent1"/>
+          </a:lnRef>
+          <a:fillRef idx="3">
+            <a:schemeClr val="accent1"/>
+          </a:fillRef>
+          <a:effectRef idx="2">
+            <a:schemeClr val="accent1"/>
+          </a:effectRef>
+          <a:fontRef idx="minor">
+            <a:schemeClr val="lt1"/>
+          </a:fontRef>
+        </p:style>
+        <p:txBody>
+          <a:bodyPr rtlCol="0" anchor="ctr" wrap="square"/>
+          <a:lstStyle/>
+          <a:p>
+            <a:pPr algn="ctr"/>
+            <a:r>
+              <a:rPr sz="1300" b="1" i="0">
+                <a:solidFill>
+                  <a:srgbClr val="FFFFFF"/>
+                </a:solidFill>
+                <a:latin typeface="Calibri"/>
+              </a:rPr>
+              <a:t>Hardware físico</a:t>
+            </a:r>
+          </a:p>
+        </p:txBody>
+      </p:sp>
+      <p:sp>
+        <p:nvSpPr>
+          <p:cNvPr id="15" name="Rounded Rectangle 14"/>
+          <p:cNvSpPr/>
+          <p:nvPr/>
+        </p:nvSpPr>
+        <p:spPr>
+          <a:xfrm>
+            <a:off x="7315200" y="2697480"/>
+            <a:ext cx="3931920" cy="594360"/>
+          </a:xfrm>
+          <a:prstGeom prst="roundRect">
+            <a:avLst>
+              <a:gd name="adj" fmla="val 12000"/>
+            </a:avLst>
+          </a:prstGeom>
+          <a:solidFill>
+            <a:srgbClr val="269CCB"/>
+          </a:solidFill>
+          <a:ln>
+            <a:noFill/>
+          </a:ln>
+        </p:spPr>
+        <p:style>
+          <a:lnRef idx="1">
+            <a:schemeClr val="accent1"/>
+          </a:lnRef>
+          <a:fillRef idx="3">
+            <a:schemeClr val="accent1"/>
+          </a:fillRef>
+          <a:effectRef idx="2">
+            <a:schemeClr val="accent1"/>
+          </a:effectRef>
+          <a:fontRef idx="minor">
+            <a:schemeClr val="lt1"/>
+          </a:fontRef>
+        </p:style>
+        <p:txBody>
+          <a:bodyPr rtlCol="0" anchor="ctr" wrap="square"/>
+          <a:lstStyle/>
+          <a:p>
+            <a:pPr algn="ctr"/>
+            <a:r>
+              <a:rPr sz="1050" b="1" i="0">
+                <a:solidFill>
+                  <a:srgbClr val="FFFFFF"/>
+                </a:solidFill>
+                <a:latin typeface="Calibri"/>
+              </a:rPr>
+              <a:t>SO anfitrión + motor de contenedores (kernel compartido)</a:t>
+            </a:r>
+          </a:p>
+        </p:txBody>
+      </p:sp>
+      <p:sp>
+        <p:nvSpPr>
+          <p:cNvPr id="16" name="Rounded Rectangle 15"/>
+          <p:cNvSpPr/>
+          <p:nvPr/>
+        </p:nvSpPr>
+        <p:spPr>
+          <a:xfrm>
+            <a:off x="7315200" y="3337560"/>
+            <a:ext cx="1874519" cy="640080"/>
+          </a:xfrm>
+          <a:prstGeom prst="roundRect">
+            <a:avLst>
+              <a:gd name="adj" fmla="val 12000"/>
+            </a:avLst>
+          </a:prstGeom>
+          <a:solidFill>
+            <a:srgbClr val="FFD000"/>
+          </a:solidFill>
+          <a:ln>
+            <a:noFill/>
+          </a:ln>
+        </p:spPr>
+        <p:style>
+          <a:lnRef idx="1">
+            <a:schemeClr val="accent1"/>
+          </a:lnRef>
+          <a:fillRef idx="3">
+            <a:schemeClr val="accent1"/>
+          </a:fillRef>
+          <a:effectRef idx="2">
+            <a:schemeClr val="accent1"/>
+          </a:effectRef>
+          <a:fontRef idx="minor">
+            <a:schemeClr val="lt1"/>
+          </a:fontRef>
+        </p:style>
+        <p:txBody>
+          <a:bodyPr rtlCol="0" anchor="ctr" wrap="square"/>
+          <a:lstStyle/>
+          <a:p>
+            <a:pPr algn="ctr"/>
+            <a:r>
+              <a:rPr sz="1100" b="1" i="0">
+                <a:solidFill>
+                  <a:srgbClr val="095292"/>
+                </a:solidFill>
+                <a:latin typeface="Calibri"/>
+              </a:rPr>
+              <a:t>Contenedor A
+(App A)</a:t>
+            </a:r>
+          </a:p>
+        </p:txBody>
+      </p:sp>
+      <p:sp>
+        <p:nvSpPr>
+          <p:cNvPr id="17" name="Rounded Rectangle 16"/>
+          <p:cNvSpPr/>
+          <p:nvPr/>
+        </p:nvSpPr>
+        <p:spPr>
+          <a:xfrm>
+            <a:off x="9372600" y="3337560"/>
+            <a:ext cx="1874519" cy="640080"/>
+          </a:xfrm>
+          <a:prstGeom prst="roundRect">
+            <a:avLst>
+              <a:gd name="adj" fmla="val 12000"/>
+            </a:avLst>
+          </a:prstGeom>
+          <a:solidFill>
+            <a:srgbClr val="FFD000"/>
+          </a:solidFill>
+          <a:ln>
+            <a:noFill/>
+          </a:ln>
+        </p:spPr>
+        <p:style>
+          <a:lnRef idx="1">
+            <a:schemeClr val="accent1"/>
+          </a:lnRef>
+          <a:fillRef idx="3">
+            <a:schemeClr val="accent1"/>
+          </a:fillRef>
+          <a:effectRef idx="2">
+            <a:schemeClr val="accent1"/>
+          </a:effectRef>
+          <a:fontRef idx="minor">
+            <a:schemeClr val="lt1"/>
+          </a:fontRef>
+        </p:style>
+        <p:txBody>
+          <a:bodyPr rtlCol="0" anchor="ctr" wrap="square"/>
+          <a:lstStyle/>
+          <a:p>
+            <a:pPr algn="ctr"/>
+            <a:r>
+              <a:rPr sz="1100" b="1" i="0">
+                <a:solidFill>
+                  <a:srgbClr val="095292"/>
+                </a:solidFill>
+                <a:latin typeface="Calibri"/>
+              </a:rPr>
+              <a:t>Contenedor B
+(App B)</a:t>
+            </a:r>
+          </a:p>
+        </p:txBody>
+      </p:sp>
+      <p:sp>
+        <p:nvSpPr>
+          <p:cNvPr id="18" name="TextBox 17"/>
           <p:cNvSpPr txBox="1"/>
           <p:nvPr/>
         </p:nvSpPr>
         <p:spPr>
           <a:xfrm>
-            <a:off x="685800" y="1307592"/>
-            <a:ext cx="10820095" cy="256032"/>
-          </a:xfrm>
-          <a:prstGeom prst="rect">
-            <a:avLst/>
-          </a:prstGeom>
-          <a:noFill/>
-        </p:spPr>
-        <p:txBody>
-          <a:bodyPr wrap="square" anchor="ctr"/>
-          <a:lstStyle/>
-          <a:p>
-            <a:r>
-              <a:rPr sz="1000" b="1" i="0">
-                <a:solidFill>
-                  <a:srgbClr val="269CCB"/>
-                </a:solidFill>
-                <a:latin typeface="Calibri"/>
-              </a:rPr>
-              <a:t>● ● ●</a:t>
-            </a:r>
-          </a:p>
-        </p:txBody>
-      </p:sp>
-      <p:sp>
-        <p:nvSpPr>
-          <p:cNvPr id="8" name="TextBox 7"/>
-          <p:cNvSpPr txBox="1"/>
-          <p:nvPr/>
-        </p:nvSpPr>
-        <p:spPr>
-          <a:xfrm>
-            <a:off x="777240" y="1719072"/>
-            <a:ext cx="10637215" cy="4453128"/>
+            <a:off x="457200" y="6263640"/>
+            <a:ext cx="11277295" cy="411480"/>
           </a:xfrm>
           <a:prstGeom prst="rect">
             <a:avLst/>
@@ -10117,250 +11655,21 @@
           </a:bodyPr>
           <a:lstStyle/>
           <a:p>
-            <a:pPr>
-              <a:spcAft>
-                <a:spcPts val="400"/>
-              </a:spcAft>
-            </a:pPr>
-            <a:r>
-              <a:rPr sz="1400" b="0" i="0">
-                <a:solidFill>
-                  <a:srgbClr val="FFFFFF"/>
-                </a:solidFill>
-                <a:latin typeface="Calibri"/>
-              </a:rPr>
-              <a:t># Cada instruccion es UNA CAPA. El orden decide que se reconstruye.</a:t>
-            </a:r>
-          </a:p>
-          <a:p>
-            <a:pPr>
-              <a:spcAft>
-                <a:spcPts val="400"/>
-              </a:spcAft>
-            </a:pPr>
-            <a:r>
-              <a:rPr sz="1400" b="0" i="0">
-                <a:solidFill>
-                  <a:srgbClr val="FFFFFF"/>
-                </a:solidFill>
-                <a:latin typeface="Calibri"/>
-              </a:rPr>
-              <a:t>FROM node:20-alpine</a:t>
-            </a:r>
-          </a:p>
-          <a:p>
-            <a:pPr>
-              <a:spcAft>
-                <a:spcPts val="400"/>
-              </a:spcAft>
-            </a:pPr>
-            <a:r>
-              <a:rPr sz="1400" b="0" i="0">
-                <a:solidFill>
-                  <a:srgbClr val="FFFFFF"/>
-                </a:solidFill>
-                <a:latin typeface="Calibri"/>
-              </a:rPr>
-              <a:t/>
-            </a:r>
-          </a:p>
-          <a:p>
-            <a:pPr>
-              <a:spcAft>
-                <a:spcPts val="400"/>
-              </a:spcAft>
-            </a:pPr>
-            <a:r>
-              <a:rPr sz="1400" b="0" i="0">
-                <a:solidFill>
-                  <a:srgbClr val="FFFFFF"/>
-                </a:solidFill>
-                <a:latin typeface="Calibri"/>
-              </a:rPr>
-              <a:t>WORKDIR /app</a:t>
-            </a:r>
-          </a:p>
-          <a:p>
-            <a:pPr>
-              <a:spcAft>
-                <a:spcPts val="400"/>
-              </a:spcAft>
-            </a:pPr>
-            <a:r>
-              <a:rPr sz="1400" b="0" i="0">
-                <a:solidFill>
-                  <a:srgbClr val="FFFFFF"/>
-                </a:solidFill>
-                <a:latin typeface="Calibri"/>
-              </a:rPr>
-              <a:t/>
-            </a:r>
-          </a:p>
-          <a:p>
-            <a:pPr>
-              <a:spcAft>
-                <a:spcPts val="400"/>
-              </a:spcAft>
-            </a:pPr>
-            <a:r>
-              <a:rPr sz="1400" b="0" i="0">
-                <a:solidFill>
-                  <a:srgbClr val="FFFFFF"/>
-                </a:solidFill>
-                <a:latin typeface="Calibri"/>
-              </a:rPr>
-              <a:t># Primero las dependencias: si el codigo cambia y package.json no,</a:t>
-            </a:r>
-          </a:p>
-          <a:p>
-            <a:pPr>
-              <a:spcAft>
-                <a:spcPts val="400"/>
-              </a:spcAft>
-            </a:pPr>
-            <a:r>
-              <a:rPr sz="1400" b="0" i="0">
-                <a:solidFill>
-                  <a:srgbClr val="FFFFFF"/>
-                </a:solidFill>
-                <a:latin typeface="Calibri"/>
-              </a:rPr>
-              <a:t># esta capa se reutiliza de la cache y el build tarda segundos.</a:t>
-            </a:r>
-          </a:p>
-          <a:p>
-            <a:pPr>
-              <a:spcAft>
-                <a:spcPts val="400"/>
-              </a:spcAft>
-            </a:pPr>
-            <a:r>
-              <a:rPr sz="1400" b="0" i="0">
-                <a:solidFill>
-                  <a:srgbClr val="FFFFFF"/>
-                </a:solidFill>
-                <a:latin typeface="Calibri"/>
-              </a:rPr>
-              <a:t>COPY package*.json ./</a:t>
-            </a:r>
-          </a:p>
-          <a:p>
-            <a:pPr>
-              <a:spcAft>
-                <a:spcPts val="400"/>
-              </a:spcAft>
-            </a:pPr>
-            <a:r>
-              <a:rPr sz="1400" b="0" i="0">
-                <a:solidFill>
-                  <a:srgbClr val="FFFFFF"/>
-                </a:solidFill>
-                <a:latin typeface="Calibri"/>
-              </a:rPr>
-              <a:t>RUN npm ci --omit=dev</a:t>
-            </a:r>
-          </a:p>
-          <a:p>
-            <a:pPr>
-              <a:spcAft>
-                <a:spcPts val="400"/>
-              </a:spcAft>
-            </a:pPr>
-            <a:r>
-              <a:rPr sz="1400" b="0" i="0">
-                <a:solidFill>
-                  <a:srgbClr val="FFFFFF"/>
-                </a:solidFill>
-                <a:latin typeface="Calibri"/>
-              </a:rPr>
-              <a:t/>
-            </a:r>
-          </a:p>
-          <a:p>
-            <a:pPr>
-              <a:spcAft>
-                <a:spcPts val="400"/>
-              </a:spcAft>
-            </a:pPr>
-            <a:r>
-              <a:rPr sz="1400" b="0" i="0">
-                <a:solidFill>
-                  <a:srgbClr val="FFFFFF"/>
-                </a:solidFill>
-                <a:latin typeface="Calibri"/>
-              </a:rPr>
-              <a:t># Despues el codigo, que es lo que cambia en cada commit.</a:t>
-            </a:r>
-          </a:p>
-          <a:p>
-            <a:pPr>
-              <a:spcAft>
-                <a:spcPts val="400"/>
-              </a:spcAft>
-            </a:pPr>
-            <a:r>
-              <a:rPr sz="1400" b="0" i="0">
-                <a:solidFill>
-                  <a:srgbClr val="FFFFFF"/>
-                </a:solidFill>
-                <a:latin typeface="Calibri"/>
-              </a:rPr>
-              <a:t>COPY..</a:t>
-            </a:r>
-          </a:p>
-          <a:p>
-            <a:pPr>
-              <a:spcAft>
-                <a:spcPts val="400"/>
-              </a:spcAft>
-            </a:pPr>
-            <a:r>
-              <a:rPr sz="1400" b="0" i="0">
-                <a:solidFill>
-                  <a:srgbClr val="FFFFFF"/>
-                </a:solidFill>
-                <a:latin typeface="Calibri"/>
-              </a:rPr>
-              <a:t/>
-            </a:r>
-          </a:p>
-          <a:p>
-            <a:pPr>
-              <a:spcAft>
-                <a:spcPts val="400"/>
-              </a:spcAft>
-            </a:pPr>
-            <a:r>
-              <a:rPr sz="1400" b="0" i="0">
-                <a:solidFill>
-                  <a:srgbClr val="FFFFFF"/>
-                </a:solidFill>
-                <a:latin typeface="Calibri"/>
-              </a:rPr>
-              <a:t>EXPOSE 3000</a:t>
-            </a:r>
-          </a:p>
-          <a:p>
-            <a:pPr>
-              <a:spcAft>
-                <a:spcPts val="400"/>
-              </a:spcAft>
-            </a:pPr>
-            <a:r>
-              <a:rPr sz="1400" b="0" i="0">
-                <a:solidFill>
-                  <a:srgbClr val="FFFFFF"/>
-                </a:solidFill>
-                <a:latin typeface="Calibri"/>
-              </a:rPr>
-              <a:t>CMD ["node", "server.js"]</a:t>
-            </a:r>
-          </a:p>
-        </p:txBody>
-      </p:sp>
-      <p:sp>
-        <p:nvSpPr>
-          <p:cNvPr id="9" name="TextBox 8"/>
+            <a:r>
+              <a:rPr sz="1100" b="0" i="1">
+                <a:solidFill>
+                  <a:srgbClr val="666666"/>
+                </a:solidFill>
+                <a:latin typeface="Calibri"/>
+              </a:rPr>
+              <a:t>VM: cada instancia carga un SO completo (aislamiento fuerte, más pesado). Contenedor: comparte el kernel del anfitrión y solo empaqueta app + dependencias (arranca en segundos, pesa MB no GB).</a:t>
+            </a:r>
+          </a:p>
+        </p:txBody>
+      </p:sp>
+      <p:sp>
+        <p:nvSpPr>
+          <p:cNvPr id="19" name="TextBox 18"/>
           <p:cNvSpPr txBox="1"/>
           <p:nvPr/>
         </p:nvSpPr>
@@ -10534,7 +11843,7 @@
                 </a:solidFill>
                 <a:latin typeface="Calibri"/>
               </a:rPr>
-              <a:t>El ciclo completo: construir, ejecutar, verificar</a:t>
+              <a:t>Maquina virtual vs contenedor — que cambia de verdad</a:t>
             </a:r>
           </a:p>
         </p:txBody>
@@ -10548,7 +11857,7 @@
         <p:spPr>
           <a:xfrm>
             <a:off x="457200" y="1261872"/>
-            <a:ext cx="11277295" cy="5093208"/>
+            <a:ext cx="5478627" cy="5093208"/>
           </a:xfrm>
           <a:prstGeom prst="roundRect">
             <a:avLst>
@@ -10556,7 +11865,7 @@
             </a:avLst>
           </a:prstGeom>
           <a:solidFill>
-            <a:srgbClr val="1E2A38"/>
+            <a:srgbClr val="FBE4E4"/>
           </a:solidFill>
           <a:ln>
             <a:noFill/>
@@ -10593,7 +11902,276 @@
         <p:spPr>
           <a:xfrm>
             <a:off x="457200" y="1261872"/>
-            <a:ext cx="11277295" cy="320040"/>
+            <a:ext cx="5478627" cy="502920"/>
+          </a:xfrm>
+          <a:prstGeom prst="rect">
+            <a:avLst/>
+          </a:prstGeom>
+          <a:solidFill>
+            <a:srgbClr val="A02030"/>
+          </a:solidFill>
+          <a:ln>
+            <a:noFill/>
+          </a:ln>
+        </p:spPr>
+        <p:style>
+          <a:lnRef idx="1">
+            <a:schemeClr val="accent1"/>
+          </a:lnRef>
+          <a:fillRef idx="3">
+            <a:schemeClr val="accent1"/>
+          </a:fillRef>
+          <a:effectRef idx="2">
+            <a:schemeClr val="accent1"/>
+          </a:effectRef>
+          <a:fontRef idx="minor">
+            <a:schemeClr val="lt1"/>
+          </a:fontRef>
+        </p:style>
+        <p:txBody>
+          <a:bodyPr rtlCol="0" anchor="ctr"/>
+          <a:lstStyle/>
+          <a:p>
+            <a:pPr algn="ctr"/>
+          </a:p>
+        </p:txBody>
+      </p:sp>
+      <p:sp>
+        <p:nvSpPr>
+          <p:cNvPr id="7" name="TextBox 6"/>
+          <p:cNvSpPr txBox="1"/>
+          <p:nvPr/>
+        </p:nvSpPr>
+        <p:spPr>
+          <a:xfrm>
+            <a:off x="594360" y="1353312"/>
+            <a:ext cx="5204307" cy="365760"/>
+          </a:xfrm>
+          <a:prstGeom prst="rect">
+            <a:avLst/>
+          </a:prstGeom>
+          <a:noFill/>
+        </p:spPr>
+        <p:txBody>
+          <a:bodyPr wrap="square" anchor="ctr"/>
+          <a:lstStyle/>
+          <a:p>
+            <a:pPr algn="ctr"/>
+            <a:r>
+              <a:rPr sz="1600" b="1" i="0">
+                <a:solidFill>
+                  <a:srgbClr val="FFFFFF"/>
+                </a:solidFill>
+                <a:latin typeface="Calibri"/>
+              </a:rPr>
+              <a:t>Maquina virtual</a:t>
+            </a:r>
+          </a:p>
+        </p:txBody>
+      </p:sp>
+      <p:sp>
+        <p:nvSpPr>
+          <p:cNvPr id="8" name="TextBox 7"/>
+          <p:cNvSpPr txBox="1"/>
+          <p:nvPr/>
+        </p:nvSpPr>
+        <p:spPr>
+          <a:xfrm>
+            <a:off x="621792" y="1901952"/>
+            <a:ext cx="5158587" cy="4498848"/>
+          </a:xfrm>
+          <a:prstGeom prst="rect">
+            <a:avLst/>
+          </a:prstGeom>
+          <a:noFill/>
+        </p:spPr>
+        <p:txBody>
+          <a:bodyPr wrap="square">
+            <a:spAutoFit/>
+          </a:bodyPr>
+          <a:lstStyle/>
+          <a:p>
+            <a:pPr>
+              <a:spcAft>
+                <a:spcPts val="800"/>
+              </a:spcAft>
+            </a:pPr>
+            <a:r>
+              <a:rPr sz="1500" b="0" i="0">
+                <a:solidFill>
+                  <a:srgbClr val="333333"/>
+                </a:solidFill>
+                <a:latin typeface="Calibri"/>
+              </a:rPr>
+              <a:t>–   Cada instancia trae un </a:t>
+            </a:r>
+            <a:r>
+              <a:rPr sz="1500" b="1" i="0">
+                <a:solidFill>
+                  <a:srgbClr val="333333"/>
+                </a:solidFill>
+                <a:latin typeface="Calibri"/>
+              </a:rPr>
+              <a:t>SO completo</a:t>
+            </a:r>
+            <a:r>
+              <a:rPr sz="1500" b="0" i="0">
+                <a:solidFill>
+                  <a:srgbClr val="333333"/>
+                </a:solidFill>
+                <a:latin typeface="Calibri"/>
+              </a:rPr>
+              <a:t> (kernel propio)</a:t>
+            </a:r>
+          </a:p>
+          <a:p>
+            <a:pPr>
+              <a:spcAft>
+                <a:spcPts val="800"/>
+              </a:spcAft>
+            </a:pPr>
+            <a:r>
+              <a:rPr sz="1500" b="0" i="0">
+                <a:solidFill>
+                  <a:srgbClr val="333333"/>
+                </a:solidFill>
+                <a:latin typeface="Calibri"/>
+              </a:rPr>
+              <a:t>–   Aislamiento fuerte a nivel de hardware virtual</a:t>
+            </a:r>
+          </a:p>
+          <a:p>
+            <a:pPr>
+              <a:spcAft>
+                <a:spcPts val="800"/>
+              </a:spcAft>
+            </a:pPr>
+            <a:r>
+              <a:rPr sz="1500" b="0" i="0">
+                <a:solidFill>
+                  <a:srgbClr val="333333"/>
+                </a:solidFill>
+                <a:latin typeface="Calibri"/>
+              </a:rPr>
+              <a:t>–   Arranque en </a:t>
+            </a:r>
+            <a:r>
+              <a:rPr sz="1500" b="1" i="0">
+                <a:solidFill>
+                  <a:srgbClr val="333333"/>
+                </a:solidFill>
+                <a:latin typeface="Calibri"/>
+              </a:rPr>
+              <a:t>minutos</a:t>
+            </a:r>
+            <a:r>
+              <a:rPr sz="1500" b="0" i="0">
+                <a:solidFill>
+                  <a:srgbClr val="333333"/>
+                </a:solidFill>
+                <a:latin typeface="Calibri"/>
+              </a:rPr>
+              <a:t>, tamaño en </a:t>
+            </a:r>
+            <a:r>
+              <a:rPr sz="1500" b="1" i="0">
+                <a:solidFill>
+                  <a:srgbClr val="333333"/>
+                </a:solidFill>
+                <a:latin typeface="Calibri"/>
+              </a:rPr>
+              <a:t>GB</a:t>
+            </a:r>
+          </a:p>
+          <a:p>
+            <a:pPr>
+              <a:spcAft>
+                <a:spcPts val="800"/>
+              </a:spcAft>
+            </a:pPr>
+            <a:r>
+              <a:rPr sz="1500" b="0" i="0">
+                <a:solidFill>
+                  <a:srgbClr val="333333"/>
+                </a:solidFill>
+                <a:latin typeface="Calibri"/>
+              </a:rPr>
+              <a:t>–   Util cuando se necesitan SO distintos</a:t>
+            </a:r>
+          </a:p>
+          <a:p>
+            <a:pPr>
+              <a:spcAft>
+                <a:spcPts val="800"/>
+              </a:spcAft>
+            </a:pPr>
+            <a:r>
+              <a:rPr sz="1500" b="0" i="0">
+                <a:solidFill>
+                  <a:srgbClr val="333333"/>
+                </a:solidFill>
+                <a:latin typeface="Calibri"/>
+              </a:rPr>
+              <a:t>–   Ej.: un servidor Windows y uno Linux en el mismo host</a:t>
+            </a:r>
+          </a:p>
+        </p:txBody>
+      </p:sp>
+      <p:sp>
+        <p:nvSpPr>
+          <p:cNvPr id="9" name="Rounded Rectangle 8"/>
+          <p:cNvSpPr/>
+          <p:nvPr/>
+        </p:nvSpPr>
+        <p:spPr>
+          <a:xfrm>
+            <a:off x="6255867" y="1261872"/>
+            <a:ext cx="5478627" cy="5093208"/>
+          </a:xfrm>
+          <a:prstGeom prst="roundRect">
+            <a:avLst>
+              <a:gd name="adj" fmla="val 12000"/>
+            </a:avLst>
+          </a:prstGeom>
+          <a:solidFill>
+            <a:srgbClr val="E8F4FA"/>
+          </a:solidFill>
+          <a:ln>
+            <a:noFill/>
+          </a:ln>
+        </p:spPr>
+        <p:style>
+          <a:lnRef idx="1">
+            <a:schemeClr val="accent1"/>
+          </a:lnRef>
+          <a:fillRef idx="3">
+            <a:schemeClr val="accent1"/>
+          </a:fillRef>
+          <a:effectRef idx="2">
+            <a:schemeClr val="accent1"/>
+          </a:effectRef>
+          <a:fontRef idx="minor">
+            <a:schemeClr val="lt1"/>
+          </a:fontRef>
+        </p:style>
+        <p:txBody>
+          <a:bodyPr rtlCol="0" anchor="ctr"/>
+          <a:lstStyle/>
+          <a:p>
+            <a:pPr algn="ctr"/>
+          </a:p>
+        </p:txBody>
+      </p:sp>
+      <p:sp>
+        <p:nvSpPr>
+          <p:cNvPr id="10" name="Rectangle 9"/>
+          <p:cNvSpPr/>
+          <p:nvPr/>
+        </p:nvSpPr>
+        <p:spPr>
+          <a:xfrm>
+            <a:off x="6255867" y="1261872"/>
+            <a:ext cx="5478627" cy="502920"/>
           </a:xfrm>
           <a:prstGeom prst="rect">
             <a:avLst/>
@@ -10629,14 +12207,14 @@
       </p:sp>
       <p:sp>
         <p:nvSpPr>
-          <p:cNvPr id="7" name="TextBox 6"/>
+          <p:cNvPr id="11" name="TextBox 10"/>
           <p:cNvSpPr txBox="1"/>
           <p:nvPr/>
         </p:nvSpPr>
         <p:spPr>
           <a:xfrm>
-            <a:off x="685800" y="1307592"/>
-            <a:ext cx="10820095" cy="256032"/>
+            <a:off x="6393027" y="1353312"/>
+            <a:ext cx="5204307" cy="365760"/>
           </a:xfrm>
           <a:prstGeom prst="rect">
             <a:avLst/>
@@ -10647,28 +12225,29 @@
           <a:bodyPr wrap="square" anchor="ctr"/>
           <a:lstStyle/>
           <a:p>
-            <a:r>
-              <a:rPr sz="1000" b="1" i="0">
-                <a:solidFill>
-                  <a:srgbClr val="269CCB"/>
-                </a:solidFill>
-                <a:latin typeface="Calibri"/>
-              </a:rPr>
-              <a:t>● ● ●</a:t>
-            </a:r>
-          </a:p>
-        </p:txBody>
-      </p:sp>
-      <p:sp>
-        <p:nvSpPr>
-          <p:cNvPr id="8" name="TextBox 7"/>
+            <a:pPr algn="ctr"/>
+            <a:r>
+              <a:rPr sz="1600" b="1" i="0">
+                <a:solidFill>
+                  <a:srgbClr val="FFFFFF"/>
+                </a:solidFill>
+                <a:latin typeface="Calibri"/>
+              </a:rPr>
+              <a:t>Contenedor</a:t>
+            </a:r>
+          </a:p>
+        </p:txBody>
+      </p:sp>
+      <p:sp>
+        <p:nvSpPr>
+          <p:cNvPr id="12" name="TextBox 11"/>
           <p:cNvSpPr txBox="1"/>
           <p:nvPr/>
         </p:nvSpPr>
         <p:spPr>
           <a:xfrm>
-            <a:off x="777240" y="1719072"/>
-            <a:ext cx="10637215" cy="4453128"/>
+            <a:off x="6420459" y="1901952"/>
+            <a:ext cx="5158587" cy="4498848"/>
           </a:xfrm>
           <a:prstGeom prst="rect">
             <a:avLst/>
@@ -10683,200 +12262,133 @@
           <a:p>
             <a:pPr>
               <a:spcAft>
-                <a:spcPts val="400"/>
-              </a:spcAft>
-            </a:pPr>
-            <a:r>
-              <a:rPr sz="1400" b="0" i="0">
-                <a:solidFill>
-                  <a:srgbClr val="FFFFFF"/>
-                </a:solidFill>
-                <a:latin typeface="Calibri"/>
-              </a:rPr>
-              <a:t># 1. construir la imagen y etiquetarla con version</a:t>
-            </a:r>
-          </a:p>
-          <a:p>
-            <a:pPr>
-              <a:spcAft>
-                <a:spcPts val="400"/>
-              </a:spcAft>
-            </a:pPr>
-            <a:r>
-              <a:rPr sz="1400" b="0" i="0">
-                <a:solidFill>
-                  <a:srgbClr val="FFFFFF"/>
-                </a:solidFill>
-                <a:latin typeface="Calibri"/>
-              </a:rPr>
-              <a:t>$ docker build -t turnos-api:0.1.0.</a:t>
-            </a:r>
-          </a:p>
-          <a:p>
-            <a:pPr>
-              <a:spcAft>
-                <a:spcPts val="400"/>
-              </a:spcAft>
-            </a:pPr>
-            <a:r>
-              <a:rPr sz="1400" b="0" i="0">
-                <a:solidFill>
-                  <a:srgbClr val="FFFFFF"/>
-                </a:solidFill>
-                <a:latin typeface="Calibri"/>
-              </a:rPr>
-              <a:t/>
-            </a:r>
-          </a:p>
-          <a:p>
-            <a:pPr>
-              <a:spcAft>
-                <a:spcPts val="400"/>
-              </a:spcAft>
-            </a:pPr>
-            <a:r>
-              <a:rPr sz="1400" b="0" i="0">
-                <a:solidFill>
-                  <a:srgbClr val="FFFFFF"/>
-                </a:solidFill>
-                <a:latin typeface="Calibri"/>
-              </a:rPr>
-              <a:t># 2. ejecutarla publicando el puerto (host:contenedor)</a:t>
-            </a:r>
-          </a:p>
-          <a:p>
-            <a:pPr>
-              <a:spcAft>
-                <a:spcPts val="400"/>
-              </a:spcAft>
-            </a:pPr>
-            <a:r>
-              <a:rPr sz="1400" b="0" i="0">
-                <a:solidFill>
-                  <a:srgbClr val="FFFFFF"/>
-                </a:solidFill>
-                <a:latin typeface="Calibri"/>
-              </a:rPr>
-              <a:t>$ docker run -d --name turnos -p 8080:3000 turnos-api:0.1.0</a:t>
-            </a:r>
-          </a:p>
-          <a:p>
-            <a:pPr>
-              <a:spcAft>
-                <a:spcPts val="400"/>
-              </a:spcAft>
-            </a:pPr>
-            <a:r>
-              <a:rPr sz="1400" b="0" i="0">
-                <a:solidFill>
-                  <a:srgbClr val="FFFFFF"/>
-                </a:solidFill>
-                <a:latin typeface="Calibri"/>
-              </a:rPr>
-              <a:t/>
-            </a:r>
-          </a:p>
-          <a:p>
-            <a:pPr>
-              <a:spcAft>
-                <a:spcPts val="400"/>
-              </a:spcAft>
-            </a:pPr>
-            <a:r>
-              <a:rPr sz="1400" b="0" i="0">
-                <a:solidFill>
-                  <a:srgbClr val="FFFFFF"/>
-                </a:solidFill>
-                <a:latin typeface="Calibri"/>
-              </a:rPr>
-              <a:t># 3. verificar que responde DE VERDAD, no que el contenedor existe</a:t>
-            </a:r>
-          </a:p>
-          <a:p>
-            <a:pPr>
-              <a:spcAft>
-                <a:spcPts val="400"/>
-              </a:spcAft>
-            </a:pPr>
-            <a:r>
-              <a:rPr sz="1400" b="0" i="0">
-                <a:solidFill>
-                  <a:srgbClr val="FFFFFF"/>
-                </a:solidFill>
-                <a:latin typeface="Calibri"/>
-              </a:rPr>
-              <a:t>$ curl -i http://localhost:8080/health</a:t>
-            </a:r>
-          </a:p>
-          <a:p>
-            <a:pPr>
-              <a:spcAft>
-                <a:spcPts val="400"/>
-              </a:spcAft>
-            </a:pPr>
-            <a:r>
-              <a:rPr sz="1400" b="0" i="0">
-                <a:solidFill>
-                  <a:srgbClr val="FFFFFF"/>
-                </a:solidFill>
-                <a:latin typeface="Calibri"/>
-              </a:rPr>
-              <a:t>HTTP/1.1 200 OK</a:t>
-            </a:r>
-          </a:p>
-          <a:p>
-            <a:pPr>
-              <a:spcAft>
-                <a:spcPts val="400"/>
-              </a:spcAft>
-            </a:pPr>
-            <a:r>
-              <a:rPr sz="1400" b="0" i="0">
-                <a:solidFill>
-                  <a:srgbClr val="FFFFFF"/>
-                </a:solidFill>
-                <a:latin typeface="Calibri"/>
-              </a:rPr>
-              <a:t/>
-            </a:r>
-          </a:p>
-          <a:p>
-            <a:pPr>
-              <a:spcAft>
-                <a:spcPts val="400"/>
-              </a:spcAft>
-            </a:pPr>
-            <a:r>
-              <a:rPr sz="1400" b="0" i="0">
-                <a:solidFill>
-                  <a:srgbClr val="FFFFFF"/>
-                </a:solidFill>
-                <a:latin typeface="Calibri"/>
-              </a:rPr>
-              <a:t># 4. si no responde, el log es el primer sitio, no el ultimo</a:t>
-            </a:r>
-          </a:p>
-          <a:p>
-            <a:pPr>
-              <a:spcAft>
-                <a:spcPts val="400"/>
-              </a:spcAft>
-            </a:pPr>
-            <a:r>
-              <a:rPr sz="1400" b="0" i="0">
-                <a:solidFill>
-                  <a:srgbClr val="FFFFFF"/>
-                </a:solidFill>
-                <a:latin typeface="Calibri"/>
-              </a:rPr>
-              <a:t>$ docker logs turnos --tail 20</a:t>
-            </a:r>
-          </a:p>
-        </p:txBody>
-      </p:sp>
-      <p:sp>
-        <p:nvSpPr>
-          <p:cNvPr id="9" name="TextBox 8"/>
+                <a:spcPts val="800"/>
+              </a:spcAft>
+            </a:pPr>
+            <a:r>
+              <a:rPr sz="1500" b="0" i="0">
+                <a:solidFill>
+                  <a:srgbClr val="333333"/>
+                </a:solidFill>
+                <a:latin typeface="Calibri"/>
+              </a:rPr>
+              <a:t>–   </a:t>
+            </a:r>
+            <a:r>
+              <a:rPr sz="1500" b="1" i="0">
+                <a:solidFill>
+                  <a:srgbClr val="333333"/>
+                </a:solidFill>
+                <a:latin typeface="Calibri"/>
+              </a:rPr>
+              <a:t>Comparte el kernel</a:t>
+            </a:r>
+            <a:r>
+              <a:rPr sz="1500" b="0" i="0">
+                <a:solidFill>
+                  <a:srgbClr val="333333"/>
+                </a:solidFill>
+                <a:latin typeface="Calibri"/>
+              </a:rPr>
+              <a:t> del anfitrion</a:t>
+            </a:r>
+          </a:p>
+          <a:p>
+            <a:pPr>
+              <a:spcAft>
+                <a:spcPts val="800"/>
+              </a:spcAft>
+            </a:pPr>
+            <a:r>
+              <a:rPr sz="1500" b="0" i="0">
+                <a:solidFill>
+                  <a:srgbClr val="333333"/>
+                </a:solidFill>
+                <a:latin typeface="Calibri"/>
+              </a:rPr>
+              <a:t>–   Empaqueta solo app + dependencias</a:t>
+            </a:r>
+          </a:p>
+          <a:p>
+            <a:pPr>
+              <a:spcAft>
+                <a:spcPts val="800"/>
+              </a:spcAft>
+            </a:pPr>
+            <a:r>
+              <a:rPr sz="1500" b="0" i="0">
+                <a:solidFill>
+                  <a:srgbClr val="333333"/>
+                </a:solidFill>
+                <a:latin typeface="Calibri"/>
+              </a:rPr>
+              <a:t>–   Arranque en </a:t>
+            </a:r>
+            <a:r>
+              <a:rPr sz="1500" b="1" i="0">
+                <a:solidFill>
+                  <a:srgbClr val="333333"/>
+                </a:solidFill>
+                <a:latin typeface="Calibri"/>
+              </a:rPr>
+              <a:t>segundos</a:t>
+            </a:r>
+            <a:r>
+              <a:rPr sz="1500" b="0" i="0">
+                <a:solidFill>
+                  <a:srgbClr val="333333"/>
+                </a:solidFill>
+                <a:latin typeface="Calibri"/>
+              </a:rPr>
+              <a:t>, tamaño en </a:t>
+            </a:r>
+            <a:r>
+              <a:rPr sz="1500" b="1" i="0">
+                <a:solidFill>
+                  <a:srgbClr val="333333"/>
+                </a:solidFill>
+                <a:latin typeface="Calibri"/>
+              </a:rPr>
+              <a:t>MB</a:t>
+            </a:r>
+          </a:p>
+          <a:p>
+            <a:pPr>
+              <a:spcAft>
+                <a:spcPts val="800"/>
+              </a:spcAft>
+            </a:pPr>
+            <a:r>
+              <a:rPr sz="1500" b="0" i="0">
+                <a:solidFill>
+                  <a:srgbClr val="333333"/>
+                </a:solidFill>
+                <a:latin typeface="Calibri"/>
+              </a:rPr>
+              <a:t>–   Util para desplegar el mismo servicio muchas veces</a:t>
+            </a:r>
+          </a:p>
+          <a:p>
+            <a:pPr>
+              <a:spcAft>
+                <a:spcPts val="800"/>
+              </a:spcAft>
+            </a:pPr>
+            <a:r>
+              <a:rPr sz="1500" b="0" i="0">
+                <a:solidFill>
+                  <a:srgbClr val="333333"/>
+                </a:solidFill>
+                <a:latin typeface="Calibri"/>
+              </a:rPr>
+              <a:t>–   Ej.: el stub de la app, replicado detras del balanceador</a:t>
+            </a:r>
+          </a:p>
+        </p:txBody>
+      </p:sp>
+      <p:sp>
+        <p:nvSpPr>
+          <p:cNvPr id="13" name="TextBox 12"/>
           <p:cNvSpPr txBox="1"/>
           <p:nvPr/>
         </p:nvSpPr>
@@ -11336,7 +12848,7 @@
                 </a:solidFill>
                 <a:latin typeface="Calibri"/>
               </a:rPr>
-              <a:t>Imagen, contenedor y capas: los comandos que lo demuestran</a:t>
+              <a:t>Dockerfile minimo del stub de la app</a:t>
             </a:r>
           </a:p>
         </p:txBody>
@@ -11350,7 +12862,7 @@
         <p:spPr>
           <a:xfrm>
             <a:off x="457200" y="1261872"/>
-            <a:ext cx="11277295" cy="5093208"/>
+            <a:ext cx="11277295" cy="4773168"/>
           </a:xfrm>
           <a:prstGeom prst="roundRect">
             <a:avLst>
@@ -11470,7 +12982,7 @@
         <p:spPr>
           <a:xfrm>
             <a:off x="777240" y="1719072"/>
-            <a:ext cx="10637215" cy="4453128"/>
+            <a:ext cx="10637215" cy="4133087"/>
           </a:xfrm>
           <a:prstGeom prst="rect">
             <a:avLst/>
@@ -11495,7 +13007,7 @@
                 </a:solidFill>
                 <a:latin typeface="Calibri"/>
               </a:rPr>
-              <a:t># La IMAGEN es la plantilla; el CONTENEDOR es una instancia en ejecucion.</a:t>
+              <a:t>FROM node:20-alpine          # base ligera y etiqueta FIJA: nunca latest</a:t>
             </a:r>
           </a:p>
           <a:p>
@@ -11511,7 +13023,7 @@
                 </a:solidFill>
                 <a:latin typeface="Calibri"/>
               </a:rPr>
-              <a:t>$ docker images turnos-api</a:t>
+              <a:t>WORKDIR /app</a:t>
             </a:r>
           </a:p>
           <a:p>
@@ -11527,7 +13039,7 @@
                 </a:solidFill>
                 <a:latin typeface="Calibri"/>
               </a:rPr>
-              <a:t>REPOSITORY      TAG     IMAGE ID       SIZE</a:t>
+              <a:t>COPY package*.json ./        # dependencias PRIMERO: cambian poco</a:t>
             </a:r>
           </a:p>
           <a:p>
@@ -11543,7 +13055,7 @@
                 </a:solidFill>
                 <a:latin typeface="Calibri"/>
               </a:rPr>
-              <a:t>turnos-api   0.1.0   a1b2c3d4e5f6   142MB</a:t>
+              <a:t>RUN npm ci --omit=dev        # se instalan DENTRO de la imagen</a:t>
             </a:r>
           </a:p>
           <a:p>
@@ -11559,6 +13071,54 @@
                 </a:solidFill>
                 <a:latin typeface="Calibri"/>
               </a:rPr>
+              <a:t>COPY..                     # el codigo despues: cambia en cada commit</a:t>
+            </a:r>
+          </a:p>
+          <a:p>
+            <a:pPr>
+              <a:spcAft>
+                <a:spcPts val="400"/>
+              </a:spcAft>
+            </a:pPr>
+            <a:r>
+              <a:rPr sz="1400" b="0" i="0">
+                <a:solidFill>
+                  <a:srgbClr val="FFFFFF"/>
+                </a:solidFill>
+                <a:latin typeface="Calibri"/>
+              </a:rPr>
+              <a:t>EXPOSE 8080                  # documenta el puerto; NO lo publica</a:t>
+            </a:r>
+          </a:p>
+          <a:p>
+            <a:pPr>
+              <a:spcAft>
+                <a:spcPts val="400"/>
+              </a:spcAft>
+            </a:pPr>
+            <a:r>
+              <a:rPr sz="1400" b="0" i="0">
+                <a:solidFill>
+                  <a:srgbClr val="FFFFFF"/>
+                </a:solidFill>
+                <a:latin typeface="Calibri"/>
+              </a:rPr>
+              <a:t>CMD ["node", "server.js"]    # UN proceso principal por contenedor</a:t>
+            </a:r>
+          </a:p>
+          <a:p>
+            <a:pPr>
+              <a:spcAft>
+                <a:spcPts val="400"/>
+              </a:spcAft>
+            </a:pPr>
+            <a:r>
+              <a:rPr sz="1400" b="0" i="0">
+                <a:solidFill>
+                  <a:srgbClr val="FFFFFF"/>
+                </a:solidFill>
+                <a:latin typeface="Calibri"/>
+              </a:rPr>
               <a:t/>
             </a:r>
           </a:p>
@@ -11575,7 +13135,7 @@
                 </a:solidFill>
                 <a:latin typeface="Calibri"/>
               </a:rPr>
-              <a:t>$ docker ps</a:t>
+              <a:t># .dockerignore  &lt;- archivo aparte, en la misma carpeta que el Dockerfile.</a:t>
             </a:r>
           </a:p>
           <a:p>
@@ -11591,7 +13151,7 @@
                 </a:solidFill>
                 <a:latin typeface="Calibri"/>
               </a:rPr>
-              <a:t>CONTAINER ID   IMAGE                 STATUS         PORTS</a:t>
+              <a:t># Sin el, el COPY.. de arriba se lleva el .env a las capas de la imagen.</a:t>
             </a:r>
           </a:p>
           <a:p>
@@ -11607,7 +13167,7 @@
                 </a:solidFill>
                 <a:latin typeface="Calibri"/>
               </a:rPr>
-              <a:t>9f8e7d6c5b4a   turnos-api:0.1.0   Up 2 minutes   0.0.0.0:8080-&gt;3000/tcp</a:t>
+              <a:t>node_modules</a:t>
             </a:r>
           </a:p>
           <a:p>
@@ -11623,7 +13183,7 @@
                 </a:solidFill>
                 <a:latin typeface="Calibri"/>
               </a:rPr>
-              <a:t/>
+              <a:t>.env</a:t>
             </a:r>
           </a:p>
           <a:p>
@@ -11639,7 +13199,7 @@
                 </a:solidFill>
                 <a:latin typeface="Calibri"/>
               </a:rPr>
-              <a:t># De una imagen salen N contenedores: eso es lo que hace escalar barato.</a:t>
+              <a:t>.env.*</a:t>
             </a:r>
           </a:p>
           <a:p>
@@ -11655,23 +13215,7 @@
                 </a:solidFill>
                 <a:latin typeface="Calibri"/>
               </a:rPr>
-              <a:t>$ docker run -d -p 8081:3000 turnos-api:0.1.0</a:t>
-            </a:r>
-          </a:p>
-          <a:p>
-            <a:pPr>
-              <a:spcAft>
-                <a:spcPts val="400"/>
-              </a:spcAft>
-            </a:pPr>
-            <a:r>
-              <a:rPr sz="1400" b="0" i="0">
-                <a:solidFill>
-                  <a:srgbClr val="FFFFFF"/>
-                </a:solidFill>
-                <a:latin typeface="Calibri"/>
-              </a:rPr>
-              <a:t>$ docker run -d -p 8082:3000 turnos-api:0.1.0</a:t>
+              <a:t>.git</a:t>
             </a:r>
           </a:p>
         </p:txBody>
@@ -11679,6 +13223,41 @@
       <p:sp>
         <p:nvSpPr>
           <p:cNvPr id="9" name="TextBox 8"/>
+          <p:cNvSpPr txBox="1"/>
+          <p:nvPr/>
+        </p:nvSpPr>
+        <p:spPr>
+          <a:xfrm>
+            <a:off x="457200" y="6080760"/>
+            <a:ext cx="11277295" cy="320040"/>
+          </a:xfrm>
+          <a:prstGeom prst="rect">
+            <a:avLst/>
+          </a:prstGeom>
+          <a:noFill/>
+        </p:spPr>
+        <p:txBody>
+          <a:bodyPr wrap="square">
+            <a:spAutoFit/>
+          </a:bodyPr>
+          <a:lstStyle/>
+          <a:p>
+            <a:pPr algn="ctr"/>
+            <a:r>
+              <a:rPr sz="1200" b="0" i="1">
+                <a:solidFill>
+                  <a:srgbClr val="666666"/>
+                </a:solidFill>
+                <a:latin typeface="Calibri"/>
+              </a:rPr>
+              <a:t>EXPOSE, CMD y el «-p» del run llevan el MISMO puerto. Y el «COPY. .» solo es seguro con «.dockerignore» al lado.</a:t>
+            </a:r>
+          </a:p>
+        </p:txBody>
+      </p:sp>
+      <p:sp>
+        <p:nvSpPr>
+          <p:cNvPr id="10" name="TextBox 9"/>
           <p:cNvSpPr txBox="1"/>
           <p:nvPr/>
         </p:nvSpPr>
@@ -11746,2709 +13325,6 @@
         <p:spPr>
           <a:xfrm>
             <a:off x="0" y="0"/>
-            <a:ext cx="12191695" cy="960120"/>
-          </a:xfrm>
-          <a:prstGeom prst="rect">
-            <a:avLst/>
-          </a:prstGeom>
-          <a:solidFill>
-            <a:srgbClr val="095292"/>
-          </a:solidFill>
-          <a:ln>
-            <a:noFill/>
-          </a:ln>
-        </p:spPr>
-        <p:style>
-          <a:lnRef idx="1">
-            <a:schemeClr val="accent1"/>
-          </a:lnRef>
-          <a:fillRef idx="3">
-            <a:schemeClr val="accent1"/>
-          </a:fillRef>
-          <a:effectRef idx="2">
-            <a:schemeClr val="accent1"/>
-          </a:effectRef>
-          <a:fontRef idx="minor">
-            <a:schemeClr val="lt1"/>
-          </a:fontRef>
-        </p:style>
-        <p:txBody>
-          <a:bodyPr rtlCol="0" anchor="ctr"/>
-          <a:lstStyle/>
-          <a:p>
-            <a:pPr algn="ctr"/>
-          </a:p>
-        </p:txBody>
-      </p:sp>
-      <p:sp>
-        <p:nvSpPr>
-          <p:cNvPr id="3" name="Rectangle 2"/>
-          <p:cNvSpPr/>
-          <p:nvPr/>
-        </p:nvSpPr>
-        <p:spPr>
-          <a:xfrm>
-            <a:off x="0" y="960120"/>
-            <a:ext cx="12191695" cy="41148"/>
-          </a:xfrm>
-          <a:prstGeom prst="rect">
-            <a:avLst/>
-          </a:prstGeom>
-          <a:solidFill>
-            <a:srgbClr val="FFD000"/>
-          </a:solidFill>
-          <a:ln>
-            <a:noFill/>
-          </a:ln>
-        </p:spPr>
-        <p:style>
-          <a:lnRef idx="1">
-            <a:schemeClr val="accent1"/>
-          </a:lnRef>
-          <a:fillRef idx="3">
-            <a:schemeClr val="accent1"/>
-          </a:fillRef>
-          <a:effectRef idx="2">
-            <a:schemeClr val="accent1"/>
-          </a:effectRef>
-          <a:fontRef idx="minor">
-            <a:schemeClr val="lt1"/>
-          </a:fontRef>
-        </p:style>
-        <p:txBody>
-          <a:bodyPr rtlCol="0" anchor="ctr"/>
-          <a:lstStyle/>
-          <a:p>
-            <a:pPr algn="ctr"/>
-          </a:p>
-        </p:txBody>
-      </p:sp>
-      <p:sp>
-        <p:nvSpPr>
-          <p:cNvPr id="4" name="TextBox 3"/>
-          <p:cNvSpPr txBox="1"/>
-          <p:nvPr/>
-        </p:nvSpPr>
-        <p:spPr>
-          <a:xfrm>
-            <a:off x="457200" y="164592"/>
-            <a:ext cx="11277295" cy="502920"/>
-          </a:xfrm>
-          <a:prstGeom prst="rect">
-            <a:avLst/>
-          </a:prstGeom>
-          <a:noFill/>
-        </p:spPr>
-        <p:txBody>
-          <a:bodyPr wrap="square">
-            <a:spAutoFit/>
-          </a:bodyPr>
-          <a:lstStyle/>
-          <a:p>
-            <a:r>
-              <a:rPr sz="2600" b="1" i="0">
-                <a:solidFill>
-                  <a:srgbClr val="FFFFFF"/>
-                </a:solidFill>
-                <a:latin typeface="Calibri"/>
-              </a:rPr>
-              <a:t>Limpiar, y la prueba de que el contenedor no guarda estado</a:t>
-            </a:r>
-          </a:p>
-        </p:txBody>
-      </p:sp>
-      <p:sp>
-        <p:nvSpPr>
-          <p:cNvPr id="5" name="Rounded Rectangle 4"/>
-          <p:cNvSpPr/>
-          <p:nvPr/>
-        </p:nvSpPr>
-        <p:spPr>
-          <a:xfrm>
-            <a:off x="457200" y="1261872"/>
-            <a:ext cx="11277295" cy="5093208"/>
-          </a:xfrm>
-          <a:prstGeom prst="roundRect">
-            <a:avLst>
-              <a:gd name="adj" fmla="val 12000"/>
-            </a:avLst>
-          </a:prstGeom>
-          <a:solidFill>
-            <a:srgbClr val="1E2A38"/>
-          </a:solidFill>
-          <a:ln>
-            <a:noFill/>
-          </a:ln>
-        </p:spPr>
-        <p:style>
-          <a:lnRef idx="1">
-            <a:schemeClr val="accent1"/>
-          </a:lnRef>
-          <a:fillRef idx="3">
-            <a:schemeClr val="accent1"/>
-          </a:fillRef>
-          <a:effectRef idx="2">
-            <a:schemeClr val="accent1"/>
-          </a:effectRef>
-          <a:fontRef idx="minor">
-            <a:schemeClr val="lt1"/>
-          </a:fontRef>
-        </p:style>
-        <p:txBody>
-          <a:bodyPr rtlCol="0" anchor="ctr"/>
-          <a:lstStyle/>
-          <a:p>
-            <a:pPr algn="ctr"/>
-          </a:p>
-        </p:txBody>
-      </p:sp>
-      <p:sp>
-        <p:nvSpPr>
-          <p:cNvPr id="6" name="Rectangle 5"/>
-          <p:cNvSpPr/>
-          <p:nvPr/>
-        </p:nvSpPr>
-        <p:spPr>
-          <a:xfrm>
-            <a:off x="457200" y="1261872"/>
-            <a:ext cx="11277295" cy="320040"/>
-          </a:xfrm>
-          <a:prstGeom prst="rect">
-            <a:avLst/>
-          </a:prstGeom>
-          <a:solidFill>
-            <a:srgbClr val="095292"/>
-          </a:solidFill>
-          <a:ln>
-            <a:noFill/>
-          </a:ln>
-        </p:spPr>
-        <p:style>
-          <a:lnRef idx="1">
-            <a:schemeClr val="accent1"/>
-          </a:lnRef>
-          <a:fillRef idx="3">
-            <a:schemeClr val="accent1"/>
-          </a:fillRef>
-          <a:effectRef idx="2">
-            <a:schemeClr val="accent1"/>
-          </a:effectRef>
-          <a:fontRef idx="minor">
-            <a:schemeClr val="lt1"/>
-          </a:fontRef>
-        </p:style>
-        <p:txBody>
-          <a:bodyPr rtlCol="0" anchor="ctr"/>
-          <a:lstStyle/>
-          <a:p>
-            <a:pPr algn="ctr"/>
-          </a:p>
-        </p:txBody>
-      </p:sp>
-      <p:sp>
-        <p:nvSpPr>
-          <p:cNvPr id="7" name="TextBox 6"/>
-          <p:cNvSpPr txBox="1"/>
-          <p:nvPr/>
-        </p:nvSpPr>
-        <p:spPr>
-          <a:xfrm>
-            <a:off x="685800" y="1307592"/>
-            <a:ext cx="10820095" cy="256032"/>
-          </a:xfrm>
-          <a:prstGeom prst="rect">
-            <a:avLst/>
-          </a:prstGeom>
-          <a:noFill/>
-        </p:spPr>
-        <p:txBody>
-          <a:bodyPr wrap="square" anchor="ctr"/>
-          <a:lstStyle/>
-          <a:p>
-            <a:r>
-              <a:rPr sz="1000" b="1" i="0">
-                <a:solidFill>
-                  <a:srgbClr val="269CCB"/>
-                </a:solidFill>
-                <a:latin typeface="Calibri"/>
-              </a:rPr>
-              <a:t>● ● ●</a:t>
-            </a:r>
-          </a:p>
-        </p:txBody>
-      </p:sp>
-      <p:sp>
-        <p:nvSpPr>
-          <p:cNvPr id="8" name="TextBox 7"/>
-          <p:cNvSpPr txBox="1"/>
-          <p:nvPr/>
-        </p:nvSpPr>
-        <p:spPr>
-          <a:xfrm>
-            <a:off x="777240" y="1719072"/>
-            <a:ext cx="10637215" cy="4453128"/>
-          </a:xfrm>
-          <a:prstGeom prst="rect">
-            <a:avLst/>
-          </a:prstGeom>
-          <a:noFill/>
-        </p:spPr>
-        <p:txBody>
-          <a:bodyPr wrap="square">
-            <a:spAutoFit/>
-          </a:bodyPr>
-          <a:lstStyle/>
-          <a:p>
-            <a:pPr>
-              <a:spcAft>
-                <a:spcPts val="400"/>
-              </a:spcAft>
-            </a:pPr>
-            <a:r>
-              <a:rPr sz="1400" b="0" i="0">
-                <a:solidFill>
-                  <a:srgbClr val="FFFFFF"/>
-                </a:solidFill>
-                <a:latin typeface="Calibri"/>
-              </a:rPr>
-              <a:t>$ docker stop turnos &amp;&amp; docker rm turnos</a:t>
-            </a:r>
-          </a:p>
-          <a:p>
-            <a:pPr>
-              <a:spcAft>
-                <a:spcPts val="400"/>
-              </a:spcAft>
-            </a:pPr>
-            <a:r>
-              <a:rPr sz="1400" b="0" i="0">
-                <a:solidFill>
-                  <a:srgbClr val="FFFFFF"/>
-                </a:solidFill>
-                <a:latin typeface="Calibri"/>
-              </a:rPr>
-              <a:t/>
-            </a:r>
-          </a:p>
-          <a:p>
-            <a:pPr>
-              <a:spcAft>
-                <a:spcPts val="400"/>
-              </a:spcAft>
-            </a:pPr>
-            <a:r>
-              <a:rPr sz="1400" b="0" i="0">
-                <a:solidFill>
-                  <a:srgbClr val="FFFFFF"/>
-                </a:solidFill>
-                <a:latin typeface="Calibri"/>
-              </a:rPr>
-              <a:t># Lo escrito DENTRO del contenedor se va con el:</a:t>
-            </a:r>
-          </a:p>
-          <a:p>
-            <a:pPr>
-              <a:spcAft>
-                <a:spcPts val="400"/>
-              </a:spcAft>
-            </a:pPr>
-            <a:r>
-              <a:rPr sz="1400" b="0" i="0">
-                <a:solidFill>
-                  <a:srgbClr val="FFFFFF"/>
-                </a:solidFill>
-                <a:latin typeface="Calibri"/>
-              </a:rPr>
-              <a:t>$ docker run -d --name c1 turnos-api:0.1.0</a:t>
-            </a:r>
-          </a:p>
-          <a:p>
-            <a:pPr>
-              <a:spcAft>
-                <a:spcPts val="400"/>
-              </a:spcAft>
-            </a:pPr>
-            <a:r>
-              <a:rPr sz="1400" b="0" i="0">
-                <a:solidFill>
-                  <a:srgbClr val="FFFFFF"/>
-                </a:solidFill>
-                <a:latin typeface="Calibri"/>
-              </a:rPr>
-              <a:t>$ docker exec c1 sh -c 'echo hola &gt; /tmp/dato.txt'</a:t>
-            </a:r>
-          </a:p>
-          <a:p>
-            <a:pPr>
-              <a:spcAft>
-                <a:spcPts val="400"/>
-              </a:spcAft>
-            </a:pPr>
-            <a:r>
-              <a:rPr sz="1400" b="0" i="0">
-                <a:solidFill>
-                  <a:srgbClr val="FFFFFF"/>
-                </a:solidFill>
-                <a:latin typeface="Calibri"/>
-              </a:rPr>
-              <a:t>$ docker rm -f c1</a:t>
-            </a:r>
-          </a:p>
-          <a:p>
-            <a:pPr>
-              <a:spcAft>
-                <a:spcPts val="400"/>
-              </a:spcAft>
-            </a:pPr>
-            <a:r>
-              <a:rPr sz="1400" b="0" i="0">
-                <a:solidFill>
-                  <a:srgbClr val="FFFFFF"/>
-                </a:solidFill>
-                <a:latin typeface="Calibri"/>
-              </a:rPr>
-              <a:t>$ docker run --rm turnos-api:0.1.0 cat /tmp/dato.txt</a:t>
-            </a:r>
-          </a:p>
-          <a:p>
-            <a:pPr>
-              <a:spcAft>
-                <a:spcPts val="400"/>
-              </a:spcAft>
-            </a:pPr>
-            <a:r>
-              <a:rPr sz="1400" b="0" i="0">
-                <a:solidFill>
-                  <a:srgbClr val="FFFFFF"/>
-                </a:solidFill>
-                <a:latin typeface="Calibri"/>
-              </a:rPr>
-              <a:t>cat: can't open '/tmp/dato.txt': No such file or directory</a:t>
-            </a:r>
-          </a:p>
-          <a:p>
-            <a:pPr>
-              <a:spcAft>
-                <a:spcPts val="400"/>
-              </a:spcAft>
-            </a:pPr>
-            <a:r>
-              <a:rPr sz="1400" b="0" i="0">
-                <a:solidFill>
-                  <a:srgbClr val="FFFFFF"/>
-                </a:solidFill>
-                <a:latin typeface="Calibri"/>
-              </a:rPr>
-              <a:t/>
-            </a:r>
-          </a:p>
-          <a:p>
-            <a:pPr>
-              <a:spcAft>
-                <a:spcPts val="400"/>
-              </a:spcAft>
-            </a:pPr>
-            <a:r>
-              <a:rPr sz="1400" b="0" i="0">
-                <a:solidFill>
-                  <a:srgbClr val="FFFFFF"/>
-                </a:solidFill>
-                <a:latin typeface="Calibri"/>
-              </a:rPr>
-              <a:t># Por eso el estado vive fuera: volumen o base de datos gestionada.</a:t>
-            </a:r>
-          </a:p>
-          <a:p>
-            <a:pPr>
-              <a:spcAft>
-                <a:spcPts val="400"/>
-              </a:spcAft>
-            </a:pPr>
-            <a:r>
-              <a:rPr sz="1400" b="0" i="0">
-                <a:solidFill>
-                  <a:srgbClr val="FFFFFF"/>
-                </a:solidFill>
-                <a:latin typeface="Calibri"/>
-              </a:rPr>
-              <a:t>$ docker run -d -v turnos_datos:/app/data turnos-api:0.1.0</a:t>
-            </a:r>
-          </a:p>
-        </p:txBody>
-      </p:sp>
-      <p:sp>
-        <p:nvSpPr>
-          <p:cNvPr id="9" name="TextBox 8"/>
-          <p:cNvSpPr txBox="1"/>
-          <p:nvPr/>
-        </p:nvSpPr>
-        <p:spPr>
-          <a:xfrm>
-            <a:off x="11185855" y="6473952"/>
-            <a:ext cx="640080" cy="274320"/>
-          </a:xfrm>
-          <a:prstGeom prst="rect">
-            <a:avLst/>
-          </a:prstGeom>
-          <a:noFill/>
-        </p:spPr>
-        <p:txBody>
-          <a:bodyPr wrap="square">
-            <a:spAutoFit/>
-          </a:bodyPr>
-          <a:lstStyle/>
-          <a:p>
-            <a:pPr algn="r"/>
-            <a:r>
-              <a:rPr sz="1100" b="0" i="0">
-                <a:solidFill>
-                  <a:srgbClr val="666666"/>
-                </a:solidFill>
-                <a:latin typeface="Calibri"/>
-              </a:rPr>
-              <a:t>31</a:t>
-            </a:r>
-          </a:p>
-        </p:txBody>
-      </p:sp>
-    </p:spTree>
-  </p:cSld>
-  <p:clrMapOvr>
-    <a:masterClrMapping/>
-  </p:clrMapOvr>
-</p:sld>
-</file>
-
-<file path=ppt/slides/slide32.xml><?xml version="1.0" encoding="utf-8"?>
-<p:sld xmlns:a="http://schemas.openxmlformats.org/drawingml/2006/main" xmlns:p="http://schemas.openxmlformats.org/presentationml/2006/main" xmlns:r="http://schemas.openxmlformats.org/officeDocument/2006/relationships">
-  <p:cSld>
-    <p:bg>
-      <p:bgPr>
-        <a:solidFill>
-          <a:srgbClr val="FFFFFF"/>
-        </a:solidFill>
-        <a:effectLst/>
-      </p:bgPr>
-    </p:bg>
-    <p:spTree>
-      <p:nvGrpSpPr>
-        <p:cNvPr id="1" name=""/>
-        <p:cNvGrpSpPr/>
-        <p:nvPr/>
-      </p:nvGrpSpPr>
-      <p:grpSpPr/>
-      <p:sp>
-        <p:nvSpPr>
-          <p:cNvPr id="2" name="Rectangle 1"/>
-          <p:cNvSpPr/>
-          <p:nvPr/>
-        </p:nvSpPr>
-        <p:spPr>
-          <a:xfrm>
-            <a:off x="0" y="0"/>
-            <a:ext cx="12191695" cy="1170432"/>
-          </a:xfrm>
-          <a:prstGeom prst="rect">
-            <a:avLst/>
-          </a:prstGeom>
-          <a:solidFill>
-            <a:srgbClr val="095292"/>
-          </a:solidFill>
-          <a:ln>
-            <a:noFill/>
-          </a:ln>
-        </p:spPr>
-        <p:style>
-          <a:lnRef idx="1">
-            <a:schemeClr val="accent1"/>
-          </a:lnRef>
-          <a:fillRef idx="3">
-            <a:schemeClr val="accent1"/>
-          </a:fillRef>
-          <a:effectRef idx="2">
-            <a:schemeClr val="accent1"/>
-          </a:effectRef>
-          <a:fontRef idx="minor">
-            <a:schemeClr val="lt1"/>
-          </a:fontRef>
-        </p:style>
-        <p:txBody>
-          <a:bodyPr rtlCol="0" anchor="ctr"/>
-          <a:lstStyle/>
-          <a:p>
-            <a:pPr algn="ctr"/>
-          </a:p>
-        </p:txBody>
-      </p:sp>
-      <p:sp>
-        <p:nvSpPr>
-          <p:cNvPr id="3" name="Rectangle 2"/>
-          <p:cNvSpPr/>
-          <p:nvPr/>
-        </p:nvSpPr>
-        <p:spPr>
-          <a:xfrm>
-            <a:off x="0" y="1170432"/>
-            <a:ext cx="12191695" cy="41148"/>
-          </a:xfrm>
-          <a:prstGeom prst="rect">
-            <a:avLst/>
-          </a:prstGeom>
-          <a:solidFill>
-            <a:srgbClr val="FFD000"/>
-          </a:solidFill>
-          <a:ln>
-            <a:noFill/>
-          </a:ln>
-        </p:spPr>
-        <p:style>
-          <a:lnRef idx="1">
-            <a:schemeClr val="accent1"/>
-          </a:lnRef>
-          <a:fillRef idx="3">
-            <a:schemeClr val="accent1"/>
-          </a:fillRef>
-          <a:effectRef idx="2">
-            <a:schemeClr val="accent1"/>
-          </a:effectRef>
-          <a:fontRef idx="minor">
-            <a:schemeClr val="lt1"/>
-          </a:fontRef>
-        </p:style>
-        <p:txBody>
-          <a:bodyPr rtlCol="0" anchor="ctr"/>
-          <a:lstStyle/>
-          <a:p>
-            <a:pPr algn="ctr"/>
-          </a:p>
-        </p:txBody>
-      </p:sp>
-      <p:sp>
-        <p:nvSpPr>
-          <p:cNvPr id="4" name="TextBox 3"/>
-          <p:cNvSpPr txBox="1"/>
-          <p:nvPr/>
-        </p:nvSpPr>
-        <p:spPr>
-          <a:xfrm>
-            <a:off x="457200" y="164592"/>
-            <a:ext cx="11277295" cy="384048"/>
-          </a:xfrm>
-          <a:prstGeom prst="rect">
-            <a:avLst/>
-          </a:prstGeom>
-          <a:noFill/>
-        </p:spPr>
-        <p:txBody>
-          <a:bodyPr wrap="square">
-            <a:spAutoFit/>
-          </a:bodyPr>
-          <a:lstStyle/>
-          <a:p>
-            <a:r>
-              <a:rPr sz="2600" b="1" i="0">
-                <a:solidFill>
-                  <a:srgbClr val="FFFFFF"/>
-                </a:solidFill>
-                <a:latin typeface="Calibri"/>
-              </a:rPr>
-              <a:t>Máquinas virtuales vs. contenedores</a:t>
-            </a:r>
-          </a:p>
-        </p:txBody>
-      </p:sp>
-      <p:sp>
-        <p:nvSpPr>
-          <p:cNvPr id="5" name="TextBox 4"/>
-          <p:cNvSpPr txBox="1"/>
-          <p:nvPr/>
-        </p:nvSpPr>
-        <p:spPr>
-          <a:xfrm>
-            <a:off x="457200" y="566928"/>
-            <a:ext cx="11277295" cy="411480"/>
-          </a:xfrm>
-          <a:prstGeom prst="rect">
-            <a:avLst/>
-          </a:prstGeom>
-          <a:noFill/>
-        </p:spPr>
-        <p:txBody>
-          <a:bodyPr wrap="square">
-            <a:spAutoFit/>
-          </a:bodyPr>
-          <a:lstStyle/>
-          <a:p>
-            <a:r>
-              <a:rPr sz="1400" b="0" i="0">
-                <a:solidFill>
-                  <a:srgbClr val="B8D8EE"/>
-                </a:solidFill>
-                <a:latin typeface="Calibri"/>
-              </a:rPr>
-              <a:t>Misma capacidad de cómputo, distinto nivel de aislamiento</a:t>
-            </a:r>
-          </a:p>
-        </p:txBody>
-      </p:sp>
-      <p:sp>
-        <p:nvSpPr>
-          <p:cNvPr id="6" name="Rounded Rectangle 5"/>
-          <p:cNvSpPr/>
-          <p:nvPr/>
-        </p:nvSpPr>
-        <p:spPr>
-          <a:xfrm>
-            <a:off x="822960" y="1417320"/>
-            <a:ext cx="3931920" cy="457200"/>
-          </a:xfrm>
-          <a:prstGeom prst="roundRect">
-            <a:avLst>
-              <a:gd name="adj" fmla="val 12000"/>
-            </a:avLst>
-          </a:prstGeom>
-          <a:solidFill>
-            <a:srgbClr val="095292"/>
-          </a:solidFill>
-          <a:ln>
-            <a:noFill/>
-          </a:ln>
-        </p:spPr>
-        <p:style>
-          <a:lnRef idx="1">
-            <a:schemeClr val="accent1"/>
-          </a:lnRef>
-          <a:fillRef idx="3">
-            <a:schemeClr val="accent1"/>
-          </a:fillRef>
-          <a:effectRef idx="2">
-            <a:schemeClr val="accent1"/>
-          </a:effectRef>
-          <a:fontRef idx="minor">
-            <a:schemeClr val="lt1"/>
-          </a:fontRef>
-        </p:style>
-        <p:txBody>
-          <a:bodyPr rtlCol="0" anchor="ctr" wrap="square"/>
-          <a:lstStyle/>
-          <a:p>
-            <a:pPr algn="ctr"/>
-            <a:r>
-              <a:rPr sz="1200" b="1" i="0">
-                <a:solidFill>
-                  <a:srgbClr val="FFFFFF"/>
-                </a:solidFill>
-                <a:latin typeface="Calibri"/>
-              </a:rPr>
-              <a:t>Máquinas virtuales</a:t>
-            </a:r>
-          </a:p>
-        </p:txBody>
-      </p:sp>
-      <p:sp>
-        <p:nvSpPr>
-          <p:cNvPr id="7" name="Rounded Rectangle 6"/>
-          <p:cNvSpPr/>
-          <p:nvPr/>
-        </p:nvSpPr>
-        <p:spPr>
-          <a:xfrm>
-            <a:off x="822960" y="2057400"/>
-            <a:ext cx="3931920" cy="594360"/>
-          </a:xfrm>
-          <a:prstGeom prst="roundRect">
-            <a:avLst>
-              <a:gd name="adj" fmla="val 12000"/>
-            </a:avLst>
-          </a:prstGeom>
-          <a:solidFill>
-            <a:srgbClr val="333333"/>
-          </a:solidFill>
-          <a:ln>
-            <a:noFill/>
-          </a:ln>
-        </p:spPr>
-        <p:style>
-          <a:lnRef idx="1">
-            <a:schemeClr val="accent1"/>
-          </a:lnRef>
-          <a:fillRef idx="3">
-            <a:schemeClr val="accent1"/>
-          </a:fillRef>
-          <a:effectRef idx="2">
-            <a:schemeClr val="accent1"/>
-          </a:effectRef>
-          <a:fontRef idx="minor">
-            <a:schemeClr val="lt1"/>
-          </a:fontRef>
-        </p:style>
-        <p:txBody>
-          <a:bodyPr rtlCol="0" anchor="ctr" wrap="square"/>
-          <a:lstStyle/>
-          <a:p>
-            <a:pPr algn="ctr"/>
-            <a:r>
-              <a:rPr sz="1300" b="1" i="0">
-                <a:solidFill>
-                  <a:srgbClr val="FFFFFF"/>
-                </a:solidFill>
-                <a:latin typeface="Calibri"/>
-              </a:rPr>
-              <a:t>Hardware físico</a:t>
-            </a:r>
-          </a:p>
-        </p:txBody>
-      </p:sp>
-      <p:sp>
-        <p:nvSpPr>
-          <p:cNvPr id="8" name="Rounded Rectangle 7"/>
-          <p:cNvSpPr/>
-          <p:nvPr/>
-        </p:nvSpPr>
-        <p:spPr>
-          <a:xfrm>
-            <a:off x="822960" y="2697480"/>
-            <a:ext cx="3931920" cy="594360"/>
-          </a:xfrm>
-          <a:prstGeom prst="roundRect">
-            <a:avLst>
-              <a:gd name="adj" fmla="val 12000"/>
-            </a:avLst>
-          </a:prstGeom>
-          <a:solidFill>
-            <a:srgbClr val="269CCB"/>
-          </a:solidFill>
-          <a:ln>
-            <a:noFill/>
-          </a:ln>
-        </p:spPr>
-        <p:style>
-          <a:lnRef idx="1">
-            <a:schemeClr val="accent1"/>
-          </a:lnRef>
-          <a:fillRef idx="3">
-            <a:schemeClr val="accent1"/>
-          </a:fillRef>
-          <a:effectRef idx="2">
-            <a:schemeClr val="accent1"/>
-          </a:effectRef>
-          <a:fontRef idx="minor">
-            <a:schemeClr val="lt1"/>
-          </a:fontRef>
-        </p:style>
-        <p:txBody>
-          <a:bodyPr rtlCol="0" anchor="ctr" wrap="square"/>
-          <a:lstStyle/>
-          <a:p>
-            <a:pPr algn="ctr"/>
-            <a:r>
-              <a:rPr sz="1300" b="1" i="0">
-                <a:solidFill>
-                  <a:srgbClr val="FFFFFF"/>
-                </a:solidFill>
-                <a:latin typeface="Calibri"/>
-              </a:rPr>
-              <a:t>Hipervisor</a:t>
-            </a:r>
-          </a:p>
-        </p:txBody>
-      </p:sp>
-      <p:sp>
-        <p:nvSpPr>
-          <p:cNvPr id="9" name="Rounded Rectangle 8"/>
-          <p:cNvSpPr/>
-          <p:nvPr/>
-        </p:nvSpPr>
-        <p:spPr>
-          <a:xfrm>
-            <a:off x="822960" y="3337560"/>
-            <a:ext cx="1874519" cy="640080"/>
-          </a:xfrm>
-          <a:prstGeom prst="roundRect">
-            <a:avLst>
-              <a:gd name="adj" fmla="val 12000"/>
-            </a:avLst>
-          </a:prstGeom>
-          <a:solidFill>
-            <a:srgbClr val="269CCB"/>
-          </a:solidFill>
-          <a:ln>
-            <a:noFill/>
-          </a:ln>
-        </p:spPr>
-        <p:style>
-          <a:lnRef idx="1">
-            <a:schemeClr val="accent1"/>
-          </a:lnRef>
-          <a:fillRef idx="3">
-            <a:schemeClr val="accent1"/>
-          </a:fillRef>
-          <a:effectRef idx="2">
-            <a:schemeClr val="accent1"/>
-          </a:effectRef>
-          <a:fontRef idx="minor">
-            <a:schemeClr val="lt1"/>
-          </a:fontRef>
-        </p:style>
-        <p:txBody>
-          <a:bodyPr rtlCol="0" anchor="ctr" wrap="square"/>
-          <a:lstStyle/>
-          <a:p>
-            <a:pPr algn="ctr"/>
-            <a:r>
-              <a:rPr sz="1100" b="1" i="0">
-                <a:solidFill>
-                  <a:srgbClr val="FFFFFF"/>
-                </a:solidFill>
-                <a:latin typeface="Calibri"/>
-              </a:rPr>
-              <a:t>SO invitado A
-(completo)</a:t>
-            </a:r>
-          </a:p>
-        </p:txBody>
-      </p:sp>
-      <p:sp>
-        <p:nvSpPr>
-          <p:cNvPr id="10" name="Rounded Rectangle 9"/>
-          <p:cNvSpPr/>
-          <p:nvPr/>
-        </p:nvSpPr>
-        <p:spPr>
-          <a:xfrm>
-            <a:off x="2880360" y="3337560"/>
-            <a:ext cx="1874519" cy="640080"/>
-          </a:xfrm>
-          <a:prstGeom prst="roundRect">
-            <a:avLst>
-              <a:gd name="adj" fmla="val 12000"/>
-            </a:avLst>
-          </a:prstGeom>
-          <a:solidFill>
-            <a:srgbClr val="269CCB"/>
-          </a:solidFill>
-          <a:ln>
-            <a:noFill/>
-          </a:ln>
-        </p:spPr>
-        <p:style>
-          <a:lnRef idx="1">
-            <a:schemeClr val="accent1"/>
-          </a:lnRef>
-          <a:fillRef idx="3">
-            <a:schemeClr val="accent1"/>
-          </a:fillRef>
-          <a:effectRef idx="2">
-            <a:schemeClr val="accent1"/>
-          </a:effectRef>
-          <a:fontRef idx="minor">
-            <a:schemeClr val="lt1"/>
-          </a:fontRef>
-        </p:style>
-        <p:txBody>
-          <a:bodyPr rtlCol="0" anchor="ctr" wrap="square"/>
-          <a:lstStyle/>
-          <a:p>
-            <a:pPr algn="ctr"/>
-            <a:r>
-              <a:rPr sz="1100" b="1" i="0">
-                <a:solidFill>
-                  <a:srgbClr val="FFFFFF"/>
-                </a:solidFill>
-                <a:latin typeface="Calibri"/>
-              </a:rPr>
-              <a:t>SO invitado B
-(completo)</a:t>
-            </a:r>
-          </a:p>
-        </p:txBody>
-      </p:sp>
-      <p:sp>
-        <p:nvSpPr>
-          <p:cNvPr id="11" name="Rounded Rectangle 10"/>
-          <p:cNvSpPr/>
-          <p:nvPr/>
-        </p:nvSpPr>
-        <p:spPr>
-          <a:xfrm>
-            <a:off x="822960" y="4023360"/>
-            <a:ext cx="1874519" cy="548640"/>
-          </a:xfrm>
-          <a:prstGeom prst="roundRect">
-            <a:avLst>
-              <a:gd name="adj" fmla="val 12000"/>
-            </a:avLst>
-          </a:prstGeom>
-          <a:solidFill>
-            <a:srgbClr val="FFD000"/>
-          </a:solidFill>
-          <a:ln>
-            <a:noFill/>
-          </a:ln>
-        </p:spPr>
-        <p:style>
-          <a:lnRef idx="1">
-            <a:schemeClr val="accent1"/>
-          </a:lnRef>
-          <a:fillRef idx="3">
-            <a:schemeClr val="accent1"/>
-          </a:fillRef>
-          <a:effectRef idx="2">
-            <a:schemeClr val="accent1"/>
-          </a:effectRef>
-          <a:fontRef idx="minor">
-            <a:schemeClr val="lt1"/>
-          </a:fontRef>
-        </p:style>
-        <p:txBody>
-          <a:bodyPr rtlCol="0" anchor="ctr" wrap="square"/>
-          <a:lstStyle/>
-          <a:p>
-            <a:pPr algn="ctr"/>
-            <a:r>
-              <a:rPr sz="1300" b="1" i="0">
-                <a:solidFill>
-                  <a:srgbClr val="095292"/>
-                </a:solidFill>
-                <a:latin typeface="Calibri"/>
-              </a:rPr>
-              <a:t>App A</a:t>
-            </a:r>
-          </a:p>
-        </p:txBody>
-      </p:sp>
-      <p:sp>
-        <p:nvSpPr>
-          <p:cNvPr id="12" name="Rounded Rectangle 11"/>
-          <p:cNvSpPr/>
-          <p:nvPr/>
-        </p:nvSpPr>
-        <p:spPr>
-          <a:xfrm>
-            <a:off x="2880360" y="4023360"/>
-            <a:ext cx="1874519" cy="548640"/>
-          </a:xfrm>
-          <a:prstGeom prst="roundRect">
-            <a:avLst>
-              <a:gd name="adj" fmla="val 12000"/>
-            </a:avLst>
-          </a:prstGeom>
-          <a:solidFill>
-            <a:srgbClr val="FFD000"/>
-          </a:solidFill>
-          <a:ln>
-            <a:noFill/>
-          </a:ln>
-        </p:spPr>
-        <p:style>
-          <a:lnRef idx="1">
-            <a:schemeClr val="accent1"/>
-          </a:lnRef>
-          <a:fillRef idx="3">
-            <a:schemeClr val="accent1"/>
-          </a:fillRef>
-          <a:effectRef idx="2">
-            <a:schemeClr val="accent1"/>
-          </a:effectRef>
-          <a:fontRef idx="minor">
-            <a:schemeClr val="lt1"/>
-          </a:fontRef>
-        </p:style>
-        <p:txBody>
-          <a:bodyPr rtlCol="0" anchor="ctr" wrap="square"/>
-          <a:lstStyle/>
-          <a:p>
-            <a:pPr algn="ctr"/>
-            <a:r>
-              <a:rPr sz="1300" b="1" i="0">
-                <a:solidFill>
-                  <a:srgbClr val="095292"/>
-                </a:solidFill>
-                <a:latin typeface="Calibri"/>
-              </a:rPr>
-              <a:t>App B</a:t>
-            </a:r>
-          </a:p>
-        </p:txBody>
-      </p:sp>
-      <p:sp>
-        <p:nvSpPr>
-          <p:cNvPr id="13" name="Rounded Rectangle 12"/>
-          <p:cNvSpPr/>
-          <p:nvPr/>
-        </p:nvSpPr>
-        <p:spPr>
-          <a:xfrm>
-            <a:off x="7315200" y="1417320"/>
-            <a:ext cx="3931920" cy="457200"/>
-          </a:xfrm>
-          <a:prstGeom prst="roundRect">
-            <a:avLst>
-              <a:gd name="adj" fmla="val 12000"/>
-            </a:avLst>
-          </a:prstGeom>
-          <a:solidFill>
-            <a:srgbClr val="095292"/>
-          </a:solidFill>
-          <a:ln>
-            <a:noFill/>
-          </a:ln>
-        </p:spPr>
-        <p:style>
-          <a:lnRef idx="1">
-            <a:schemeClr val="accent1"/>
-          </a:lnRef>
-          <a:fillRef idx="3">
-            <a:schemeClr val="accent1"/>
-          </a:fillRef>
-          <a:effectRef idx="2">
-            <a:schemeClr val="accent1"/>
-          </a:effectRef>
-          <a:fontRef idx="minor">
-            <a:schemeClr val="lt1"/>
-          </a:fontRef>
-        </p:style>
-        <p:txBody>
-          <a:bodyPr rtlCol="0" anchor="ctr" wrap="square"/>
-          <a:lstStyle/>
-          <a:p>
-            <a:pPr algn="ctr"/>
-            <a:r>
-              <a:rPr sz="1200" b="1" i="0">
-                <a:solidFill>
-                  <a:srgbClr val="FFFFFF"/>
-                </a:solidFill>
-                <a:latin typeface="Calibri"/>
-              </a:rPr>
-              <a:t>Contenedores</a:t>
-            </a:r>
-          </a:p>
-        </p:txBody>
-      </p:sp>
-      <p:sp>
-        <p:nvSpPr>
-          <p:cNvPr id="14" name="Rounded Rectangle 13"/>
-          <p:cNvSpPr/>
-          <p:nvPr/>
-        </p:nvSpPr>
-        <p:spPr>
-          <a:xfrm>
-            <a:off x="7315200" y="2057400"/>
-            <a:ext cx="3931920" cy="594360"/>
-          </a:xfrm>
-          <a:prstGeom prst="roundRect">
-            <a:avLst>
-              <a:gd name="adj" fmla="val 12000"/>
-            </a:avLst>
-          </a:prstGeom>
-          <a:solidFill>
-            <a:srgbClr val="333333"/>
-          </a:solidFill>
-          <a:ln>
-            <a:noFill/>
-          </a:ln>
-        </p:spPr>
-        <p:style>
-          <a:lnRef idx="1">
-            <a:schemeClr val="accent1"/>
-          </a:lnRef>
-          <a:fillRef idx="3">
-            <a:schemeClr val="accent1"/>
-          </a:fillRef>
-          <a:effectRef idx="2">
-            <a:schemeClr val="accent1"/>
-          </a:effectRef>
-          <a:fontRef idx="minor">
-            <a:schemeClr val="lt1"/>
-          </a:fontRef>
-        </p:style>
-        <p:txBody>
-          <a:bodyPr rtlCol="0" anchor="ctr" wrap="square"/>
-          <a:lstStyle/>
-          <a:p>
-            <a:pPr algn="ctr"/>
-            <a:r>
-              <a:rPr sz="1300" b="1" i="0">
-                <a:solidFill>
-                  <a:srgbClr val="FFFFFF"/>
-                </a:solidFill>
-                <a:latin typeface="Calibri"/>
-              </a:rPr>
-              <a:t>Hardware físico</a:t>
-            </a:r>
-          </a:p>
-        </p:txBody>
-      </p:sp>
-      <p:sp>
-        <p:nvSpPr>
-          <p:cNvPr id="15" name="Rounded Rectangle 14"/>
-          <p:cNvSpPr/>
-          <p:nvPr/>
-        </p:nvSpPr>
-        <p:spPr>
-          <a:xfrm>
-            <a:off x="7315200" y="2697480"/>
-            <a:ext cx="3931920" cy="594360"/>
-          </a:xfrm>
-          <a:prstGeom prst="roundRect">
-            <a:avLst>
-              <a:gd name="adj" fmla="val 12000"/>
-            </a:avLst>
-          </a:prstGeom>
-          <a:solidFill>
-            <a:srgbClr val="269CCB"/>
-          </a:solidFill>
-          <a:ln>
-            <a:noFill/>
-          </a:ln>
-        </p:spPr>
-        <p:style>
-          <a:lnRef idx="1">
-            <a:schemeClr val="accent1"/>
-          </a:lnRef>
-          <a:fillRef idx="3">
-            <a:schemeClr val="accent1"/>
-          </a:fillRef>
-          <a:effectRef idx="2">
-            <a:schemeClr val="accent1"/>
-          </a:effectRef>
-          <a:fontRef idx="minor">
-            <a:schemeClr val="lt1"/>
-          </a:fontRef>
-        </p:style>
-        <p:txBody>
-          <a:bodyPr rtlCol="0" anchor="ctr" wrap="square"/>
-          <a:lstStyle/>
-          <a:p>
-            <a:pPr algn="ctr"/>
-            <a:r>
-              <a:rPr sz="1050" b="1" i="0">
-                <a:solidFill>
-                  <a:srgbClr val="FFFFFF"/>
-                </a:solidFill>
-                <a:latin typeface="Calibri"/>
-              </a:rPr>
-              <a:t>SO anfitrión + motor de contenedores (kernel compartido)</a:t>
-            </a:r>
-          </a:p>
-        </p:txBody>
-      </p:sp>
-      <p:sp>
-        <p:nvSpPr>
-          <p:cNvPr id="16" name="Rounded Rectangle 15"/>
-          <p:cNvSpPr/>
-          <p:nvPr/>
-        </p:nvSpPr>
-        <p:spPr>
-          <a:xfrm>
-            <a:off x="7315200" y="3337560"/>
-            <a:ext cx="1874519" cy="640080"/>
-          </a:xfrm>
-          <a:prstGeom prst="roundRect">
-            <a:avLst>
-              <a:gd name="adj" fmla="val 12000"/>
-            </a:avLst>
-          </a:prstGeom>
-          <a:solidFill>
-            <a:srgbClr val="FFD000"/>
-          </a:solidFill>
-          <a:ln>
-            <a:noFill/>
-          </a:ln>
-        </p:spPr>
-        <p:style>
-          <a:lnRef idx="1">
-            <a:schemeClr val="accent1"/>
-          </a:lnRef>
-          <a:fillRef idx="3">
-            <a:schemeClr val="accent1"/>
-          </a:fillRef>
-          <a:effectRef idx="2">
-            <a:schemeClr val="accent1"/>
-          </a:effectRef>
-          <a:fontRef idx="minor">
-            <a:schemeClr val="lt1"/>
-          </a:fontRef>
-        </p:style>
-        <p:txBody>
-          <a:bodyPr rtlCol="0" anchor="ctr" wrap="square"/>
-          <a:lstStyle/>
-          <a:p>
-            <a:pPr algn="ctr"/>
-            <a:r>
-              <a:rPr sz="1100" b="1" i="0">
-                <a:solidFill>
-                  <a:srgbClr val="095292"/>
-                </a:solidFill>
-                <a:latin typeface="Calibri"/>
-              </a:rPr>
-              <a:t>Contenedor A
-(App A)</a:t>
-            </a:r>
-          </a:p>
-        </p:txBody>
-      </p:sp>
-      <p:sp>
-        <p:nvSpPr>
-          <p:cNvPr id="17" name="Rounded Rectangle 16"/>
-          <p:cNvSpPr/>
-          <p:nvPr/>
-        </p:nvSpPr>
-        <p:spPr>
-          <a:xfrm>
-            <a:off x="9372600" y="3337560"/>
-            <a:ext cx="1874519" cy="640080"/>
-          </a:xfrm>
-          <a:prstGeom prst="roundRect">
-            <a:avLst>
-              <a:gd name="adj" fmla="val 12000"/>
-            </a:avLst>
-          </a:prstGeom>
-          <a:solidFill>
-            <a:srgbClr val="FFD000"/>
-          </a:solidFill>
-          <a:ln>
-            <a:noFill/>
-          </a:ln>
-        </p:spPr>
-        <p:style>
-          <a:lnRef idx="1">
-            <a:schemeClr val="accent1"/>
-          </a:lnRef>
-          <a:fillRef idx="3">
-            <a:schemeClr val="accent1"/>
-          </a:fillRef>
-          <a:effectRef idx="2">
-            <a:schemeClr val="accent1"/>
-          </a:effectRef>
-          <a:fontRef idx="minor">
-            <a:schemeClr val="lt1"/>
-          </a:fontRef>
-        </p:style>
-        <p:txBody>
-          <a:bodyPr rtlCol="0" anchor="ctr" wrap="square"/>
-          <a:lstStyle/>
-          <a:p>
-            <a:pPr algn="ctr"/>
-            <a:r>
-              <a:rPr sz="1100" b="1" i="0">
-                <a:solidFill>
-                  <a:srgbClr val="095292"/>
-                </a:solidFill>
-                <a:latin typeface="Calibri"/>
-              </a:rPr>
-              <a:t>Contenedor B
-(App B)</a:t>
-            </a:r>
-          </a:p>
-        </p:txBody>
-      </p:sp>
-      <p:sp>
-        <p:nvSpPr>
-          <p:cNvPr id="18" name="TextBox 17"/>
-          <p:cNvSpPr txBox="1"/>
-          <p:nvPr/>
-        </p:nvSpPr>
-        <p:spPr>
-          <a:xfrm>
-            <a:off x="457200" y="6263640"/>
-            <a:ext cx="11277295" cy="411480"/>
-          </a:xfrm>
-          <a:prstGeom prst="rect">
-            <a:avLst/>
-          </a:prstGeom>
-          <a:noFill/>
-        </p:spPr>
-        <p:txBody>
-          <a:bodyPr wrap="square">
-            <a:spAutoFit/>
-          </a:bodyPr>
-          <a:lstStyle/>
-          <a:p>
-            <a:r>
-              <a:rPr sz="1100" b="0" i="1">
-                <a:solidFill>
-                  <a:srgbClr val="666666"/>
-                </a:solidFill>
-                <a:latin typeface="Calibri"/>
-              </a:rPr>
-              <a:t>VM: cada instancia carga un SO completo (aislamiento fuerte, más pesado). Contenedor: comparte el kernel del anfitrión y solo empaqueta app + dependencias (arranca en segundos, pesa MB no GB).</a:t>
-            </a:r>
-          </a:p>
-        </p:txBody>
-      </p:sp>
-      <p:sp>
-        <p:nvSpPr>
-          <p:cNvPr id="19" name="TextBox 18"/>
-          <p:cNvSpPr txBox="1"/>
-          <p:nvPr/>
-        </p:nvSpPr>
-        <p:spPr>
-          <a:xfrm>
-            <a:off x="11185855" y="6473952"/>
-            <a:ext cx="640080" cy="274320"/>
-          </a:xfrm>
-          <a:prstGeom prst="rect">
-            <a:avLst/>
-          </a:prstGeom>
-          <a:noFill/>
-        </p:spPr>
-        <p:txBody>
-          <a:bodyPr wrap="square">
-            <a:spAutoFit/>
-          </a:bodyPr>
-          <a:lstStyle/>
-          <a:p>
-            <a:pPr algn="r"/>
-            <a:r>
-              <a:rPr sz="1100" b="0" i="0">
-                <a:solidFill>
-                  <a:srgbClr val="666666"/>
-                </a:solidFill>
-                <a:latin typeface="Calibri"/>
-              </a:rPr>
-              <a:t>32</a:t>
-            </a:r>
-          </a:p>
-        </p:txBody>
-      </p:sp>
-    </p:spTree>
-  </p:cSld>
-  <p:clrMapOvr>
-    <a:masterClrMapping/>
-  </p:clrMapOvr>
-</p:sld>
-</file>
-
-<file path=ppt/slides/slide33.xml><?xml version="1.0" encoding="utf-8"?>
-<p:sld xmlns:a="http://schemas.openxmlformats.org/drawingml/2006/main" xmlns:p="http://schemas.openxmlformats.org/presentationml/2006/main" xmlns:r="http://schemas.openxmlformats.org/officeDocument/2006/relationships">
-  <p:cSld>
-    <p:bg>
-      <p:bgPr>
-        <a:solidFill>
-          <a:srgbClr val="FFFFFF"/>
-        </a:solidFill>
-        <a:effectLst/>
-      </p:bgPr>
-    </p:bg>
-    <p:spTree>
-      <p:nvGrpSpPr>
-        <p:cNvPr id="1" name=""/>
-        <p:cNvGrpSpPr/>
-        <p:nvPr/>
-      </p:nvGrpSpPr>
-      <p:grpSpPr/>
-      <p:sp>
-        <p:nvSpPr>
-          <p:cNvPr id="2" name="Rectangle 1"/>
-          <p:cNvSpPr/>
-          <p:nvPr/>
-        </p:nvSpPr>
-        <p:spPr>
-          <a:xfrm>
-            <a:off x="0" y="0"/>
-            <a:ext cx="12191695" cy="960120"/>
-          </a:xfrm>
-          <a:prstGeom prst="rect">
-            <a:avLst/>
-          </a:prstGeom>
-          <a:solidFill>
-            <a:srgbClr val="095292"/>
-          </a:solidFill>
-          <a:ln>
-            <a:noFill/>
-          </a:ln>
-        </p:spPr>
-        <p:style>
-          <a:lnRef idx="1">
-            <a:schemeClr val="accent1"/>
-          </a:lnRef>
-          <a:fillRef idx="3">
-            <a:schemeClr val="accent1"/>
-          </a:fillRef>
-          <a:effectRef idx="2">
-            <a:schemeClr val="accent1"/>
-          </a:effectRef>
-          <a:fontRef idx="minor">
-            <a:schemeClr val="lt1"/>
-          </a:fontRef>
-        </p:style>
-        <p:txBody>
-          <a:bodyPr rtlCol="0" anchor="ctr"/>
-          <a:lstStyle/>
-          <a:p>
-            <a:pPr algn="ctr"/>
-          </a:p>
-        </p:txBody>
-      </p:sp>
-      <p:sp>
-        <p:nvSpPr>
-          <p:cNvPr id="3" name="Rectangle 2"/>
-          <p:cNvSpPr/>
-          <p:nvPr/>
-        </p:nvSpPr>
-        <p:spPr>
-          <a:xfrm>
-            <a:off x="0" y="960120"/>
-            <a:ext cx="12191695" cy="41148"/>
-          </a:xfrm>
-          <a:prstGeom prst="rect">
-            <a:avLst/>
-          </a:prstGeom>
-          <a:solidFill>
-            <a:srgbClr val="FFD000"/>
-          </a:solidFill>
-          <a:ln>
-            <a:noFill/>
-          </a:ln>
-        </p:spPr>
-        <p:style>
-          <a:lnRef idx="1">
-            <a:schemeClr val="accent1"/>
-          </a:lnRef>
-          <a:fillRef idx="3">
-            <a:schemeClr val="accent1"/>
-          </a:fillRef>
-          <a:effectRef idx="2">
-            <a:schemeClr val="accent1"/>
-          </a:effectRef>
-          <a:fontRef idx="minor">
-            <a:schemeClr val="lt1"/>
-          </a:fontRef>
-        </p:style>
-        <p:txBody>
-          <a:bodyPr rtlCol="0" anchor="ctr"/>
-          <a:lstStyle/>
-          <a:p>
-            <a:pPr algn="ctr"/>
-          </a:p>
-        </p:txBody>
-      </p:sp>
-      <p:sp>
-        <p:nvSpPr>
-          <p:cNvPr id="4" name="TextBox 3"/>
-          <p:cNvSpPr txBox="1"/>
-          <p:nvPr/>
-        </p:nvSpPr>
-        <p:spPr>
-          <a:xfrm>
-            <a:off x="457200" y="164592"/>
-            <a:ext cx="11277295" cy="502920"/>
-          </a:xfrm>
-          <a:prstGeom prst="rect">
-            <a:avLst/>
-          </a:prstGeom>
-          <a:noFill/>
-        </p:spPr>
-        <p:txBody>
-          <a:bodyPr wrap="square">
-            <a:spAutoFit/>
-          </a:bodyPr>
-          <a:lstStyle/>
-          <a:p>
-            <a:r>
-              <a:rPr sz="2600" b="1" i="0">
-                <a:solidFill>
-                  <a:srgbClr val="FFFFFF"/>
-                </a:solidFill>
-                <a:latin typeface="Calibri"/>
-              </a:rPr>
-              <a:t>Maquina virtual vs contenedor — que cambia de verdad</a:t>
-            </a:r>
-          </a:p>
-        </p:txBody>
-      </p:sp>
-      <p:sp>
-        <p:nvSpPr>
-          <p:cNvPr id="5" name="Rounded Rectangle 4"/>
-          <p:cNvSpPr/>
-          <p:nvPr/>
-        </p:nvSpPr>
-        <p:spPr>
-          <a:xfrm>
-            <a:off x="457200" y="1261872"/>
-            <a:ext cx="5478627" cy="5093208"/>
-          </a:xfrm>
-          <a:prstGeom prst="roundRect">
-            <a:avLst>
-              <a:gd name="adj" fmla="val 12000"/>
-            </a:avLst>
-          </a:prstGeom>
-          <a:solidFill>
-            <a:srgbClr val="FBE4E4"/>
-          </a:solidFill>
-          <a:ln>
-            <a:noFill/>
-          </a:ln>
-        </p:spPr>
-        <p:style>
-          <a:lnRef idx="1">
-            <a:schemeClr val="accent1"/>
-          </a:lnRef>
-          <a:fillRef idx="3">
-            <a:schemeClr val="accent1"/>
-          </a:fillRef>
-          <a:effectRef idx="2">
-            <a:schemeClr val="accent1"/>
-          </a:effectRef>
-          <a:fontRef idx="minor">
-            <a:schemeClr val="lt1"/>
-          </a:fontRef>
-        </p:style>
-        <p:txBody>
-          <a:bodyPr rtlCol="0" anchor="ctr"/>
-          <a:lstStyle/>
-          <a:p>
-            <a:pPr algn="ctr"/>
-          </a:p>
-        </p:txBody>
-      </p:sp>
-      <p:sp>
-        <p:nvSpPr>
-          <p:cNvPr id="6" name="Rectangle 5"/>
-          <p:cNvSpPr/>
-          <p:nvPr/>
-        </p:nvSpPr>
-        <p:spPr>
-          <a:xfrm>
-            <a:off x="457200" y="1261872"/>
-            <a:ext cx="5478627" cy="502920"/>
-          </a:xfrm>
-          <a:prstGeom prst="rect">
-            <a:avLst/>
-          </a:prstGeom>
-          <a:solidFill>
-            <a:srgbClr val="A02030"/>
-          </a:solidFill>
-          <a:ln>
-            <a:noFill/>
-          </a:ln>
-        </p:spPr>
-        <p:style>
-          <a:lnRef idx="1">
-            <a:schemeClr val="accent1"/>
-          </a:lnRef>
-          <a:fillRef idx="3">
-            <a:schemeClr val="accent1"/>
-          </a:fillRef>
-          <a:effectRef idx="2">
-            <a:schemeClr val="accent1"/>
-          </a:effectRef>
-          <a:fontRef idx="minor">
-            <a:schemeClr val="lt1"/>
-          </a:fontRef>
-        </p:style>
-        <p:txBody>
-          <a:bodyPr rtlCol="0" anchor="ctr"/>
-          <a:lstStyle/>
-          <a:p>
-            <a:pPr algn="ctr"/>
-          </a:p>
-        </p:txBody>
-      </p:sp>
-      <p:sp>
-        <p:nvSpPr>
-          <p:cNvPr id="7" name="TextBox 6"/>
-          <p:cNvSpPr txBox="1"/>
-          <p:nvPr/>
-        </p:nvSpPr>
-        <p:spPr>
-          <a:xfrm>
-            <a:off x="594360" y="1353312"/>
-            <a:ext cx="5204307" cy="365760"/>
-          </a:xfrm>
-          <a:prstGeom prst="rect">
-            <a:avLst/>
-          </a:prstGeom>
-          <a:noFill/>
-        </p:spPr>
-        <p:txBody>
-          <a:bodyPr wrap="square" anchor="ctr"/>
-          <a:lstStyle/>
-          <a:p>
-            <a:pPr algn="ctr"/>
-            <a:r>
-              <a:rPr sz="1600" b="1" i="0">
-                <a:solidFill>
-                  <a:srgbClr val="FFFFFF"/>
-                </a:solidFill>
-                <a:latin typeface="Calibri"/>
-              </a:rPr>
-              <a:t>Maquina virtual</a:t>
-            </a:r>
-          </a:p>
-        </p:txBody>
-      </p:sp>
-      <p:sp>
-        <p:nvSpPr>
-          <p:cNvPr id="8" name="TextBox 7"/>
-          <p:cNvSpPr txBox="1"/>
-          <p:nvPr/>
-        </p:nvSpPr>
-        <p:spPr>
-          <a:xfrm>
-            <a:off x="621792" y="1901952"/>
-            <a:ext cx="5158587" cy="4498848"/>
-          </a:xfrm>
-          <a:prstGeom prst="rect">
-            <a:avLst/>
-          </a:prstGeom>
-          <a:noFill/>
-        </p:spPr>
-        <p:txBody>
-          <a:bodyPr wrap="square">
-            <a:spAutoFit/>
-          </a:bodyPr>
-          <a:lstStyle/>
-          <a:p>
-            <a:pPr>
-              <a:spcAft>
-                <a:spcPts val="800"/>
-              </a:spcAft>
-            </a:pPr>
-            <a:r>
-              <a:rPr sz="1500" b="0" i="0">
-                <a:solidFill>
-                  <a:srgbClr val="333333"/>
-                </a:solidFill>
-                <a:latin typeface="Calibri"/>
-              </a:rPr>
-              <a:t>–   Cada instancia trae un </a:t>
-            </a:r>
-            <a:r>
-              <a:rPr sz="1500" b="1" i="0">
-                <a:solidFill>
-                  <a:srgbClr val="333333"/>
-                </a:solidFill>
-                <a:latin typeface="Calibri"/>
-              </a:rPr>
-              <a:t>SO completo</a:t>
-            </a:r>
-            <a:r>
-              <a:rPr sz="1500" b="0" i="0">
-                <a:solidFill>
-                  <a:srgbClr val="333333"/>
-                </a:solidFill>
-                <a:latin typeface="Calibri"/>
-              </a:rPr>
-              <a:t> (kernel propio)</a:t>
-            </a:r>
-          </a:p>
-          <a:p>
-            <a:pPr>
-              <a:spcAft>
-                <a:spcPts val="800"/>
-              </a:spcAft>
-            </a:pPr>
-            <a:r>
-              <a:rPr sz="1500" b="0" i="0">
-                <a:solidFill>
-                  <a:srgbClr val="333333"/>
-                </a:solidFill>
-                <a:latin typeface="Calibri"/>
-              </a:rPr>
-              <a:t>–   Aislamiento fuerte a nivel de hardware virtual</a:t>
-            </a:r>
-          </a:p>
-          <a:p>
-            <a:pPr>
-              <a:spcAft>
-                <a:spcPts val="800"/>
-              </a:spcAft>
-            </a:pPr>
-            <a:r>
-              <a:rPr sz="1500" b="0" i="0">
-                <a:solidFill>
-                  <a:srgbClr val="333333"/>
-                </a:solidFill>
-                <a:latin typeface="Calibri"/>
-              </a:rPr>
-              <a:t>–   Arranque en </a:t>
-            </a:r>
-            <a:r>
-              <a:rPr sz="1500" b="1" i="0">
-                <a:solidFill>
-                  <a:srgbClr val="333333"/>
-                </a:solidFill>
-                <a:latin typeface="Calibri"/>
-              </a:rPr>
-              <a:t>minutos</a:t>
-            </a:r>
-            <a:r>
-              <a:rPr sz="1500" b="0" i="0">
-                <a:solidFill>
-                  <a:srgbClr val="333333"/>
-                </a:solidFill>
-                <a:latin typeface="Calibri"/>
-              </a:rPr>
-              <a:t>, tamaño en </a:t>
-            </a:r>
-            <a:r>
-              <a:rPr sz="1500" b="1" i="0">
-                <a:solidFill>
-                  <a:srgbClr val="333333"/>
-                </a:solidFill>
-                <a:latin typeface="Calibri"/>
-              </a:rPr>
-              <a:t>GB</a:t>
-            </a:r>
-          </a:p>
-          <a:p>
-            <a:pPr>
-              <a:spcAft>
-                <a:spcPts val="800"/>
-              </a:spcAft>
-            </a:pPr>
-            <a:r>
-              <a:rPr sz="1500" b="0" i="0">
-                <a:solidFill>
-                  <a:srgbClr val="333333"/>
-                </a:solidFill>
-                <a:latin typeface="Calibri"/>
-              </a:rPr>
-              <a:t>–   Util cuando se necesitan SO distintos</a:t>
-            </a:r>
-          </a:p>
-          <a:p>
-            <a:pPr>
-              <a:spcAft>
-                <a:spcPts val="800"/>
-              </a:spcAft>
-            </a:pPr>
-            <a:r>
-              <a:rPr sz="1500" b="0" i="0">
-                <a:solidFill>
-                  <a:srgbClr val="333333"/>
-                </a:solidFill>
-                <a:latin typeface="Calibri"/>
-              </a:rPr>
-              <a:t>–   Ej.: un servidor Windows y uno Linux en el mismo host</a:t>
-            </a:r>
-          </a:p>
-        </p:txBody>
-      </p:sp>
-      <p:sp>
-        <p:nvSpPr>
-          <p:cNvPr id="9" name="Rounded Rectangle 8"/>
-          <p:cNvSpPr/>
-          <p:nvPr/>
-        </p:nvSpPr>
-        <p:spPr>
-          <a:xfrm>
-            <a:off x="6255867" y="1261872"/>
-            <a:ext cx="5478627" cy="5093208"/>
-          </a:xfrm>
-          <a:prstGeom prst="roundRect">
-            <a:avLst>
-              <a:gd name="adj" fmla="val 12000"/>
-            </a:avLst>
-          </a:prstGeom>
-          <a:solidFill>
-            <a:srgbClr val="E8F4FA"/>
-          </a:solidFill>
-          <a:ln>
-            <a:noFill/>
-          </a:ln>
-        </p:spPr>
-        <p:style>
-          <a:lnRef idx="1">
-            <a:schemeClr val="accent1"/>
-          </a:lnRef>
-          <a:fillRef idx="3">
-            <a:schemeClr val="accent1"/>
-          </a:fillRef>
-          <a:effectRef idx="2">
-            <a:schemeClr val="accent1"/>
-          </a:effectRef>
-          <a:fontRef idx="minor">
-            <a:schemeClr val="lt1"/>
-          </a:fontRef>
-        </p:style>
-        <p:txBody>
-          <a:bodyPr rtlCol="0" anchor="ctr"/>
-          <a:lstStyle/>
-          <a:p>
-            <a:pPr algn="ctr"/>
-          </a:p>
-        </p:txBody>
-      </p:sp>
-      <p:sp>
-        <p:nvSpPr>
-          <p:cNvPr id="10" name="Rectangle 9"/>
-          <p:cNvSpPr/>
-          <p:nvPr/>
-        </p:nvSpPr>
-        <p:spPr>
-          <a:xfrm>
-            <a:off x="6255867" y="1261872"/>
-            <a:ext cx="5478627" cy="502920"/>
-          </a:xfrm>
-          <a:prstGeom prst="rect">
-            <a:avLst/>
-          </a:prstGeom>
-          <a:solidFill>
-            <a:srgbClr val="095292"/>
-          </a:solidFill>
-          <a:ln>
-            <a:noFill/>
-          </a:ln>
-        </p:spPr>
-        <p:style>
-          <a:lnRef idx="1">
-            <a:schemeClr val="accent1"/>
-          </a:lnRef>
-          <a:fillRef idx="3">
-            <a:schemeClr val="accent1"/>
-          </a:fillRef>
-          <a:effectRef idx="2">
-            <a:schemeClr val="accent1"/>
-          </a:effectRef>
-          <a:fontRef idx="minor">
-            <a:schemeClr val="lt1"/>
-          </a:fontRef>
-        </p:style>
-        <p:txBody>
-          <a:bodyPr rtlCol="0" anchor="ctr"/>
-          <a:lstStyle/>
-          <a:p>
-            <a:pPr algn="ctr"/>
-          </a:p>
-        </p:txBody>
-      </p:sp>
-      <p:sp>
-        <p:nvSpPr>
-          <p:cNvPr id="11" name="TextBox 10"/>
-          <p:cNvSpPr txBox="1"/>
-          <p:nvPr/>
-        </p:nvSpPr>
-        <p:spPr>
-          <a:xfrm>
-            <a:off x="6393027" y="1353312"/>
-            <a:ext cx="5204307" cy="365760"/>
-          </a:xfrm>
-          <a:prstGeom prst="rect">
-            <a:avLst/>
-          </a:prstGeom>
-          <a:noFill/>
-        </p:spPr>
-        <p:txBody>
-          <a:bodyPr wrap="square" anchor="ctr"/>
-          <a:lstStyle/>
-          <a:p>
-            <a:pPr algn="ctr"/>
-            <a:r>
-              <a:rPr sz="1600" b="1" i="0">
-                <a:solidFill>
-                  <a:srgbClr val="FFFFFF"/>
-                </a:solidFill>
-                <a:latin typeface="Calibri"/>
-              </a:rPr>
-              <a:t>Contenedor</a:t>
-            </a:r>
-          </a:p>
-        </p:txBody>
-      </p:sp>
-      <p:sp>
-        <p:nvSpPr>
-          <p:cNvPr id="12" name="TextBox 11"/>
-          <p:cNvSpPr txBox="1"/>
-          <p:nvPr/>
-        </p:nvSpPr>
-        <p:spPr>
-          <a:xfrm>
-            <a:off x="6420459" y="1901952"/>
-            <a:ext cx="5158587" cy="4498848"/>
-          </a:xfrm>
-          <a:prstGeom prst="rect">
-            <a:avLst/>
-          </a:prstGeom>
-          <a:noFill/>
-        </p:spPr>
-        <p:txBody>
-          <a:bodyPr wrap="square">
-            <a:spAutoFit/>
-          </a:bodyPr>
-          <a:lstStyle/>
-          <a:p>
-            <a:pPr>
-              <a:spcAft>
-                <a:spcPts val="800"/>
-              </a:spcAft>
-            </a:pPr>
-            <a:r>
-              <a:rPr sz="1500" b="0" i="0">
-                <a:solidFill>
-                  <a:srgbClr val="333333"/>
-                </a:solidFill>
-                <a:latin typeface="Calibri"/>
-              </a:rPr>
-              <a:t>–   </a:t>
-            </a:r>
-            <a:r>
-              <a:rPr sz="1500" b="1" i="0">
-                <a:solidFill>
-                  <a:srgbClr val="333333"/>
-                </a:solidFill>
-                <a:latin typeface="Calibri"/>
-              </a:rPr>
-              <a:t>Comparte el kernel</a:t>
-            </a:r>
-            <a:r>
-              <a:rPr sz="1500" b="0" i="0">
-                <a:solidFill>
-                  <a:srgbClr val="333333"/>
-                </a:solidFill>
-                <a:latin typeface="Calibri"/>
-              </a:rPr>
-              <a:t> del anfitrion</a:t>
-            </a:r>
-          </a:p>
-          <a:p>
-            <a:pPr>
-              <a:spcAft>
-                <a:spcPts val="800"/>
-              </a:spcAft>
-            </a:pPr>
-            <a:r>
-              <a:rPr sz="1500" b="0" i="0">
-                <a:solidFill>
-                  <a:srgbClr val="333333"/>
-                </a:solidFill>
-                <a:latin typeface="Calibri"/>
-              </a:rPr>
-              <a:t>–   Empaqueta solo app + dependencias</a:t>
-            </a:r>
-          </a:p>
-          <a:p>
-            <a:pPr>
-              <a:spcAft>
-                <a:spcPts val="800"/>
-              </a:spcAft>
-            </a:pPr>
-            <a:r>
-              <a:rPr sz="1500" b="0" i="0">
-                <a:solidFill>
-                  <a:srgbClr val="333333"/>
-                </a:solidFill>
-                <a:latin typeface="Calibri"/>
-              </a:rPr>
-              <a:t>–   Arranque en </a:t>
-            </a:r>
-            <a:r>
-              <a:rPr sz="1500" b="1" i="0">
-                <a:solidFill>
-                  <a:srgbClr val="333333"/>
-                </a:solidFill>
-                <a:latin typeface="Calibri"/>
-              </a:rPr>
-              <a:t>segundos</a:t>
-            </a:r>
-            <a:r>
-              <a:rPr sz="1500" b="0" i="0">
-                <a:solidFill>
-                  <a:srgbClr val="333333"/>
-                </a:solidFill>
-                <a:latin typeface="Calibri"/>
-              </a:rPr>
-              <a:t>, tamaño en </a:t>
-            </a:r>
-            <a:r>
-              <a:rPr sz="1500" b="1" i="0">
-                <a:solidFill>
-                  <a:srgbClr val="333333"/>
-                </a:solidFill>
-                <a:latin typeface="Calibri"/>
-              </a:rPr>
-              <a:t>MB</a:t>
-            </a:r>
-          </a:p>
-          <a:p>
-            <a:pPr>
-              <a:spcAft>
-                <a:spcPts val="800"/>
-              </a:spcAft>
-            </a:pPr>
-            <a:r>
-              <a:rPr sz="1500" b="0" i="0">
-                <a:solidFill>
-                  <a:srgbClr val="333333"/>
-                </a:solidFill>
-                <a:latin typeface="Calibri"/>
-              </a:rPr>
-              <a:t>–   Util para desplegar el mismo servicio muchas veces</a:t>
-            </a:r>
-          </a:p>
-          <a:p>
-            <a:pPr>
-              <a:spcAft>
-                <a:spcPts val="800"/>
-              </a:spcAft>
-            </a:pPr>
-            <a:r>
-              <a:rPr sz="1500" b="0" i="0">
-                <a:solidFill>
-                  <a:srgbClr val="333333"/>
-                </a:solidFill>
-                <a:latin typeface="Calibri"/>
-              </a:rPr>
-              <a:t>–   Ej.: el stub de la app, replicado detras del balanceador</a:t>
-            </a:r>
-          </a:p>
-        </p:txBody>
-      </p:sp>
-      <p:sp>
-        <p:nvSpPr>
-          <p:cNvPr id="13" name="TextBox 12"/>
-          <p:cNvSpPr txBox="1"/>
-          <p:nvPr/>
-        </p:nvSpPr>
-        <p:spPr>
-          <a:xfrm>
-            <a:off x="11185855" y="6473952"/>
-            <a:ext cx="640080" cy="274320"/>
-          </a:xfrm>
-          <a:prstGeom prst="rect">
-            <a:avLst/>
-          </a:prstGeom>
-          <a:noFill/>
-        </p:spPr>
-        <p:txBody>
-          <a:bodyPr wrap="square">
-            <a:spAutoFit/>
-          </a:bodyPr>
-          <a:lstStyle/>
-          <a:p>
-            <a:pPr algn="r"/>
-            <a:r>
-              <a:rPr sz="1100" b="0" i="0">
-                <a:solidFill>
-                  <a:srgbClr val="666666"/>
-                </a:solidFill>
-                <a:latin typeface="Calibri"/>
-              </a:rPr>
-              <a:t>33</a:t>
-            </a:r>
-          </a:p>
-        </p:txBody>
-      </p:sp>
-    </p:spTree>
-  </p:cSld>
-  <p:clrMapOvr>
-    <a:masterClrMapping/>
-  </p:clrMapOvr>
-</p:sld>
-</file>
-
-<file path=ppt/slides/slide34.xml><?xml version="1.0" encoding="utf-8"?>
-<p:sld xmlns:a="http://schemas.openxmlformats.org/drawingml/2006/main" xmlns:p="http://schemas.openxmlformats.org/presentationml/2006/main" xmlns:r="http://schemas.openxmlformats.org/officeDocument/2006/relationships">
-  <p:cSld>
-    <p:bg>
-      <p:bgPr>
-        <a:solidFill>
-          <a:srgbClr val="FFFFFF"/>
-        </a:solidFill>
-        <a:effectLst/>
-      </p:bgPr>
-    </p:bg>
-    <p:spTree>
-      <p:nvGrpSpPr>
-        <p:cNvPr id="1" name=""/>
-        <p:cNvGrpSpPr/>
-        <p:nvPr/>
-      </p:nvGrpSpPr>
-      <p:grpSpPr/>
-      <p:sp>
-        <p:nvSpPr>
-          <p:cNvPr id="2" name="Rectangle 1"/>
-          <p:cNvSpPr/>
-          <p:nvPr/>
-        </p:nvSpPr>
-        <p:spPr>
-          <a:xfrm>
-            <a:off x="0" y="0"/>
-            <a:ext cx="12191695" cy="960120"/>
-          </a:xfrm>
-          <a:prstGeom prst="rect">
-            <a:avLst/>
-          </a:prstGeom>
-          <a:solidFill>
-            <a:srgbClr val="095292"/>
-          </a:solidFill>
-          <a:ln>
-            <a:noFill/>
-          </a:ln>
-        </p:spPr>
-        <p:style>
-          <a:lnRef idx="1">
-            <a:schemeClr val="accent1"/>
-          </a:lnRef>
-          <a:fillRef idx="3">
-            <a:schemeClr val="accent1"/>
-          </a:fillRef>
-          <a:effectRef idx="2">
-            <a:schemeClr val="accent1"/>
-          </a:effectRef>
-          <a:fontRef idx="minor">
-            <a:schemeClr val="lt1"/>
-          </a:fontRef>
-        </p:style>
-        <p:txBody>
-          <a:bodyPr rtlCol="0" anchor="ctr"/>
-          <a:lstStyle/>
-          <a:p>
-            <a:pPr algn="ctr"/>
-          </a:p>
-        </p:txBody>
-      </p:sp>
-      <p:sp>
-        <p:nvSpPr>
-          <p:cNvPr id="3" name="Rectangle 2"/>
-          <p:cNvSpPr/>
-          <p:nvPr/>
-        </p:nvSpPr>
-        <p:spPr>
-          <a:xfrm>
-            <a:off x="0" y="960120"/>
-            <a:ext cx="12191695" cy="41148"/>
-          </a:xfrm>
-          <a:prstGeom prst="rect">
-            <a:avLst/>
-          </a:prstGeom>
-          <a:solidFill>
-            <a:srgbClr val="FFD000"/>
-          </a:solidFill>
-          <a:ln>
-            <a:noFill/>
-          </a:ln>
-        </p:spPr>
-        <p:style>
-          <a:lnRef idx="1">
-            <a:schemeClr val="accent1"/>
-          </a:lnRef>
-          <a:fillRef idx="3">
-            <a:schemeClr val="accent1"/>
-          </a:fillRef>
-          <a:effectRef idx="2">
-            <a:schemeClr val="accent1"/>
-          </a:effectRef>
-          <a:fontRef idx="minor">
-            <a:schemeClr val="lt1"/>
-          </a:fontRef>
-        </p:style>
-        <p:txBody>
-          <a:bodyPr rtlCol="0" anchor="ctr"/>
-          <a:lstStyle/>
-          <a:p>
-            <a:pPr algn="ctr"/>
-          </a:p>
-        </p:txBody>
-      </p:sp>
-      <p:sp>
-        <p:nvSpPr>
-          <p:cNvPr id="4" name="TextBox 3"/>
-          <p:cNvSpPr txBox="1"/>
-          <p:nvPr/>
-        </p:nvSpPr>
-        <p:spPr>
-          <a:xfrm>
-            <a:off x="457200" y="164592"/>
-            <a:ext cx="11277295" cy="502920"/>
-          </a:xfrm>
-          <a:prstGeom prst="rect">
-            <a:avLst/>
-          </a:prstGeom>
-          <a:noFill/>
-        </p:spPr>
-        <p:txBody>
-          <a:bodyPr wrap="square">
-            <a:spAutoFit/>
-          </a:bodyPr>
-          <a:lstStyle/>
-          <a:p>
-            <a:r>
-              <a:rPr sz="2600" b="1" i="0">
-                <a:solidFill>
-                  <a:srgbClr val="FFFFFF"/>
-                </a:solidFill>
-                <a:latin typeface="Calibri"/>
-              </a:rPr>
-              <a:t>Dockerfile minimo del stub de la app</a:t>
-            </a:r>
-          </a:p>
-        </p:txBody>
-      </p:sp>
-      <p:sp>
-        <p:nvSpPr>
-          <p:cNvPr id="5" name="Rounded Rectangle 4"/>
-          <p:cNvSpPr/>
-          <p:nvPr/>
-        </p:nvSpPr>
-        <p:spPr>
-          <a:xfrm>
-            <a:off x="457200" y="1261872"/>
-            <a:ext cx="11277295" cy="4773168"/>
-          </a:xfrm>
-          <a:prstGeom prst="roundRect">
-            <a:avLst>
-              <a:gd name="adj" fmla="val 12000"/>
-            </a:avLst>
-          </a:prstGeom>
-          <a:solidFill>
-            <a:srgbClr val="1E2A38"/>
-          </a:solidFill>
-          <a:ln>
-            <a:noFill/>
-          </a:ln>
-        </p:spPr>
-        <p:style>
-          <a:lnRef idx="1">
-            <a:schemeClr val="accent1"/>
-          </a:lnRef>
-          <a:fillRef idx="3">
-            <a:schemeClr val="accent1"/>
-          </a:fillRef>
-          <a:effectRef idx="2">
-            <a:schemeClr val="accent1"/>
-          </a:effectRef>
-          <a:fontRef idx="minor">
-            <a:schemeClr val="lt1"/>
-          </a:fontRef>
-        </p:style>
-        <p:txBody>
-          <a:bodyPr rtlCol="0" anchor="ctr"/>
-          <a:lstStyle/>
-          <a:p>
-            <a:pPr algn="ctr"/>
-          </a:p>
-        </p:txBody>
-      </p:sp>
-      <p:sp>
-        <p:nvSpPr>
-          <p:cNvPr id="6" name="Rectangle 5"/>
-          <p:cNvSpPr/>
-          <p:nvPr/>
-        </p:nvSpPr>
-        <p:spPr>
-          <a:xfrm>
-            <a:off x="457200" y="1261872"/>
-            <a:ext cx="11277295" cy="320040"/>
-          </a:xfrm>
-          <a:prstGeom prst="rect">
-            <a:avLst/>
-          </a:prstGeom>
-          <a:solidFill>
-            <a:srgbClr val="095292"/>
-          </a:solidFill>
-          <a:ln>
-            <a:noFill/>
-          </a:ln>
-        </p:spPr>
-        <p:style>
-          <a:lnRef idx="1">
-            <a:schemeClr val="accent1"/>
-          </a:lnRef>
-          <a:fillRef idx="3">
-            <a:schemeClr val="accent1"/>
-          </a:fillRef>
-          <a:effectRef idx="2">
-            <a:schemeClr val="accent1"/>
-          </a:effectRef>
-          <a:fontRef idx="minor">
-            <a:schemeClr val="lt1"/>
-          </a:fontRef>
-        </p:style>
-        <p:txBody>
-          <a:bodyPr rtlCol="0" anchor="ctr"/>
-          <a:lstStyle/>
-          <a:p>
-            <a:pPr algn="ctr"/>
-          </a:p>
-        </p:txBody>
-      </p:sp>
-      <p:sp>
-        <p:nvSpPr>
-          <p:cNvPr id="7" name="TextBox 6"/>
-          <p:cNvSpPr txBox="1"/>
-          <p:nvPr/>
-        </p:nvSpPr>
-        <p:spPr>
-          <a:xfrm>
-            <a:off x="685800" y="1307592"/>
-            <a:ext cx="10820095" cy="256032"/>
-          </a:xfrm>
-          <a:prstGeom prst="rect">
-            <a:avLst/>
-          </a:prstGeom>
-          <a:noFill/>
-        </p:spPr>
-        <p:txBody>
-          <a:bodyPr wrap="square" anchor="ctr"/>
-          <a:lstStyle/>
-          <a:p>
-            <a:r>
-              <a:rPr sz="1000" b="1" i="0">
-                <a:solidFill>
-                  <a:srgbClr val="269CCB"/>
-                </a:solidFill>
-                <a:latin typeface="Calibri"/>
-              </a:rPr>
-              <a:t>● ● ●</a:t>
-            </a:r>
-          </a:p>
-        </p:txBody>
-      </p:sp>
-      <p:sp>
-        <p:nvSpPr>
-          <p:cNvPr id="8" name="TextBox 7"/>
-          <p:cNvSpPr txBox="1"/>
-          <p:nvPr/>
-        </p:nvSpPr>
-        <p:spPr>
-          <a:xfrm>
-            <a:off x="777240" y="1719072"/>
-            <a:ext cx="10637215" cy="4133087"/>
-          </a:xfrm>
-          <a:prstGeom prst="rect">
-            <a:avLst/>
-          </a:prstGeom>
-          <a:noFill/>
-        </p:spPr>
-        <p:txBody>
-          <a:bodyPr wrap="square">
-            <a:spAutoFit/>
-          </a:bodyPr>
-          <a:lstStyle/>
-          <a:p>
-            <a:pPr>
-              <a:spcAft>
-                <a:spcPts val="400"/>
-              </a:spcAft>
-            </a:pPr>
-            <a:r>
-              <a:rPr sz="1400" b="0" i="0">
-                <a:solidFill>
-                  <a:srgbClr val="FFFFFF"/>
-                </a:solidFill>
-                <a:latin typeface="Calibri"/>
-              </a:rPr>
-              <a:t>FROM node:20-alpine          # base ligera y etiqueta FIJA: nunca latest</a:t>
-            </a:r>
-          </a:p>
-          <a:p>
-            <a:pPr>
-              <a:spcAft>
-                <a:spcPts val="400"/>
-              </a:spcAft>
-            </a:pPr>
-            <a:r>
-              <a:rPr sz="1400" b="0" i="0">
-                <a:solidFill>
-                  <a:srgbClr val="FFFFFF"/>
-                </a:solidFill>
-                <a:latin typeface="Calibri"/>
-              </a:rPr>
-              <a:t>WORKDIR /app</a:t>
-            </a:r>
-          </a:p>
-          <a:p>
-            <a:pPr>
-              <a:spcAft>
-                <a:spcPts val="400"/>
-              </a:spcAft>
-            </a:pPr>
-            <a:r>
-              <a:rPr sz="1400" b="0" i="0">
-                <a:solidFill>
-                  <a:srgbClr val="FFFFFF"/>
-                </a:solidFill>
-                <a:latin typeface="Calibri"/>
-              </a:rPr>
-              <a:t>COPY package*.json ./        # dependencias PRIMERO: cambian poco</a:t>
-            </a:r>
-          </a:p>
-          <a:p>
-            <a:pPr>
-              <a:spcAft>
-                <a:spcPts val="400"/>
-              </a:spcAft>
-            </a:pPr>
-            <a:r>
-              <a:rPr sz="1400" b="0" i="0">
-                <a:solidFill>
-                  <a:srgbClr val="FFFFFF"/>
-                </a:solidFill>
-                <a:latin typeface="Calibri"/>
-              </a:rPr>
-              <a:t>RUN npm ci --omit=dev        # se instalan DENTRO de la imagen</a:t>
-            </a:r>
-          </a:p>
-          <a:p>
-            <a:pPr>
-              <a:spcAft>
-                <a:spcPts val="400"/>
-              </a:spcAft>
-            </a:pPr>
-            <a:r>
-              <a:rPr sz="1400" b="0" i="0">
-                <a:solidFill>
-                  <a:srgbClr val="FFFFFF"/>
-                </a:solidFill>
-                <a:latin typeface="Calibri"/>
-              </a:rPr>
-              <a:t>COPY..                     # el codigo despues: cambia en cada commit</a:t>
-            </a:r>
-          </a:p>
-          <a:p>
-            <a:pPr>
-              <a:spcAft>
-                <a:spcPts val="400"/>
-              </a:spcAft>
-            </a:pPr>
-            <a:r>
-              <a:rPr sz="1400" b="0" i="0">
-                <a:solidFill>
-                  <a:srgbClr val="FFFFFF"/>
-                </a:solidFill>
-                <a:latin typeface="Calibri"/>
-              </a:rPr>
-              <a:t>EXPOSE 8080                  # documenta el puerto; NO lo publica</a:t>
-            </a:r>
-          </a:p>
-          <a:p>
-            <a:pPr>
-              <a:spcAft>
-                <a:spcPts val="400"/>
-              </a:spcAft>
-            </a:pPr>
-            <a:r>
-              <a:rPr sz="1400" b="0" i="0">
-                <a:solidFill>
-                  <a:srgbClr val="FFFFFF"/>
-                </a:solidFill>
-                <a:latin typeface="Calibri"/>
-              </a:rPr>
-              <a:t>CMD ["node", "server.js"]    # UN proceso principal por contenedor</a:t>
-            </a:r>
-          </a:p>
-          <a:p>
-            <a:pPr>
-              <a:spcAft>
-                <a:spcPts val="400"/>
-              </a:spcAft>
-            </a:pPr>
-            <a:r>
-              <a:rPr sz="1400" b="0" i="0">
-                <a:solidFill>
-                  <a:srgbClr val="FFFFFF"/>
-                </a:solidFill>
-                <a:latin typeface="Calibri"/>
-              </a:rPr>
-              <a:t/>
-            </a:r>
-          </a:p>
-          <a:p>
-            <a:pPr>
-              <a:spcAft>
-                <a:spcPts val="400"/>
-              </a:spcAft>
-            </a:pPr>
-            <a:r>
-              <a:rPr sz="1400" b="0" i="0">
-                <a:solidFill>
-                  <a:srgbClr val="FFFFFF"/>
-                </a:solidFill>
-                <a:latin typeface="Calibri"/>
-              </a:rPr>
-              <a:t># .dockerignore  &lt;- archivo aparte, en la misma carpeta que el Dockerfile.</a:t>
-            </a:r>
-          </a:p>
-          <a:p>
-            <a:pPr>
-              <a:spcAft>
-                <a:spcPts val="400"/>
-              </a:spcAft>
-            </a:pPr>
-            <a:r>
-              <a:rPr sz="1400" b="0" i="0">
-                <a:solidFill>
-                  <a:srgbClr val="FFFFFF"/>
-                </a:solidFill>
-                <a:latin typeface="Calibri"/>
-              </a:rPr>
-              <a:t># Sin el, el COPY.. de arriba se lleva el .env a las capas de la imagen.</a:t>
-            </a:r>
-          </a:p>
-          <a:p>
-            <a:pPr>
-              <a:spcAft>
-                <a:spcPts val="400"/>
-              </a:spcAft>
-            </a:pPr>
-            <a:r>
-              <a:rPr sz="1400" b="0" i="0">
-                <a:solidFill>
-                  <a:srgbClr val="FFFFFF"/>
-                </a:solidFill>
-                <a:latin typeface="Calibri"/>
-              </a:rPr>
-              <a:t>node_modules</a:t>
-            </a:r>
-          </a:p>
-          <a:p>
-            <a:pPr>
-              <a:spcAft>
-                <a:spcPts val="400"/>
-              </a:spcAft>
-            </a:pPr>
-            <a:r>
-              <a:rPr sz="1400" b="0" i="0">
-                <a:solidFill>
-                  <a:srgbClr val="FFFFFF"/>
-                </a:solidFill>
-                <a:latin typeface="Calibri"/>
-              </a:rPr>
-              <a:t>.env</a:t>
-            </a:r>
-          </a:p>
-          <a:p>
-            <a:pPr>
-              <a:spcAft>
-                <a:spcPts val="400"/>
-              </a:spcAft>
-            </a:pPr>
-            <a:r>
-              <a:rPr sz="1400" b="0" i="0">
-                <a:solidFill>
-                  <a:srgbClr val="FFFFFF"/>
-                </a:solidFill>
-                <a:latin typeface="Calibri"/>
-              </a:rPr>
-              <a:t>.env.*</a:t>
-            </a:r>
-          </a:p>
-          <a:p>
-            <a:pPr>
-              <a:spcAft>
-                <a:spcPts val="400"/>
-              </a:spcAft>
-            </a:pPr>
-            <a:r>
-              <a:rPr sz="1400" b="0" i="0">
-                <a:solidFill>
-                  <a:srgbClr val="FFFFFF"/>
-                </a:solidFill>
-                <a:latin typeface="Calibri"/>
-              </a:rPr>
-              <a:t>.git</a:t>
-            </a:r>
-          </a:p>
-        </p:txBody>
-      </p:sp>
-      <p:sp>
-        <p:nvSpPr>
-          <p:cNvPr id="9" name="TextBox 8"/>
-          <p:cNvSpPr txBox="1"/>
-          <p:nvPr/>
-        </p:nvSpPr>
-        <p:spPr>
-          <a:xfrm>
-            <a:off x="457200" y="6080760"/>
-            <a:ext cx="11277295" cy="320040"/>
-          </a:xfrm>
-          <a:prstGeom prst="rect">
-            <a:avLst/>
-          </a:prstGeom>
-          <a:noFill/>
-        </p:spPr>
-        <p:txBody>
-          <a:bodyPr wrap="square">
-            <a:spAutoFit/>
-          </a:bodyPr>
-          <a:lstStyle/>
-          <a:p>
-            <a:pPr algn="ctr"/>
-            <a:r>
-              <a:rPr sz="1200" b="0" i="1">
-                <a:solidFill>
-                  <a:srgbClr val="666666"/>
-                </a:solidFill>
-                <a:latin typeface="Calibri"/>
-              </a:rPr>
-              <a:t>EXPOSE, CMD y el «-p» del run llevan el MISMO puerto. Y el «COPY. .» solo es seguro con «.dockerignore» al lado.</a:t>
-            </a:r>
-          </a:p>
-        </p:txBody>
-      </p:sp>
-      <p:sp>
-        <p:nvSpPr>
-          <p:cNvPr id="10" name="TextBox 9"/>
-          <p:cNvSpPr txBox="1"/>
-          <p:nvPr/>
-        </p:nvSpPr>
-        <p:spPr>
-          <a:xfrm>
-            <a:off x="11185855" y="6473952"/>
-            <a:ext cx="640080" cy="274320"/>
-          </a:xfrm>
-          <a:prstGeom prst="rect">
-            <a:avLst/>
-          </a:prstGeom>
-          <a:noFill/>
-        </p:spPr>
-        <p:txBody>
-          <a:bodyPr wrap="square">
-            <a:spAutoFit/>
-          </a:bodyPr>
-          <a:lstStyle/>
-          <a:p>
-            <a:pPr algn="r"/>
-            <a:r>
-              <a:rPr sz="1100" b="0" i="0">
-                <a:solidFill>
-                  <a:srgbClr val="666666"/>
-                </a:solidFill>
-                <a:latin typeface="Calibri"/>
-              </a:rPr>
-              <a:t>34</a:t>
-            </a:r>
-          </a:p>
-        </p:txBody>
-      </p:sp>
-    </p:spTree>
-  </p:cSld>
-  <p:clrMapOvr>
-    <a:masterClrMapping/>
-  </p:clrMapOvr>
-</p:sld>
-</file>
-
-<file path=ppt/slides/slide35.xml><?xml version="1.0" encoding="utf-8"?>
-<p:sld xmlns:a="http://schemas.openxmlformats.org/drawingml/2006/main" xmlns:p="http://schemas.openxmlformats.org/presentationml/2006/main" xmlns:r="http://schemas.openxmlformats.org/officeDocument/2006/relationships">
-  <p:cSld>
-    <p:bg>
-      <p:bgPr>
-        <a:solidFill>
-          <a:srgbClr val="FFFFFF"/>
-        </a:solidFill>
-        <a:effectLst/>
-      </p:bgPr>
-    </p:bg>
-    <p:spTree>
-      <p:nvGrpSpPr>
-        <p:cNvPr id="1" name=""/>
-        <p:cNvGrpSpPr/>
-        <p:nvPr/>
-      </p:nvGrpSpPr>
-      <p:grpSpPr/>
-      <p:sp>
-        <p:nvSpPr>
-          <p:cNvPr id="2" name="Rectangle 1"/>
-          <p:cNvSpPr/>
-          <p:nvPr/>
-        </p:nvSpPr>
-        <p:spPr>
-          <a:xfrm>
-            <a:off x="0" y="0"/>
             <a:ext cx="12191695" cy="164592"/>
           </a:xfrm>
           <a:prstGeom prst="rect">
@@ -16444,7 +15320,7 @@
                 </a:solidFill>
                 <a:latin typeface="Calibri"/>
               </a:rPr>
-              <a:t>–   Es la primera clase francamente tecnica del curso y la primera en la que el estudiante escribe algo que una maquina ejecuta.</a:t>
+              <a:t>–   La virtualizacion es la tecnica que permite ejecutar varias maquinas logicas sobre un mismo hardware fisico, y el hipervisor es el software que la hace posible.</a:t>
             </a:r>
           </a:p>
           <a:p>
@@ -16460,7 +15336,7 @@
                 </a:solidFill>
                 <a:latin typeface="Calibri"/>
               </a:rPr>
-              <a:t>–   La virtualizacion es la tecnica que permite ejecutar varias maquinas logicas sobre un mismo hardware fisico, y el hipervisor es el software que la hace posible.</a:t>
+              <a:t>–   Un contenedor es un proceso aislado que comparte el kernel del anfitrion: no trae sistema operativo propio.</a:t>
             </a:r>
           </a:p>
           <a:p>
@@ -16476,7 +15352,7 @@
                 </a:solidFill>
                 <a:latin typeface="Calibri"/>
               </a:rPr>
-              <a:t>–   Un contenedor es un proceso aislado que comparte el kernel del anfitrion: no trae sistema operativo propio.</a:t>
+              <a:t>–   Las dos tecnicas resuelven el mismo problema, aprovechar mejor un servidor, con costos distintos: la maquina virtual aisla mas y pesa gigabytes; el contenedor arranca en segundos y pesa megabytes.</a:t>
             </a:r>
           </a:p>
         </p:txBody>
@@ -16696,7 +15572,7 @@
                 </a:solidFill>
                 <a:latin typeface="Calibri"/>
               </a:rPr>
-              <a:t>–   Las dos tecnicas resuelven el mismo problema, aprovechar mejor un servidor, con costos distintos: la maquina virtual aisla mas y pesa gigabytes; el contenedor arranca en segundos y pesa megabytes.</a:t>
+              <a:t>–   En la app el stub de la API se empaqueta como contenedor porque es un solo servicio que se despliega muchas veces.</a:t>
             </a:r>
           </a:p>
           <a:p>
@@ -16712,7 +15588,7 @@
                 </a:solidFill>
                 <a:latin typeface="Calibri"/>
               </a:rPr>
-              <a:t>–   En la app el stub de la API se empaqueta como contenedor porque es un solo servicio que se despliega muchas veces.</a:t>
+              <a:t>–   Un error comun es tratar el contenedor como una maquina virtual pequena, entrando a configurarlo a mano: un contenedor se reconstruye desde su imagen, no se repara por dentro.</a:t>
             </a:r>
           </a:p>
           <a:p>
@@ -16728,7 +15604,7 @@
                 </a:solidFill>
                 <a:latin typeface="Calibri"/>
               </a:rPr>
-              <a:t>–   Un error comun es tratar el contenedor como una maquina virtual pequena, entrando a configurarlo a mano: un contenedor se reconstruye desde su imagen, no se repara por dentro.</a:t>
+              <a:t>–   Un ejemplo de escala: un servidor fisico de 64 GB de memoria aloja unas pocas decenas de maquinas virtuales de 2 GB, o cientos de contenedores pequenos, porque estos no reservan memoria para un sistema operativo propio.</a:t>
             </a:r>
           </a:p>
         </p:txBody>

--- a/Arquitectura de Sistemas Computacionales/Clases/Clase 3 - Virtualizacion y contenedores/Presentacion.pptx
+++ b/Arquitectura de Sistemas Computacionales/Clases/Clase 3 - Virtualizacion y contenedores/Presentacion.pptx
@@ -619,440 +619,6 @@
 </p:notes>
 </file>
 
-<file path=ppt/notesSlides/notesSlide10.xml><?xml version="1.0" encoding="utf-8"?>
-<p:notes xmlns:a="http://schemas.openxmlformats.org/drawingml/2006/main" xmlns:p="http://schemas.openxmlformats.org/presentationml/2006/main" xmlns:r="http://schemas.openxmlformats.org/officeDocument/2006/relationships">
-  <p:cSld>
-    <p:spTree>
-      <p:nvGrpSpPr>
-        <p:cNvPr id="1" name=""/>
-        <p:cNvGrpSpPr/>
-        <p:nvPr/>
-      </p:nvGrpSpPr>
-      <p:grpSpPr>
-        <a:xfrm>
-          <a:off x="0" y="0"/>
-          <a:ext cx="0" cy="0"/>
-          <a:chOff x="0" y="0"/>
-          <a:chExt cx="0" cy="0"/>
-        </a:xfrm>
-      </p:grpSpPr>
-      <p:sp>
-        <p:nvSpPr>
-          <p:cNvPr id="2" name="Slide Image Placeholder 1"/>
-          <p:cNvSpPr>
-            <a:spLocks noGrp="1"/>
-          </p:cNvSpPr>
-          <p:nvPr>
-            <p:ph type="sldImg" idx="2"/>
-          </p:nvPr>
-        </p:nvSpPr>
-        <p:spPr/>
-      </p:sp>
-      <p:sp>
-        <p:nvSpPr>
-          <p:cNvPr id="3" name="Notes Placeholder 2"/>
-          <p:cNvSpPr>
-            <a:spLocks noGrp="1"/>
-          </p:cNvSpPr>
-          <p:nvPr>
-            <p:ph type="body" idx="3" sz="quarter"/>
-          </p:nvPr>
-        </p:nvSpPr>
-        <p:spPr/>
-        <p:txBody>
-          <a:bodyPr/>
-          <a:lstStyle/>
-          <a:p>
-            <a:r>
-              <a:t>TEXTO COMPLETO DE LA LÁMINA (se proyecta resumido):</a:t>
-            </a:r>
-          </a:p>
-          <a:p/>
-          <a:p>
-            <a:r>
-              <a:t>Construir: `docker build -t cloudlite-api:0.1.0 .` — nombre y etiqueta; sin etiqueta vale la mitad.</a:t>
-            </a:r>
-          </a:p>
-          <a:p/>
-          <a:p>
-            <a:r>
-              <a:t>Correr: `docker run -d -p 8081:8080 --name api cloudlite-api:0.1.0`.</a:t>
-            </a:r>
-          </a:p>
-          <a:p/>
-          <a:p>
-            <a:r>
-              <a:t>En `-p 8081:8080` la izquierda es el anfitrión (por donde entras tú) y la derecha es el contenedor (la del `EXPOSE`).</a:t>
-            </a:r>
-          </a:p>
-          <a:p/>
-          <a:p>
-            <a:r>
-              <a:t>Si los inviertes, `docker ps` muestra el contenedor Up y la petición muere sin respuesta: el síntoma no dice la causa.</a:t>
-            </a:r>
-          </a:p>
-          <a:p/>
-          <a:p>
-            <a:r>
-              <a:t>Verificar: el contrato de salud son tres datos — ruta (`GET /health`), código (`200` vivo · `503` sin base) y cuerpo con su formato.</a:t>
-            </a:r>
-          </a:p>
-          <a:p/>
-          <a:p>
-            <a:r>
-              <a:t>Un `200` con cuerpo vacío no distingue «vivo» de «vivo pero roto»: el cuerpo lleva al menos un campo verificable.</a:t>
-            </a:r>
-          </a:p>
-          <a:p/>
-          <a:p>
-            <a:r>
-              <a:t>DESARROLLO (para explicarlo, no se proyecta):</a:t>
-            </a:r>
-          </a:p>
-          <a:p/>
-          <a:p>
-            <a:r>
-              <a:t>El primero es la construccion: docker build -t cloudlite-api:0.1.0.</a:t>
-            </a:r>
-          </a:p>
-          <a:p/>
-          <a:p>
-            <a:r>
-              <a:t>El -t asigna nombre y etiqueta, y el punto final no es adorno sino el contexto de construccion, es decir la carpeta cuyo contenido se le entrega al motor.</a:t>
-            </a:r>
-          </a:p>
-          <a:p/>
-          <a:p>
-            <a:r>
-              <a:t>Nombre Y etiqueta, siempre; la etiqueta suelta no basta y el nombre solo tampoco.</a:t>
-            </a:r>
-          </a:p>
-          <a:p/>
-          <a:p>
-            <a:r>
-              <a:t>El segundo es la ejecucion: docker run -d -p 8081:8080 --name api cloudlite-api:0.1.0.</a:t>
-            </a:r>
-          </a:p>
-          <a:p/>
-          <a:p>
-            <a:r>
-              <a:t>Se lee de derecha a izquierda: el puerto 8080 de dentro queda accesible como 8081 desde fuera.</a:t>
-            </a:r>
-          </a:p>
-          <a:p/>
-          <a:p>
-            <a:r>
-              <a:t>El tercero es la verificacion, y aqui hay un concepto y no solo un comando.</a:t>
-            </a:r>
-          </a:p>
-          <a:p/>
-          <a:p>
-            <a:r>
-              <a:t>Un endpoint de salud es una ruta cuyo unico proposito es que alguien de afuera pueda preguntar si el servicio esta en condiciones de atender</a:t>
-            </a:r>
-          </a:p>
-          <a:p/>
-          <a:p>
-            <a:r>
-              <a:t>Y su contrato tiene TRES datos, los tres exigibles: la ruta (GET /health), el codigo de estado (200 cuando el servicio puede atender, 503 cuando esta arriba pero sin su dependencia, tipicamente la base de datos) y el cuerpo con su formato declarado.</a:t>
-            </a:r>
-          </a:p>
-          <a:p/>
-          <a:p>
-            <a:r>
-              <a:t>El tercero es el que se olvida y el que hace util al endpoint: un 200 con el cuerpo vacio no distingue «vivo» de «vivo pero roto», porque el proceso puede estar respondiendo mientras su conexion a datos esta caida.</a:t>
-            </a:r>
-          </a:p>
-          <a:p/>
-          <a:p>
-            <a:r>
-              <a:t>Se comprueba con curl -i http://localhost:8081/health, y el -i importa: sin el, curl imprime el cuerpo pero esconde el codigo de estado, que es un tercio del contrato.</a:t>
-            </a:r>
-          </a:p>
-          <a:p/>
-          <a:p>
-            <a:r>
-              <a:t>NOTAS:</a:t>
-            </a:r>
-          </a:p>
-          <a:p/>
-          <a:p>
-            <a:r>
-              <a:t>Con el Dockerfile escrito faltan tres comandos, cada uno con su sintaxis precisa.</a:t>
-            </a:r>
-          </a:p>
-          <a:p/>
-          <a:p>
-            <a:r>
-              <a:t>El -d lo manda a segundo plano y el --name le da un nombre estable para no andar copiando identificadores.</a:t>
-            </a:r>
-          </a:p>
-          <a:p/>
-          <a:p>
-            <a:r>
-              <a:t>Por eso el cuerpo lleva al menos un campo verificable, por ejemplo un estado y el nombre del servicio en JSON.</a:t>
-            </a:r>
-          </a:p>
-          <a:p/>
-          <a:p>
-            <a:r>
-              <a:t>(No se proyecta) Un build sin etiqueta funciona y por eso el estudiante no nota el problema: Docker le pone latest en silencio, y a partir de ahi nadie puede decir que version esta corriendo.</a:t>
-            </a:r>
-          </a:p>
-          <a:p/>
-          <a:p>
-            <a:r>
-              <a:t>(No se proyecta) El corazon de la instruccion es el -p, y conviene escribirlo en el tablero con las dos etiquetas encima: el numero de la IZQUIERDA es el del anfitrion, la maquina desde la que uno abre el navegador, y el de la DERECHA es el del contenedor, el mismo del EXPOSE.</a:t>
-            </a:r>
-          </a:p>
-          <a:p/>
-          <a:p>
-            <a:r>
-              <a:t>(No se proyecta) En el ejemplo estan a proposito DISTINTOS, porque cuando se escribe -p 8080:8080 los dos lados se confunden y el estudiante no puede decir cual es cual; en la actividad se le pide justamente explicar la diferencia.</a:t>
-            </a:r>
-          </a:p>
-          <a:p/>
-          <a:p>
-            <a:r>
-              <a:t>(No se proyecta) Y hay que anunciar el sintoma de invertirlos, que es lo que hace perder la tarde: docker ps sigue reportando el contenedor como Up y la peticion simplemente no obtiene respuesta o muere con una conexion reiniciada.</a:t>
-            </a:r>
-          </a:p>
-          <a:p/>
-          <a:p>
-            <a:r>
-              <a:t>(No se proyecta) El sintoma no senala la causa, y el estudiante busca el error en el codigo cuando esta en una linea del comando.</a:t>
-            </a:r>
-          </a:p>
-          <a:p/>
-          <a:p>
-            <a:r>
-              <a:t>(No se proyecta) Este mismo endpoint reaparece en la Clase 7, donde el balanceador lo consulta para decidir si sigue enviandole trafico a una instancia, y en la Clase 8, donde el pipeline lo usa como prueba de humo despues de construir la imagen.</a:t>
-            </a:r>
-          </a:p>
-        </p:txBody>
-      </p:sp>
-      <p:sp>
-        <p:nvSpPr>
-          <p:cNvPr id="4" name="Slide Number Placeholder 3"/>
-          <p:cNvSpPr>
-            <a:spLocks noGrp="1"/>
-          </p:cNvSpPr>
-          <p:nvPr>
-            <p:ph type="sldNum" idx="5" sz="quarter"/>
-          </p:nvPr>
-        </p:nvSpPr>
-        <p:spPr/>
-      </p:sp>
-    </p:spTree>
-  </p:cSld>
-  <p:clrMapOvr>
-    <a:masterClrMapping/>
-  </p:clrMapOvr>
-</p:notes>
-</file>
-
-<file path=ppt/notesSlides/notesSlide11.xml><?xml version="1.0" encoding="utf-8"?>
-<p:notes xmlns:a="http://schemas.openxmlformats.org/drawingml/2006/main" xmlns:p="http://schemas.openxmlformats.org/presentationml/2006/main" xmlns:r="http://schemas.openxmlformats.org/officeDocument/2006/relationships">
-  <p:cSld>
-    <p:spTree>
-      <p:nvGrpSpPr>
-        <p:cNvPr id="1" name=""/>
-        <p:cNvGrpSpPr/>
-        <p:nvPr/>
-      </p:nvGrpSpPr>
-      <p:grpSpPr>
-        <a:xfrm>
-          <a:off x="0" y="0"/>
-          <a:ext cx="0" cy="0"/>
-          <a:chOff x="0" y="0"/>
-          <a:chExt cx="0" cy="0"/>
-        </a:xfrm>
-      </p:grpSpPr>
-      <p:sp>
-        <p:nvSpPr>
-          <p:cNvPr id="2" name="Slide Image Placeholder 1"/>
-          <p:cNvSpPr>
-            <a:spLocks noGrp="1"/>
-          </p:cNvSpPr>
-          <p:nvPr>
-            <p:ph type="sldImg" idx="2"/>
-          </p:nvPr>
-        </p:nvSpPr>
-        <p:spPr/>
-      </p:sp>
-      <p:sp>
-        <p:nvSpPr>
-          <p:cNvPr id="3" name="Notes Placeholder 2"/>
-          <p:cNvSpPr>
-            <a:spLocks noGrp="1"/>
-          </p:cNvSpPr>
-          <p:nvPr>
-            <p:ph type="body" idx="3" sz="quarter"/>
-          </p:nvPr>
-        </p:nvSpPr>
-        <p:spPr/>
-        <p:txBody>
-          <a:bodyPr/>
-          <a:lstStyle/>
-          <a:p>
-            <a:r>
-              <a:t>DESARROLLO (para explicarlo, no se proyecta):</a:t>
-            </a:r>
-          </a:p>
-          <a:p/>
-          <a:p>
-            <a:r>
-              <a:t>Tras ejecutar el contenedor, el comando docker ps lista lo que esta corriendo con siete columnas: identificador del contenedor, imagen de la que proviene, comando en ejecucion, tiempo desde su creacion, estado, puertos publicados y nombre asignado.</a:t>
-            </a:r>
-          </a:p>
-          <a:p/>
-          <a:p>
-            <a:r>
-              <a:t>Todo esto ocurre en Killercoda (killercoda.com, cuenta gratuita y sin tarjeta, escenario Ubuntu), que entrega una terminal Linux real con Docker ya instalado dentro del navegador, sin instalar Docker Desktop</a:t>
-            </a:r>
-          </a:p>
-          <a:p/>
-          <a:p>
-            <a:r>
-              <a:t>Que en equipos institucionales suele estar bloqueado y tiene condiciones de licencia para organizaciones grandes.</a:t>
-            </a:r>
-          </a:p>
-          <a:p/>
-          <a:p>
-            <a:r>
-              <a:t>El primero: la sesion caduca a una hora y al cerrarse se pierde lo que exista solo alli.</a:t>
-            </a:r>
-          </a:p>
-          <a:p/>
-          <a:p>
-            <a:r>
-              <a:t>El segundo: en el plan gratuito solo se trabaja un escenario a la vez, asi que no sirve dejar dos labs abiertos.</a:t>
-            </a:r>
-          </a:p>
-          <a:p/>
-          <a:p>
-            <a:r>
-              <a:t>NOTAS:</a:t>
-            </a:r>
-          </a:p>
-          <a:p/>
-          <a:p>
-            <a:r>
-              <a:t>Segundo ejemplo concreto.</a:t>
-            </a:r>
-          </a:p>
-          <a:p/>
-          <a:p>
-            <a:r>
-              <a:t>La columna de estado es la que hay que mirar: si dice Up seguido de un tiempo, el contenedor vive; si dice Exited con un codigo entre parentesis, murio, y ese codigo es la primera pista del problema.</a:t>
-            </a:r>
-          </a:p>
-          <a:p/>
-          <a:p>
-            <a:r>
-              <a:t>Por eso la alterna es alterna y no la primera opcion.</a:t>
-            </a:r>
-          </a:p>
-          <a:p/>
-          <a:p>
-            <a:r>
-              <a:t>PREGUNTAS FRECUENTES Y CIERRE CONCEPTUAL ()</a:t>
-            </a:r>
-          </a:p>
-          <a:p/>
-          <a:p>
-            <a:r>
-              <a:t>Por que mi contenedor arranca y se muere de inmediato: porque un contenedor vive exactamente lo que vive su proceso principal, y si el comando termina, el contenedor termina.</a:t>
-            </a:r>
-          </a:p>
-          <a:p/>
-          <a:p>
-            <a:r>
-              <a:t>No es un error, es el diseno; un contenedor no es una maquina encendida esperando ordenes, es un proceso envuelto en aislamiento, y la solucion es que el comando quede corriendo en primer plano.</a:t>
-            </a:r>
-          </a:p>
-          <a:p/>
-          <a:p>
-            <a:r>
-              <a:t>Segunda: donde quedan mis datos si borro el contenedor.</a:t>
-            </a:r>
-          </a:p>
-          <a:p/>
-          <a:p>
-            <a:r>
-              <a:t>Tercera: entonces la base de datos tambien va en un contenedor.</a:t>
-            </a:r>
-          </a:p>
-          <a:p/>
-          <a:p>
-            <a:r>
-              <a:t>En el modelo C4, la palabra contenedor significa cualquier cosa que se ejecuta o almacena de forma independiente, como una aplicacion web, una API o una base de datos, y es un concepto de diagrama anterior a Docker.</a:t>
-            </a:r>
-          </a:p>
-          <a:p/>
-          <a:p>
-            <a:r>
-              <a:t>El contenedor de Docker, en cambio, es un mecanismo concreto de empaquetado y ejecucion.</a:t>
-            </a:r>
-          </a:p>
-          <a:p/>
-          <a:p>
-            <a:r>
-              <a:t>Se parecen y a menudo coinciden uno a uno, pero no son sinonimos: una base de datos gestionada que nadie contenerizo sigue siendo un contenedor en el sentido de C4.</a:t>
-            </a:r>
-          </a:p>
-          <a:p/>
-          <a:p>
-            <a:r>
-              <a:t>La respuesta, dicha desde ya, es no.</a:t>
-            </a:r>
-          </a:p>
-          <a:p/>
-          <a:p>
-            <a:r>
-              <a:t>(No se proyecta) Un estudiante mas adelantado puede levantar dos contenedores, la API y un stub de notificaciones, y comprobar algo que sera central en la Clase 4: desde el contenedor de la API, la direccion localhost NO es la maquina anfitriona ni el otro contenedor, es el propio contenedor, y para que dos contenedores se hablen hay que ponerlos en una misma red y llamarse por nombre.</a:t>
-            </a:r>
-          </a:p>
-          <a:p/>
-          <a:p>
-            <a:r>
-              <a:t>(No se proyecta) Hay dos limites que conviene anunciar ANTES de empezar y no despues, porque cambian como se planifica la hora de taller.</a:t>
-            </a:r>
-          </a:p>
-          <a:p/>
-          <a:p>
-            <a:r>
-              <a:t>(No se proyecta) De ahi sale la regla operativa del dia, y hay que decirla como consecuencia del limite y no como consejo suelto: el Dockerfile se escribe en la carpeta del proyecto y se PEGA en el laboratorio, nunca al contrario, y las capturas se guardan antes de cerrar.</a:t>
-            </a:r>
-          </a:p>
-          <a:p/>
-          <a:p>
-            <a:r>
-              <a:t>(No se proyecta) La alterna, si Killercoda no carga, es LabEx Docker Playground, que cumple la misma funcion tambien gratis y en el navegador, pero con una restriccion mas dura que conviene mencionar: su plan gratuito da solo tres sesiones al dia, de modo que quien la use para depurar puede quedarse sin intentos justo el dia de la entrega.</a:t>
-            </a:r>
-          </a:p>
-        </p:txBody>
-      </p:sp>
-      <p:sp>
-        <p:nvSpPr>
-          <p:cNvPr id="4" name="Slide Number Placeholder 3"/>
-          <p:cNvSpPr>
-            <a:spLocks noGrp="1"/>
-          </p:cNvSpPr>
-          <p:nvPr>
-            <p:ph type="sldNum" idx="5" sz="quarter"/>
-          </p:nvPr>
-        </p:nvSpPr>
-        <p:spPr/>
-      </p:sp>
-    </p:spTree>
-  </p:cSld>
-  <p:clrMapOvr>
-    <a:masterClrMapping/>
-  </p:clrMapOvr>
-</p:notes>
-</file>
-
 <file path=ppt/notesSlides/notesSlide2.xml><?xml version="1.0" encoding="utf-8"?>
 <p:notes xmlns:a="http://schemas.openxmlformats.org/drawingml/2006/main" xmlns:p="http://schemas.openxmlformats.org/presentationml/2006/main" xmlns:r="http://schemas.openxmlformats.org/officeDocument/2006/relationships">
   <p:cSld>
@@ -1470,37 +1036,67 @@
           <a:lstStyle/>
           <a:p>
             <a:r>
-              <a:t>TEXTO COMPLETO DE LA LÁMINA (se proyecta resumido):</a:t>
+              <a:t>DESARROLLO (para explicarlo, no se proyecta):</a:t>
             </a:r>
           </a:p>
           <a:p/>
           <a:p>
             <a:r>
-              <a:t>VM: hipervisor + SO completo → aislamiento fuerte, más pesado.</a:t>
+              <a:t>El Dockerfile es la receta: un archivo de texto con instrucciones.</a:t>
             </a:r>
           </a:p>
           <a:p/>
           <a:p>
             <a:r>
-              <a:t>Contenedor: comparte kernel del host → portable y rápido para demos.</a:t>
+              <a:t>La imagen es el resultado de ejecutar esa receta, un paquete inmutable y de solo lectura con el codigo, las dependencias y la configuracion.</a:t>
             </a:r>
           </a:p>
           <a:p/>
           <a:p>
             <a:r>
-              <a:t>Imagen = capas inmutables; contenedor = instancia en ejecución.</a:t>
+              <a:t>El contenedor es una instancia en ejecucion de esa imagen, y de una misma imagen se pueden lanzar diez contenedores identicos, igual que de una clase se instancian muchos objetos</a:t>
             </a:r>
           </a:p>
           <a:p/>
           <a:p>
             <a:r>
-              <a:t>CloudLite: contenerizamos al menos un servicio (API stub o front estático).</a:t>
+              <a:t>Esa comparacion funciona bien con estudiantes que ya vieron programacion orientada a objetos.</a:t>
             </a:r>
           </a:p>
           <a:p/>
           <a:p>
             <a:r>
-              <a:t>Error común: creer que el contenedor «no tiene sistema operativo»: usa el kernel del anfitrión, por eso una imagen Linux necesita un kernel Linux debajo.</a:t>
+              <a:t>Y el registro, o registry, es el repositorio donde las imagenes se publican y se descargan.</a:t>
+            </a:r>
+          </a:p>
+          <a:p/>
+          <a:p>
+            <a:r>
+              <a:t>Un detalle que explica el comportamiento diario: la imagen se construye por capas, una por instruccion, y esas capas quedan en cache; si una instruccion no cambio, la reconstruccion la reutiliza en lugar de volver a ejecutarla.</a:t>
+            </a:r>
+          </a:p>
+          <a:p/>
+          <a:p>
+            <a:r>
+              <a:t>Hacerlo al reves obliga a reinstalar todo en cada construccion y convierte una build de 10 segundos en una de varios minutos.</a:t>
+            </a:r>
+          </a:p>
+          <a:p/>
+          <a:p>
+            <a:r>
+              <a:t>NOTAS:</a:t>
+            </a:r>
+          </a:p>
+          <a:p/>
+          <a:p>
+            <a:r>
+              <a:t>De ahi la unica optimizacion que hay que ensenar hoy: copiar primero el archivo de dependencias e instalarlas, y solo despues copiar el codigo fuente, porque el codigo cambia en cada commit y las dependencias casi nunca.</a:t>
+            </a:r>
+          </a:p>
+          <a:p/>
+          <a:p>
+            <a:r>
+              <a:t>(No se proyecta) Cuatro terminos se confunden de forma sistematica y conviene fijarlos con una sola analogia.</a:t>
             </a:r>
           </a:p>
         </p:txBody>
@@ -1576,61 +1172,115 @@
           <a:p/>
           <a:p>
             <a:r>
-              <a:t>El Dockerfile es la receta: un archivo de texto con instrucciones.</a:t>
+              <a:t>FROM node:20-alpine elige la imagen base, o sea el punto de partida ya construido por otros, en este caso un Linux minimo con Node instalado; la etiqueta 20-alpine es FIJA y eso importa</a:t>
             </a:r>
           </a:p>
           <a:p/>
           <a:p>
             <a:r>
-              <a:t>La imagen es el resultado de ejecutar esa receta, un paquete inmutable y de solo lectura con el codigo, las dependencias y la configuracion.</a:t>
+              <a:t>Porque con latest la imagen de hoy no es la de manana y la reconstruccion deja de ser reproducible.</a:t>
             </a:r>
           </a:p>
           <a:p/>
           <a:p>
             <a:r>
-              <a:t>El contenedor es una instancia en ejecucion de esa imagen, y de una misma imagen se pueden lanzar diez contenedores identicos, igual que de una clase se instancian muchos objetos</a:t>
+              <a:t>RUN npm ci --omit=dev las instala dentro de la imagen y no en la maquina del estudiante, lo cual es el punto entero del ejercicio</a:t>
             </a:r>
           </a:p>
           <a:p/>
           <a:p>
             <a:r>
-              <a:t>Esa comparacion funciona bien con estudiantes que ya vieron programacion orientada a objetos.</a:t>
+              <a:t>Porque la dependencia viaja con el artefacto; se usa npm ci y no npm install porque respeta el archivo de bloqueo y por tanto instala exactamente las mismas versiones en cada construccion.</a:t>
             </a:r>
           </a:p>
           <a:p/>
           <a:p>
             <a:r>
-              <a:t>Y el registro, o registry, es el repositorio donde las imagenes se publican y se descargan.</a:t>
+              <a:t>EXPOSE 8080 documenta en que puerto escucha el proceso.</a:t>
             </a:r>
           </a:p>
           <a:p/>
           <a:p>
             <a:r>
-              <a:t>Un detalle que explica el comportamiento diario: la imagen se construye por capas, una por instruccion, y esas capas quedan en cache; si una instruccion no cambio, la reconstruccion la reutiliza en lugar de volver a ejecutarla.</a:t>
+              <a:t>Ese COPY.. tiene una consecuencia seria: copia TODO lo que haya en la carpeta, incluido el archivo.env con las credenciales, y una vez dentro de una capa ya no sale, ni siquiera borrandolo en una instruccion posterior.</a:t>
             </a:r>
           </a:p>
           <a:p/>
           <a:p>
             <a:r>
-              <a:t>Hacerlo al reves obliga a reinstalar todo en cada construccion y convierte una build de 10 segundos en una de varios minutos.</a:t>
+              <a:t>La regla se enuncia en una linea: si haces COPY.., el.dockerignore va al lado y se menciona en la entrega.</a:t>
             </a:r>
           </a:p>
           <a:p/>
           <a:p>
             <a:r>
+              <a:t>Un ultimo detalle del que depende media clase: EXPOSE no abre nada, solo documenta.</a:t>
+            </a:r>
+          </a:p>
+          <a:p/>
+          <a:p>
+            <a:r>
               <a:t>NOTAS:</a:t>
             </a:r>
           </a:p>
           <a:p/>
           <a:p>
             <a:r>
-              <a:t>De ahi la unica optimizacion que hay que ensenar hoy: copiar primero el archivo de dependencias e instalarlas, y solo despues copiar el codigo fuente, porque el codigo cambia en cada commit y las dependencias casi nunca.</a:t>
+              <a:t>Primer ejemplo concreto en CloudLite.</a:t>
             </a:r>
           </a:p>
           <a:p/>
           <a:p>
             <a:r>
-              <a:t>(No se proyecta) Cuatro terminos se confunden de forma sistematica y conviene fijarlos con una sola analogia.</a:t>
+              <a:t>WORKDIR /app fija el directorio dentro del contenedor donde ocurrira todo lo demas.</a:t>
+            </a:r>
+          </a:p>
+          <a:p/>
+          <a:p>
+            <a:r>
+              <a:t>COPY package*.json./ trae solo la lista de dependencias.</a:t>
+            </a:r>
+          </a:p>
+          <a:p/>
+          <a:p>
+            <a:r>
+              <a:t>COPY.. trae el resto del codigo, y va DESPUES por la razon de cache de la seccion anterior.</a:t>
+            </a:r>
+          </a:p>
+          <a:p/>
+          <a:p>
+            <a:r>
+              <a:t>Y CMD indica que comando ejecutar cuando el contenedor arranque, uno solo y en primer plano.</a:t>
+            </a:r>
+          </a:p>
+          <a:p/>
+          <a:p>
+            <a:r>
+              <a:t>Por eso al lado del Dockerfile va un segundo archivo, el.dockerignore, con al menos.env, node_modules y.git.</a:t>
+            </a:r>
+          </a:p>
+          <a:p/>
+          <a:p>
+            <a:r>
+              <a:t>Lo que realmente publica el puerto es la opcion -p al ejecutar, y ese es el tema de la diapositiva siguiente.</a:t>
+            </a:r>
+          </a:p>
+          <a:p/>
+          <a:p>
+            <a:r>
+              <a:t>(No se proyecta) En CloudLite Turnos el estudiante contenerizara un stub de su API, es decir una version minima que responde algo verificable: el endpoint GET /health, que devuelve un cuerpo en formato JSON con al menos un campo que se pueda comprobar.</a:t>
+            </a:r>
+          </a:p>
+          <a:p/>
+          <a:p>
+            <a:r>
+              <a:t>(No se proyecta) Su Dockerfile tiene siete instrucciones, y el docente debe poder explicar cada una.</a:t>
+            </a:r>
+          </a:p>
+          <a:p/>
+          <a:p>
+            <a:r>
+              <a:t>(No se proyecta) La diapositiva lo proyecta junto al Dockerfile y no como nota al pie a proposito: son dos archivos hermanos en la misma carpeta, y el estudiante que entrega el primero sin el segundo entrega un artefacto que filtra secretos.</a:t>
             </a:r>
           </a:p>
         </p:txBody>
@@ -1706,115 +1356,121 @@
           <a:p/>
           <a:p>
             <a:r>
-              <a:t>FROM node:20-alpine elige la imagen base, o sea el punto de partida ya construido por otros, en este caso un Linux minimo con Node instalado; la etiqueta 20-alpine es FIJA y eso importa</a:t>
+              <a:t>El primero es la construccion: docker build -t cloudlite-api:0.1.0.</a:t>
             </a:r>
           </a:p>
           <a:p/>
           <a:p>
             <a:r>
-              <a:t>Porque con latest la imagen de hoy no es la de manana y la reconstruccion deja de ser reproducible.</a:t>
+              <a:t>El -t asigna nombre y etiqueta, y el punto final no es adorno sino el contexto de construccion, es decir la carpeta cuyo contenido se le entrega al motor.</a:t>
             </a:r>
           </a:p>
           <a:p/>
           <a:p>
             <a:r>
-              <a:t>RUN npm ci --omit=dev las instala dentro de la imagen y no en la maquina del estudiante, lo cual es el punto entero del ejercicio</a:t>
+              <a:t>Nombre Y etiqueta, siempre; la etiqueta suelta no basta y el nombre solo tampoco.</a:t>
             </a:r>
           </a:p>
           <a:p/>
           <a:p>
             <a:r>
-              <a:t>Porque la dependencia viaja con el artefacto; se usa npm ci y no npm install porque respeta el archivo de bloqueo y por tanto instala exactamente las mismas versiones en cada construccion.</a:t>
+              <a:t>El segundo es la ejecucion: docker run -d -p 8081:8080 --name api cloudlite-api:0.1.0.</a:t>
             </a:r>
           </a:p>
           <a:p/>
           <a:p>
             <a:r>
-              <a:t>EXPOSE 8080 documenta en que puerto escucha el proceso.</a:t>
+              <a:t>Se lee de derecha a izquierda: el puerto 8080 de dentro queda accesible como 8081 desde fuera.</a:t>
             </a:r>
           </a:p>
           <a:p/>
           <a:p>
             <a:r>
-              <a:t>Ese COPY.. tiene una consecuencia seria: copia TODO lo que haya en la carpeta, incluido el archivo.env con las credenciales, y una vez dentro de una capa ya no sale, ni siquiera borrandolo en una instruccion posterior.</a:t>
+              <a:t>El tercero es la verificacion, y aqui hay un concepto y no solo un comando.</a:t>
             </a:r>
           </a:p>
           <a:p/>
           <a:p>
             <a:r>
-              <a:t>La regla se enuncia en una linea: si haces COPY.., el.dockerignore va al lado y se menciona en la entrega.</a:t>
+              <a:t>Un endpoint de salud es una ruta cuyo unico proposito es que alguien de afuera pueda preguntar si el servicio esta en condiciones de atender</a:t>
             </a:r>
           </a:p>
           <a:p/>
           <a:p>
             <a:r>
-              <a:t>Un ultimo detalle del que depende media clase: EXPOSE no abre nada, solo documenta.</a:t>
+              <a:t>Y su contrato tiene TRES datos, los tres exigibles: la ruta (GET /health), el codigo de estado (200 cuando el servicio puede atender, 503 cuando esta arriba pero sin su dependencia, tipicamente la base de datos) y el cuerpo con su formato declarado.</a:t>
             </a:r>
           </a:p>
           <a:p/>
           <a:p>
             <a:r>
+              <a:t>El tercero es el que se olvida y el que hace util al endpoint: un 200 con el cuerpo vacio no distingue «vivo» de «vivo pero roto», porque el proceso puede estar respondiendo mientras su conexion a datos esta caida.</a:t>
+            </a:r>
+          </a:p>
+          <a:p/>
+          <a:p>
+            <a:r>
+              <a:t>Se comprueba con curl -i http://localhost:8081/health, y el -i importa: sin el, curl imprime el cuerpo pero esconde el codigo de estado, que es un tercio del contrato.</a:t>
+            </a:r>
+          </a:p>
+          <a:p/>
+          <a:p>
+            <a:r>
               <a:t>NOTAS:</a:t>
             </a:r>
           </a:p>
           <a:p/>
           <a:p>
             <a:r>
-              <a:t>Primer ejemplo concreto en CloudLite.</a:t>
+              <a:t>Con el Dockerfile escrito faltan tres comandos, cada uno con su sintaxis precisa.</a:t>
             </a:r>
           </a:p>
           <a:p/>
           <a:p>
             <a:r>
-              <a:t>WORKDIR /app fija el directorio dentro del contenedor donde ocurrira todo lo demas.</a:t>
+              <a:t>El -d lo manda a segundo plano y el --name le da un nombre estable para no andar copiando identificadores.</a:t>
             </a:r>
           </a:p>
           <a:p/>
           <a:p>
             <a:r>
-              <a:t>COPY package*.json./ trae solo la lista de dependencias.</a:t>
+              <a:t>Por eso el cuerpo lleva al menos un campo verificable, por ejemplo un estado y el nombre del servicio en JSON.</a:t>
             </a:r>
           </a:p>
           <a:p/>
           <a:p>
             <a:r>
-              <a:t>COPY.. trae el resto del codigo, y va DESPUES por la razon de cache de la seccion anterior.</a:t>
+              <a:t>(No se proyecta) Un build sin etiqueta funciona y por eso el estudiante no nota el problema: Docker le pone latest en silencio, y a partir de ahi nadie puede decir que version esta corriendo.</a:t>
             </a:r>
           </a:p>
           <a:p/>
           <a:p>
             <a:r>
-              <a:t>Y CMD indica que comando ejecutar cuando el contenedor arranque, uno solo y en primer plano.</a:t>
+              <a:t>(No se proyecta) El corazon de la instruccion es el -p, y conviene escribirlo en el tablero con las dos etiquetas encima: el numero de la IZQUIERDA es el del anfitrion, la maquina desde la que uno abre el navegador, y el de la DERECHA es el del contenedor, el mismo del EXPOSE.</a:t>
             </a:r>
           </a:p>
           <a:p/>
           <a:p>
             <a:r>
-              <a:t>Por eso al lado del Dockerfile va un segundo archivo, el.dockerignore, con al menos.env, node_modules y.git.</a:t>
+              <a:t>(No se proyecta) En el ejemplo estan a proposito DISTINTOS, porque cuando se escribe -p 8080:8080 los dos lados se confunden y el estudiante no puede decir cual es cual; en la actividad se le pide justamente explicar la diferencia.</a:t>
             </a:r>
           </a:p>
           <a:p/>
           <a:p>
             <a:r>
-              <a:t>Lo que realmente publica el puerto es la opcion -p al ejecutar, y ese es el tema de la diapositiva siguiente.</a:t>
+              <a:t>(No se proyecta) Y hay que anunciar el sintoma de invertirlos, que es lo que hace perder la tarde: docker ps sigue reportando el contenedor como Up y la peticion simplemente no obtiene respuesta o muere con una conexion reiniciada.</a:t>
             </a:r>
           </a:p>
           <a:p/>
           <a:p>
             <a:r>
-              <a:t>(No se proyecta) En CloudLite Turnos el estudiante contenerizara un stub de su API, es decir una version minima que responde algo verificable: el endpoint GET /health, que devuelve un cuerpo en formato JSON con al menos un campo que se pueda comprobar.</a:t>
+              <a:t>(No se proyecta) El sintoma no senala la causa, y el estudiante busca el error en el codigo cuando esta en una linea del comando.</a:t>
             </a:r>
           </a:p>
           <a:p/>
           <a:p>
             <a:r>
-              <a:t>(No se proyecta) Su Dockerfile tiene siete instrucciones, y el docente debe poder explicar cada una.</a:t>
-            </a:r>
-          </a:p>
-          <a:p/>
-          <a:p>
-            <a:r>
-              <a:t>(No se proyecta) La diapositiva lo proyecta junto al Dockerfile y no como nota al pie a proposito: son dos archivos hermanos en la misma carpeta, y el estudiante que entrega el primero sin el segundo entrega un artefacto que filtra secretos.</a:t>
+              <a:t>(No se proyecta) Este mismo endpoint reaparece en la Clase 7, donde el balanceador lo consulta para decidir si sigue enviandole trafico a una instancia, y en la Clase 8, donde el pipeline lo usa como prueba de humo despues de construir la imagen.</a:t>
             </a:r>
           </a:p>
         </p:txBody>
@@ -1884,137 +1540,139 @@
           <a:lstStyle/>
           <a:p>
             <a:r>
-              <a:t>TEXTO COMPLETO DE LA LÁMINA (se proyecta resumido):</a:t>
+              <a:t>DESARROLLO (para explicarlo, no se proyecta):</a:t>
             </a:r>
           </a:p>
           <a:p/>
           <a:p>
             <a:r>
-              <a:t>Lo que se entrega hoy es el Dockerfile y el ciclo justificado: se escribe y se razona, no hace falta ejecutarlo para entregar.</a:t>
+              <a:t>Tras ejecutar el contenedor, el comando docker ps lista lo que esta corriendo con siete columnas: identificador del contenedor, imagen de la que proviene, comando en ejecucion, tiempo desde su creacion, estado, puertos publicados y nombre asignado.</a:t>
             </a:r>
           </a:p>
           <a:p/>
           <a:p>
             <a:r>
-              <a:t>Si quieres comprobarlo —y vale la pena— hay laboratorios de contenedores gratuitos en el navegador, sin instalar nada y sin tarjeta.</a:t>
+              <a:t>Todo esto ocurre en Killercoda (killercoda.com, cuenta gratuita y sin tarjeta, escenario Ubuntu), que entrega una terminal Linux real con Docker ya instalado dentro del navegador, sin instalar Docker Desktop</a:t>
             </a:r>
           </a:p>
           <a:p/>
           <a:p>
             <a:r>
-              <a:t>Ojo con hacerlos obligatorios: la sesión caduca en torno a la hora y el plan gratuito limita cuántas abres al día. Por eso tu nota no depende de que carguen.</a:t>
+              <a:t>Que en equipos institucionales suele estar bloqueado y tiene condiciones de licencia para organizaciones grandes.</a:t>
             </a:r>
           </a:p>
           <a:p/>
           <a:p>
             <a:r>
-              <a:t>El Dockerfile se escribe en tu carpeta del PI y se pega en el lab, nunca al contrario: lo que se cierra con la sesión del lab se pierde.</a:t>
-            </a:r>
-          </a:p>
-        </p:txBody>
-      </p:sp>
-      <p:sp>
-        <p:nvSpPr>
-          <p:cNvPr id="4" name="Slide Number Placeholder 3"/>
-          <p:cNvSpPr>
-            <a:spLocks noGrp="1"/>
-          </p:cNvSpPr>
-          <p:nvPr>
-            <p:ph type="sldNum" idx="5" sz="quarter"/>
-          </p:nvPr>
-        </p:nvSpPr>
-        <p:spPr/>
-      </p:sp>
-    </p:spTree>
-  </p:cSld>
-  <p:clrMapOvr>
-    <a:masterClrMapping/>
-  </p:clrMapOvr>
-</p:notes>
-</file>
-
-<file path=ppt/notesSlides/notesSlide9.xml><?xml version="1.0" encoding="utf-8"?>
-<p:notes xmlns:a="http://schemas.openxmlformats.org/drawingml/2006/main" xmlns:p="http://schemas.openxmlformats.org/presentationml/2006/main" xmlns:r="http://schemas.openxmlformats.org/officeDocument/2006/relationships">
-  <p:cSld>
-    <p:spTree>
-      <p:nvGrpSpPr>
-        <p:cNvPr id="1" name=""/>
-        <p:cNvGrpSpPr/>
-        <p:nvPr/>
-      </p:nvGrpSpPr>
-      <p:grpSpPr>
-        <a:xfrm>
-          <a:off x="0" y="0"/>
-          <a:ext cx="0" cy="0"/>
-          <a:chOff x="0" y="0"/>
-          <a:chExt cx="0" cy="0"/>
-        </a:xfrm>
-      </p:grpSpPr>
-      <p:sp>
-        <p:nvSpPr>
-          <p:cNvPr id="2" name="Slide Image Placeholder 1"/>
-          <p:cNvSpPr>
-            <a:spLocks noGrp="1"/>
-          </p:cNvSpPr>
-          <p:nvPr>
-            <p:ph type="sldImg" idx="2"/>
-          </p:nvPr>
-        </p:nvSpPr>
-        <p:spPr/>
-      </p:sp>
-      <p:sp>
-        <p:nvSpPr>
-          <p:cNvPr id="3" name="Notes Placeholder 2"/>
-          <p:cNvSpPr>
-            <a:spLocks noGrp="1"/>
-          </p:cNvSpPr>
-          <p:nvPr>
-            <p:ph type="body" idx="3" sz="quarter"/>
-          </p:nvPr>
-        </p:nvSpPr>
-        <p:spPr/>
-        <p:txBody>
-          <a:bodyPr/>
-          <a:lstStyle/>
-          <a:p>
-            <a:r>
-              <a:t>TEXTO COMPLETO DE LA LÁMINA (se proyecta resumido):</a:t>
+              <a:t>El primero: la sesion caduca a una hora y al cerrarse se pierde lo que exista solo alli.</a:t>
             </a:r>
           </a:p>
           <a:p/>
           <a:p>
             <a:r>
-              <a:t>Siete instrucciones: FROM · WORKDIR · COPY de dependencias · RUN · COPY del código · EXPOSE · CMD.</a:t>
+              <a:t>El segundo: en el plan gratuito solo se trabaja un escenario a la vez, asi que no sirve dejar dos labs abiertos.</a:t>
             </a:r>
           </a:p>
           <a:p/>
           <a:p>
             <a:r>
-              <a:t>`FROM` con etiqueta fija (`node:20-alpine`, `python:3.12-slim`): con `latest`, la imagen de hoy no es la de mañana.</a:t>
+              <a:t>NOTAS:</a:t>
             </a:r>
           </a:p>
           <a:p/>
           <a:p>
             <a:r>
-              <a:t>Dependencias antes que el código: así cambiar una línea no reinstala nada (es la caché por capas).</a:t>
+              <a:t>Segundo ejemplo concreto.</a:t>
             </a:r>
           </a:p>
           <a:p/>
           <a:p>
             <a:r>
-              <a:t>Nunca un secreto en la imagen: las capas se acumulan y `docker history` las lee aunque el archivo se borre después.</a:t>
+              <a:t>La columna de estado es la que hay que mirar: si dice Up seguido de un tiempo, el contenedor vive; si dice Exited con un codigo entre parentesis, murio, y ese codigo es la primera pista del problema.</a:t>
             </a:r>
           </a:p>
           <a:p/>
           <a:p>
             <a:r>
-              <a:t>Si haces `COPY . .`, va con un `.dockerignore` al lado (`.env`, `node_modules`, `.git`) — y se menciona en la entrega.</a:t>
+              <a:t>Por eso la alterna es alterna y no la primera opcion.</a:t>
             </a:r>
           </a:p>
           <a:p/>
           <a:p>
             <a:r>
-              <a:t>`EXPOSE` documenta, no publica. Publicar es el `-p` del `docker run`.</a:t>
+              <a:t>PREGUNTAS FRECUENTES Y CIERRE CONCEPTUAL ()</a:t>
+            </a:r>
+          </a:p>
+          <a:p/>
+          <a:p>
+            <a:r>
+              <a:t>Por que mi contenedor arranca y se muere de inmediato: porque un contenedor vive exactamente lo que vive su proceso principal, y si el comando termina, el contenedor termina.</a:t>
+            </a:r>
+          </a:p>
+          <a:p/>
+          <a:p>
+            <a:r>
+              <a:t>No es un error, es el diseno; un contenedor no es una maquina encendida esperando ordenes, es un proceso envuelto en aislamiento, y la solucion es que el comando quede corriendo en primer plano.</a:t>
+            </a:r>
+          </a:p>
+          <a:p/>
+          <a:p>
+            <a:r>
+              <a:t>Segunda: donde quedan mis datos si borro el contenedor.</a:t>
+            </a:r>
+          </a:p>
+          <a:p/>
+          <a:p>
+            <a:r>
+              <a:t>Tercera: entonces la base de datos tambien va en un contenedor.</a:t>
+            </a:r>
+          </a:p>
+          <a:p/>
+          <a:p>
+            <a:r>
+              <a:t>En el modelo C4, la palabra contenedor significa cualquier cosa que se ejecuta o almacena de forma independiente, como una aplicacion web, una API o una base de datos, y es un concepto de diagrama anterior a Docker.</a:t>
+            </a:r>
+          </a:p>
+          <a:p/>
+          <a:p>
+            <a:r>
+              <a:t>El contenedor de Docker, en cambio, es un mecanismo concreto de empaquetado y ejecucion.</a:t>
+            </a:r>
+          </a:p>
+          <a:p/>
+          <a:p>
+            <a:r>
+              <a:t>Se parecen y a menudo coinciden uno a uno, pero no son sinonimos: una base de datos gestionada que nadie contenerizo sigue siendo un contenedor en el sentido de C4.</a:t>
+            </a:r>
+          </a:p>
+          <a:p/>
+          <a:p>
+            <a:r>
+              <a:t>La respuesta, dicha desde ya, es no.</a:t>
+            </a:r>
+          </a:p>
+          <a:p/>
+          <a:p>
+            <a:r>
+              <a:t>(No se proyecta) Un estudiante mas adelantado puede levantar dos contenedores, la API y un stub de notificaciones, y comprobar algo que sera central en la Clase 4: desde el contenedor de la API, la direccion localhost NO es la maquina anfitriona ni el otro contenedor, es el propio contenedor, y para que dos contenedores se hablen hay que ponerlos en una misma red y llamarse por nombre.</a:t>
+            </a:r>
+          </a:p>
+          <a:p/>
+          <a:p>
+            <a:r>
+              <a:t>(No se proyecta) Hay dos limites que conviene anunciar ANTES de empezar y no despues, porque cambian como se planifica la hora de taller.</a:t>
+            </a:r>
+          </a:p>
+          <a:p/>
+          <a:p>
+            <a:r>
+              <a:t>(No se proyecta) De ahi sale la regla operativa del dia, y hay que decirla como consecuencia del limite y no como consejo suelto: el Dockerfile se escribe en la carpeta del proyecto y se PEGA en el laboratorio, nunca al contrario, y las capturas se guardan antes de cerrar.</a:t>
+            </a:r>
+          </a:p>
+          <a:p/>
+          <a:p>
+            <a:r>
+              <a:t>(No se proyecta) La alterna, si Killercoda no carga, es LabEx Docker Playground, que cumple la misma funcion tambien gratis y en el navegador, pero con una restriccion mas dura que conviene mencionar: su plan gratuito da solo tres sesiones al dia, de modo que quien la use para depurar puede quedarse sin intentos justo el dia de la entrega.</a:t>
             </a:r>
           </a:p>
         </p:txBody>
@@ -8468,118 +8126,14 @@
       </p:sp>
       <p:sp>
         <p:nvSpPr>
-          <p:cNvPr id="5" name="Rounded Rectangle 4"/>
-          <p:cNvSpPr/>
-          <p:nvPr/>
-        </p:nvSpPr>
-        <p:spPr>
-          <a:xfrm>
-            <a:off x="5797149" y="1879499"/>
-            <a:ext cx="6010497" cy="3446472"/>
-          </a:xfrm>
-          <a:prstGeom prst="roundRect">
-            <a:avLst>
-              <a:gd name="adj" fmla="val 4000"/>
-            </a:avLst>
-          </a:prstGeom>
-          <a:solidFill>
-            <a:srgbClr val="E8EEF4"/>
-          </a:solidFill>
-          <a:ln>
-            <a:noFill/>
-          </a:ln>
-        </p:spPr>
-        <p:style>
-          <a:lnRef idx="1">
-            <a:schemeClr val="accent1"/>
-          </a:lnRef>
-          <a:fillRef idx="3">
-            <a:schemeClr val="accent1"/>
-          </a:fillRef>
-          <a:effectRef idx="2">
-            <a:schemeClr val="accent1"/>
-          </a:effectRef>
-          <a:fontRef idx="minor">
-            <a:schemeClr val="lt1"/>
-          </a:fontRef>
-        </p:style>
-        <p:txBody>
-          <a:bodyPr rtlCol="0" anchor="ctr"/>
-          <a:lstStyle/>
-          <a:p>
-            <a:pPr algn="ctr"/>
-          </a:p>
-        </p:txBody>
-      </p:sp>
-      <p:pic>
-        <p:nvPicPr>
-          <p:cNvPr id="6" name="Picture 5" descr="developer-terminal-laptop.jpg"/>
-          <p:cNvPicPr>
-            <a:picLocks noChangeAspect="1"/>
-          </p:cNvPicPr>
-          <p:nvPr/>
-        </p:nvPicPr>
-        <p:blipFill>
-          <a:blip r:embed="rId2"/>
-          <a:stretch>
-            <a:fillRect/>
-          </a:stretch>
-        </p:blipFill>
-        <p:spPr>
-          <a:xfrm>
-            <a:off x="5870301" y="1952651"/>
-            <a:ext cx="5864193" cy="3300168"/>
-          </a:xfrm>
-          <a:prstGeom prst="rect">
-            <a:avLst/>
-          </a:prstGeom>
-        </p:spPr>
-      </p:pic>
-      <p:sp>
-        <p:nvSpPr>
-          <p:cNvPr id="7" name="TextBox 6"/>
+          <p:cNvPr id="5" name="TextBox 4"/>
           <p:cNvSpPr txBox="1"/>
           <p:nvPr/>
         </p:nvSpPr>
         <p:spPr>
           <a:xfrm>
-            <a:off x="5870301" y="5961888"/>
-            <a:ext cx="5864193" cy="320040"/>
-          </a:xfrm>
-          <a:prstGeom prst="rect">
-            <a:avLst/>
-          </a:prstGeom>
-          <a:noFill/>
-        </p:spPr>
-        <p:txBody>
-          <a:bodyPr wrap="square">
-            <a:spAutoFit/>
-          </a:bodyPr>
-          <a:lstStyle/>
-          <a:p>
-            <a:pPr algn="ctr"/>
-            <a:r>
-              <a:rPr sz="1100" b="0" i="1">
-                <a:solidFill>
-                  <a:srgbClr val="666666"/>
-                </a:solidFill>
-                <a:latin typeface="Calibri"/>
-              </a:rPr>
-              <a:t>Foto: Jakub Zerdzicki · Pexels</a:t>
-            </a:r>
-          </a:p>
-        </p:txBody>
-      </p:sp>
-      <p:sp>
-        <p:nvSpPr>
-          <p:cNvPr id="8" name="TextBox 7"/>
-          <p:cNvSpPr txBox="1"/>
-          <p:nvPr/>
-        </p:nvSpPr>
-        <p:spPr>
-          <a:xfrm>
-            <a:off x="457200" y="1353312"/>
-            <a:ext cx="5093061" cy="5047488"/>
+            <a:off x="457200" y="1170432"/>
+            <a:ext cx="11277295" cy="5230368"/>
           </a:xfrm>
           <a:prstGeom prst="rect">
             <a:avLst/>
@@ -8690,14 +8244,48 @@
                 </a:solidFill>
                 <a:latin typeface="Calibri"/>
               </a:rPr>
-              <a:t> la sesión caduca en torno a la hora y el plan gratuito limita cuántas abres al día.</a:t>
-            </a:r>
-          </a:p>
-        </p:txBody>
-      </p:sp>
-      <p:sp>
-        <p:nvSpPr>
-          <p:cNvPr id="9" name="TextBox 8"/>
+              <a:t> la sesión caduca en torno a la hora y el plan gratuito limita cuántas abres al día. Por eso tu nota no depende de que carguen.</a:t>
+            </a:r>
+          </a:p>
+          <a:p>
+            <a:pPr>
+              <a:spcAft>
+                <a:spcPts val="800"/>
+              </a:spcAft>
+            </a:pPr>
+            <a:r>
+              <a:rPr sz="2000" b="0" i="0">
+                <a:solidFill>
+                  <a:srgbClr val="333333"/>
+                </a:solidFill>
+                <a:latin typeface="Calibri"/>
+              </a:rPr>
+              <a:t>–   El Dockerfile se escribe en </a:t>
+            </a:r>
+            <a:r>
+              <a:rPr sz="2000" b="1" i="0">
+                <a:solidFill>
+                  <a:srgbClr val="333333"/>
+                </a:solidFill>
+                <a:latin typeface="Calibri"/>
+              </a:rPr>
+              <a:t>tu</a:t>
+            </a:r>
+            <a:r>
+              <a:rPr sz="2000" b="0" i="0">
+                <a:solidFill>
+                  <a:srgbClr val="333333"/>
+                </a:solidFill>
+                <a:latin typeface="Calibri"/>
+              </a:rPr>
+              <a:t> carpeta y se pega en el lab, nunca al contrario: lo que se cierra con la sesión del lab se pierde.</a:t>
+            </a:r>
+          </a:p>
+        </p:txBody>
+      </p:sp>
+      <p:sp>
+        <p:nvSpPr>
+          <p:cNvPr id="6" name="TextBox 5"/>
           <p:cNvSpPr txBox="1"/>
           <p:nvPr/>
         </p:nvSpPr>
@@ -8878,118 +8466,14 @@
       </p:sp>
       <p:sp>
         <p:nvSpPr>
-          <p:cNvPr id="5" name="Rounded Rectangle 4"/>
-          <p:cNvSpPr/>
-          <p:nvPr/>
-        </p:nvSpPr>
-        <p:spPr>
-          <a:xfrm>
-            <a:off x="5797149" y="1573813"/>
-            <a:ext cx="6010497" cy="4057845"/>
-          </a:xfrm>
-          <a:prstGeom prst="roundRect">
-            <a:avLst>
-              <a:gd name="adj" fmla="val 4000"/>
-            </a:avLst>
-          </a:prstGeom>
-          <a:solidFill>
-            <a:srgbClr val="E8EEF4"/>
-          </a:solidFill>
-          <a:ln>
-            <a:noFill/>
-          </a:ln>
-        </p:spPr>
-        <p:style>
-          <a:lnRef idx="1">
-            <a:schemeClr val="accent1"/>
-          </a:lnRef>
-          <a:fillRef idx="3">
-            <a:schemeClr val="accent1"/>
-          </a:fillRef>
-          <a:effectRef idx="2">
-            <a:schemeClr val="accent1"/>
-          </a:effectRef>
-          <a:fontRef idx="minor">
-            <a:schemeClr val="lt1"/>
-          </a:fontRef>
-        </p:style>
-        <p:txBody>
-          <a:bodyPr rtlCol="0" anchor="ctr"/>
-          <a:lstStyle/>
-          <a:p>
-            <a:pPr algn="ctr"/>
-          </a:p>
-        </p:txBody>
-      </p:sp>
-      <p:pic>
-        <p:nvPicPr>
-          <p:cNvPr id="6" name="Picture 5" descr="shipping-container-crane.jpg"/>
-          <p:cNvPicPr>
-            <a:picLocks noChangeAspect="1"/>
-          </p:cNvPicPr>
-          <p:nvPr/>
-        </p:nvPicPr>
-        <p:blipFill>
-          <a:blip r:embed="rId2"/>
-          <a:stretch>
-            <a:fillRect/>
-          </a:stretch>
-        </p:blipFill>
-        <p:spPr>
-          <a:xfrm>
-            <a:off x="5870301" y="1646965"/>
-            <a:ext cx="5864193" cy="3911541"/>
-          </a:xfrm>
-          <a:prstGeom prst="rect">
-            <a:avLst/>
-          </a:prstGeom>
-        </p:spPr>
-      </p:pic>
-      <p:sp>
-        <p:nvSpPr>
-          <p:cNvPr id="7" name="TextBox 6"/>
+          <p:cNvPr id="5" name="TextBox 4"/>
           <p:cNvSpPr txBox="1"/>
           <p:nvPr/>
         </p:nvSpPr>
         <p:spPr>
           <a:xfrm>
-            <a:off x="5870301" y="5961888"/>
-            <a:ext cx="5864193" cy="320040"/>
-          </a:xfrm>
-          <a:prstGeom prst="rect">
-            <a:avLst/>
-          </a:prstGeom>
-          <a:noFill/>
-        </p:spPr>
-        <p:txBody>
-          <a:bodyPr wrap="square">
-            <a:spAutoFit/>
-          </a:bodyPr>
-          <a:lstStyle/>
-          <a:p>
-            <a:pPr algn="ctr"/>
-            <a:r>
-              <a:rPr sz="1100" b="0" i="1">
-                <a:solidFill>
-                  <a:srgbClr val="666666"/>
-                </a:solidFill>
-                <a:latin typeface="Calibri"/>
-              </a:rPr>
-              <a:t>Foto: Wolfgang Weiser · Pexels</a:t>
-            </a:r>
-          </a:p>
-        </p:txBody>
-      </p:sp>
-      <p:sp>
-        <p:nvSpPr>
-          <p:cNvPr id="8" name="TextBox 7"/>
-          <p:cNvSpPr txBox="1"/>
-          <p:nvPr/>
-        </p:nvSpPr>
-        <p:spPr>
-          <a:xfrm>
-            <a:off x="457200" y="1353312"/>
-            <a:ext cx="5093061" cy="5047488"/>
+            <a:off x="457200" y="1170432"/>
+            <a:ext cx="11277295" cy="5230368"/>
           </a:xfrm>
           <a:prstGeom prst="rect">
             <a:avLst/>
@@ -9139,11 +8623,113 @@
               <a:t> que el código: así cambiar una línea no reinstala nada (es la caché por capas).</a:t>
             </a:r>
           </a:p>
-        </p:txBody>
-      </p:sp>
-      <p:sp>
-        <p:nvSpPr>
-          <p:cNvPr id="9" name="TextBox 8"/>
+          <a:p>
+            <a:pPr>
+              <a:spcAft>
+                <a:spcPts val="800"/>
+              </a:spcAft>
+            </a:pPr>
+            <a:r>
+              <a:rPr sz="2000" b="0" i="0">
+                <a:solidFill>
+                  <a:srgbClr val="333333"/>
+                </a:solidFill>
+                <a:latin typeface="Calibri"/>
+              </a:rPr>
+              <a:t>–   </a:t>
+            </a:r>
+            <a:r>
+              <a:rPr sz="2000" b="1" i="0">
+                <a:solidFill>
+                  <a:srgbClr val="333333"/>
+                </a:solidFill>
+                <a:latin typeface="Calibri"/>
+              </a:rPr>
+              <a:t>Nunca un secreto en la imagen:</a:t>
+            </a:r>
+            <a:r>
+              <a:rPr sz="2000" b="0" i="0">
+                <a:solidFill>
+                  <a:srgbClr val="333333"/>
+                </a:solidFill>
+                <a:latin typeface="Calibri"/>
+              </a:rPr>
+              <a:t> las capas se acumulan y «docker history» las lee aunque el archivo se borre después.</a:t>
+            </a:r>
+          </a:p>
+          <a:p>
+            <a:pPr>
+              <a:spcAft>
+                <a:spcPts val="800"/>
+              </a:spcAft>
+            </a:pPr>
+            <a:r>
+              <a:rPr sz="2000" b="0" i="0">
+                <a:solidFill>
+                  <a:srgbClr val="333333"/>
+                </a:solidFill>
+                <a:latin typeface="Calibri"/>
+              </a:rPr>
+              <a:t>–   Si haces «COPY . .», va con un </a:t>
+            </a:r>
+            <a:r>
+              <a:rPr sz="2000" b="1" i="0">
+                <a:solidFill>
+                  <a:srgbClr val="333333"/>
+                </a:solidFill>
+                <a:latin typeface="Calibri"/>
+              </a:rPr>
+              <a:t>«.dockerignore»</a:t>
+            </a:r>
+            <a:r>
+              <a:rPr sz="2000" b="0" i="0">
+                <a:solidFill>
+                  <a:srgbClr val="333333"/>
+                </a:solidFill>
+                <a:latin typeface="Calibri"/>
+              </a:rPr>
+              <a:t> al lado («.env», «node_modules», «.git») — y se menciona en la entrega.</a:t>
+            </a:r>
+          </a:p>
+          <a:p>
+            <a:pPr>
+              <a:spcAft>
+                <a:spcPts val="800"/>
+              </a:spcAft>
+            </a:pPr>
+            <a:r>
+              <a:rPr sz="2000" b="0" i="0">
+                <a:solidFill>
+                  <a:srgbClr val="333333"/>
+                </a:solidFill>
+                <a:latin typeface="Calibri"/>
+              </a:rPr>
+              <a:t>–   «EXPOSE» </a:t>
+            </a:r>
+            <a:r>
+              <a:rPr sz="2000" b="1" i="0">
+                <a:solidFill>
+                  <a:srgbClr val="333333"/>
+                </a:solidFill>
+                <a:latin typeface="Calibri"/>
+              </a:rPr>
+              <a:t>documenta</a:t>
+            </a:r>
+            <a:r>
+              <a:rPr sz="2000" b="0" i="0">
+                <a:solidFill>
+                  <a:srgbClr val="333333"/>
+                </a:solidFill>
+                <a:latin typeface="Calibri"/>
+              </a:rPr>
+              <a:t>, no publica. Publicar es el «-p» del «docker run».</a:t>
+            </a:r>
+          </a:p>
+        </p:txBody>
+      </p:sp>
+      <p:sp>
+        <p:nvSpPr>
+          <p:cNvPr id="6" name="TextBox 5"/>
           <p:cNvSpPr txBox="1"/>
           <p:nvPr/>
         </p:nvSpPr>
@@ -10723,118 +10309,14 @@
       </p:sp>
       <p:sp>
         <p:nvSpPr>
-          <p:cNvPr id="5" name="Rounded Rectangle 4"/>
-          <p:cNvSpPr/>
-          <p:nvPr/>
-        </p:nvSpPr>
-        <p:spPr>
-          <a:xfrm>
-            <a:off x="5797149" y="1573813"/>
-            <a:ext cx="6010497" cy="4057845"/>
-          </a:xfrm>
-          <a:prstGeom prst="roundRect">
-            <a:avLst>
-              <a:gd name="adj" fmla="val 4000"/>
-            </a:avLst>
-          </a:prstGeom>
-          <a:solidFill>
-            <a:srgbClr val="E8EEF4"/>
-          </a:solidFill>
-          <a:ln>
-            <a:noFill/>
-          </a:ln>
-        </p:spPr>
-        <p:style>
-          <a:lnRef idx="1">
-            <a:schemeClr val="accent1"/>
-          </a:lnRef>
-          <a:fillRef idx="3">
-            <a:schemeClr val="accent1"/>
-          </a:fillRef>
-          <a:effectRef idx="2">
-            <a:schemeClr val="accent1"/>
-          </a:effectRef>
-          <a:fontRef idx="minor">
-            <a:schemeClr val="lt1"/>
-          </a:fontRef>
-        </p:style>
-        <p:txBody>
-          <a:bodyPr rtlCol="0" anchor="ctr"/>
-          <a:lstStyle/>
-          <a:p>
-            <a:pPr algn="ctr"/>
-          </a:p>
-        </p:txBody>
-      </p:sp>
-      <p:pic>
-        <p:nvPicPr>
-          <p:cNvPr id="6" name="Picture 5" descr="developer-running-code-terminal.jpg"/>
-          <p:cNvPicPr>
-            <a:picLocks noChangeAspect="1"/>
-          </p:cNvPicPr>
-          <p:nvPr/>
-        </p:nvPicPr>
-        <p:blipFill>
-          <a:blip r:embed="rId2"/>
-          <a:stretch>
-            <a:fillRect/>
-          </a:stretch>
-        </p:blipFill>
-        <p:spPr>
-          <a:xfrm>
-            <a:off x="5870301" y="1646965"/>
-            <a:ext cx="5864193" cy="3911541"/>
-          </a:xfrm>
-          <a:prstGeom prst="rect">
-            <a:avLst/>
-          </a:prstGeom>
-        </p:spPr>
-      </p:pic>
-      <p:sp>
-        <p:nvSpPr>
-          <p:cNvPr id="7" name="TextBox 6"/>
+          <p:cNvPr id="5" name="TextBox 4"/>
           <p:cNvSpPr txBox="1"/>
           <p:nvPr/>
         </p:nvSpPr>
         <p:spPr>
           <a:xfrm>
-            <a:off x="5870301" y="5961888"/>
-            <a:ext cx="5864193" cy="320040"/>
-          </a:xfrm>
-          <a:prstGeom prst="rect">
-            <a:avLst/>
-          </a:prstGeom>
-          <a:noFill/>
-        </p:spPr>
-        <p:txBody>
-          <a:bodyPr wrap="square">
-            <a:spAutoFit/>
-          </a:bodyPr>
-          <a:lstStyle/>
-          <a:p>
-            <a:pPr algn="ctr"/>
-            <a:r>
-              <a:rPr sz="1100" b="0" i="1">
-                <a:solidFill>
-                  <a:srgbClr val="666666"/>
-                </a:solidFill>
-                <a:latin typeface="Calibri"/>
-              </a:rPr>
-              <a:t>Foto: Al Nahian · Pexels</a:t>
-            </a:r>
-          </a:p>
-        </p:txBody>
-      </p:sp>
-      <p:sp>
-        <p:nvSpPr>
-          <p:cNvPr id="8" name="TextBox 7"/>
-          <p:cNvSpPr txBox="1"/>
-          <p:nvPr/>
-        </p:nvSpPr>
-        <p:spPr>
-          <a:xfrm>
-            <a:off x="457200" y="1353312"/>
-            <a:ext cx="5093061" cy="5047488"/>
+            <a:off x="457200" y="1170432"/>
+            <a:ext cx="11277295" cy="5230368"/>
           </a:xfrm>
           <a:prstGeom prst="rect">
             <a:avLst/>
@@ -10895,7 +10377,7 @@
                 </a:solidFill>
                 <a:latin typeface="Calibri"/>
               </a:rPr>
-              <a:t> etiqueta;</a:t>
+              <a:t> etiqueta; sin etiqueta vale la mitad.</a:t>
             </a:r>
           </a:p>
           <a:p>
@@ -11033,14 +10515,136 @@
                 </a:solidFill>
                 <a:latin typeface="Calibri"/>
               </a:rPr>
-              <a:t> y la petición muere sin respuesta:</a:t>
-            </a:r>
-          </a:p>
-        </p:txBody>
-      </p:sp>
-      <p:sp>
-        <p:nvSpPr>
-          <p:cNvPr id="9" name="TextBox 8"/>
+              <a:t> y la petición muere sin respuesta: el síntoma no dice la causa.</a:t>
+            </a:r>
+          </a:p>
+          <a:p>
+            <a:pPr>
+              <a:spcAft>
+                <a:spcPts val="800"/>
+              </a:spcAft>
+            </a:pPr>
+            <a:r>
+              <a:rPr sz="2000" b="0" i="0">
+                <a:solidFill>
+                  <a:srgbClr val="333333"/>
+                </a:solidFill>
+                <a:latin typeface="Calibri"/>
+              </a:rPr>
+              <a:t>–   </a:t>
+            </a:r>
+            <a:r>
+              <a:rPr sz="2000" b="1" i="0">
+                <a:solidFill>
+                  <a:srgbClr val="333333"/>
+                </a:solidFill>
+                <a:latin typeface="Calibri"/>
+              </a:rPr>
+              <a:t>Verificar:</a:t>
+            </a:r>
+            <a:r>
+              <a:rPr sz="2000" b="0" i="0">
+                <a:solidFill>
+                  <a:srgbClr val="333333"/>
+                </a:solidFill>
+                <a:latin typeface="Calibri"/>
+              </a:rPr>
+              <a:t> el contrato de salud son </a:t>
+            </a:r>
+            <a:r>
+              <a:rPr sz="2000" b="1" i="0">
+                <a:solidFill>
+                  <a:srgbClr val="333333"/>
+                </a:solidFill>
+                <a:latin typeface="Calibri"/>
+              </a:rPr>
+              <a:t>tres</a:t>
+            </a:r>
+            <a:r>
+              <a:rPr sz="2000" b="0" i="0">
+                <a:solidFill>
+                  <a:srgbClr val="333333"/>
+                </a:solidFill>
+                <a:latin typeface="Calibri"/>
+              </a:rPr>
+              <a:t> datos — </a:t>
+            </a:r>
+            <a:r>
+              <a:rPr sz="2000" b="1" i="0">
+                <a:solidFill>
+                  <a:srgbClr val="333333"/>
+                </a:solidFill>
+                <a:latin typeface="Calibri"/>
+              </a:rPr>
+              <a:t>ruta</a:t>
+            </a:r>
+            <a:r>
+              <a:rPr sz="2000" b="0" i="0">
+                <a:solidFill>
+                  <a:srgbClr val="333333"/>
+                </a:solidFill>
+                <a:latin typeface="Calibri"/>
+              </a:rPr>
+              <a:t> («GET /health»), </a:t>
+            </a:r>
+            <a:r>
+              <a:rPr sz="2000" b="1" i="0">
+                <a:solidFill>
+                  <a:srgbClr val="333333"/>
+                </a:solidFill>
+                <a:latin typeface="Calibri"/>
+              </a:rPr>
+              <a:t>código</a:t>
+            </a:r>
+            <a:r>
+              <a:rPr sz="2000" b="0" i="0">
+                <a:solidFill>
+                  <a:srgbClr val="333333"/>
+                </a:solidFill>
+                <a:latin typeface="Calibri"/>
+              </a:rPr>
+              <a:t> («200» vivo · «503» sin base) y </a:t>
+            </a:r>
+            <a:r>
+              <a:rPr sz="2000" b="1" i="0">
+                <a:solidFill>
+                  <a:srgbClr val="333333"/>
+                </a:solidFill>
+                <a:latin typeface="Calibri"/>
+              </a:rPr>
+              <a:t>cuerpo</a:t>
+            </a:r>
+            <a:r>
+              <a:rPr sz="2000" b="0" i="0">
+                <a:solidFill>
+                  <a:srgbClr val="333333"/>
+                </a:solidFill>
+                <a:latin typeface="Calibri"/>
+              </a:rPr>
+              <a:t> con su formato.</a:t>
+            </a:r>
+          </a:p>
+          <a:p>
+            <a:pPr>
+              <a:spcAft>
+                <a:spcPts val="800"/>
+              </a:spcAft>
+            </a:pPr>
+            <a:r>
+              <a:rPr sz="2000" b="0" i="0">
+                <a:solidFill>
+                  <a:srgbClr val="333333"/>
+                </a:solidFill>
+                <a:latin typeface="Calibri"/>
+              </a:rPr>
+              <a:t>–   Un «200» con cuerpo vacío no distingue «vivo» de «vivo pero roto»: el cuerpo lleva al menos un campo verificable.</a:t>
+            </a:r>
+          </a:p>
+        </p:txBody>
+      </p:sp>
+      <p:sp>
+        <p:nvSpPr>
+          <p:cNvPr id="6" name="TextBox 5"/>
           <p:cNvSpPr txBox="1"/>
           <p:nvPr/>
         </p:nvSpPr>
@@ -14592,118 +14196,14 @@
       </p:sp>
       <p:sp>
         <p:nvSpPr>
-          <p:cNvPr id="5" name="Rounded Rectangle 4"/>
-          <p:cNvSpPr/>
-          <p:nvPr/>
-        </p:nvSpPr>
-        <p:spPr>
-          <a:xfrm>
-            <a:off x="5797149" y="1573813"/>
-            <a:ext cx="6010497" cy="4057845"/>
-          </a:xfrm>
-          <a:prstGeom prst="roundRect">
-            <a:avLst>
-              <a:gd name="adj" fmla="val 4000"/>
-            </a:avLst>
-          </a:prstGeom>
-          <a:solidFill>
-            <a:srgbClr val="E8EEF4"/>
-          </a:solidFill>
-          <a:ln>
-            <a:noFill/>
-          </a:ln>
-        </p:spPr>
-        <p:style>
-          <a:lnRef idx="1">
-            <a:schemeClr val="accent1"/>
-          </a:lnRef>
-          <a:fillRef idx="3">
-            <a:schemeClr val="accent1"/>
-          </a:fillRef>
-          <a:effectRef idx="2">
-            <a:schemeClr val="accent1"/>
-          </a:effectRef>
-          <a:fontRef idx="minor">
-            <a:schemeClr val="lt1"/>
-          </a:fontRef>
-        </p:style>
-        <p:txBody>
-          <a:bodyPr rtlCol="0" anchor="ctr"/>
-          <a:lstStyle/>
-          <a:p>
-            <a:pPr algn="ctr"/>
-          </a:p>
-        </p:txBody>
-      </p:sp>
-      <p:pic>
-        <p:nvPicPr>
-          <p:cNvPr id="6" name="Picture 5" descr="terminal-command-line-laptop.jpg"/>
-          <p:cNvPicPr>
-            <a:picLocks noChangeAspect="1"/>
-          </p:cNvPicPr>
-          <p:nvPr/>
-        </p:nvPicPr>
-        <p:blipFill>
-          <a:blip r:embed="rId2"/>
-          <a:stretch>
-            <a:fillRect/>
-          </a:stretch>
-        </p:blipFill>
-        <p:spPr>
-          <a:xfrm>
-            <a:off x="5870301" y="1646965"/>
-            <a:ext cx="5864193" cy="3911541"/>
-          </a:xfrm>
-          <a:prstGeom prst="rect">
-            <a:avLst/>
-          </a:prstGeom>
-        </p:spPr>
-      </p:pic>
-      <p:sp>
-        <p:nvSpPr>
-          <p:cNvPr id="7" name="TextBox 6"/>
+          <p:cNvPr id="5" name="TextBox 4"/>
           <p:cNvSpPr txBox="1"/>
           <p:nvPr/>
         </p:nvSpPr>
         <p:spPr>
           <a:xfrm>
-            <a:off x="5870301" y="5961888"/>
-            <a:ext cx="5864193" cy="320040"/>
-          </a:xfrm>
-          <a:prstGeom prst="rect">
-            <a:avLst/>
-          </a:prstGeom>
-          <a:noFill/>
-        </p:spPr>
-        <p:txBody>
-          <a:bodyPr wrap="square">
-            <a:spAutoFit/>
-          </a:bodyPr>
-          <a:lstStyle/>
-          <a:p>
-            <a:pPr algn="ctr"/>
-            <a:r>
-              <a:rPr sz="1100" b="0" i="1">
-                <a:solidFill>
-                  <a:srgbClr val="666666"/>
-                </a:solidFill>
-                <a:latin typeface="Calibri"/>
-              </a:rPr>
-              <a:t>Foto: Rafael Minguet Delgado · Pexels</a:t>
-            </a:r>
-          </a:p>
-        </p:txBody>
-      </p:sp>
-      <p:sp>
-        <p:nvSpPr>
-          <p:cNvPr id="8" name="TextBox 7"/>
-          <p:cNvSpPr txBox="1"/>
-          <p:nvPr/>
-        </p:nvSpPr>
-        <p:spPr>
-          <a:xfrm>
-            <a:off x="457200" y="1353312"/>
-            <a:ext cx="5093061" cy="5047488"/>
+            <a:off x="457200" y="1170432"/>
+            <a:ext cx="11277295" cy="5230368"/>
           </a:xfrm>
           <a:prstGeom prst="rect">
             <a:avLst/>
@@ -14767,7 +14267,7 @@
       </p:sp>
       <p:sp>
         <p:nvSpPr>
-          <p:cNvPr id="9" name="TextBox 8"/>
+          <p:cNvPr id="6" name="TextBox 5"/>
           <p:cNvSpPr txBox="1"/>
           <p:nvPr/>
         </p:nvSpPr>
@@ -15180,118 +14680,14 @@
       </p:sp>
       <p:sp>
         <p:nvSpPr>
-          <p:cNvPr id="5" name="Rounded Rectangle 4"/>
-          <p:cNvSpPr/>
-          <p:nvPr/>
-        </p:nvSpPr>
-        <p:spPr>
-          <a:xfrm>
-            <a:off x="5797149" y="1573813"/>
-            <a:ext cx="6010497" cy="4057845"/>
-          </a:xfrm>
-          <a:prstGeom prst="roundRect">
-            <a:avLst>
-              <a:gd name="adj" fmla="val 4000"/>
-            </a:avLst>
-          </a:prstGeom>
-          <a:solidFill>
-            <a:srgbClr val="E8EEF4"/>
-          </a:solidFill>
-          <a:ln>
-            <a:noFill/>
-          </a:ln>
-        </p:spPr>
-        <p:style>
-          <a:lnRef idx="1">
-            <a:schemeClr val="accent1"/>
-          </a:lnRef>
-          <a:fillRef idx="3">
-            <a:schemeClr val="accent1"/>
-          </a:fillRef>
-          <a:effectRef idx="2">
-            <a:schemeClr val="accent1"/>
-          </a:effectRef>
-          <a:fontRef idx="minor">
-            <a:schemeClr val="lt1"/>
-          </a:fontRef>
-        </p:style>
-        <p:txBody>
-          <a:bodyPr rtlCol="0" anchor="ctr"/>
-          <a:lstStyle/>
-          <a:p>
-            <a:pPr algn="ctr"/>
-          </a:p>
-        </p:txBody>
-      </p:sp>
-      <p:pic>
-        <p:nvPicPr>
-          <p:cNvPr id="6" name="Picture 5" descr="students-learning-laptops-classroom.jpg"/>
-          <p:cNvPicPr>
-            <a:picLocks noChangeAspect="1"/>
-          </p:cNvPicPr>
-          <p:nvPr/>
-        </p:nvPicPr>
-        <p:blipFill>
-          <a:blip r:embed="rId2"/>
-          <a:stretch>
-            <a:fillRect/>
-          </a:stretch>
-        </p:blipFill>
-        <p:spPr>
-          <a:xfrm>
-            <a:off x="5870301" y="1646965"/>
-            <a:ext cx="5864193" cy="3911541"/>
-          </a:xfrm>
-          <a:prstGeom prst="rect">
-            <a:avLst/>
-          </a:prstGeom>
-        </p:spPr>
-      </p:pic>
-      <p:sp>
-        <p:nvSpPr>
-          <p:cNvPr id="7" name="TextBox 6"/>
+          <p:cNvPr id="5" name="TextBox 4"/>
           <p:cNvSpPr txBox="1"/>
           <p:nvPr/>
         </p:nvSpPr>
         <p:spPr>
           <a:xfrm>
-            <a:off x="5870301" y="5961888"/>
-            <a:ext cx="5864193" cy="320040"/>
-          </a:xfrm>
-          <a:prstGeom prst="rect">
-            <a:avLst/>
-          </a:prstGeom>
-          <a:noFill/>
-        </p:spPr>
-        <p:txBody>
-          <a:bodyPr wrap="square">
-            <a:spAutoFit/>
-          </a:bodyPr>
-          <a:lstStyle/>
-          <a:p>
-            <a:pPr algn="ctr"/>
-            <a:r>
-              <a:rPr sz="1100" b="0" i="1">
-                <a:solidFill>
-                  <a:srgbClr val="666666"/>
-                </a:solidFill>
-                <a:latin typeface="Calibri"/>
-              </a:rPr>
-              <a:t>Foto: Mikhail Nilov · Pexels</a:t>
-            </a:r>
-          </a:p>
-        </p:txBody>
-      </p:sp>
-      <p:sp>
-        <p:nvSpPr>
-          <p:cNvPr id="8" name="TextBox 7"/>
-          <p:cNvSpPr txBox="1"/>
-          <p:nvPr/>
-        </p:nvSpPr>
-        <p:spPr>
-          <a:xfrm>
-            <a:off x="457200" y="1353312"/>
-            <a:ext cx="5093061" cy="5047488"/>
+            <a:off x="457200" y="1170432"/>
+            <a:ext cx="11277295" cy="5230368"/>
           </a:xfrm>
           <a:prstGeom prst="rect">
             <a:avLst/>
@@ -15389,7 +14785,7 @@
       </p:sp>
       <p:sp>
         <p:nvSpPr>
-          <p:cNvPr id="9" name="TextBox 8"/>
+          <p:cNvPr id="6" name="TextBox 5"/>
           <p:cNvSpPr txBox="1"/>
           <p:nvPr/>
         </p:nvSpPr>
@@ -15570,118 +14966,14 @@
       </p:sp>
       <p:sp>
         <p:nvSpPr>
-          <p:cNvPr id="5" name="Rounded Rectangle 4"/>
-          <p:cNvSpPr/>
-          <p:nvPr/>
-        </p:nvSpPr>
-        <p:spPr>
-          <a:xfrm>
-            <a:off x="5797149" y="1717298"/>
-            <a:ext cx="6010497" cy="3770874"/>
-          </a:xfrm>
-          <a:prstGeom prst="roundRect">
-            <a:avLst>
-              <a:gd name="adj" fmla="val 4000"/>
-            </a:avLst>
-          </a:prstGeom>
-          <a:solidFill>
-            <a:srgbClr val="E8EEF4"/>
-          </a:solidFill>
-          <a:ln>
-            <a:noFill/>
-          </a:ln>
-        </p:spPr>
-        <p:style>
-          <a:lnRef idx="1">
-            <a:schemeClr val="accent1"/>
-          </a:lnRef>
-          <a:fillRef idx="3">
-            <a:schemeClr val="accent1"/>
-          </a:fillRef>
-          <a:effectRef idx="2">
-            <a:schemeClr val="accent1"/>
-          </a:effectRef>
-          <a:fontRef idx="minor">
-            <a:schemeClr val="lt1"/>
-          </a:fontRef>
-        </p:style>
-        <p:txBody>
-          <a:bodyPr rtlCol="0" anchor="ctr"/>
-          <a:lstStyle/>
-          <a:p>
-            <a:pPr algn="ctr"/>
-          </a:p>
-        </p:txBody>
-      </p:sp>
-      <p:pic>
-        <p:nvPicPr>
-          <p:cNvPr id="6" name="Picture 5" descr="server-rack-cables.jpg"/>
-          <p:cNvPicPr>
-            <a:picLocks noChangeAspect="1"/>
-          </p:cNvPicPr>
-          <p:nvPr/>
-        </p:nvPicPr>
-        <p:blipFill>
-          <a:blip r:embed="rId2"/>
-          <a:stretch>
-            <a:fillRect/>
-          </a:stretch>
-        </p:blipFill>
-        <p:spPr>
-          <a:xfrm>
-            <a:off x="5870301" y="1790450"/>
-            <a:ext cx="5864193" cy="3624570"/>
-          </a:xfrm>
-          <a:prstGeom prst="rect">
-            <a:avLst/>
-          </a:prstGeom>
-        </p:spPr>
-      </p:pic>
-      <p:sp>
-        <p:nvSpPr>
-          <p:cNvPr id="7" name="TextBox 6"/>
+          <p:cNvPr id="5" name="TextBox 4"/>
           <p:cNvSpPr txBox="1"/>
           <p:nvPr/>
         </p:nvSpPr>
         <p:spPr>
           <a:xfrm>
-            <a:off x="5870301" y="5961888"/>
-            <a:ext cx="5864193" cy="320040"/>
-          </a:xfrm>
-          <a:prstGeom prst="rect">
-            <a:avLst/>
-          </a:prstGeom>
-          <a:noFill/>
-        </p:spPr>
-        <p:txBody>
-          <a:bodyPr wrap="square">
-            <a:spAutoFit/>
-          </a:bodyPr>
-          <a:lstStyle/>
-          <a:p>
-            <a:pPr algn="ctr"/>
-            <a:r>
-              <a:rPr sz="1100" b="0" i="1">
-                <a:solidFill>
-                  <a:srgbClr val="666666"/>
-                </a:solidFill>
-                <a:latin typeface="Calibri"/>
-              </a:rPr>
-              <a:t>Foto: Sergei Starostin · Pexels</a:t>
-            </a:r>
-          </a:p>
-        </p:txBody>
-      </p:sp>
-      <p:sp>
-        <p:nvSpPr>
-          <p:cNvPr id="8" name="TextBox 7"/>
-          <p:cNvSpPr txBox="1"/>
-          <p:nvPr/>
-        </p:nvSpPr>
-        <p:spPr>
-          <a:xfrm>
-            <a:off x="457200" y="1353312"/>
-            <a:ext cx="5093061" cy="5047488"/>
+            <a:off x="457200" y="1170432"/>
+            <a:ext cx="11277295" cy="5230368"/>
           </a:xfrm>
           <a:prstGeom prst="rect">
             <a:avLst/>
@@ -15706,7 +14998,7 @@
                 </a:solidFill>
                 <a:latin typeface="Calibri"/>
               </a:rPr>
-              <a:t>–   La virtualizacion es la tecnica que permite ejecutar varias maquinas logicas sobre un mismo hardware fisico, y el hipervisor es el software que la…</a:t>
+              <a:t>–   La virtualizacion es la tecnica que permite ejecutar varias maquinas logicas sobre un mismo hardware fisico, y el hipervisor es el software que la hace posible.</a:t>
             </a:r>
           </a:p>
           <a:p>
@@ -15729,7 +15021,7 @@
       </p:sp>
       <p:sp>
         <p:nvSpPr>
-          <p:cNvPr id="9" name="TextBox 8"/>
+          <p:cNvPr id="6" name="TextBox 5"/>
           <p:cNvSpPr txBox="1"/>
           <p:nvPr/>
         </p:nvSpPr>
@@ -18261,118 +17553,14 @@
       </p:sp>
       <p:sp>
         <p:nvSpPr>
-          <p:cNvPr id="5" name="Rounded Rectangle 4"/>
-          <p:cNvSpPr/>
-          <p:nvPr/>
-        </p:nvSpPr>
-        <p:spPr>
-          <a:xfrm>
-            <a:off x="5797149" y="1573813"/>
-            <a:ext cx="6010497" cy="4057845"/>
-          </a:xfrm>
-          <a:prstGeom prst="roundRect">
-            <a:avLst>
-              <a:gd name="adj" fmla="val 4000"/>
-            </a:avLst>
-          </a:prstGeom>
-          <a:solidFill>
-            <a:srgbClr val="E8EEF4"/>
-          </a:solidFill>
-          <a:ln>
-            <a:noFill/>
-          </a:ln>
-        </p:spPr>
-        <p:style>
-          <a:lnRef idx="1">
-            <a:schemeClr val="accent1"/>
-          </a:lnRef>
-          <a:fillRef idx="3">
-            <a:schemeClr val="accent1"/>
-          </a:fillRef>
-          <a:effectRef idx="2">
-            <a:schemeClr val="accent1"/>
-          </a:effectRef>
-          <a:fontRef idx="minor">
-            <a:schemeClr val="lt1"/>
-          </a:fontRef>
-        </p:style>
-        <p:txBody>
-          <a:bodyPr rtlCol="0" anchor="ctr"/>
-          <a:lstStyle/>
-          <a:p>
-            <a:pPr algn="ctr"/>
-          </a:p>
-        </p:txBody>
-      </p:sp>
-      <p:pic>
-        <p:nvPicPr>
-          <p:cNvPr id="6" name="Picture 5" descr="shipping-containers-port.jpg"/>
-          <p:cNvPicPr>
-            <a:picLocks noChangeAspect="1"/>
-          </p:cNvPicPr>
-          <p:nvPr/>
-        </p:nvPicPr>
-        <p:blipFill>
-          <a:blip r:embed="rId2"/>
-          <a:stretch>
-            <a:fillRect/>
-          </a:stretch>
-        </p:blipFill>
-        <p:spPr>
-          <a:xfrm>
-            <a:off x="5870301" y="1646965"/>
-            <a:ext cx="5864193" cy="3911541"/>
-          </a:xfrm>
-          <a:prstGeom prst="rect">
-            <a:avLst/>
-          </a:prstGeom>
-        </p:spPr>
-      </p:pic>
-      <p:sp>
-        <p:nvSpPr>
-          <p:cNvPr id="7" name="TextBox 6"/>
+          <p:cNvPr id="5" name="TextBox 4"/>
           <p:cNvSpPr txBox="1"/>
           <p:nvPr/>
         </p:nvSpPr>
         <p:spPr>
           <a:xfrm>
-            <a:off x="5870301" y="5961888"/>
-            <a:ext cx="5864193" cy="320040"/>
-          </a:xfrm>
-          <a:prstGeom prst="rect">
-            <a:avLst/>
-          </a:prstGeom>
-          <a:noFill/>
-        </p:spPr>
-        <p:txBody>
-          <a:bodyPr wrap="square">
-            <a:spAutoFit/>
-          </a:bodyPr>
-          <a:lstStyle/>
-          <a:p>
-            <a:pPr algn="ctr"/>
-            <a:r>
-              <a:rPr sz="1100" b="0" i="1">
-                <a:solidFill>
-                  <a:srgbClr val="666666"/>
-                </a:solidFill>
-                <a:latin typeface="Calibri"/>
-              </a:rPr>
-              <a:t>Foto: Oleksiy Yeshtokyn,🌻🇺🇦🌻 · Pexels</a:t>
-            </a:r>
-          </a:p>
-        </p:txBody>
-      </p:sp>
-      <p:sp>
-        <p:nvSpPr>
-          <p:cNvPr id="8" name="TextBox 7"/>
-          <p:cNvSpPr txBox="1"/>
-          <p:nvPr/>
-        </p:nvSpPr>
-        <p:spPr>
-          <a:xfrm>
-            <a:off x="457200" y="1353312"/>
-            <a:ext cx="5093061" cy="5047488"/>
+            <a:off x="457200" y="1170432"/>
+            <a:ext cx="11277295" cy="5230368"/>
           </a:xfrm>
           <a:prstGeom prst="rect">
             <a:avLst/>
@@ -18466,11 +17654,27 @@
               <a:t> servicio (API stub o front estático).</a:t>
             </a:r>
           </a:p>
-        </p:txBody>
-      </p:sp>
-      <p:sp>
-        <p:nvSpPr>
-          <p:cNvPr id="9" name="TextBox 8"/>
+          <a:p>
+            <a:pPr>
+              <a:spcAft>
+                <a:spcPts val="800"/>
+              </a:spcAft>
+            </a:pPr>
+            <a:r>
+              <a:rPr sz="2000" b="0" i="0">
+                <a:solidFill>
+                  <a:srgbClr val="333333"/>
+                </a:solidFill>
+                <a:latin typeface="Calibri"/>
+              </a:rPr>
+              <a:t>–   Error común: creer que el contenedor «no tiene sistema operativo»: usa el kernel del anfitrión, por eso una imagen Linux necesita un kernel Linux debajo.</a:t>
+            </a:r>
+          </a:p>
+        </p:txBody>
+      </p:sp>
+      <p:sp>
+        <p:nvSpPr>
+          <p:cNvPr id="6" name="TextBox 5"/>
           <p:cNvSpPr txBox="1"/>
           <p:nvPr/>
         </p:nvSpPr>

--- a/Arquitectura de Sistemas Computacionales/Clases/Clase 3 - Virtualizacion y contenedores/Presentacion.pptx
+++ b/Arquitectura de Sistemas Computacionales/Clases/Clase 3 - Virtualizacion y contenedores/Presentacion.pptx
@@ -522,6 +522,24 @@
           <a:lstStyle/>
           <a:p>
             <a:r>
+              <a:t>TEXTO COMPLETO DE LA LÁMINA (se proyecta resumido):</a:t>
+            </a:r>
+          </a:p>
+          <a:p/>
+          <a:p>
+            <a:r>
+              <a:t>La virtualizacion es la tecnica que permite ejecutar varias maquinas logicas sobre un mismo hardware fisico, y el hipervisor es el software que la hace posible.</a:t>
+            </a:r>
+          </a:p>
+          <a:p/>
+          <a:p>
+            <a:r>
+              <a:t>Un contenedor es un proceso aislado que comparte el kernel del anfitrion: no trae sistema operativo propio.</a:t>
+            </a:r>
+          </a:p>
+          <a:p/>
+          <a:p>
+            <a:r>
               <a:t>DESARROLLO (para explicarlo, no se proyecta):</a:t>
             </a:r>
           </a:p>
@@ -595,6 +613,440 @@
           <a:p>
             <a:r>
               <a:t>(No se proyecta) Conviene decir desde el minuto uno por que esto importa para la arquitectura y no solo para la operacion: el contenedor es la unidad de despliegue con la que se razona en todos los diagramas siguientes, y sin entender que es exactamente, el nivel de contenedores del modelo C4 que se dibuja en la Clase 4 queda en pura metafora.</a:t>
+            </a:r>
+          </a:p>
+        </p:txBody>
+      </p:sp>
+      <p:sp>
+        <p:nvSpPr>
+          <p:cNvPr id="4" name="Slide Number Placeholder 3"/>
+          <p:cNvSpPr>
+            <a:spLocks noGrp="1"/>
+          </p:cNvSpPr>
+          <p:nvPr>
+            <p:ph type="sldNum" idx="5" sz="quarter"/>
+          </p:nvPr>
+        </p:nvSpPr>
+        <p:spPr/>
+      </p:sp>
+    </p:spTree>
+  </p:cSld>
+  <p:clrMapOvr>
+    <a:masterClrMapping/>
+  </p:clrMapOvr>
+</p:notes>
+</file>
+
+<file path=ppt/notesSlides/notesSlide10.xml><?xml version="1.0" encoding="utf-8"?>
+<p:notes xmlns:a="http://schemas.openxmlformats.org/drawingml/2006/main" xmlns:p="http://schemas.openxmlformats.org/presentationml/2006/main" xmlns:r="http://schemas.openxmlformats.org/officeDocument/2006/relationships">
+  <p:cSld>
+    <p:spTree>
+      <p:nvGrpSpPr>
+        <p:cNvPr id="1" name=""/>
+        <p:cNvGrpSpPr/>
+        <p:nvPr/>
+      </p:nvGrpSpPr>
+      <p:grpSpPr>
+        <a:xfrm>
+          <a:off x="0" y="0"/>
+          <a:ext cx="0" cy="0"/>
+          <a:chOff x="0" y="0"/>
+          <a:chExt cx="0" cy="0"/>
+        </a:xfrm>
+      </p:grpSpPr>
+      <p:sp>
+        <p:nvSpPr>
+          <p:cNvPr id="2" name="Slide Image Placeholder 1"/>
+          <p:cNvSpPr>
+            <a:spLocks noGrp="1"/>
+          </p:cNvSpPr>
+          <p:nvPr>
+            <p:ph type="sldImg" idx="2"/>
+          </p:nvPr>
+        </p:nvSpPr>
+        <p:spPr/>
+      </p:sp>
+      <p:sp>
+        <p:nvSpPr>
+          <p:cNvPr id="3" name="Notes Placeholder 2"/>
+          <p:cNvSpPr>
+            <a:spLocks noGrp="1"/>
+          </p:cNvSpPr>
+          <p:nvPr>
+            <p:ph type="body" idx="3" sz="quarter"/>
+          </p:nvPr>
+        </p:nvSpPr>
+        <p:spPr/>
+        <p:txBody>
+          <a:bodyPr/>
+          <a:lstStyle/>
+          <a:p>
+            <a:r>
+              <a:t>TEXTO COMPLETO DE LA LÁMINA (se proyecta resumido):</a:t>
+            </a:r>
+          </a:p>
+          <a:p/>
+          <a:p>
+            <a:r>
+              <a:t>Construir: `docker build -t cloudlite-api:0.1.0 .` — nombre y etiqueta; sin etiqueta vale la mitad.</a:t>
+            </a:r>
+          </a:p>
+          <a:p/>
+          <a:p>
+            <a:r>
+              <a:t>Correr: `docker run -d -p 8081:8080 --name api cloudlite-api:0.1.0`.</a:t>
+            </a:r>
+          </a:p>
+          <a:p/>
+          <a:p>
+            <a:r>
+              <a:t>En `-p 8081:8080` la izquierda es el anfitrión (por donde entras tú) y la derecha es el contenedor (la del `EXPOSE`).</a:t>
+            </a:r>
+          </a:p>
+          <a:p/>
+          <a:p>
+            <a:r>
+              <a:t>Si los inviertes, `docker ps` muestra el contenedor Up y la petición muere sin respuesta: el síntoma no dice la causa.</a:t>
+            </a:r>
+          </a:p>
+          <a:p/>
+          <a:p>
+            <a:r>
+              <a:t>Verificar: el contrato de salud son tres datos — ruta (`GET /health`), código (`200` vivo · `503` sin base) y cuerpo con su formato.</a:t>
+            </a:r>
+          </a:p>
+          <a:p/>
+          <a:p>
+            <a:r>
+              <a:t>Un `200` con cuerpo vacío no distingue «vivo» de «vivo pero roto»: el cuerpo lleva al menos un campo verificable.</a:t>
+            </a:r>
+          </a:p>
+          <a:p/>
+          <a:p>
+            <a:r>
+              <a:t>DESARROLLO (para explicarlo, no se proyecta):</a:t>
+            </a:r>
+          </a:p>
+          <a:p/>
+          <a:p>
+            <a:r>
+              <a:t>El primero es la construccion: docker build -t cloudlite-api:0.1.0.</a:t>
+            </a:r>
+          </a:p>
+          <a:p/>
+          <a:p>
+            <a:r>
+              <a:t>El -t asigna nombre y etiqueta, y el punto final no es adorno sino el contexto de construccion, es decir la carpeta cuyo contenido se le entrega al motor.</a:t>
+            </a:r>
+          </a:p>
+          <a:p/>
+          <a:p>
+            <a:r>
+              <a:t>Nombre Y etiqueta, siempre; la etiqueta suelta no basta y el nombre solo tampoco.</a:t>
+            </a:r>
+          </a:p>
+          <a:p/>
+          <a:p>
+            <a:r>
+              <a:t>El segundo es la ejecucion: docker run -d -p 8081:8080 --name api cloudlite-api:0.1.0.</a:t>
+            </a:r>
+          </a:p>
+          <a:p/>
+          <a:p>
+            <a:r>
+              <a:t>Se lee de derecha a izquierda: el puerto 8080 de dentro queda accesible como 8081 desde fuera.</a:t>
+            </a:r>
+          </a:p>
+          <a:p/>
+          <a:p>
+            <a:r>
+              <a:t>El tercero es la verificacion, y aqui hay un concepto y no solo un comando.</a:t>
+            </a:r>
+          </a:p>
+          <a:p/>
+          <a:p>
+            <a:r>
+              <a:t>Un endpoint de salud es una ruta cuyo unico proposito es que alguien de afuera pueda preguntar si el servicio esta en condiciones de atender</a:t>
+            </a:r>
+          </a:p>
+          <a:p/>
+          <a:p>
+            <a:r>
+              <a:t>Y su contrato tiene TRES datos, los tres exigibles: la ruta (GET /health), el codigo de estado (200 cuando el servicio puede atender, 503 cuando esta arriba pero sin su dependencia, tipicamente la base de datos) y el cuerpo con su formato declarado.</a:t>
+            </a:r>
+          </a:p>
+          <a:p/>
+          <a:p>
+            <a:r>
+              <a:t>El tercero es el que se olvida y el que hace util al endpoint: un 200 con el cuerpo vacio no distingue «vivo» de «vivo pero roto», porque el proceso puede estar respondiendo mientras su conexion a datos esta caida.</a:t>
+            </a:r>
+          </a:p>
+          <a:p/>
+          <a:p>
+            <a:r>
+              <a:t>Se comprueba con curl -i http://localhost:8081/health, y el -i importa: sin el, curl imprime el cuerpo pero esconde el codigo de estado, que es un tercio del contrato.</a:t>
+            </a:r>
+          </a:p>
+          <a:p/>
+          <a:p>
+            <a:r>
+              <a:t>NOTAS:</a:t>
+            </a:r>
+          </a:p>
+          <a:p/>
+          <a:p>
+            <a:r>
+              <a:t>Con el Dockerfile escrito faltan tres comandos, cada uno con su sintaxis precisa.</a:t>
+            </a:r>
+          </a:p>
+          <a:p/>
+          <a:p>
+            <a:r>
+              <a:t>El -d lo manda a segundo plano y el --name le da un nombre estable para no andar copiando identificadores.</a:t>
+            </a:r>
+          </a:p>
+          <a:p/>
+          <a:p>
+            <a:r>
+              <a:t>Por eso el cuerpo lleva al menos un campo verificable, por ejemplo un estado y el nombre del servicio en JSON.</a:t>
+            </a:r>
+          </a:p>
+          <a:p/>
+          <a:p>
+            <a:r>
+              <a:t>(No se proyecta) Un build sin etiqueta funciona y por eso el estudiante no nota el problema: Docker le pone latest en silencio, y a partir de ahi nadie puede decir que version esta corriendo.</a:t>
+            </a:r>
+          </a:p>
+          <a:p/>
+          <a:p>
+            <a:r>
+              <a:t>(No se proyecta) El corazon de la instruccion es el -p, y conviene escribirlo en el tablero con las dos etiquetas encima: el numero de la IZQUIERDA es el del anfitrion, la maquina desde la que uno abre el navegador, y el de la DERECHA es el del contenedor, el mismo del EXPOSE.</a:t>
+            </a:r>
+          </a:p>
+          <a:p/>
+          <a:p>
+            <a:r>
+              <a:t>(No se proyecta) En el ejemplo estan a proposito DISTINTOS, porque cuando se escribe -p 8080:8080 los dos lados se confunden y el estudiante no puede decir cual es cual; en la actividad se le pide justamente explicar la diferencia.</a:t>
+            </a:r>
+          </a:p>
+          <a:p/>
+          <a:p>
+            <a:r>
+              <a:t>(No se proyecta) Y hay que anunciar el sintoma de invertirlos, que es lo que hace perder la tarde: docker ps sigue reportando el contenedor como Up y la peticion simplemente no obtiene respuesta o muere con una conexion reiniciada.</a:t>
+            </a:r>
+          </a:p>
+          <a:p/>
+          <a:p>
+            <a:r>
+              <a:t>(No se proyecta) El sintoma no senala la causa, y el estudiante busca el error en el codigo cuando esta en una linea del comando.</a:t>
+            </a:r>
+          </a:p>
+          <a:p/>
+          <a:p>
+            <a:r>
+              <a:t>(No se proyecta) Este mismo endpoint reaparece en la Clase 7, donde el balanceador lo consulta para decidir si sigue enviandole trafico a una instancia, y en la Clase 8, donde el pipeline lo usa como prueba de humo despues de construir la imagen.</a:t>
+            </a:r>
+          </a:p>
+        </p:txBody>
+      </p:sp>
+      <p:sp>
+        <p:nvSpPr>
+          <p:cNvPr id="4" name="Slide Number Placeholder 3"/>
+          <p:cNvSpPr>
+            <a:spLocks noGrp="1"/>
+          </p:cNvSpPr>
+          <p:nvPr>
+            <p:ph type="sldNum" idx="5" sz="quarter"/>
+          </p:nvPr>
+        </p:nvSpPr>
+        <p:spPr/>
+      </p:sp>
+    </p:spTree>
+  </p:cSld>
+  <p:clrMapOvr>
+    <a:masterClrMapping/>
+  </p:clrMapOvr>
+</p:notes>
+</file>
+
+<file path=ppt/notesSlides/notesSlide11.xml><?xml version="1.0" encoding="utf-8"?>
+<p:notes xmlns:a="http://schemas.openxmlformats.org/drawingml/2006/main" xmlns:p="http://schemas.openxmlformats.org/presentationml/2006/main" xmlns:r="http://schemas.openxmlformats.org/officeDocument/2006/relationships">
+  <p:cSld>
+    <p:spTree>
+      <p:nvGrpSpPr>
+        <p:cNvPr id="1" name=""/>
+        <p:cNvGrpSpPr/>
+        <p:nvPr/>
+      </p:nvGrpSpPr>
+      <p:grpSpPr>
+        <a:xfrm>
+          <a:off x="0" y="0"/>
+          <a:ext cx="0" cy="0"/>
+          <a:chOff x="0" y="0"/>
+          <a:chExt cx="0" cy="0"/>
+        </a:xfrm>
+      </p:grpSpPr>
+      <p:sp>
+        <p:nvSpPr>
+          <p:cNvPr id="2" name="Slide Image Placeholder 1"/>
+          <p:cNvSpPr>
+            <a:spLocks noGrp="1"/>
+          </p:cNvSpPr>
+          <p:nvPr>
+            <p:ph type="sldImg" idx="2"/>
+          </p:nvPr>
+        </p:nvSpPr>
+        <p:spPr/>
+      </p:sp>
+      <p:sp>
+        <p:nvSpPr>
+          <p:cNvPr id="3" name="Notes Placeholder 2"/>
+          <p:cNvSpPr>
+            <a:spLocks noGrp="1"/>
+          </p:cNvSpPr>
+          <p:nvPr>
+            <p:ph type="body" idx="3" sz="quarter"/>
+          </p:nvPr>
+        </p:nvSpPr>
+        <p:spPr/>
+        <p:txBody>
+          <a:bodyPr/>
+          <a:lstStyle/>
+          <a:p>
+            <a:r>
+              <a:t>DESARROLLO (para explicarlo, no se proyecta):</a:t>
+            </a:r>
+          </a:p>
+          <a:p/>
+          <a:p>
+            <a:r>
+              <a:t>Tras ejecutar el contenedor, el comando docker ps lista lo que esta corriendo con siete columnas: identificador del contenedor, imagen de la que proviene, comando en ejecucion, tiempo desde su creacion, estado, puertos publicados y nombre asignado.</a:t>
+            </a:r>
+          </a:p>
+          <a:p/>
+          <a:p>
+            <a:r>
+              <a:t>Todo esto ocurre en Killercoda (killercoda.com, cuenta gratuita y sin tarjeta, escenario Ubuntu), que entrega una terminal Linux real con Docker ya instalado dentro del navegador, sin instalar Docker Desktop</a:t>
+            </a:r>
+          </a:p>
+          <a:p/>
+          <a:p>
+            <a:r>
+              <a:t>Que en equipos institucionales suele estar bloqueado y tiene condiciones de licencia para organizaciones grandes.</a:t>
+            </a:r>
+          </a:p>
+          <a:p/>
+          <a:p>
+            <a:r>
+              <a:t>El primero: la sesion caduca a una hora y al cerrarse se pierde lo que exista solo alli.</a:t>
+            </a:r>
+          </a:p>
+          <a:p/>
+          <a:p>
+            <a:r>
+              <a:t>El segundo: en el plan gratuito solo se trabaja un escenario a la vez, asi que no sirve dejar dos labs abiertos.</a:t>
+            </a:r>
+          </a:p>
+          <a:p/>
+          <a:p>
+            <a:r>
+              <a:t>NOTAS:</a:t>
+            </a:r>
+          </a:p>
+          <a:p/>
+          <a:p>
+            <a:r>
+              <a:t>Segundo ejemplo concreto.</a:t>
+            </a:r>
+          </a:p>
+          <a:p/>
+          <a:p>
+            <a:r>
+              <a:t>La columna de estado es la que hay que mirar: si dice Up seguido de un tiempo, el contenedor vive; si dice Exited con un codigo entre parentesis, murio, y ese codigo es la primera pista del problema.</a:t>
+            </a:r>
+          </a:p>
+          <a:p/>
+          <a:p>
+            <a:r>
+              <a:t>Por eso la alterna es alterna y no la primera opcion.</a:t>
+            </a:r>
+          </a:p>
+          <a:p/>
+          <a:p>
+            <a:r>
+              <a:t>PREGUNTAS FRECUENTES Y CIERRE CONCEPTUAL ()</a:t>
+            </a:r>
+          </a:p>
+          <a:p/>
+          <a:p>
+            <a:r>
+              <a:t>Por que mi contenedor arranca y se muere de inmediato: porque un contenedor vive exactamente lo que vive su proceso principal, y si el comando termina, el contenedor termina.</a:t>
+            </a:r>
+          </a:p>
+          <a:p/>
+          <a:p>
+            <a:r>
+              <a:t>No es un error, es el diseno; un contenedor no es una maquina encendida esperando ordenes, es un proceso envuelto en aislamiento, y la solucion es que el comando quede corriendo en primer plano.</a:t>
+            </a:r>
+          </a:p>
+          <a:p/>
+          <a:p>
+            <a:r>
+              <a:t>Segunda: donde quedan mis datos si borro el contenedor.</a:t>
+            </a:r>
+          </a:p>
+          <a:p/>
+          <a:p>
+            <a:r>
+              <a:t>Tercera: entonces la base de datos tambien va en un contenedor.</a:t>
+            </a:r>
+          </a:p>
+          <a:p/>
+          <a:p>
+            <a:r>
+              <a:t>En el modelo C4, la palabra contenedor significa cualquier cosa que se ejecuta o almacena de forma independiente, como una aplicacion web, una API o una base de datos, y es un concepto de diagrama anterior a Docker.</a:t>
+            </a:r>
+          </a:p>
+          <a:p/>
+          <a:p>
+            <a:r>
+              <a:t>El contenedor de Docker, en cambio, es un mecanismo concreto de empaquetado y ejecucion.</a:t>
+            </a:r>
+          </a:p>
+          <a:p/>
+          <a:p>
+            <a:r>
+              <a:t>Se parecen y a menudo coinciden uno a uno, pero no son sinonimos: una base de datos gestionada que nadie contenerizo sigue siendo un contenedor en el sentido de C4.</a:t>
+            </a:r>
+          </a:p>
+          <a:p/>
+          <a:p>
+            <a:r>
+              <a:t>La respuesta, dicha desde ya, es no.</a:t>
+            </a:r>
+          </a:p>
+          <a:p/>
+          <a:p>
+            <a:r>
+              <a:t>(No se proyecta) Un estudiante mas adelantado puede levantar dos contenedores, la API y un stub de notificaciones, y comprobar algo que sera central en la Clase 4: desde el contenedor de la API, la direccion localhost NO es la maquina anfitriona ni el otro contenedor, es el propio contenedor, y para que dos contenedores se hablen hay que ponerlos en una misma red y llamarse por nombre.</a:t>
+            </a:r>
+          </a:p>
+          <a:p/>
+          <a:p>
+            <a:r>
+              <a:t>(No se proyecta) Hay dos limites que conviene anunciar ANTES de empezar y no despues, porque cambian como se planifica la hora de taller.</a:t>
+            </a:r>
+          </a:p>
+          <a:p/>
+          <a:p>
+            <a:r>
+              <a:t>(No se proyecta) De ahi sale la regla operativa del dia, y hay que decirla como consecuencia del limite y no como consejo suelto: el Dockerfile se escribe en la carpeta del proyecto y se PEGA en el laboratorio, nunca al contrario, y las capturas se guardan antes de cerrar.</a:t>
+            </a:r>
+          </a:p>
+          <a:p/>
+          <a:p>
+            <a:r>
+              <a:t>(No se proyecta) La alterna, si Killercoda no carga, es LabEx Docker Playground, que cumple la misma funcion tambien gratis y en el navegador, pero con una restriccion mas dura que conviene mencionar: su plan gratuito da solo tres sesiones al dia, de modo que quien la use para depurar puede quedarse sin intentos justo el dia de la entrega.</a:t>
             </a:r>
           </a:p>
         </p:txBody>
@@ -1036,67 +1488,37 @@
           <a:lstStyle/>
           <a:p>
             <a:r>
-              <a:t>DESARROLLO (para explicarlo, no se proyecta):</a:t>
+              <a:t>TEXTO COMPLETO DE LA LÁMINA (se proyecta resumido):</a:t>
             </a:r>
           </a:p>
           <a:p/>
           <a:p>
             <a:r>
-              <a:t>El Dockerfile es la receta: un archivo de texto con instrucciones.</a:t>
+              <a:t>VM: hipervisor + SO completo → aislamiento fuerte, más pesado.</a:t>
             </a:r>
           </a:p>
           <a:p/>
           <a:p>
             <a:r>
-              <a:t>La imagen es el resultado de ejecutar esa receta, un paquete inmutable y de solo lectura con el codigo, las dependencias y la configuracion.</a:t>
+              <a:t>Contenedor: comparte kernel del host → portable y rápido para demos.</a:t>
             </a:r>
           </a:p>
           <a:p/>
           <a:p>
             <a:r>
-              <a:t>El contenedor es una instancia en ejecucion de esa imagen, y de una misma imagen se pueden lanzar diez contenedores identicos, igual que de una clase se instancian muchos objetos</a:t>
+              <a:t>Imagen = capas inmutables; contenedor = instancia en ejecución.</a:t>
             </a:r>
           </a:p>
           <a:p/>
           <a:p>
             <a:r>
-              <a:t>Esa comparacion funciona bien con estudiantes que ya vieron programacion orientada a objetos.</a:t>
+              <a:t>CloudLite: contenerizamos al menos un servicio (API stub o front estático).</a:t>
             </a:r>
           </a:p>
           <a:p/>
           <a:p>
             <a:r>
-              <a:t>Y el registro, o registry, es el repositorio donde las imagenes se publican y se descargan.</a:t>
-            </a:r>
-          </a:p>
-          <a:p/>
-          <a:p>
-            <a:r>
-              <a:t>Un detalle que explica el comportamiento diario: la imagen se construye por capas, una por instruccion, y esas capas quedan en cache; si una instruccion no cambio, la reconstruccion la reutiliza en lugar de volver a ejecutarla.</a:t>
-            </a:r>
-          </a:p>
-          <a:p/>
-          <a:p>
-            <a:r>
-              <a:t>Hacerlo al reves obliga a reinstalar todo en cada construccion y convierte una build de 10 segundos en una de varios minutos.</a:t>
-            </a:r>
-          </a:p>
-          <a:p/>
-          <a:p>
-            <a:r>
-              <a:t>NOTAS:</a:t>
-            </a:r>
-          </a:p>
-          <a:p/>
-          <a:p>
-            <a:r>
-              <a:t>De ahi la unica optimizacion que hay que ensenar hoy: copiar primero el archivo de dependencias e instalarlas, y solo despues copiar el codigo fuente, porque el codigo cambia en cada commit y las dependencias casi nunca.</a:t>
-            </a:r>
-          </a:p>
-          <a:p/>
-          <a:p>
-            <a:r>
-              <a:t>(No se proyecta) Cuatro terminos se confunden de forma sistematica y conviene fijarlos con una sola analogia.</a:t>
+              <a:t>Error común: creer que el contenedor «no tiene sistema operativo»: usa el kernel del anfitrión, por eso una imagen Linux necesita un kernel Linux debajo.</a:t>
             </a:r>
           </a:p>
         </p:txBody>
@@ -1172,115 +1594,61 @@
           <a:p/>
           <a:p>
             <a:r>
-              <a:t>FROM node:20-alpine elige la imagen base, o sea el punto de partida ya construido por otros, en este caso un Linux minimo con Node instalado; la etiqueta 20-alpine es FIJA y eso importa</a:t>
+              <a:t>El Dockerfile es la receta: un archivo de texto con instrucciones.</a:t>
             </a:r>
           </a:p>
           <a:p/>
           <a:p>
             <a:r>
-              <a:t>Porque con latest la imagen de hoy no es la de manana y la reconstruccion deja de ser reproducible.</a:t>
+              <a:t>La imagen es el resultado de ejecutar esa receta, un paquete inmutable y de solo lectura con el codigo, las dependencias y la configuracion.</a:t>
             </a:r>
           </a:p>
           <a:p/>
           <a:p>
             <a:r>
-              <a:t>RUN npm ci --omit=dev las instala dentro de la imagen y no en la maquina del estudiante, lo cual es el punto entero del ejercicio</a:t>
+              <a:t>El contenedor es una instancia en ejecucion de esa imagen, y de una misma imagen se pueden lanzar diez contenedores identicos, igual que de una clase se instancian muchos objetos</a:t>
             </a:r>
           </a:p>
           <a:p/>
           <a:p>
             <a:r>
-              <a:t>Porque la dependencia viaja con el artefacto; se usa npm ci y no npm install porque respeta el archivo de bloqueo y por tanto instala exactamente las mismas versiones en cada construccion.</a:t>
+              <a:t>Esa comparacion funciona bien con estudiantes que ya vieron programacion orientada a objetos.</a:t>
             </a:r>
           </a:p>
           <a:p/>
           <a:p>
             <a:r>
-              <a:t>EXPOSE 8080 documenta en que puerto escucha el proceso.</a:t>
+              <a:t>Y el registro, o registry, es el repositorio donde las imagenes se publican y se descargan.</a:t>
             </a:r>
           </a:p>
           <a:p/>
           <a:p>
             <a:r>
-              <a:t>Ese COPY.. tiene una consecuencia seria: copia TODO lo que haya en la carpeta, incluido el archivo.env con las credenciales, y una vez dentro de una capa ya no sale, ni siquiera borrandolo en una instruccion posterior.</a:t>
+              <a:t>Un detalle que explica el comportamiento diario: la imagen se construye por capas, una por instruccion, y esas capas quedan en cache; si una instruccion no cambio, la reconstruccion la reutiliza en lugar de volver a ejecutarla.</a:t>
             </a:r>
           </a:p>
           <a:p/>
           <a:p>
             <a:r>
-              <a:t>La regla se enuncia en una linea: si haces COPY.., el.dockerignore va al lado y se menciona en la entrega.</a:t>
+              <a:t>Hacerlo al reves obliga a reinstalar todo en cada construccion y convierte una build de 10 segundos en una de varios minutos.</a:t>
             </a:r>
           </a:p>
           <a:p/>
           <a:p>
             <a:r>
-              <a:t>Un ultimo detalle del que depende media clase: EXPOSE no abre nada, solo documenta.</a:t>
+              <a:t>NOTAS:</a:t>
             </a:r>
           </a:p>
           <a:p/>
           <a:p>
             <a:r>
-              <a:t>NOTAS:</a:t>
+              <a:t>De ahi la unica optimizacion que hay que ensenar hoy: copiar primero el archivo de dependencias e instalarlas, y solo despues copiar el codigo fuente, porque el codigo cambia en cada commit y las dependencias casi nunca.</a:t>
             </a:r>
           </a:p>
           <a:p/>
           <a:p>
             <a:r>
-              <a:t>Primer ejemplo concreto en CloudLite.</a:t>
-            </a:r>
-          </a:p>
-          <a:p/>
-          <a:p>
-            <a:r>
-              <a:t>WORKDIR /app fija el directorio dentro del contenedor donde ocurrira todo lo demas.</a:t>
-            </a:r>
-          </a:p>
-          <a:p/>
-          <a:p>
-            <a:r>
-              <a:t>COPY package*.json./ trae solo la lista de dependencias.</a:t>
-            </a:r>
-          </a:p>
-          <a:p/>
-          <a:p>
-            <a:r>
-              <a:t>COPY.. trae el resto del codigo, y va DESPUES por la razon de cache de la seccion anterior.</a:t>
-            </a:r>
-          </a:p>
-          <a:p/>
-          <a:p>
-            <a:r>
-              <a:t>Y CMD indica que comando ejecutar cuando el contenedor arranque, uno solo y en primer plano.</a:t>
-            </a:r>
-          </a:p>
-          <a:p/>
-          <a:p>
-            <a:r>
-              <a:t>Por eso al lado del Dockerfile va un segundo archivo, el.dockerignore, con al menos.env, node_modules y.git.</a:t>
-            </a:r>
-          </a:p>
-          <a:p/>
-          <a:p>
-            <a:r>
-              <a:t>Lo que realmente publica el puerto es la opcion -p al ejecutar, y ese es el tema de la diapositiva siguiente.</a:t>
-            </a:r>
-          </a:p>
-          <a:p/>
-          <a:p>
-            <a:r>
-              <a:t>(No se proyecta) En CloudLite Turnos el estudiante contenerizara un stub de su API, es decir una version minima que responde algo verificable: el endpoint GET /health, que devuelve un cuerpo en formato JSON con al menos un campo que se pueda comprobar.</a:t>
-            </a:r>
-          </a:p>
-          <a:p/>
-          <a:p>
-            <a:r>
-              <a:t>(No se proyecta) Su Dockerfile tiene siete instrucciones, y el docente debe poder explicar cada una.</a:t>
-            </a:r>
-          </a:p>
-          <a:p/>
-          <a:p>
-            <a:r>
-              <a:t>(No se proyecta) La diapositiva lo proyecta junto al Dockerfile y no como nota al pie a proposito: son dos archivos hermanos en la misma carpeta, y el estudiante que entrega el primero sin el segundo entrega un artefacto que filtra secretos.</a:t>
+              <a:t>(No se proyecta) Cuatro terminos se confunden de forma sistematica y conviene fijarlos con una sola analogia.</a:t>
             </a:r>
           </a:p>
         </p:txBody>
@@ -1350,127 +1718,31 @@
           <a:lstStyle/>
           <a:p>
             <a:r>
-              <a:t>DESARROLLO (para explicarlo, no se proyecta):</a:t>
+              <a:t>TEXTO COMPLETO DE LA LÁMINA (se proyecta resumido):</a:t>
             </a:r>
           </a:p>
           <a:p/>
           <a:p>
             <a:r>
-              <a:t>El primero es la construccion: docker build -t cloudlite-api:0.1.0.</a:t>
+              <a:t>Un Dockerfile se puede escribir y razonar sin ejecutarlo; ejecutarlo es la prueba de que el razonamiento era correcto.</a:t>
             </a:r>
           </a:p>
           <a:p/>
           <a:p>
             <a:r>
-              <a:t>El -t asigna nombre y etiqueta, y el punto final no es adorno sino el contexto de construccion, es decir la carpeta cuyo contenido se le entrega al motor.</a:t>
+              <a:t>Hay laboratorios de contenedores gratuitos en el navegador: sin instalar nada y sin tarjeta.</a:t>
             </a:r>
           </a:p>
           <a:p/>
           <a:p>
             <a:r>
-              <a:t>Nombre Y etiqueta, siempre; la etiqueta suelta no basta y el nombre solo tampoco.</a:t>
+              <a:t>Son desechables: la sesión caduca en torno a la hora y el plan gratuito limita cuántas se abren al día.</a:t>
             </a:r>
           </a:p>
           <a:p/>
           <a:p>
             <a:r>
-              <a:t>El segundo es la ejecucion: docker run -d -p 8081:8080 --name api cloudlite-api:0.1.0.</a:t>
-            </a:r>
-          </a:p>
-          <a:p/>
-          <a:p>
-            <a:r>
-              <a:t>Se lee de derecha a izquierda: el puerto 8080 de dentro queda accesible como 8081 desde fuera.</a:t>
-            </a:r>
-          </a:p>
-          <a:p/>
-          <a:p>
-            <a:r>
-              <a:t>El tercero es la verificacion, y aqui hay un concepto y no solo un comando.</a:t>
-            </a:r>
-          </a:p>
-          <a:p/>
-          <a:p>
-            <a:r>
-              <a:t>Un endpoint de salud es una ruta cuyo unico proposito es que alguien de afuera pueda preguntar si el servicio esta en condiciones de atender</a:t>
-            </a:r>
-          </a:p>
-          <a:p/>
-          <a:p>
-            <a:r>
-              <a:t>Y su contrato tiene TRES datos, los tres exigibles: la ruta (GET /health), el codigo de estado (200 cuando el servicio puede atender, 503 cuando esta arriba pero sin su dependencia, tipicamente la base de datos) y el cuerpo con su formato declarado.</a:t>
-            </a:r>
-          </a:p>
-          <a:p/>
-          <a:p>
-            <a:r>
-              <a:t>El tercero es el que se olvida y el que hace util al endpoint: un 200 con el cuerpo vacio no distingue «vivo» de «vivo pero roto», porque el proceso puede estar respondiendo mientras su conexion a datos esta caida.</a:t>
-            </a:r>
-          </a:p>
-          <a:p/>
-          <a:p>
-            <a:r>
-              <a:t>Se comprueba con curl -i http://localhost:8081/health, y el -i importa: sin el, curl imprime el cuerpo pero esconde el codigo de estado, que es un tercio del contrato.</a:t>
-            </a:r>
-          </a:p>
-          <a:p/>
-          <a:p>
-            <a:r>
-              <a:t>NOTAS:</a:t>
-            </a:r>
-          </a:p>
-          <a:p/>
-          <a:p>
-            <a:r>
-              <a:t>Con el Dockerfile escrito faltan tres comandos, cada uno con su sintaxis precisa.</a:t>
-            </a:r>
-          </a:p>
-          <a:p/>
-          <a:p>
-            <a:r>
-              <a:t>El -d lo manda a segundo plano y el --name le da un nombre estable para no andar copiando identificadores.</a:t>
-            </a:r>
-          </a:p>
-          <a:p/>
-          <a:p>
-            <a:r>
-              <a:t>Por eso el cuerpo lleva al menos un campo verificable, por ejemplo un estado y el nombre del servicio en JSON.</a:t>
-            </a:r>
-          </a:p>
-          <a:p/>
-          <a:p>
-            <a:r>
-              <a:t>(No se proyecta) Un build sin etiqueta funciona y por eso el estudiante no nota el problema: Docker le pone latest en silencio, y a partir de ahi nadie puede decir que version esta corriendo.</a:t>
-            </a:r>
-          </a:p>
-          <a:p/>
-          <a:p>
-            <a:r>
-              <a:t>(No se proyecta) El corazon de la instruccion es el -p, y conviene escribirlo en el tablero con las dos etiquetas encima: el numero de la IZQUIERDA es el del anfitrion, la maquina desde la que uno abre el navegador, y el de la DERECHA es el del contenedor, el mismo del EXPOSE.</a:t>
-            </a:r>
-          </a:p>
-          <a:p/>
-          <a:p>
-            <a:r>
-              <a:t>(No se proyecta) En el ejemplo estan a proposito DISTINTOS, porque cuando se escribe -p 8080:8080 los dos lados se confunden y el estudiante no puede decir cual es cual; en la actividad se le pide justamente explicar la diferencia.</a:t>
-            </a:r>
-          </a:p>
-          <a:p/>
-          <a:p>
-            <a:r>
-              <a:t>(No se proyecta) Y hay que anunciar el sintoma de invertirlos, que es lo que hace perder la tarde: docker ps sigue reportando el contenedor como Up y la peticion simplemente no obtiene respuesta o muere con una conexion reiniciada.</a:t>
-            </a:r>
-          </a:p>
-          <a:p/>
-          <a:p>
-            <a:r>
-              <a:t>(No se proyecta) El sintoma no senala la causa, y el estudiante busca el error en el codigo cuando esta en una linea del comando.</a:t>
-            </a:r>
-          </a:p>
-          <a:p/>
-          <a:p>
-            <a:r>
-              <a:t>(No se proyecta) Este mismo endpoint reaparece en la Clase 7, donde el balanceador lo consulta para decidir si sigue enviandole trafico a una instancia, y en la Clase 8, donde el pipeline lo usa como prueba de humo despues de construir la imagen.</a:t>
+              <a:t>El Dockerfile se escribe en tu carpeta del PI y se pega en el lab, nunca al contrario: lo que se cierra con la sesión del lab se pierde.</a:t>
             </a:r>
           </a:p>
         </p:txBody>
@@ -1546,133 +1818,221 @@
           <a:p/>
           <a:p>
             <a:r>
-              <a:t>Tras ejecutar el contenedor, el comando docker ps lista lo que esta corriendo con siete columnas: identificador del contenedor, imagen de la que proviene, comando en ejecucion, tiempo desde su creacion, estado, puertos publicados y nombre asignado.</a:t>
+              <a:t>FROM node:20-alpine elige la imagen base, o sea el punto de partida ya construido por otros, en este caso un Linux minimo con Node instalado; la etiqueta 20-alpine es FIJA y eso importa</a:t>
             </a:r>
           </a:p>
           <a:p/>
           <a:p>
             <a:r>
-              <a:t>Todo esto ocurre en Killercoda (killercoda.com, cuenta gratuita y sin tarjeta, escenario Ubuntu), que entrega una terminal Linux real con Docker ya instalado dentro del navegador, sin instalar Docker Desktop</a:t>
+              <a:t>Porque con latest la imagen de hoy no es la de manana y la reconstruccion deja de ser reproducible.</a:t>
             </a:r>
           </a:p>
           <a:p/>
           <a:p>
             <a:r>
-              <a:t>Que en equipos institucionales suele estar bloqueado y tiene condiciones de licencia para organizaciones grandes.</a:t>
+              <a:t>RUN npm ci --omit=dev las instala dentro de la imagen y no en la maquina del estudiante, lo cual es el punto entero del ejercicio</a:t>
             </a:r>
           </a:p>
           <a:p/>
           <a:p>
             <a:r>
-              <a:t>El primero: la sesion caduca a una hora y al cerrarse se pierde lo que exista solo alli.</a:t>
+              <a:t>Porque la dependencia viaja con el artefacto; se usa npm ci y no npm install porque respeta el archivo de bloqueo y por tanto instala exactamente las mismas versiones en cada construccion.</a:t>
             </a:r>
           </a:p>
           <a:p/>
           <a:p>
             <a:r>
-              <a:t>El segundo: en el plan gratuito solo se trabaja un escenario a la vez, asi que no sirve dejar dos labs abiertos.</a:t>
+              <a:t>EXPOSE 8080 documenta en que puerto escucha el proceso.</a:t>
             </a:r>
           </a:p>
           <a:p/>
           <a:p>
             <a:r>
+              <a:t>Ese COPY.. tiene una consecuencia seria: copia TODO lo que haya en la carpeta, incluido el archivo.env con las credenciales, y una vez dentro de una capa ya no sale, ni siquiera borrandolo en una instruccion posterior.</a:t>
+            </a:r>
+          </a:p>
+          <a:p/>
+          <a:p>
+            <a:r>
+              <a:t>La regla se enuncia en una linea: si haces COPY.., el.dockerignore va al lado y se menciona en la entrega.</a:t>
+            </a:r>
+          </a:p>
+          <a:p/>
+          <a:p>
+            <a:r>
+              <a:t>Un ultimo detalle del que depende media clase: EXPOSE no abre nada, solo documenta.</a:t>
+            </a:r>
+          </a:p>
+          <a:p/>
+          <a:p>
+            <a:r>
               <a:t>NOTAS:</a:t>
             </a:r>
           </a:p>
           <a:p/>
           <a:p>
             <a:r>
-              <a:t>Segundo ejemplo concreto.</a:t>
+              <a:t>Primer ejemplo concreto en CloudLite.</a:t>
             </a:r>
           </a:p>
           <a:p/>
           <a:p>
             <a:r>
-              <a:t>La columna de estado es la que hay que mirar: si dice Up seguido de un tiempo, el contenedor vive; si dice Exited con un codigo entre parentesis, murio, y ese codigo es la primera pista del problema.</a:t>
+              <a:t>WORKDIR /app fija el directorio dentro del contenedor donde ocurrira todo lo demas.</a:t>
             </a:r>
           </a:p>
           <a:p/>
           <a:p>
             <a:r>
-              <a:t>Por eso la alterna es alterna y no la primera opcion.</a:t>
+              <a:t>COPY package*.json./ trae solo la lista de dependencias.</a:t>
             </a:r>
           </a:p>
           <a:p/>
           <a:p>
             <a:r>
-              <a:t>PREGUNTAS FRECUENTES Y CIERRE CONCEPTUAL ()</a:t>
+              <a:t>COPY.. trae el resto del codigo, y va DESPUES por la razon de cache de la seccion anterior.</a:t>
             </a:r>
           </a:p>
           <a:p/>
           <a:p>
             <a:r>
-              <a:t>Por que mi contenedor arranca y se muere de inmediato: porque un contenedor vive exactamente lo que vive su proceso principal, y si el comando termina, el contenedor termina.</a:t>
+              <a:t>Y CMD indica que comando ejecutar cuando el contenedor arranque, uno solo y en primer plano.</a:t>
             </a:r>
           </a:p>
           <a:p/>
           <a:p>
             <a:r>
-              <a:t>No es un error, es el diseno; un contenedor no es una maquina encendida esperando ordenes, es un proceso envuelto en aislamiento, y la solucion es que el comando quede corriendo en primer plano.</a:t>
+              <a:t>Por eso al lado del Dockerfile va un segundo archivo, el.dockerignore, con al menos.env, node_modules y.git.</a:t>
             </a:r>
           </a:p>
           <a:p/>
           <a:p>
             <a:r>
-              <a:t>Segunda: donde quedan mis datos si borro el contenedor.</a:t>
+              <a:t>Lo que realmente publica el puerto es la opcion -p al ejecutar, y ese es el tema de la diapositiva siguiente.</a:t>
             </a:r>
           </a:p>
           <a:p/>
           <a:p>
             <a:r>
-              <a:t>Tercera: entonces la base de datos tambien va en un contenedor.</a:t>
+              <a:t>(No se proyecta) En CloudLite Turnos el estudiante contenerizara un stub de su API, es decir una version minima que responde algo verificable: el endpoint GET /health, que devuelve un cuerpo en formato JSON con al menos un campo que se pueda comprobar.</a:t>
             </a:r>
           </a:p>
           <a:p/>
           <a:p>
             <a:r>
-              <a:t>En el modelo C4, la palabra contenedor significa cualquier cosa que se ejecuta o almacena de forma independiente, como una aplicacion web, una API o una base de datos, y es un concepto de diagrama anterior a Docker.</a:t>
+              <a:t>(No se proyecta) Su Dockerfile tiene siete instrucciones, y el docente debe poder explicar cada una.</a:t>
             </a:r>
           </a:p>
           <a:p/>
           <a:p>
             <a:r>
-              <a:t>El contenedor de Docker, en cambio, es un mecanismo concreto de empaquetado y ejecucion.</a:t>
+              <a:t>(No se proyecta) La diapositiva lo proyecta junto al Dockerfile y no como nota al pie a proposito: son dos archivos hermanos en la misma carpeta, y el estudiante que entrega el primero sin el segundo entrega un artefacto que filtra secretos.</a:t>
+            </a:r>
+          </a:p>
+        </p:txBody>
+      </p:sp>
+      <p:sp>
+        <p:nvSpPr>
+          <p:cNvPr id="4" name="Slide Number Placeholder 3"/>
+          <p:cNvSpPr>
+            <a:spLocks noGrp="1"/>
+          </p:cNvSpPr>
+          <p:nvPr>
+            <p:ph type="sldNum" idx="5" sz="quarter"/>
+          </p:nvPr>
+        </p:nvSpPr>
+        <p:spPr/>
+      </p:sp>
+    </p:spTree>
+  </p:cSld>
+  <p:clrMapOvr>
+    <a:masterClrMapping/>
+  </p:clrMapOvr>
+</p:notes>
+</file>
+
+<file path=ppt/notesSlides/notesSlide9.xml><?xml version="1.0" encoding="utf-8"?>
+<p:notes xmlns:a="http://schemas.openxmlformats.org/drawingml/2006/main" xmlns:p="http://schemas.openxmlformats.org/presentationml/2006/main" xmlns:r="http://schemas.openxmlformats.org/officeDocument/2006/relationships">
+  <p:cSld>
+    <p:spTree>
+      <p:nvGrpSpPr>
+        <p:cNvPr id="1" name=""/>
+        <p:cNvGrpSpPr/>
+        <p:nvPr/>
+      </p:nvGrpSpPr>
+      <p:grpSpPr>
+        <a:xfrm>
+          <a:off x="0" y="0"/>
+          <a:ext cx="0" cy="0"/>
+          <a:chOff x="0" y="0"/>
+          <a:chExt cx="0" cy="0"/>
+        </a:xfrm>
+      </p:grpSpPr>
+      <p:sp>
+        <p:nvSpPr>
+          <p:cNvPr id="2" name="Slide Image Placeholder 1"/>
+          <p:cNvSpPr>
+            <a:spLocks noGrp="1"/>
+          </p:cNvSpPr>
+          <p:nvPr>
+            <p:ph type="sldImg" idx="2"/>
+          </p:nvPr>
+        </p:nvSpPr>
+        <p:spPr/>
+      </p:sp>
+      <p:sp>
+        <p:nvSpPr>
+          <p:cNvPr id="3" name="Notes Placeholder 2"/>
+          <p:cNvSpPr>
+            <a:spLocks noGrp="1"/>
+          </p:cNvSpPr>
+          <p:nvPr>
+            <p:ph type="body" idx="3" sz="quarter"/>
+          </p:nvPr>
+        </p:nvSpPr>
+        <p:spPr/>
+        <p:txBody>
+          <a:bodyPr/>
+          <a:lstStyle/>
+          <a:p>
+            <a:r>
+              <a:t>TEXTO COMPLETO DE LA LÁMINA (se proyecta resumido):</a:t>
             </a:r>
           </a:p>
           <a:p/>
           <a:p>
             <a:r>
-              <a:t>Se parecen y a menudo coinciden uno a uno, pero no son sinonimos: una base de datos gestionada que nadie contenerizo sigue siendo un contenedor en el sentido de C4.</a:t>
+              <a:t>Siete instrucciones: FROM · WORKDIR · COPY de dependencias · RUN · COPY del código · EXPOSE · CMD.</a:t>
             </a:r>
           </a:p>
           <a:p/>
           <a:p>
             <a:r>
-              <a:t>La respuesta, dicha desde ya, es no.</a:t>
+              <a:t>`FROM` con etiqueta fija (`node:20-alpine`, `python:3.12-slim`): con `latest`, la imagen de hoy no es la de mañana.</a:t>
             </a:r>
           </a:p>
           <a:p/>
           <a:p>
             <a:r>
-              <a:t>(No se proyecta) Un estudiante mas adelantado puede levantar dos contenedores, la API y un stub de notificaciones, y comprobar algo que sera central en la Clase 4: desde el contenedor de la API, la direccion localhost NO es la maquina anfitriona ni el otro contenedor, es el propio contenedor, y para que dos contenedores se hablen hay que ponerlos en una misma red y llamarse por nombre.</a:t>
+              <a:t>Dependencias antes que el código: así cambiar una línea no reinstala nada (es la caché por capas).</a:t>
             </a:r>
           </a:p>
           <a:p/>
           <a:p>
             <a:r>
-              <a:t>(No se proyecta) Hay dos limites que conviene anunciar ANTES de empezar y no despues, porque cambian como se planifica la hora de taller.</a:t>
+              <a:t>Nunca un secreto en la imagen: las capas se acumulan y `docker history` las lee aunque el archivo se borre después.</a:t>
             </a:r>
           </a:p>
           <a:p/>
           <a:p>
             <a:r>
-              <a:t>(No se proyecta) De ahi sale la regla operativa del dia, y hay que decirla como consecuencia del limite y no como consejo suelto: el Dockerfile se escribe en la carpeta del proyecto y se PEGA en el laboratorio, nunca al contrario, y las capturas se guardan antes de cerrar.</a:t>
+              <a:t>Si haces `COPY . .`, va con un `.dockerignore` al lado (`.env`, `node_modules`, `.git`) — y se menciona en la entrega.</a:t>
             </a:r>
           </a:p>
           <a:p/>
           <a:p>
             <a:r>
-              <a:t>(No se proyecta) La alterna, si Killercoda no carga, es LabEx Docker Playground, que cumple la misma funcion tambien gratis y en el navegador, pero con una restriccion mas dura que conviene mencionar: su plan gratuito da solo tres sesiones al dia, de modo que quien la use para depurar puede quedarse sin intentos justo el dia de la entrega.</a:t>
+              <a:t>`EXPOSE` documenta, no publica. Publicar es el `-p` del `docker run`.</a:t>
             </a:r>
           </a:p>
         </p:txBody>
@@ -7656,7 +8016,7 @@
                 </a:solidFill>
                 <a:latin typeface="Calibri"/>
               </a:rPr>
-              <a:t>Primer ejemplo: el stub de la API de la app</a:t>
+              <a:t>Comprobar en un lab: el Dockerfile vive en tu carpeta</a:t>
             </a:r>
           </a:p>
         </p:txBody>
@@ -7669,8 +8029,8 @@
         </p:nvSpPr>
         <p:spPr>
           <a:xfrm>
-            <a:off x="5803166" y="1188719"/>
-            <a:ext cx="5998464" cy="4828032"/>
+            <a:off x="5797149" y="1343926"/>
+            <a:ext cx="6010497" cy="4837658"/>
           </a:xfrm>
           <a:prstGeom prst="roundRect">
             <a:avLst>
@@ -7708,7 +8068,7 @@
       </p:sp>
       <p:pic>
         <p:nvPicPr>
-          <p:cNvPr id="6" name="Picture 5" descr="capas-cache-paso1.png"/>
+          <p:cNvPr id="6" name="Picture 5" descr="ilus-lab-desechable-paso1.png"/>
           <p:cNvPicPr>
             <a:picLocks noChangeAspect="1"/>
           </p:cNvPicPr>
@@ -7722,6 +8082,363 @@
         </p:blipFill>
         <p:spPr>
           <a:xfrm>
+            <a:off x="5870301" y="1417078"/>
+            <a:ext cx="5864193" cy="4691354"/>
+          </a:xfrm>
+          <a:prstGeom prst="rect">
+            <a:avLst/>
+          </a:prstGeom>
+        </p:spPr>
+      </p:pic>
+      <p:sp>
+        <p:nvSpPr>
+          <p:cNvPr id="7" name="TextBox 6"/>
+          <p:cNvSpPr txBox="1"/>
+          <p:nvPr/>
+        </p:nvSpPr>
+        <p:spPr>
+          <a:xfrm>
+            <a:off x="457200" y="1353312"/>
+            <a:ext cx="5093061" cy="5047488"/>
+          </a:xfrm>
+          <a:prstGeom prst="rect">
+            <a:avLst/>
+          </a:prstGeom>
+          <a:noFill/>
+        </p:spPr>
+        <p:txBody>
+          <a:bodyPr wrap="square">
+            <a:spAutoFit/>
+          </a:bodyPr>
+          <a:lstStyle/>
+          <a:p>
+            <a:pPr>
+              <a:spcAft>
+                <a:spcPts val="800"/>
+              </a:spcAft>
+            </a:pPr>
+            <a:r>
+              <a:rPr sz="2000" b="0" i="0">
+                <a:solidFill>
+                  <a:srgbClr val="333333"/>
+                </a:solidFill>
+                <a:latin typeface="Calibri"/>
+              </a:rPr>
+              <a:t>–   Un </a:t>
+            </a:r>
+            <a:r>
+              <a:rPr sz="2000" b="1" i="0">
+                <a:solidFill>
+                  <a:srgbClr val="333333"/>
+                </a:solidFill>
+                <a:latin typeface="Calibri"/>
+              </a:rPr>
+              <a:t>Dockerfile</a:t>
+            </a:r>
+            <a:r>
+              <a:rPr sz="2000" b="0" i="0">
+                <a:solidFill>
+                  <a:srgbClr val="333333"/>
+                </a:solidFill>
+                <a:latin typeface="Calibri"/>
+              </a:rPr>
+              <a:t> se puede escribir y razonar sin ejecutarlo; ejecutarlo es la prueba de que el razonamiento era correcto.</a:t>
+            </a:r>
+          </a:p>
+          <a:p>
+            <a:pPr>
+              <a:spcAft>
+                <a:spcPts val="800"/>
+              </a:spcAft>
+            </a:pPr>
+            <a:r>
+              <a:rPr sz="2000" b="0" i="0">
+                <a:solidFill>
+                  <a:srgbClr val="333333"/>
+                </a:solidFill>
+                <a:latin typeface="Calibri"/>
+              </a:rPr>
+              <a:t>–   Hay laboratorios de contenedores gratuitos en el navegador: sin instalar nada y sin tarjeta.</a:t>
+            </a:r>
+          </a:p>
+          <a:p>
+            <a:pPr>
+              <a:spcAft>
+                <a:spcPts val="800"/>
+              </a:spcAft>
+            </a:pPr>
+            <a:r>
+              <a:rPr sz="2000" b="0" i="0">
+                <a:solidFill>
+                  <a:srgbClr val="333333"/>
+                </a:solidFill>
+                <a:latin typeface="Calibri"/>
+              </a:rPr>
+              <a:t>–   </a:t>
+            </a:r>
+            <a:r>
+              <a:rPr sz="2000" b="1" i="0">
+                <a:solidFill>
+                  <a:srgbClr val="333333"/>
+                </a:solidFill>
+                <a:latin typeface="Calibri"/>
+              </a:rPr>
+              <a:t>Son desechables:</a:t>
+            </a:r>
+            <a:r>
+              <a:rPr sz="2000" b="0" i="0">
+                <a:solidFill>
+                  <a:srgbClr val="333333"/>
+                </a:solidFill>
+                <a:latin typeface="Calibri"/>
+              </a:rPr>
+              <a:t> la sesión caduca en torno a la hora y el plan gratuito limita cuántas se abren al día.</a:t>
+            </a:r>
+          </a:p>
+        </p:txBody>
+      </p:sp>
+      <p:sp>
+        <p:nvSpPr>
+          <p:cNvPr id="8" name="TextBox 7"/>
+          <p:cNvSpPr txBox="1"/>
+          <p:nvPr/>
+        </p:nvSpPr>
+        <p:spPr>
+          <a:xfrm>
+            <a:off x="11185855" y="6473952"/>
+            <a:ext cx="640080" cy="274320"/>
+          </a:xfrm>
+          <a:prstGeom prst="rect">
+            <a:avLst/>
+          </a:prstGeom>
+          <a:noFill/>
+        </p:spPr>
+        <p:txBody>
+          <a:bodyPr wrap="square">
+            <a:spAutoFit/>
+          </a:bodyPr>
+          <a:lstStyle/>
+          <a:p>
+            <a:pPr algn="r"/>
+            <a:r>
+              <a:rPr sz="1100" b="0" i="0">
+                <a:solidFill>
+                  <a:srgbClr val="666666"/>
+                </a:solidFill>
+                <a:latin typeface="Calibri"/>
+              </a:rPr>
+              <a:t>13</a:t>
+            </a:r>
+          </a:p>
+        </p:txBody>
+      </p:sp>
+    </p:spTree>
+  </p:cSld>
+  <p:clrMapOvr>
+    <a:masterClrMapping/>
+  </p:clrMapOvr>
+</p:sld>
+</file>
+
+<file path=ppt/slides/slide14.xml><?xml version="1.0" encoding="utf-8"?>
+<p:sld xmlns:a="http://schemas.openxmlformats.org/drawingml/2006/main" xmlns:p="http://schemas.openxmlformats.org/presentationml/2006/main" xmlns:r="http://schemas.openxmlformats.org/officeDocument/2006/relationships">
+  <p:cSld>
+    <p:bg>
+      <p:bgPr>
+        <a:solidFill>
+          <a:srgbClr val="FFFFFF"/>
+        </a:solidFill>
+        <a:effectLst/>
+      </p:bgPr>
+    </p:bg>
+    <p:spTree>
+      <p:nvGrpSpPr>
+        <p:cNvPr id="1" name=""/>
+        <p:cNvGrpSpPr/>
+        <p:nvPr/>
+      </p:nvGrpSpPr>
+      <p:grpSpPr/>
+      <p:sp>
+        <p:nvSpPr>
+          <p:cNvPr id="2" name="Rectangle 1"/>
+          <p:cNvSpPr/>
+          <p:nvPr/>
+        </p:nvSpPr>
+        <p:spPr>
+          <a:xfrm>
+            <a:off x="0" y="0"/>
+            <a:ext cx="12191695" cy="960120"/>
+          </a:xfrm>
+          <a:prstGeom prst="rect">
+            <a:avLst/>
+          </a:prstGeom>
+          <a:solidFill>
+            <a:srgbClr val="095292"/>
+          </a:solidFill>
+          <a:ln>
+            <a:noFill/>
+          </a:ln>
+        </p:spPr>
+        <p:style>
+          <a:lnRef idx="1">
+            <a:schemeClr val="accent1"/>
+          </a:lnRef>
+          <a:fillRef idx="3">
+            <a:schemeClr val="accent1"/>
+          </a:fillRef>
+          <a:effectRef idx="2">
+            <a:schemeClr val="accent1"/>
+          </a:effectRef>
+          <a:fontRef idx="minor">
+            <a:schemeClr val="lt1"/>
+          </a:fontRef>
+        </p:style>
+        <p:txBody>
+          <a:bodyPr rtlCol="0" anchor="ctr"/>
+          <a:lstStyle/>
+          <a:p>
+            <a:pPr algn="ctr"/>
+          </a:p>
+        </p:txBody>
+      </p:sp>
+      <p:sp>
+        <p:nvSpPr>
+          <p:cNvPr id="3" name="Rectangle 2"/>
+          <p:cNvSpPr/>
+          <p:nvPr/>
+        </p:nvSpPr>
+        <p:spPr>
+          <a:xfrm>
+            <a:off x="0" y="960120"/>
+            <a:ext cx="12191695" cy="41148"/>
+          </a:xfrm>
+          <a:prstGeom prst="rect">
+            <a:avLst/>
+          </a:prstGeom>
+          <a:solidFill>
+            <a:srgbClr val="FFD000"/>
+          </a:solidFill>
+          <a:ln>
+            <a:noFill/>
+          </a:ln>
+        </p:spPr>
+        <p:style>
+          <a:lnRef idx="1">
+            <a:schemeClr val="accent1"/>
+          </a:lnRef>
+          <a:fillRef idx="3">
+            <a:schemeClr val="accent1"/>
+          </a:fillRef>
+          <a:effectRef idx="2">
+            <a:schemeClr val="accent1"/>
+          </a:effectRef>
+          <a:fontRef idx="minor">
+            <a:schemeClr val="lt1"/>
+          </a:fontRef>
+        </p:style>
+        <p:txBody>
+          <a:bodyPr rtlCol="0" anchor="ctr"/>
+          <a:lstStyle/>
+          <a:p>
+            <a:pPr algn="ctr"/>
+          </a:p>
+        </p:txBody>
+      </p:sp>
+      <p:sp>
+        <p:nvSpPr>
+          <p:cNvPr id="4" name="TextBox 3"/>
+          <p:cNvSpPr txBox="1"/>
+          <p:nvPr/>
+        </p:nvSpPr>
+        <p:spPr>
+          <a:xfrm>
+            <a:off x="457200" y="164592"/>
+            <a:ext cx="11277295" cy="502920"/>
+          </a:xfrm>
+          <a:prstGeom prst="rect">
+            <a:avLst/>
+          </a:prstGeom>
+          <a:noFill/>
+        </p:spPr>
+        <p:txBody>
+          <a:bodyPr wrap="square">
+            <a:spAutoFit/>
+          </a:bodyPr>
+          <a:lstStyle/>
+          <a:p>
+            <a:r>
+              <a:rPr sz="2600" b="1" i="0">
+                <a:solidFill>
+                  <a:srgbClr val="FFFFFF"/>
+                </a:solidFill>
+                <a:latin typeface="Calibri"/>
+              </a:rPr>
+              <a:t>Primer ejemplo: el stub de la API de la app</a:t>
+            </a:r>
+          </a:p>
+        </p:txBody>
+      </p:sp>
+      <p:sp>
+        <p:nvSpPr>
+          <p:cNvPr id="5" name="Rounded Rectangle 4"/>
+          <p:cNvSpPr/>
+          <p:nvPr/>
+        </p:nvSpPr>
+        <p:spPr>
+          <a:xfrm>
+            <a:off x="5803166" y="1188719"/>
+            <a:ext cx="5998464" cy="4828032"/>
+          </a:xfrm>
+          <a:prstGeom prst="roundRect">
+            <a:avLst>
+              <a:gd name="adj" fmla="val 4000"/>
+            </a:avLst>
+          </a:prstGeom>
+          <a:solidFill>
+            <a:srgbClr val="E8EEF4"/>
+          </a:solidFill>
+          <a:ln>
+            <a:noFill/>
+          </a:ln>
+        </p:spPr>
+        <p:style>
+          <a:lnRef idx="1">
+            <a:schemeClr val="accent1"/>
+          </a:lnRef>
+          <a:fillRef idx="3">
+            <a:schemeClr val="accent1"/>
+          </a:fillRef>
+          <a:effectRef idx="2">
+            <a:schemeClr val="accent1"/>
+          </a:effectRef>
+          <a:fontRef idx="minor">
+            <a:schemeClr val="lt1"/>
+          </a:fontRef>
+        </p:style>
+        <p:txBody>
+          <a:bodyPr rtlCol="0" anchor="ctr"/>
+          <a:lstStyle/>
+          <a:p>
+            <a:pPr algn="ctr"/>
+          </a:p>
+        </p:txBody>
+      </p:sp>
+      <p:pic>
+        <p:nvPicPr>
+          <p:cNvPr id="6" name="Picture 5" descr="capas-cache-paso1.png"/>
+          <p:cNvPicPr>
+            <a:picLocks noChangeAspect="1"/>
+          </p:cNvPicPr>
+          <p:nvPr/>
+        </p:nvPicPr>
+        <p:blipFill>
+          <a:blip r:embed="rId2"/>
+          <a:stretch>
+            <a:fillRect/>
+          </a:stretch>
+        </p:blipFill>
+        <p:spPr>
+          <a:xfrm>
             <a:off x="5876318" y="1261872"/>
             <a:ext cx="5852160" cy="4681728"/>
           </a:xfrm>
@@ -7890,7 +8607,7 @@
                 </a:solidFill>
                 <a:latin typeface="Calibri"/>
               </a:rPr>
-              <a:t>13</a:t>
+              <a:t>14</a:t>
             </a:r>
           </a:p>
         </p:txBody>
@@ -7986,346 +8703,6 @@
 </p:sld>
 </file>
 
-<file path=ppt/slides/slide14.xml><?xml version="1.0" encoding="utf-8"?>
-<p:sld xmlns:a="http://schemas.openxmlformats.org/drawingml/2006/main" xmlns:p="http://schemas.openxmlformats.org/presentationml/2006/main" xmlns:r="http://schemas.openxmlformats.org/officeDocument/2006/relationships">
-  <p:cSld>
-    <p:bg>
-      <p:bgPr>
-        <a:solidFill>
-          <a:srgbClr val="FFFFFF"/>
-        </a:solidFill>
-        <a:effectLst/>
-      </p:bgPr>
-    </p:bg>
-    <p:spTree>
-      <p:nvGrpSpPr>
-        <p:cNvPr id="1" name=""/>
-        <p:cNvGrpSpPr/>
-        <p:nvPr/>
-      </p:nvGrpSpPr>
-      <p:grpSpPr/>
-      <p:sp>
-        <p:nvSpPr>
-          <p:cNvPr id="2" name="Rectangle 1"/>
-          <p:cNvSpPr/>
-          <p:nvPr/>
-        </p:nvSpPr>
-        <p:spPr>
-          <a:xfrm>
-            <a:off x="0" y="0"/>
-            <a:ext cx="12191695" cy="960120"/>
-          </a:xfrm>
-          <a:prstGeom prst="rect">
-            <a:avLst/>
-          </a:prstGeom>
-          <a:solidFill>
-            <a:srgbClr val="095292"/>
-          </a:solidFill>
-          <a:ln>
-            <a:noFill/>
-          </a:ln>
-        </p:spPr>
-        <p:style>
-          <a:lnRef idx="1">
-            <a:schemeClr val="accent1"/>
-          </a:lnRef>
-          <a:fillRef idx="3">
-            <a:schemeClr val="accent1"/>
-          </a:fillRef>
-          <a:effectRef idx="2">
-            <a:schemeClr val="accent1"/>
-          </a:effectRef>
-          <a:fontRef idx="minor">
-            <a:schemeClr val="lt1"/>
-          </a:fontRef>
-        </p:style>
-        <p:txBody>
-          <a:bodyPr rtlCol="0" anchor="ctr"/>
-          <a:lstStyle/>
-          <a:p>
-            <a:pPr algn="ctr"/>
-          </a:p>
-        </p:txBody>
-      </p:sp>
-      <p:sp>
-        <p:nvSpPr>
-          <p:cNvPr id="3" name="Rectangle 2"/>
-          <p:cNvSpPr/>
-          <p:nvPr/>
-        </p:nvSpPr>
-        <p:spPr>
-          <a:xfrm>
-            <a:off x="0" y="960120"/>
-            <a:ext cx="12191695" cy="41148"/>
-          </a:xfrm>
-          <a:prstGeom prst="rect">
-            <a:avLst/>
-          </a:prstGeom>
-          <a:solidFill>
-            <a:srgbClr val="FFD000"/>
-          </a:solidFill>
-          <a:ln>
-            <a:noFill/>
-          </a:ln>
-        </p:spPr>
-        <p:style>
-          <a:lnRef idx="1">
-            <a:schemeClr val="accent1"/>
-          </a:lnRef>
-          <a:fillRef idx="3">
-            <a:schemeClr val="accent1"/>
-          </a:fillRef>
-          <a:effectRef idx="2">
-            <a:schemeClr val="accent1"/>
-          </a:effectRef>
-          <a:fontRef idx="minor">
-            <a:schemeClr val="lt1"/>
-          </a:fontRef>
-        </p:style>
-        <p:txBody>
-          <a:bodyPr rtlCol="0" anchor="ctr"/>
-          <a:lstStyle/>
-          <a:p>
-            <a:pPr algn="ctr"/>
-          </a:p>
-        </p:txBody>
-      </p:sp>
-      <p:sp>
-        <p:nvSpPr>
-          <p:cNvPr id="4" name="TextBox 3"/>
-          <p:cNvSpPr txBox="1"/>
-          <p:nvPr/>
-        </p:nvSpPr>
-        <p:spPr>
-          <a:xfrm>
-            <a:off x="457200" y="164592"/>
-            <a:ext cx="11277295" cy="502920"/>
-          </a:xfrm>
-          <a:prstGeom prst="rect">
-            <a:avLst/>
-          </a:prstGeom>
-          <a:noFill/>
-        </p:spPr>
-        <p:txBody>
-          <a:bodyPr wrap="square">
-            <a:spAutoFit/>
-          </a:bodyPr>
-          <a:lstStyle/>
-          <a:p>
-            <a:r>
-              <a:rPr sz="2600" b="1" i="0">
-                <a:solidFill>
-                  <a:srgbClr val="FFFFFF"/>
-                </a:solidFill>
-                <a:latin typeface="Calibri"/>
-              </a:rPr>
-              <a:t>Comprobar en un lab: recomendado, no obligatorio</a:t>
-            </a:r>
-          </a:p>
-        </p:txBody>
-      </p:sp>
-      <p:sp>
-        <p:nvSpPr>
-          <p:cNvPr id="5" name="TextBox 4"/>
-          <p:cNvSpPr txBox="1"/>
-          <p:nvPr/>
-        </p:nvSpPr>
-        <p:spPr>
-          <a:xfrm>
-            <a:off x="457200" y="1170432"/>
-            <a:ext cx="11277295" cy="5230368"/>
-          </a:xfrm>
-          <a:prstGeom prst="rect">
-            <a:avLst/>
-          </a:prstGeom>
-          <a:noFill/>
-        </p:spPr>
-        <p:txBody>
-          <a:bodyPr wrap="square">
-            <a:spAutoFit/>
-          </a:bodyPr>
-          <a:lstStyle/>
-          <a:p>
-            <a:pPr>
-              <a:spcAft>
-                <a:spcPts val="800"/>
-              </a:spcAft>
-            </a:pPr>
-            <a:r>
-              <a:rPr sz="2000" b="0" i="0">
-                <a:solidFill>
-                  <a:srgbClr val="333333"/>
-                </a:solidFill>
-                <a:latin typeface="Calibri"/>
-              </a:rPr>
-              <a:t>–   Lo que se entrega hoy es el </a:t>
-            </a:r>
-            <a:r>
-              <a:rPr sz="2000" b="1" i="0">
-                <a:solidFill>
-                  <a:srgbClr val="333333"/>
-                </a:solidFill>
-                <a:latin typeface="Calibri"/>
-              </a:rPr>
-              <a:t>Dockerfile</a:t>
-            </a:r>
-            <a:r>
-              <a:rPr sz="2000" b="0" i="0">
-                <a:solidFill>
-                  <a:srgbClr val="333333"/>
-                </a:solidFill>
-                <a:latin typeface="Calibri"/>
-              </a:rPr>
-              <a:t> y el </a:t>
-            </a:r>
-            <a:r>
-              <a:rPr sz="2000" b="1" i="0">
-                <a:solidFill>
-                  <a:srgbClr val="333333"/>
-                </a:solidFill>
-                <a:latin typeface="Calibri"/>
-              </a:rPr>
-              <a:t>ciclo justificado</a:t>
-            </a:r>
-            <a:r>
-              <a:rPr sz="2000" b="0" i="0">
-                <a:solidFill>
-                  <a:srgbClr val="333333"/>
-                </a:solidFill>
-                <a:latin typeface="Calibri"/>
-              </a:rPr>
-              <a:t>: se escribe y se razona, no hace falta ejecutarlo para entregar.</a:t>
-            </a:r>
-          </a:p>
-          <a:p>
-            <a:pPr>
-              <a:spcAft>
-                <a:spcPts val="800"/>
-              </a:spcAft>
-            </a:pPr>
-            <a:r>
-              <a:rPr sz="2000" b="0" i="0">
-                <a:solidFill>
-                  <a:srgbClr val="333333"/>
-                </a:solidFill>
-                <a:latin typeface="Calibri"/>
-              </a:rPr>
-              <a:t>–   Si quieres comprobarlo —y vale la pena— hay laboratorios de contenedores gratuitos en el navegador, sin instalar nada y sin tarjeta.</a:t>
-            </a:r>
-          </a:p>
-          <a:p>
-            <a:pPr>
-              <a:spcAft>
-                <a:spcPts val="800"/>
-              </a:spcAft>
-            </a:pPr>
-            <a:r>
-              <a:rPr sz="2000" b="0" i="0">
-                <a:solidFill>
-                  <a:srgbClr val="333333"/>
-                </a:solidFill>
-                <a:latin typeface="Calibri"/>
-              </a:rPr>
-              <a:t>–   </a:t>
-            </a:r>
-            <a:r>
-              <a:rPr sz="2000" b="1" i="0">
-                <a:solidFill>
-                  <a:srgbClr val="333333"/>
-                </a:solidFill>
-                <a:latin typeface="Calibri"/>
-              </a:rPr>
-              <a:t>Ojo con hacerlos obligatorios:</a:t>
-            </a:r>
-            <a:r>
-              <a:rPr sz="2000" b="0" i="0">
-                <a:solidFill>
-                  <a:srgbClr val="333333"/>
-                </a:solidFill>
-                <a:latin typeface="Calibri"/>
-              </a:rPr>
-              <a:t> la sesión caduca en torno a la hora y el plan gratuito limita cuántas abres al día. Por eso tu nota no depende de que carguen.</a:t>
-            </a:r>
-          </a:p>
-          <a:p>
-            <a:pPr>
-              <a:spcAft>
-                <a:spcPts val="800"/>
-              </a:spcAft>
-            </a:pPr>
-            <a:r>
-              <a:rPr sz="2000" b="0" i="0">
-                <a:solidFill>
-                  <a:srgbClr val="333333"/>
-                </a:solidFill>
-                <a:latin typeface="Calibri"/>
-              </a:rPr>
-              <a:t>–   El Dockerfile se escribe en </a:t>
-            </a:r>
-            <a:r>
-              <a:rPr sz="2000" b="1" i="0">
-                <a:solidFill>
-                  <a:srgbClr val="333333"/>
-                </a:solidFill>
-                <a:latin typeface="Calibri"/>
-              </a:rPr>
-              <a:t>tu</a:t>
-            </a:r>
-            <a:r>
-              <a:rPr sz="2000" b="0" i="0">
-                <a:solidFill>
-                  <a:srgbClr val="333333"/>
-                </a:solidFill>
-                <a:latin typeface="Calibri"/>
-              </a:rPr>
-              <a:t> carpeta y se pega en el lab, nunca al contrario: lo que se cierra con la sesión del lab se pierde.</a:t>
-            </a:r>
-          </a:p>
-        </p:txBody>
-      </p:sp>
-      <p:sp>
-        <p:nvSpPr>
-          <p:cNvPr id="6" name="TextBox 5"/>
-          <p:cNvSpPr txBox="1"/>
-          <p:nvPr/>
-        </p:nvSpPr>
-        <p:spPr>
-          <a:xfrm>
-            <a:off x="11185855" y="6473952"/>
-            <a:ext cx="640080" cy="274320"/>
-          </a:xfrm>
-          <a:prstGeom prst="rect">
-            <a:avLst/>
-          </a:prstGeom>
-          <a:noFill/>
-        </p:spPr>
-        <p:txBody>
-          <a:bodyPr wrap="square">
-            <a:spAutoFit/>
-          </a:bodyPr>
-          <a:lstStyle/>
-          <a:p>
-            <a:pPr algn="r"/>
-            <a:r>
-              <a:rPr sz="1100" b="0" i="0">
-                <a:solidFill>
-                  <a:srgbClr val="666666"/>
-                </a:solidFill>
-                <a:latin typeface="Calibri"/>
-              </a:rPr>
-              <a:t>14</a:t>
-            </a:r>
-          </a:p>
-        </p:txBody>
-      </p:sp>
-    </p:spTree>
-  </p:cSld>
-  <p:clrMapOvr>
-    <a:masterClrMapping/>
-  </p:clrMapOvr>
-</p:sld>
-</file>
-
 <file path=ppt/slides/slide15.xml><?xml version="1.0" encoding="utf-8"?>
 <p:sld xmlns:a="http://schemas.openxmlformats.org/drawingml/2006/main" xmlns:p="http://schemas.openxmlformats.org/presentationml/2006/main" xmlns:r="http://schemas.openxmlformats.org/officeDocument/2006/relationships">
   <p:cSld>
@@ -8466,14 +8843,83 @@
       </p:sp>
       <p:sp>
         <p:nvSpPr>
-          <p:cNvPr id="5" name="TextBox 4"/>
+          <p:cNvPr id="5" name="Rounded Rectangle 4"/>
+          <p:cNvSpPr/>
+          <p:nvPr/>
+        </p:nvSpPr>
+        <p:spPr>
+          <a:xfrm>
+            <a:off x="5797149" y="1343926"/>
+            <a:ext cx="6010497" cy="4837658"/>
+          </a:xfrm>
+          <a:prstGeom prst="roundRect">
+            <a:avLst>
+              <a:gd name="adj" fmla="val 4000"/>
+            </a:avLst>
+          </a:prstGeom>
+          <a:solidFill>
+            <a:srgbClr val="E8EEF4"/>
+          </a:solidFill>
+          <a:ln>
+            <a:noFill/>
+          </a:ln>
+        </p:spPr>
+        <p:style>
+          <a:lnRef idx="1">
+            <a:schemeClr val="accent1"/>
+          </a:lnRef>
+          <a:fillRef idx="3">
+            <a:schemeClr val="accent1"/>
+          </a:fillRef>
+          <a:effectRef idx="2">
+            <a:schemeClr val="accent1"/>
+          </a:effectRef>
+          <a:fontRef idx="minor">
+            <a:schemeClr val="lt1"/>
+          </a:fontRef>
+        </p:style>
+        <p:txBody>
+          <a:bodyPr rtlCol="0" anchor="ctr"/>
+          <a:lstStyle/>
+          <a:p>
+            <a:pPr algn="ctr"/>
+          </a:p>
+        </p:txBody>
+      </p:sp>
+      <p:pic>
+        <p:nvPicPr>
+          <p:cNvPr id="6" name="Picture 5" descr="ilus-dockerfile-minimo-paso1.png"/>
+          <p:cNvPicPr>
+            <a:picLocks noChangeAspect="1"/>
+          </p:cNvPicPr>
+          <p:nvPr/>
+        </p:nvPicPr>
+        <p:blipFill>
+          <a:blip r:embed="rId2"/>
+          <a:stretch>
+            <a:fillRect/>
+          </a:stretch>
+        </p:blipFill>
+        <p:spPr>
+          <a:xfrm>
+            <a:off x="5870301" y="1417078"/>
+            <a:ext cx="5864193" cy="4691354"/>
+          </a:xfrm>
+          <a:prstGeom prst="rect">
+            <a:avLst/>
+          </a:prstGeom>
+        </p:spPr>
+      </p:pic>
+      <p:sp>
+        <p:nvSpPr>
+          <p:cNvPr id="7" name="TextBox 6"/>
           <p:cNvSpPr txBox="1"/>
           <p:nvPr/>
         </p:nvSpPr>
         <p:spPr>
           <a:xfrm>
-            <a:off x="457200" y="1170432"/>
-            <a:ext cx="11277295" cy="5230368"/>
+            <a:off x="457200" y="1353312"/>
+            <a:ext cx="5093061" cy="5047488"/>
           </a:xfrm>
           <a:prstGeom prst="rect">
             <a:avLst/>
@@ -8623,113 +9069,11 @@
               <a:t> que el código: así cambiar una línea no reinstala nada (es la caché por capas).</a:t>
             </a:r>
           </a:p>
-          <a:p>
-            <a:pPr>
-              <a:spcAft>
-                <a:spcPts val="800"/>
-              </a:spcAft>
-            </a:pPr>
-            <a:r>
-              <a:rPr sz="2000" b="0" i="0">
-                <a:solidFill>
-                  <a:srgbClr val="333333"/>
-                </a:solidFill>
-                <a:latin typeface="Calibri"/>
-              </a:rPr>
-              <a:t>–   </a:t>
-            </a:r>
-            <a:r>
-              <a:rPr sz="2000" b="1" i="0">
-                <a:solidFill>
-                  <a:srgbClr val="333333"/>
-                </a:solidFill>
-                <a:latin typeface="Calibri"/>
-              </a:rPr>
-              <a:t>Nunca un secreto en la imagen:</a:t>
-            </a:r>
-            <a:r>
-              <a:rPr sz="2000" b="0" i="0">
-                <a:solidFill>
-                  <a:srgbClr val="333333"/>
-                </a:solidFill>
-                <a:latin typeface="Calibri"/>
-              </a:rPr>
-              <a:t> las capas se acumulan y «docker history» las lee aunque el archivo se borre después.</a:t>
-            </a:r>
-          </a:p>
-          <a:p>
-            <a:pPr>
-              <a:spcAft>
-                <a:spcPts val="800"/>
-              </a:spcAft>
-            </a:pPr>
-            <a:r>
-              <a:rPr sz="2000" b="0" i="0">
-                <a:solidFill>
-                  <a:srgbClr val="333333"/>
-                </a:solidFill>
-                <a:latin typeface="Calibri"/>
-              </a:rPr>
-              <a:t>–   Si haces «COPY . .», va con un </a:t>
-            </a:r>
-            <a:r>
-              <a:rPr sz="2000" b="1" i="0">
-                <a:solidFill>
-                  <a:srgbClr val="333333"/>
-                </a:solidFill>
-                <a:latin typeface="Calibri"/>
-              </a:rPr>
-              <a:t>«.dockerignore»</a:t>
-            </a:r>
-            <a:r>
-              <a:rPr sz="2000" b="0" i="0">
-                <a:solidFill>
-                  <a:srgbClr val="333333"/>
-                </a:solidFill>
-                <a:latin typeface="Calibri"/>
-              </a:rPr>
-              <a:t> al lado («.env», «node_modules», «.git») — y se menciona en la entrega.</a:t>
-            </a:r>
-          </a:p>
-          <a:p>
-            <a:pPr>
-              <a:spcAft>
-                <a:spcPts val="800"/>
-              </a:spcAft>
-            </a:pPr>
-            <a:r>
-              <a:rPr sz="2000" b="0" i="0">
-                <a:solidFill>
-                  <a:srgbClr val="333333"/>
-                </a:solidFill>
-                <a:latin typeface="Calibri"/>
-              </a:rPr>
-              <a:t>–   «EXPOSE» </a:t>
-            </a:r>
-            <a:r>
-              <a:rPr sz="2000" b="1" i="0">
-                <a:solidFill>
-                  <a:srgbClr val="333333"/>
-                </a:solidFill>
-                <a:latin typeface="Calibri"/>
-              </a:rPr>
-              <a:t>documenta</a:t>
-            </a:r>
-            <a:r>
-              <a:rPr sz="2000" b="0" i="0">
-                <a:solidFill>
-                  <a:srgbClr val="333333"/>
-                </a:solidFill>
-                <a:latin typeface="Calibri"/>
-              </a:rPr>
-              <a:t>, no publica. Publicar es el «-p» del «docker run».</a:t>
-            </a:r>
-          </a:p>
-        </p:txBody>
-      </p:sp>
-      <p:sp>
-        <p:nvSpPr>
-          <p:cNvPr id="6" name="TextBox 5"/>
+        </p:txBody>
+      </p:sp>
+      <p:sp>
+        <p:nvSpPr>
+          <p:cNvPr id="8" name="TextBox 7"/>
           <p:cNvSpPr txBox="1"/>
           <p:nvPr/>
         </p:nvSpPr>
@@ -10309,14 +10653,83 @@
       </p:sp>
       <p:sp>
         <p:nvSpPr>
-          <p:cNvPr id="5" name="TextBox 4"/>
+          <p:cNvPr id="5" name="Rounded Rectangle 4"/>
+          <p:cNvSpPr/>
+          <p:nvPr/>
+        </p:nvSpPr>
+        <p:spPr>
+          <a:xfrm>
+            <a:off x="5797149" y="1343926"/>
+            <a:ext cx="6010497" cy="4837658"/>
+          </a:xfrm>
+          <a:prstGeom prst="roundRect">
+            <a:avLst>
+              <a:gd name="adj" fmla="val 4000"/>
+            </a:avLst>
+          </a:prstGeom>
+          <a:solidFill>
+            <a:srgbClr val="E8EEF4"/>
+          </a:solidFill>
+          <a:ln>
+            <a:noFill/>
+          </a:ln>
+        </p:spPr>
+        <p:style>
+          <a:lnRef idx="1">
+            <a:schemeClr val="accent1"/>
+          </a:lnRef>
+          <a:fillRef idx="3">
+            <a:schemeClr val="accent1"/>
+          </a:fillRef>
+          <a:effectRef idx="2">
+            <a:schemeClr val="accent1"/>
+          </a:effectRef>
+          <a:fontRef idx="minor">
+            <a:schemeClr val="lt1"/>
+          </a:fontRef>
+        </p:style>
+        <p:txBody>
+          <a:bodyPr rtlCol="0" anchor="ctr"/>
+          <a:lstStyle/>
+          <a:p>
+            <a:pPr algn="ctr"/>
+          </a:p>
+        </p:txBody>
+      </p:sp>
+      <p:pic>
+        <p:nvPicPr>
+          <p:cNvPr id="6" name="Picture 5" descr="ilus-construir-correr-paso1.png"/>
+          <p:cNvPicPr>
+            <a:picLocks noChangeAspect="1"/>
+          </p:cNvPicPr>
+          <p:nvPr/>
+        </p:nvPicPr>
+        <p:blipFill>
+          <a:blip r:embed="rId2"/>
+          <a:stretch>
+            <a:fillRect/>
+          </a:stretch>
+        </p:blipFill>
+        <p:spPr>
+          <a:xfrm>
+            <a:off x="5870301" y="1417078"/>
+            <a:ext cx="5864193" cy="4691354"/>
+          </a:xfrm>
+          <a:prstGeom prst="rect">
+            <a:avLst/>
+          </a:prstGeom>
+        </p:spPr>
+      </p:pic>
+      <p:sp>
+        <p:nvSpPr>
+          <p:cNvPr id="7" name="TextBox 6"/>
           <p:cNvSpPr txBox="1"/>
           <p:nvPr/>
         </p:nvSpPr>
         <p:spPr>
           <a:xfrm>
-            <a:off x="457200" y="1170432"/>
-            <a:ext cx="11277295" cy="5230368"/>
+            <a:off x="457200" y="1353312"/>
+            <a:ext cx="5093061" cy="5047488"/>
           </a:xfrm>
           <a:prstGeom prst="rect">
             <a:avLst/>
@@ -10466,185 +10879,11 @@
               <a:t> (la del «EXPOSE»).</a:t>
             </a:r>
           </a:p>
-          <a:p>
-            <a:pPr>
-              <a:spcAft>
-                <a:spcPts val="800"/>
-              </a:spcAft>
-            </a:pPr>
-            <a:r>
-              <a:rPr sz="2000" b="0" i="0">
-                <a:solidFill>
-                  <a:srgbClr val="333333"/>
-                </a:solidFill>
-                <a:latin typeface="Calibri"/>
-              </a:rPr>
-              <a:t>–   </a:t>
-            </a:r>
-            <a:r>
-              <a:rPr sz="2000" b="1" i="0">
-                <a:solidFill>
-                  <a:srgbClr val="333333"/>
-                </a:solidFill>
-                <a:latin typeface="Calibri"/>
-              </a:rPr>
-              <a:t>Si los inviertes,</a:t>
-            </a:r>
-            <a:r>
-              <a:rPr sz="2000" b="0" i="0">
-                <a:solidFill>
-                  <a:srgbClr val="333333"/>
-                </a:solidFill>
-                <a:latin typeface="Calibri"/>
-              </a:rPr>
-              <a:t> «docker ps» muestra el contenedor </a:t>
-            </a:r>
-            <a:r>
-              <a:rPr sz="2000" b="1" i="0">
-                <a:solidFill>
-                  <a:srgbClr val="333333"/>
-                </a:solidFill>
-                <a:latin typeface="Calibri"/>
-              </a:rPr>
-              <a:t>Up</a:t>
-            </a:r>
-            <a:r>
-              <a:rPr sz="2000" b="0" i="0">
-                <a:solidFill>
-                  <a:srgbClr val="333333"/>
-                </a:solidFill>
-                <a:latin typeface="Calibri"/>
-              </a:rPr>
-              <a:t> y la petición muere sin respuesta: el síntoma no dice la causa.</a:t>
-            </a:r>
-          </a:p>
-          <a:p>
-            <a:pPr>
-              <a:spcAft>
-                <a:spcPts val="800"/>
-              </a:spcAft>
-            </a:pPr>
-            <a:r>
-              <a:rPr sz="2000" b="0" i="0">
-                <a:solidFill>
-                  <a:srgbClr val="333333"/>
-                </a:solidFill>
-                <a:latin typeface="Calibri"/>
-              </a:rPr>
-              <a:t>–   </a:t>
-            </a:r>
-            <a:r>
-              <a:rPr sz="2000" b="1" i="0">
-                <a:solidFill>
-                  <a:srgbClr val="333333"/>
-                </a:solidFill>
-                <a:latin typeface="Calibri"/>
-              </a:rPr>
-              <a:t>Verificar:</a:t>
-            </a:r>
-            <a:r>
-              <a:rPr sz="2000" b="0" i="0">
-                <a:solidFill>
-                  <a:srgbClr val="333333"/>
-                </a:solidFill>
-                <a:latin typeface="Calibri"/>
-              </a:rPr>
-              <a:t> el contrato de salud son </a:t>
-            </a:r>
-            <a:r>
-              <a:rPr sz="2000" b="1" i="0">
-                <a:solidFill>
-                  <a:srgbClr val="333333"/>
-                </a:solidFill>
-                <a:latin typeface="Calibri"/>
-              </a:rPr>
-              <a:t>tres</a:t>
-            </a:r>
-            <a:r>
-              <a:rPr sz="2000" b="0" i="0">
-                <a:solidFill>
-                  <a:srgbClr val="333333"/>
-                </a:solidFill>
-                <a:latin typeface="Calibri"/>
-              </a:rPr>
-              <a:t> datos — </a:t>
-            </a:r>
-            <a:r>
-              <a:rPr sz="2000" b="1" i="0">
-                <a:solidFill>
-                  <a:srgbClr val="333333"/>
-                </a:solidFill>
-                <a:latin typeface="Calibri"/>
-              </a:rPr>
-              <a:t>ruta</a:t>
-            </a:r>
-            <a:r>
-              <a:rPr sz="2000" b="0" i="0">
-                <a:solidFill>
-                  <a:srgbClr val="333333"/>
-                </a:solidFill>
-                <a:latin typeface="Calibri"/>
-              </a:rPr>
-              <a:t> («GET /health»), </a:t>
-            </a:r>
-            <a:r>
-              <a:rPr sz="2000" b="1" i="0">
-                <a:solidFill>
-                  <a:srgbClr val="333333"/>
-                </a:solidFill>
-                <a:latin typeface="Calibri"/>
-              </a:rPr>
-              <a:t>código</a:t>
-            </a:r>
-            <a:r>
-              <a:rPr sz="2000" b="0" i="0">
-                <a:solidFill>
-                  <a:srgbClr val="333333"/>
-                </a:solidFill>
-                <a:latin typeface="Calibri"/>
-              </a:rPr>
-              <a:t> («200» vivo · «503» sin base) y </a:t>
-            </a:r>
-            <a:r>
-              <a:rPr sz="2000" b="1" i="0">
-                <a:solidFill>
-                  <a:srgbClr val="333333"/>
-                </a:solidFill>
-                <a:latin typeface="Calibri"/>
-              </a:rPr>
-              <a:t>cuerpo</a:t>
-            </a:r>
-            <a:r>
-              <a:rPr sz="2000" b="0" i="0">
-                <a:solidFill>
-                  <a:srgbClr val="333333"/>
-                </a:solidFill>
-                <a:latin typeface="Calibri"/>
-              </a:rPr>
-              <a:t> con su formato.</a:t>
-            </a:r>
-          </a:p>
-          <a:p>
-            <a:pPr>
-              <a:spcAft>
-                <a:spcPts val="800"/>
-              </a:spcAft>
-            </a:pPr>
-            <a:r>
-              <a:rPr sz="2000" b="0" i="0">
-                <a:solidFill>
-                  <a:srgbClr val="333333"/>
-                </a:solidFill>
-                <a:latin typeface="Calibri"/>
-              </a:rPr>
-              <a:t>–   Un «200» con cuerpo vacío no distingue «vivo» de «vivo pero roto»: el cuerpo lleva al menos un campo verificable.</a:t>
-            </a:r>
-          </a:p>
-        </p:txBody>
-      </p:sp>
-      <p:sp>
-        <p:nvSpPr>
-          <p:cNvPr id="6" name="TextBox 5"/>
+        </p:txBody>
+      </p:sp>
+      <p:sp>
+        <p:nvSpPr>
+          <p:cNvPr id="8" name="TextBox 7"/>
           <p:cNvSpPr txBox="1"/>
           <p:nvPr/>
         </p:nvSpPr>
@@ -14196,14 +14435,83 @@
       </p:sp>
       <p:sp>
         <p:nvSpPr>
-          <p:cNvPr id="5" name="TextBox 4"/>
+          <p:cNvPr id="5" name="Rounded Rectangle 4"/>
+          <p:cNvSpPr/>
+          <p:nvPr/>
+        </p:nvSpPr>
+        <p:spPr>
+          <a:xfrm>
+            <a:off x="5797149" y="1343926"/>
+            <a:ext cx="6010497" cy="4837658"/>
+          </a:xfrm>
+          <a:prstGeom prst="roundRect">
+            <a:avLst>
+              <a:gd name="adj" fmla="val 4000"/>
+            </a:avLst>
+          </a:prstGeom>
+          <a:solidFill>
+            <a:srgbClr val="E8EEF4"/>
+          </a:solidFill>
+          <a:ln>
+            <a:noFill/>
+          </a:ln>
+        </p:spPr>
+        <p:style>
+          <a:lnRef idx="1">
+            <a:schemeClr val="accent1"/>
+          </a:lnRef>
+          <a:fillRef idx="3">
+            <a:schemeClr val="accent1"/>
+          </a:fillRef>
+          <a:effectRef idx="2">
+            <a:schemeClr val="accent1"/>
+          </a:effectRef>
+          <a:fontRef idx="minor">
+            <a:schemeClr val="lt1"/>
+          </a:fontRef>
+        </p:style>
+        <p:txBody>
+          <a:bodyPr rtlCol="0" anchor="ctr"/>
+          <a:lstStyle/>
+          <a:p>
+            <a:pPr algn="ctr"/>
+          </a:p>
+        </p:txBody>
+      </p:sp>
+      <p:pic>
+        <p:nvPicPr>
+          <p:cNvPr id="6" name="Picture 5" descr="ilus-docker-ps-paso1.png"/>
+          <p:cNvPicPr>
+            <a:picLocks noChangeAspect="1"/>
+          </p:cNvPicPr>
+          <p:nvPr/>
+        </p:nvPicPr>
+        <p:blipFill>
+          <a:blip r:embed="rId2"/>
+          <a:stretch>
+            <a:fillRect/>
+          </a:stretch>
+        </p:blipFill>
+        <p:spPr>
+          <a:xfrm>
+            <a:off x="5870301" y="1417078"/>
+            <a:ext cx="5864193" cy="4691354"/>
+          </a:xfrm>
+          <a:prstGeom prst="rect">
+            <a:avLst/>
+          </a:prstGeom>
+        </p:spPr>
+      </p:pic>
+      <p:sp>
+        <p:nvSpPr>
+          <p:cNvPr id="7" name="TextBox 6"/>
           <p:cNvSpPr txBox="1"/>
           <p:nvPr/>
         </p:nvSpPr>
         <p:spPr>
           <a:xfrm>
-            <a:off x="457200" y="1170432"/>
-            <a:ext cx="11277295" cy="5230368"/>
+            <a:off x="457200" y="1353312"/>
+            <a:ext cx="5093061" cy="5047488"/>
           </a:xfrm>
           <a:prstGeom prst="rect">
             <a:avLst/>
@@ -14267,7 +14575,7 @@
       </p:sp>
       <p:sp>
         <p:nvSpPr>
-          <p:cNvPr id="6" name="TextBox 5"/>
+          <p:cNvPr id="8" name="TextBox 7"/>
           <p:cNvSpPr txBox="1"/>
           <p:nvPr/>
         </p:nvSpPr>
@@ -14966,14 +15274,83 @@
       </p:sp>
       <p:sp>
         <p:nvSpPr>
-          <p:cNvPr id="5" name="TextBox 4"/>
+          <p:cNvPr id="5" name="Rounded Rectangle 4"/>
+          <p:cNvSpPr/>
+          <p:nvPr/>
+        </p:nvSpPr>
+        <p:spPr>
+          <a:xfrm>
+            <a:off x="5797149" y="1343926"/>
+            <a:ext cx="6010497" cy="4837658"/>
+          </a:xfrm>
+          <a:prstGeom prst="roundRect">
+            <a:avLst>
+              <a:gd name="adj" fmla="val 4000"/>
+            </a:avLst>
+          </a:prstGeom>
+          <a:solidFill>
+            <a:srgbClr val="E8EEF4"/>
+          </a:solidFill>
+          <a:ln>
+            <a:noFill/>
+          </a:ln>
+        </p:spPr>
+        <p:style>
+          <a:lnRef idx="1">
+            <a:schemeClr val="accent1"/>
+          </a:lnRef>
+          <a:fillRef idx="3">
+            <a:schemeClr val="accent1"/>
+          </a:fillRef>
+          <a:effectRef idx="2">
+            <a:schemeClr val="accent1"/>
+          </a:effectRef>
+          <a:fontRef idx="minor">
+            <a:schemeClr val="lt1"/>
+          </a:fontRef>
+        </p:style>
+        <p:txBody>
+          <a:bodyPr rtlCol="0" anchor="ctr"/>
+          <a:lstStyle/>
+          <a:p>
+            <a:pPr algn="ctr"/>
+          </a:p>
+        </p:txBody>
+      </p:sp>
+      <p:pic>
+        <p:nvPicPr>
+          <p:cNvPr id="6" name="Picture 5" descr="ilus-de-donde-viene-paso1.png"/>
+          <p:cNvPicPr>
+            <a:picLocks noChangeAspect="1"/>
+          </p:cNvPicPr>
+          <p:nvPr/>
+        </p:nvPicPr>
+        <p:blipFill>
+          <a:blip r:embed="rId2"/>
+          <a:stretch>
+            <a:fillRect/>
+          </a:stretch>
+        </p:blipFill>
+        <p:spPr>
+          <a:xfrm>
+            <a:off x="5870301" y="1417078"/>
+            <a:ext cx="5864193" cy="4691354"/>
+          </a:xfrm>
+          <a:prstGeom prst="rect">
+            <a:avLst/>
+          </a:prstGeom>
+        </p:spPr>
+      </p:pic>
+      <p:sp>
+        <p:nvSpPr>
+          <p:cNvPr id="7" name="TextBox 6"/>
           <p:cNvSpPr txBox="1"/>
           <p:nvPr/>
         </p:nvSpPr>
         <p:spPr>
           <a:xfrm>
-            <a:off x="457200" y="1170432"/>
-            <a:ext cx="11277295" cy="5230368"/>
+            <a:off x="457200" y="1353312"/>
+            <a:ext cx="5093061" cy="5047488"/>
           </a:xfrm>
           <a:prstGeom prst="rect">
             <a:avLst/>
@@ -14998,7 +15375,7 @@
                 </a:solidFill>
                 <a:latin typeface="Calibri"/>
               </a:rPr>
-              <a:t>–   La virtualizacion es la tecnica que permite ejecutar varias maquinas logicas sobre un mismo hardware fisico, y el hipervisor es el software que la hace posible.</a:t>
+              <a:t>–   La virtualizacion es la tecnica que permite ejecutar varias maquinas logicas sobre un mismo hardware fisico, y el hipervisor es el software que la…</a:t>
             </a:r>
           </a:p>
           <a:p>
@@ -15021,7 +15398,7 @@
       </p:sp>
       <p:sp>
         <p:nvSpPr>
-          <p:cNvPr id="6" name="TextBox 5"/>
+          <p:cNvPr id="8" name="TextBox 7"/>
           <p:cNvSpPr txBox="1"/>
           <p:nvPr/>
         </p:nvSpPr>
@@ -17553,14 +17930,83 @@
       </p:sp>
       <p:sp>
         <p:nvSpPr>
-          <p:cNvPr id="5" name="TextBox 4"/>
+          <p:cNvPr id="5" name="Rounded Rectangle 4"/>
+          <p:cNvSpPr/>
+          <p:nvPr/>
+        </p:nvSpPr>
+        <p:spPr>
+          <a:xfrm>
+            <a:off x="5797149" y="1343926"/>
+            <a:ext cx="6010497" cy="4837658"/>
+          </a:xfrm>
+          <a:prstGeom prst="roundRect">
+            <a:avLst>
+              <a:gd name="adj" fmla="val 4000"/>
+            </a:avLst>
+          </a:prstGeom>
+          <a:solidFill>
+            <a:srgbClr val="E8EEF4"/>
+          </a:solidFill>
+          <a:ln>
+            <a:noFill/>
+          </a:ln>
+        </p:spPr>
+        <p:style>
+          <a:lnRef idx="1">
+            <a:schemeClr val="accent1"/>
+          </a:lnRef>
+          <a:fillRef idx="3">
+            <a:schemeClr val="accent1"/>
+          </a:fillRef>
+          <a:effectRef idx="2">
+            <a:schemeClr val="accent1"/>
+          </a:effectRef>
+          <a:fontRef idx="minor">
+            <a:schemeClr val="lt1"/>
+          </a:fontRef>
+        </p:style>
+        <p:txBody>
+          <a:bodyPr rtlCol="0" anchor="ctr"/>
+          <a:lstStyle/>
+          <a:p>
+            <a:pPr algn="ctr"/>
+          </a:p>
+        </p:txBody>
+      </p:sp>
+      <p:pic>
+        <p:nvPicPr>
+          <p:cNvPr id="6" name="Picture 5" descr="ilus-vm-vs-contenedor-paso1.png"/>
+          <p:cNvPicPr>
+            <a:picLocks noChangeAspect="1"/>
+          </p:cNvPicPr>
+          <p:nvPr/>
+        </p:nvPicPr>
+        <p:blipFill>
+          <a:blip r:embed="rId2"/>
+          <a:stretch>
+            <a:fillRect/>
+          </a:stretch>
+        </p:blipFill>
+        <p:spPr>
+          <a:xfrm>
+            <a:off x="5870301" y="1417078"/>
+            <a:ext cx="5864193" cy="4691354"/>
+          </a:xfrm>
+          <a:prstGeom prst="rect">
+            <a:avLst/>
+          </a:prstGeom>
+        </p:spPr>
+      </p:pic>
+      <p:sp>
+        <p:nvSpPr>
+          <p:cNvPr id="7" name="TextBox 6"/>
           <p:cNvSpPr txBox="1"/>
           <p:nvPr/>
         </p:nvSpPr>
         <p:spPr>
           <a:xfrm>
-            <a:off x="457200" y="1170432"/>
-            <a:ext cx="11277295" cy="5230368"/>
+            <a:off x="457200" y="1353312"/>
+            <a:ext cx="5093061" cy="5047488"/>
           </a:xfrm>
           <a:prstGeom prst="rect">
             <a:avLst/>
@@ -17654,27 +18100,11 @@
               <a:t> servicio (API stub o front estático).</a:t>
             </a:r>
           </a:p>
-          <a:p>
-            <a:pPr>
-              <a:spcAft>
-                <a:spcPts val="800"/>
-              </a:spcAft>
-            </a:pPr>
-            <a:r>
-              <a:rPr sz="2000" b="0" i="0">
-                <a:solidFill>
-                  <a:srgbClr val="333333"/>
-                </a:solidFill>
-                <a:latin typeface="Calibri"/>
-              </a:rPr>
-              <a:t>–   Error común: creer que el contenedor «no tiene sistema operativo»: usa el kernel del anfitrión, por eso una imagen Linux necesita un kernel Linux debajo.</a:t>
-            </a:r>
-          </a:p>
-        </p:txBody>
-      </p:sp>
-      <p:sp>
-        <p:nvSpPr>
-          <p:cNvPr id="6" name="TextBox 5"/>
+        </p:txBody>
+      </p:sp>
+      <p:sp>
+        <p:nvSpPr>
+          <p:cNvPr id="8" name="TextBox 7"/>
           <p:cNvSpPr txBox="1"/>
           <p:nvPr/>
         </p:nvSpPr>

--- a/Arquitectura de Sistemas Computacionales/Clases/Clase 3 - Virtualizacion y contenedores/Presentacion.pptx
+++ b/Arquitectura de Sistemas Computacionales/Clases/Clase 3 - Virtualizacion y contenedores/Presentacion.pptx
@@ -6844,7 +6844,7 @@
         <p:spPr>
           <a:xfrm>
             <a:off x="457200" y="1261872"/>
-            <a:ext cx="11277295" cy="5025563"/>
+            <a:ext cx="11277295" cy="4172902"/>
           </a:xfrm>
           <a:prstGeom prst="roundRect">
             <a:avLst>
@@ -7093,8 +7093,8 @@
         </p:nvSpPr>
         <p:spPr>
           <a:xfrm>
-            <a:off x="1188720" y="1719072"/>
-            <a:ext cx="10271455" cy="4431203"/>
+            <a:off x="685800" y="1719072"/>
+            <a:ext cx="502920" cy="3578542"/>
           </a:xfrm>
           <a:prstGeom prst="rect">
             <a:avLst/>
@@ -7107,13 +7107,228 @@
           </a:bodyPr>
           <a:lstStyle/>
           <a:p>
+            <a:pPr algn="r">
+              <a:spcAft>
+                <a:spcPts val="342"/>
+              </a:spcAft>
+            </a:pPr>
+            <a:r>
+              <a:rPr sz="1600" i="0" b="0">
+                <a:solidFill>
+                  <a:srgbClr val="858585"/>
+                </a:solidFill>
+                <a:latin typeface="Consolas"/>
+              </a:rPr>
+              <a:t>1</a:t>
+            </a:r>
+          </a:p>
+          <a:p>
+            <a:pPr algn="r">
+              <a:spcAft>
+                <a:spcPts val="342"/>
+              </a:spcAft>
+            </a:pPr>
+            <a:r>
+              <a:rPr sz="1600" i="0" b="0">
+                <a:solidFill>
+                  <a:srgbClr val="858585"/>
+                </a:solidFill>
+                <a:latin typeface="Consolas"/>
+              </a:rPr>
+              <a:t>2</a:t>
+            </a:r>
+          </a:p>
+          <a:p>
+            <a:pPr algn="r">
+              <a:spcAft>
+                <a:spcPts val="342"/>
+              </a:spcAft>
+            </a:pPr>
+            <a:r>
+              <a:rPr sz="1600" i="0" b="0">
+                <a:solidFill>
+                  <a:srgbClr val="858585"/>
+                </a:solidFill>
+                <a:latin typeface="Consolas"/>
+              </a:rPr>
+              <a:t>3</a:t>
+            </a:r>
+          </a:p>
+          <a:p>
+            <a:pPr algn="r">
+              <a:spcAft>
+                <a:spcPts val="342"/>
+              </a:spcAft>
+            </a:pPr>
+            <a:r>
+              <a:rPr sz="1600" i="0" b="0">
+                <a:solidFill>
+                  <a:srgbClr val="858585"/>
+                </a:solidFill>
+                <a:latin typeface="Consolas"/>
+              </a:rPr>
+              <a:t>4</a:t>
+            </a:r>
+          </a:p>
+          <a:p>
+            <a:pPr algn="r">
+              <a:spcAft>
+                <a:spcPts val="342"/>
+              </a:spcAft>
+            </a:pPr>
+            <a:r>
+              <a:rPr sz="1600" i="0" b="0">
+                <a:solidFill>
+                  <a:srgbClr val="858585"/>
+                </a:solidFill>
+                <a:latin typeface="Consolas"/>
+              </a:rPr>
+              <a:t>5</a:t>
+            </a:r>
+          </a:p>
+          <a:p>
+            <a:pPr algn="r">
+              <a:spcAft>
+                <a:spcPts val="342"/>
+              </a:spcAft>
+            </a:pPr>
+            <a:r>
+              <a:rPr sz="1600" i="0" b="0">
+                <a:solidFill>
+                  <a:srgbClr val="858585"/>
+                </a:solidFill>
+                <a:latin typeface="Consolas"/>
+              </a:rPr>
+              <a:t>6</a:t>
+            </a:r>
+          </a:p>
+          <a:p>
+            <a:pPr algn="r">
+              <a:spcAft>
+                <a:spcPts val="342"/>
+              </a:spcAft>
+            </a:pPr>
+            <a:r>
+              <a:rPr sz="1600" i="0" b="0">
+                <a:solidFill>
+                  <a:srgbClr val="858585"/>
+                </a:solidFill>
+                <a:latin typeface="Consolas"/>
+              </a:rPr>
+              <a:t>7</a:t>
+            </a:r>
+          </a:p>
+          <a:p>
+            <a:pPr algn="r">
+              <a:spcAft>
+                <a:spcPts val="342"/>
+              </a:spcAft>
+            </a:pPr>
+            <a:r>
+              <a:rPr sz="1600" i="0" b="0">
+                <a:solidFill>
+                  <a:srgbClr val="858585"/>
+                </a:solidFill>
+                <a:latin typeface="Consolas"/>
+              </a:rPr>
+              <a:t>8</a:t>
+            </a:r>
+          </a:p>
+          <a:p>
+            <a:pPr algn="r">
+              <a:spcAft>
+                <a:spcPts val="342"/>
+              </a:spcAft>
+            </a:pPr>
+            <a:r>
+              <a:rPr sz="1600" i="0" b="0">
+                <a:solidFill>
+                  <a:srgbClr val="858585"/>
+                </a:solidFill>
+                <a:latin typeface="Consolas"/>
+              </a:rPr>
+              <a:t>9</a:t>
+            </a:r>
+          </a:p>
+          <a:p>
+            <a:pPr algn="r">
+              <a:spcAft>
+                <a:spcPts val="342"/>
+              </a:spcAft>
+            </a:pPr>
+            <a:r>
+              <a:rPr sz="1600" i="0" b="0">
+                <a:solidFill>
+                  <a:srgbClr val="858585"/>
+                </a:solidFill>
+                <a:latin typeface="Consolas"/>
+              </a:rPr>
+              <a:t>10</a:t>
+            </a:r>
+          </a:p>
+          <a:p>
+            <a:pPr algn="r">
+              <a:spcAft>
+                <a:spcPts val="342"/>
+              </a:spcAft>
+            </a:pPr>
+            <a:r>
+              <a:rPr sz="1600" i="0" b="0">
+                <a:solidFill>
+                  <a:srgbClr val="858585"/>
+                </a:solidFill>
+                <a:latin typeface="Consolas"/>
+              </a:rPr>
+              <a:t>11</a:t>
+            </a:r>
+          </a:p>
+          <a:p>
+            <a:pPr algn="r">
+              <a:spcAft>
+                <a:spcPts val="342"/>
+              </a:spcAft>
+            </a:pPr>
+            <a:r>
+              <a:rPr sz="1600" i="0" b="0">
+                <a:solidFill>
+                  <a:srgbClr val="858585"/>
+                </a:solidFill>
+                <a:latin typeface="Consolas"/>
+              </a:rPr>
+              <a:t>12</a:t>
+            </a:r>
+          </a:p>
+        </p:txBody>
+      </p:sp>
+      <p:sp>
+        <p:nvSpPr>
+          <p:cNvPr id="12" name="TextBox 11"/>
+          <p:cNvSpPr txBox="1"/>
+          <p:nvPr/>
+        </p:nvSpPr>
+        <p:spPr>
+          <a:xfrm>
+            <a:off x="1188720" y="1719072"/>
+            <a:ext cx="10271455" cy="3578542"/>
+          </a:xfrm>
+          <a:prstGeom prst="rect">
+            <a:avLst/>
+          </a:prstGeom>
+          <a:noFill/>
+        </p:spPr>
+        <p:txBody>
+          <a:bodyPr wrap="square">
+            <a:spAutoFit/>
+          </a:bodyPr>
+          <a:lstStyle/>
+          <a:p>
             <a:pPr>
               <a:spcAft>
-                <a:spcPts val="407"/>
+                <a:spcPts val="342"/>
               </a:spcAft>
             </a:pPr>
             <a:r>
-              <a:rPr sz="1900" i="1" b="0">
+              <a:rPr sz="1600" i="1" b="0">
                 <a:solidFill>
                   <a:srgbClr val="6A9955"/>
                 </a:solidFill>
@@ -7125,11 +7340,11 @@
           <a:p>
             <a:pPr>
               <a:spcAft>
-                <a:spcPts val="407"/>
+                <a:spcPts val="342"/>
               </a:spcAft>
             </a:pPr>
             <a:r>
-              <a:rPr sz="1900" i="0" b="0">
+              <a:rPr sz="1600" i="0" b="0">
                 <a:solidFill>
                   <a:srgbClr val="D4D4D4"/>
                 </a:solidFill>
@@ -7138,7 +7353,7 @@
               <a:t>$ </a:t>
             </a:r>
             <a:r>
-              <a:rPr sz="1900" i="0" b="0">
+              <a:rPr sz="1600" i="0" b="0">
                 <a:solidFill>
                   <a:srgbClr val="D4D4D4"/>
                 </a:solidFill>
@@ -7147,7 +7362,7 @@
               <a:t>docker</a:t>
             </a:r>
             <a:r>
-              <a:rPr sz="1900" i="0" b="0">
+              <a:rPr sz="1600" i="0" b="0">
                 <a:solidFill>
                   <a:srgbClr val="D4D4D4"/>
                 </a:solidFill>
@@ -7156,7 +7371,7 @@
               <a:t> </a:t>
             </a:r>
             <a:r>
-              <a:rPr sz="1900" i="0" b="0">
+              <a:rPr sz="1600" i="0" b="0">
                 <a:solidFill>
                   <a:srgbClr val="D4D4D4"/>
                 </a:solidFill>
@@ -7165,7 +7380,7 @@
               <a:t>images</a:t>
             </a:r>
             <a:r>
-              <a:rPr sz="1900" i="0" b="0">
+              <a:rPr sz="1600" i="0" b="0">
                 <a:solidFill>
                   <a:srgbClr val="D4D4D4"/>
                 </a:solidFill>
@@ -7174,7 +7389,7 @@
               <a:t> </a:t>
             </a:r>
             <a:r>
-              <a:rPr sz="1900" i="0" b="0">
+              <a:rPr sz="1600" i="0" b="0">
                 <a:solidFill>
                   <a:srgbClr val="D4D4D4"/>
                 </a:solidFill>
@@ -7183,7 +7398,7 @@
               <a:t>turnos</a:t>
             </a:r>
             <a:r>
-              <a:rPr sz="1900" i="0" b="0">
+              <a:rPr sz="1600" i="0" b="0">
                 <a:solidFill>
                   <a:srgbClr val="D4D4D4"/>
                 </a:solidFill>
@@ -7192,7 +7407,7 @@
               <a:t>-</a:t>
             </a:r>
             <a:r>
-              <a:rPr sz="1900" i="0" b="0">
+              <a:rPr sz="1600" i="0" b="0">
                 <a:solidFill>
                   <a:srgbClr val="D4D4D4"/>
                 </a:solidFill>
@@ -7201,7 +7416,7 @@
               <a:t>api</a:t>
             </a:r>
             <a:r>
-              <a:rPr sz="1900" i="0" b="0">
+              <a:rPr sz="1600" i="0" b="0">
                 <a:solidFill>
                   <a:srgbClr val="D4D4D4"/>
                 </a:solidFill>
@@ -7210,7 +7425,7 @@
               <a:t> </a:t>
             </a:r>
             <a:r>
-              <a:rPr sz="1900" i="0" b="0">
+              <a:rPr sz="1600" i="0" b="0">
                 <a:solidFill>
                   <a:srgbClr val="D4D4D4"/>
                 </a:solidFill>
@@ -7222,11 +7437,11 @@
           <a:p>
             <a:pPr>
               <a:spcAft>
-                <a:spcPts val="407"/>
+                <a:spcPts val="342"/>
               </a:spcAft>
             </a:pPr>
             <a:r>
-              <a:rPr sz="1900" i="0" b="0">
+              <a:rPr sz="1600" i="0" b="0">
                 <a:solidFill>
                   <a:srgbClr val="D4D4D4"/>
                 </a:solidFill>
@@ -7235,7 +7450,7 @@
               <a:t>REPOSITORY</a:t>
             </a:r>
             <a:r>
-              <a:rPr sz="1900" i="0" b="0">
+              <a:rPr sz="1600" i="0" b="0">
                 <a:solidFill>
                   <a:srgbClr val="D4D4D4"/>
                 </a:solidFill>
@@ -7244,7 +7459,7 @@
               <a:t>      </a:t>
             </a:r>
             <a:r>
-              <a:rPr sz="1900" i="0" b="0">
+              <a:rPr sz="1600" i="0" b="0">
                 <a:solidFill>
                   <a:srgbClr val="D4D4D4"/>
                 </a:solidFill>
@@ -7253,7 +7468,7 @@
               <a:t>TAG</a:t>
             </a:r>
             <a:r>
-              <a:rPr sz="1900" i="0" b="0">
+              <a:rPr sz="1600" i="0" b="0">
                 <a:solidFill>
                   <a:srgbClr val="D4D4D4"/>
                 </a:solidFill>
@@ -7262,7 +7477,7 @@
               <a:t>     </a:t>
             </a:r>
             <a:r>
-              <a:rPr sz="1900" i="0" b="0">
+              <a:rPr sz="1600" i="0" b="0">
                 <a:solidFill>
                   <a:srgbClr val="D4D4D4"/>
                 </a:solidFill>
@@ -7274,11 +7489,11 @@
           <a:p>
             <a:pPr>
               <a:spcAft>
-                <a:spcPts val="407"/>
+                <a:spcPts val="342"/>
               </a:spcAft>
             </a:pPr>
             <a:r>
-              <a:rPr sz="1900" i="0" b="0">
+              <a:rPr sz="1600" i="0" b="0">
                 <a:solidFill>
                   <a:srgbClr val="D4D4D4"/>
                 </a:solidFill>
@@ -7287,7 +7502,7 @@
               <a:t>turnos</a:t>
             </a:r>
             <a:r>
-              <a:rPr sz="1900" i="0" b="0">
+              <a:rPr sz="1600" i="0" b="0">
                 <a:solidFill>
                   <a:srgbClr val="D4D4D4"/>
                 </a:solidFill>
@@ -7296,7 +7511,7 @@
               <a:t>-</a:t>
             </a:r>
             <a:r>
-              <a:rPr sz="1900" i="0" b="0">
+              <a:rPr sz="1600" i="0" b="0">
                 <a:solidFill>
                   <a:srgbClr val="D4D4D4"/>
                 </a:solidFill>
@@ -7305,7 +7520,7 @@
               <a:t>api</a:t>
             </a:r>
             <a:r>
-              <a:rPr sz="1900" i="0" b="0">
+              <a:rPr sz="1600" i="0" b="0">
                 <a:solidFill>
                   <a:srgbClr val="D4D4D4"/>
                 </a:solidFill>
@@ -7314,7 +7529,7 @@
               <a:t>   </a:t>
             </a:r>
             <a:r>
-              <a:rPr sz="1900" i="0" b="0">
+              <a:rPr sz="1600" i="0" b="0">
                 <a:solidFill>
                   <a:srgbClr val="B5CEA8"/>
                 </a:solidFill>
@@ -7323,7 +7538,7 @@
               <a:t>0.1</a:t>
             </a:r>
             <a:r>
-              <a:rPr sz="1900" i="0" b="0">
+              <a:rPr sz="1600" i="0" b="0">
                 <a:solidFill>
                   <a:srgbClr val="D4D4D4"/>
                 </a:solidFill>
@@ -7332,7 +7547,7 @@
               <a:t>.</a:t>
             </a:r>
             <a:r>
-              <a:rPr sz="1900" i="0" b="0">
+              <a:rPr sz="1600" i="0" b="0">
                 <a:solidFill>
                   <a:srgbClr val="B5CEA8"/>
                 </a:solidFill>
@@ -7341,7 +7556,7 @@
               <a:t>0</a:t>
             </a:r>
             <a:r>
-              <a:rPr sz="1900" i="0" b="0">
+              <a:rPr sz="1600" i="0" b="0">
                 <a:solidFill>
                   <a:srgbClr val="D4D4D4"/>
                 </a:solidFill>
@@ -7350,7 +7565,7 @@
               <a:t>   142</a:t>
             </a:r>
             <a:r>
-              <a:rPr sz="1900" i="0" b="0">
+              <a:rPr sz="1600" i="0" b="0">
                 <a:solidFill>
                   <a:srgbClr val="D4D4D4"/>
                 </a:solidFill>
@@ -7362,11 +7577,11 @@
           <a:p>
             <a:pPr>
               <a:spcAft>
-                <a:spcPts val="407"/>
+                <a:spcPts val="342"/>
               </a:spcAft>
             </a:pPr>
             <a:r>
-              <a:rPr sz="1900" i="0" b="0">
+              <a:rPr sz="1600" i="0" b="0">
                 <a:solidFill>
                   <a:srgbClr val="D4D4D4"/>
                 </a:solidFill>
@@ -7378,11 +7593,11 @@
           <a:p>
             <a:pPr>
               <a:spcAft>
-                <a:spcPts val="407"/>
+                <a:spcPts val="342"/>
               </a:spcAft>
             </a:pPr>
             <a:r>
-              <a:rPr sz="1900" i="0" b="0">
+              <a:rPr sz="1600" i="0" b="0">
                 <a:solidFill>
                   <a:srgbClr val="D4D4D4"/>
                 </a:solidFill>
@@ -7391,7 +7606,7 @@
               <a:t>$ </a:t>
             </a:r>
             <a:r>
-              <a:rPr sz="1900" i="0" b="0">
+              <a:rPr sz="1600" i="0" b="0">
                 <a:solidFill>
                   <a:srgbClr val="D4D4D4"/>
                 </a:solidFill>
@@ -7400,7 +7615,7 @@
               <a:t>docker</a:t>
             </a:r>
             <a:r>
-              <a:rPr sz="1900" i="0" b="0">
+              <a:rPr sz="1600" i="0" b="0">
                 <a:solidFill>
                   <a:srgbClr val="D4D4D4"/>
                 </a:solidFill>
@@ -7409,7 +7624,7 @@
               <a:t> </a:t>
             </a:r>
             <a:r>
-              <a:rPr sz="1900" i="0" b="0">
+              <a:rPr sz="1600" i="0" b="0">
                 <a:solidFill>
                   <a:srgbClr val="D4D4D4"/>
                 </a:solidFill>
@@ -7418,7 +7633,7 @@
               <a:t>ps</a:t>
             </a:r>
             <a:r>
-              <a:rPr sz="1900" i="0" b="0">
+              <a:rPr sz="1600" i="0" b="0">
                 <a:solidFill>
                   <a:srgbClr val="D4D4D4"/>
                 </a:solidFill>
@@ -7427,7 +7642,7 @@
               <a:t> </a:t>
             </a:r>
             <a:r>
-              <a:rPr sz="1900" i="0" b="0">
+              <a:rPr sz="1600" i="0" b="0">
                 <a:solidFill>
                   <a:srgbClr val="D4D4D4"/>
                 </a:solidFill>
@@ -7439,11 +7654,11 @@
           <a:p>
             <a:pPr>
               <a:spcAft>
-                <a:spcPts val="407"/>
+                <a:spcPts val="342"/>
               </a:spcAft>
             </a:pPr>
             <a:r>
-              <a:rPr sz="1900" i="0" b="0">
+              <a:rPr sz="1600" i="0" b="0">
                 <a:solidFill>
                   <a:srgbClr val="D4D4D4"/>
                 </a:solidFill>
@@ -7452,7 +7667,7 @@
               <a:t>NAMES</a:t>
             </a:r>
             <a:r>
-              <a:rPr sz="1900" i="0" b="0">
+              <a:rPr sz="1600" i="0" b="0">
                 <a:solidFill>
                   <a:srgbClr val="D4D4D4"/>
                 </a:solidFill>
@@ -7461,7 +7676,7 @@
               <a:t>   </a:t>
             </a:r>
             <a:r>
-              <a:rPr sz="1900" i="0" b="0">
+              <a:rPr sz="1600" i="0" b="0">
                 <a:solidFill>
                   <a:srgbClr val="D4D4D4"/>
                 </a:solidFill>
@@ -7470,7 +7685,7 @@
               <a:t>STATUS</a:t>
             </a:r>
             <a:r>
-              <a:rPr sz="1900" i="0" b="0">
+              <a:rPr sz="1600" i="0" b="0">
                 <a:solidFill>
                   <a:srgbClr val="D4D4D4"/>
                 </a:solidFill>
@@ -7479,7 +7694,7 @@
               <a:t>         </a:t>
             </a:r>
             <a:r>
-              <a:rPr sz="1900" i="0" b="0">
+              <a:rPr sz="1600" i="0" b="0">
                 <a:solidFill>
                   <a:srgbClr val="D4D4D4"/>
                 </a:solidFill>
@@ -7491,11 +7706,11 @@
           <a:p>
             <a:pPr>
               <a:spcAft>
-                <a:spcPts val="407"/>
+                <a:spcPts val="342"/>
               </a:spcAft>
             </a:pPr>
             <a:r>
-              <a:rPr sz="1900" i="0" b="0">
+              <a:rPr sz="1600" i="0" b="0">
                 <a:solidFill>
                   <a:srgbClr val="D4D4D4"/>
                 </a:solidFill>
@@ -7504,7 +7719,7 @@
               <a:t>api</a:t>
             </a:r>
             <a:r>
-              <a:rPr sz="1900" i="0" b="0">
+              <a:rPr sz="1600" i="0" b="0">
                 <a:solidFill>
                   <a:srgbClr val="D4D4D4"/>
                 </a:solidFill>
@@ -7513,7 +7728,7 @@
               <a:t>     </a:t>
             </a:r>
             <a:r>
-              <a:rPr sz="1900" i="0" b="0">
+              <a:rPr sz="1600" i="0" b="0">
                 <a:solidFill>
                   <a:srgbClr val="D4D4D4"/>
                 </a:solidFill>
@@ -7522,7 +7737,7 @@
               <a:t>Up</a:t>
             </a:r>
             <a:r>
-              <a:rPr sz="1900" i="0" b="0">
+              <a:rPr sz="1600" i="0" b="0">
                 <a:solidFill>
                   <a:srgbClr val="D4D4D4"/>
                 </a:solidFill>
@@ -7531,7 +7746,7 @@
               <a:t> </a:t>
             </a:r>
             <a:r>
-              <a:rPr sz="1900" i="0" b="0">
+              <a:rPr sz="1600" i="0" b="0">
                 <a:solidFill>
                   <a:srgbClr val="B5CEA8"/>
                 </a:solidFill>
@@ -7540,7 +7755,7 @@
               <a:t>2</a:t>
             </a:r>
             <a:r>
-              <a:rPr sz="1900" i="0" b="0">
+              <a:rPr sz="1600" i="0" b="0">
                 <a:solidFill>
                   <a:srgbClr val="D4D4D4"/>
                 </a:solidFill>
@@ -7549,7 +7764,7 @@
               <a:t> </a:t>
             </a:r>
             <a:r>
-              <a:rPr sz="1900" i="0" b="0">
+              <a:rPr sz="1600" i="0" b="0">
                 <a:solidFill>
                   <a:srgbClr val="D4D4D4"/>
                 </a:solidFill>
@@ -7558,7 +7773,7 @@
               <a:t>minutes</a:t>
             </a:r>
             <a:r>
-              <a:rPr sz="1900" i="0" b="0">
+              <a:rPr sz="1600" i="0" b="0">
                 <a:solidFill>
                   <a:srgbClr val="D4D4D4"/>
                 </a:solidFill>
@@ -7567,7 +7782,7 @@
               <a:t>   </a:t>
             </a:r>
             <a:r>
-              <a:rPr sz="1900" i="0" b="0">
+              <a:rPr sz="1600" i="0" b="0">
                 <a:solidFill>
                   <a:srgbClr val="B5CEA8"/>
                 </a:solidFill>
@@ -7576,7 +7791,7 @@
               <a:t>0.0</a:t>
             </a:r>
             <a:r>
-              <a:rPr sz="1900" i="0" b="0">
+              <a:rPr sz="1600" i="0" b="0">
                 <a:solidFill>
                   <a:srgbClr val="D4D4D4"/>
                 </a:solidFill>
@@ -7585,7 +7800,7 @@
               <a:t>.</a:t>
             </a:r>
             <a:r>
-              <a:rPr sz="1900" i="0" b="0">
+              <a:rPr sz="1600" i="0" b="0">
                 <a:solidFill>
                   <a:srgbClr val="B5CEA8"/>
                 </a:solidFill>
@@ -7594,7 +7809,7 @@
               <a:t>0.0</a:t>
             </a:r>
             <a:r>
-              <a:rPr sz="1900" i="0" b="0">
+              <a:rPr sz="1600" i="0" b="0">
                 <a:solidFill>
                   <a:srgbClr val="D4D4D4"/>
                 </a:solidFill>
@@ -7603,7 +7818,7 @@
               <a:t>:</a:t>
             </a:r>
             <a:r>
-              <a:rPr sz="1900" i="0" b="0">
+              <a:rPr sz="1600" i="0" b="0">
                 <a:solidFill>
                   <a:srgbClr val="B5CEA8"/>
                 </a:solidFill>
@@ -7612,7 +7827,7 @@
               <a:t>8081</a:t>
             </a:r>
             <a:r>
-              <a:rPr sz="1900" i="0" b="0">
+              <a:rPr sz="1600" i="0" b="0">
                 <a:solidFill>
                   <a:srgbClr val="D4D4D4"/>
                 </a:solidFill>
@@ -7621,7 +7836,7 @@
               <a:t>-&gt;</a:t>
             </a:r>
             <a:r>
-              <a:rPr sz="1900" i="0" b="0">
+              <a:rPr sz="1600" i="0" b="0">
                 <a:solidFill>
                   <a:srgbClr val="B5CEA8"/>
                 </a:solidFill>
@@ -7630,7 +7845,7 @@
               <a:t>8080</a:t>
             </a:r>
             <a:r>
-              <a:rPr sz="1900" i="0" b="0">
+              <a:rPr sz="1600" i="0" b="0">
                 <a:solidFill>
                   <a:srgbClr val="D4D4D4"/>
                 </a:solidFill>
@@ -7639,7 +7854,7 @@
               <a:t>/</a:t>
             </a:r>
             <a:r>
-              <a:rPr sz="1900" i="0" b="0">
+              <a:rPr sz="1600" i="0" b="0">
                 <a:solidFill>
                   <a:srgbClr val="D4D4D4"/>
                 </a:solidFill>
@@ -7651,11 +7866,11 @@
           <a:p>
             <a:pPr>
               <a:spcAft>
-                <a:spcPts val="407"/>
+                <a:spcPts val="342"/>
               </a:spcAft>
             </a:pPr>
             <a:r>
-              <a:rPr sz="1900" i="0" b="0">
+              <a:rPr sz="1600" i="0" b="0">
                 <a:solidFill>
                   <a:srgbClr val="D4D4D4"/>
                 </a:solidFill>
@@ -7667,11 +7882,11 @@
           <a:p>
             <a:pPr>
               <a:spcAft>
-                <a:spcPts val="407"/>
+                <a:spcPts val="342"/>
               </a:spcAft>
             </a:pPr>
             <a:r>
-              <a:rPr sz="1900" i="1" b="0">
+              <a:rPr sz="1600" i="1" b="0">
                 <a:solidFill>
                   <a:srgbClr val="6A9955"/>
                 </a:solidFill>
@@ -7683,11 +7898,11 @@
           <a:p>
             <a:pPr>
               <a:spcAft>
-                <a:spcPts val="407"/>
+                <a:spcPts val="342"/>
               </a:spcAft>
             </a:pPr>
             <a:r>
-              <a:rPr sz="1900" i="0" b="0">
+              <a:rPr sz="1600" i="0" b="0">
                 <a:solidFill>
                   <a:srgbClr val="D4D4D4"/>
                 </a:solidFill>
@@ -7696,7 +7911,7 @@
               <a:t>$ </a:t>
             </a:r>
             <a:r>
-              <a:rPr sz="1900" i="0" b="0">
+              <a:rPr sz="1600" i="0" b="0">
                 <a:solidFill>
                   <a:srgbClr val="D4D4D4"/>
                 </a:solidFill>
@@ -7705,7 +7920,7 @@
               <a:t>docker</a:t>
             </a:r>
             <a:r>
-              <a:rPr sz="1900" i="0" b="0">
+              <a:rPr sz="1600" i="0" b="0">
                 <a:solidFill>
                   <a:srgbClr val="D4D4D4"/>
                 </a:solidFill>
@@ -7714,7 +7929,7 @@
               <a:t> </a:t>
             </a:r>
             <a:r>
-              <a:rPr sz="1900" i="0" b="0">
+              <a:rPr sz="1600" i="0" b="0">
                 <a:solidFill>
                   <a:srgbClr val="D4D4D4"/>
                 </a:solidFill>
@@ -7723,7 +7938,7 @@
               <a:t>run</a:t>
             </a:r>
             <a:r>
-              <a:rPr sz="1900" i="0" b="0">
+              <a:rPr sz="1600" i="0" b="0">
                 <a:solidFill>
                   <a:srgbClr val="D4D4D4"/>
                 </a:solidFill>
@@ -7732,7 +7947,7 @@
               <a:t> -</a:t>
             </a:r>
             <a:r>
-              <a:rPr sz="1900" i="0" b="0">
+              <a:rPr sz="1600" i="0" b="0">
                 <a:solidFill>
                   <a:srgbClr val="D4D4D4"/>
                 </a:solidFill>
@@ -7741,7 +7956,7 @@
               <a:t>d</a:t>
             </a:r>
             <a:r>
-              <a:rPr sz="1900" i="0" b="0">
+              <a:rPr sz="1600" i="0" b="0">
                 <a:solidFill>
                   <a:srgbClr val="D4D4D4"/>
                 </a:solidFill>
@@ -7750,7 +7965,7 @@
               <a:t> </a:t>
             </a:r>
             <a:r>
-              <a:rPr sz="1900" i="0" b="0">
+              <a:rPr sz="1600" i="0" b="0">
                 <a:solidFill>
                   <a:srgbClr val="D4D4D4"/>
                 </a:solidFill>
@@ -7762,11 +7977,11 @@
           <a:p>
             <a:pPr>
               <a:spcAft>
-                <a:spcPts val="407"/>
+                <a:spcPts val="342"/>
               </a:spcAft>
             </a:pPr>
             <a:r>
-              <a:rPr sz="1900" i="0" b="0">
+              <a:rPr sz="1600" i="0" b="0">
                 <a:solidFill>
                   <a:srgbClr val="D4D4D4"/>
                 </a:solidFill>
@@ -7775,7 +7990,7 @@
               <a:t>$ </a:t>
             </a:r>
             <a:r>
-              <a:rPr sz="1900" i="0" b="0">
+              <a:rPr sz="1600" i="0" b="0">
                 <a:solidFill>
                   <a:srgbClr val="D4D4D4"/>
                 </a:solidFill>
@@ -7784,7 +7999,7 @@
               <a:t>docker</a:t>
             </a:r>
             <a:r>
-              <a:rPr sz="1900" i="0" b="0">
+              <a:rPr sz="1600" i="0" b="0">
                 <a:solidFill>
                   <a:srgbClr val="D4D4D4"/>
                 </a:solidFill>
@@ -7793,7 +8008,7 @@
               <a:t> </a:t>
             </a:r>
             <a:r>
-              <a:rPr sz="1900" i="0" b="0">
+              <a:rPr sz="1600" i="0" b="0">
                 <a:solidFill>
                   <a:srgbClr val="D4D4D4"/>
                 </a:solidFill>
@@ -7802,7 +8017,7 @@
               <a:t>run</a:t>
             </a:r>
             <a:r>
-              <a:rPr sz="1900" i="0" b="0">
+              <a:rPr sz="1600" i="0" b="0">
                 <a:solidFill>
                   <a:srgbClr val="D4D4D4"/>
                 </a:solidFill>
@@ -7811,7 +8026,7 @@
               <a:t> -</a:t>
             </a:r>
             <a:r>
-              <a:rPr sz="1900" i="0" b="0">
+              <a:rPr sz="1600" i="0" b="0">
                 <a:solidFill>
                   <a:srgbClr val="D4D4D4"/>
                 </a:solidFill>
@@ -7820,7 +8035,7 @@
               <a:t>d</a:t>
             </a:r>
             <a:r>
-              <a:rPr sz="1900" i="0" b="0">
+              <a:rPr sz="1600" i="0" b="0">
                 <a:solidFill>
                   <a:srgbClr val="D4D4D4"/>
                 </a:solidFill>
@@ -7829,7 +8044,7 @@
               <a:t> </a:t>
             </a:r>
             <a:r>
-              <a:rPr sz="1900" i="0" b="0">
+              <a:rPr sz="1600" i="0" b="0">
                 <a:solidFill>
                   <a:srgbClr val="D4D4D4"/>
                 </a:solidFill>
@@ -7842,7 +8057,7 @@
       </p:sp>
       <p:sp>
         <p:nvSpPr>
-          <p:cNvPr id="12" name="TextBox 11"/>
+          <p:cNvPr id="13" name="TextBox 12"/>
           <p:cNvSpPr txBox="1"/>
           <p:nvPr/>
         </p:nvSpPr>
